--- a/content/docs/theory-analysis/kubernetes-nvidia-device-plugin/images/images.pptx
+++ b/content/docs/theory-analysis/kubernetes-nvidia-device-plugin/images/images.pptx
@@ -217,7 +217,7 @@
           <a:p>
             <a:fld id="{6CD5550B-26C4-49A9-A5BA-636EF7BE6CE9}" type="datetimeFigureOut">
               <a:rPr lang="ko-KR" altLang="en-US" smtClean="0"/>
-              <a:t>2026. 2. 26.</a:t>
+              <a:t>2026. 2. 28.</a:t>
             </a:fld>
             <a:endParaRPr lang="ko-KR" altLang="en-US"/>
           </a:p>
@@ -747,7 +747,7 @@
           <a:p>
             <a:fld id="{FB30EDBD-1C2D-4C1E-B459-B60219FAB484}" type="datetimeFigureOut">
               <a:rPr lang="ko-KR" altLang="en-US" smtClean="0"/>
-              <a:t>2026. 2. 27.</a:t>
+              <a:t>2026. 2. 28.</a:t>
             </a:fld>
             <a:endParaRPr lang="ko-KR" altLang="en-US"/>
           </a:p>
@@ -910,7 +910,7 @@
           <a:p>
             <a:fld id="{FB30EDBD-1C2D-4C1E-B459-B60219FAB484}" type="datetimeFigureOut">
               <a:rPr lang="ko-KR" altLang="en-US" smtClean="0"/>
-              <a:t>2026. 2. 27.</a:t>
+              <a:t>2026. 2. 28.</a:t>
             </a:fld>
             <a:endParaRPr lang="ko-KR" altLang="en-US"/>
           </a:p>
@@ -1083,7 +1083,7 @@
           <a:p>
             <a:fld id="{FB30EDBD-1C2D-4C1E-B459-B60219FAB484}" type="datetimeFigureOut">
               <a:rPr lang="ko-KR" altLang="en-US" smtClean="0"/>
-              <a:t>2026. 2. 27.</a:t>
+              <a:t>2026. 2. 28.</a:t>
             </a:fld>
             <a:endParaRPr lang="ko-KR" altLang="en-US"/>
           </a:p>
@@ -1246,7 +1246,7 @@
           <a:p>
             <a:fld id="{FB30EDBD-1C2D-4C1E-B459-B60219FAB484}" type="datetimeFigureOut">
               <a:rPr lang="ko-KR" altLang="en-US" smtClean="0"/>
-              <a:t>2026. 2. 26.</a:t>
+              <a:t>2026. 2. 28.</a:t>
             </a:fld>
             <a:endParaRPr lang="ko-KR" altLang="en-US"/>
           </a:p>
@@ -1486,7 +1486,7 @@
           <a:p>
             <a:fld id="{FB30EDBD-1C2D-4C1E-B459-B60219FAB484}" type="datetimeFigureOut">
               <a:rPr lang="ko-KR" altLang="en-US" smtClean="0"/>
-              <a:t>2026. 2. 27.</a:t>
+              <a:t>2026. 2. 28.</a:t>
             </a:fld>
             <a:endParaRPr lang="ko-KR" altLang="en-US"/>
           </a:p>
@@ -1766,7 +1766,7 @@
           <a:p>
             <a:fld id="{FB30EDBD-1C2D-4C1E-B459-B60219FAB484}" type="datetimeFigureOut">
               <a:rPr lang="ko-KR" altLang="en-US" smtClean="0"/>
-              <a:t>2026. 2. 27.</a:t>
+              <a:t>2026. 2. 28.</a:t>
             </a:fld>
             <a:endParaRPr lang="ko-KR" altLang="en-US"/>
           </a:p>
@@ -2180,7 +2180,7 @@
           <a:p>
             <a:fld id="{FB30EDBD-1C2D-4C1E-B459-B60219FAB484}" type="datetimeFigureOut">
               <a:rPr lang="ko-KR" altLang="en-US" smtClean="0"/>
-              <a:t>2026. 2. 27.</a:t>
+              <a:t>2026. 2. 28.</a:t>
             </a:fld>
             <a:endParaRPr lang="ko-KR" altLang="en-US"/>
           </a:p>
@@ -2292,7 +2292,7 @@
           <a:p>
             <a:fld id="{FB30EDBD-1C2D-4C1E-B459-B60219FAB484}" type="datetimeFigureOut">
               <a:rPr lang="ko-KR" altLang="en-US" smtClean="0"/>
-              <a:t>2026. 2. 27.</a:t>
+              <a:t>2026. 2. 28.</a:t>
             </a:fld>
             <a:endParaRPr lang="ko-KR" altLang="en-US"/>
           </a:p>
@@ -2382,7 +2382,7 @@
           <a:p>
             <a:fld id="{FB30EDBD-1C2D-4C1E-B459-B60219FAB484}" type="datetimeFigureOut">
               <a:rPr lang="ko-KR" altLang="en-US" smtClean="0"/>
-              <a:t>2026. 2. 26.</a:t>
+              <a:t>2026. 2. 28.</a:t>
             </a:fld>
             <a:endParaRPr lang="ko-KR" altLang="en-US"/>
           </a:p>
@@ -2652,7 +2652,7 @@
           <a:p>
             <a:fld id="{FB30EDBD-1C2D-4C1E-B459-B60219FAB484}" type="datetimeFigureOut">
               <a:rPr lang="ko-KR" altLang="en-US" smtClean="0"/>
-              <a:t>2026. 2. 27.</a:t>
+              <a:t>2026. 2. 28.</a:t>
             </a:fld>
             <a:endParaRPr lang="ko-KR" altLang="en-US"/>
           </a:p>
@@ -2899,7 +2899,7 @@
           <a:p>
             <a:fld id="{FB30EDBD-1C2D-4C1E-B459-B60219FAB484}" type="datetimeFigureOut">
               <a:rPr lang="ko-KR" altLang="en-US" smtClean="0"/>
-              <a:t>2026. 2. 27.</a:t>
+              <a:t>2026. 2. 28.</a:t>
             </a:fld>
             <a:endParaRPr lang="ko-KR" altLang="en-US"/>
           </a:p>
@@ -3105,7 +3105,7 @@
           <a:p>
             <a:fld id="{FB30EDBD-1C2D-4C1E-B459-B60219FAB484}" type="datetimeFigureOut">
               <a:rPr lang="ko-KR" altLang="en-US" smtClean="0"/>
-              <a:t>2026. 2. 26.</a:t>
+              <a:t>2026. 2. 28.</a:t>
             </a:fld>
             <a:endParaRPr lang="ko-KR" altLang="en-US"/>
           </a:p>
@@ -5751,8 +5751,8 @@
         </p:nvSpPr>
         <p:spPr>
           <a:xfrm>
-            <a:off x="5925884" y="915566"/>
-            <a:ext cx="1665290" cy="1790668"/>
+            <a:off x="4452121" y="843557"/>
+            <a:ext cx="1665290" cy="1709575"/>
           </a:xfrm>
           <a:prstGeom prst="roundRect">
             <a:avLst>
@@ -5781,10 +5781,10 @@
           <a:p>
             <a:pPr algn="ctr"/>
             <a:r>
-              <a:rPr lang="en-US" altLang="ko-KR" sz="1200" b="1"/>
+              <a:rPr lang="en-US" altLang="ko-KR" sz="1000" b="1"/>
               <a:t>Pod B</a:t>
             </a:r>
-            <a:endParaRPr lang="ko-KR" altLang="en-US" sz="1200" b="1" dirty="0">
+            <a:endParaRPr lang="ko-KR" altLang="en-US" sz="1000" b="1" dirty="0">
               <a:solidFill>
                 <a:schemeClr val="accent2">
                   <a:lumMod val="75000"/>
@@ -5808,8 +5808,8 @@
         </p:nvSpPr>
         <p:spPr>
           <a:xfrm>
-            <a:off x="1552826" y="915566"/>
-            <a:ext cx="4092354" cy="1790668"/>
+            <a:off x="79063" y="843557"/>
+            <a:ext cx="4092354" cy="1709575"/>
           </a:xfrm>
           <a:prstGeom prst="roundRect">
             <a:avLst>
@@ -5838,10 +5838,10 @@
           <a:p>
             <a:pPr algn="ctr"/>
             <a:r>
-              <a:rPr lang="en-US" altLang="ko-KR" sz="1200" b="1"/>
+              <a:rPr lang="en-US" altLang="ko-KR" sz="1000" b="1"/>
               <a:t>Pod A</a:t>
             </a:r>
-            <a:endParaRPr lang="ko-KR" altLang="en-US" sz="1200" b="1" dirty="0">
+            <a:endParaRPr lang="ko-KR" altLang="en-US" sz="1000" b="1" dirty="0">
               <a:solidFill>
                 <a:schemeClr val="accent2">
                   <a:lumMod val="75000"/>
@@ -5865,7 +5865,7 @@
         </p:nvSpPr>
         <p:spPr>
           <a:xfrm>
-            <a:off x="1557988" y="3660955"/>
+            <a:off x="84225" y="3507854"/>
             <a:ext cx="6033186" cy="976265"/>
           </a:xfrm>
           <a:prstGeom prst="roundRect">
@@ -5895,10 +5895,10 @@
           <a:p>
             <a:pPr algn="ctr"/>
             <a:r>
-              <a:rPr lang="en-US" altLang="ko-KR" sz="1200" b="1"/>
+              <a:rPr lang="en-US" altLang="ko-KR" sz="1000" b="1"/>
               <a:t>Host Hardware</a:t>
             </a:r>
-            <a:endParaRPr lang="en-US" altLang="ko-KR" sz="1200" b="1" dirty="0"/>
+            <a:endParaRPr lang="en-US" altLang="ko-KR" sz="1000" b="1" dirty="0"/>
           </a:p>
         </p:txBody>
       </p:sp>
@@ -5916,7 +5916,7 @@
         </p:nvSpPr>
         <p:spPr>
           <a:xfrm>
-            <a:off x="1552826" y="2812111"/>
+            <a:off x="79063" y="2659010"/>
             <a:ext cx="6043510" cy="855136"/>
           </a:xfrm>
           <a:prstGeom prst="roundRect">
@@ -5946,10 +5946,10 @@
           <a:p>
             <a:pPr algn="ctr"/>
             <a:r>
-              <a:rPr lang="en-US" altLang="ko-KR" sz="1200" b="1"/>
+              <a:rPr lang="en-US" altLang="ko-KR" sz="1000" b="1"/>
               <a:t>Host Kernel</a:t>
             </a:r>
-            <a:endParaRPr lang="en-US" altLang="ko-KR" sz="1200" b="1" dirty="0"/>
+            <a:endParaRPr lang="en-US" altLang="ko-KR" sz="1000" b="1" dirty="0"/>
           </a:p>
         </p:txBody>
       </p:sp>
@@ -5967,7 +5967,7 @@
         </p:nvSpPr>
         <p:spPr>
           <a:xfrm>
-            <a:off x="2145948" y="3773124"/>
+            <a:off x="672185" y="3620023"/>
             <a:ext cx="1077331" cy="576064"/>
           </a:xfrm>
           <a:prstGeom prst="roundRect">
@@ -5997,17 +5997,17 @@
           <a:p>
             <a:pPr algn="ctr"/>
             <a:r>
-              <a:rPr lang="en-US" altLang="ko-KR" sz="1050"/>
+              <a:rPr lang="en-US" altLang="ko-KR" sz="1000"/>
               <a:t>NVIDIA</a:t>
             </a:r>
           </a:p>
           <a:p>
             <a:pPr algn="ctr"/>
             <a:r>
-              <a:rPr lang="en-US" altLang="ko-KR" sz="1050"/>
+              <a:rPr lang="en-US" altLang="ko-KR" sz="1000"/>
               <a:t>GPU 0</a:t>
             </a:r>
-            <a:endParaRPr lang="en-US" altLang="ko-KR" sz="1050" dirty="0"/>
+            <a:endParaRPr lang="en-US" altLang="ko-KR" sz="1000" dirty="0"/>
           </a:p>
         </p:txBody>
       </p:sp>
@@ -6025,7 +6025,7 @@
         </p:nvSpPr>
         <p:spPr>
           <a:xfrm>
-            <a:off x="3405927" y="3773124"/>
+            <a:off x="1932164" y="3620023"/>
             <a:ext cx="1077331" cy="576064"/>
           </a:xfrm>
           <a:prstGeom prst="roundRect">
@@ -6055,17 +6055,17 @@
           <a:p>
             <a:pPr algn="ctr"/>
             <a:r>
-              <a:rPr lang="en-US" altLang="ko-KR" sz="1050"/>
+              <a:rPr lang="en-US" altLang="ko-KR" sz="1000"/>
               <a:t>NVIDIA</a:t>
             </a:r>
           </a:p>
           <a:p>
             <a:pPr algn="ctr"/>
             <a:r>
-              <a:rPr lang="en-US" altLang="ko-KR" sz="1050"/>
+              <a:rPr lang="en-US" altLang="ko-KR" sz="1000"/>
               <a:t>GPU 1</a:t>
             </a:r>
-            <a:endParaRPr lang="en-US" altLang="ko-KR" sz="1050" dirty="0"/>
+            <a:endParaRPr lang="en-US" altLang="ko-KR" sz="1000" dirty="0"/>
           </a:p>
         </p:txBody>
       </p:sp>
@@ -6083,7 +6083,7 @@
         </p:nvSpPr>
         <p:spPr>
           <a:xfrm>
-            <a:off x="4665905" y="3773124"/>
+            <a:off x="3192142" y="3620023"/>
             <a:ext cx="1077331" cy="576064"/>
           </a:xfrm>
           <a:prstGeom prst="roundRect">
@@ -6113,17 +6113,17 @@
           <a:p>
             <a:pPr algn="ctr"/>
             <a:r>
-              <a:rPr lang="en-US" altLang="ko-KR" sz="1050"/>
+              <a:rPr lang="en-US" altLang="ko-KR" sz="1000"/>
               <a:t>NVIDIA</a:t>
             </a:r>
           </a:p>
           <a:p>
             <a:pPr algn="ctr"/>
             <a:r>
-              <a:rPr lang="en-US" altLang="ko-KR" sz="1050"/>
+              <a:rPr lang="en-US" altLang="ko-KR" sz="1000"/>
               <a:t>GPU 2</a:t>
             </a:r>
-            <a:endParaRPr lang="en-US" altLang="ko-KR" sz="1050" dirty="0"/>
+            <a:endParaRPr lang="en-US" altLang="ko-KR" sz="1000" dirty="0"/>
           </a:p>
         </p:txBody>
       </p:sp>
@@ -6141,7 +6141,7 @@
         </p:nvSpPr>
         <p:spPr>
           <a:xfrm>
-            <a:off x="5925884" y="3773124"/>
+            <a:off x="4452121" y="3620023"/>
             <a:ext cx="1077331" cy="576064"/>
           </a:xfrm>
           <a:prstGeom prst="roundRect">
@@ -6171,431 +6171,389 @@
           <a:p>
             <a:pPr algn="ctr"/>
             <a:r>
-              <a:rPr lang="en-US" altLang="ko-KR" sz="1050"/>
+              <a:rPr lang="en-US" altLang="ko-KR" sz="1000"/>
               <a:t>NVIDIA</a:t>
             </a:r>
           </a:p>
           <a:p>
             <a:pPr algn="ctr"/>
             <a:r>
-              <a:rPr lang="en-US" altLang="ko-KR" sz="1050"/>
+              <a:rPr lang="en-US" altLang="ko-KR" sz="1000"/>
               <a:t>GPU 3</a:t>
             </a:r>
-            <a:endParaRPr lang="en-US" altLang="ko-KR" sz="1050" dirty="0"/>
-          </a:p>
-        </p:txBody>
-      </p:sp>
-      <p:grpSp>
-        <p:nvGrpSpPr>
-          <p:cNvPr id="35" name="그룹 34">
+            <a:endParaRPr lang="en-US" altLang="ko-KR" sz="1000" dirty="0"/>
+          </a:p>
+        </p:txBody>
+      </p:sp>
+      <p:sp>
+        <p:nvSpPr>
+          <p:cNvPr id="8" name="사각형: 둥근 모서리 114">
             <a:extLst>
               <a:ext uri="{FF2B5EF4-FFF2-40B4-BE49-F238E27FC236}">
-                <a16:creationId xmlns:a16="http://schemas.microsoft.com/office/drawing/2014/main" id="{14688CBB-4223-4EF0-E19B-201209AB88C7}"/>
+                <a16:creationId xmlns:a16="http://schemas.microsoft.com/office/drawing/2014/main" id="{065A5E74-B440-BA3F-5A07-8CDCDFF2E427}"/>
               </a:ext>
             </a:extLst>
           </p:cNvPr>
-          <p:cNvGrpSpPr/>
+          <p:cNvSpPr/>
           <p:nvPr/>
-        </p:nvGrpSpPr>
-        <p:grpSpPr>
+        </p:nvSpPr>
+        <p:spPr>
           <a:xfrm>
-            <a:off x="1660058" y="1304366"/>
-            <a:ext cx="3886241" cy="1323618"/>
-            <a:chOff x="1660058" y="1297654"/>
-            <a:chExt cx="3886241" cy="1323618"/>
-          </a:xfrm>
-        </p:grpSpPr>
-        <p:sp>
-          <p:nvSpPr>
-            <p:cNvPr id="8" name="사각형: 둥근 모서리 114">
-              <a:extLst>
-                <a:ext uri="{FF2B5EF4-FFF2-40B4-BE49-F238E27FC236}">
-                  <a16:creationId xmlns:a16="http://schemas.microsoft.com/office/drawing/2014/main" id="{065A5E74-B440-BA3F-5A07-8CDCDFF2E427}"/>
-                </a:ext>
-              </a:extLst>
-            </p:cNvPr>
-            <p:cNvSpPr/>
-            <p:nvPr/>
-          </p:nvSpPr>
-          <p:spPr>
-            <a:xfrm>
-              <a:off x="1660058" y="1303317"/>
-              <a:ext cx="1276737" cy="1317955"/>
-            </a:xfrm>
-            <a:prstGeom prst="roundRect">
-              <a:avLst>
-                <a:gd name="adj" fmla="val 6774"/>
-              </a:avLst>
-            </a:prstGeom>
-            <a:ln w="12700"/>
-          </p:spPr>
-          <p:style>
-            <a:lnRef idx="2">
-              <a:schemeClr val="dk1"/>
-            </a:lnRef>
-            <a:fillRef idx="1">
-              <a:schemeClr val="lt1"/>
-            </a:fillRef>
-            <a:effectRef idx="0">
-              <a:schemeClr val="dk1"/>
-            </a:effectRef>
-            <a:fontRef idx="minor">
-              <a:schemeClr val="dk1"/>
-            </a:fontRef>
-          </p:style>
-          <p:txBody>
-            <a:bodyPr rtlCol="0" anchor="t"/>
-            <a:lstStyle/>
-            <a:p>
-              <a:pPr algn="ctr"/>
-              <a:r>
-                <a:rPr lang="en-US" altLang="ko-KR" sz="1200" b="1"/>
-                <a:t>Container A</a:t>
-              </a:r>
-              <a:endParaRPr lang="ko-KR" altLang="en-US" sz="1200" b="1" dirty="0">
-                <a:solidFill>
-                  <a:schemeClr val="accent2">
-                    <a:lumMod val="75000"/>
-                  </a:schemeClr>
-                </a:solidFill>
-              </a:endParaRPr>
-            </a:p>
-          </p:txBody>
-        </p:sp>
-        <p:sp>
-          <p:nvSpPr>
-            <p:cNvPr id="9" name="사각형: 둥근 모서리 114">
-              <a:extLst>
-                <a:ext uri="{FF2B5EF4-FFF2-40B4-BE49-F238E27FC236}">
-                  <a16:creationId xmlns:a16="http://schemas.microsoft.com/office/drawing/2014/main" id="{769415EB-0A2D-50D7-44F6-1F81A018E10C}"/>
-                </a:ext>
-              </a:extLst>
-            </p:cNvPr>
-            <p:cNvSpPr/>
-            <p:nvPr/>
-          </p:nvSpPr>
-          <p:spPr>
-            <a:xfrm>
-              <a:off x="1747792" y="2137408"/>
-              <a:ext cx="1099999" cy="396044"/>
-            </a:xfrm>
-            <a:prstGeom prst="roundRect">
-              <a:avLst>
-                <a:gd name="adj" fmla="val 7242"/>
-              </a:avLst>
-            </a:prstGeom>
-            <a:ln w="12700"/>
-          </p:spPr>
-          <p:style>
-            <a:lnRef idx="2">
-              <a:schemeClr val="dk1"/>
-            </a:lnRef>
-            <a:fillRef idx="1">
-              <a:schemeClr val="lt1"/>
-            </a:fillRef>
-            <a:effectRef idx="0">
-              <a:schemeClr val="dk1"/>
-            </a:effectRef>
-            <a:fontRef idx="minor">
-              <a:schemeClr val="dk1"/>
-            </a:fontRef>
-          </p:style>
-          <p:txBody>
-            <a:bodyPr rtlCol="0" anchor="ctr"/>
-            <a:lstStyle/>
-            <a:p>
-              <a:pPr algn="ctr"/>
-              <a:r>
-                <a:rPr lang="en-US" altLang="ko-KR" sz="1050"/>
-                <a:t>/dev/nvidia0</a:t>
-              </a:r>
-              <a:endParaRPr lang="en-US" altLang="ko-KR" sz="1050" dirty="0"/>
-            </a:p>
-          </p:txBody>
-        </p:sp>
-        <p:sp>
-          <p:nvSpPr>
-            <p:cNvPr id="11" name="사각형: 둥근 모서리 114">
-              <a:extLst>
-                <a:ext uri="{FF2B5EF4-FFF2-40B4-BE49-F238E27FC236}">
-                  <a16:creationId xmlns:a16="http://schemas.microsoft.com/office/drawing/2014/main" id="{A5B1B74D-0B82-73B1-5F00-44CC5F744F4A}"/>
-                </a:ext>
-              </a:extLst>
-            </p:cNvPr>
-            <p:cNvSpPr/>
-            <p:nvPr/>
-          </p:nvSpPr>
-          <p:spPr>
-            <a:xfrm>
-              <a:off x="1747792" y="1651354"/>
-              <a:ext cx="1099999" cy="396044"/>
-            </a:xfrm>
-            <a:prstGeom prst="roundRect">
-              <a:avLst>
-                <a:gd name="adj" fmla="val 7242"/>
-              </a:avLst>
-            </a:prstGeom>
-            <a:ln w="12700"/>
-          </p:spPr>
-          <p:style>
-            <a:lnRef idx="2">
-              <a:schemeClr val="dk1"/>
-            </a:lnRef>
-            <a:fillRef idx="1">
-              <a:schemeClr val="lt1"/>
-            </a:fillRef>
-            <a:effectRef idx="0">
-              <a:schemeClr val="dk1"/>
-            </a:effectRef>
-            <a:fontRef idx="minor">
-              <a:schemeClr val="dk1"/>
-            </a:fontRef>
-          </p:style>
-          <p:txBody>
-            <a:bodyPr rtlCol="0" anchor="ctr"/>
-            <a:lstStyle/>
-            <a:p>
-              <a:pPr algn="ctr"/>
-              <a:r>
-                <a:rPr lang="en-US" altLang="ko-KR" sz="1050"/>
-                <a:t>NVIDIA CUDA Lib/Toolkit</a:t>
-              </a:r>
-              <a:endParaRPr lang="en-US" altLang="ko-KR" sz="1050" dirty="0"/>
-            </a:p>
-          </p:txBody>
-        </p:sp>
-        <p:grpSp>
-          <p:nvGrpSpPr>
-            <p:cNvPr id="12" name="그룹 11">
-              <a:extLst>
-                <a:ext uri="{FF2B5EF4-FFF2-40B4-BE49-F238E27FC236}">
-                  <a16:creationId xmlns:a16="http://schemas.microsoft.com/office/drawing/2014/main" id="{3B0EC719-E97D-433F-57E8-327B92068A18}"/>
-                </a:ext>
-              </a:extLst>
-            </p:cNvPr>
-            <p:cNvGrpSpPr/>
-            <p:nvPr/>
-          </p:nvGrpSpPr>
-          <p:grpSpPr>
-            <a:xfrm>
-              <a:off x="3072135" y="1297654"/>
-              <a:ext cx="2474164" cy="1317955"/>
-              <a:chOff x="3328619" y="1015999"/>
-              <a:chExt cx="2474164" cy="1317955"/>
-            </a:xfrm>
-          </p:grpSpPr>
-          <p:sp>
-            <p:nvSpPr>
-              <p:cNvPr id="13" name="사각형: 둥근 모서리 114">
-                <a:extLst>
-                  <a:ext uri="{FF2B5EF4-FFF2-40B4-BE49-F238E27FC236}">
-                    <a16:creationId xmlns:a16="http://schemas.microsoft.com/office/drawing/2014/main" id="{F1F3EEC6-6CC4-CE00-13AC-F53EED26A83F}"/>
-                  </a:ext>
-                </a:extLst>
-              </p:cNvPr>
-              <p:cNvSpPr/>
-              <p:nvPr/>
-            </p:nvSpPr>
-            <p:spPr>
-              <a:xfrm>
-                <a:off x="3328619" y="1015999"/>
-                <a:ext cx="2474164" cy="1317955"/>
-              </a:xfrm>
-              <a:prstGeom prst="roundRect">
-                <a:avLst>
-                  <a:gd name="adj" fmla="val 6774"/>
-                </a:avLst>
-              </a:prstGeom>
-              <a:ln w="12700"/>
-            </p:spPr>
-            <p:style>
-              <a:lnRef idx="2">
-                <a:schemeClr val="dk1"/>
-              </a:lnRef>
-              <a:fillRef idx="1">
-                <a:schemeClr val="lt1"/>
-              </a:fillRef>
-              <a:effectRef idx="0">
-                <a:schemeClr val="dk1"/>
-              </a:effectRef>
-              <a:fontRef idx="minor">
-                <a:schemeClr val="dk1"/>
-              </a:fontRef>
-            </p:style>
-            <p:txBody>
-              <a:bodyPr rtlCol="0" anchor="t"/>
-              <a:lstStyle/>
-              <a:p>
-                <a:pPr algn="ctr"/>
-                <a:r>
-                  <a:rPr lang="en-US" altLang="ko-KR" sz="1200" b="1"/>
-                  <a:t>Container B</a:t>
-                </a:r>
-                <a:endParaRPr lang="ko-KR" altLang="en-US" sz="1200" b="1" dirty="0">
-                  <a:solidFill>
-                    <a:schemeClr val="accent2">
-                      <a:lumMod val="75000"/>
-                    </a:schemeClr>
-                  </a:solidFill>
-                </a:endParaRPr>
-              </a:p>
-            </p:txBody>
-          </p:sp>
-          <p:sp>
-            <p:nvSpPr>
-              <p:cNvPr id="14" name="사각형: 둥근 모서리 114">
-                <a:extLst>
-                  <a:ext uri="{FF2B5EF4-FFF2-40B4-BE49-F238E27FC236}">
-                    <a16:creationId xmlns:a16="http://schemas.microsoft.com/office/drawing/2014/main" id="{1EAB6A47-5F20-094B-0D4A-E766A80A2A60}"/>
-                  </a:ext>
-                </a:extLst>
-              </p:cNvPr>
-              <p:cNvSpPr/>
-              <p:nvPr/>
-            </p:nvSpPr>
-            <p:spPr>
-              <a:xfrm>
-                <a:off x="3416353" y="1850090"/>
-                <a:ext cx="1099999" cy="396044"/>
-              </a:xfrm>
-              <a:prstGeom prst="roundRect">
-                <a:avLst>
-                  <a:gd name="adj" fmla="val 7242"/>
-                </a:avLst>
-              </a:prstGeom>
-              <a:ln w="12700"/>
-            </p:spPr>
-            <p:style>
-              <a:lnRef idx="2">
-                <a:schemeClr val="dk1"/>
-              </a:lnRef>
-              <a:fillRef idx="1">
-                <a:schemeClr val="lt1"/>
-              </a:fillRef>
-              <a:effectRef idx="0">
-                <a:schemeClr val="dk1"/>
-              </a:effectRef>
-              <a:fontRef idx="minor">
-                <a:schemeClr val="dk1"/>
-              </a:fontRef>
-            </p:style>
-            <p:txBody>
-              <a:bodyPr rtlCol="0" anchor="ctr"/>
-              <a:lstStyle/>
-              <a:p>
-                <a:pPr algn="ctr"/>
-                <a:r>
-                  <a:rPr lang="en-US" altLang="ko-KR" sz="1000"/>
-                  <a:t>/dev/nvdia0</a:t>
-                </a:r>
-                <a:endParaRPr lang="en-US" altLang="ko-KR" sz="1000" dirty="0"/>
-              </a:p>
-            </p:txBody>
-          </p:sp>
-          <p:sp>
-            <p:nvSpPr>
-              <p:cNvPr id="15" name="사각형: 둥근 모서리 114">
-                <a:extLst>
-                  <a:ext uri="{FF2B5EF4-FFF2-40B4-BE49-F238E27FC236}">
-                    <a16:creationId xmlns:a16="http://schemas.microsoft.com/office/drawing/2014/main" id="{7201475F-A4A4-46B2-84B6-A45CE1664B47}"/>
-                  </a:ext>
-                </a:extLst>
-              </p:cNvPr>
-              <p:cNvSpPr/>
-              <p:nvPr/>
-            </p:nvSpPr>
-            <p:spPr>
-              <a:xfrm>
-                <a:off x="4617953" y="1850090"/>
-                <a:ext cx="1099868" cy="396044"/>
-              </a:xfrm>
-              <a:prstGeom prst="roundRect">
-                <a:avLst>
-                  <a:gd name="adj" fmla="val 7242"/>
-                </a:avLst>
-              </a:prstGeom>
-              <a:ln w="12700"/>
-            </p:spPr>
-            <p:style>
-              <a:lnRef idx="2">
-                <a:schemeClr val="dk1"/>
-              </a:lnRef>
-              <a:fillRef idx="1">
-                <a:schemeClr val="lt1"/>
-              </a:fillRef>
-              <a:effectRef idx="0">
-                <a:schemeClr val="dk1"/>
-              </a:effectRef>
-              <a:fontRef idx="minor">
-                <a:schemeClr val="dk1"/>
-              </a:fontRef>
-            </p:style>
-            <p:txBody>
-              <a:bodyPr rtlCol="0" anchor="ctr"/>
-              <a:lstStyle/>
-              <a:p>
-                <a:pPr algn="ctr"/>
-                <a:r>
-                  <a:rPr lang="en-US" altLang="ko-KR" sz="1000"/>
-                  <a:t>/dev/nvdia2</a:t>
-                </a:r>
-                <a:endParaRPr lang="en-US" altLang="ko-KR" sz="1000" dirty="0"/>
-              </a:p>
-            </p:txBody>
-          </p:sp>
-          <p:sp>
-            <p:nvSpPr>
-              <p:cNvPr id="16" name="사각형: 둥근 모서리 114">
-                <a:extLst>
-                  <a:ext uri="{FF2B5EF4-FFF2-40B4-BE49-F238E27FC236}">
-                    <a16:creationId xmlns:a16="http://schemas.microsoft.com/office/drawing/2014/main" id="{1B3E5041-0778-66C8-1F90-7570D9731483}"/>
-                  </a:ext>
-                </a:extLst>
-              </p:cNvPr>
-              <p:cNvSpPr/>
-              <p:nvPr/>
-            </p:nvSpPr>
-            <p:spPr>
-              <a:xfrm>
-                <a:off x="3416354" y="1364036"/>
-                <a:ext cx="2301468" cy="396044"/>
-              </a:xfrm>
-              <a:prstGeom prst="roundRect">
-                <a:avLst>
-                  <a:gd name="adj" fmla="val 7242"/>
-                </a:avLst>
-              </a:prstGeom>
-              <a:ln w="12700"/>
-            </p:spPr>
-            <p:style>
-              <a:lnRef idx="2">
-                <a:schemeClr val="dk1"/>
-              </a:lnRef>
-              <a:fillRef idx="1">
-                <a:schemeClr val="lt1"/>
-              </a:fillRef>
-              <a:effectRef idx="0">
-                <a:schemeClr val="dk1"/>
-              </a:effectRef>
-              <a:fontRef idx="minor">
-                <a:schemeClr val="dk1"/>
-              </a:fontRef>
-            </p:style>
-            <p:txBody>
-              <a:bodyPr rtlCol="0" anchor="ctr"/>
-              <a:lstStyle/>
-              <a:p>
-                <a:pPr algn="ctr"/>
-                <a:r>
-                  <a:rPr lang="en-US" altLang="ko-KR" sz="1000"/>
-                  <a:t>NVIDIA CUDA Lib/Toolkit</a:t>
-                </a:r>
-                <a:endParaRPr lang="en-US" altLang="ko-KR" sz="1000" dirty="0"/>
-              </a:p>
-            </p:txBody>
-          </p:sp>
-        </p:grpSp>
-      </p:grpSp>
+            <a:off x="186295" y="1209261"/>
+            <a:ext cx="1276737" cy="1265622"/>
+          </a:xfrm>
+          <a:prstGeom prst="roundRect">
+            <a:avLst>
+              <a:gd name="adj" fmla="val 6774"/>
+            </a:avLst>
+          </a:prstGeom>
+          <a:ln w="12700"/>
+        </p:spPr>
+        <p:style>
+          <a:lnRef idx="2">
+            <a:schemeClr val="dk1"/>
+          </a:lnRef>
+          <a:fillRef idx="1">
+            <a:schemeClr val="lt1"/>
+          </a:fillRef>
+          <a:effectRef idx="0">
+            <a:schemeClr val="dk1"/>
+          </a:effectRef>
+          <a:fontRef idx="minor">
+            <a:schemeClr val="dk1"/>
+          </a:fontRef>
+        </p:style>
+        <p:txBody>
+          <a:bodyPr rtlCol="0" anchor="t"/>
+          <a:lstStyle/>
+          <a:p>
+            <a:pPr algn="ctr"/>
+            <a:r>
+              <a:rPr lang="en-US" altLang="ko-KR" sz="1000" b="1"/>
+              <a:t>Container A</a:t>
+            </a:r>
+            <a:endParaRPr lang="ko-KR" altLang="en-US" sz="1000" b="1" dirty="0">
+              <a:solidFill>
+                <a:schemeClr val="accent2">
+                  <a:lumMod val="75000"/>
+                </a:schemeClr>
+              </a:solidFill>
+            </a:endParaRPr>
+          </a:p>
+        </p:txBody>
+      </p:sp>
+      <p:sp>
+        <p:nvSpPr>
+          <p:cNvPr id="9" name="사각형: 둥근 모서리 114">
+            <a:extLst>
+              <a:ext uri="{FF2B5EF4-FFF2-40B4-BE49-F238E27FC236}">
+                <a16:creationId xmlns:a16="http://schemas.microsoft.com/office/drawing/2014/main" id="{769415EB-0A2D-50D7-44F6-1F81A018E10C}"/>
+              </a:ext>
+            </a:extLst>
+          </p:cNvPr>
+          <p:cNvSpPr/>
+          <p:nvPr/>
+        </p:nvSpPr>
+        <p:spPr>
+          <a:xfrm>
+            <a:off x="274029" y="1991019"/>
+            <a:ext cx="1099999" cy="396044"/>
+          </a:xfrm>
+          <a:prstGeom prst="roundRect">
+            <a:avLst>
+              <a:gd name="adj" fmla="val 7242"/>
+            </a:avLst>
+          </a:prstGeom>
+          <a:ln w="12700"/>
+        </p:spPr>
+        <p:style>
+          <a:lnRef idx="2">
+            <a:schemeClr val="dk1"/>
+          </a:lnRef>
+          <a:fillRef idx="1">
+            <a:schemeClr val="lt1"/>
+          </a:fillRef>
+          <a:effectRef idx="0">
+            <a:schemeClr val="dk1"/>
+          </a:effectRef>
+          <a:fontRef idx="minor">
+            <a:schemeClr val="dk1"/>
+          </a:fontRef>
+        </p:style>
+        <p:txBody>
+          <a:bodyPr rtlCol="0" anchor="ctr"/>
+          <a:lstStyle/>
+          <a:p>
+            <a:pPr algn="ctr"/>
+            <a:r>
+              <a:rPr lang="en-US" altLang="ko-KR" sz="1000"/>
+              <a:t>/dev/nvidia0</a:t>
+            </a:r>
+            <a:endParaRPr lang="en-US" altLang="ko-KR" sz="1000" dirty="0"/>
+          </a:p>
+        </p:txBody>
+      </p:sp>
+      <p:sp>
+        <p:nvSpPr>
+          <p:cNvPr id="11" name="사각형: 둥근 모서리 114">
+            <a:extLst>
+              <a:ext uri="{FF2B5EF4-FFF2-40B4-BE49-F238E27FC236}">
+                <a16:creationId xmlns:a16="http://schemas.microsoft.com/office/drawing/2014/main" id="{A5B1B74D-0B82-73B1-5F00-44CC5F744F4A}"/>
+              </a:ext>
+            </a:extLst>
+          </p:cNvPr>
+          <p:cNvSpPr/>
+          <p:nvPr/>
+        </p:nvSpPr>
+        <p:spPr>
+          <a:xfrm>
+            <a:off x="274029" y="1504965"/>
+            <a:ext cx="1099999" cy="396044"/>
+          </a:xfrm>
+          <a:prstGeom prst="roundRect">
+            <a:avLst>
+              <a:gd name="adj" fmla="val 7242"/>
+            </a:avLst>
+          </a:prstGeom>
+          <a:ln w="12700"/>
+        </p:spPr>
+        <p:style>
+          <a:lnRef idx="2">
+            <a:schemeClr val="dk1"/>
+          </a:lnRef>
+          <a:fillRef idx="1">
+            <a:schemeClr val="lt1"/>
+          </a:fillRef>
+          <a:effectRef idx="0">
+            <a:schemeClr val="dk1"/>
+          </a:effectRef>
+          <a:fontRef idx="minor">
+            <a:schemeClr val="dk1"/>
+          </a:fontRef>
+        </p:style>
+        <p:txBody>
+          <a:bodyPr rtlCol="0" anchor="ctr"/>
+          <a:lstStyle/>
+          <a:p>
+            <a:pPr algn="ctr"/>
+            <a:r>
+              <a:rPr lang="en-US" altLang="ko-KR" sz="1000"/>
+              <a:t>NVIDIA CUDA Lib/Toolkit</a:t>
+            </a:r>
+            <a:endParaRPr lang="en-US" altLang="ko-KR" sz="1000" dirty="0"/>
+          </a:p>
+        </p:txBody>
+      </p:sp>
+      <p:sp>
+        <p:nvSpPr>
+          <p:cNvPr id="13" name="사각형: 둥근 모서리 114">
+            <a:extLst>
+              <a:ext uri="{FF2B5EF4-FFF2-40B4-BE49-F238E27FC236}">
+                <a16:creationId xmlns:a16="http://schemas.microsoft.com/office/drawing/2014/main" id="{F1F3EEC6-6CC4-CE00-13AC-F53EED26A83F}"/>
+              </a:ext>
+            </a:extLst>
+          </p:cNvPr>
+          <p:cNvSpPr/>
+          <p:nvPr/>
+        </p:nvSpPr>
+        <p:spPr>
+          <a:xfrm>
+            <a:off x="1598372" y="1203598"/>
+            <a:ext cx="2474164" cy="1265622"/>
+          </a:xfrm>
+          <a:prstGeom prst="roundRect">
+            <a:avLst>
+              <a:gd name="adj" fmla="val 6774"/>
+            </a:avLst>
+          </a:prstGeom>
+          <a:ln w="12700"/>
+        </p:spPr>
+        <p:style>
+          <a:lnRef idx="2">
+            <a:schemeClr val="dk1"/>
+          </a:lnRef>
+          <a:fillRef idx="1">
+            <a:schemeClr val="lt1"/>
+          </a:fillRef>
+          <a:effectRef idx="0">
+            <a:schemeClr val="dk1"/>
+          </a:effectRef>
+          <a:fontRef idx="minor">
+            <a:schemeClr val="dk1"/>
+          </a:fontRef>
+        </p:style>
+        <p:txBody>
+          <a:bodyPr rtlCol="0" anchor="t"/>
+          <a:lstStyle/>
+          <a:p>
+            <a:pPr algn="ctr"/>
+            <a:r>
+              <a:rPr lang="en-US" altLang="ko-KR" sz="1000" b="1"/>
+              <a:t>Container B</a:t>
+            </a:r>
+            <a:endParaRPr lang="ko-KR" altLang="en-US" sz="1000" b="1" dirty="0">
+              <a:solidFill>
+                <a:schemeClr val="accent2">
+                  <a:lumMod val="75000"/>
+                </a:schemeClr>
+              </a:solidFill>
+            </a:endParaRPr>
+          </a:p>
+        </p:txBody>
+      </p:sp>
+      <p:sp>
+        <p:nvSpPr>
+          <p:cNvPr id="14" name="사각형: 둥근 모서리 114">
+            <a:extLst>
+              <a:ext uri="{FF2B5EF4-FFF2-40B4-BE49-F238E27FC236}">
+                <a16:creationId xmlns:a16="http://schemas.microsoft.com/office/drawing/2014/main" id="{1EAB6A47-5F20-094B-0D4A-E766A80A2A60}"/>
+              </a:ext>
+            </a:extLst>
+          </p:cNvPr>
+          <p:cNvSpPr/>
+          <p:nvPr/>
+        </p:nvSpPr>
+        <p:spPr>
+          <a:xfrm>
+            <a:off x="1686106" y="1985356"/>
+            <a:ext cx="1099999" cy="396044"/>
+          </a:xfrm>
+          <a:prstGeom prst="roundRect">
+            <a:avLst>
+              <a:gd name="adj" fmla="val 7242"/>
+            </a:avLst>
+          </a:prstGeom>
+          <a:ln w="12700"/>
+        </p:spPr>
+        <p:style>
+          <a:lnRef idx="2">
+            <a:schemeClr val="dk1"/>
+          </a:lnRef>
+          <a:fillRef idx="1">
+            <a:schemeClr val="lt1"/>
+          </a:fillRef>
+          <a:effectRef idx="0">
+            <a:schemeClr val="dk1"/>
+          </a:effectRef>
+          <a:fontRef idx="minor">
+            <a:schemeClr val="dk1"/>
+          </a:fontRef>
+        </p:style>
+        <p:txBody>
+          <a:bodyPr rtlCol="0" anchor="ctr"/>
+          <a:lstStyle/>
+          <a:p>
+            <a:pPr algn="ctr"/>
+            <a:r>
+              <a:rPr lang="en-US" altLang="ko-KR" sz="1000"/>
+              <a:t>/dev/nvdia0</a:t>
+            </a:r>
+            <a:endParaRPr lang="en-US" altLang="ko-KR" sz="1000" dirty="0"/>
+          </a:p>
+        </p:txBody>
+      </p:sp>
+      <p:sp>
+        <p:nvSpPr>
+          <p:cNvPr id="15" name="사각형: 둥근 모서리 114">
+            <a:extLst>
+              <a:ext uri="{FF2B5EF4-FFF2-40B4-BE49-F238E27FC236}">
+                <a16:creationId xmlns:a16="http://schemas.microsoft.com/office/drawing/2014/main" id="{7201475F-A4A4-46B2-84B6-A45CE1664B47}"/>
+              </a:ext>
+            </a:extLst>
+          </p:cNvPr>
+          <p:cNvSpPr/>
+          <p:nvPr/>
+        </p:nvSpPr>
+        <p:spPr>
+          <a:xfrm>
+            <a:off x="2887706" y="1985356"/>
+            <a:ext cx="1099868" cy="396044"/>
+          </a:xfrm>
+          <a:prstGeom prst="roundRect">
+            <a:avLst>
+              <a:gd name="adj" fmla="val 7242"/>
+            </a:avLst>
+          </a:prstGeom>
+          <a:ln w="12700"/>
+        </p:spPr>
+        <p:style>
+          <a:lnRef idx="2">
+            <a:schemeClr val="dk1"/>
+          </a:lnRef>
+          <a:fillRef idx="1">
+            <a:schemeClr val="lt1"/>
+          </a:fillRef>
+          <a:effectRef idx="0">
+            <a:schemeClr val="dk1"/>
+          </a:effectRef>
+          <a:fontRef idx="minor">
+            <a:schemeClr val="dk1"/>
+          </a:fontRef>
+        </p:style>
+        <p:txBody>
+          <a:bodyPr rtlCol="0" anchor="ctr"/>
+          <a:lstStyle/>
+          <a:p>
+            <a:pPr algn="ctr"/>
+            <a:r>
+              <a:rPr lang="en-US" altLang="ko-KR" sz="1000"/>
+              <a:t>/dev/nvdia2</a:t>
+            </a:r>
+            <a:endParaRPr lang="en-US" altLang="ko-KR" sz="1000" dirty="0"/>
+          </a:p>
+        </p:txBody>
+      </p:sp>
+      <p:sp>
+        <p:nvSpPr>
+          <p:cNvPr id="16" name="사각형: 둥근 모서리 114">
+            <a:extLst>
+              <a:ext uri="{FF2B5EF4-FFF2-40B4-BE49-F238E27FC236}">
+                <a16:creationId xmlns:a16="http://schemas.microsoft.com/office/drawing/2014/main" id="{1B3E5041-0778-66C8-1F90-7570D9731483}"/>
+              </a:ext>
+            </a:extLst>
+          </p:cNvPr>
+          <p:cNvSpPr/>
+          <p:nvPr/>
+        </p:nvSpPr>
+        <p:spPr>
+          <a:xfrm>
+            <a:off x="1686107" y="1499302"/>
+            <a:ext cx="2301468" cy="396044"/>
+          </a:xfrm>
+          <a:prstGeom prst="roundRect">
+            <a:avLst>
+              <a:gd name="adj" fmla="val 7242"/>
+            </a:avLst>
+          </a:prstGeom>
+          <a:ln w="12700"/>
+        </p:spPr>
+        <p:style>
+          <a:lnRef idx="2">
+            <a:schemeClr val="dk1"/>
+          </a:lnRef>
+          <a:fillRef idx="1">
+            <a:schemeClr val="lt1"/>
+          </a:fillRef>
+          <a:effectRef idx="0">
+            <a:schemeClr val="dk1"/>
+          </a:effectRef>
+          <a:fontRef idx="minor">
+            <a:schemeClr val="dk1"/>
+          </a:fontRef>
+        </p:style>
+        <p:txBody>
+          <a:bodyPr rtlCol="0" anchor="ctr"/>
+          <a:lstStyle/>
+          <a:p>
+            <a:pPr algn="ctr"/>
+            <a:r>
+              <a:rPr lang="en-US" altLang="ko-KR" sz="1000"/>
+              <a:t>NVIDIA CUDA Lib/Toolkit</a:t>
+            </a:r>
+            <a:endParaRPr lang="en-US" altLang="ko-KR" sz="1000" dirty="0"/>
+          </a:p>
+        </p:txBody>
+      </p:sp>
       <p:sp>
         <p:nvSpPr>
           <p:cNvPr id="18" name="사각형: 둥근 모서리 114">
@@ -6610,8 +6568,8 @@
         </p:nvSpPr>
         <p:spPr>
           <a:xfrm>
-            <a:off x="6011271" y="1304366"/>
-            <a:ext cx="1487816" cy="1317955"/>
+            <a:off x="4537508" y="1203598"/>
+            <a:ext cx="1487816" cy="1265622"/>
           </a:xfrm>
           <a:prstGeom prst="roundRect">
             <a:avLst>
@@ -6640,10 +6598,10 @@
           <a:p>
             <a:pPr algn="ctr"/>
             <a:r>
-              <a:rPr lang="en-US" altLang="ko-KR" sz="1200" b="1"/>
+              <a:rPr lang="en-US" altLang="ko-KR" sz="1000" b="1"/>
               <a:t>Container C</a:t>
             </a:r>
-            <a:endParaRPr lang="ko-KR" altLang="en-US" sz="1200" b="1" dirty="0">
+            <a:endParaRPr lang="ko-KR" altLang="en-US" sz="1000" b="1" dirty="0">
               <a:solidFill>
                 <a:schemeClr val="accent2">
                   <a:lumMod val="75000"/>
@@ -6667,7 +6625,7 @@
         </p:nvSpPr>
         <p:spPr>
           <a:xfrm>
-            <a:off x="6091458" y="2138457"/>
+            <a:off x="4617695" y="1985356"/>
             <a:ext cx="1321799" cy="396044"/>
           </a:xfrm>
           <a:prstGeom prst="roundRect">
@@ -6718,7 +6676,7 @@
         </p:nvSpPr>
         <p:spPr>
           <a:xfrm>
-            <a:off x="6091458" y="1652403"/>
+            <a:off x="4617695" y="1499302"/>
             <a:ext cx="1321798" cy="396044"/>
           </a:xfrm>
           <a:prstGeom prst="roundRect">
@@ -6773,7 +6731,7 @@
         </p:nvCxnSpPr>
         <p:spPr>
           <a:xfrm>
-            <a:off x="2297792" y="2540164"/>
+            <a:off x="824029" y="2387063"/>
             <a:ext cx="386822" cy="1232960"/>
           </a:xfrm>
           <a:prstGeom prst="line">
@@ -6818,7 +6776,7 @@
         </p:nvCxnSpPr>
         <p:spPr>
           <a:xfrm>
-            <a:off x="3709869" y="2534501"/>
+            <a:off x="2236106" y="2381400"/>
             <a:ext cx="234724" cy="1238623"/>
           </a:xfrm>
           <a:prstGeom prst="line">
@@ -6863,7 +6821,7 @@
         </p:nvCxnSpPr>
         <p:spPr>
           <a:xfrm>
-            <a:off x="4911403" y="2534501"/>
+            <a:off x="3437640" y="2381400"/>
             <a:ext cx="293168" cy="1238623"/>
           </a:xfrm>
           <a:prstGeom prst="line">
@@ -6908,7 +6866,7 @@
         </p:nvCxnSpPr>
         <p:spPr>
           <a:xfrm flipH="1">
-            <a:off x="6464550" y="2534501"/>
+            <a:off x="4990787" y="2381400"/>
             <a:ext cx="287808" cy="1238623"/>
           </a:xfrm>
           <a:prstGeom prst="line">
@@ -6949,7 +6907,7 @@
         </p:nvSpPr>
         <p:spPr>
           <a:xfrm>
-            <a:off x="1692325" y="2945032"/>
+            <a:off x="218562" y="2791931"/>
             <a:ext cx="5759996" cy="396044"/>
           </a:xfrm>
           <a:prstGeom prst="roundRect">
@@ -6979,10 +6937,624 @@
           <a:p>
             <a:pPr algn="ctr"/>
             <a:r>
-              <a:rPr lang="en-US" altLang="ko-KR" sz="1050"/>
+              <a:rPr lang="en-US" altLang="ko-KR" sz="1000"/>
               <a:t>NVIDIA GPU Device Driver</a:t>
             </a:r>
-            <a:endParaRPr lang="en-US" altLang="ko-KR" sz="1050" dirty="0"/>
+            <a:endParaRPr lang="en-US" altLang="ko-KR" sz="1000" dirty="0"/>
+          </a:p>
+        </p:txBody>
+      </p:sp>
+      <p:sp>
+        <p:nvSpPr>
+          <p:cNvPr id="10" name="TextBox 9">
+            <a:extLst>
+              <a:ext uri="{FF2B5EF4-FFF2-40B4-BE49-F238E27FC236}">
+                <a16:creationId xmlns:a16="http://schemas.microsoft.com/office/drawing/2014/main" id="{787DAA5F-A54B-025A-21E9-FA0AC9BF51AF}"/>
+              </a:ext>
+            </a:extLst>
+          </p:cNvPr>
+          <p:cNvSpPr txBox="1"/>
+          <p:nvPr/>
+        </p:nvSpPr>
+        <p:spPr>
+          <a:xfrm>
+            <a:off x="7965348" y="483518"/>
+            <a:ext cx="1665155" cy="1769715"/>
+          </a:xfrm>
+          <a:prstGeom prst="rect">
+            <a:avLst/>
+          </a:prstGeom>
+          <a:solidFill>
+            <a:schemeClr val="bg1">
+              <a:lumMod val="85000"/>
+              <a:lumOff val="15000"/>
+            </a:schemeClr>
+          </a:solidFill>
+          <a:ln w="12700">
+            <a:solidFill>
+              <a:schemeClr val="tx1"/>
+            </a:solidFill>
+          </a:ln>
+        </p:spPr>
+        <p:txBody>
+          <a:bodyPr wrap="square" lIns="0" rIns="0" rtlCol="0">
+            <a:spAutoFit/>
+          </a:bodyPr>
+          <a:lstStyle/>
+          <a:p>
+            <a:pPr algn="l"/>
+            <a:r>
+              <a:rPr lang="en-US" sz="1000" kern="0" dirty="0" err="1">
+                <a:cs typeface="Al Bayan Plain" pitchFamily="2" charset="-78"/>
+              </a:rPr>
+              <a:t> </a:t>
+            </a:r>
+            <a:r>
+              <a:rPr lang="en-US" sz="900" kern="0" dirty="0" err="1">
+                <a:cs typeface="Al Bayan Plain" pitchFamily="2" charset="-78"/>
+              </a:rPr>
+              <a:t>apiVersion</a:t>
+            </a:r>
+            <a:r>
+              <a:rPr lang="en-US" sz="900" kern="0" dirty="0">
+                <a:cs typeface="Al Bayan Plain" pitchFamily="2" charset="-78"/>
+              </a:rPr>
+              <a:t>: v1</a:t>
+            </a:r>
+          </a:p>
+          <a:p>
+            <a:pPr algn="l"/>
+            <a:r>
+              <a:rPr lang="en-US" sz="900" kern="0" dirty="0">
+                <a:cs typeface="Al Bayan Plain" pitchFamily="2" charset="-78"/>
+              </a:rPr>
+              <a:t> kind: PodB</a:t>
+            </a:r>
+          </a:p>
+          <a:p>
+            <a:pPr algn="l"/>
+            <a:r>
+              <a:rPr lang="en-US" sz="900" kern="0" dirty="0">
+                <a:cs typeface="Al Bayan Plain" pitchFamily="2" charset="-78"/>
+              </a:rPr>
+              <a:t> metadata:</a:t>
+            </a:r>
+          </a:p>
+          <a:p>
+            <a:pPr algn="l"/>
+            <a:r>
+              <a:rPr lang="en-US" sz="900" kern="0" dirty="0">
+                <a:cs typeface="Al Bayan Plain" pitchFamily="2" charset="-78"/>
+              </a:rPr>
+              <a:t>   name: pod</a:t>
+            </a:r>
+          </a:p>
+          <a:p>
+            <a:pPr algn="l"/>
+            <a:r>
+              <a:rPr lang="en-US" sz="900" kern="0" dirty="0">
+                <a:cs typeface="Al Bayan Plain" pitchFamily="2" charset="-78"/>
+              </a:rPr>
+              <a:t> spec:</a:t>
+            </a:r>
+          </a:p>
+          <a:p>
+            <a:pPr algn="l"/>
+            <a:r>
+              <a:rPr lang="en-US" sz="900" kern="0" dirty="0">
+                <a:cs typeface="Al Bayan Plain" pitchFamily="2" charset="-78"/>
+              </a:rPr>
+              <a:t>   containers:</a:t>
+            </a:r>
+          </a:p>
+          <a:p>
+            <a:pPr algn="l"/>
+            <a:r>
+              <a:rPr lang="en-US" sz="900" kern="0" dirty="0">
+                <a:cs typeface="Al Bayan Plain" pitchFamily="2" charset="-78"/>
+              </a:rPr>
+              <a:t>     - name: ContainerA</a:t>
+            </a:r>
+          </a:p>
+          <a:p>
+            <a:pPr algn="l"/>
+            <a:r>
+              <a:rPr lang="en-US" sz="900" kern="0" dirty="0">
+                <a:cs typeface="Al Bayan Plain" pitchFamily="2" charset="-78"/>
+              </a:rPr>
+              <a:t>       resources:</a:t>
+            </a:r>
+          </a:p>
+          <a:p>
+            <a:pPr algn="l"/>
+            <a:r>
+              <a:rPr lang="en-US" sz="900" kern="0" dirty="0">
+                <a:solidFill>
+                  <a:srgbClr val="C00000"/>
+                </a:solidFill>
+                <a:cs typeface="Al Bayan Plain" pitchFamily="2" charset="-78"/>
+              </a:rPr>
+              <a:t>         requests:</a:t>
+            </a:r>
+          </a:p>
+          <a:p>
+            <a:pPr algn="l"/>
+            <a:r>
+              <a:rPr lang="en-US" sz="900" kern="0" dirty="0">
+                <a:solidFill>
+                  <a:srgbClr val="C00000"/>
+                </a:solidFill>
+                <a:cs typeface="Al Bayan Plain" pitchFamily="2" charset="-78"/>
+              </a:rPr>
+              <a:t>           </a:t>
+            </a:r>
+            <a:r>
+              <a:rPr lang="en-US" sz="900" kern="0" dirty="0" err="1">
+                <a:solidFill>
+                  <a:srgbClr val="C00000"/>
+                </a:solidFill>
+                <a:cs typeface="Al Bayan Plain" pitchFamily="2" charset="-78"/>
+              </a:rPr>
+              <a:t>nvidia.com</a:t>
+            </a:r>
+            <a:r>
+              <a:rPr lang="en-US" sz="900" kern="0" dirty="0">
+                <a:solidFill>
+                  <a:srgbClr val="C00000"/>
+                </a:solidFill>
+                <a:cs typeface="Al Bayan Plain" pitchFamily="2" charset="-78"/>
+              </a:rPr>
+              <a:t>/</a:t>
+            </a:r>
+            <a:r>
+              <a:rPr lang="en-US" sz="900" kern="0" dirty="0" err="1">
+                <a:solidFill>
+                  <a:srgbClr val="C00000"/>
+                </a:solidFill>
+                <a:cs typeface="Al Bayan Plain" pitchFamily="2" charset="-78"/>
+              </a:rPr>
+              <a:t>gpu</a:t>
+            </a:r>
+            <a:r>
+              <a:rPr lang="en-US" sz="900" kern="0" dirty="0">
+                <a:solidFill>
+                  <a:srgbClr val="C00000"/>
+                </a:solidFill>
+                <a:cs typeface="Al Bayan Plain" pitchFamily="2" charset="-78"/>
+              </a:rPr>
+              <a:t>: 1</a:t>
+            </a:r>
+          </a:p>
+          <a:p>
+            <a:r>
+              <a:rPr lang="en-US" altLang="ko-KR" sz="900" kern="0" dirty="0">
+                <a:solidFill>
+                  <a:srgbClr val="C00000"/>
+                </a:solidFill>
+                <a:cs typeface="Al Bayan Plain" pitchFamily="2" charset="-78"/>
+              </a:rPr>
+              <a:t>         limits:</a:t>
+            </a:r>
+          </a:p>
+          <a:p>
+            <a:r>
+              <a:rPr lang="en-US" altLang="ko-KR" sz="900" kern="0" dirty="0">
+                <a:solidFill>
+                  <a:srgbClr val="C00000"/>
+                </a:solidFill>
+                <a:cs typeface="Al Bayan Plain" pitchFamily="2" charset="-78"/>
+              </a:rPr>
+              <a:t>           </a:t>
+            </a:r>
+            <a:r>
+              <a:rPr lang="en-US" altLang="ko-KR" sz="900" kern="0" dirty="0" err="1">
+                <a:solidFill>
+                  <a:srgbClr val="C00000"/>
+                </a:solidFill>
+                <a:cs typeface="Al Bayan Plain" pitchFamily="2" charset="-78"/>
+              </a:rPr>
+              <a:t>nvidia.com</a:t>
+            </a:r>
+            <a:r>
+              <a:rPr lang="en-US" altLang="ko-KR" sz="900" kern="0" dirty="0">
+                <a:solidFill>
+                  <a:srgbClr val="C00000"/>
+                </a:solidFill>
+                <a:cs typeface="Al Bayan Plain" pitchFamily="2" charset="-78"/>
+              </a:rPr>
+              <a:t>/</a:t>
+            </a:r>
+            <a:r>
+              <a:rPr lang="en-US" altLang="ko-KR" sz="900" kern="0" dirty="0" err="1">
+                <a:solidFill>
+                  <a:srgbClr val="C00000"/>
+                </a:solidFill>
+                <a:cs typeface="Al Bayan Plain" pitchFamily="2" charset="-78"/>
+              </a:rPr>
+              <a:t>gpu</a:t>
+            </a:r>
+            <a:r>
+              <a:rPr lang="en-US" altLang="ko-KR" sz="900" kern="0" dirty="0">
+                <a:solidFill>
+                  <a:srgbClr val="C00000"/>
+                </a:solidFill>
+                <a:cs typeface="Al Bayan Plain" pitchFamily="2" charset="-78"/>
+              </a:rPr>
+              <a:t>: 1</a:t>
+            </a:r>
+          </a:p>
+        </p:txBody>
+      </p:sp>
+      <p:sp>
+        <p:nvSpPr>
+          <p:cNvPr id="17" name="TextBox 16">
+            <a:extLst>
+              <a:ext uri="{FF2B5EF4-FFF2-40B4-BE49-F238E27FC236}">
+                <a16:creationId xmlns:a16="http://schemas.microsoft.com/office/drawing/2014/main" id="{2070C16E-B348-642F-E3BF-7E2C0BD51AB8}"/>
+              </a:ext>
+            </a:extLst>
+          </p:cNvPr>
+          <p:cNvSpPr txBox="1"/>
+          <p:nvPr/>
+        </p:nvSpPr>
+        <p:spPr>
+          <a:xfrm>
+            <a:off x="6300058" y="483518"/>
+            <a:ext cx="1665290" cy="2600712"/>
+          </a:xfrm>
+          <a:prstGeom prst="rect">
+            <a:avLst/>
+          </a:prstGeom>
+          <a:solidFill>
+            <a:schemeClr val="bg1">
+              <a:lumMod val="85000"/>
+              <a:lumOff val="15000"/>
+            </a:schemeClr>
+          </a:solidFill>
+          <a:ln w="12700">
+            <a:solidFill>
+              <a:schemeClr val="tx1"/>
+            </a:solidFill>
+          </a:ln>
+        </p:spPr>
+        <p:txBody>
+          <a:bodyPr wrap="square" lIns="0" rIns="0" rtlCol="0">
+            <a:spAutoFit/>
+          </a:bodyPr>
+          <a:lstStyle/>
+          <a:p>
+            <a:pPr algn="l"/>
+            <a:r>
+              <a:rPr lang="en-US" sz="1000" kern="0" dirty="0" err="1">
+                <a:cs typeface="Al Bayan Plain" pitchFamily="2" charset="-78"/>
+              </a:rPr>
+              <a:t> </a:t>
+            </a:r>
+            <a:r>
+              <a:rPr lang="en-US" sz="900" kern="0" dirty="0" err="1">
+                <a:cs typeface="Al Bayan Plain" pitchFamily="2" charset="-78"/>
+              </a:rPr>
+              <a:t>apiVersion</a:t>
+            </a:r>
+            <a:r>
+              <a:rPr lang="en-US" sz="900" kern="0" dirty="0">
+                <a:cs typeface="Al Bayan Plain" pitchFamily="2" charset="-78"/>
+              </a:rPr>
+              <a:t>: v1</a:t>
+            </a:r>
+          </a:p>
+          <a:p>
+            <a:pPr algn="l"/>
+            <a:r>
+              <a:rPr lang="en-US" sz="900" kern="0" dirty="0">
+                <a:cs typeface="Al Bayan Plain" pitchFamily="2" charset="-78"/>
+              </a:rPr>
+              <a:t> kind: PodA</a:t>
+            </a:r>
+          </a:p>
+          <a:p>
+            <a:pPr algn="l"/>
+            <a:r>
+              <a:rPr lang="en-US" sz="900" kern="0" dirty="0">
+                <a:cs typeface="Al Bayan Plain" pitchFamily="2" charset="-78"/>
+              </a:rPr>
+              <a:t> metadata:</a:t>
+            </a:r>
+          </a:p>
+          <a:p>
+            <a:pPr algn="l"/>
+            <a:r>
+              <a:rPr lang="en-US" sz="900" kern="0" dirty="0">
+                <a:cs typeface="Al Bayan Plain" pitchFamily="2" charset="-78"/>
+              </a:rPr>
+              <a:t>   name: pod</a:t>
+            </a:r>
+          </a:p>
+          <a:p>
+            <a:pPr algn="l"/>
+            <a:r>
+              <a:rPr lang="en-US" sz="900" kern="0" dirty="0">
+                <a:cs typeface="Al Bayan Plain" pitchFamily="2" charset="-78"/>
+              </a:rPr>
+              <a:t> spec:</a:t>
+            </a:r>
+          </a:p>
+          <a:p>
+            <a:pPr algn="l"/>
+            <a:r>
+              <a:rPr lang="en-US" sz="900" kern="0" dirty="0">
+                <a:cs typeface="Al Bayan Plain" pitchFamily="2" charset="-78"/>
+              </a:rPr>
+              <a:t>   containers:</a:t>
+            </a:r>
+          </a:p>
+          <a:p>
+            <a:pPr algn="l"/>
+            <a:r>
+              <a:rPr lang="en-US" sz="900" kern="0" dirty="0">
+                <a:cs typeface="Al Bayan Plain" pitchFamily="2" charset="-78"/>
+              </a:rPr>
+              <a:t>     - name: ContainerA</a:t>
+            </a:r>
+          </a:p>
+          <a:p>
+            <a:pPr algn="l"/>
+            <a:r>
+              <a:rPr lang="en-US" sz="900" kern="0" dirty="0">
+                <a:cs typeface="Al Bayan Plain" pitchFamily="2" charset="-78"/>
+              </a:rPr>
+              <a:t>       resources:</a:t>
+            </a:r>
+          </a:p>
+          <a:p>
+            <a:pPr algn="l"/>
+            <a:r>
+              <a:rPr lang="en-US" sz="900" kern="0" dirty="0">
+                <a:solidFill>
+                  <a:srgbClr val="C00000"/>
+                </a:solidFill>
+                <a:cs typeface="Al Bayan Plain" pitchFamily="2" charset="-78"/>
+              </a:rPr>
+              <a:t>         requests:</a:t>
+            </a:r>
+          </a:p>
+          <a:p>
+            <a:pPr algn="l"/>
+            <a:r>
+              <a:rPr lang="en-US" sz="900" kern="0" dirty="0">
+                <a:solidFill>
+                  <a:srgbClr val="C00000"/>
+                </a:solidFill>
+                <a:cs typeface="Al Bayan Plain" pitchFamily="2" charset="-78"/>
+              </a:rPr>
+              <a:t>           </a:t>
+            </a:r>
+            <a:r>
+              <a:rPr lang="en-US" sz="900" kern="0" dirty="0" err="1">
+                <a:solidFill>
+                  <a:srgbClr val="C00000"/>
+                </a:solidFill>
+                <a:cs typeface="Al Bayan Plain" pitchFamily="2" charset="-78"/>
+              </a:rPr>
+              <a:t>nvidia.com</a:t>
+            </a:r>
+            <a:r>
+              <a:rPr lang="en-US" sz="900" kern="0" dirty="0">
+                <a:solidFill>
+                  <a:srgbClr val="C00000"/>
+                </a:solidFill>
+                <a:cs typeface="Al Bayan Plain" pitchFamily="2" charset="-78"/>
+              </a:rPr>
+              <a:t>/</a:t>
+            </a:r>
+            <a:r>
+              <a:rPr lang="en-US" sz="900" kern="0" dirty="0" err="1">
+                <a:solidFill>
+                  <a:srgbClr val="C00000"/>
+                </a:solidFill>
+                <a:cs typeface="Al Bayan Plain" pitchFamily="2" charset="-78"/>
+              </a:rPr>
+              <a:t>gpu</a:t>
+            </a:r>
+            <a:r>
+              <a:rPr lang="en-US" sz="900" kern="0" dirty="0">
+                <a:solidFill>
+                  <a:srgbClr val="C00000"/>
+                </a:solidFill>
+                <a:cs typeface="Al Bayan Plain" pitchFamily="2" charset="-78"/>
+              </a:rPr>
+              <a:t>: 1</a:t>
+            </a:r>
+          </a:p>
+          <a:p>
+            <a:r>
+              <a:rPr lang="en-US" altLang="ko-KR" sz="900" kern="0" dirty="0">
+                <a:solidFill>
+                  <a:srgbClr val="C00000"/>
+                </a:solidFill>
+                <a:cs typeface="Al Bayan Plain" pitchFamily="2" charset="-78"/>
+              </a:rPr>
+              <a:t>         limits:</a:t>
+            </a:r>
+          </a:p>
+          <a:p>
+            <a:r>
+              <a:rPr lang="en-US" altLang="ko-KR" sz="900" kern="0" dirty="0">
+                <a:solidFill>
+                  <a:srgbClr val="C00000"/>
+                </a:solidFill>
+                <a:cs typeface="Al Bayan Plain" pitchFamily="2" charset="-78"/>
+              </a:rPr>
+              <a:t>           </a:t>
+            </a:r>
+            <a:r>
+              <a:rPr lang="en-US" altLang="ko-KR" sz="900" kern="0" dirty="0" err="1">
+                <a:solidFill>
+                  <a:srgbClr val="C00000"/>
+                </a:solidFill>
+                <a:cs typeface="Al Bayan Plain" pitchFamily="2" charset="-78"/>
+              </a:rPr>
+              <a:t>nvidia.com</a:t>
+            </a:r>
+            <a:r>
+              <a:rPr lang="en-US" altLang="ko-KR" sz="900" kern="0" dirty="0">
+                <a:solidFill>
+                  <a:srgbClr val="C00000"/>
+                </a:solidFill>
+                <a:cs typeface="Al Bayan Plain" pitchFamily="2" charset="-78"/>
+              </a:rPr>
+              <a:t>/</a:t>
+            </a:r>
+            <a:r>
+              <a:rPr lang="en-US" altLang="ko-KR" sz="900" kern="0" dirty="0" err="1">
+                <a:solidFill>
+                  <a:srgbClr val="C00000"/>
+                </a:solidFill>
+                <a:cs typeface="Al Bayan Plain" pitchFamily="2" charset="-78"/>
+              </a:rPr>
+              <a:t>gpu</a:t>
+            </a:r>
+            <a:r>
+              <a:rPr lang="en-US" altLang="ko-KR" sz="900" kern="0" dirty="0">
+                <a:solidFill>
+                  <a:srgbClr val="C00000"/>
+                </a:solidFill>
+                <a:cs typeface="Al Bayan Plain" pitchFamily="2" charset="-78"/>
+              </a:rPr>
+              <a:t>: 1</a:t>
+            </a:r>
+          </a:p>
+          <a:p>
+            <a:r>
+              <a:rPr lang="en-US" altLang="ko-KR" sz="900" kern="0" dirty="0">
+                <a:cs typeface="Al Bayan Plain" pitchFamily="2" charset="-78"/>
+              </a:rPr>
+              <a:t>     - name: ContainerB</a:t>
+            </a:r>
+          </a:p>
+          <a:p>
+            <a:r>
+              <a:rPr lang="en-US" altLang="ko-KR" sz="900" kern="0" dirty="0">
+                <a:cs typeface="Al Bayan Plain" pitchFamily="2" charset="-78"/>
+              </a:rPr>
+              <a:t>       resources:</a:t>
+            </a:r>
+          </a:p>
+          <a:p>
+            <a:r>
+              <a:rPr lang="en-US" altLang="ko-KR" sz="900" kern="0" dirty="0">
+                <a:solidFill>
+                  <a:srgbClr val="C00000"/>
+                </a:solidFill>
+                <a:cs typeface="Al Bayan Plain" pitchFamily="2" charset="-78"/>
+              </a:rPr>
+              <a:t>         requests:</a:t>
+            </a:r>
+          </a:p>
+          <a:p>
+            <a:r>
+              <a:rPr lang="en-US" altLang="ko-KR" sz="900" kern="0" dirty="0">
+                <a:solidFill>
+                  <a:srgbClr val="C00000"/>
+                </a:solidFill>
+                <a:cs typeface="Al Bayan Plain" pitchFamily="2" charset="-78"/>
+              </a:rPr>
+              <a:t>           </a:t>
+            </a:r>
+            <a:r>
+              <a:rPr lang="en-US" altLang="ko-KR" sz="900" kern="0" dirty="0" err="1">
+                <a:solidFill>
+                  <a:srgbClr val="C00000"/>
+                </a:solidFill>
+                <a:cs typeface="Al Bayan Plain" pitchFamily="2" charset="-78"/>
+              </a:rPr>
+              <a:t>nvidia.com</a:t>
+            </a:r>
+            <a:r>
+              <a:rPr lang="en-US" altLang="ko-KR" sz="900" kern="0" dirty="0">
+                <a:solidFill>
+                  <a:srgbClr val="C00000"/>
+                </a:solidFill>
+                <a:cs typeface="Al Bayan Plain" pitchFamily="2" charset="-78"/>
+              </a:rPr>
+              <a:t>/</a:t>
+            </a:r>
+            <a:r>
+              <a:rPr lang="en-US" altLang="ko-KR" sz="900" kern="0" dirty="0" err="1">
+                <a:solidFill>
+                  <a:srgbClr val="C00000"/>
+                </a:solidFill>
+                <a:cs typeface="Al Bayan Plain" pitchFamily="2" charset="-78"/>
+              </a:rPr>
+              <a:t>gpu</a:t>
+            </a:r>
+            <a:r>
+              <a:rPr lang="en-US" altLang="ko-KR" sz="900" kern="0" dirty="0">
+                <a:solidFill>
+                  <a:srgbClr val="C00000"/>
+                </a:solidFill>
+                <a:cs typeface="Al Bayan Plain" pitchFamily="2" charset="-78"/>
+              </a:rPr>
+              <a:t>: 2</a:t>
+            </a:r>
+          </a:p>
+          <a:p>
+            <a:r>
+              <a:rPr lang="en-US" altLang="ko-KR" sz="900" kern="0" dirty="0">
+                <a:solidFill>
+                  <a:srgbClr val="C00000"/>
+                </a:solidFill>
+                <a:cs typeface="Al Bayan Plain" pitchFamily="2" charset="-78"/>
+              </a:rPr>
+              <a:t>         limits:</a:t>
+            </a:r>
+          </a:p>
+          <a:p>
+            <a:r>
+              <a:rPr lang="en-US" altLang="ko-KR" sz="900" kern="0" dirty="0">
+                <a:solidFill>
+                  <a:srgbClr val="C00000"/>
+                </a:solidFill>
+                <a:cs typeface="Al Bayan Plain" pitchFamily="2" charset="-78"/>
+              </a:rPr>
+              <a:t>           </a:t>
+            </a:r>
+            <a:r>
+              <a:rPr lang="en-US" altLang="ko-KR" sz="900" kern="0" dirty="0" err="1">
+                <a:solidFill>
+                  <a:srgbClr val="C00000"/>
+                </a:solidFill>
+                <a:cs typeface="Al Bayan Plain" pitchFamily="2" charset="-78"/>
+              </a:rPr>
+              <a:t>nvidia.com</a:t>
+            </a:r>
+            <a:r>
+              <a:rPr lang="en-US" altLang="ko-KR" sz="900" kern="0" dirty="0">
+                <a:solidFill>
+                  <a:srgbClr val="C00000"/>
+                </a:solidFill>
+                <a:cs typeface="Al Bayan Plain" pitchFamily="2" charset="-78"/>
+              </a:rPr>
+              <a:t>/</a:t>
+            </a:r>
+            <a:r>
+              <a:rPr lang="en-US" altLang="ko-KR" sz="900" kern="0" dirty="0" err="1">
+                <a:solidFill>
+                  <a:srgbClr val="C00000"/>
+                </a:solidFill>
+                <a:cs typeface="Al Bayan Plain" pitchFamily="2" charset="-78"/>
+              </a:rPr>
+              <a:t>gpu</a:t>
+            </a:r>
+            <a:r>
+              <a:rPr lang="en-US" altLang="ko-KR" sz="900" kern="0" dirty="0">
+                <a:solidFill>
+                  <a:srgbClr val="C00000"/>
+                </a:solidFill>
+                <a:cs typeface="Al Bayan Plain" pitchFamily="2" charset="-78"/>
+              </a:rPr>
+              <a:t>: 2</a:t>
+            </a:r>
           </a:p>
         </p:txBody>
       </p:sp>

--- a/content/docs/theory-analysis/kubernetes-nvidia-device-plugin/images/images.pptx
+++ b/content/docs/theory-analysis/kubernetes-nvidia-device-plugin/images/images.pptx
@@ -5,14 +5,16 @@
     <p:sldMasterId id="2147483648" r:id="rId1"/>
   </p:sldMasterIdLst>
   <p:notesMasterIdLst>
-    <p:notesMasterId r:id="rId7"/>
+    <p:notesMasterId r:id="rId9"/>
   </p:notesMasterIdLst>
   <p:sldIdLst>
-    <p:sldId id="431" r:id="rId2"/>
-    <p:sldId id="436" r:id="rId3"/>
-    <p:sldId id="434" r:id="rId4"/>
-    <p:sldId id="435" r:id="rId5"/>
-    <p:sldId id="422" r:id="rId6"/>
+    <p:sldId id="437" r:id="rId2"/>
+    <p:sldId id="431" r:id="rId3"/>
+    <p:sldId id="436" r:id="rId4"/>
+    <p:sldId id="434" r:id="rId5"/>
+    <p:sldId id="438" r:id="rId6"/>
+    <p:sldId id="435" r:id="rId7"/>
+    <p:sldId id="422" r:id="rId8"/>
   </p:sldIdLst>
   <p:sldSz cx="9144000" cy="5143500" type="screen16x9"/>
   <p:notesSz cx="6858000" cy="9144000"/>
@@ -217,7 +219,7 @@
           <a:p>
             <a:fld id="{6CD5550B-26C4-49A9-A5BA-636EF7BE6CE9}" type="datetimeFigureOut">
               <a:rPr lang="ko-KR" altLang="en-US" smtClean="0"/>
-              <a:t>2026. 2. 28.</a:t>
+              <a:t>2026. 3. 3.</a:t>
             </a:fld>
             <a:endParaRPr lang="ko-KR" altLang="en-US"/>
           </a:p>
@@ -489,6 +491,222 @@
   <p:cSld>
     <p:spTree>
       <p:nvGrpSpPr>
+        <p:cNvPr id="1" name="">
+          <a:extLst>
+            <a:ext uri="{FF2B5EF4-FFF2-40B4-BE49-F238E27FC236}">
+              <a16:creationId xmlns:a16="http://schemas.microsoft.com/office/drawing/2014/main" id="{6EF2A508-FF2A-1DF1-3DD3-78CD3A998595}"/>
+            </a:ext>
+          </a:extLst>
+        </p:cNvPr>
+        <p:cNvGrpSpPr/>
+        <p:nvPr/>
+      </p:nvGrpSpPr>
+      <p:grpSpPr>
+        <a:xfrm>
+          <a:off x="0" y="0"/>
+          <a:ext cx="0" cy="0"/>
+          <a:chOff x="0" y="0"/>
+          <a:chExt cx="0" cy="0"/>
+        </a:xfrm>
+      </p:grpSpPr>
+      <p:sp>
+        <p:nvSpPr>
+          <p:cNvPr id="2" name="슬라이드 이미지 개체 틀 1">
+            <a:extLst>
+              <a:ext uri="{FF2B5EF4-FFF2-40B4-BE49-F238E27FC236}">
+                <a16:creationId xmlns:a16="http://schemas.microsoft.com/office/drawing/2014/main" id="{9947AFE7-477E-C4FB-922E-A5DB497B17F7}"/>
+              </a:ext>
+            </a:extLst>
+          </p:cNvPr>
+          <p:cNvSpPr>
+            <a:spLocks noGrp="1" noRot="1" noChangeAspect="1"/>
+          </p:cNvSpPr>
+          <p:nvPr>
+            <p:ph type="sldImg"/>
+          </p:nvPr>
+        </p:nvSpPr>
+        <p:spPr/>
+      </p:sp>
+      <p:sp>
+        <p:nvSpPr>
+          <p:cNvPr id="3" name="슬라이드 노트 개체 틀 2">
+            <a:extLst>
+              <a:ext uri="{FF2B5EF4-FFF2-40B4-BE49-F238E27FC236}">
+                <a16:creationId xmlns:a16="http://schemas.microsoft.com/office/drawing/2014/main" id="{456F2381-BDD9-A6C4-B2FC-712A1F1B6CCE}"/>
+              </a:ext>
+            </a:extLst>
+          </p:cNvPr>
+          <p:cNvSpPr>
+            <a:spLocks noGrp="1"/>
+          </p:cNvSpPr>
+          <p:nvPr>
+            <p:ph type="body" idx="1"/>
+          </p:nvPr>
+        </p:nvSpPr>
+        <p:spPr/>
+        <p:txBody>
+          <a:bodyPr/>
+          <a:lstStyle/>
+          <a:p>
+            <a:endParaRPr lang="ko-KR" altLang="en-US"/>
+          </a:p>
+        </p:txBody>
+      </p:sp>
+      <p:sp>
+        <p:nvSpPr>
+          <p:cNvPr id="4" name="슬라이드 번호 개체 틀 3">
+            <a:extLst>
+              <a:ext uri="{FF2B5EF4-FFF2-40B4-BE49-F238E27FC236}">
+                <a16:creationId xmlns:a16="http://schemas.microsoft.com/office/drawing/2014/main" id="{759EAA6B-72CD-38D7-FF10-CEB4B320E9F9}"/>
+              </a:ext>
+            </a:extLst>
+          </p:cNvPr>
+          <p:cNvSpPr>
+            <a:spLocks noGrp="1"/>
+          </p:cNvSpPr>
+          <p:nvPr>
+            <p:ph type="sldNum" sz="quarter" idx="10"/>
+          </p:nvPr>
+        </p:nvSpPr>
+        <p:spPr/>
+        <p:txBody>
+          <a:bodyPr/>
+          <a:lstStyle/>
+          <a:p>
+            <a:fld id="{BA5DFA43-8D57-47FB-BC46-057616015C3B}" type="slidenum">
+              <a:rPr lang="ko-KR" altLang="en-US" smtClean="0"/>
+              <a:t>1</a:t>
+            </a:fld>
+            <a:endParaRPr lang="ko-KR" altLang="en-US"/>
+          </a:p>
+        </p:txBody>
+      </p:sp>
+    </p:spTree>
+    <p:extLst>
+      <p:ext uri="{BB962C8B-B14F-4D97-AF65-F5344CB8AC3E}">
+        <p14:creationId xmlns:p14="http://schemas.microsoft.com/office/powerpoint/2010/main" val="2709561344"/>
+      </p:ext>
+    </p:extLst>
+  </p:cSld>
+  <p:clrMapOvr>
+    <a:masterClrMapping/>
+  </p:clrMapOvr>
+</p:notes>
+</file>
+
+<file path=ppt/notesSlides/notesSlide2.xml><?xml version="1.0" encoding="utf-8"?>
+<p:notes xmlns:a="http://schemas.openxmlformats.org/drawingml/2006/main" xmlns:r="http://schemas.openxmlformats.org/officeDocument/2006/relationships" xmlns:p="http://schemas.openxmlformats.org/presentationml/2006/main">
+  <p:cSld>
+    <p:spTree>
+      <p:nvGrpSpPr>
+        <p:cNvPr id="1" name="">
+          <a:extLst>
+            <a:ext uri="{FF2B5EF4-FFF2-40B4-BE49-F238E27FC236}">
+              <a16:creationId xmlns:a16="http://schemas.microsoft.com/office/drawing/2014/main" id="{3B349794-A6C6-98AC-C41F-BFB42C3844B3}"/>
+            </a:ext>
+          </a:extLst>
+        </p:cNvPr>
+        <p:cNvGrpSpPr/>
+        <p:nvPr/>
+      </p:nvGrpSpPr>
+      <p:grpSpPr>
+        <a:xfrm>
+          <a:off x="0" y="0"/>
+          <a:ext cx="0" cy="0"/>
+          <a:chOff x="0" y="0"/>
+          <a:chExt cx="0" cy="0"/>
+        </a:xfrm>
+      </p:grpSpPr>
+      <p:sp>
+        <p:nvSpPr>
+          <p:cNvPr id="2" name="슬라이드 이미지 개체 틀 1">
+            <a:extLst>
+              <a:ext uri="{FF2B5EF4-FFF2-40B4-BE49-F238E27FC236}">
+                <a16:creationId xmlns:a16="http://schemas.microsoft.com/office/drawing/2014/main" id="{48B5A7F9-9BC0-0DAB-E35A-CBDB2596C545}"/>
+              </a:ext>
+            </a:extLst>
+          </p:cNvPr>
+          <p:cNvSpPr>
+            <a:spLocks noGrp="1" noRot="1" noChangeAspect="1"/>
+          </p:cNvSpPr>
+          <p:nvPr>
+            <p:ph type="sldImg"/>
+          </p:nvPr>
+        </p:nvSpPr>
+        <p:spPr/>
+      </p:sp>
+      <p:sp>
+        <p:nvSpPr>
+          <p:cNvPr id="3" name="슬라이드 노트 개체 틀 2">
+            <a:extLst>
+              <a:ext uri="{FF2B5EF4-FFF2-40B4-BE49-F238E27FC236}">
+                <a16:creationId xmlns:a16="http://schemas.microsoft.com/office/drawing/2014/main" id="{B1CF6DC8-1865-0662-7A1C-21F3FDD85273}"/>
+              </a:ext>
+            </a:extLst>
+          </p:cNvPr>
+          <p:cNvSpPr>
+            <a:spLocks noGrp="1"/>
+          </p:cNvSpPr>
+          <p:nvPr>
+            <p:ph type="body" idx="1"/>
+          </p:nvPr>
+        </p:nvSpPr>
+        <p:spPr/>
+        <p:txBody>
+          <a:bodyPr/>
+          <a:lstStyle/>
+          <a:p>
+            <a:endParaRPr lang="ko-KR" altLang="en-US"/>
+          </a:p>
+        </p:txBody>
+      </p:sp>
+      <p:sp>
+        <p:nvSpPr>
+          <p:cNvPr id="4" name="슬라이드 번호 개체 틀 3">
+            <a:extLst>
+              <a:ext uri="{FF2B5EF4-FFF2-40B4-BE49-F238E27FC236}">
+                <a16:creationId xmlns:a16="http://schemas.microsoft.com/office/drawing/2014/main" id="{9473D9D6-E96D-F05E-BE90-570EB6173962}"/>
+              </a:ext>
+            </a:extLst>
+          </p:cNvPr>
+          <p:cNvSpPr>
+            <a:spLocks noGrp="1"/>
+          </p:cNvSpPr>
+          <p:nvPr>
+            <p:ph type="sldNum" sz="quarter" idx="10"/>
+          </p:nvPr>
+        </p:nvSpPr>
+        <p:spPr/>
+        <p:txBody>
+          <a:bodyPr/>
+          <a:lstStyle/>
+          <a:p>
+            <a:fld id="{BA5DFA43-8D57-47FB-BC46-057616015C3B}" type="slidenum">
+              <a:rPr lang="ko-KR" altLang="en-US" smtClean="0"/>
+              <a:t>5</a:t>
+            </a:fld>
+            <a:endParaRPr lang="ko-KR" altLang="en-US"/>
+          </a:p>
+        </p:txBody>
+      </p:sp>
+    </p:spTree>
+    <p:extLst>
+      <p:ext uri="{BB962C8B-B14F-4D97-AF65-F5344CB8AC3E}">
+        <p14:creationId xmlns:p14="http://schemas.microsoft.com/office/powerpoint/2010/main" val="4170495164"/>
+      </p:ext>
+    </p:extLst>
+  </p:cSld>
+  <p:clrMapOvr>
+    <a:masterClrMapping/>
+  </p:clrMapOvr>
+</p:notes>
+</file>
+
+<file path=ppt/notesSlides/notesSlide3.xml><?xml version="1.0" encoding="utf-8"?>
+<p:notes xmlns:a="http://schemas.openxmlformats.org/drawingml/2006/main" xmlns:r="http://schemas.openxmlformats.org/officeDocument/2006/relationships" xmlns:p="http://schemas.openxmlformats.org/presentationml/2006/main">
+  <p:cSld>
+    <p:spTree>
+      <p:nvGrpSpPr>
         <p:cNvPr id="1" name=""/>
         <p:cNvGrpSpPr/>
         <p:nvPr/>
@@ -549,7 +767,7 @@
           <a:p>
             <a:fld id="{BA5DFA43-8D57-47FB-BC46-057616015C3B}" type="slidenum">
               <a:rPr lang="ko-KR" altLang="en-US" smtClean="0"/>
-              <a:t>5</a:t>
+              <a:t>7</a:t>
             </a:fld>
             <a:endParaRPr lang="ko-KR" altLang="en-US"/>
           </a:p>
@@ -747,7 +965,7 @@
           <a:p>
             <a:fld id="{FB30EDBD-1C2D-4C1E-B459-B60219FAB484}" type="datetimeFigureOut">
               <a:rPr lang="ko-KR" altLang="en-US" smtClean="0"/>
-              <a:t>2026. 2. 28.</a:t>
+              <a:t>2026. 3. 3.</a:t>
             </a:fld>
             <a:endParaRPr lang="ko-KR" altLang="en-US"/>
           </a:p>
@@ -910,7 +1128,7 @@
           <a:p>
             <a:fld id="{FB30EDBD-1C2D-4C1E-B459-B60219FAB484}" type="datetimeFigureOut">
               <a:rPr lang="ko-KR" altLang="en-US" smtClean="0"/>
-              <a:t>2026. 2. 28.</a:t>
+              <a:t>2026. 3. 3.</a:t>
             </a:fld>
             <a:endParaRPr lang="ko-KR" altLang="en-US"/>
           </a:p>
@@ -1083,7 +1301,7 @@
           <a:p>
             <a:fld id="{FB30EDBD-1C2D-4C1E-B459-B60219FAB484}" type="datetimeFigureOut">
               <a:rPr lang="ko-KR" altLang="en-US" smtClean="0"/>
-              <a:t>2026. 2. 28.</a:t>
+              <a:t>2026. 3. 3.</a:t>
             </a:fld>
             <a:endParaRPr lang="ko-KR" altLang="en-US"/>
           </a:p>
@@ -1246,7 +1464,7 @@
           <a:p>
             <a:fld id="{FB30EDBD-1C2D-4C1E-B459-B60219FAB484}" type="datetimeFigureOut">
               <a:rPr lang="ko-KR" altLang="en-US" smtClean="0"/>
-              <a:t>2026. 2. 28.</a:t>
+              <a:t>2026. 3. 3.</a:t>
             </a:fld>
             <a:endParaRPr lang="ko-KR" altLang="en-US"/>
           </a:p>
@@ -1486,7 +1704,7 @@
           <a:p>
             <a:fld id="{FB30EDBD-1C2D-4C1E-B459-B60219FAB484}" type="datetimeFigureOut">
               <a:rPr lang="ko-KR" altLang="en-US" smtClean="0"/>
-              <a:t>2026. 2. 28.</a:t>
+              <a:t>2026. 3. 3.</a:t>
             </a:fld>
             <a:endParaRPr lang="ko-KR" altLang="en-US"/>
           </a:p>
@@ -1766,7 +1984,7 @@
           <a:p>
             <a:fld id="{FB30EDBD-1C2D-4C1E-B459-B60219FAB484}" type="datetimeFigureOut">
               <a:rPr lang="ko-KR" altLang="en-US" smtClean="0"/>
-              <a:t>2026. 2. 28.</a:t>
+              <a:t>2026. 3. 3.</a:t>
             </a:fld>
             <a:endParaRPr lang="ko-KR" altLang="en-US"/>
           </a:p>
@@ -2180,7 +2398,7 @@
           <a:p>
             <a:fld id="{FB30EDBD-1C2D-4C1E-B459-B60219FAB484}" type="datetimeFigureOut">
               <a:rPr lang="ko-KR" altLang="en-US" smtClean="0"/>
-              <a:t>2026. 2. 28.</a:t>
+              <a:t>2026. 3. 3.</a:t>
             </a:fld>
             <a:endParaRPr lang="ko-KR" altLang="en-US"/>
           </a:p>
@@ -2292,7 +2510,7 @@
           <a:p>
             <a:fld id="{FB30EDBD-1C2D-4C1E-B459-B60219FAB484}" type="datetimeFigureOut">
               <a:rPr lang="ko-KR" altLang="en-US" smtClean="0"/>
-              <a:t>2026. 2. 28.</a:t>
+              <a:t>2026. 3. 3.</a:t>
             </a:fld>
             <a:endParaRPr lang="ko-KR" altLang="en-US"/>
           </a:p>
@@ -2382,7 +2600,7 @@
           <a:p>
             <a:fld id="{FB30EDBD-1C2D-4C1E-B459-B60219FAB484}" type="datetimeFigureOut">
               <a:rPr lang="ko-KR" altLang="en-US" smtClean="0"/>
-              <a:t>2026. 2. 28.</a:t>
+              <a:t>2026. 3. 3.</a:t>
             </a:fld>
             <a:endParaRPr lang="ko-KR" altLang="en-US"/>
           </a:p>
@@ -2652,7 +2870,7 @@
           <a:p>
             <a:fld id="{FB30EDBD-1C2D-4C1E-B459-B60219FAB484}" type="datetimeFigureOut">
               <a:rPr lang="ko-KR" altLang="en-US" smtClean="0"/>
-              <a:t>2026. 2. 28.</a:t>
+              <a:t>2026. 3. 3.</a:t>
             </a:fld>
             <a:endParaRPr lang="ko-KR" altLang="en-US"/>
           </a:p>
@@ -2899,7 +3117,7 @@
           <a:p>
             <a:fld id="{FB30EDBD-1C2D-4C1E-B459-B60219FAB484}" type="datetimeFigureOut">
               <a:rPr lang="ko-KR" altLang="en-US" smtClean="0"/>
-              <a:t>2026. 2. 28.</a:t>
+              <a:t>2026. 3. 3.</a:t>
             </a:fld>
             <a:endParaRPr lang="ko-KR" altLang="en-US"/>
           </a:p>
@@ -3105,7 +3323,7 @@
           <a:p>
             <a:fld id="{FB30EDBD-1C2D-4C1E-B459-B60219FAB484}" type="datetimeFigureOut">
               <a:rPr lang="ko-KR" altLang="en-US" smtClean="0"/>
-              <a:t>2026. 2. 28.</a:t>
+              <a:t>2026. 3. 3.</a:t>
             </a:fld>
             <a:endParaRPr lang="ko-KR" altLang="en-US"/>
           </a:p>
@@ -3463,6 +3681,2094 @@
   <p:cSld>
     <p:spTree>
       <p:nvGrpSpPr>
+        <p:cNvPr id="1" name="">
+          <a:extLst>
+            <a:ext uri="{FF2B5EF4-FFF2-40B4-BE49-F238E27FC236}">
+              <a16:creationId xmlns:a16="http://schemas.microsoft.com/office/drawing/2014/main" id="{536E8B20-5CB0-266F-D010-4969008FB20B}"/>
+            </a:ext>
+          </a:extLst>
+        </p:cNvPr>
+        <p:cNvGrpSpPr/>
+        <p:nvPr/>
+      </p:nvGrpSpPr>
+      <p:grpSpPr>
+        <a:xfrm>
+          <a:off x="0" y="0"/>
+          <a:ext cx="0" cy="0"/>
+          <a:chOff x="0" y="0"/>
+          <a:chExt cx="0" cy="0"/>
+        </a:xfrm>
+      </p:grpSpPr>
+      <p:sp>
+        <p:nvSpPr>
+          <p:cNvPr id="5" name="사각형: 둥근 모서리 114">
+            <a:extLst>
+              <a:ext uri="{FF2B5EF4-FFF2-40B4-BE49-F238E27FC236}">
+                <a16:creationId xmlns:a16="http://schemas.microsoft.com/office/drawing/2014/main" id="{EF6AAB73-A361-5705-CDB8-DEACBD4EB572}"/>
+              </a:ext>
+            </a:extLst>
+          </p:cNvPr>
+          <p:cNvSpPr/>
+          <p:nvPr/>
+        </p:nvSpPr>
+        <p:spPr>
+          <a:xfrm>
+            <a:off x="7097834" y="50800"/>
+            <a:ext cx="1622337" cy="1974849"/>
+          </a:xfrm>
+          <a:prstGeom prst="roundRect">
+            <a:avLst>
+              <a:gd name="adj" fmla="val 4028"/>
+            </a:avLst>
+          </a:prstGeom>
+          <a:ln w="12700"/>
+        </p:spPr>
+        <p:style>
+          <a:lnRef idx="2">
+            <a:schemeClr val="dk1"/>
+          </a:lnRef>
+          <a:fillRef idx="1">
+            <a:schemeClr val="lt1"/>
+          </a:fillRef>
+          <a:effectRef idx="0">
+            <a:schemeClr val="dk1"/>
+          </a:effectRef>
+          <a:fontRef idx="minor">
+            <a:schemeClr val="dk1"/>
+          </a:fontRef>
+        </p:style>
+        <p:txBody>
+          <a:bodyPr rtlCol="0" anchor="t"/>
+          <a:lstStyle/>
+          <a:p>
+            <a:pPr algn="ctr"/>
+            <a:r>
+              <a:rPr lang="en-US" altLang="ko-KR" sz="1000" b="1" dirty="0">
+                <a:solidFill>
+                  <a:schemeClr val="tx1"/>
+                </a:solidFill>
+              </a:rPr>
+              <a:t>Pod B</a:t>
+            </a:r>
+            <a:endParaRPr lang="ko-KR" altLang="en-US" sz="1000" b="1" dirty="0">
+              <a:solidFill>
+                <a:schemeClr val="tx1"/>
+              </a:solidFill>
+            </a:endParaRPr>
+          </a:p>
+        </p:txBody>
+      </p:sp>
+      <p:sp>
+        <p:nvSpPr>
+          <p:cNvPr id="2" name="제목 1">
+            <a:extLst>
+              <a:ext uri="{FF2B5EF4-FFF2-40B4-BE49-F238E27FC236}">
+                <a16:creationId xmlns:a16="http://schemas.microsoft.com/office/drawing/2014/main" id="{5C0F9C8F-437F-D0AF-97AA-D56EC0818CE2}"/>
+              </a:ext>
+            </a:extLst>
+          </p:cNvPr>
+          <p:cNvSpPr>
+            <a:spLocks noGrp="1"/>
+          </p:cNvSpPr>
+          <p:nvPr>
+            <p:ph type="title"/>
+          </p:nvPr>
+        </p:nvSpPr>
+        <p:spPr>
+          <a:xfrm>
+            <a:off x="0" y="-773419"/>
+            <a:ext cx="9144000" cy="857250"/>
+          </a:xfrm>
+        </p:spPr>
+        <p:txBody>
+          <a:bodyPr>
+            <a:normAutofit/>
+          </a:bodyPr>
+          <a:lstStyle/>
+          <a:p>
+            <a:r>
+              <a:rPr lang="en-US" altLang="ko-KR"/>
+              <a:t>CUDA Container Stack</a:t>
+            </a:r>
+            <a:endParaRPr lang="ko-KR" altLang="en-US" dirty="0"/>
+          </a:p>
+        </p:txBody>
+      </p:sp>
+      <p:sp>
+        <p:nvSpPr>
+          <p:cNvPr id="38" name="사각형: 둥근 모서리 114">
+            <a:extLst>
+              <a:ext uri="{FF2B5EF4-FFF2-40B4-BE49-F238E27FC236}">
+                <a16:creationId xmlns:a16="http://schemas.microsoft.com/office/drawing/2014/main" id="{715760DB-F35A-5664-E40F-12A0BEDC0B89}"/>
+              </a:ext>
+            </a:extLst>
+          </p:cNvPr>
+          <p:cNvSpPr/>
+          <p:nvPr/>
+        </p:nvSpPr>
+        <p:spPr>
+          <a:xfrm>
+            <a:off x="1547664" y="2077752"/>
+            <a:ext cx="6043510" cy="1221469"/>
+          </a:xfrm>
+          <a:prstGeom prst="roundRect">
+            <a:avLst>
+              <a:gd name="adj" fmla="val 7201"/>
+            </a:avLst>
+          </a:prstGeom>
+          <a:ln w="12700"/>
+        </p:spPr>
+        <p:style>
+          <a:lnRef idx="2">
+            <a:schemeClr val="dk1"/>
+          </a:lnRef>
+          <a:fillRef idx="1">
+            <a:schemeClr val="lt1"/>
+          </a:fillRef>
+          <a:effectRef idx="0">
+            <a:schemeClr val="dk1"/>
+          </a:effectRef>
+          <a:fontRef idx="minor">
+            <a:schemeClr val="dk1"/>
+          </a:fontRef>
+        </p:style>
+        <p:txBody>
+          <a:bodyPr rtlCol="0" anchor="b"/>
+          <a:lstStyle/>
+          <a:p>
+            <a:pPr algn="ctr"/>
+            <a:r>
+              <a:rPr lang="en-US" altLang="ko-KR" sz="1000" b="1"/>
+              <a:t>Host Filesystem</a:t>
+            </a:r>
+            <a:endParaRPr lang="en-US" altLang="ko-KR" sz="1000" b="1" dirty="0"/>
+          </a:p>
+        </p:txBody>
+      </p:sp>
+      <p:sp>
+        <p:nvSpPr>
+          <p:cNvPr id="37" name="사각형: 둥근 모서리 114">
+            <a:extLst>
+              <a:ext uri="{FF2B5EF4-FFF2-40B4-BE49-F238E27FC236}">
+                <a16:creationId xmlns:a16="http://schemas.microsoft.com/office/drawing/2014/main" id="{13D7B3E7-F783-1EC1-5F29-0874EF0E893E}"/>
+              </a:ext>
+            </a:extLst>
+          </p:cNvPr>
+          <p:cNvSpPr/>
+          <p:nvPr/>
+        </p:nvSpPr>
+        <p:spPr>
+          <a:xfrm>
+            <a:off x="1557988" y="4107427"/>
+            <a:ext cx="6033186" cy="930045"/>
+          </a:xfrm>
+          <a:prstGeom prst="roundRect">
+            <a:avLst>
+              <a:gd name="adj" fmla="val 6397"/>
+            </a:avLst>
+          </a:prstGeom>
+          <a:ln w="12700"/>
+        </p:spPr>
+        <p:style>
+          <a:lnRef idx="2">
+            <a:schemeClr val="dk1"/>
+          </a:lnRef>
+          <a:fillRef idx="1">
+            <a:schemeClr val="lt1"/>
+          </a:fillRef>
+          <a:effectRef idx="0">
+            <a:schemeClr val="dk1"/>
+          </a:effectRef>
+          <a:fontRef idx="minor">
+            <a:schemeClr val="dk1"/>
+          </a:fontRef>
+        </p:style>
+        <p:txBody>
+          <a:bodyPr rtlCol="0" anchor="b"/>
+          <a:lstStyle/>
+          <a:p>
+            <a:pPr algn="ctr"/>
+            <a:r>
+              <a:rPr lang="en-US" altLang="ko-KR" sz="1000" b="1"/>
+              <a:t>Host Hardware</a:t>
+            </a:r>
+            <a:endParaRPr lang="en-US" altLang="ko-KR" sz="1000" b="1" dirty="0"/>
+          </a:p>
+        </p:txBody>
+      </p:sp>
+      <p:sp>
+        <p:nvSpPr>
+          <p:cNvPr id="33" name="사각형: 둥근 모서리 114">
+            <a:extLst>
+              <a:ext uri="{FF2B5EF4-FFF2-40B4-BE49-F238E27FC236}">
+                <a16:creationId xmlns:a16="http://schemas.microsoft.com/office/drawing/2014/main" id="{F56E2D5A-3AEA-BC86-A33B-53D0167D37EC}"/>
+              </a:ext>
+            </a:extLst>
+          </p:cNvPr>
+          <p:cNvSpPr/>
+          <p:nvPr/>
+        </p:nvSpPr>
+        <p:spPr>
+          <a:xfrm>
+            <a:off x="1552826" y="3298771"/>
+            <a:ext cx="6043510" cy="814651"/>
+          </a:xfrm>
+          <a:prstGeom prst="roundRect">
+            <a:avLst>
+              <a:gd name="adj" fmla="val 7201"/>
+            </a:avLst>
+          </a:prstGeom>
+          <a:ln w="12700"/>
+        </p:spPr>
+        <p:style>
+          <a:lnRef idx="2">
+            <a:schemeClr val="dk1"/>
+          </a:lnRef>
+          <a:fillRef idx="1">
+            <a:schemeClr val="lt1"/>
+          </a:fillRef>
+          <a:effectRef idx="0">
+            <a:schemeClr val="dk1"/>
+          </a:effectRef>
+          <a:fontRef idx="minor">
+            <a:schemeClr val="dk1"/>
+          </a:fontRef>
+        </p:style>
+        <p:txBody>
+          <a:bodyPr rtlCol="0" anchor="b"/>
+          <a:lstStyle/>
+          <a:p>
+            <a:pPr algn="ctr"/>
+            <a:r>
+              <a:rPr lang="en-US" altLang="ko-KR" sz="1000" b="1"/>
+              <a:t>Host Kernel</a:t>
+            </a:r>
+            <a:endParaRPr lang="en-US" altLang="ko-KR" sz="1000" b="1" dirty="0"/>
+          </a:p>
+        </p:txBody>
+      </p:sp>
+      <p:sp>
+        <p:nvSpPr>
+          <p:cNvPr id="14" name="사각형: 둥근 모서리 114">
+            <a:extLst>
+              <a:ext uri="{FF2B5EF4-FFF2-40B4-BE49-F238E27FC236}">
+                <a16:creationId xmlns:a16="http://schemas.microsoft.com/office/drawing/2014/main" id="{33278C70-4E26-832E-F3CF-8888DB9B5A2A}"/>
+              </a:ext>
+            </a:extLst>
+          </p:cNvPr>
+          <p:cNvSpPr/>
+          <p:nvPr/>
+        </p:nvSpPr>
+        <p:spPr>
+          <a:xfrm>
+            <a:off x="2145948" y="4214286"/>
+            <a:ext cx="1077331" cy="548791"/>
+          </a:xfrm>
+          <a:prstGeom prst="roundRect">
+            <a:avLst>
+              <a:gd name="adj" fmla="val 7242"/>
+            </a:avLst>
+          </a:prstGeom>
+          <a:solidFill>
+            <a:schemeClr val="bg1">
+              <a:lumMod val="95000"/>
+            </a:schemeClr>
+          </a:solidFill>
+          <a:ln w="12700"/>
+        </p:spPr>
+        <p:style>
+          <a:lnRef idx="2">
+            <a:schemeClr val="dk1"/>
+          </a:lnRef>
+          <a:fillRef idx="1">
+            <a:schemeClr val="lt1"/>
+          </a:fillRef>
+          <a:effectRef idx="0">
+            <a:schemeClr val="dk1"/>
+          </a:effectRef>
+          <a:fontRef idx="minor">
+            <a:schemeClr val="dk1"/>
+          </a:fontRef>
+        </p:style>
+        <p:txBody>
+          <a:bodyPr rtlCol="0" anchor="ctr"/>
+          <a:lstStyle/>
+          <a:p>
+            <a:pPr algn="ctr"/>
+            <a:r>
+              <a:rPr lang="en-US" altLang="ko-KR" sz="1000"/>
+              <a:t>NVIDIA</a:t>
+            </a:r>
+          </a:p>
+          <a:p>
+            <a:pPr algn="ctr"/>
+            <a:r>
+              <a:rPr lang="en-US" altLang="ko-KR" sz="1000"/>
+              <a:t>GPU 0</a:t>
+            </a:r>
+            <a:endParaRPr lang="en-US" altLang="ko-KR" sz="1000" dirty="0"/>
+          </a:p>
+        </p:txBody>
+      </p:sp>
+      <p:sp>
+        <p:nvSpPr>
+          <p:cNvPr id="15" name="사각형: 둥근 모서리 114">
+            <a:extLst>
+              <a:ext uri="{FF2B5EF4-FFF2-40B4-BE49-F238E27FC236}">
+                <a16:creationId xmlns:a16="http://schemas.microsoft.com/office/drawing/2014/main" id="{BF9A344D-403F-E740-9878-AAA1304E842D}"/>
+              </a:ext>
+            </a:extLst>
+          </p:cNvPr>
+          <p:cNvSpPr/>
+          <p:nvPr/>
+        </p:nvSpPr>
+        <p:spPr>
+          <a:xfrm>
+            <a:off x="3405927" y="4214286"/>
+            <a:ext cx="1077331" cy="548791"/>
+          </a:xfrm>
+          <a:prstGeom prst="roundRect">
+            <a:avLst>
+              <a:gd name="adj" fmla="val 7242"/>
+            </a:avLst>
+          </a:prstGeom>
+          <a:solidFill>
+            <a:schemeClr val="bg1">
+              <a:lumMod val="95000"/>
+            </a:schemeClr>
+          </a:solidFill>
+          <a:ln w="12700"/>
+        </p:spPr>
+        <p:style>
+          <a:lnRef idx="2">
+            <a:schemeClr val="dk1"/>
+          </a:lnRef>
+          <a:fillRef idx="1">
+            <a:schemeClr val="lt1"/>
+          </a:fillRef>
+          <a:effectRef idx="0">
+            <a:schemeClr val="dk1"/>
+          </a:effectRef>
+          <a:fontRef idx="minor">
+            <a:schemeClr val="dk1"/>
+          </a:fontRef>
+        </p:style>
+        <p:txBody>
+          <a:bodyPr rtlCol="0" anchor="ctr"/>
+          <a:lstStyle/>
+          <a:p>
+            <a:pPr algn="ctr"/>
+            <a:r>
+              <a:rPr lang="en-US" altLang="ko-KR" sz="1000"/>
+              <a:t>NVIDIA</a:t>
+            </a:r>
+          </a:p>
+          <a:p>
+            <a:pPr algn="ctr"/>
+            <a:r>
+              <a:rPr lang="en-US" altLang="ko-KR" sz="1000"/>
+              <a:t>GPU 1</a:t>
+            </a:r>
+            <a:endParaRPr lang="en-US" altLang="ko-KR" sz="1000" dirty="0"/>
+          </a:p>
+        </p:txBody>
+      </p:sp>
+      <p:sp>
+        <p:nvSpPr>
+          <p:cNvPr id="16" name="사각형: 둥근 모서리 114">
+            <a:extLst>
+              <a:ext uri="{FF2B5EF4-FFF2-40B4-BE49-F238E27FC236}">
+                <a16:creationId xmlns:a16="http://schemas.microsoft.com/office/drawing/2014/main" id="{229628F2-2ACB-D300-083B-933563ACB3DF}"/>
+              </a:ext>
+            </a:extLst>
+          </p:cNvPr>
+          <p:cNvSpPr/>
+          <p:nvPr/>
+        </p:nvSpPr>
+        <p:spPr>
+          <a:xfrm>
+            <a:off x="4665905" y="4214286"/>
+            <a:ext cx="1077331" cy="548791"/>
+          </a:xfrm>
+          <a:prstGeom prst="roundRect">
+            <a:avLst>
+              <a:gd name="adj" fmla="val 7242"/>
+            </a:avLst>
+          </a:prstGeom>
+          <a:solidFill>
+            <a:schemeClr val="bg1">
+              <a:lumMod val="95000"/>
+            </a:schemeClr>
+          </a:solidFill>
+          <a:ln w="12700"/>
+        </p:spPr>
+        <p:style>
+          <a:lnRef idx="2">
+            <a:schemeClr val="dk1"/>
+          </a:lnRef>
+          <a:fillRef idx="1">
+            <a:schemeClr val="lt1"/>
+          </a:fillRef>
+          <a:effectRef idx="0">
+            <a:schemeClr val="dk1"/>
+          </a:effectRef>
+          <a:fontRef idx="minor">
+            <a:schemeClr val="dk1"/>
+          </a:fontRef>
+        </p:style>
+        <p:txBody>
+          <a:bodyPr rtlCol="0" anchor="ctr"/>
+          <a:lstStyle/>
+          <a:p>
+            <a:pPr algn="ctr"/>
+            <a:r>
+              <a:rPr lang="en-US" altLang="ko-KR" sz="1000"/>
+              <a:t>NVIDIA</a:t>
+            </a:r>
+          </a:p>
+          <a:p>
+            <a:pPr algn="ctr"/>
+            <a:r>
+              <a:rPr lang="en-US" altLang="ko-KR" sz="1000"/>
+              <a:t>GPU 2</a:t>
+            </a:r>
+            <a:endParaRPr lang="en-US" altLang="ko-KR" sz="1000" dirty="0"/>
+          </a:p>
+        </p:txBody>
+      </p:sp>
+      <p:sp>
+        <p:nvSpPr>
+          <p:cNvPr id="17" name="사각형: 둥근 모서리 114">
+            <a:extLst>
+              <a:ext uri="{FF2B5EF4-FFF2-40B4-BE49-F238E27FC236}">
+                <a16:creationId xmlns:a16="http://schemas.microsoft.com/office/drawing/2014/main" id="{C70318E8-718F-3AC5-9B88-74F8F2A5DBB1}"/>
+              </a:ext>
+            </a:extLst>
+          </p:cNvPr>
+          <p:cNvSpPr/>
+          <p:nvPr/>
+        </p:nvSpPr>
+        <p:spPr>
+          <a:xfrm>
+            <a:off x="5925884" y="4214286"/>
+            <a:ext cx="1077331" cy="548791"/>
+          </a:xfrm>
+          <a:prstGeom prst="roundRect">
+            <a:avLst>
+              <a:gd name="adj" fmla="val 7242"/>
+            </a:avLst>
+          </a:prstGeom>
+          <a:solidFill>
+            <a:schemeClr val="bg1">
+              <a:lumMod val="95000"/>
+            </a:schemeClr>
+          </a:solidFill>
+          <a:ln w="12700"/>
+        </p:spPr>
+        <p:style>
+          <a:lnRef idx="2">
+            <a:schemeClr val="dk1"/>
+          </a:lnRef>
+          <a:fillRef idx="1">
+            <a:schemeClr val="lt1"/>
+          </a:fillRef>
+          <a:effectRef idx="0">
+            <a:schemeClr val="dk1"/>
+          </a:effectRef>
+          <a:fontRef idx="minor">
+            <a:schemeClr val="dk1"/>
+          </a:fontRef>
+        </p:style>
+        <p:txBody>
+          <a:bodyPr rtlCol="0" anchor="ctr"/>
+          <a:lstStyle/>
+          <a:p>
+            <a:pPr algn="ctr"/>
+            <a:r>
+              <a:rPr lang="en-US" altLang="ko-KR" sz="1000"/>
+              <a:t>NVIDIA</a:t>
+            </a:r>
+          </a:p>
+          <a:p>
+            <a:pPr algn="ctr"/>
+            <a:r>
+              <a:rPr lang="en-US" altLang="ko-KR" sz="1000"/>
+              <a:t>GPU 3</a:t>
+            </a:r>
+            <a:endParaRPr lang="en-US" altLang="ko-KR" sz="1000" dirty="0"/>
+          </a:p>
+        </p:txBody>
+      </p:sp>
+      <p:sp>
+        <p:nvSpPr>
+          <p:cNvPr id="54" name="사각형: 둥근 모서리 114">
+            <a:extLst>
+              <a:ext uri="{FF2B5EF4-FFF2-40B4-BE49-F238E27FC236}">
+                <a16:creationId xmlns:a16="http://schemas.microsoft.com/office/drawing/2014/main" id="{10043FEE-E23C-35BF-1858-6BADDDFA64C5}"/>
+              </a:ext>
+            </a:extLst>
+          </p:cNvPr>
+          <p:cNvSpPr/>
+          <p:nvPr/>
+        </p:nvSpPr>
+        <p:spPr>
+          <a:xfrm>
+            <a:off x="3346476" y="339502"/>
+            <a:ext cx="3674596" cy="1636496"/>
+          </a:xfrm>
+          <a:prstGeom prst="roundRect">
+            <a:avLst>
+              <a:gd name="adj" fmla="val 4028"/>
+            </a:avLst>
+          </a:prstGeom>
+          <a:ln w="12700"/>
+        </p:spPr>
+        <p:style>
+          <a:lnRef idx="2">
+            <a:schemeClr val="dk1"/>
+          </a:lnRef>
+          <a:fillRef idx="1">
+            <a:schemeClr val="lt1"/>
+          </a:fillRef>
+          <a:effectRef idx="0">
+            <a:schemeClr val="dk1"/>
+          </a:effectRef>
+          <a:fontRef idx="minor">
+            <a:schemeClr val="dk1"/>
+          </a:fontRef>
+        </p:style>
+        <p:txBody>
+          <a:bodyPr rtlCol="0" anchor="t"/>
+          <a:lstStyle/>
+          <a:p>
+            <a:pPr algn="ctr"/>
+            <a:r>
+              <a:rPr lang="en-US" altLang="ko-KR" sz="1000" b="1"/>
+              <a:t>Container B</a:t>
+            </a:r>
+            <a:endParaRPr lang="ko-KR" altLang="en-US" sz="1000" b="1" dirty="0">
+              <a:solidFill>
+                <a:schemeClr val="accent2">
+                  <a:lumMod val="75000"/>
+                </a:schemeClr>
+              </a:solidFill>
+            </a:endParaRPr>
+          </a:p>
+        </p:txBody>
+      </p:sp>
+      <p:sp>
+        <p:nvSpPr>
+          <p:cNvPr id="55" name="사각형: 둥근 모서리 114">
+            <a:extLst>
+              <a:ext uri="{FF2B5EF4-FFF2-40B4-BE49-F238E27FC236}">
+                <a16:creationId xmlns:a16="http://schemas.microsoft.com/office/drawing/2014/main" id="{E13B8AD4-E810-DF4E-C9A7-6A146565EF13}"/>
+              </a:ext>
+            </a:extLst>
+          </p:cNvPr>
+          <p:cNvSpPr/>
+          <p:nvPr/>
+        </p:nvSpPr>
+        <p:spPr>
+          <a:xfrm>
+            <a:off x="3434210" y="1515040"/>
+            <a:ext cx="1099999" cy="377294"/>
+          </a:xfrm>
+          <a:prstGeom prst="roundRect">
+            <a:avLst>
+              <a:gd name="adj" fmla="val 7242"/>
+            </a:avLst>
+          </a:prstGeom>
+          <a:solidFill>
+            <a:schemeClr val="bg1">
+              <a:lumMod val="95000"/>
+            </a:schemeClr>
+          </a:solidFill>
+          <a:ln w="12700"/>
+        </p:spPr>
+        <p:style>
+          <a:lnRef idx="2">
+            <a:schemeClr val="dk1"/>
+          </a:lnRef>
+          <a:fillRef idx="1">
+            <a:schemeClr val="lt1"/>
+          </a:fillRef>
+          <a:effectRef idx="0">
+            <a:schemeClr val="dk1"/>
+          </a:effectRef>
+          <a:fontRef idx="minor">
+            <a:schemeClr val="dk1"/>
+          </a:fontRef>
+        </p:style>
+        <p:txBody>
+          <a:bodyPr rtlCol="0" anchor="ctr"/>
+          <a:lstStyle/>
+          <a:p>
+            <a:pPr algn="ctr"/>
+            <a:r>
+              <a:rPr lang="en-US" altLang="ko-KR" sz="1000"/>
+              <a:t>/dev/nvidia0</a:t>
+            </a:r>
+            <a:endParaRPr lang="en-US" altLang="ko-KR" sz="1000" dirty="0"/>
+          </a:p>
+        </p:txBody>
+      </p:sp>
+      <p:sp>
+        <p:nvSpPr>
+          <p:cNvPr id="56" name="사각형: 둥근 모서리 114">
+            <a:extLst>
+              <a:ext uri="{FF2B5EF4-FFF2-40B4-BE49-F238E27FC236}">
+                <a16:creationId xmlns:a16="http://schemas.microsoft.com/office/drawing/2014/main" id="{1CB1F2AA-DC81-E2C1-7A13-B84199E7846D}"/>
+              </a:ext>
+            </a:extLst>
+          </p:cNvPr>
+          <p:cNvSpPr/>
+          <p:nvPr/>
+        </p:nvSpPr>
+        <p:spPr>
+          <a:xfrm>
+            <a:off x="4635810" y="1515040"/>
+            <a:ext cx="1099868" cy="377294"/>
+          </a:xfrm>
+          <a:prstGeom prst="roundRect">
+            <a:avLst>
+              <a:gd name="adj" fmla="val 7242"/>
+            </a:avLst>
+          </a:prstGeom>
+          <a:solidFill>
+            <a:schemeClr val="bg1">
+              <a:lumMod val="95000"/>
+            </a:schemeClr>
+          </a:solidFill>
+          <a:ln w="12700"/>
+        </p:spPr>
+        <p:style>
+          <a:lnRef idx="2">
+            <a:schemeClr val="dk1"/>
+          </a:lnRef>
+          <a:fillRef idx="1">
+            <a:schemeClr val="lt1"/>
+          </a:fillRef>
+          <a:effectRef idx="0">
+            <a:schemeClr val="dk1"/>
+          </a:effectRef>
+          <a:fontRef idx="minor">
+            <a:schemeClr val="dk1"/>
+          </a:fontRef>
+        </p:style>
+        <p:txBody>
+          <a:bodyPr rtlCol="0" anchor="ctr"/>
+          <a:lstStyle/>
+          <a:p>
+            <a:pPr algn="ctr"/>
+            <a:r>
+              <a:rPr lang="en-US" altLang="ko-KR" sz="1000"/>
+              <a:t>/dev/nvidia2</a:t>
+            </a:r>
+            <a:endParaRPr lang="en-US" altLang="ko-KR" sz="1000" dirty="0"/>
+          </a:p>
+        </p:txBody>
+      </p:sp>
+      <p:sp>
+        <p:nvSpPr>
+          <p:cNvPr id="57" name="사각형: 둥근 모서리 114">
+            <a:extLst>
+              <a:ext uri="{FF2B5EF4-FFF2-40B4-BE49-F238E27FC236}">
+                <a16:creationId xmlns:a16="http://schemas.microsoft.com/office/drawing/2014/main" id="{FE234310-EA87-B58A-F8CE-9180E6935EBD}"/>
+              </a:ext>
+            </a:extLst>
+          </p:cNvPr>
+          <p:cNvSpPr/>
+          <p:nvPr/>
+        </p:nvSpPr>
+        <p:spPr>
+          <a:xfrm>
+            <a:off x="3434210" y="1051997"/>
+            <a:ext cx="3498895" cy="377294"/>
+          </a:xfrm>
+          <a:prstGeom prst="roundRect">
+            <a:avLst>
+              <a:gd name="adj" fmla="val 7242"/>
+            </a:avLst>
+          </a:prstGeom>
+          <a:solidFill>
+            <a:schemeClr val="bg2">
+              <a:lumMod val="90000"/>
+            </a:schemeClr>
+          </a:solidFill>
+          <a:ln w="12700"/>
+        </p:spPr>
+        <p:style>
+          <a:lnRef idx="2">
+            <a:schemeClr val="dk1"/>
+          </a:lnRef>
+          <a:fillRef idx="1">
+            <a:schemeClr val="lt1"/>
+          </a:fillRef>
+          <a:effectRef idx="0">
+            <a:schemeClr val="dk1"/>
+          </a:effectRef>
+          <a:fontRef idx="minor">
+            <a:schemeClr val="dk1"/>
+          </a:fontRef>
+        </p:style>
+        <p:txBody>
+          <a:bodyPr rtlCol="0" anchor="ctr"/>
+          <a:lstStyle/>
+          <a:p>
+            <a:pPr algn="ctr"/>
+            <a:r>
+              <a:rPr lang="en-US" altLang="ko-KR" sz="1000"/>
+              <a:t>NVIDIA CUDA Lib/Toolkit</a:t>
+            </a:r>
+            <a:endParaRPr lang="en-US" altLang="ko-KR" sz="1000" dirty="0"/>
+          </a:p>
+        </p:txBody>
+      </p:sp>
+      <p:sp>
+        <p:nvSpPr>
+          <p:cNvPr id="85" name="사각형: 둥근 모서리 114">
+            <a:extLst>
+              <a:ext uri="{FF2B5EF4-FFF2-40B4-BE49-F238E27FC236}">
+                <a16:creationId xmlns:a16="http://schemas.microsoft.com/office/drawing/2014/main" id="{E7C861E8-6B20-F678-A387-14468B64DDD0}"/>
+              </a:ext>
+            </a:extLst>
+          </p:cNvPr>
+          <p:cNvSpPr/>
+          <p:nvPr/>
+        </p:nvSpPr>
+        <p:spPr>
+          <a:xfrm>
+            <a:off x="5833237" y="1515040"/>
+            <a:ext cx="1099868" cy="377294"/>
+          </a:xfrm>
+          <a:prstGeom prst="roundRect">
+            <a:avLst>
+              <a:gd name="adj" fmla="val 7242"/>
+            </a:avLst>
+          </a:prstGeom>
+          <a:solidFill>
+            <a:schemeClr val="bg1">
+              <a:lumMod val="95000"/>
+            </a:schemeClr>
+          </a:solidFill>
+          <a:ln w="12700"/>
+        </p:spPr>
+        <p:style>
+          <a:lnRef idx="2">
+            <a:schemeClr val="dk1"/>
+          </a:lnRef>
+          <a:fillRef idx="1">
+            <a:schemeClr val="lt1"/>
+          </a:fillRef>
+          <a:effectRef idx="0">
+            <a:schemeClr val="dk1"/>
+          </a:effectRef>
+          <a:fontRef idx="minor">
+            <a:schemeClr val="dk1"/>
+          </a:fontRef>
+        </p:style>
+        <p:txBody>
+          <a:bodyPr rtlCol="0" anchor="ctr"/>
+          <a:lstStyle/>
+          <a:p>
+            <a:pPr algn="ctr"/>
+            <a:r>
+              <a:rPr lang="en-US" altLang="ko-KR" sz="1000"/>
+              <a:t>/dev/nvidia3</a:t>
+            </a:r>
+            <a:endParaRPr lang="en-US" altLang="ko-KR" sz="1000" dirty="0"/>
+          </a:p>
+        </p:txBody>
+      </p:sp>
+      <p:sp>
+        <p:nvSpPr>
+          <p:cNvPr id="72" name="사각형: 둥근 모서리 114">
+            <a:extLst>
+              <a:ext uri="{FF2B5EF4-FFF2-40B4-BE49-F238E27FC236}">
+                <a16:creationId xmlns:a16="http://schemas.microsoft.com/office/drawing/2014/main" id="{A40CEE21-4126-4EA9-D005-8D6AA05FC3C8}"/>
+              </a:ext>
+            </a:extLst>
+          </p:cNvPr>
+          <p:cNvSpPr/>
+          <p:nvPr/>
+        </p:nvSpPr>
+        <p:spPr>
+          <a:xfrm>
+            <a:off x="7164288" y="339502"/>
+            <a:ext cx="1487816" cy="1636496"/>
+          </a:xfrm>
+          <a:prstGeom prst="roundRect">
+            <a:avLst>
+              <a:gd name="adj" fmla="val 4159"/>
+            </a:avLst>
+          </a:prstGeom>
+          <a:ln w="12700"/>
+        </p:spPr>
+        <p:style>
+          <a:lnRef idx="2">
+            <a:schemeClr val="dk1"/>
+          </a:lnRef>
+          <a:fillRef idx="1">
+            <a:schemeClr val="lt1"/>
+          </a:fillRef>
+          <a:effectRef idx="0">
+            <a:schemeClr val="dk1"/>
+          </a:effectRef>
+          <a:fontRef idx="minor">
+            <a:schemeClr val="dk1"/>
+          </a:fontRef>
+        </p:style>
+        <p:txBody>
+          <a:bodyPr rtlCol="0" anchor="t"/>
+          <a:lstStyle/>
+          <a:p>
+            <a:pPr algn="ctr"/>
+            <a:r>
+              <a:rPr lang="en-US" altLang="ko-KR" sz="1000" b="1"/>
+              <a:t>Container C</a:t>
+            </a:r>
+            <a:endParaRPr lang="ko-KR" altLang="en-US" sz="1000" b="1" dirty="0">
+              <a:solidFill>
+                <a:schemeClr val="accent2">
+                  <a:lumMod val="75000"/>
+                </a:schemeClr>
+              </a:solidFill>
+            </a:endParaRPr>
+          </a:p>
+        </p:txBody>
+      </p:sp>
+      <p:sp>
+        <p:nvSpPr>
+          <p:cNvPr id="74" name="사각형: 둥근 모서리 114">
+            <a:extLst>
+              <a:ext uri="{FF2B5EF4-FFF2-40B4-BE49-F238E27FC236}">
+                <a16:creationId xmlns:a16="http://schemas.microsoft.com/office/drawing/2014/main" id="{75050760-962B-EFA9-329D-D87ACB628E2E}"/>
+              </a:ext>
+            </a:extLst>
+          </p:cNvPr>
+          <p:cNvSpPr/>
+          <p:nvPr/>
+        </p:nvSpPr>
+        <p:spPr>
+          <a:xfrm>
+            <a:off x="7244475" y="1515040"/>
+            <a:ext cx="1321799" cy="377294"/>
+          </a:xfrm>
+          <a:prstGeom prst="roundRect">
+            <a:avLst>
+              <a:gd name="adj" fmla="val 7242"/>
+            </a:avLst>
+          </a:prstGeom>
+          <a:solidFill>
+            <a:schemeClr val="bg1">
+              <a:lumMod val="95000"/>
+            </a:schemeClr>
+          </a:solidFill>
+          <a:ln w="12700"/>
+        </p:spPr>
+        <p:style>
+          <a:lnRef idx="2">
+            <a:schemeClr val="dk1"/>
+          </a:lnRef>
+          <a:fillRef idx="1">
+            <a:schemeClr val="lt1"/>
+          </a:fillRef>
+          <a:effectRef idx="0">
+            <a:schemeClr val="dk1"/>
+          </a:effectRef>
+          <a:fontRef idx="minor">
+            <a:schemeClr val="dk1"/>
+          </a:fontRef>
+        </p:style>
+        <p:txBody>
+          <a:bodyPr rtlCol="0" anchor="ctr"/>
+          <a:lstStyle/>
+          <a:p>
+            <a:pPr algn="ctr"/>
+            <a:r>
+              <a:rPr lang="en-US" altLang="ko-KR" sz="1000"/>
+              <a:t>/dev/nvidia3</a:t>
+            </a:r>
+            <a:endParaRPr lang="en-US" altLang="ko-KR" sz="1000" dirty="0"/>
+          </a:p>
+        </p:txBody>
+      </p:sp>
+      <p:sp>
+        <p:nvSpPr>
+          <p:cNvPr id="75" name="사각형: 둥근 모서리 114">
+            <a:extLst>
+              <a:ext uri="{FF2B5EF4-FFF2-40B4-BE49-F238E27FC236}">
+                <a16:creationId xmlns:a16="http://schemas.microsoft.com/office/drawing/2014/main" id="{C7E78AFF-D068-E06B-33BF-D4132D988816}"/>
+              </a:ext>
+            </a:extLst>
+          </p:cNvPr>
+          <p:cNvSpPr/>
+          <p:nvPr/>
+        </p:nvSpPr>
+        <p:spPr>
+          <a:xfrm>
+            <a:off x="7244475" y="1051997"/>
+            <a:ext cx="1321798" cy="377294"/>
+          </a:xfrm>
+          <a:prstGeom prst="roundRect">
+            <a:avLst>
+              <a:gd name="adj" fmla="val 7242"/>
+            </a:avLst>
+          </a:prstGeom>
+          <a:solidFill>
+            <a:schemeClr val="bg2">
+              <a:lumMod val="90000"/>
+            </a:schemeClr>
+          </a:solidFill>
+          <a:ln w="12700"/>
+        </p:spPr>
+        <p:style>
+          <a:lnRef idx="2">
+            <a:schemeClr val="dk1"/>
+          </a:lnRef>
+          <a:fillRef idx="1">
+            <a:schemeClr val="lt1"/>
+          </a:fillRef>
+          <a:effectRef idx="0">
+            <a:schemeClr val="dk1"/>
+          </a:effectRef>
+          <a:fontRef idx="minor">
+            <a:schemeClr val="dk1"/>
+          </a:fontRef>
+        </p:style>
+        <p:txBody>
+          <a:bodyPr rtlCol="0" anchor="ctr"/>
+          <a:lstStyle/>
+          <a:p>
+            <a:pPr algn="ctr"/>
+            <a:r>
+              <a:rPr lang="en-US" altLang="ko-KR" sz="1000"/>
+              <a:t>NVIDIA CUDA Lib/Toolkit</a:t>
+            </a:r>
+            <a:endParaRPr lang="en-US" altLang="ko-KR" sz="1000" dirty="0"/>
+          </a:p>
+        </p:txBody>
+      </p:sp>
+      <p:sp>
+        <p:nvSpPr>
+          <p:cNvPr id="35" name="사각형: 둥근 모서리 114">
+            <a:extLst>
+              <a:ext uri="{FF2B5EF4-FFF2-40B4-BE49-F238E27FC236}">
+                <a16:creationId xmlns:a16="http://schemas.microsoft.com/office/drawing/2014/main" id="{B4917971-4A59-EF10-9161-86DDC9778D84}"/>
+              </a:ext>
+            </a:extLst>
+          </p:cNvPr>
+          <p:cNvSpPr/>
+          <p:nvPr/>
+        </p:nvSpPr>
+        <p:spPr>
+          <a:xfrm>
+            <a:off x="1692325" y="3425399"/>
+            <a:ext cx="5759996" cy="377294"/>
+          </a:xfrm>
+          <a:prstGeom prst="roundRect">
+            <a:avLst>
+              <a:gd name="adj" fmla="val 7242"/>
+            </a:avLst>
+          </a:prstGeom>
+          <a:ln w="12700"/>
+        </p:spPr>
+        <p:style>
+          <a:lnRef idx="2">
+            <a:schemeClr val="dk1"/>
+          </a:lnRef>
+          <a:fillRef idx="1">
+            <a:schemeClr val="lt1"/>
+          </a:fillRef>
+          <a:effectRef idx="0">
+            <a:schemeClr val="dk1"/>
+          </a:effectRef>
+          <a:fontRef idx="minor">
+            <a:schemeClr val="dk1"/>
+          </a:fontRef>
+        </p:style>
+        <p:txBody>
+          <a:bodyPr rtlCol="0" anchor="ctr"/>
+          <a:lstStyle/>
+          <a:p>
+            <a:pPr algn="ctr"/>
+            <a:r>
+              <a:rPr lang="en-US" altLang="ko-KR" sz="1000"/>
+              <a:t>NVIDIA GPU Device Driver</a:t>
+            </a:r>
+            <a:endParaRPr lang="en-US" altLang="ko-KR" sz="1000" dirty="0"/>
+          </a:p>
+        </p:txBody>
+      </p:sp>
+      <p:sp>
+        <p:nvSpPr>
+          <p:cNvPr id="34" name="사각형: 둥근 모서리 114">
+            <a:extLst>
+              <a:ext uri="{FF2B5EF4-FFF2-40B4-BE49-F238E27FC236}">
+                <a16:creationId xmlns:a16="http://schemas.microsoft.com/office/drawing/2014/main" id="{EFF8982B-63D5-E17D-1B32-242B369711D5}"/>
+              </a:ext>
+            </a:extLst>
+          </p:cNvPr>
+          <p:cNvSpPr/>
+          <p:nvPr/>
+        </p:nvSpPr>
+        <p:spPr>
+          <a:xfrm>
+            <a:off x="2141132" y="2616238"/>
+            <a:ext cx="1082148" cy="377294"/>
+          </a:xfrm>
+          <a:prstGeom prst="roundRect">
+            <a:avLst>
+              <a:gd name="adj" fmla="val 13792"/>
+            </a:avLst>
+          </a:prstGeom>
+          <a:solidFill>
+            <a:schemeClr val="bg1">
+              <a:lumMod val="95000"/>
+            </a:schemeClr>
+          </a:solidFill>
+          <a:ln w="12700"/>
+        </p:spPr>
+        <p:style>
+          <a:lnRef idx="2">
+            <a:schemeClr val="dk1"/>
+          </a:lnRef>
+          <a:fillRef idx="1">
+            <a:schemeClr val="lt1"/>
+          </a:fillRef>
+          <a:effectRef idx="0">
+            <a:schemeClr val="dk1"/>
+          </a:effectRef>
+          <a:fontRef idx="minor">
+            <a:schemeClr val="dk1"/>
+          </a:fontRef>
+        </p:style>
+        <p:txBody>
+          <a:bodyPr rtlCol="0" anchor="ctr"/>
+          <a:lstStyle/>
+          <a:p>
+            <a:pPr algn="ctr"/>
+            <a:r>
+              <a:rPr lang="en-US" altLang="ko-KR" sz="1000"/>
+              <a:t>/dev/nvidia0</a:t>
+            </a:r>
+            <a:endParaRPr lang="en-US" altLang="ko-KR" sz="1000" dirty="0"/>
+          </a:p>
+        </p:txBody>
+      </p:sp>
+      <p:sp>
+        <p:nvSpPr>
+          <p:cNvPr id="44" name="사각형: 둥근 모서리 114">
+            <a:extLst>
+              <a:ext uri="{FF2B5EF4-FFF2-40B4-BE49-F238E27FC236}">
+                <a16:creationId xmlns:a16="http://schemas.microsoft.com/office/drawing/2014/main" id="{6B73B028-701B-7DB2-D934-C4FBFEEEF43E}"/>
+              </a:ext>
+            </a:extLst>
+          </p:cNvPr>
+          <p:cNvSpPr/>
+          <p:nvPr/>
+        </p:nvSpPr>
+        <p:spPr>
+          <a:xfrm>
+            <a:off x="3405927" y="2616238"/>
+            <a:ext cx="1082148" cy="377294"/>
+          </a:xfrm>
+          <a:prstGeom prst="roundRect">
+            <a:avLst>
+              <a:gd name="adj" fmla="val 13792"/>
+            </a:avLst>
+          </a:prstGeom>
+          <a:solidFill>
+            <a:schemeClr val="bg1">
+              <a:lumMod val="95000"/>
+            </a:schemeClr>
+          </a:solidFill>
+          <a:ln w="12700"/>
+        </p:spPr>
+        <p:style>
+          <a:lnRef idx="2">
+            <a:schemeClr val="dk1"/>
+          </a:lnRef>
+          <a:fillRef idx="1">
+            <a:schemeClr val="lt1"/>
+          </a:fillRef>
+          <a:effectRef idx="0">
+            <a:schemeClr val="dk1"/>
+          </a:effectRef>
+          <a:fontRef idx="minor">
+            <a:schemeClr val="dk1"/>
+          </a:fontRef>
+        </p:style>
+        <p:txBody>
+          <a:bodyPr rtlCol="0" anchor="ctr"/>
+          <a:lstStyle/>
+          <a:p>
+            <a:pPr algn="ctr"/>
+            <a:r>
+              <a:rPr lang="en-US" altLang="ko-KR" sz="1000"/>
+              <a:t>/dev/nvidia1</a:t>
+            </a:r>
+            <a:endParaRPr lang="en-US" altLang="ko-KR" sz="1000" dirty="0"/>
+          </a:p>
+        </p:txBody>
+      </p:sp>
+      <p:sp>
+        <p:nvSpPr>
+          <p:cNvPr id="45" name="사각형: 둥근 모서리 114">
+            <a:extLst>
+              <a:ext uri="{FF2B5EF4-FFF2-40B4-BE49-F238E27FC236}">
+                <a16:creationId xmlns:a16="http://schemas.microsoft.com/office/drawing/2014/main" id="{F44321F7-0BF8-67DA-8623-45B172C3D60B}"/>
+              </a:ext>
+            </a:extLst>
+          </p:cNvPr>
+          <p:cNvSpPr/>
+          <p:nvPr/>
+        </p:nvSpPr>
+        <p:spPr>
+          <a:xfrm>
+            <a:off x="4665905" y="2616238"/>
+            <a:ext cx="1082148" cy="377294"/>
+          </a:xfrm>
+          <a:prstGeom prst="roundRect">
+            <a:avLst>
+              <a:gd name="adj" fmla="val 13792"/>
+            </a:avLst>
+          </a:prstGeom>
+          <a:solidFill>
+            <a:schemeClr val="bg1">
+              <a:lumMod val="95000"/>
+            </a:schemeClr>
+          </a:solidFill>
+          <a:ln w="12700"/>
+        </p:spPr>
+        <p:style>
+          <a:lnRef idx="2">
+            <a:schemeClr val="dk1"/>
+          </a:lnRef>
+          <a:fillRef idx="1">
+            <a:schemeClr val="lt1"/>
+          </a:fillRef>
+          <a:effectRef idx="0">
+            <a:schemeClr val="dk1"/>
+          </a:effectRef>
+          <a:fontRef idx="minor">
+            <a:schemeClr val="dk1"/>
+          </a:fontRef>
+        </p:style>
+        <p:txBody>
+          <a:bodyPr rtlCol="0" anchor="ctr"/>
+          <a:lstStyle/>
+          <a:p>
+            <a:pPr algn="ctr"/>
+            <a:r>
+              <a:rPr lang="en-US" altLang="ko-KR" sz="1000"/>
+              <a:t>/dev/nvidia2</a:t>
+            </a:r>
+            <a:endParaRPr lang="en-US" altLang="ko-KR" sz="1000" dirty="0"/>
+          </a:p>
+        </p:txBody>
+      </p:sp>
+      <p:sp>
+        <p:nvSpPr>
+          <p:cNvPr id="46" name="사각형: 둥근 모서리 114">
+            <a:extLst>
+              <a:ext uri="{FF2B5EF4-FFF2-40B4-BE49-F238E27FC236}">
+                <a16:creationId xmlns:a16="http://schemas.microsoft.com/office/drawing/2014/main" id="{8C01386A-F5AB-38FF-A04F-2904BDE292F2}"/>
+              </a:ext>
+            </a:extLst>
+          </p:cNvPr>
+          <p:cNvSpPr/>
+          <p:nvPr/>
+        </p:nvSpPr>
+        <p:spPr>
+          <a:xfrm>
+            <a:off x="5925884" y="2616238"/>
+            <a:ext cx="1082148" cy="377294"/>
+          </a:xfrm>
+          <a:prstGeom prst="roundRect">
+            <a:avLst>
+              <a:gd name="adj" fmla="val 13792"/>
+            </a:avLst>
+          </a:prstGeom>
+          <a:solidFill>
+            <a:schemeClr val="bg1">
+              <a:lumMod val="95000"/>
+            </a:schemeClr>
+          </a:solidFill>
+          <a:ln w="12700"/>
+        </p:spPr>
+        <p:style>
+          <a:lnRef idx="2">
+            <a:schemeClr val="dk1"/>
+          </a:lnRef>
+          <a:fillRef idx="1">
+            <a:schemeClr val="lt1"/>
+          </a:fillRef>
+          <a:effectRef idx="0">
+            <a:schemeClr val="dk1"/>
+          </a:effectRef>
+          <a:fontRef idx="minor">
+            <a:schemeClr val="dk1"/>
+          </a:fontRef>
+        </p:style>
+        <p:txBody>
+          <a:bodyPr rtlCol="0" anchor="ctr"/>
+          <a:lstStyle/>
+          <a:p>
+            <a:pPr algn="ctr"/>
+            <a:r>
+              <a:rPr lang="en-US" altLang="ko-KR" sz="1000"/>
+              <a:t>/dev/nvidia3</a:t>
+            </a:r>
+            <a:endParaRPr lang="en-US" altLang="ko-KR" sz="1000" dirty="0"/>
+          </a:p>
+        </p:txBody>
+      </p:sp>
+      <p:cxnSp>
+        <p:nvCxnSpPr>
+          <p:cNvPr id="52" name="직선 연결선 20">
+            <a:extLst>
+              <a:ext uri="{FF2B5EF4-FFF2-40B4-BE49-F238E27FC236}">
+                <a16:creationId xmlns:a16="http://schemas.microsoft.com/office/drawing/2014/main" id="{F2AA228D-B388-2E7C-D3A6-826D9ABBF7FD}"/>
+              </a:ext>
+            </a:extLst>
+          </p:cNvPr>
+          <p:cNvCxnSpPr>
+            <a:cxnSpLocks/>
+            <a:stCxn id="44" idx="2"/>
+            <a:endCxn id="15" idx="0"/>
+          </p:cNvCxnSpPr>
+          <p:nvPr/>
+        </p:nvCxnSpPr>
+        <p:spPr>
+          <a:xfrm flipH="1">
+            <a:off x="3944593" y="2993532"/>
+            <a:ext cx="2408" cy="1220754"/>
+          </a:xfrm>
+          <a:prstGeom prst="line">
+            <a:avLst/>
+          </a:prstGeom>
+          <a:ln w="12700">
+            <a:solidFill>
+              <a:schemeClr val="tx1"/>
+            </a:solidFill>
+            <a:prstDash val="dash"/>
+          </a:ln>
+        </p:spPr>
+        <p:style>
+          <a:lnRef idx="1">
+            <a:schemeClr val="accent1"/>
+          </a:lnRef>
+          <a:fillRef idx="0">
+            <a:schemeClr val="accent1"/>
+          </a:fillRef>
+          <a:effectRef idx="0">
+            <a:schemeClr val="accent1"/>
+          </a:effectRef>
+          <a:fontRef idx="minor">
+            <a:schemeClr val="tx1"/>
+          </a:fontRef>
+        </p:style>
+      </p:cxnSp>
+      <p:sp>
+        <p:nvSpPr>
+          <p:cNvPr id="104" name="사각형: 둥근 모서리 114">
+            <a:extLst>
+              <a:ext uri="{FF2B5EF4-FFF2-40B4-BE49-F238E27FC236}">
+                <a16:creationId xmlns:a16="http://schemas.microsoft.com/office/drawing/2014/main" id="{504E7774-3EBD-0C5F-78E0-CC156021027E}"/>
+              </a:ext>
+            </a:extLst>
+          </p:cNvPr>
+          <p:cNvSpPr/>
+          <p:nvPr/>
+        </p:nvSpPr>
+        <p:spPr>
+          <a:xfrm>
+            <a:off x="2141132" y="2151683"/>
+            <a:ext cx="4862083" cy="377294"/>
+          </a:xfrm>
+          <a:prstGeom prst="roundRect">
+            <a:avLst>
+              <a:gd name="adj" fmla="val 17067"/>
+            </a:avLst>
+          </a:prstGeom>
+          <a:solidFill>
+            <a:schemeClr val="bg2">
+              <a:lumMod val="90000"/>
+            </a:schemeClr>
+          </a:solidFill>
+          <a:ln w="12700"/>
+        </p:spPr>
+        <p:style>
+          <a:lnRef idx="2">
+            <a:schemeClr val="dk1"/>
+          </a:lnRef>
+          <a:fillRef idx="1">
+            <a:schemeClr val="lt1"/>
+          </a:fillRef>
+          <a:effectRef idx="0">
+            <a:schemeClr val="dk1"/>
+          </a:effectRef>
+          <a:fontRef idx="minor">
+            <a:schemeClr val="dk1"/>
+          </a:fontRef>
+        </p:style>
+        <p:txBody>
+          <a:bodyPr rtlCol="0" anchor="ctr"/>
+          <a:lstStyle/>
+          <a:p>
+            <a:pPr algn="ctr"/>
+            <a:r>
+              <a:rPr lang="en-US" altLang="ko-KR" sz="1000"/>
+              <a:t>NVIDIA CUDA Lib/Toolkit</a:t>
+            </a:r>
+            <a:endParaRPr lang="en-US" altLang="ko-KR" sz="1000" dirty="0"/>
+          </a:p>
+        </p:txBody>
+      </p:sp>
+      <p:cxnSp>
+        <p:nvCxnSpPr>
+          <p:cNvPr id="117" name="직선 연결선 17">
+            <a:extLst>
+              <a:ext uri="{FF2B5EF4-FFF2-40B4-BE49-F238E27FC236}">
+                <a16:creationId xmlns:a16="http://schemas.microsoft.com/office/drawing/2014/main" id="{C42F2A3D-D551-E411-0433-B0F62EB9365D}"/>
+              </a:ext>
+            </a:extLst>
+          </p:cNvPr>
+          <p:cNvCxnSpPr>
+            <a:cxnSpLocks/>
+            <a:stCxn id="34" idx="2"/>
+            <a:endCxn id="14" idx="0"/>
+          </p:cNvCxnSpPr>
+          <p:nvPr/>
+        </p:nvCxnSpPr>
+        <p:spPr>
+          <a:xfrm>
+            <a:off x="2682206" y="2993532"/>
+            <a:ext cx="2408" cy="1220754"/>
+          </a:xfrm>
+          <a:prstGeom prst="line">
+            <a:avLst/>
+          </a:prstGeom>
+          <a:ln w="12700">
+            <a:solidFill>
+              <a:schemeClr val="tx1"/>
+            </a:solidFill>
+            <a:prstDash val="dash"/>
+          </a:ln>
+        </p:spPr>
+        <p:style>
+          <a:lnRef idx="1">
+            <a:schemeClr val="accent1"/>
+          </a:lnRef>
+          <a:fillRef idx="0">
+            <a:schemeClr val="accent1"/>
+          </a:fillRef>
+          <a:effectRef idx="0">
+            <a:schemeClr val="accent1"/>
+          </a:effectRef>
+          <a:fontRef idx="minor">
+            <a:schemeClr val="tx1"/>
+          </a:fontRef>
+        </p:style>
+      </p:cxnSp>
+      <p:cxnSp>
+        <p:nvCxnSpPr>
+          <p:cNvPr id="120" name="직선 연결선 17">
+            <a:extLst>
+              <a:ext uri="{FF2B5EF4-FFF2-40B4-BE49-F238E27FC236}">
+                <a16:creationId xmlns:a16="http://schemas.microsoft.com/office/drawing/2014/main" id="{D9F37173-F9DC-2211-8B64-FA5BA36ED2D5}"/>
+              </a:ext>
+            </a:extLst>
+          </p:cNvPr>
+          <p:cNvCxnSpPr>
+            <a:cxnSpLocks/>
+            <a:stCxn id="45" idx="2"/>
+            <a:endCxn id="16" idx="0"/>
+          </p:cNvCxnSpPr>
+          <p:nvPr/>
+        </p:nvCxnSpPr>
+        <p:spPr>
+          <a:xfrm flipH="1">
+            <a:off x="5204571" y="2993532"/>
+            <a:ext cx="2408" cy="1220754"/>
+          </a:xfrm>
+          <a:prstGeom prst="line">
+            <a:avLst/>
+          </a:prstGeom>
+          <a:ln w="12700">
+            <a:solidFill>
+              <a:schemeClr val="tx1"/>
+            </a:solidFill>
+            <a:prstDash val="dash"/>
+          </a:ln>
+        </p:spPr>
+        <p:style>
+          <a:lnRef idx="1">
+            <a:schemeClr val="accent1"/>
+          </a:lnRef>
+          <a:fillRef idx="0">
+            <a:schemeClr val="accent1"/>
+          </a:fillRef>
+          <a:effectRef idx="0">
+            <a:schemeClr val="accent1"/>
+          </a:effectRef>
+          <a:fontRef idx="minor">
+            <a:schemeClr val="tx1"/>
+          </a:fontRef>
+        </p:style>
+      </p:cxnSp>
+      <p:cxnSp>
+        <p:nvCxnSpPr>
+          <p:cNvPr id="123" name="직선 연결선 26">
+            <a:extLst>
+              <a:ext uri="{FF2B5EF4-FFF2-40B4-BE49-F238E27FC236}">
+                <a16:creationId xmlns:a16="http://schemas.microsoft.com/office/drawing/2014/main" id="{72AADCE9-3C6C-060F-E232-3EF5984803DA}"/>
+              </a:ext>
+            </a:extLst>
+          </p:cNvPr>
+          <p:cNvCxnSpPr>
+            <a:cxnSpLocks/>
+            <a:stCxn id="46" idx="2"/>
+            <a:endCxn id="17" idx="0"/>
+          </p:cNvCxnSpPr>
+          <p:nvPr/>
+        </p:nvCxnSpPr>
+        <p:spPr>
+          <a:xfrm flipH="1">
+            <a:off x="6464550" y="2993532"/>
+            <a:ext cx="2408" cy="1220754"/>
+          </a:xfrm>
+          <a:prstGeom prst="line">
+            <a:avLst/>
+          </a:prstGeom>
+          <a:ln w="12700">
+            <a:solidFill>
+              <a:schemeClr val="tx1"/>
+            </a:solidFill>
+            <a:prstDash val="dash"/>
+          </a:ln>
+        </p:spPr>
+        <p:style>
+          <a:lnRef idx="1">
+            <a:schemeClr val="accent1"/>
+          </a:lnRef>
+          <a:fillRef idx="0">
+            <a:schemeClr val="accent1"/>
+          </a:fillRef>
+          <a:effectRef idx="0">
+            <a:schemeClr val="accent1"/>
+          </a:effectRef>
+          <a:fontRef idx="minor">
+            <a:schemeClr val="tx1"/>
+          </a:fontRef>
+        </p:style>
+      </p:cxnSp>
+      <p:sp>
+        <p:nvSpPr>
+          <p:cNvPr id="147" name="사각형: 둥근 모서리 114">
+            <a:extLst>
+              <a:ext uri="{FF2B5EF4-FFF2-40B4-BE49-F238E27FC236}">
+                <a16:creationId xmlns:a16="http://schemas.microsoft.com/office/drawing/2014/main" id="{A16AF2D3-7795-BF33-2382-ADA2298B768A}"/>
+              </a:ext>
+            </a:extLst>
+          </p:cNvPr>
+          <p:cNvSpPr/>
+          <p:nvPr/>
+        </p:nvSpPr>
+        <p:spPr>
+          <a:xfrm>
+            <a:off x="3434211" y="613228"/>
+            <a:ext cx="3498894" cy="377294"/>
+          </a:xfrm>
+          <a:prstGeom prst="roundRect">
+            <a:avLst>
+              <a:gd name="adj" fmla="val 7242"/>
+            </a:avLst>
+          </a:prstGeom>
+          <a:ln w="12700"/>
+        </p:spPr>
+        <p:style>
+          <a:lnRef idx="2">
+            <a:schemeClr val="dk1"/>
+          </a:lnRef>
+          <a:fillRef idx="1">
+            <a:schemeClr val="lt1"/>
+          </a:fillRef>
+          <a:effectRef idx="0">
+            <a:schemeClr val="dk1"/>
+          </a:effectRef>
+          <a:fontRef idx="minor">
+            <a:schemeClr val="dk1"/>
+          </a:fontRef>
+        </p:style>
+        <p:txBody>
+          <a:bodyPr rtlCol="0" anchor="ctr"/>
+          <a:lstStyle/>
+          <a:p>
+            <a:pPr algn="ctr"/>
+            <a:r>
+              <a:rPr lang="en-US" altLang="ko-KR" sz="1000"/>
+              <a:t>App with </a:t>
+            </a:r>
+          </a:p>
+          <a:p>
+            <a:pPr algn="ctr"/>
+            <a:r>
+              <a:rPr lang="en-US" altLang="ko-KR" sz="1000"/>
+              <a:t>NVIDIA_VISIBLE_DEVICES Env  </a:t>
+            </a:r>
+            <a:endParaRPr lang="en-US" altLang="ko-KR" sz="1000" dirty="0"/>
+          </a:p>
+        </p:txBody>
+      </p:sp>
+      <p:sp>
+        <p:nvSpPr>
+          <p:cNvPr id="148" name="사각형: 둥근 모서리 114">
+            <a:extLst>
+              <a:ext uri="{FF2B5EF4-FFF2-40B4-BE49-F238E27FC236}">
+                <a16:creationId xmlns:a16="http://schemas.microsoft.com/office/drawing/2014/main" id="{E564AD90-001F-1131-35AF-1B92219AF4D3}"/>
+              </a:ext>
+            </a:extLst>
+          </p:cNvPr>
+          <p:cNvSpPr/>
+          <p:nvPr/>
+        </p:nvSpPr>
+        <p:spPr>
+          <a:xfrm>
+            <a:off x="7244474" y="613228"/>
+            <a:ext cx="1321799" cy="377294"/>
+          </a:xfrm>
+          <a:prstGeom prst="roundRect">
+            <a:avLst>
+              <a:gd name="adj" fmla="val 7242"/>
+            </a:avLst>
+          </a:prstGeom>
+          <a:ln w="12700"/>
+        </p:spPr>
+        <p:style>
+          <a:lnRef idx="2">
+            <a:schemeClr val="dk1"/>
+          </a:lnRef>
+          <a:fillRef idx="1">
+            <a:schemeClr val="lt1"/>
+          </a:fillRef>
+          <a:effectRef idx="0">
+            <a:schemeClr val="dk1"/>
+          </a:effectRef>
+          <a:fontRef idx="minor">
+            <a:schemeClr val="dk1"/>
+          </a:fontRef>
+        </p:style>
+        <p:txBody>
+          <a:bodyPr rtlCol="0" anchor="ctr"/>
+          <a:lstStyle/>
+          <a:p>
+            <a:pPr algn="ctr"/>
+            <a:r>
+              <a:rPr lang="en-US" altLang="ko-KR" sz="900"/>
+              <a:t>App with </a:t>
+            </a:r>
+          </a:p>
+          <a:p>
+            <a:pPr algn="ctr"/>
+            <a:r>
+              <a:rPr lang="en-US" altLang="ko-KR" sz="900"/>
+              <a:t>NVIDIA_VISIBLE_</a:t>
+            </a:r>
+            <a:br>
+              <a:rPr lang="en-US" altLang="ko-KR" sz="900"/>
+            </a:br>
+            <a:r>
+              <a:rPr lang="en-US" altLang="ko-KR" sz="900"/>
+              <a:t>DEVICES Env  </a:t>
+            </a:r>
+            <a:endParaRPr lang="en-US" altLang="ko-KR" sz="900" dirty="0"/>
+          </a:p>
+        </p:txBody>
+      </p:sp>
+      <p:cxnSp>
+        <p:nvCxnSpPr>
+          <p:cNvPr id="150" name="직선 연결선 26">
+            <a:extLst>
+              <a:ext uri="{FF2B5EF4-FFF2-40B4-BE49-F238E27FC236}">
+                <a16:creationId xmlns:a16="http://schemas.microsoft.com/office/drawing/2014/main" id="{656CB95D-962A-D56E-D3C6-D95E7E41C7EE}"/>
+              </a:ext>
+            </a:extLst>
+          </p:cNvPr>
+          <p:cNvCxnSpPr>
+            <a:cxnSpLocks/>
+            <a:stCxn id="74" idx="2"/>
+            <a:endCxn id="46" idx="0"/>
+          </p:cNvCxnSpPr>
+          <p:nvPr/>
+        </p:nvCxnSpPr>
+        <p:spPr>
+          <a:xfrm flipH="1">
+            <a:off x="6466958" y="1892334"/>
+            <a:ext cx="1438417" cy="723904"/>
+          </a:xfrm>
+          <a:prstGeom prst="line">
+            <a:avLst/>
+          </a:prstGeom>
+          <a:ln w="12700">
+            <a:solidFill>
+              <a:schemeClr val="tx1"/>
+            </a:solidFill>
+          </a:ln>
+        </p:spPr>
+        <p:style>
+          <a:lnRef idx="1">
+            <a:schemeClr val="accent1"/>
+          </a:lnRef>
+          <a:fillRef idx="0">
+            <a:schemeClr val="accent1"/>
+          </a:fillRef>
+          <a:effectRef idx="0">
+            <a:schemeClr val="accent1"/>
+          </a:effectRef>
+          <a:fontRef idx="minor">
+            <a:schemeClr val="tx1"/>
+          </a:fontRef>
+        </p:style>
+      </p:cxnSp>
+      <p:cxnSp>
+        <p:nvCxnSpPr>
+          <p:cNvPr id="153" name="직선 연결선 26">
+            <a:extLst>
+              <a:ext uri="{FF2B5EF4-FFF2-40B4-BE49-F238E27FC236}">
+                <a16:creationId xmlns:a16="http://schemas.microsoft.com/office/drawing/2014/main" id="{49A64ACA-A8C7-E513-598E-DC51514EFDD4}"/>
+              </a:ext>
+            </a:extLst>
+          </p:cNvPr>
+          <p:cNvCxnSpPr>
+            <a:cxnSpLocks/>
+            <a:stCxn id="85" idx="2"/>
+            <a:endCxn id="46" idx="0"/>
+          </p:cNvCxnSpPr>
+          <p:nvPr/>
+        </p:nvCxnSpPr>
+        <p:spPr>
+          <a:xfrm>
+            <a:off x="6383171" y="1892334"/>
+            <a:ext cx="83787" cy="723904"/>
+          </a:xfrm>
+          <a:prstGeom prst="line">
+            <a:avLst/>
+          </a:prstGeom>
+          <a:ln w="12700">
+            <a:solidFill>
+              <a:schemeClr val="tx1"/>
+            </a:solidFill>
+          </a:ln>
+        </p:spPr>
+        <p:style>
+          <a:lnRef idx="1">
+            <a:schemeClr val="accent1"/>
+          </a:lnRef>
+          <a:fillRef idx="0">
+            <a:schemeClr val="accent1"/>
+          </a:fillRef>
+          <a:effectRef idx="0">
+            <a:schemeClr val="accent1"/>
+          </a:effectRef>
+          <a:fontRef idx="minor">
+            <a:schemeClr val="tx1"/>
+          </a:fontRef>
+        </p:style>
+      </p:cxnSp>
+      <p:cxnSp>
+        <p:nvCxnSpPr>
+          <p:cNvPr id="156" name="직선 연결선 26">
+            <a:extLst>
+              <a:ext uri="{FF2B5EF4-FFF2-40B4-BE49-F238E27FC236}">
+                <a16:creationId xmlns:a16="http://schemas.microsoft.com/office/drawing/2014/main" id="{F77071BF-692D-3793-E85B-C50C86B8ECB3}"/>
+              </a:ext>
+            </a:extLst>
+          </p:cNvPr>
+          <p:cNvCxnSpPr>
+            <a:cxnSpLocks/>
+            <a:stCxn id="56" idx="2"/>
+            <a:endCxn id="45" idx="0"/>
+          </p:cNvCxnSpPr>
+          <p:nvPr/>
+        </p:nvCxnSpPr>
+        <p:spPr>
+          <a:xfrm>
+            <a:off x="5185744" y="1892334"/>
+            <a:ext cx="21235" cy="723904"/>
+          </a:xfrm>
+          <a:prstGeom prst="line">
+            <a:avLst/>
+          </a:prstGeom>
+          <a:ln w="12700">
+            <a:solidFill>
+              <a:schemeClr val="tx1"/>
+            </a:solidFill>
+          </a:ln>
+        </p:spPr>
+        <p:style>
+          <a:lnRef idx="1">
+            <a:schemeClr val="accent1"/>
+          </a:lnRef>
+          <a:fillRef idx="0">
+            <a:schemeClr val="accent1"/>
+          </a:fillRef>
+          <a:effectRef idx="0">
+            <a:schemeClr val="accent1"/>
+          </a:effectRef>
+          <a:fontRef idx="minor">
+            <a:schemeClr val="tx1"/>
+          </a:fontRef>
+        </p:style>
+      </p:cxnSp>
+      <p:sp>
+        <p:nvSpPr>
+          <p:cNvPr id="179" name="TextBox 178">
+            <a:extLst>
+              <a:ext uri="{FF2B5EF4-FFF2-40B4-BE49-F238E27FC236}">
+                <a16:creationId xmlns:a16="http://schemas.microsoft.com/office/drawing/2014/main" id="{670BFEEC-1A34-44E5-6762-6C7FD7A5A5BA}"/>
+              </a:ext>
+            </a:extLst>
+          </p:cNvPr>
+          <p:cNvSpPr txBox="1"/>
+          <p:nvPr/>
+        </p:nvSpPr>
+        <p:spPr>
+          <a:xfrm>
+            <a:off x="691097" y="1972067"/>
+            <a:ext cx="915635" cy="234564"/>
+          </a:xfrm>
+          <a:prstGeom prst="rect">
+            <a:avLst/>
+          </a:prstGeom>
+          <a:noFill/>
+        </p:spPr>
+        <p:txBody>
+          <a:bodyPr wrap="none" rtlCol="0">
+            <a:spAutoFit/>
+          </a:bodyPr>
+          <a:lstStyle/>
+          <a:p>
+            <a:r>
+              <a:rPr kumimoji="1" lang="en-US" altLang="ko-KR" sz="1000" b="1" i="1"/>
+              <a:t>Bind Mount</a:t>
+            </a:r>
+            <a:endParaRPr kumimoji="1" lang="ko-KR" altLang="en-US" sz="1000" b="1" i="1"/>
+          </a:p>
+        </p:txBody>
+      </p:sp>
+      <p:sp>
+        <p:nvSpPr>
+          <p:cNvPr id="9" name="사각형: 둥근 모서리 114">
+            <a:extLst>
+              <a:ext uri="{FF2B5EF4-FFF2-40B4-BE49-F238E27FC236}">
+                <a16:creationId xmlns:a16="http://schemas.microsoft.com/office/drawing/2014/main" id="{F09C36D5-BC8E-A774-8162-E5697C41F0F9}"/>
+              </a:ext>
+            </a:extLst>
+          </p:cNvPr>
+          <p:cNvSpPr/>
+          <p:nvPr/>
+        </p:nvSpPr>
+        <p:spPr>
+          <a:xfrm>
+            <a:off x="1109113" y="50800"/>
+            <a:ext cx="1622337" cy="1974849"/>
+          </a:xfrm>
+          <a:prstGeom prst="roundRect">
+            <a:avLst>
+              <a:gd name="adj" fmla="val 4028"/>
+            </a:avLst>
+          </a:prstGeom>
+          <a:ln w="12700"/>
+        </p:spPr>
+        <p:style>
+          <a:lnRef idx="2">
+            <a:schemeClr val="dk1"/>
+          </a:lnRef>
+          <a:fillRef idx="1">
+            <a:schemeClr val="lt1"/>
+          </a:fillRef>
+          <a:effectRef idx="0">
+            <a:schemeClr val="dk1"/>
+          </a:effectRef>
+          <a:fontRef idx="minor">
+            <a:schemeClr val="dk1"/>
+          </a:fontRef>
+        </p:style>
+        <p:txBody>
+          <a:bodyPr rtlCol="0" anchor="t"/>
+          <a:lstStyle/>
+          <a:p>
+            <a:pPr algn="ctr"/>
+            <a:r>
+              <a:rPr lang="en-US" altLang="ko-KR" sz="1000" b="1" dirty="0">
+                <a:solidFill>
+                  <a:schemeClr val="tx1"/>
+                </a:solidFill>
+              </a:rPr>
+              <a:t>Pod A</a:t>
+            </a:r>
+            <a:endParaRPr lang="ko-KR" altLang="en-US" sz="1000" b="1" dirty="0">
+              <a:solidFill>
+                <a:schemeClr val="tx1"/>
+              </a:solidFill>
+            </a:endParaRPr>
+          </a:p>
+        </p:txBody>
+      </p:sp>
+      <p:sp>
+        <p:nvSpPr>
+          <p:cNvPr id="10" name="사각형: 둥근 모서리 114">
+            <a:extLst>
+              <a:ext uri="{FF2B5EF4-FFF2-40B4-BE49-F238E27FC236}">
+                <a16:creationId xmlns:a16="http://schemas.microsoft.com/office/drawing/2014/main" id="{182423AF-5B07-9447-C2C9-01AA77722DAE}"/>
+              </a:ext>
+            </a:extLst>
+          </p:cNvPr>
+          <p:cNvSpPr/>
+          <p:nvPr/>
+        </p:nvSpPr>
+        <p:spPr>
+          <a:xfrm>
+            <a:off x="1175567" y="339502"/>
+            <a:ext cx="1487816" cy="1636496"/>
+          </a:xfrm>
+          <a:prstGeom prst="roundRect">
+            <a:avLst>
+              <a:gd name="adj" fmla="val 4159"/>
+            </a:avLst>
+          </a:prstGeom>
+          <a:ln w="12700"/>
+        </p:spPr>
+        <p:style>
+          <a:lnRef idx="2">
+            <a:schemeClr val="dk1"/>
+          </a:lnRef>
+          <a:fillRef idx="1">
+            <a:schemeClr val="lt1"/>
+          </a:fillRef>
+          <a:effectRef idx="0">
+            <a:schemeClr val="dk1"/>
+          </a:effectRef>
+          <a:fontRef idx="minor">
+            <a:schemeClr val="dk1"/>
+          </a:fontRef>
+        </p:style>
+        <p:txBody>
+          <a:bodyPr rtlCol="0" anchor="t"/>
+          <a:lstStyle/>
+          <a:p>
+            <a:pPr algn="ctr"/>
+            <a:r>
+              <a:rPr lang="en-US" altLang="ko-KR" sz="1000" b="1"/>
+              <a:t>Container C</a:t>
+            </a:r>
+            <a:endParaRPr lang="ko-KR" altLang="en-US" sz="1000" b="1" dirty="0">
+              <a:solidFill>
+                <a:schemeClr val="accent2">
+                  <a:lumMod val="75000"/>
+                </a:schemeClr>
+              </a:solidFill>
+            </a:endParaRPr>
+          </a:p>
+        </p:txBody>
+      </p:sp>
+      <p:sp>
+        <p:nvSpPr>
+          <p:cNvPr id="11" name="사각형: 둥근 모서리 114">
+            <a:extLst>
+              <a:ext uri="{FF2B5EF4-FFF2-40B4-BE49-F238E27FC236}">
+                <a16:creationId xmlns:a16="http://schemas.microsoft.com/office/drawing/2014/main" id="{51142C3F-7769-9AFF-3ABA-51AC4FF00B42}"/>
+              </a:ext>
+            </a:extLst>
+          </p:cNvPr>
+          <p:cNvSpPr/>
+          <p:nvPr/>
+        </p:nvSpPr>
+        <p:spPr>
+          <a:xfrm>
+            <a:off x="1255754" y="1515040"/>
+            <a:ext cx="1321799" cy="377294"/>
+          </a:xfrm>
+          <a:prstGeom prst="roundRect">
+            <a:avLst>
+              <a:gd name="adj" fmla="val 7242"/>
+            </a:avLst>
+          </a:prstGeom>
+          <a:solidFill>
+            <a:schemeClr val="bg1">
+              <a:lumMod val="95000"/>
+            </a:schemeClr>
+          </a:solidFill>
+          <a:ln w="12700"/>
+        </p:spPr>
+        <p:style>
+          <a:lnRef idx="2">
+            <a:schemeClr val="dk1"/>
+          </a:lnRef>
+          <a:fillRef idx="1">
+            <a:schemeClr val="lt1"/>
+          </a:fillRef>
+          <a:effectRef idx="0">
+            <a:schemeClr val="dk1"/>
+          </a:effectRef>
+          <a:fontRef idx="minor">
+            <a:schemeClr val="dk1"/>
+          </a:fontRef>
+        </p:style>
+        <p:txBody>
+          <a:bodyPr rtlCol="0" anchor="ctr"/>
+          <a:lstStyle/>
+          <a:p>
+            <a:pPr algn="ctr"/>
+            <a:r>
+              <a:rPr lang="en-US" altLang="ko-KR" sz="1000"/>
+              <a:t>/dev/nvidia3</a:t>
+            </a:r>
+            <a:endParaRPr lang="en-US" altLang="ko-KR" sz="1000" dirty="0"/>
+          </a:p>
+        </p:txBody>
+      </p:sp>
+      <p:sp>
+        <p:nvSpPr>
+          <p:cNvPr id="12" name="사각형: 둥근 모서리 114">
+            <a:extLst>
+              <a:ext uri="{FF2B5EF4-FFF2-40B4-BE49-F238E27FC236}">
+                <a16:creationId xmlns:a16="http://schemas.microsoft.com/office/drawing/2014/main" id="{E29826F6-2DA8-13A3-218A-BB1C4F37CC90}"/>
+              </a:ext>
+            </a:extLst>
+          </p:cNvPr>
+          <p:cNvSpPr/>
+          <p:nvPr/>
+        </p:nvSpPr>
+        <p:spPr>
+          <a:xfrm>
+            <a:off x="1255754" y="1051997"/>
+            <a:ext cx="1321798" cy="377294"/>
+          </a:xfrm>
+          <a:prstGeom prst="roundRect">
+            <a:avLst>
+              <a:gd name="adj" fmla="val 7242"/>
+            </a:avLst>
+          </a:prstGeom>
+          <a:solidFill>
+            <a:schemeClr val="bg2">
+              <a:lumMod val="90000"/>
+            </a:schemeClr>
+          </a:solidFill>
+          <a:ln w="12700"/>
+        </p:spPr>
+        <p:style>
+          <a:lnRef idx="2">
+            <a:schemeClr val="dk1"/>
+          </a:lnRef>
+          <a:fillRef idx="1">
+            <a:schemeClr val="lt1"/>
+          </a:fillRef>
+          <a:effectRef idx="0">
+            <a:schemeClr val="dk1"/>
+          </a:effectRef>
+          <a:fontRef idx="minor">
+            <a:schemeClr val="dk1"/>
+          </a:fontRef>
+        </p:style>
+        <p:txBody>
+          <a:bodyPr rtlCol="0" anchor="ctr"/>
+          <a:lstStyle/>
+          <a:p>
+            <a:pPr algn="ctr"/>
+            <a:r>
+              <a:rPr lang="en-US" altLang="ko-KR" sz="1000"/>
+              <a:t>NVIDIA CUDA Lib/Toolkit</a:t>
+            </a:r>
+            <a:endParaRPr lang="en-US" altLang="ko-KR" sz="1000" dirty="0"/>
+          </a:p>
+        </p:txBody>
+      </p:sp>
+      <p:sp>
+        <p:nvSpPr>
+          <p:cNvPr id="13" name="사각형: 둥근 모서리 114">
+            <a:extLst>
+              <a:ext uri="{FF2B5EF4-FFF2-40B4-BE49-F238E27FC236}">
+                <a16:creationId xmlns:a16="http://schemas.microsoft.com/office/drawing/2014/main" id="{52F96262-EB36-03C3-C48C-E16024396769}"/>
+              </a:ext>
+            </a:extLst>
+          </p:cNvPr>
+          <p:cNvSpPr/>
+          <p:nvPr/>
+        </p:nvSpPr>
+        <p:spPr>
+          <a:xfrm>
+            <a:off x="1255753" y="613228"/>
+            <a:ext cx="1321799" cy="377294"/>
+          </a:xfrm>
+          <a:prstGeom prst="roundRect">
+            <a:avLst>
+              <a:gd name="adj" fmla="val 7242"/>
+            </a:avLst>
+          </a:prstGeom>
+          <a:ln w="12700"/>
+        </p:spPr>
+        <p:style>
+          <a:lnRef idx="2">
+            <a:schemeClr val="dk1"/>
+          </a:lnRef>
+          <a:fillRef idx="1">
+            <a:schemeClr val="lt1"/>
+          </a:fillRef>
+          <a:effectRef idx="0">
+            <a:schemeClr val="dk1"/>
+          </a:effectRef>
+          <a:fontRef idx="minor">
+            <a:schemeClr val="dk1"/>
+          </a:fontRef>
+        </p:style>
+        <p:txBody>
+          <a:bodyPr rtlCol="0" anchor="ctr"/>
+          <a:lstStyle/>
+          <a:p>
+            <a:pPr algn="ctr"/>
+            <a:r>
+              <a:rPr lang="en-US" altLang="ko-KR" sz="900"/>
+              <a:t>App with </a:t>
+            </a:r>
+          </a:p>
+          <a:p>
+            <a:pPr algn="ctr"/>
+            <a:r>
+              <a:rPr lang="en-US" altLang="ko-KR" sz="900"/>
+              <a:t>NVIDIA_VISIBLE_</a:t>
+            </a:r>
+            <a:br>
+              <a:rPr lang="en-US" altLang="ko-KR" sz="900"/>
+            </a:br>
+            <a:r>
+              <a:rPr lang="en-US" altLang="ko-KR" sz="900"/>
+              <a:t>DEVICES Env  </a:t>
+            </a:r>
+            <a:endParaRPr lang="en-US" altLang="ko-KR" sz="900" dirty="0"/>
+          </a:p>
+        </p:txBody>
+      </p:sp>
+    </p:spTree>
+    <p:extLst>
+      <p:ext uri="{BB962C8B-B14F-4D97-AF65-F5344CB8AC3E}">
+        <p14:creationId xmlns:p14="http://schemas.microsoft.com/office/powerpoint/2010/main" val="2980991815"/>
+      </p:ext>
+    </p:extLst>
+  </p:cSld>
+  <p:clrMapOvr>
+    <a:masterClrMapping/>
+  </p:clrMapOvr>
+</p:sld>
+</file>
+
+<file path=ppt/slides/slide2.xml><?xml version="1.0" encoding="utf-8"?>
+<p:sld xmlns:a="http://schemas.openxmlformats.org/drawingml/2006/main" xmlns:r="http://schemas.openxmlformats.org/officeDocument/2006/relationships" xmlns:p="http://schemas.openxmlformats.org/presentationml/2006/main">
+  <p:cSld>
+    <p:spTree>
+      <p:nvGrpSpPr>
         <p:cNvPr id="1" name=""/>
         <p:cNvGrpSpPr/>
         <p:nvPr/>
@@ -5714,7 +8020,7 @@
 </p:sld>
 </file>
 
-<file path=ppt/slides/slide2.xml><?xml version="1.0" encoding="utf-8"?>
+<file path=ppt/slides/slide3.xml><?xml version="1.0" encoding="utf-8"?>
 <p:sld xmlns:a="http://schemas.openxmlformats.org/drawingml/2006/main" xmlns:r="http://schemas.openxmlformats.org/officeDocument/2006/relationships" xmlns:p="http://schemas.openxmlformats.org/presentationml/2006/main">
   <p:cSld>
     <p:spTree>
@@ -7571,7 +9877,7 @@
 </p:sld>
 </file>
 
-<file path=ppt/slides/slide3.xml><?xml version="1.0" encoding="utf-8"?>
+<file path=ppt/slides/slide4.xml><?xml version="1.0" encoding="utf-8"?>
 <p:sld xmlns:a="http://schemas.openxmlformats.org/drawingml/2006/main" xmlns:r="http://schemas.openxmlformats.org/officeDocument/2006/relationships" xmlns:p="http://schemas.openxmlformats.org/presentationml/2006/main">
   <p:cSld>
     <p:spTree>
@@ -7607,7 +9913,2296 @@
 </p:sld>
 </file>
 
-<file path=ppt/slides/slide4.xml><?xml version="1.0" encoding="utf-8"?>
+<file path=ppt/slides/slide5.xml><?xml version="1.0" encoding="utf-8"?>
+<p:sld xmlns:a="http://schemas.openxmlformats.org/drawingml/2006/main" xmlns:r="http://schemas.openxmlformats.org/officeDocument/2006/relationships" xmlns:p="http://schemas.openxmlformats.org/presentationml/2006/main">
+  <p:cSld>
+    <p:spTree>
+      <p:nvGrpSpPr>
+        <p:cNvPr id="1" name="">
+          <a:extLst>
+            <a:ext uri="{FF2B5EF4-FFF2-40B4-BE49-F238E27FC236}">
+              <a16:creationId xmlns:a16="http://schemas.microsoft.com/office/drawing/2014/main" id="{C658A532-583D-6519-89E1-7BA72F17C07E}"/>
+            </a:ext>
+          </a:extLst>
+        </p:cNvPr>
+        <p:cNvGrpSpPr/>
+        <p:nvPr/>
+      </p:nvGrpSpPr>
+      <p:grpSpPr>
+        <a:xfrm>
+          <a:off x="0" y="0"/>
+          <a:ext cx="0" cy="0"/>
+          <a:chOff x="0" y="0"/>
+          <a:chExt cx="0" cy="0"/>
+        </a:xfrm>
+      </p:grpSpPr>
+      <p:sp>
+        <p:nvSpPr>
+          <p:cNvPr id="38" name="사각형: 둥근 모서리 114">
+            <a:extLst>
+              <a:ext uri="{FF2B5EF4-FFF2-40B4-BE49-F238E27FC236}">
+                <a16:creationId xmlns:a16="http://schemas.microsoft.com/office/drawing/2014/main" id="{C199CB81-CDBC-8D21-C2FA-32EBEE482256}"/>
+              </a:ext>
+            </a:extLst>
+          </p:cNvPr>
+          <p:cNvSpPr/>
+          <p:nvPr/>
+        </p:nvSpPr>
+        <p:spPr>
+          <a:xfrm>
+            <a:off x="1547664" y="1930664"/>
+            <a:ext cx="6043510" cy="1282172"/>
+          </a:xfrm>
+          <a:prstGeom prst="roundRect">
+            <a:avLst>
+              <a:gd name="adj" fmla="val 7201"/>
+            </a:avLst>
+          </a:prstGeom>
+          <a:ln w="12700"/>
+        </p:spPr>
+        <p:style>
+          <a:lnRef idx="2">
+            <a:schemeClr val="dk1"/>
+          </a:lnRef>
+          <a:fillRef idx="1">
+            <a:schemeClr val="lt1"/>
+          </a:fillRef>
+          <a:effectRef idx="0">
+            <a:schemeClr val="dk1"/>
+          </a:effectRef>
+          <a:fontRef idx="minor">
+            <a:schemeClr val="dk1"/>
+          </a:fontRef>
+        </p:style>
+        <p:txBody>
+          <a:bodyPr rtlCol="0" anchor="b"/>
+          <a:lstStyle/>
+          <a:p>
+            <a:pPr algn="ctr"/>
+            <a:r>
+              <a:rPr lang="en-US" altLang="ko-KR" sz="1000" b="1"/>
+              <a:t>Host Filesystem</a:t>
+            </a:r>
+            <a:endParaRPr lang="en-US" altLang="ko-KR" sz="1000" b="1" dirty="0"/>
+          </a:p>
+        </p:txBody>
+      </p:sp>
+      <p:sp>
+        <p:nvSpPr>
+          <p:cNvPr id="2" name="제목 1">
+            <a:extLst>
+              <a:ext uri="{FF2B5EF4-FFF2-40B4-BE49-F238E27FC236}">
+                <a16:creationId xmlns:a16="http://schemas.microsoft.com/office/drawing/2014/main" id="{5B1BE0E3-AAAE-3394-21D2-1C7654D84DC6}"/>
+              </a:ext>
+            </a:extLst>
+          </p:cNvPr>
+          <p:cNvSpPr>
+            <a:spLocks noGrp="1"/>
+          </p:cNvSpPr>
+          <p:nvPr>
+            <p:ph type="title"/>
+          </p:nvPr>
+        </p:nvSpPr>
+        <p:spPr>
+          <a:xfrm>
+            <a:off x="0" y="-773419"/>
+            <a:ext cx="9144000" cy="857250"/>
+          </a:xfrm>
+        </p:spPr>
+        <p:txBody>
+          <a:bodyPr>
+            <a:normAutofit/>
+          </a:bodyPr>
+          <a:lstStyle/>
+          <a:p>
+            <a:r>
+              <a:rPr lang="en-US" altLang="ko-KR"/>
+              <a:t>CUDA Container Stack</a:t>
+            </a:r>
+            <a:endParaRPr lang="ko-KR" altLang="en-US" dirty="0"/>
+          </a:p>
+        </p:txBody>
+      </p:sp>
+      <p:sp>
+        <p:nvSpPr>
+          <p:cNvPr id="37" name="사각형: 둥근 모서리 114">
+            <a:extLst>
+              <a:ext uri="{FF2B5EF4-FFF2-40B4-BE49-F238E27FC236}">
+                <a16:creationId xmlns:a16="http://schemas.microsoft.com/office/drawing/2014/main" id="{34224A9B-B36C-FEAF-FAD4-BC2C75C5343C}"/>
+              </a:ext>
+            </a:extLst>
+          </p:cNvPr>
+          <p:cNvSpPr/>
+          <p:nvPr/>
+        </p:nvSpPr>
+        <p:spPr>
+          <a:xfrm>
+            <a:off x="1557988" y="4061207"/>
+            <a:ext cx="6033186" cy="976265"/>
+          </a:xfrm>
+          <a:prstGeom prst="roundRect">
+            <a:avLst>
+              <a:gd name="adj" fmla="val 6397"/>
+            </a:avLst>
+          </a:prstGeom>
+          <a:ln w="12700"/>
+        </p:spPr>
+        <p:style>
+          <a:lnRef idx="2">
+            <a:schemeClr val="dk1"/>
+          </a:lnRef>
+          <a:fillRef idx="1">
+            <a:schemeClr val="lt1"/>
+          </a:fillRef>
+          <a:effectRef idx="0">
+            <a:schemeClr val="dk1"/>
+          </a:effectRef>
+          <a:fontRef idx="minor">
+            <a:schemeClr val="dk1"/>
+          </a:fontRef>
+        </p:style>
+        <p:txBody>
+          <a:bodyPr rtlCol="0" anchor="b"/>
+          <a:lstStyle/>
+          <a:p>
+            <a:pPr algn="ctr"/>
+            <a:r>
+              <a:rPr lang="en-US" altLang="ko-KR" sz="1000" b="1"/>
+              <a:t>Host Hardware</a:t>
+            </a:r>
+            <a:endParaRPr lang="en-US" altLang="ko-KR" sz="1000" b="1" dirty="0"/>
+          </a:p>
+        </p:txBody>
+      </p:sp>
+      <p:sp>
+        <p:nvSpPr>
+          <p:cNvPr id="33" name="사각형: 둥근 모서리 114">
+            <a:extLst>
+              <a:ext uri="{FF2B5EF4-FFF2-40B4-BE49-F238E27FC236}">
+                <a16:creationId xmlns:a16="http://schemas.microsoft.com/office/drawing/2014/main" id="{98DED64C-EC4A-FD78-01AD-0D82FD99E58E}"/>
+              </a:ext>
+            </a:extLst>
+          </p:cNvPr>
+          <p:cNvSpPr/>
+          <p:nvPr/>
+        </p:nvSpPr>
+        <p:spPr>
+          <a:xfrm>
+            <a:off x="1552826" y="3212363"/>
+            <a:ext cx="6043510" cy="855136"/>
+          </a:xfrm>
+          <a:prstGeom prst="roundRect">
+            <a:avLst>
+              <a:gd name="adj" fmla="val 7201"/>
+            </a:avLst>
+          </a:prstGeom>
+          <a:ln w="12700"/>
+        </p:spPr>
+        <p:style>
+          <a:lnRef idx="2">
+            <a:schemeClr val="dk1"/>
+          </a:lnRef>
+          <a:fillRef idx="1">
+            <a:schemeClr val="lt1"/>
+          </a:fillRef>
+          <a:effectRef idx="0">
+            <a:schemeClr val="dk1"/>
+          </a:effectRef>
+          <a:fontRef idx="minor">
+            <a:schemeClr val="dk1"/>
+          </a:fontRef>
+        </p:style>
+        <p:txBody>
+          <a:bodyPr rtlCol="0" anchor="b"/>
+          <a:lstStyle/>
+          <a:p>
+            <a:pPr algn="ctr"/>
+            <a:r>
+              <a:rPr lang="en-US" altLang="ko-KR" sz="1000" b="1"/>
+              <a:t>Host Kernel</a:t>
+            </a:r>
+            <a:endParaRPr lang="en-US" altLang="ko-KR" sz="1000" b="1" dirty="0"/>
+          </a:p>
+        </p:txBody>
+      </p:sp>
+      <p:sp>
+        <p:nvSpPr>
+          <p:cNvPr id="14" name="사각형: 둥근 모서리 114">
+            <a:extLst>
+              <a:ext uri="{FF2B5EF4-FFF2-40B4-BE49-F238E27FC236}">
+                <a16:creationId xmlns:a16="http://schemas.microsoft.com/office/drawing/2014/main" id="{3BB4A784-EDE7-85B2-7F9F-16377AC2A591}"/>
+              </a:ext>
+            </a:extLst>
+          </p:cNvPr>
+          <p:cNvSpPr/>
+          <p:nvPr/>
+        </p:nvSpPr>
+        <p:spPr>
+          <a:xfrm>
+            <a:off x="2145948" y="4173376"/>
+            <a:ext cx="1077331" cy="576064"/>
+          </a:xfrm>
+          <a:prstGeom prst="roundRect">
+            <a:avLst>
+              <a:gd name="adj" fmla="val 7242"/>
+            </a:avLst>
+          </a:prstGeom>
+          <a:solidFill>
+            <a:schemeClr val="bg1">
+              <a:lumMod val="95000"/>
+            </a:schemeClr>
+          </a:solidFill>
+          <a:ln w="12700"/>
+        </p:spPr>
+        <p:style>
+          <a:lnRef idx="2">
+            <a:schemeClr val="dk1"/>
+          </a:lnRef>
+          <a:fillRef idx="1">
+            <a:schemeClr val="lt1"/>
+          </a:fillRef>
+          <a:effectRef idx="0">
+            <a:schemeClr val="dk1"/>
+          </a:effectRef>
+          <a:fontRef idx="minor">
+            <a:schemeClr val="dk1"/>
+          </a:fontRef>
+        </p:style>
+        <p:txBody>
+          <a:bodyPr rtlCol="0" anchor="ctr"/>
+          <a:lstStyle/>
+          <a:p>
+            <a:pPr algn="ctr"/>
+            <a:r>
+              <a:rPr lang="en-US" altLang="ko-KR" sz="1000"/>
+              <a:t>NVIDIA</a:t>
+            </a:r>
+          </a:p>
+          <a:p>
+            <a:pPr algn="ctr"/>
+            <a:r>
+              <a:rPr lang="en-US" altLang="ko-KR" sz="1000"/>
+              <a:t>GPU 0</a:t>
+            </a:r>
+            <a:endParaRPr lang="en-US" altLang="ko-KR" sz="1000" dirty="0"/>
+          </a:p>
+        </p:txBody>
+      </p:sp>
+      <p:sp>
+        <p:nvSpPr>
+          <p:cNvPr id="15" name="사각형: 둥근 모서리 114">
+            <a:extLst>
+              <a:ext uri="{FF2B5EF4-FFF2-40B4-BE49-F238E27FC236}">
+                <a16:creationId xmlns:a16="http://schemas.microsoft.com/office/drawing/2014/main" id="{0C90FB03-5F15-E1F3-C0A7-39612FA4FD8A}"/>
+              </a:ext>
+            </a:extLst>
+          </p:cNvPr>
+          <p:cNvSpPr/>
+          <p:nvPr/>
+        </p:nvSpPr>
+        <p:spPr>
+          <a:xfrm>
+            <a:off x="3405927" y="4173376"/>
+            <a:ext cx="1077331" cy="576064"/>
+          </a:xfrm>
+          <a:prstGeom prst="roundRect">
+            <a:avLst>
+              <a:gd name="adj" fmla="val 7242"/>
+            </a:avLst>
+          </a:prstGeom>
+          <a:solidFill>
+            <a:schemeClr val="bg1">
+              <a:lumMod val="95000"/>
+            </a:schemeClr>
+          </a:solidFill>
+          <a:ln w="12700"/>
+        </p:spPr>
+        <p:style>
+          <a:lnRef idx="2">
+            <a:schemeClr val="dk1"/>
+          </a:lnRef>
+          <a:fillRef idx="1">
+            <a:schemeClr val="lt1"/>
+          </a:fillRef>
+          <a:effectRef idx="0">
+            <a:schemeClr val="dk1"/>
+          </a:effectRef>
+          <a:fontRef idx="minor">
+            <a:schemeClr val="dk1"/>
+          </a:fontRef>
+        </p:style>
+        <p:txBody>
+          <a:bodyPr rtlCol="0" anchor="ctr"/>
+          <a:lstStyle/>
+          <a:p>
+            <a:pPr algn="ctr"/>
+            <a:r>
+              <a:rPr lang="en-US" altLang="ko-KR" sz="1000"/>
+              <a:t>NVIDIA</a:t>
+            </a:r>
+          </a:p>
+          <a:p>
+            <a:pPr algn="ctr"/>
+            <a:r>
+              <a:rPr lang="en-US" altLang="ko-KR" sz="1000"/>
+              <a:t>GPU 1</a:t>
+            </a:r>
+            <a:endParaRPr lang="en-US" altLang="ko-KR" sz="1000" dirty="0"/>
+          </a:p>
+        </p:txBody>
+      </p:sp>
+      <p:sp>
+        <p:nvSpPr>
+          <p:cNvPr id="16" name="사각형: 둥근 모서리 114">
+            <a:extLst>
+              <a:ext uri="{FF2B5EF4-FFF2-40B4-BE49-F238E27FC236}">
+                <a16:creationId xmlns:a16="http://schemas.microsoft.com/office/drawing/2014/main" id="{5FD6345F-4058-CF72-302F-E427E9FF2337}"/>
+              </a:ext>
+            </a:extLst>
+          </p:cNvPr>
+          <p:cNvSpPr/>
+          <p:nvPr/>
+        </p:nvSpPr>
+        <p:spPr>
+          <a:xfrm>
+            <a:off x="4665905" y="4173376"/>
+            <a:ext cx="1077331" cy="576064"/>
+          </a:xfrm>
+          <a:prstGeom prst="roundRect">
+            <a:avLst>
+              <a:gd name="adj" fmla="val 7242"/>
+            </a:avLst>
+          </a:prstGeom>
+          <a:solidFill>
+            <a:schemeClr val="bg1">
+              <a:lumMod val="95000"/>
+            </a:schemeClr>
+          </a:solidFill>
+          <a:ln w="12700"/>
+        </p:spPr>
+        <p:style>
+          <a:lnRef idx="2">
+            <a:schemeClr val="dk1"/>
+          </a:lnRef>
+          <a:fillRef idx="1">
+            <a:schemeClr val="lt1"/>
+          </a:fillRef>
+          <a:effectRef idx="0">
+            <a:schemeClr val="dk1"/>
+          </a:effectRef>
+          <a:fontRef idx="minor">
+            <a:schemeClr val="dk1"/>
+          </a:fontRef>
+        </p:style>
+        <p:txBody>
+          <a:bodyPr rtlCol="0" anchor="ctr"/>
+          <a:lstStyle/>
+          <a:p>
+            <a:pPr algn="ctr"/>
+            <a:r>
+              <a:rPr lang="en-US" altLang="ko-KR" sz="1000"/>
+              <a:t>NVIDIA</a:t>
+            </a:r>
+          </a:p>
+          <a:p>
+            <a:pPr algn="ctr"/>
+            <a:r>
+              <a:rPr lang="en-US" altLang="ko-KR" sz="1000"/>
+              <a:t>GPU 2</a:t>
+            </a:r>
+            <a:endParaRPr lang="en-US" altLang="ko-KR" sz="1000" dirty="0"/>
+          </a:p>
+        </p:txBody>
+      </p:sp>
+      <p:sp>
+        <p:nvSpPr>
+          <p:cNvPr id="17" name="사각형: 둥근 모서리 114">
+            <a:extLst>
+              <a:ext uri="{FF2B5EF4-FFF2-40B4-BE49-F238E27FC236}">
+                <a16:creationId xmlns:a16="http://schemas.microsoft.com/office/drawing/2014/main" id="{D1AA0CD1-85DC-80F2-38A0-D98480E06713}"/>
+              </a:ext>
+            </a:extLst>
+          </p:cNvPr>
+          <p:cNvSpPr/>
+          <p:nvPr/>
+        </p:nvSpPr>
+        <p:spPr>
+          <a:xfrm>
+            <a:off x="5925884" y="4173376"/>
+            <a:ext cx="1077331" cy="576064"/>
+          </a:xfrm>
+          <a:prstGeom prst="roundRect">
+            <a:avLst>
+              <a:gd name="adj" fmla="val 7242"/>
+            </a:avLst>
+          </a:prstGeom>
+          <a:solidFill>
+            <a:schemeClr val="bg1">
+              <a:lumMod val="95000"/>
+            </a:schemeClr>
+          </a:solidFill>
+          <a:ln w="12700"/>
+        </p:spPr>
+        <p:style>
+          <a:lnRef idx="2">
+            <a:schemeClr val="dk1"/>
+          </a:lnRef>
+          <a:fillRef idx="1">
+            <a:schemeClr val="lt1"/>
+          </a:fillRef>
+          <a:effectRef idx="0">
+            <a:schemeClr val="dk1"/>
+          </a:effectRef>
+          <a:fontRef idx="minor">
+            <a:schemeClr val="dk1"/>
+          </a:fontRef>
+        </p:style>
+        <p:txBody>
+          <a:bodyPr rtlCol="0" anchor="ctr"/>
+          <a:lstStyle/>
+          <a:p>
+            <a:pPr algn="ctr"/>
+            <a:r>
+              <a:rPr lang="en-US" altLang="ko-KR" sz="1000"/>
+              <a:t>NVIDIA</a:t>
+            </a:r>
+          </a:p>
+          <a:p>
+            <a:pPr algn="ctr"/>
+            <a:r>
+              <a:rPr lang="en-US" altLang="ko-KR" sz="1000"/>
+              <a:t>GPU 3</a:t>
+            </a:r>
+            <a:endParaRPr lang="en-US" altLang="ko-KR" sz="1000" dirty="0"/>
+          </a:p>
+        </p:txBody>
+      </p:sp>
+      <p:sp>
+        <p:nvSpPr>
+          <p:cNvPr id="36" name="사각형: 둥근 모서리 114">
+            <a:extLst>
+              <a:ext uri="{FF2B5EF4-FFF2-40B4-BE49-F238E27FC236}">
+                <a16:creationId xmlns:a16="http://schemas.microsoft.com/office/drawing/2014/main" id="{F7BDFE51-13AD-6F76-9BD3-4C8EA1093AF8}"/>
+              </a:ext>
+            </a:extLst>
+          </p:cNvPr>
+          <p:cNvSpPr/>
+          <p:nvPr/>
+        </p:nvSpPr>
+        <p:spPr>
+          <a:xfrm>
+            <a:off x="734944" y="111692"/>
+            <a:ext cx="2486761" cy="1717824"/>
+          </a:xfrm>
+          <a:prstGeom prst="roundRect">
+            <a:avLst>
+              <a:gd name="adj" fmla="val 4028"/>
+            </a:avLst>
+          </a:prstGeom>
+          <a:ln w="12700"/>
+        </p:spPr>
+        <p:style>
+          <a:lnRef idx="2">
+            <a:schemeClr val="dk1"/>
+          </a:lnRef>
+          <a:fillRef idx="1">
+            <a:schemeClr val="lt1"/>
+          </a:fillRef>
+          <a:effectRef idx="0">
+            <a:schemeClr val="dk1"/>
+          </a:effectRef>
+          <a:fontRef idx="minor">
+            <a:schemeClr val="dk1"/>
+          </a:fontRef>
+        </p:style>
+        <p:txBody>
+          <a:bodyPr rtlCol="0" anchor="t"/>
+          <a:lstStyle/>
+          <a:p>
+            <a:pPr algn="ctr"/>
+            <a:r>
+              <a:rPr lang="en-US" altLang="ko-KR" sz="1000" b="1"/>
+              <a:t>Container A</a:t>
+            </a:r>
+            <a:endParaRPr lang="ko-KR" altLang="en-US" sz="1000" b="1" dirty="0">
+              <a:solidFill>
+                <a:schemeClr val="accent2">
+                  <a:lumMod val="75000"/>
+                </a:schemeClr>
+              </a:solidFill>
+            </a:endParaRPr>
+          </a:p>
+        </p:txBody>
+      </p:sp>
+      <p:sp>
+        <p:nvSpPr>
+          <p:cNvPr id="48" name="사각형: 둥근 모서리 114">
+            <a:extLst>
+              <a:ext uri="{FF2B5EF4-FFF2-40B4-BE49-F238E27FC236}">
+                <a16:creationId xmlns:a16="http://schemas.microsoft.com/office/drawing/2014/main" id="{20FA5E8D-DE96-37DA-562B-3A9FB0AB0E31}"/>
+              </a:ext>
+            </a:extLst>
+          </p:cNvPr>
+          <p:cNvSpPr/>
+          <p:nvPr/>
+        </p:nvSpPr>
+        <p:spPr>
+          <a:xfrm>
+            <a:off x="822678" y="1345650"/>
+            <a:ext cx="1099999" cy="396044"/>
+          </a:xfrm>
+          <a:prstGeom prst="roundRect">
+            <a:avLst>
+              <a:gd name="adj" fmla="val 7242"/>
+            </a:avLst>
+          </a:prstGeom>
+          <a:solidFill>
+            <a:schemeClr val="bg1">
+              <a:lumMod val="95000"/>
+            </a:schemeClr>
+          </a:solidFill>
+          <a:ln w="12700"/>
+        </p:spPr>
+        <p:style>
+          <a:lnRef idx="2">
+            <a:schemeClr val="dk1"/>
+          </a:lnRef>
+          <a:fillRef idx="1">
+            <a:schemeClr val="lt1"/>
+          </a:fillRef>
+          <a:effectRef idx="0">
+            <a:schemeClr val="dk1"/>
+          </a:effectRef>
+          <a:fontRef idx="minor">
+            <a:schemeClr val="dk1"/>
+          </a:fontRef>
+        </p:style>
+        <p:txBody>
+          <a:bodyPr rtlCol="0" anchor="ctr"/>
+          <a:lstStyle/>
+          <a:p>
+            <a:pPr algn="ctr"/>
+            <a:r>
+              <a:rPr lang="en-US" altLang="ko-KR" sz="1000"/>
+              <a:t>/dev/nvidia0</a:t>
+            </a:r>
+            <a:endParaRPr lang="en-US" altLang="ko-KR" sz="1000" dirty="0"/>
+          </a:p>
+        </p:txBody>
+      </p:sp>
+      <p:sp>
+        <p:nvSpPr>
+          <p:cNvPr id="49" name="사각형: 둥근 모서리 114">
+            <a:extLst>
+              <a:ext uri="{FF2B5EF4-FFF2-40B4-BE49-F238E27FC236}">
+                <a16:creationId xmlns:a16="http://schemas.microsoft.com/office/drawing/2014/main" id="{28CDC012-AE30-4BD5-0233-E6598DF6893B}"/>
+              </a:ext>
+            </a:extLst>
+          </p:cNvPr>
+          <p:cNvSpPr/>
+          <p:nvPr/>
+        </p:nvSpPr>
+        <p:spPr>
+          <a:xfrm>
+            <a:off x="2024278" y="1345650"/>
+            <a:ext cx="1099868" cy="396044"/>
+          </a:xfrm>
+          <a:prstGeom prst="roundRect">
+            <a:avLst>
+              <a:gd name="adj" fmla="val 7242"/>
+            </a:avLst>
+          </a:prstGeom>
+          <a:solidFill>
+            <a:schemeClr val="bg1">
+              <a:lumMod val="95000"/>
+            </a:schemeClr>
+          </a:solidFill>
+          <a:ln w="12700"/>
+        </p:spPr>
+        <p:style>
+          <a:lnRef idx="2">
+            <a:schemeClr val="dk1"/>
+          </a:lnRef>
+          <a:fillRef idx="1">
+            <a:schemeClr val="lt1"/>
+          </a:fillRef>
+          <a:effectRef idx="0">
+            <a:schemeClr val="dk1"/>
+          </a:effectRef>
+          <a:fontRef idx="minor">
+            <a:schemeClr val="dk1"/>
+          </a:fontRef>
+        </p:style>
+        <p:txBody>
+          <a:bodyPr rtlCol="0" anchor="ctr"/>
+          <a:lstStyle/>
+          <a:p>
+            <a:pPr algn="ctr"/>
+            <a:r>
+              <a:rPr lang="en-US" altLang="ko-KR" sz="1000"/>
+              <a:t>/dev/nvidia1</a:t>
+            </a:r>
+            <a:endParaRPr lang="en-US" altLang="ko-KR" sz="1000" dirty="0"/>
+          </a:p>
+        </p:txBody>
+      </p:sp>
+      <p:sp>
+        <p:nvSpPr>
+          <p:cNvPr id="53" name="사각형: 둥근 모서리 114">
+            <a:extLst>
+              <a:ext uri="{FF2B5EF4-FFF2-40B4-BE49-F238E27FC236}">
+                <a16:creationId xmlns:a16="http://schemas.microsoft.com/office/drawing/2014/main" id="{6C60E83C-B6C7-5D9D-1B4A-EB539DC194AB}"/>
+              </a:ext>
+            </a:extLst>
+          </p:cNvPr>
+          <p:cNvSpPr/>
+          <p:nvPr/>
+        </p:nvSpPr>
+        <p:spPr>
+          <a:xfrm>
+            <a:off x="822678" y="859596"/>
+            <a:ext cx="2301467" cy="396044"/>
+          </a:xfrm>
+          <a:prstGeom prst="roundRect">
+            <a:avLst>
+              <a:gd name="adj" fmla="val 7242"/>
+            </a:avLst>
+          </a:prstGeom>
+          <a:solidFill>
+            <a:schemeClr val="bg2">
+              <a:lumMod val="90000"/>
+            </a:schemeClr>
+          </a:solidFill>
+          <a:ln w="12700"/>
+        </p:spPr>
+        <p:style>
+          <a:lnRef idx="2">
+            <a:schemeClr val="dk1"/>
+          </a:lnRef>
+          <a:fillRef idx="1">
+            <a:schemeClr val="lt1"/>
+          </a:fillRef>
+          <a:effectRef idx="0">
+            <a:schemeClr val="dk1"/>
+          </a:effectRef>
+          <a:fontRef idx="minor">
+            <a:schemeClr val="dk1"/>
+          </a:fontRef>
+        </p:style>
+        <p:txBody>
+          <a:bodyPr rtlCol="0" anchor="ctr"/>
+          <a:lstStyle/>
+          <a:p>
+            <a:pPr algn="ctr"/>
+            <a:r>
+              <a:rPr lang="en-US" altLang="ko-KR" sz="1000"/>
+              <a:t>NVIDIA CUDA Lib/Toolkit</a:t>
+            </a:r>
+            <a:endParaRPr lang="en-US" altLang="ko-KR" sz="1000" dirty="0"/>
+          </a:p>
+        </p:txBody>
+      </p:sp>
+      <p:sp>
+        <p:nvSpPr>
+          <p:cNvPr id="54" name="사각형: 둥근 모서리 114">
+            <a:extLst>
+              <a:ext uri="{FF2B5EF4-FFF2-40B4-BE49-F238E27FC236}">
+                <a16:creationId xmlns:a16="http://schemas.microsoft.com/office/drawing/2014/main" id="{F4292598-010D-2884-AF6A-98E96A77E4D9}"/>
+              </a:ext>
+            </a:extLst>
+          </p:cNvPr>
+          <p:cNvSpPr/>
+          <p:nvPr/>
+        </p:nvSpPr>
+        <p:spPr>
+          <a:xfrm>
+            <a:off x="3346476" y="106029"/>
+            <a:ext cx="3674596" cy="1717824"/>
+          </a:xfrm>
+          <a:prstGeom prst="roundRect">
+            <a:avLst>
+              <a:gd name="adj" fmla="val 4028"/>
+            </a:avLst>
+          </a:prstGeom>
+          <a:ln w="12700"/>
+        </p:spPr>
+        <p:style>
+          <a:lnRef idx="2">
+            <a:schemeClr val="dk1"/>
+          </a:lnRef>
+          <a:fillRef idx="1">
+            <a:schemeClr val="lt1"/>
+          </a:fillRef>
+          <a:effectRef idx="0">
+            <a:schemeClr val="dk1"/>
+          </a:effectRef>
+          <a:fontRef idx="minor">
+            <a:schemeClr val="dk1"/>
+          </a:fontRef>
+        </p:style>
+        <p:txBody>
+          <a:bodyPr rtlCol="0" anchor="t"/>
+          <a:lstStyle/>
+          <a:p>
+            <a:pPr algn="ctr"/>
+            <a:r>
+              <a:rPr lang="en-US" altLang="ko-KR" sz="1000" b="1"/>
+              <a:t>Container B</a:t>
+            </a:r>
+            <a:endParaRPr lang="ko-KR" altLang="en-US" sz="1000" b="1" dirty="0">
+              <a:solidFill>
+                <a:schemeClr val="accent2">
+                  <a:lumMod val="75000"/>
+                </a:schemeClr>
+              </a:solidFill>
+            </a:endParaRPr>
+          </a:p>
+        </p:txBody>
+      </p:sp>
+      <p:sp>
+        <p:nvSpPr>
+          <p:cNvPr id="55" name="사각형: 둥근 모서리 114">
+            <a:extLst>
+              <a:ext uri="{FF2B5EF4-FFF2-40B4-BE49-F238E27FC236}">
+                <a16:creationId xmlns:a16="http://schemas.microsoft.com/office/drawing/2014/main" id="{3A5559A4-65E5-C60B-2C81-7D11DC7DDC2E}"/>
+              </a:ext>
+            </a:extLst>
+          </p:cNvPr>
+          <p:cNvSpPr/>
+          <p:nvPr/>
+        </p:nvSpPr>
+        <p:spPr>
+          <a:xfrm>
+            <a:off x="3434210" y="1339987"/>
+            <a:ext cx="1099999" cy="396044"/>
+          </a:xfrm>
+          <a:prstGeom prst="roundRect">
+            <a:avLst>
+              <a:gd name="adj" fmla="val 7242"/>
+            </a:avLst>
+          </a:prstGeom>
+          <a:solidFill>
+            <a:schemeClr val="bg1">
+              <a:lumMod val="95000"/>
+            </a:schemeClr>
+          </a:solidFill>
+          <a:ln w="12700"/>
+        </p:spPr>
+        <p:style>
+          <a:lnRef idx="2">
+            <a:schemeClr val="dk1"/>
+          </a:lnRef>
+          <a:fillRef idx="1">
+            <a:schemeClr val="lt1"/>
+          </a:fillRef>
+          <a:effectRef idx="0">
+            <a:schemeClr val="dk1"/>
+          </a:effectRef>
+          <a:fontRef idx="minor">
+            <a:schemeClr val="dk1"/>
+          </a:fontRef>
+        </p:style>
+        <p:txBody>
+          <a:bodyPr rtlCol="0" anchor="ctr"/>
+          <a:lstStyle/>
+          <a:p>
+            <a:pPr algn="ctr"/>
+            <a:r>
+              <a:rPr lang="en-US" altLang="ko-KR" sz="1000"/>
+              <a:t>/dev/nvidia0</a:t>
+            </a:r>
+            <a:endParaRPr lang="en-US" altLang="ko-KR" sz="1000" dirty="0"/>
+          </a:p>
+        </p:txBody>
+      </p:sp>
+      <p:sp>
+        <p:nvSpPr>
+          <p:cNvPr id="56" name="사각형: 둥근 모서리 114">
+            <a:extLst>
+              <a:ext uri="{FF2B5EF4-FFF2-40B4-BE49-F238E27FC236}">
+                <a16:creationId xmlns:a16="http://schemas.microsoft.com/office/drawing/2014/main" id="{87E80D6F-CA6B-0CD2-F7F3-4D1E2532265A}"/>
+              </a:ext>
+            </a:extLst>
+          </p:cNvPr>
+          <p:cNvSpPr/>
+          <p:nvPr/>
+        </p:nvSpPr>
+        <p:spPr>
+          <a:xfrm>
+            <a:off x="4635810" y="1339987"/>
+            <a:ext cx="1099868" cy="396044"/>
+          </a:xfrm>
+          <a:prstGeom prst="roundRect">
+            <a:avLst>
+              <a:gd name="adj" fmla="val 7242"/>
+            </a:avLst>
+          </a:prstGeom>
+          <a:solidFill>
+            <a:schemeClr val="bg1">
+              <a:lumMod val="95000"/>
+            </a:schemeClr>
+          </a:solidFill>
+          <a:ln w="12700"/>
+        </p:spPr>
+        <p:style>
+          <a:lnRef idx="2">
+            <a:schemeClr val="dk1"/>
+          </a:lnRef>
+          <a:fillRef idx="1">
+            <a:schemeClr val="lt1"/>
+          </a:fillRef>
+          <a:effectRef idx="0">
+            <a:schemeClr val="dk1"/>
+          </a:effectRef>
+          <a:fontRef idx="minor">
+            <a:schemeClr val="dk1"/>
+          </a:fontRef>
+        </p:style>
+        <p:txBody>
+          <a:bodyPr rtlCol="0" anchor="ctr"/>
+          <a:lstStyle/>
+          <a:p>
+            <a:pPr algn="ctr"/>
+            <a:r>
+              <a:rPr lang="en-US" altLang="ko-KR" sz="1000"/>
+              <a:t>/dev/nvidia2</a:t>
+            </a:r>
+            <a:endParaRPr lang="en-US" altLang="ko-KR" sz="1000" dirty="0"/>
+          </a:p>
+        </p:txBody>
+      </p:sp>
+      <p:sp>
+        <p:nvSpPr>
+          <p:cNvPr id="57" name="사각형: 둥근 모서리 114">
+            <a:extLst>
+              <a:ext uri="{FF2B5EF4-FFF2-40B4-BE49-F238E27FC236}">
+                <a16:creationId xmlns:a16="http://schemas.microsoft.com/office/drawing/2014/main" id="{C75D87A0-04F8-1F73-C973-9BCA8466E434}"/>
+              </a:ext>
+            </a:extLst>
+          </p:cNvPr>
+          <p:cNvSpPr/>
+          <p:nvPr/>
+        </p:nvSpPr>
+        <p:spPr>
+          <a:xfrm>
+            <a:off x="3434210" y="853933"/>
+            <a:ext cx="3498895" cy="396044"/>
+          </a:xfrm>
+          <a:prstGeom prst="roundRect">
+            <a:avLst>
+              <a:gd name="adj" fmla="val 7242"/>
+            </a:avLst>
+          </a:prstGeom>
+          <a:solidFill>
+            <a:schemeClr val="bg2">
+              <a:lumMod val="90000"/>
+            </a:schemeClr>
+          </a:solidFill>
+          <a:ln w="12700"/>
+        </p:spPr>
+        <p:style>
+          <a:lnRef idx="2">
+            <a:schemeClr val="dk1"/>
+          </a:lnRef>
+          <a:fillRef idx="1">
+            <a:schemeClr val="lt1"/>
+          </a:fillRef>
+          <a:effectRef idx="0">
+            <a:schemeClr val="dk1"/>
+          </a:effectRef>
+          <a:fontRef idx="minor">
+            <a:schemeClr val="dk1"/>
+          </a:fontRef>
+        </p:style>
+        <p:txBody>
+          <a:bodyPr rtlCol="0" anchor="ctr"/>
+          <a:lstStyle/>
+          <a:p>
+            <a:pPr algn="ctr"/>
+            <a:r>
+              <a:rPr lang="en-US" altLang="ko-KR" sz="1000"/>
+              <a:t>NVIDIA CUDA Lib/Toolkit</a:t>
+            </a:r>
+            <a:endParaRPr lang="en-US" altLang="ko-KR" sz="1000" dirty="0"/>
+          </a:p>
+        </p:txBody>
+      </p:sp>
+      <p:sp>
+        <p:nvSpPr>
+          <p:cNvPr id="85" name="사각형: 둥근 모서리 114">
+            <a:extLst>
+              <a:ext uri="{FF2B5EF4-FFF2-40B4-BE49-F238E27FC236}">
+                <a16:creationId xmlns:a16="http://schemas.microsoft.com/office/drawing/2014/main" id="{C5FDFA61-ABCE-9AEF-A799-491CD47B2758}"/>
+              </a:ext>
+            </a:extLst>
+          </p:cNvPr>
+          <p:cNvSpPr/>
+          <p:nvPr/>
+        </p:nvSpPr>
+        <p:spPr>
+          <a:xfrm>
+            <a:off x="5833237" y="1339987"/>
+            <a:ext cx="1099868" cy="396044"/>
+          </a:xfrm>
+          <a:prstGeom prst="roundRect">
+            <a:avLst>
+              <a:gd name="adj" fmla="val 7242"/>
+            </a:avLst>
+          </a:prstGeom>
+          <a:solidFill>
+            <a:schemeClr val="bg1">
+              <a:lumMod val="95000"/>
+            </a:schemeClr>
+          </a:solidFill>
+          <a:ln w="12700"/>
+        </p:spPr>
+        <p:style>
+          <a:lnRef idx="2">
+            <a:schemeClr val="dk1"/>
+          </a:lnRef>
+          <a:fillRef idx="1">
+            <a:schemeClr val="lt1"/>
+          </a:fillRef>
+          <a:effectRef idx="0">
+            <a:schemeClr val="dk1"/>
+          </a:effectRef>
+          <a:fontRef idx="minor">
+            <a:schemeClr val="dk1"/>
+          </a:fontRef>
+        </p:style>
+        <p:txBody>
+          <a:bodyPr rtlCol="0" anchor="ctr"/>
+          <a:lstStyle/>
+          <a:p>
+            <a:pPr algn="ctr"/>
+            <a:r>
+              <a:rPr lang="en-US" altLang="ko-KR" sz="1000"/>
+              <a:t>/dev/nvidia3</a:t>
+            </a:r>
+            <a:endParaRPr lang="en-US" altLang="ko-KR" sz="1000" dirty="0"/>
+          </a:p>
+        </p:txBody>
+      </p:sp>
+      <p:sp>
+        <p:nvSpPr>
+          <p:cNvPr id="72" name="사각형: 둥근 모서리 114">
+            <a:extLst>
+              <a:ext uri="{FF2B5EF4-FFF2-40B4-BE49-F238E27FC236}">
+                <a16:creationId xmlns:a16="http://schemas.microsoft.com/office/drawing/2014/main" id="{FA29DEC7-E382-0E51-65A1-B16C42469C7D}"/>
+              </a:ext>
+            </a:extLst>
+          </p:cNvPr>
+          <p:cNvSpPr/>
+          <p:nvPr/>
+        </p:nvSpPr>
+        <p:spPr>
+          <a:xfrm>
+            <a:off x="7164288" y="106029"/>
+            <a:ext cx="1487816" cy="1717824"/>
+          </a:xfrm>
+          <a:prstGeom prst="roundRect">
+            <a:avLst>
+              <a:gd name="adj" fmla="val 4159"/>
+            </a:avLst>
+          </a:prstGeom>
+          <a:ln w="12700"/>
+        </p:spPr>
+        <p:style>
+          <a:lnRef idx="2">
+            <a:schemeClr val="dk1"/>
+          </a:lnRef>
+          <a:fillRef idx="1">
+            <a:schemeClr val="lt1"/>
+          </a:fillRef>
+          <a:effectRef idx="0">
+            <a:schemeClr val="dk1"/>
+          </a:effectRef>
+          <a:fontRef idx="minor">
+            <a:schemeClr val="dk1"/>
+          </a:fontRef>
+        </p:style>
+        <p:txBody>
+          <a:bodyPr rtlCol="0" anchor="t"/>
+          <a:lstStyle/>
+          <a:p>
+            <a:pPr algn="ctr"/>
+            <a:r>
+              <a:rPr lang="en-US" altLang="ko-KR" sz="1000" b="1"/>
+              <a:t>Container C</a:t>
+            </a:r>
+            <a:endParaRPr lang="ko-KR" altLang="en-US" sz="1000" b="1" dirty="0">
+              <a:solidFill>
+                <a:schemeClr val="accent2">
+                  <a:lumMod val="75000"/>
+                </a:schemeClr>
+              </a:solidFill>
+            </a:endParaRPr>
+          </a:p>
+        </p:txBody>
+      </p:sp>
+      <p:sp>
+        <p:nvSpPr>
+          <p:cNvPr id="74" name="사각형: 둥근 모서리 114">
+            <a:extLst>
+              <a:ext uri="{FF2B5EF4-FFF2-40B4-BE49-F238E27FC236}">
+                <a16:creationId xmlns:a16="http://schemas.microsoft.com/office/drawing/2014/main" id="{5B695D59-8F43-916E-95F0-6D4418AE445E}"/>
+              </a:ext>
+            </a:extLst>
+          </p:cNvPr>
+          <p:cNvSpPr/>
+          <p:nvPr/>
+        </p:nvSpPr>
+        <p:spPr>
+          <a:xfrm>
+            <a:off x="7244475" y="1339987"/>
+            <a:ext cx="1321799" cy="396044"/>
+          </a:xfrm>
+          <a:prstGeom prst="roundRect">
+            <a:avLst>
+              <a:gd name="adj" fmla="val 7242"/>
+            </a:avLst>
+          </a:prstGeom>
+          <a:solidFill>
+            <a:schemeClr val="bg1">
+              <a:lumMod val="95000"/>
+            </a:schemeClr>
+          </a:solidFill>
+          <a:ln w="12700"/>
+        </p:spPr>
+        <p:style>
+          <a:lnRef idx="2">
+            <a:schemeClr val="dk1"/>
+          </a:lnRef>
+          <a:fillRef idx="1">
+            <a:schemeClr val="lt1"/>
+          </a:fillRef>
+          <a:effectRef idx="0">
+            <a:schemeClr val="dk1"/>
+          </a:effectRef>
+          <a:fontRef idx="minor">
+            <a:schemeClr val="dk1"/>
+          </a:fontRef>
+        </p:style>
+        <p:txBody>
+          <a:bodyPr rtlCol="0" anchor="ctr"/>
+          <a:lstStyle/>
+          <a:p>
+            <a:pPr algn="ctr"/>
+            <a:r>
+              <a:rPr lang="en-US" altLang="ko-KR" sz="1000"/>
+              <a:t>/dev/nvidia3</a:t>
+            </a:r>
+            <a:endParaRPr lang="en-US" altLang="ko-KR" sz="1000" dirty="0"/>
+          </a:p>
+        </p:txBody>
+      </p:sp>
+      <p:sp>
+        <p:nvSpPr>
+          <p:cNvPr id="75" name="사각형: 둥근 모서리 114">
+            <a:extLst>
+              <a:ext uri="{FF2B5EF4-FFF2-40B4-BE49-F238E27FC236}">
+                <a16:creationId xmlns:a16="http://schemas.microsoft.com/office/drawing/2014/main" id="{5BCDFD41-1093-D72B-B30C-01417FCFEEFB}"/>
+              </a:ext>
+            </a:extLst>
+          </p:cNvPr>
+          <p:cNvSpPr/>
+          <p:nvPr/>
+        </p:nvSpPr>
+        <p:spPr>
+          <a:xfrm>
+            <a:off x="7244475" y="853933"/>
+            <a:ext cx="1321798" cy="396044"/>
+          </a:xfrm>
+          <a:prstGeom prst="roundRect">
+            <a:avLst>
+              <a:gd name="adj" fmla="val 7242"/>
+            </a:avLst>
+          </a:prstGeom>
+          <a:solidFill>
+            <a:schemeClr val="bg2">
+              <a:lumMod val="90000"/>
+            </a:schemeClr>
+          </a:solidFill>
+          <a:ln w="12700"/>
+        </p:spPr>
+        <p:style>
+          <a:lnRef idx="2">
+            <a:schemeClr val="dk1"/>
+          </a:lnRef>
+          <a:fillRef idx="1">
+            <a:schemeClr val="lt1"/>
+          </a:fillRef>
+          <a:effectRef idx="0">
+            <a:schemeClr val="dk1"/>
+          </a:effectRef>
+          <a:fontRef idx="minor">
+            <a:schemeClr val="dk1"/>
+          </a:fontRef>
+        </p:style>
+        <p:txBody>
+          <a:bodyPr rtlCol="0" anchor="ctr"/>
+          <a:lstStyle/>
+          <a:p>
+            <a:pPr algn="ctr"/>
+            <a:r>
+              <a:rPr lang="en-US" altLang="ko-KR" sz="1000"/>
+              <a:t>NVIDIA CUDA Lib/Toolkit</a:t>
+            </a:r>
+            <a:endParaRPr lang="en-US" altLang="ko-KR" sz="1000" dirty="0"/>
+          </a:p>
+        </p:txBody>
+      </p:sp>
+      <p:sp>
+        <p:nvSpPr>
+          <p:cNvPr id="35" name="사각형: 둥근 모서리 114">
+            <a:extLst>
+              <a:ext uri="{FF2B5EF4-FFF2-40B4-BE49-F238E27FC236}">
+                <a16:creationId xmlns:a16="http://schemas.microsoft.com/office/drawing/2014/main" id="{903A1291-6D6D-6C8A-34D6-A0E332AA9BA6}"/>
+              </a:ext>
+            </a:extLst>
+          </p:cNvPr>
+          <p:cNvSpPr/>
+          <p:nvPr/>
+        </p:nvSpPr>
+        <p:spPr>
+          <a:xfrm>
+            <a:off x="1692325" y="3345284"/>
+            <a:ext cx="5759996" cy="396044"/>
+          </a:xfrm>
+          <a:prstGeom prst="roundRect">
+            <a:avLst>
+              <a:gd name="adj" fmla="val 7242"/>
+            </a:avLst>
+          </a:prstGeom>
+          <a:ln w="12700"/>
+        </p:spPr>
+        <p:style>
+          <a:lnRef idx="2">
+            <a:schemeClr val="dk1"/>
+          </a:lnRef>
+          <a:fillRef idx="1">
+            <a:schemeClr val="lt1"/>
+          </a:fillRef>
+          <a:effectRef idx="0">
+            <a:schemeClr val="dk1"/>
+          </a:effectRef>
+          <a:fontRef idx="minor">
+            <a:schemeClr val="dk1"/>
+          </a:fontRef>
+        </p:style>
+        <p:txBody>
+          <a:bodyPr rtlCol="0" anchor="ctr"/>
+          <a:lstStyle/>
+          <a:p>
+            <a:pPr algn="ctr"/>
+            <a:r>
+              <a:rPr lang="en-US" altLang="ko-KR" sz="1000"/>
+              <a:t>NVIDIA GPU Device Driver</a:t>
+            </a:r>
+            <a:endParaRPr lang="en-US" altLang="ko-KR" sz="1000" dirty="0"/>
+          </a:p>
+        </p:txBody>
+      </p:sp>
+      <p:sp>
+        <p:nvSpPr>
+          <p:cNvPr id="34" name="사각형: 둥근 모서리 114">
+            <a:extLst>
+              <a:ext uri="{FF2B5EF4-FFF2-40B4-BE49-F238E27FC236}">
+                <a16:creationId xmlns:a16="http://schemas.microsoft.com/office/drawing/2014/main" id="{39A21027-8ED4-F030-3914-5080D110E993}"/>
+              </a:ext>
+            </a:extLst>
+          </p:cNvPr>
+          <p:cNvSpPr/>
+          <p:nvPr/>
+        </p:nvSpPr>
+        <p:spPr>
+          <a:xfrm>
+            <a:off x="2141132" y="2495911"/>
+            <a:ext cx="1082148" cy="396044"/>
+          </a:xfrm>
+          <a:prstGeom prst="roundRect">
+            <a:avLst>
+              <a:gd name="adj" fmla="val 13792"/>
+            </a:avLst>
+          </a:prstGeom>
+          <a:solidFill>
+            <a:schemeClr val="bg1">
+              <a:lumMod val="95000"/>
+            </a:schemeClr>
+          </a:solidFill>
+          <a:ln w="12700"/>
+        </p:spPr>
+        <p:style>
+          <a:lnRef idx="2">
+            <a:schemeClr val="dk1"/>
+          </a:lnRef>
+          <a:fillRef idx="1">
+            <a:schemeClr val="lt1"/>
+          </a:fillRef>
+          <a:effectRef idx="0">
+            <a:schemeClr val="dk1"/>
+          </a:effectRef>
+          <a:fontRef idx="minor">
+            <a:schemeClr val="dk1"/>
+          </a:fontRef>
+        </p:style>
+        <p:txBody>
+          <a:bodyPr rtlCol="0" anchor="ctr"/>
+          <a:lstStyle/>
+          <a:p>
+            <a:pPr algn="ctr"/>
+            <a:r>
+              <a:rPr lang="en-US" altLang="ko-KR" sz="1000"/>
+              <a:t>/dev/nvidia0</a:t>
+            </a:r>
+            <a:endParaRPr lang="en-US" altLang="ko-KR" sz="1000" dirty="0"/>
+          </a:p>
+        </p:txBody>
+      </p:sp>
+      <p:sp>
+        <p:nvSpPr>
+          <p:cNvPr id="44" name="사각형: 둥근 모서리 114">
+            <a:extLst>
+              <a:ext uri="{FF2B5EF4-FFF2-40B4-BE49-F238E27FC236}">
+                <a16:creationId xmlns:a16="http://schemas.microsoft.com/office/drawing/2014/main" id="{42A1B64F-D463-0A87-A490-F6DAE23A34BA}"/>
+              </a:ext>
+            </a:extLst>
+          </p:cNvPr>
+          <p:cNvSpPr/>
+          <p:nvPr/>
+        </p:nvSpPr>
+        <p:spPr>
+          <a:xfrm>
+            <a:off x="3405927" y="2495911"/>
+            <a:ext cx="1082148" cy="396044"/>
+          </a:xfrm>
+          <a:prstGeom prst="roundRect">
+            <a:avLst>
+              <a:gd name="adj" fmla="val 13792"/>
+            </a:avLst>
+          </a:prstGeom>
+          <a:solidFill>
+            <a:schemeClr val="bg1">
+              <a:lumMod val="95000"/>
+            </a:schemeClr>
+          </a:solidFill>
+          <a:ln w="12700"/>
+        </p:spPr>
+        <p:style>
+          <a:lnRef idx="2">
+            <a:schemeClr val="dk1"/>
+          </a:lnRef>
+          <a:fillRef idx="1">
+            <a:schemeClr val="lt1"/>
+          </a:fillRef>
+          <a:effectRef idx="0">
+            <a:schemeClr val="dk1"/>
+          </a:effectRef>
+          <a:fontRef idx="minor">
+            <a:schemeClr val="dk1"/>
+          </a:fontRef>
+        </p:style>
+        <p:txBody>
+          <a:bodyPr rtlCol="0" anchor="ctr"/>
+          <a:lstStyle/>
+          <a:p>
+            <a:pPr algn="ctr"/>
+            <a:r>
+              <a:rPr lang="en-US" altLang="ko-KR" sz="1000"/>
+              <a:t>/dev/nvidia1</a:t>
+            </a:r>
+            <a:endParaRPr lang="en-US" altLang="ko-KR" sz="1000" dirty="0"/>
+          </a:p>
+        </p:txBody>
+      </p:sp>
+      <p:sp>
+        <p:nvSpPr>
+          <p:cNvPr id="45" name="사각형: 둥근 모서리 114">
+            <a:extLst>
+              <a:ext uri="{FF2B5EF4-FFF2-40B4-BE49-F238E27FC236}">
+                <a16:creationId xmlns:a16="http://schemas.microsoft.com/office/drawing/2014/main" id="{94F1A929-0CF1-5C8C-ACDD-4BD668EA5639}"/>
+              </a:ext>
+            </a:extLst>
+          </p:cNvPr>
+          <p:cNvSpPr/>
+          <p:nvPr/>
+        </p:nvSpPr>
+        <p:spPr>
+          <a:xfrm>
+            <a:off x="4665905" y="2495911"/>
+            <a:ext cx="1082148" cy="396044"/>
+          </a:xfrm>
+          <a:prstGeom prst="roundRect">
+            <a:avLst>
+              <a:gd name="adj" fmla="val 13792"/>
+            </a:avLst>
+          </a:prstGeom>
+          <a:solidFill>
+            <a:schemeClr val="bg1">
+              <a:lumMod val="95000"/>
+            </a:schemeClr>
+          </a:solidFill>
+          <a:ln w="12700"/>
+        </p:spPr>
+        <p:style>
+          <a:lnRef idx="2">
+            <a:schemeClr val="dk1"/>
+          </a:lnRef>
+          <a:fillRef idx="1">
+            <a:schemeClr val="lt1"/>
+          </a:fillRef>
+          <a:effectRef idx="0">
+            <a:schemeClr val="dk1"/>
+          </a:effectRef>
+          <a:fontRef idx="minor">
+            <a:schemeClr val="dk1"/>
+          </a:fontRef>
+        </p:style>
+        <p:txBody>
+          <a:bodyPr rtlCol="0" anchor="ctr"/>
+          <a:lstStyle/>
+          <a:p>
+            <a:pPr algn="ctr"/>
+            <a:r>
+              <a:rPr lang="en-US" altLang="ko-KR" sz="1000"/>
+              <a:t>/dev/nvidia2</a:t>
+            </a:r>
+            <a:endParaRPr lang="en-US" altLang="ko-KR" sz="1000" dirty="0"/>
+          </a:p>
+        </p:txBody>
+      </p:sp>
+      <p:sp>
+        <p:nvSpPr>
+          <p:cNvPr id="46" name="사각형: 둥근 모서리 114">
+            <a:extLst>
+              <a:ext uri="{FF2B5EF4-FFF2-40B4-BE49-F238E27FC236}">
+                <a16:creationId xmlns:a16="http://schemas.microsoft.com/office/drawing/2014/main" id="{D85E14B9-5E77-CB01-2E13-A9E59ECEB129}"/>
+              </a:ext>
+            </a:extLst>
+          </p:cNvPr>
+          <p:cNvSpPr/>
+          <p:nvPr/>
+        </p:nvSpPr>
+        <p:spPr>
+          <a:xfrm>
+            <a:off x="5925884" y="2495911"/>
+            <a:ext cx="1082148" cy="396044"/>
+          </a:xfrm>
+          <a:prstGeom prst="roundRect">
+            <a:avLst>
+              <a:gd name="adj" fmla="val 13792"/>
+            </a:avLst>
+          </a:prstGeom>
+          <a:solidFill>
+            <a:schemeClr val="bg1">
+              <a:lumMod val="95000"/>
+            </a:schemeClr>
+          </a:solidFill>
+          <a:ln w="12700"/>
+        </p:spPr>
+        <p:style>
+          <a:lnRef idx="2">
+            <a:schemeClr val="dk1"/>
+          </a:lnRef>
+          <a:fillRef idx="1">
+            <a:schemeClr val="lt1"/>
+          </a:fillRef>
+          <a:effectRef idx="0">
+            <a:schemeClr val="dk1"/>
+          </a:effectRef>
+          <a:fontRef idx="minor">
+            <a:schemeClr val="dk1"/>
+          </a:fontRef>
+        </p:style>
+        <p:txBody>
+          <a:bodyPr rtlCol="0" anchor="ctr"/>
+          <a:lstStyle/>
+          <a:p>
+            <a:pPr algn="ctr"/>
+            <a:r>
+              <a:rPr lang="en-US" altLang="ko-KR" sz="1000"/>
+              <a:t>/dev/nvidia3</a:t>
+            </a:r>
+            <a:endParaRPr lang="en-US" altLang="ko-KR" sz="1000" dirty="0"/>
+          </a:p>
+        </p:txBody>
+      </p:sp>
+      <p:cxnSp>
+        <p:nvCxnSpPr>
+          <p:cNvPr id="52" name="직선 연결선 20">
+            <a:extLst>
+              <a:ext uri="{FF2B5EF4-FFF2-40B4-BE49-F238E27FC236}">
+                <a16:creationId xmlns:a16="http://schemas.microsoft.com/office/drawing/2014/main" id="{8418A54C-9041-9957-2D55-30E9F6DEDEED}"/>
+              </a:ext>
+            </a:extLst>
+          </p:cNvPr>
+          <p:cNvCxnSpPr>
+            <a:cxnSpLocks/>
+            <a:stCxn id="44" idx="2"/>
+            <a:endCxn id="15" idx="0"/>
+          </p:cNvCxnSpPr>
+          <p:nvPr/>
+        </p:nvCxnSpPr>
+        <p:spPr>
+          <a:xfrm flipH="1">
+            <a:off x="3944593" y="2891955"/>
+            <a:ext cx="2408" cy="1281421"/>
+          </a:xfrm>
+          <a:prstGeom prst="line">
+            <a:avLst/>
+          </a:prstGeom>
+          <a:ln w="12700">
+            <a:solidFill>
+              <a:schemeClr val="tx1"/>
+            </a:solidFill>
+            <a:prstDash val="dash"/>
+          </a:ln>
+        </p:spPr>
+        <p:style>
+          <a:lnRef idx="1">
+            <a:schemeClr val="accent1"/>
+          </a:lnRef>
+          <a:fillRef idx="0">
+            <a:schemeClr val="accent1"/>
+          </a:fillRef>
+          <a:effectRef idx="0">
+            <a:schemeClr val="accent1"/>
+          </a:effectRef>
+          <a:fontRef idx="minor">
+            <a:schemeClr val="tx1"/>
+          </a:fontRef>
+        </p:style>
+      </p:cxnSp>
+      <p:sp>
+        <p:nvSpPr>
+          <p:cNvPr id="104" name="사각형: 둥근 모서리 114">
+            <a:extLst>
+              <a:ext uri="{FF2B5EF4-FFF2-40B4-BE49-F238E27FC236}">
+                <a16:creationId xmlns:a16="http://schemas.microsoft.com/office/drawing/2014/main" id="{9F88AE54-F7B3-6115-509D-C7BC2684476B}"/>
+              </a:ext>
+            </a:extLst>
+          </p:cNvPr>
+          <p:cNvSpPr/>
+          <p:nvPr/>
+        </p:nvSpPr>
+        <p:spPr>
+          <a:xfrm>
+            <a:off x="2141132" y="2008269"/>
+            <a:ext cx="4862083" cy="396044"/>
+          </a:xfrm>
+          <a:prstGeom prst="roundRect">
+            <a:avLst>
+              <a:gd name="adj" fmla="val 17067"/>
+            </a:avLst>
+          </a:prstGeom>
+          <a:solidFill>
+            <a:schemeClr val="bg2">
+              <a:lumMod val="90000"/>
+            </a:schemeClr>
+          </a:solidFill>
+          <a:ln w="12700"/>
+        </p:spPr>
+        <p:style>
+          <a:lnRef idx="2">
+            <a:schemeClr val="dk1"/>
+          </a:lnRef>
+          <a:fillRef idx="1">
+            <a:schemeClr val="lt1"/>
+          </a:fillRef>
+          <a:effectRef idx="0">
+            <a:schemeClr val="dk1"/>
+          </a:effectRef>
+          <a:fontRef idx="minor">
+            <a:schemeClr val="dk1"/>
+          </a:fontRef>
+        </p:style>
+        <p:txBody>
+          <a:bodyPr rtlCol="0" anchor="ctr"/>
+          <a:lstStyle/>
+          <a:p>
+            <a:pPr algn="ctr"/>
+            <a:r>
+              <a:rPr lang="en-US" altLang="ko-KR" sz="1000"/>
+              <a:t>NVIDIA CUDA Lib/Toolkit</a:t>
+            </a:r>
+            <a:endParaRPr lang="en-US" altLang="ko-KR" sz="1000" dirty="0"/>
+          </a:p>
+        </p:txBody>
+      </p:sp>
+      <p:cxnSp>
+        <p:nvCxnSpPr>
+          <p:cNvPr id="117" name="직선 연결선 17">
+            <a:extLst>
+              <a:ext uri="{FF2B5EF4-FFF2-40B4-BE49-F238E27FC236}">
+                <a16:creationId xmlns:a16="http://schemas.microsoft.com/office/drawing/2014/main" id="{8DB036BC-2665-371E-8697-DE705E04A412}"/>
+              </a:ext>
+            </a:extLst>
+          </p:cNvPr>
+          <p:cNvCxnSpPr>
+            <a:cxnSpLocks/>
+            <a:stCxn id="34" idx="2"/>
+            <a:endCxn id="14" idx="0"/>
+          </p:cNvCxnSpPr>
+          <p:nvPr/>
+        </p:nvCxnSpPr>
+        <p:spPr>
+          <a:xfrm>
+            <a:off x="2682206" y="2891955"/>
+            <a:ext cx="2408" cy="1281421"/>
+          </a:xfrm>
+          <a:prstGeom prst="line">
+            <a:avLst/>
+          </a:prstGeom>
+          <a:ln w="12700">
+            <a:solidFill>
+              <a:schemeClr val="tx1"/>
+            </a:solidFill>
+            <a:prstDash val="dash"/>
+          </a:ln>
+        </p:spPr>
+        <p:style>
+          <a:lnRef idx="1">
+            <a:schemeClr val="accent1"/>
+          </a:lnRef>
+          <a:fillRef idx="0">
+            <a:schemeClr val="accent1"/>
+          </a:fillRef>
+          <a:effectRef idx="0">
+            <a:schemeClr val="accent1"/>
+          </a:effectRef>
+          <a:fontRef idx="minor">
+            <a:schemeClr val="tx1"/>
+          </a:fontRef>
+        </p:style>
+      </p:cxnSp>
+      <p:cxnSp>
+        <p:nvCxnSpPr>
+          <p:cNvPr id="120" name="직선 연결선 17">
+            <a:extLst>
+              <a:ext uri="{FF2B5EF4-FFF2-40B4-BE49-F238E27FC236}">
+                <a16:creationId xmlns:a16="http://schemas.microsoft.com/office/drawing/2014/main" id="{82B31B80-40F7-F2CC-4D61-CA46A71DCB00}"/>
+              </a:ext>
+            </a:extLst>
+          </p:cNvPr>
+          <p:cNvCxnSpPr>
+            <a:cxnSpLocks/>
+            <a:stCxn id="45" idx="2"/>
+            <a:endCxn id="16" idx="0"/>
+          </p:cNvCxnSpPr>
+          <p:nvPr/>
+        </p:nvCxnSpPr>
+        <p:spPr>
+          <a:xfrm flipH="1">
+            <a:off x="5204571" y="2891955"/>
+            <a:ext cx="2408" cy="1281421"/>
+          </a:xfrm>
+          <a:prstGeom prst="line">
+            <a:avLst/>
+          </a:prstGeom>
+          <a:ln w="12700">
+            <a:solidFill>
+              <a:schemeClr val="tx1"/>
+            </a:solidFill>
+            <a:prstDash val="dash"/>
+          </a:ln>
+        </p:spPr>
+        <p:style>
+          <a:lnRef idx="1">
+            <a:schemeClr val="accent1"/>
+          </a:lnRef>
+          <a:fillRef idx="0">
+            <a:schemeClr val="accent1"/>
+          </a:fillRef>
+          <a:effectRef idx="0">
+            <a:schemeClr val="accent1"/>
+          </a:effectRef>
+          <a:fontRef idx="minor">
+            <a:schemeClr val="tx1"/>
+          </a:fontRef>
+        </p:style>
+      </p:cxnSp>
+      <p:cxnSp>
+        <p:nvCxnSpPr>
+          <p:cNvPr id="123" name="직선 연결선 26">
+            <a:extLst>
+              <a:ext uri="{FF2B5EF4-FFF2-40B4-BE49-F238E27FC236}">
+                <a16:creationId xmlns:a16="http://schemas.microsoft.com/office/drawing/2014/main" id="{A88A0D96-25BA-6294-28D4-0BE6AE8CDE7F}"/>
+              </a:ext>
+            </a:extLst>
+          </p:cNvPr>
+          <p:cNvCxnSpPr>
+            <a:cxnSpLocks/>
+            <a:stCxn id="46" idx="2"/>
+            <a:endCxn id="17" idx="0"/>
+          </p:cNvCxnSpPr>
+          <p:nvPr/>
+        </p:nvCxnSpPr>
+        <p:spPr>
+          <a:xfrm flipH="1">
+            <a:off x="6464550" y="2891955"/>
+            <a:ext cx="2408" cy="1281421"/>
+          </a:xfrm>
+          <a:prstGeom prst="line">
+            <a:avLst/>
+          </a:prstGeom>
+          <a:ln w="12700">
+            <a:solidFill>
+              <a:schemeClr val="tx1"/>
+            </a:solidFill>
+            <a:prstDash val="dash"/>
+          </a:ln>
+        </p:spPr>
+        <p:style>
+          <a:lnRef idx="1">
+            <a:schemeClr val="accent1"/>
+          </a:lnRef>
+          <a:fillRef idx="0">
+            <a:schemeClr val="accent1"/>
+          </a:fillRef>
+          <a:effectRef idx="0">
+            <a:schemeClr val="accent1"/>
+          </a:effectRef>
+          <a:fontRef idx="minor">
+            <a:schemeClr val="tx1"/>
+          </a:fontRef>
+        </p:style>
+      </p:cxnSp>
+      <p:sp>
+        <p:nvSpPr>
+          <p:cNvPr id="146" name="사각형: 둥근 모서리 114">
+            <a:extLst>
+              <a:ext uri="{FF2B5EF4-FFF2-40B4-BE49-F238E27FC236}">
+                <a16:creationId xmlns:a16="http://schemas.microsoft.com/office/drawing/2014/main" id="{71EDB53D-9A65-0610-FA05-601DE452BA72}"/>
+              </a:ext>
+            </a:extLst>
+          </p:cNvPr>
+          <p:cNvSpPr/>
+          <p:nvPr/>
+        </p:nvSpPr>
+        <p:spPr>
+          <a:xfrm>
+            <a:off x="822678" y="393358"/>
+            <a:ext cx="2301467" cy="396044"/>
+          </a:xfrm>
+          <a:prstGeom prst="roundRect">
+            <a:avLst>
+              <a:gd name="adj" fmla="val 7242"/>
+            </a:avLst>
+          </a:prstGeom>
+          <a:ln w="12700"/>
+        </p:spPr>
+        <p:style>
+          <a:lnRef idx="2">
+            <a:schemeClr val="dk1"/>
+          </a:lnRef>
+          <a:fillRef idx="1">
+            <a:schemeClr val="lt1"/>
+          </a:fillRef>
+          <a:effectRef idx="0">
+            <a:schemeClr val="dk1"/>
+          </a:effectRef>
+          <a:fontRef idx="minor">
+            <a:schemeClr val="dk1"/>
+          </a:fontRef>
+        </p:style>
+        <p:txBody>
+          <a:bodyPr rtlCol="0" anchor="ctr"/>
+          <a:lstStyle/>
+          <a:p>
+            <a:pPr algn="ctr"/>
+            <a:r>
+              <a:rPr lang="en-US" altLang="ko-KR" sz="1000"/>
+              <a:t>App with </a:t>
+            </a:r>
+          </a:p>
+          <a:p>
+            <a:pPr algn="ctr"/>
+            <a:r>
+              <a:rPr lang="en-US" altLang="ko-KR" sz="1000"/>
+              <a:t>NVIDIA_VISIBLE_DEVICES Env  </a:t>
+            </a:r>
+            <a:endParaRPr lang="en-US" altLang="ko-KR" sz="1000" dirty="0"/>
+          </a:p>
+        </p:txBody>
+      </p:sp>
+      <p:sp>
+        <p:nvSpPr>
+          <p:cNvPr id="147" name="사각형: 둥근 모서리 114">
+            <a:extLst>
+              <a:ext uri="{FF2B5EF4-FFF2-40B4-BE49-F238E27FC236}">
+                <a16:creationId xmlns:a16="http://schemas.microsoft.com/office/drawing/2014/main" id="{1756B9FA-12CF-3DD3-5BF0-B18628CBB1BD}"/>
+              </a:ext>
+            </a:extLst>
+          </p:cNvPr>
+          <p:cNvSpPr/>
+          <p:nvPr/>
+        </p:nvSpPr>
+        <p:spPr>
+          <a:xfrm>
+            <a:off x="3434211" y="393358"/>
+            <a:ext cx="3498894" cy="396044"/>
+          </a:xfrm>
+          <a:prstGeom prst="roundRect">
+            <a:avLst>
+              <a:gd name="adj" fmla="val 7242"/>
+            </a:avLst>
+          </a:prstGeom>
+          <a:ln w="12700"/>
+        </p:spPr>
+        <p:style>
+          <a:lnRef idx="2">
+            <a:schemeClr val="dk1"/>
+          </a:lnRef>
+          <a:fillRef idx="1">
+            <a:schemeClr val="lt1"/>
+          </a:fillRef>
+          <a:effectRef idx="0">
+            <a:schemeClr val="dk1"/>
+          </a:effectRef>
+          <a:fontRef idx="minor">
+            <a:schemeClr val="dk1"/>
+          </a:fontRef>
+        </p:style>
+        <p:txBody>
+          <a:bodyPr rtlCol="0" anchor="ctr"/>
+          <a:lstStyle/>
+          <a:p>
+            <a:pPr algn="ctr"/>
+            <a:r>
+              <a:rPr lang="en-US" altLang="ko-KR" sz="1000"/>
+              <a:t>App with </a:t>
+            </a:r>
+          </a:p>
+          <a:p>
+            <a:pPr algn="ctr"/>
+            <a:r>
+              <a:rPr lang="en-US" altLang="ko-KR" sz="1000"/>
+              <a:t>NVIDIA_VISIBLE_DEVICES Env  </a:t>
+            </a:r>
+            <a:endParaRPr lang="en-US" altLang="ko-KR" sz="1000" dirty="0"/>
+          </a:p>
+        </p:txBody>
+      </p:sp>
+      <p:sp>
+        <p:nvSpPr>
+          <p:cNvPr id="148" name="사각형: 둥근 모서리 114">
+            <a:extLst>
+              <a:ext uri="{FF2B5EF4-FFF2-40B4-BE49-F238E27FC236}">
+                <a16:creationId xmlns:a16="http://schemas.microsoft.com/office/drawing/2014/main" id="{211B623A-BD4D-30BF-770A-2B4C2E43AD57}"/>
+              </a:ext>
+            </a:extLst>
+          </p:cNvPr>
+          <p:cNvSpPr/>
+          <p:nvPr/>
+        </p:nvSpPr>
+        <p:spPr>
+          <a:xfrm>
+            <a:off x="7244474" y="393358"/>
+            <a:ext cx="1321799" cy="396044"/>
+          </a:xfrm>
+          <a:prstGeom prst="roundRect">
+            <a:avLst>
+              <a:gd name="adj" fmla="val 7242"/>
+            </a:avLst>
+          </a:prstGeom>
+          <a:ln w="12700"/>
+        </p:spPr>
+        <p:style>
+          <a:lnRef idx="2">
+            <a:schemeClr val="dk1"/>
+          </a:lnRef>
+          <a:fillRef idx="1">
+            <a:schemeClr val="lt1"/>
+          </a:fillRef>
+          <a:effectRef idx="0">
+            <a:schemeClr val="dk1"/>
+          </a:effectRef>
+          <a:fontRef idx="minor">
+            <a:schemeClr val="dk1"/>
+          </a:fontRef>
+        </p:style>
+        <p:txBody>
+          <a:bodyPr rtlCol="0" anchor="ctr"/>
+          <a:lstStyle/>
+          <a:p>
+            <a:pPr algn="ctr"/>
+            <a:r>
+              <a:rPr lang="en-US" altLang="ko-KR" sz="1000"/>
+              <a:t>App with </a:t>
+            </a:r>
+          </a:p>
+          <a:p>
+            <a:pPr algn="ctr"/>
+            <a:r>
+              <a:rPr lang="en-US" altLang="ko-KR" sz="1000"/>
+              <a:t>NVIDIA_VISIBLE_</a:t>
+            </a:r>
+            <a:br>
+              <a:rPr lang="en-US" altLang="ko-KR" sz="1000"/>
+            </a:br>
+            <a:r>
+              <a:rPr lang="en-US" altLang="ko-KR" sz="1000"/>
+              <a:t>DEVICES Env  </a:t>
+            </a:r>
+            <a:endParaRPr lang="en-US" altLang="ko-KR" sz="1000" dirty="0"/>
+          </a:p>
+        </p:txBody>
+      </p:sp>
+      <p:cxnSp>
+        <p:nvCxnSpPr>
+          <p:cNvPr id="150" name="직선 연결선 26">
+            <a:extLst>
+              <a:ext uri="{FF2B5EF4-FFF2-40B4-BE49-F238E27FC236}">
+                <a16:creationId xmlns:a16="http://schemas.microsoft.com/office/drawing/2014/main" id="{0616933E-BB6C-7525-CFAB-90E8FBC41E87}"/>
+              </a:ext>
+            </a:extLst>
+          </p:cNvPr>
+          <p:cNvCxnSpPr>
+            <a:cxnSpLocks/>
+            <a:stCxn id="74" idx="2"/>
+            <a:endCxn id="46" idx="0"/>
+          </p:cNvCxnSpPr>
+          <p:nvPr/>
+        </p:nvCxnSpPr>
+        <p:spPr>
+          <a:xfrm flipH="1">
+            <a:off x="6466958" y="1736031"/>
+            <a:ext cx="1438417" cy="759880"/>
+          </a:xfrm>
+          <a:prstGeom prst="line">
+            <a:avLst/>
+          </a:prstGeom>
+          <a:ln w="12700">
+            <a:solidFill>
+              <a:schemeClr val="tx1"/>
+            </a:solidFill>
+          </a:ln>
+        </p:spPr>
+        <p:style>
+          <a:lnRef idx="1">
+            <a:schemeClr val="accent1"/>
+          </a:lnRef>
+          <a:fillRef idx="0">
+            <a:schemeClr val="accent1"/>
+          </a:fillRef>
+          <a:effectRef idx="0">
+            <a:schemeClr val="accent1"/>
+          </a:effectRef>
+          <a:fontRef idx="minor">
+            <a:schemeClr val="tx1"/>
+          </a:fontRef>
+        </p:style>
+      </p:cxnSp>
+      <p:cxnSp>
+        <p:nvCxnSpPr>
+          <p:cNvPr id="153" name="직선 연결선 26">
+            <a:extLst>
+              <a:ext uri="{FF2B5EF4-FFF2-40B4-BE49-F238E27FC236}">
+                <a16:creationId xmlns:a16="http://schemas.microsoft.com/office/drawing/2014/main" id="{DB76658E-9B68-B39A-C49B-F143F666F73D}"/>
+              </a:ext>
+            </a:extLst>
+          </p:cNvPr>
+          <p:cNvCxnSpPr>
+            <a:cxnSpLocks/>
+            <a:stCxn id="85" idx="2"/>
+            <a:endCxn id="46" idx="0"/>
+          </p:cNvCxnSpPr>
+          <p:nvPr/>
+        </p:nvCxnSpPr>
+        <p:spPr>
+          <a:xfrm>
+            <a:off x="6383171" y="1736031"/>
+            <a:ext cx="83787" cy="759880"/>
+          </a:xfrm>
+          <a:prstGeom prst="line">
+            <a:avLst/>
+          </a:prstGeom>
+          <a:ln w="12700">
+            <a:solidFill>
+              <a:schemeClr val="tx1"/>
+            </a:solidFill>
+          </a:ln>
+        </p:spPr>
+        <p:style>
+          <a:lnRef idx="1">
+            <a:schemeClr val="accent1"/>
+          </a:lnRef>
+          <a:fillRef idx="0">
+            <a:schemeClr val="accent1"/>
+          </a:fillRef>
+          <a:effectRef idx="0">
+            <a:schemeClr val="accent1"/>
+          </a:effectRef>
+          <a:fontRef idx="minor">
+            <a:schemeClr val="tx1"/>
+          </a:fontRef>
+        </p:style>
+      </p:cxnSp>
+      <p:cxnSp>
+        <p:nvCxnSpPr>
+          <p:cNvPr id="156" name="직선 연결선 26">
+            <a:extLst>
+              <a:ext uri="{FF2B5EF4-FFF2-40B4-BE49-F238E27FC236}">
+                <a16:creationId xmlns:a16="http://schemas.microsoft.com/office/drawing/2014/main" id="{1F51A8F9-1B81-CCD9-9BFA-E84B1ED7FEB8}"/>
+              </a:ext>
+            </a:extLst>
+          </p:cNvPr>
+          <p:cNvCxnSpPr>
+            <a:cxnSpLocks/>
+            <a:stCxn id="56" idx="2"/>
+            <a:endCxn id="45" idx="0"/>
+          </p:cNvCxnSpPr>
+          <p:nvPr/>
+        </p:nvCxnSpPr>
+        <p:spPr>
+          <a:xfrm>
+            <a:off x="5185744" y="1736031"/>
+            <a:ext cx="21235" cy="759880"/>
+          </a:xfrm>
+          <a:prstGeom prst="line">
+            <a:avLst/>
+          </a:prstGeom>
+          <a:ln w="12700">
+            <a:solidFill>
+              <a:schemeClr val="tx1"/>
+            </a:solidFill>
+          </a:ln>
+        </p:spPr>
+        <p:style>
+          <a:lnRef idx="1">
+            <a:schemeClr val="accent1"/>
+          </a:lnRef>
+          <a:fillRef idx="0">
+            <a:schemeClr val="accent1"/>
+          </a:fillRef>
+          <a:effectRef idx="0">
+            <a:schemeClr val="accent1"/>
+          </a:effectRef>
+          <a:fontRef idx="minor">
+            <a:schemeClr val="tx1"/>
+          </a:fontRef>
+        </p:style>
+      </p:cxnSp>
+      <p:cxnSp>
+        <p:nvCxnSpPr>
+          <p:cNvPr id="159" name="직선 연결선 20">
+            <a:extLst>
+              <a:ext uri="{FF2B5EF4-FFF2-40B4-BE49-F238E27FC236}">
+                <a16:creationId xmlns:a16="http://schemas.microsoft.com/office/drawing/2014/main" id="{54A558F7-B7CF-58D9-5FA0-8FA89E14A0EF}"/>
+              </a:ext>
+            </a:extLst>
+          </p:cNvPr>
+          <p:cNvCxnSpPr>
+            <a:cxnSpLocks/>
+            <a:stCxn id="55" idx="2"/>
+            <a:endCxn id="34" idx="0"/>
+          </p:cNvCxnSpPr>
+          <p:nvPr/>
+        </p:nvCxnSpPr>
+        <p:spPr>
+          <a:xfrm flipH="1">
+            <a:off x="2682206" y="1736031"/>
+            <a:ext cx="1302004" cy="759880"/>
+          </a:xfrm>
+          <a:prstGeom prst="line">
+            <a:avLst/>
+          </a:prstGeom>
+          <a:ln w="12700">
+            <a:solidFill>
+              <a:schemeClr val="tx1"/>
+            </a:solidFill>
+          </a:ln>
+        </p:spPr>
+        <p:style>
+          <a:lnRef idx="1">
+            <a:schemeClr val="accent1"/>
+          </a:lnRef>
+          <a:fillRef idx="0">
+            <a:schemeClr val="accent1"/>
+          </a:fillRef>
+          <a:effectRef idx="0">
+            <a:schemeClr val="accent1"/>
+          </a:effectRef>
+          <a:fontRef idx="minor">
+            <a:schemeClr val="tx1"/>
+          </a:fontRef>
+        </p:style>
+      </p:cxnSp>
+      <p:cxnSp>
+        <p:nvCxnSpPr>
+          <p:cNvPr id="162" name="직선 연결선 20">
+            <a:extLst>
+              <a:ext uri="{FF2B5EF4-FFF2-40B4-BE49-F238E27FC236}">
+                <a16:creationId xmlns:a16="http://schemas.microsoft.com/office/drawing/2014/main" id="{29A0CA9D-6107-73A4-89EC-A2CD09F6B7B2}"/>
+              </a:ext>
+            </a:extLst>
+          </p:cNvPr>
+          <p:cNvCxnSpPr>
+            <a:cxnSpLocks/>
+            <a:stCxn id="49" idx="2"/>
+            <a:endCxn id="44" idx="0"/>
+          </p:cNvCxnSpPr>
+          <p:nvPr/>
+        </p:nvCxnSpPr>
+        <p:spPr>
+          <a:xfrm>
+            <a:off x="2574212" y="1741694"/>
+            <a:ext cx="1372789" cy="754217"/>
+          </a:xfrm>
+          <a:prstGeom prst="line">
+            <a:avLst/>
+          </a:prstGeom>
+          <a:ln w="12700">
+            <a:solidFill>
+              <a:schemeClr val="tx1"/>
+            </a:solidFill>
+          </a:ln>
+        </p:spPr>
+        <p:style>
+          <a:lnRef idx="1">
+            <a:schemeClr val="accent1"/>
+          </a:lnRef>
+          <a:fillRef idx="0">
+            <a:schemeClr val="accent1"/>
+          </a:fillRef>
+          <a:effectRef idx="0">
+            <a:schemeClr val="accent1"/>
+          </a:effectRef>
+          <a:fontRef idx="minor">
+            <a:schemeClr val="tx1"/>
+          </a:fontRef>
+        </p:style>
+      </p:cxnSp>
+      <p:cxnSp>
+        <p:nvCxnSpPr>
+          <p:cNvPr id="165" name="직선 연결선 17">
+            <a:extLst>
+              <a:ext uri="{FF2B5EF4-FFF2-40B4-BE49-F238E27FC236}">
+                <a16:creationId xmlns:a16="http://schemas.microsoft.com/office/drawing/2014/main" id="{34B9E027-5E8B-7C79-21CF-58A91E9E45C4}"/>
+              </a:ext>
+            </a:extLst>
+          </p:cNvPr>
+          <p:cNvCxnSpPr>
+            <a:cxnSpLocks/>
+            <a:stCxn id="48" idx="2"/>
+            <a:endCxn id="34" idx="0"/>
+          </p:cNvCxnSpPr>
+          <p:nvPr/>
+        </p:nvCxnSpPr>
+        <p:spPr>
+          <a:xfrm>
+            <a:off x="1372678" y="1741694"/>
+            <a:ext cx="1309528" cy="754217"/>
+          </a:xfrm>
+          <a:prstGeom prst="line">
+            <a:avLst/>
+          </a:prstGeom>
+          <a:ln w="12700">
+            <a:solidFill>
+              <a:schemeClr val="tx1"/>
+            </a:solidFill>
+          </a:ln>
+        </p:spPr>
+        <p:style>
+          <a:lnRef idx="1">
+            <a:schemeClr val="accent1"/>
+          </a:lnRef>
+          <a:fillRef idx="0">
+            <a:schemeClr val="accent1"/>
+          </a:fillRef>
+          <a:effectRef idx="0">
+            <a:schemeClr val="accent1"/>
+          </a:effectRef>
+          <a:fontRef idx="minor">
+            <a:schemeClr val="tx1"/>
+          </a:fontRef>
+        </p:style>
+      </p:cxnSp>
+      <p:cxnSp>
+        <p:nvCxnSpPr>
+          <p:cNvPr id="168" name="직선 연결선 20">
+            <a:extLst>
+              <a:ext uri="{FF2B5EF4-FFF2-40B4-BE49-F238E27FC236}">
+                <a16:creationId xmlns:a16="http://schemas.microsoft.com/office/drawing/2014/main" id="{559051FB-9F6F-2B58-3C88-90B363DF9865}"/>
+              </a:ext>
+            </a:extLst>
+          </p:cNvPr>
+          <p:cNvCxnSpPr>
+            <a:cxnSpLocks/>
+            <a:stCxn id="53" idx="2"/>
+            <a:endCxn id="104" idx="0"/>
+          </p:cNvCxnSpPr>
+          <p:nvPr/>
+        </p:nvCxnSpPr>
+        <p:spPr>
+          <a:xfrm>
+            <a:off x="1973412" y="1255640"/>
+            <a:ext cx="2598762" cy="752629"/>
+          </a:xfrm>
+          <a:prstGeom prst="line">
+            <a:avLst/>
+          </a:prstGeom>
+          <a:ln w="12700">
+            <a:solidFill>
+              <a:schemeClr val="tx1"/>
+            </a:solidFill>
+          </a:ln>
+        </p:spPr>
+        <p:style>
+          <a:lnRef idx="1">
+            <a:schemeClr val="accent1"/>
+          </a:lnRef>
+          <a:fillRef idx="0">
+            <a:schemeClr val="accent1"/>
+          </a:fillRef>
+          <a:effectRef idx="0">
+            <a:schemeClr val="accent1"/>
+          </a:effectRef>
+          <a:fontRef idx="minor">
+            <a:schemeClr val="tx1"/>
+          </a:fontRef>
+        </p:style>
+      </p:cxnSp>
+      <p:cxnSp>
+        <p:nvCxnSpPr>
+          <p:cNvPr id="172" name="직선 연결선 20">
+            <a:extLst>
+              <a:ext uri="{FF2B5EF4-FFF2-40B4-BE49-F238E27FC236}">
+                <a16:creationId xmlns:a16="http://schemas.microsoft.com/office/drawing/2014/main" id="{332D0C97-257F-4DD4-91A4-4425E485781C}"/>
+              </a:ext>
+            </a:extLst>
+          </p:cNvPr>
+          <p:cNvCxnSpPr>
+            <a:cxnSpLocks/>
+            <a:stCxn id="57" idx="2"/>
+            <a:endCxn id="104" idx="0"/>
+          </p:cNvCxnSpPr>
+          <p:nvPr/>
+        </p:nvCxnSpPr>
+        <p:spPr>
+          <a:xfrm flipH="1">
+            <a:off x="4572174" y="1249977"/>
+            <a:ext cx="611484" cy="758292"/>
+          </a:xfrm>
+          <a:prstGeom prst="line">
+            <a:avLst/>
+          </a:prstGeom>
+          <a:ln w="12700">
+            <a:solidFill>
+              <a:schemeClr val="tx1"/>
+            </a:solidFill>
+          </a:ln>
+        </p:spPr>
+        <p:style>
+          <a:lnRef idx="1">
+            <a:schemeClr val="accent1"/>
+          </a:lnRef>
+          <a:fillRef idx="0">
+            <a:schemeClr val="accent1"/>
+          </a:fillRef>
+          <a:effectRef idx="0">
+            <a:schemeClr val="accent1"/>
+          </a:effectRef>
+          <a:fontRef idx="minor">
+            <a:schemeClr val="tx1"/>
+          </a:fontRef>
+        </p:style>
+      </p:cxnSp>
+      <p:cxnSp>
+        <p:nvCxnSpPr>
+          <p:cNvPr id="175" name="직선 연결선 20">
+            <a:extLst>
+              <a:ext uri="{FF2B5EF4-FFF2-40B4-BE49-F238E27FC236}">
+                <a16:creationId xmlns:a16="http://schemas.microsoft.com/office/drawing/2014/main" id="{C871A11D-E254-B9FE-8B43-7349A2B4422A}"/>
+              </a:ext>
+            </a:extLst>
+          </p:cNvPr>
+          <p:cNvCxnSpPr>
+            <a:cxnSpLocks/>
+            <a:stCxn id="75" idx="2"/>
+            <a:endCxn id="104" idx="0"/>
+          </p:cNvCxnSpPr>
+          <p:nvPr/>
+        </p:nvCxnSpPr>
+        <p:spPr>
+          <a:xfrm flipH="1">
+            <a:off x="4572174" y="1249977"/>
+            <a:ext cx="3333200" cy="758292"/>
+          </a:xfrm>
+          <a:prstGeom prst="line">
+            <a:avLst/>
+          </a:prstGeom>
+          <a:ln w="12700">
+            <a:solidFill>
+              <a:schemeClr val="tx1"/>
+            </a:solidFill>
+          </a:ln>
+        </p:spPr>
+        <p:style>
+          <a:lnRef idx="1">
+            <a:schemeClr val="accent1"/>
+          </a:lnRef>
+          <a:fillRef idx="0">
+            <a:schemeClr val="accent1"/>
+          </a:fillRef>
+          <a:effectRef idx="0">
+            <a:schemeClr val="accent1"/>
+          </a:effectRef>
+          <a:fontRef idx="minor">
+            <a:schemeClr val="tx1"/>
+          </a:fontRef>
+        </p:style>
+      </p:cxnSp>
+      <p:sp>
+        <p:nvSpPr>
+          <p:cNvPr id="179" name="TextBox 178">
+            <a:extLst>
+              <a:ext uri="{FF2B5EF4-FFF2-40B4-BE49-F238E27FC236}">
+                <a16:creationId xmlns:a16="http://schemas.microsoft.com/office/drawing/2014/main" id="{31C74496-FEB5-272A-C057-992757BE3C16}"/>
+              </a:ext>
+            </a:extLst>
+          </p:cNvPr>
+          <p:cNvSpPr txBox="1"/>
+          <p:nvPr/>
+        </p:nvSpPr>
+        <p:spPr>
+          <a:xfrm>
+            <a:off x="691097" y="1819727"/>
+            <a:ext cx="915635" cy="246221"/>
+          </a:xfrm>
+          <a:prstGeom prst="rect">
+            <a:avLst/>
+          </a:prstGeom>
+          <a:noFill/>
+        </p:spPr>
+        <p:txBody>
+          <a:bodyPr wrap="none" rtlCol="0">
+            <a:spAutoFit/>
+          </a:bodyPr>
+          <a:lstStyle/>
+          <a:p>
+            <a:r>
+              <a:rPr kumimoji="1" lang="en-US" altLang="ko-KR" sz="1000" b="1" i="1"/>
+              <a:t>Bind Mount</a:t>
+            </a:r>
+            <a:endParaRPr kumimoji="1" lang="ko-KR" altLang="en-US" sz="1000" b="1" i="1"/>
+          </a:p>
+        </p:txBody>
+      </p:sp>
+    </p:spTree>
+    <p:extLst>
+      <p:ext uri="{BB962C8B-B14F-4D97-AF65-F5344CB8AC3E}">
+        <p14:creationId xmlns:p14="http://schemas.microsoft.com/office/powerpoint/2010/main" val="3837075641"/>
+      </p:ext>
+    </p:extLst>
+  </p:cSld>
+  <p:clrMapOvr>
+    <a:masterClrMapping/>
+  </p:clrMapOvr>
+</p:sld>
+</file>
+
+<file path=ppt/slides/slide6.xml><?xml version="1.0" encoding="utf-8"?>
 <p:sld xmlns:a="http://schemas.openxmlformats.org/drawingml/2006/main" xmlns:r="http://schemas.openxmlformats.org/officeDocument/2006/relationships" xmlns:p="http://schemas.openxmlformats.org/presentationml/2006/main">
   <p:cSld>
     <p:spTree>
@@ -9344,7 +13939,7 @@
 </p:sld>
 </file>
 
-<file path=ppt/slides/slide5.xml><?xml version="1.0" encoding="utf-8"?>
+<file path=ppt/slides/slide7.xml><?xml version="1.0" encoding="utf-8"?>
 <p:sld xmlns:a="http://schemas.openxmlformats.org/drawingml/2006/main" xmlns:r="http://schemas.openxmlformats.org/officeDocument/2006/relationships" xmlns:p="http://schemas.openxmlformats.org/presentationml/2006/main">
   <p:cSld>
     <p:spTree>

--- a/content/docs/theory-analysis/kubernetes-nvidia-device-plugin/images/images.pptx
+++ b/content/docs/theory-analysis/kubernetes-nvidia-device-plugin/images/images.pptx
@@ -5,19 +5,20 @@
     <p:sldMasterId id="2147483648" r:id="rId1"/>
   </p:sldMasterIdLst>
   <p:notesMasterIdLst>
-    <p:notesMasterId r:id="rId12"/>
+    <p:notesMasterId r:id="rId13"/>
   </p:notesMasterIdLst>
   <p:sldIdLst>
     <p:sldId id="439" r:id="rId2"/>
     <p:sldId id="431" r:id="rId3"/>
     <p:sldId id="441" r:id="rId4"/>
-    <p:sldId id="434" r:id="rId5"/>
-    <p:sldId id="440" r:id="rId6"/>
-    <p:sldId id="438" r:id="rId7"/>
-    <p:sldId id="442" r:id="rId8"/>
-    <p:sldId id="435" r:id="rId9"/>
-    <p:sldId id="436" r:id="rId10"/>
-    <p:sldId id="422" r:id="rId11"/>
+    <p:sldId id="443" r:id="rId5"/>
+    <p:sldId id="434" r:id="rId6"/>
+    <p:sldId id="440" r:id="rId7"/>
+    <p:sldId id="438" r:id="rId8"/>
+    <p:sldId id="442" r:id="rId9"/>
+    <p:sldId id="435" r:id="rId10"/>
+    <p:sldId id="436" r:id="rId11"/>
+    <p:sldId id="422" r:id="rId12"/>
   </p:sldIdLst>
   <p:sldSz cx="9144000" cy="5143500" type="screen16x9"/>
   <p:notesSz cx="6858000" cy="9144000"/>
@@ -605,6 +606,114 @@
         <p:cNvPr id="1" name="">
           <a:extLst>
             <a:ext uri="{FF2B5EF4-FFF2-40B4-BE49-F238E27FC236}">
+              <a16:creationId xmlns:a16="http://schemas.microsoft.com/office/drawing/2014/main" id="{EE52B3D6-C372-0142-2415-8AB0F04FE3B3}"/>
+            </a:ext>
+          </a:extLst>
+        </p:cNvPr>
+        <p:cNvGrpSpPr/>
+        <p:nvPr/>
+      </p:nvGrpSpPr>
+      <p:grpSpPr>
+        <a:xfrm>
+          <a:off x="0" y="0"/>
+          <a:ext cx="0" cy="0"/>
+          <a:chOff x="0" y="0"/>
+          <a:chExt cx="0" cy="0"/>
+        </a:xfrm>
+      </p:grpSpPr>
+      <p:sp>
+        <p:nvSpPr>
+          <p:cNvPr id="2" name="슬라이드 이미지 개체 틀 1">
+            <a:extLst>
+              <a:ext uri="{FF2B5EF4-FFF2-40B4-BE49-F238E27FC236}">
+                <a16:creationId xmlns:a16="http://schemas.microsoft.com/office/drawing/2014/main" id="{916A79A2-44B1-5D85-5FCE-27C7134E7FE1}"/>
+              </a:ext>
+            </a:extLst>
+          </p:cNvPr>
+          <p:cNvSpPr>
+            <a:spLocks noGrp="1" noRot="1" noChangeAspect="1"/>
+          </p:cNvSpPr>
+          <p:nvPr>
+            <p:ph type="sldImg"/>
+          </p:nvPr>
+        </p:nvSpPr>
+        <p:spPr/>
+      </p:sp>
+      <p:sp>
+        <p:nvSpPr>
+          <p:cNvPr id="3" name="슬라이드 노트 개체 틀 2">
+            <a:extLst>
+              <a:ext uri="{FF2B5EF4-FFF2-40B4-BE49-F238E27FC236}">
+                <a16:creationId xmlns:a16="http://schemas.microsoft.com/office/drawing/2014/main" id="{0AF9D84C-038C-AEDE-BD27-9C207612F458}"/>
+              </a:ext>
+            </a:extLst>
+          </p:cNvPr>
+          <p:cNvSpPr>
+            <a:spLocks noGrp="1"/>
+          </p:cNvSpPr>
+          <p:nvPr>
+            <p:ph type="body" idx="1"/>
+          </p:nvPr>
+        </p:nvSpPr>
+        <p:spPr/>
+        <p:txBody>
+          <a:bodyPr/>
+          <a:lstStyle/>
+          <a:p>
+            <a:endParaRPr lang="ko-KR" altLang="en-US"/>
+          </a:p>
+        </p:txBody>
+      </p:sp>
+      <p:sp>
+        <p:nvSpPr>
+          <p:cNvPr id="4" name="슬라이드 번호 개체 틀 3">
+            <a:extLst>
+              <a:ext uri="{FF2B5EF4-FFF2-40B4-BE49-F238E27FC236}">
+                <a16:creationId xmlns:a16="http://schemas.microsoft.com/office/drawing/2014/main" id="{85A9116C-C360-A5CA-462B-18CE6A7EBE3E}"/>
+              </a:ext>
+            </a:extLst>
+          </p:cNvPr>
+          <p:cNvSpPr>
+            <a:spLocks noGrp="1"/>
+          </p:cNvSpPr>
+          <p:nvPr>
+            <p:ph type="sldNum" sz="quarter" idx="10"/>
+          </p:nvPr>
+        </p:nvSpPr>
+        <p:spPr/>
+        <p:txBody>
+          <a:bodyPr/>
+          <a:lstStyle/>
+          <a:p>
+            <a:fld id="{BA5DFA43-8D57-47FB-BC46-057616015C3B}" type="slidenum">
+              <a:rPr lang="ko-KR" altLang="en-US" smtClean="0"/>
+              <a:t>4</a:t>
+            </a:fld>
+            <a:endParaRPr lang="ko-KR" altLang="en-US"/>
+          </a:p>
+        </p:txBody>
+      </p:sp>
+    </p:spTree>
+    <p:extLst>
+      <p:ext uri="{BB962C8B-B14F-4D97-AF65-F5344CB8AC3E}">
+        <p14:creationId xmlns:p14="http://schemas.microsoft.com/office/powerpoint/2010/main" val="428482520"/>
+      </p:ext>
+    </p:extLst>
+  </p:cSld>
+  <p:clrMapOvr>
+    <a:masterClrMapping/>
+  </p:clrMapOvr>
+</p:notes>
+</file>
+
+<file path=ppt/notesSlides/notesSlide3.xml><?xml version="1.0" encoding="utf-8"?>
+<p:notes xmlns:a="http://schemas.openxmlformats.org/drawingml/2006/main" xmlns:r="http://schemas.openxmlformats.org/officeDocument/2006/relationships" xmlns:p="http://schemas.openxmlformats.org/presentationml/2006/main">
+  <p:cSld>
+    <p:spTree>
+      <p:nvGrpSpPr>
+        <p:cNvPr id="1" name="">
+          <a:extLst>
+            <a:ext uri="{FF2B5EF4-FFF2-40B4-BE49-F238E27FC236}">
               <a16:creationId xmlns:a16="http://schemas.microsoft.com/office/drawing/2014/main" id="{05708CB7-7340-B840-D8CB-F3FBC9133D4D}"/>
             </a:ext>
           </a:extLst>
@@ -686,7 +795,7 @@
           <a:p>
             <a:fld id="{BA5DFA43-8D57-47FB-BC46-057616015C3B}" type="slidenum">
               <a:rPr lang="ko-KR" altLang="en-US" smtClean="0"/>
-              <a:t>5</a:t>
+              <a:t>6</a:t>
             </a:fld>
             <a:endParaRPr lang="ko-KR" altLang="en-US"/>
           </a:p>
@@ -705,7 +814,7 @@
 </p:notes>
 </file>
 
-<file path=ppt/notesSlides/notesSlide3.xml><?xml version="1.0" encoding="utf-8"?>
+<file path=ppt/notesSlides/notesSlide4.xml><?xml version="1.0" encoding="utf-8"?>
 <p:notes xmlns:a="http://schemas.openxmlformats.org/drawingml/2006/main" xmlns:r="http://schemas.openxmlformats.org/officeDocument/2006/relationships" xmlns:p="http://schemas.openxmlformats.org/presentationml/2006/main">
   <p:cSld>
     <p:spTree>
@@ -794,7 +903,7 @@
           <a:p>
             <a:fld id="{BA5DFA43-8D57-47FB-BC46-057616015C3B}" type="slidenum">
               <a:rPr lang="ko-KR" altLang="en-US" smtClean="0"/>
-              <a:t>6</a:t>
+              <a:t>7</a:t>
             </a:fld>
             <a:endParaRPr lang="ko-KR" altLang="en-US"/>
           </a:p>
@@ -813,7 +922,7 @@
 </p:notes>
 </file>
 
-<file path=ppt/notesSlides/notesSlide4.xml><?xml version="1.0" encoding="utf-8"?>
+<file path=ppt/notesSlides/notesSlide5.xml><?xml version="1.0" encoding="utf-8"?>
 <p:notes xmlns:a="http://schemas.openxmlformats.org/drawingml/2006/main" xmlns:r="http://schemas.openxmlformats.org/officeDocument/2006/relationships" xmlns:p="http://schemas.openxmlformats.org/presentationml/2006/main">
   <p:cSld>
     <p:spTree>
@@ -878,7 +987,7 @@
           <a:p>
             <a:fld id="{BA5DFA43-8D57-47FB-BC46-057616015C3B}" type="slidenum">
               <a:rPr lang="ko-KR" altLang="en-US" smtClean="0"/>
-              <a:t>10</a:t>
+              <a:t>11</a:t>
             </a:fld>
             <a:endParaRPr lang="ko-KR" altLang="en-US"/>
           </a:p>
@@ -4067,7 +4176,7 @@
             <a:pPr algn="ctr"/>
             <a:r>
               <a:rPr lang="en-US" altLang="ko-KR" sz="1000"/>
-              <a:t>/dev/nvidia0</a:t>
+              <a:t>/dev/nvidia1</a:t>
             </a:r>
             <a:endParaRPr lang="en-US" altLang="ko-KR" sz="1000" dirty="0"/>
           </a:p>
@@ -4123,7 +4232,7 @@
             <a:pPr algn="ctr"/>
             <a:r>
               <a:rPr lang="en-US" altLang="ko-KR" sz="1000"/>
-              <a:t>/dev/nvidia1</a:t>
+              <a:t>/dev/nvidia2</a:t>
             </a:r>
             <a:endParaRPr lang="en-US" altLang="ko-KR" sz="1000" dirty="0"/>
           </a:p>
@@ -4292,7 +4401,7 @@
             <a:pPr algn="ctr"/>
             <a:r>
               <a:rPr lang="en-US" altLang="ko-KR" sz="1000"/>
-              <a:t>/dev/nvidia3</a:t>
+              <a:t>/dev/nvidia0</a:t>
             </a:r>
             <a:endParaRPr lang="en-US" altLang="ko-KR" sz="1000" dirty="0"/>
           </a:p>
@@ -5631,51 +5740,6 @@
           </a:fontRef>
         </p:style>
       </p:cxnSp>
-      <p:cxnSp>
-        <p:nvCxnSpPr>
-          <p:cNvPr id="30" name="직선 연결선 17">
-            <a:extLst>
-              <a:ext uri="{FF2B5EF4-FFF2-40B4-BE49-F238E27FC236}">
-                <a16:creationId xmlns:a16="http://schemas.microsoft.com/office/drawing/2014/main" id="{0C511136-323E-BC7A-64DA-93223CB8219F}"/>
-              </a:ext>
-            </a:extLst>
-          </p:cNvPr>
-          <p:cNvCxnSpPr>
-            <a:cxnSpLocks/>
-            <a:stCxn id="74" idx="2"/>
-            <a:endCxn id="21" idx="0"/>
-          </p:cNvCxnSpPr>
-          <p:nvPr/>
-        </p:nvCxnSpPr>
-        <p:spPr>
-          <a:xfrm>
-            <a:off x="1584555" y="2056409"/>
-            <a:ext cx="161547" cy="739655"/>
-          </a:xfrm>
-          <a:prstGeom prst="line">
-            <a:avLst/>
-          </a:prstGeom>
-          <a:ln w="12700">
-            <a:solidFill>
-              <a:schemeClr val="tx1"/>
-            </a:solidFill>
-          </a:ln>
-        </p:spPr>
-        <p:style>
-          <a:lnRef idx="1">
-            <a:schemeClr val="accent1"/>
-          </a:lnRef>
-          <a:fillRef idx="0">
-            <a:schemeClr val="accent1"/>
-          </a:fillRef>
-          <a:effectRef idx="0">
-            <a:schemeClr val="accent1"/>
-          </a:effectRef>
-          <a:fontRef idx="minor">
-            <a:schemeClr val="tx1"/>
-          </a:fontRef>
-        </p:style>
-      </p:cxnSp>
       <p:sp>
         <p:nvSpPr>
           <p:cNvPr id="179" name="TextBox 178">
@@ -5712,141 +5776,6 @@
           </a:p>
         </p:txBody>
       </p:sp>
-      <p:cxnSp>
-        <p:nvCxnSpPr>
-          <p:cNvPr id="39" name="직선 연결선 17">
-            <a:extLst>
-              <a:ext uri="{FF2B5EF4-FFF2-40B4-BE49-F238E27FC236}">
-                <a16:creationId xmlns:a16="http://schemas.microsoft.com/office/drawing/2014/main" id="{E0E3CEC2-FF44-8DBE-3D73-86B5C8A185B0}"/>
-              </a:ext>
-            </a:extLst>
-          </p:cNvPr>
-          <p:cNvCxnSpPr>
-            <a:cxnSpLocks/>
-            <a:stCxn id="48" idx="2"/>
-            <a:endCxn id="22" idx="0"/>
-          </p:cNvCxnSpPr>
-          <p:nvPr/>
-        </p:nvCxnSpPr>
-        <p:spPr>
-          <a:xfrm>
-            <a:off x="3007252" y="2066253"/>
-            <a:ext cx="3645" cy="729811"/>
-          </a:xfrm>
-          <a:prstGeom prst="line">
-            <a:avLst/>
-          </a:prstGeom>
-          <a:ln w="12700">
-            <a:solidFill>
-              <a:schemeClr val="tx1"/>
-            </a:solidFill>
-          </a:ln>
-        </p:spPr>
-        <p:style>
-          <a:lnRef idx="1">
-            <a:schemeClr val="accent1"/>
-          </a:lnRef>
-          <a:fillRef idx="0">
-            <a:schemeClr val="accent1"/>
-          </a:fillRef>
-          <a:effectRef idx="0">
-            <a:schemeClr val="accent1"/>
-          </a:effectRef>
-          <a:fontRef idx="minor">
-            <a:schemeClr val="tx1"/>
-          </a:fontRef>
-        </p:style>
-      </p:cxnSp>
-      <p:cxnSp>
-        <p:nvCxnSpPr>
-          <p:cNvPr id="42" name="직선 연결선 17">
-            <a:extLst>
-              <a:ext uri="{FF2B5EF4-FFF2-40B4-BE49-F238E27FC236}">
-                <a16:creationId xmlns:a16="http://schemas.microsoft.com/office/drawing/2014/main" id="{07E75162-F5E3-906A-3637-9A049CA0ECC5}"/>
-              </a:ext>
-            </a:extLst>
-          </p:cNvPr>
-          <p:cNvCxnSpPr>
-            <a:cxnSpLocks/>
-            <a:stCxn id="49" idx="2"/>
-            <a:endCxn id="23" idx="0"/>
-          </p:cNvCxnSpPr>
-          <p:nvPr/>
-        </p:nvCxnSpPr>
-        <p:spPr>
-          <a:xfrm>
-            <a:off x="4208786" y="2066253"/>
-            <a:ext cx="62089" cy="729811"/>
-          </a:xfrm>
-          <a:prstGeom prst="line">
-            <a:avLst/>
-          </a:prstGeom>
-          <a:ln w="12700">
-            <a:solidFill>
-              <a:schemeClr val="tx1"/>
-            </a:solidFill>
-          </a:ln>
-        </p:spPr>
-        <p:style>
-          <a:lnRef idx="1">
-            <a:schemeClr val="accent1"/>
-          </a:lnRef>
-          <a:fillRef idx="0">
-            <a:schemeClr val="accent1"/>
-          </a:fillRef>
-          <a:effectRef idx="0">
-            <a:schemeClr val="accent1"/>
-          </a:effectRef>
-          <a:fontRef idx="minor">
-            <a:schemeClr val="tx1"/>
-          </a:fontRef>
-        </p:style>
-      </p:cxnSp>
-      <p:cxnSp>
-        <p:nvCxnSpPr>
-          <p:cNvPr id="50" name="직선 연결선 17">
-            <a:extLst>
-              <a:ext uri="{FF2B5EF4-FFF2-40B4-BE49-F238E27FC236}">
-                <a16:creationId xmlns:a16="http://schemas.microsoft.com/office/drawing/2014/main" id="{B22E850F-D010-77DC-4758-1C3B2E2CAC55}"/>
-              </a:ext>
-            </a:extLst>
-          </p:cNvPr>
-          <p:cNvCxnSpPr>
-            <a:cxnSpLocks/>
-            <a:stCxn id="5" idx="2"/>
-            <a:endCxn id="24" idx="0"/>
-          </p:cNvCxnSpPr>
-          <p:nvPr/>
-        </p:nvCxnSpPr>
-        <p:spPr>
-          <a:xfrm flipH="1">
-            <a:off x="5525345" y="2056409"/>
-            <a:ext cx="139823" cy="739655"/>
-          </a:xfrm>
-          <a:prstGeom prst="line">
-            <a:avLst/>
-          </a:prstGeom>
-          <a:ln w="12700">
-            <a:solidFill>
-              <a:schemeClr val="tx1"/>
-            </a:solidFill>
-          </a:ln>
-        </p:spPr>
-        <p:style>
-          <a:lnRef idx="1">
-            <a:schemeClr val="accent1"/>
-          </a:lnRef>
-          <a:fillRef idx="0">
-            <a:schemeClr val="accent1"/>
-          </a:fillRef>
-          <a:effectRef idx="0">
-            <a:schemeClr val="accent1"/>
-          </a:effectRef>
-          <a:fontRef idx="minor">
-            <a:schemeClr val="tx1"/>
-          </a:fontRef>
-        </p:style>
-      </p:cxnSp>
       <p:cxnSp>
         <p:nvCxnSpPr>
           <p:cNvPr id="59" name="직선 연결선 17">
@@ -6610,6 +6539,1863 @@
 </file>
 
 <file path=ppt/slides/slide10.xml><?xml version="1.0" encoding="utf-8"?>
+<p:sld xmlns:a="http://schemas.openxmlformats.org/drawingml/2006/main" xmlns:r="http://schemas.openxmlformats.org/officeDocument/2006/relationships" xmlns:p="http://schemas.openxmlformats.org/presentationml/2006/main">
+  <p:cSld>
+    <p:spTree>
+      <p:nvGrpSpPr>
+        <p:cNvPr id="1" name="">
+          <a:extLst>
+            <a:ext uri="{FF2B5EF4-FFF2-40B4-BE49-F238E27FC236}">
+              <a16:creationId xmlns:a16="http://schemas.microsoft.com/office/drawing/2014/main" id="{12A0DA45-FFE6-20D2-57EF-B9DC71216731}"/>
+            </a:ext>
+          </a:extLst>
+        </p:cNvPr>
+        <p:cNvGrpSpPr/>
+        <p:nvPr/>
+      </p:nvGrpSpPr>
+      <p:grpSpPr>
+        <a:xfrm>
+          <a:off x="0" y="0"/>
+          <a:ext cx="0" cy="0"/>
+          <a:chOff x="0" y="0"/>
+          <a:chExt cx="0" cy="0"/>
+        </a:xfrm>
+      </p:grpSpPr>
+      <p:sp>
+        <p:nvSpPr>
+          <p:cNvPr id="33" name="사각형: 둥근 모서리 114">
+            <a:extLst>
+              <a:ext uri="{FF2B5EF4-FFF2-40B4-BE49-F238E27FC236}">
+                <a16:creationId xmlns:a16="http://schemas.microsoft.com/office/drawing/2014/main" id="{EFE877C4-66CF-A466-BBDA-C110A5F992AE}"/>
+              </a:ext>
+            </a:extLst>
+          </p:cNvPr>
+          <p:cNvSpPr/>
+          <p:nvPr/>
+        </p:nvSpPr>
+        <p:spPr>
+          <a:xfrm>
+            <a:off x="4452121" y="843557"/>
+            <a:ext cx="1665290" cy="1709575"/>
+          </a:xfrm>
+          <a:prstGeom prst="roundRect">
+            <a:avLst>
+              <a:gd name="adj" fmla="val 3914"/>
+            </a:avLst>
+          </a:prstGeom>
+          <a:ln w="12700"/>
+        </p:spPr>
+        <p:style>
+          <a:lnRef idx="2">
+            <a:schemeClr val="dk1"/>
+          </a:lnRef>
+          <a:fillRef idx="1">
+            <a:schemeClr val="lt1"/>
+          </a:fillRef>
+          <a:effectRef idx="0">
+            <a:schemeClr val="dk1"/>
+          </a:effectRef>
+          <a:fontRef idx="minor">
+            <a:schemeClr val="dk1"/>
+          </a:fontRef>
+        </p:style>
+        <p:txBody>
+          <a:bodyPr rtlCol="0" anchor="t"/>
+          <a:lstStyle/>
+          <a:p>
+            <a:pPr algn="ctr"/>
+            <a:r>
+              <a:rPr lang="en-US" altLang="ko-KR" sz="1000" b="1"/>
+              <a:t>Pod B</a:t>
+            </a:r>
+            <a:endParaRPr lang="ko-KR" altLang="en-US" sz="1000" b="1" dirty="0">
+              <a:solidFill>
+                <a:schemeClr val="accent2">
+                  <a:lumMod val="75000"/>
+                </a:schemeClr>
+              </a:solidFill>
+            </a:endParaRPr>
+          </a:p>
+        </p:txBody>
+      </p:sp>
+      <p:sp>
+        <p:nvSpPr>
+          <p:cNvPr id="28" name="사각형: 둥근 모서리 114">
+            <a:extLst>
+              <a:ext uri="{FF2B5EF4-FFF2-40B4-BE49-F238E27FC236}">
+                <a16:creationId xmlns:a16="http://schemas.microsoft.com/office/drawing/2014/main" id="{990BBAE9-CBD1-9942-AE8D-DC8358E04673}"/>
+              </a:ext>
+            </a:extLst>
+          </p:cNvPr>
+          <p:cNvSpPr/>
+          <p:nvPr/>
+        </p:nvSpPr>
+        <p:spPr>
+          <a:xfrm>
+            <a:off x="79063" y="843557"/>
+            <a:ext cx="4092354" cy="1709575"/>
+          </a:xfrm>
+          <a:prstGeom prst="roundRect">
+            <a:avLst>
+              <a:gd name="adj" fmla="val 4284"/>
+            </a:avLst>
+          </a:prstGeom>
+          <a:ln w="12700"/>
+        </p:spPr>
+        <p:style>
+          <a:lnRef idx="2">
+            <a:schemeClr val="dk1"/>
+          </a:lnRef>
+          <a:fillRef idx="1">
+            <a:schemeClr val="lt1"/>
+          </a:fillRef>
+          <a:effectRef idx="0">
+            <a:schemeClr val="dk1"/>
+          </a:effectRef>
+          <a:fontRef idx="minor">
+            <a:schemeClr val="dk1"/>
+          </a:fontRef>
+        </p:style>
+        <p:txBody>
+          <a:bodyPr rtlCol="0" anchor="t"/>
+          <a:lstStyle/>
+          <a:p>
+            <a:pPr algn="ctr"/>
+            <a:r>
+              <a:rPr lang="en-US" altLang="ko-KR" sz="1000" b="1"/>
+              <a:t>Pod A</a:t>
+            </a:r>
+            <a:endParaRPr lang="ko-KR" altLang="en-US" sz="1000" b="1" dirty="0">
+              <a:solidFill>
+                <a:schemeClr val="accent2">
+                  <a:lumMod val="75000"/>
+                </a:schemeClr>
+              </a:solidFill>
+            </a:endParaRPr>
+          </a:p>
+        </p:txBody>
+      </p:sp>
+      <p:sp>
+        <p:nvSpPr>
+          <p:cNvPr id="2" name="사각형: 둥근 모서리 114">
+            <a:extLst>
+              <a:ext uri="{FF2B5EF4-FFF2-40B4-BE49-F238E27FC236}">
+                <a16:creationId xmlns:a16="http://schemas.microsoft.com/office/drawing/2014/main" id="{B0160E73-56A0-D29E-F984-848864432BD9}"/>
+              </a:ext>
+            </a:extLst>
+          </p:cNvPr>
+          <p:cNvSpPr/>
+          <p:nvPr/>
+        </p:nvSpPr>
+        <p:spPr>
+          <a:xfrm>
+            <a:off x="84225" y="3507854"/>
+            <a:ext cx="6033186" cy="976265"/>
+          </a:xfrm>
+          <a:prstGeom prst="roundRect">
+            <a:avLst>
+              <a:gd name="adj" fmla="val 6397"/>
+            </a:avLst>
+          </a:prstGeom>
+          <a:ln w="12700"/>
+        </p:spPr>
+        <p:style>
+          <a:lnRef idx="2">
+            <a:schemeClr val="dk1"/>
+          </a:lnRef>
+          <a:fillRef idx="1">
+            <a:schemeClr val="lt1"/>
+          </a:fillRef>
+          <a:effectRef idx="0">
+            <a:schemeClr val="dk1"/>
+          </a:effectRef>
+          <a:fontRef idx="minor">
+            <a:schemeClr val="dk1"/>
+          </a:fontRef>
+        </p:style>
+        <p:txBody>
+          <a:bodyPr rtlCol="0" anchor="b"/>
+          <a:lstStyle/>
+          <a:p>
+            <a:pPr algn="ctr"/>
+            <a:r>
+              <a:rPr lang="en-US" altLang="ko-KR" sz="1000" b="1"/>
+              <a:t>Host Hardware</a:t>
+            </a:r>
+            <a:endParaRPr lang="en-US" altLang="ko-KR" sz="1000" b="1" dirty="0"/>
+          </a:p>
+        </p:txBody>
+      </p:sp>
+      <p:sp>
+        <p:nvSpPr>
+          <p:cNvPr id="3" name="사각형: 둥근 모서리 114">
+            <a:extLst>
+              <a:ext uri="{FF2B5EF4-FFF2-40B4-BE49-F238E27FC236}">
+                <a16:creationId xmlns:a16="http://schemas.microsoft.com/office/drawing/2014/main" id="{19B8C55D-9759-1216-90A7-4060BD798FB4}"/>
+              </a:ext>
+            </a:extLst>
+          </p:cNvPr>
+          <p:cNvSpPr/>
+          <p:nvPr/>
+        </p:nvSpPr>
+        <p:spPr>
+          <a:xfrm>
+            <a:off x="79063" y="2659010"/>
+            <a:ext cx="6043510" cy="855136"/>
+          </a:xfrm>
+          <a:prstGeom prst="roundRect">
+            <a:avLst>
+              <a:gd name="adj" fmla="val 4167"/>
+            </a:avLst>
+          </a:prstGeom>
+          <a:ln w="12700"/>
+        </p:spPr>
+        <p:style>
+          <a:lnRef idx="2">
+            <a:schemeClr val="dk1"/>
+          </a:lnRef>
+          <a:fillRef idx="1">
+            <a:schemeClr val="lt1"/>
+          </a:fillRef>
+          <a:effectRef idx="0">
+            <a:schemeClr val="dk1"/>
+          </a:effectRef>
+          <a:fontRef idx="minor">
+            <a:schemeClr val="dk1"/>
+          </a:fontRef>
+        </p:style>
+        <p:txBody>
+          <a:bodyPr rtlCol="0" anchor="b"/>
+          <a:lstStyle/>
+          <a:p>
+            <a:pPr algn="ctr"/>
+            <a:r>
+              <a:rPr lang="en-US" altLang="ko-KR" sz="1000" b="1"/>
+              <a:t>Host Kernel</a:t>
+            </a:r>
+            <a:endParaRPr lang="en-US" altLang="ko-KR" sz="1000" b="1" dirty="0"/>
+          </a:p>
+        </p:txBody>
+      </p:sp>
+      <p:sp>
+        <p:nvSpPr>
+          <p:cNvPr id="4" name="사각형: 둥근 모서리 114">
+            <a:extLst>
+              <a:ext uri="{FF2B5EF4-FFF2-40B4-BE49-F238E27FC236}">
+                <a16:creationId xmlns:a16="http://schemas.microsoft.com/office/drawing/2014/main" id="{7428988E-C06C-5498-D7AC-C92B54858738}"/>
+              </a:ext>
+            </a:extLst>
+          </p:cNvPr>
+          <p:cNvSpPr/>
+          <p:nvPr/>
+        </p:nvSpPr>
+        <p:spPr>
+          <a:xfrm>
+            <a:off x="672185" y="3620023"/>
+            <a:ext cx="1077331" cy="576064"/>
+          </a:xfrm>
+          <a:prstGeom prst="roundRect">
+            <a:avLst>
+              <a:gd name="adj" fmla="val 7242"/>
+            </a:avLst>
+          </a:prstGeom>
+          <a:ln w="12700"/>
+        </p:spPr>
+        <p:style>
+          <a:lnRef idx="2">
+            <a:schemeClr val="dk1"/>
+          </a:lnRef>
+          <a:fillRef idx="1">
+            <a:schemeClr val="lt1"/>
+          </a:fillRef>
+          <a:effectRef idx="0">
+            <a:schemeClr val="dk1"/>
+          </a:effectRef>
+          <a:fontRef idx="minor">
+            <a:schemeClr val="dk1"/>
+          </a:fontRef>
+        </p:style>
+        <p:txBody>
+          <a:bodyPr rtlCol="0" anchor="ctr"/>
+          <a:lstStyle/>
+          <a:p>
+            <a:pPr algn="ctr"/>
+            <a:r>
+              <a:rPr lang="en-US" altLang="ko-KR" sz="1000"/>
+              <a:t>NVIDIA</a:t>
+            </a:r>
+          </a:p>
+          <a:p>
+            <a:pPr algn="ctr"/>
+            <a:r>
+              <a:rPr lang="en-US" altLang="ko-KR" sz="1000"/>
+              <a:t>GPU 0</a:t>
+            </a:r>
+            <a:endParaRPr lang="en-US" altLang="ko-KR" sz="1000" dirty="0"/>
+          </a:p>
+        </p:txBody>
+      </p:sp>
+      <p:sp>
+        <p:nvSpPr>
+          <p:cNvPr id="5" name="사각형: 둥근 모서리 114">
+            <a:extLst>
+              <a:ext uri="{FF2B5EF4-FFF2-40B4-BE49-F238E27FC236}">
+                <a16:creationId xmlns:a16="http://schemas.microsoft.com/office/drawing/2014/main" id="{28A41BF5-6288-F66D-6B18-A1C27C57BCD2}"/>
+              </a:ext>
+            </a:extLst>
+          </p:cNvPr>
+          <p:cNvSpPr/>
+          <p:nvPr/>
+        </p:nvSpPr>
+        <p:spPr>
+          <a:xfrm>
+            <a:off x="1932164" y="3620023"/>
+            <a:ext cx="1077331" cy="576064"/>
+          </a:xfrm>
+          <a:prstGeom prst="roundRect">
+            <a:avLst>
+              <a:gd name="adj" fmla="val 7242"/>
+            </a:avLst>
+          </a:prstGeom>
+          <a:ln w="12700"/>
+        </p:spPr>
+        <p:style>
+          <a:lnRef idx="2">
+            <a:schemeClr val="dk1"/>
+          </a:lnRef>
+          <a:fillRef idx="1">
+            <a:schemeClr val="lt1"/>
+          </a:fillRef>
+          <a:effectRef idx="0">
+            <a:schemeClr val="dk1"/>
+          </a:effectRef>
+          <a:fontRef idx="minor">
+            <a:schemeClr val="dk1"/>
+          </a:fontRef>
+        </p:style>
+        <p:txBody>
+          <a:bodyPr rtlCol="0" anchor="ctr"/>
+          <a:lstStyle/>
+          <a:p>
+            <a:pPr algn="ctr"/>
+            <a:r>
+              <a:rPr lang="en-US" altLang="ko-KR" sz="1000"/>
+              <a:t>NVIDIA</a:t>
+            </a:r>
+          </a:p>
+          <a:p>
+            <a:pPr algn="ctr"/>
+            <a:r>
+              <a:rPr lang="en-US" altLang="ko-KR" sz="1000"/>
+              <a:t>GPU 1</a:t>
+            </a:r>
+            <a:endParaRPr lang="en-US" altLang="ko-KR" sz="1000" dirty="0"/>
+          </a:p>
+        </p:txBody>
+      </p:sp>
+      <p:sp>
+        <p:nvSpPr>
+          <p:cNvPr id="6" name="사각형: 둥근 모서리 114">
+            <a:extLst>
+              <a:ext uri="{FF2B5EF4-FFF2-40B4-BE49-F238E27FC236}">
+                <a16:creationId xmlns:a16="http://schemas.microsoft.com/office/drawing/2014/main" id="{AB117318-4CD7-BD97-5351-1F6F61156CD5}"/>
+              </a:ext>
+            </a:extLst>
+          </p:cNvPr>
+          <p:cNvSpPr/>
+          <p:nvPr/>
+        </p:nvSpPr>
+        <p:spPr>
+          <a:xfrm>
+            <a:off x="3192142" y="3620023"/>
+            <a:ext cx="1077331" cy="576064"/>
+          </a:xfrm>
+          <a:prstGeom prst="roundRect">
+            <a:avLst>
+              <a:gd name="adj" fmla="val 7242"/>
+            </a:avLst>
+          </a:prstGeom>
+          <a:ln w="12700"/>
+        </p:spPr>
+        <p:style>
+          <a:lnRef idx="2">
+            <a:schemeClr val="dk1"/>
+          </a:lnRef>
+          <a:fillRef idx="1">
+            <a:schemeClr val="lt1"/>
+          </a:fillRef>
+          <a:effectRef idx="0">
+            <a:schemeClr val="dk1"/>
+          </a:effectRef>
+          <a:fontRef idx="minor">
+            <a:schemeClr val="dk1"/>
+          </a:fontRef>
+        </p:style>
+        <p:txBody>
+          <a:bodyPr rtlCol="0" anchor="ctr"/>
+          <a:lstStyle/>
+          <a:p>
+            <a:pPr algn="ctr"/>
+            <a:r>
+              <a:rPr lang="en-US" altLang="ko-KR" sz="1000"/>
+              <a:t>NVIDIA</a:t>
+            </a:r>
+          </a:p>
+          <a:p>
+            <a:pPr algn="ctr"/>
+            <a:r>
+              <a:rPr lang="en-US" altLang="ko-KR" sz="1000"/>
+              <a:t>GPU 2</a:t>
+            </a:r>
+            <a:endParaRPr lang="en-US" altLang="ko-KR" sz="1000" dirty="0"/>
+          </a:p>
+        </p:txBody>
+      </p:sp>
+      <p:sp>
+        <p:nvSpPr>
+          <p:cNvPr id="7" name="사각형: 둥근 모서리 114">
+            <a:extLst>
+              <a:ext uri="{FF2B5EF4-FFF2-40B4-BE49-F238E27FC236}">
+                <a16:creationId xmlns:a16="http://schemas.microsoft.com/office/drawing/2014/main" id="{C21EA64B-D360-1D11-4ECB-24E796346C00}"/>
+              </a:ext>
+            </a:extLst>
+          </p:cNvPr>
+          <p:cNvSpPr/>
+          <p:nvPr/>
+        </p:nvSpPr>
+        <p:spPr>
+          <a:xfrm>
+            <a:off x="4452121" y="3620023"/>
+            <a:ext cx="1077331" cy="576064"/>
+          </a:xfrm>
+          <a:prstGeom prst="roundRect">
+            <a:avLst>
+              <a:gd name="adj" fmla="val 7242"/>
+            </a:avLst>
+          </a:prstGeom>
+          <a:ln w="12700"/>
+        </p:spPr>
+        <p:style>
+          <a:lnRef idx="2">
+            <a:schemeClr val="dk1"/>
+          </a:lnRef>
+          <a:fillRef idx="1">
+            <a:schemeClr val="lt1"/>
+          </a:fillRef>
+          <a:effectRef idx="0">
+            <a:schemeClr val="dk1"/>
+          </a:effectRef>
+          <a:fontRef idx="minor">
+            <a:schemeClr val="dk1"/>
+          </a:fontRef>
+        </p:style>
+        <p:txBody>
+          <a:bodyPr rtlCol="0" anchor="ctr"/>
+          <a:lstStyle/>
+          <a:p>
+            <a:pPr algn="ctr"/>
+            <a:r>
+              <a:rPr lang="en-US" altLang="ko-KR" sz="1000"/>
+              <a:t>NVIDIA</a:t>
+            </a:r>
+          </a:p>
+          <a:p>
+            <a:pPr algn="ctr"/>
+            <a:r>
+              <a:rPr lang="en-US" altLang="ko-KR" sz="1000"/>
+              <a:t>GPU 3</a:t>
+            </a:r>
+            <a:endParaRPr lang="en-US" altLang="ko-KR" sz="1000" dirty="0"/>
+          </a:p>
+        </p:txBody>
+      </p:sp>
+      <p:sp>
+        <p:nvSpPr>
+          <p:cNvPr id="8" name="사각형: 둥근 모서리 114">
+            <a:extLst>
+              <a:ext uri="{FF2B5EF4-FFF2-40B4-BE49-F238E27FC236}">
+                <a16:creationId xmlns:a16="http://schemas.microsoft.com/office/drawing/2014/main" id="{065A5E74-B440-BA3F-5A07-8CDCDFF2E427}"/>
+              </a:ext>
+            </a:extLst>
+          </p:cNvPr>
+          <p:cNvSpPr/>
+          <p:nvPr/>
+        </p:nvSpPr>
+        <p:spPr>
+          <a:xfrm>
+            <a:off x="186295" y="1209261"/>
+            <a:ext cx="1276737" cy="1265622"/>
+          </a:xfrm>
+          <a:prstGeom prst="roundRect">
+            <a:avLst>
+              <a:gd name="adj" fmla="val 6774"/>
+            </a:avLst>
+          </a:prstGeom>
+          <a:ln w="12700"/>
+        </p:spPr>
+        <p:style>
+          <a:lnRef idx="2">
+            <a:schemeClr val="dk1"/>
+          </a:lnRef>
+          <a:fillRef idx="1">
+            <a:schemeClr val="lt1"/>
+          </a:fillRef>
+          <a:effectRef idx="0">
+            <a:schemeClr val="dk1"/>
+          </a:effectRef>
+          <a:fontRef idx="minor">
+            <a:schemeClr val="dk1"/>
+          </a:fontRef>
+        </p:style>
+        <p:txBody>
+          <a:bodyPr rtlCol="0" anchor="t"/>
+          <a:lstStyle/>
+          <a:p>
+            <a:pPr algn="ctr"/>
+            <a:r>
+              <a:rPr lang="en-US" altLang="ko-KR" sz="1000" b="1"/>
+              <a:t>Container A</a:t>
+            </a:r>
+            <a:endParaRPr lang="ko-KR" altLang="en-US" sz="1000" b="1" dirty="0">
+              <a:solidFill>
+                <a:schemeClr val="accent2">
+                  <a:lumMod val="75000"/>
+                </a:schemeClr>
+              </a:solidFill>
+            </a:endParaRPr>
+          </a:p>
+        </p:txBody>
+      </p:sp>
+      <p:sp>
+        <p:nvSpPr>
+          <p:cNvPr id="9" name="사각형: 둥근 모서리 114">
+            <a:extLst>
+              <a:ext uri="{FF2B5EF4-FFF2-40B4-BE49-F238E27FC236}">
+                <a16:creationId xmlns:a16="http://schemas.microsoft.com/office/drawing/2014/main" id="{769415EB-0A2D-50D7-44F6-1F81A018E10C}"/>
+              </a:ext>
+            </a:extLst>
+          </p:cNvPr>
+          <p:cNvSpPr/>
+          <p:nvPr/>
+        </p:nvSpPr>
+        <p:spPr>
+          <a:xfrm>
+            <a:off x="274029" y="1991019"/>
+            <a:ext cx="1099999" cy="396044"/>
+          </a:xfrm>
+          <a:prstGeom prst="roundRect">
+            <a:avLst>
+              <a:gd name="adj" fmla="val 7242"/>
+            </a:avLst>
+          </a:prstGeom>
+          <a:ln w="12700"/>
+        </p:spPr>
+        <p:style>
+          <a:lnRef idx="2">
+            <a:schemeClr val="dk1"/>
+          </a:lnRef>
+          <a:fillRef idx="1">
+            <a:schemeClr val="lt1"/>
+          </a:fillRef>
+          <a:effectRef idx="0">
+            <a:schemeClr val="dk1"/>
+          </a:effectRef>
+          <a:fontRef idx="minor">
+            <a:schemeClr val="dk1"/>
+          </a:fontRef>
+        </p:style>
+        <p:txBody>
+          <a:bodyPr rtlCol="0" anchor="ctr"/>
+          <a:lstStyle/>
+          <a:p>
+            <a:pPr algn="ctr"/>
+            <a:r>
+              <a:rPr lang="en-US" altLang="ko-KR" sz="1000"/>
+              <a:t>/dev/nvidia0</a:t>
+            </a:r>
+            <a:endParaRPr lang="en-US" altLang="ko-KR" sz="1000" dirty="0"/>
+          </a:p>
+        </p:txBody>
+      </p:sp>
+      <p:sp>
+        <p:nvSpPr>
+          <p:cNvPr id="11" name="사각형: 둥근 모서리 114">
+            <a:extLst>
+              <a:ext uri="{FF2B5EF4-FFF2-40B4-BE49-F238E27FC236}">
+                <a16:creationId xmlns:a16="http://schemas.microsoft.com/office/drawing/2014/main" id="{A5B1B74D-0B82-73B1-5F00-44CC5F744F4A}"/>
+              </a:ext>
+            </a:extLst>
+          </p:cNvPr>
+          <p:cNvSpPr/>
+          <p:nvPr/>
+        </p:nvSpPr>
+        <p:spPr>
+          <a:xfrm>
+            <a:off x="274029" y="1504965"/>
+            <a:ext cx="1099999" cy="396044"/>
+          </a:xfrm>
+          <a:prstGeom prst="roundRect">
+            <a:avLst>
+              <a:gd name="adj" fmla="val 7242"/>
+            </a:avLst>
+          </a:prstGeom>
+          <a:ln w="12700"/>
+        </p:spPr>
+        <p:style>
+          <a:lnRef idx="2">
+            <a:schemeClr val="dk1"/>
+          </a:lnRef>
+          <a:fillRef idx="1">
+            <a:schemeClr val="lt1"/>
+          </a:fillRef>
+          <a:effectRef idx="0">
+            <a:schemeClr val="dk1"/>
+          </a:effectRef>
+          <a:fontRef idx="minor">
+            <a:schemeClr val="dk1"/>
+          </a:fontRef>
+        </p:style>
+        <p:txBody>
+          <a:bodyPr rtlCol="0" anchor="ctr"/>
+          <a:lstStyle/>
+          <a:p>
+            <a:pPr algn="ctr"/>
+            <a:r>
+              <a:rPr lang="en-US" altLang="ko-KR" sz="1000"/>
+              <a:t>NVIDIA CUDA Lib/Toolkit</a:t>
+            </a:r>
+            <a:endParaRPr lang="en-US" altLang="ko-KR" sz="1000" dirty="0"/>
+          </a:p>
+        </p:txBody>
+      </p:sp>
+      <p:sp>
+        <p:nvSpPr>
+          <p:cNvPr id="13" name="사각형: 둥근 모서리 114">
+            <a:extLst>
+              <a:ext uri="{FF2B5EF4-FFF2-40B4-BE49-F238E27FC236}">
+                <a16:creationId xmlns:a16="http://schemas.microsoft.com/office/drawing/2014/main" id="{F1F3EEC6-6CC4-CE00-13AC-F53EED26A83F}"/>
+              </a:ext>
+            </a:extLst>
+          </p:cNvPr>
+          <p:cNvSpPr/>
+          <p:nvPr/>
+        </p:nvSpPr>
+        <p:spPr>
+          <a:xfrm>
+            <a:off x="1598372" y="1203598"/>
+            <a:ext cx="2474164" cy="1265622"/>
+          </a:xfrm>
+          <a:prstGeom prst="roundRect">
+            <a:avLst>
+              <a:gd name="adj" fmla="val 6774"/>
+            </a:avLst>
+          </a:prstGeom>
+          <a:ln w="12700"/>
+        </p:spPr>
+        <p:style>
+          <a:lnRef idx="2">
+            <a:schemeClr val="dk1"/>
+          </a:lnRef>
+          <a:fillRef idx="1">
+            <a:schemeClr val="lt1"/>
+          </a:fillRef>
+          <a:effectRef idx="0">
+            <a:schemeClr val="dk1"/>
+          </a:effectRef>
+          <a:fontRef idx="minor">
+            <a:schemeClr val="dk1"/>
+          </a:fontRef>
+        </p:style>
+        <p:txBody>
+          <a:bodyPr rtlCol="0" anchor="t"/>
+          <a:lstStyle/>
+          <a:p>
+            <a:pPr algn="ctr"/>
+            <a:r>
+              <a:rPr lang="en-US" altLang="ko-KR" sz="1000" b="1"/>
+              <a:t>Container B</a:t>
+            </a:r>
+            <a:endParaRPr lang="ko-KR" altLang="en-US" sz="1000" b="1" dirty="0">
+              <a:solidFill>
+                <a:schemeClr val="accent2">
+                  <a:lumMod val="75000"/>
+                </a:schemeClr>
+              </a:solidFill>
+            </a:endParaRPr>
+          </a:p>
+        </p:txBody>
+      </p:sp>
+      <p:sp>
+        <p:nvSpPr>
+          <p:cNvPr id="14" name="사각형: 둥근 모서리 114">
+            <a:extLst>
+              <a:ext uri="{FF2B5EF4-FFF2-40B4-BE49-F238E27FC236}">
+                <a16:creationId xmlns:a16="http://schemas.microsoft.com/office/drawing/2014/main" id="{1EAB6A47-5F20-094B-0D4A-E766A80A2A60}"/>
+              </a:ext>
+            </a:extLst>
+          </p:cNvPr>
+          <p:cNvSpPr/>
+          <p:nvPr/>
+        </p:nvSpPr>
+        <p:spPr>
+          <a:xfrm>
+            <a:off x="1686106" y="1985356"/>
+            <a:ext cx="1099999" cy="396044"/>
+          </a:xfrm>
+          <a:prstGeom prst="roundRect">
+            <a:avLst>
+              <a:gd name="adj" fmla="val 7242"/>
+            </a:avLst>
+          </a:prstGeom>
+          <a:ln w="12700"/>
+        </p:spPr>
+        <p:style>
+          <a:lnRef idx="2">
+            <a:schemeClr val="dk1"/>
+          </a:lnRef>
+          <a:fillRef idx="1">
+            <a:schemeClr val="lt1"/>
+          </a:fillRef>
+          <a:effectRef idx="0">
+            <a:schemeClr val="dk1"/>
+          </a:effectRef>
+          <a:fontRef idx="minor">
+            <a:schemeClr val="dk1"/>
+          </a:fontRef>
+        </p:style>
+        <p:txBody>
+          <a:bodyPr rtlCol="0" anchor="ctr"/>
+          <a:lstStyle/>
+          <a:p>
+            <a:pPr algn="ctr"/>
+            <a:r>
+              <a:rPr lang="en-US" altLang="ko-KR" sz="1000"/>
+              <a:t>/dev/nvdia0</a:t>
+            </a:r>
+            <a:endParaRPr lang="en-US" altLang="ko-KR" sz="1000" dirty="0"/>
+          </a:p>
+        </p:txBody>
+      </p:sp>
+      <p:sp>
+        <p:nvSpPr>
+          <p:cNvPr id="15" name="사각형: 둥근 모서리 114">
+            <a:extLst>
+              <a:ext uri="{FF2B5EF4-FFF2-40B4-BE49-F238E27FC236}">
+                <a16:creationId xmlns:a16="http://schemas.microsoft.com/office/drawing/2014/main" id="{7201475F-A4A4-46B2-84B6-A45CE1664B47}"/>
+              </a:ext>
+            </a:extLst>
+          </p:cNvPr>
+          <p:cNvSpPr/>
+          <p:nvPr/>
+        </p:nvSpPr>
+        <p:spPr>
+          <a:xfrm>
+            <a:off x="2887706" y="1985356"/>
+            <a:ext cx="1099868" cy="396044"/>
+          </a:xfrm>
+          <a:prstGeom prst="roundRect">
+            <a:avLst>
+              <a:gd name="adj" fmla="val 7242"/>
+            </a:avLst>
+          </a:prstGeom>
+          <a:ln w="12700"/>
+        </p:spPr>
+        <p:style>
+          <a:lnRef idx="2">
+            <a:schemeClr val="dk1"/>
+          </a:lnRef>
+          <a:fillRef idx="1">
+            <a:schemeClr val="lt1"/>
+          </a:fillRef>
+          <a:effectRef idx="0">
+            <a:schemeClr val="dk1"/>
+          </a:effectRef>
+          <a:fontRef idx="minor">
+            <a:schemeClr val="dk1"/>
+          </a:fontRef>
+        </p:style>
+        <p:txBody>
+          <a:bodyPr rtlCol="0" anchor="ctr"/>
+          <a:lstStyle/>
+          <a:p>
+            <a:pPr algn="ctr"/>
+            <a:r>
+              <a:rPr lang="en-US" altLang="ko-KR" sz="1000"/>
+              <a:t>/dev/nvdia2</a:t>
+            </a:r>
+            <a:endParaRPr lang="en-US" altLang="ko-KR" sz="1000" dirty="0"/>
+          </a:p>
+        </p:txBody>
+      </p:sp>
+      <p:sp>
+        <p:nvSpPr>
+          <p:cNvPr id="16" name="사각형: 둥근 모서리 114">
+            <a:extLst>
+              <a:ext uri="{FF2B5EF4-FFF2-40B4-BE49-F238E27FC236}">
+                <a16:creationId xmlns:a16="http://schemas.microsoft.com/office/drawing/2014/main" id="{1B3E5041-0778-66C8-1F90-7570D9731483}"/>
+              </a:ext>
+            </a:extLst>
+          </p:cNvPr>
+          <p:cNvSpPr/>
+          <p:nvPr/>
+        </p:nvSpPr>
+        <p:spPr>
+          <a:xfrm>
+            <a:off x="1686107" y="1499302"/>
+            <a:ext cx="2301468" cy="396044"/>
+          </a:xfrm>
+          <a:prstGeom prst="roundRect">
+            <a:avLst>
+              <a:gd name="adj" fmla="val 7242"/>
+            </a:avLst>
+          </a:prstGeom>
+          <a:ln w="12700"/>
+        </p:spPr>
+        <p:style>
+          <a:lnRef idx="2">
+            <a:schemeClr val="dk1"/>
+          </a:lnRef>
+          <a:fillRef idx="1">
+            <a:schemeClr val="lt1"/>
+          </a:fillRef>
+          <a:effectRef idx="0">
+            <a:schemeClr val="dk1"/>
+          </a:effectRef>
+          <a:fontRef idx="minor">
+            <a:schemeClr val="dk1"/>
+          </a:fontRef>
+        </p:style>
+        <p:txBody>
+          <a:bodyPr rtlCol="0" anchor="ctr"/>
+          <a:lstStyle/>
+          <a:p>
+            <a:pPr algn="ctr"/>
+            <a:r>
+              <a:rPr lang="en-US" altLang="ko-KR" sz="1000"/>
+              <a:t>NVIDIA CUDA Lib/Toolkit</a:t>
+            </a:r>
+            <a:endParaRPr lang="en-US" altLang="ko-KR" sz="1000" dirty="0"/>
+          </a:p>
+        </p:txBody>
+      </p:sp>
+      <p:sp>
+        <p:nvSpPr>
+          <p:cNvPr id="18" name="사각형: 둥근 모서리 114">
+            <a:extLst>
+              <a:ext uri="{FF2B5EF4-FFF2-40B4-BE49-F238E27FC236}">
+                <a16:creationId xmlns:a16="http://schemas.microsoft.com/office/drawing/2014/main" id="{28995F5A-7DC0-2507-432E-914678470451}"/>
+              </a:ext>
+            </a:extLst>
+          </p:cNvPr>
+          <p:cNvSpPr/>
+          <p:nvPr/>
+        </p:nvSpPr>
+        <p:spPr>
+          <a:xfrm>
+            <a:off x="4537508" y="1203598"/>
+            <a:ext cx="1487816" cy="1265622"/>
+          </a:xfrm>
+          <a:prstGeom prst="roundRect">
+            <a:avLst>
+              <a:gd name="adj" fmla="val 6774"/>
+            </a:avLst>
+          </a:prstGeom>
+          <a:ln w="12700"/>
+        </p:spPr>
+        <p:style>
+          <a:lnRef idx="2">
+            <a:schemeClr val="dk1"/>
+          </a:lnRef>
+          <a:fillRef idx="1">
+            <a:schemeClr val="lt1"/>
+          </a:fillRef>
+          <a:effectRef idx="0">
+            <a:schemeClr val="dk1"/>
+          </a:effectRef>
+          <a:fontRef idx="minor">
+            <a:schemeClr val="dk1"/>
+          </a:fontRef>
+        </p:style>
+        <p:txBody>
+          <a:bodyPr rtlCol="0" anchor="t"/>
+          <a:lstStyle/>
+          <a:p>
+            <a:pPr algn="ctr"/>
+            <a:r>
+              <a:rPr lang="en-US" altLang="ko-KR" sz="1000" b="1"/>
+              <a:t>Container C</a:t>
+            </a:r>
+            <a:endParaRPr lang="ko-KR" altLang="en-US" sz="1000" b="1" dirty="0">
+              <a:solidFill>
+                <a:schemeClr val="accent2">
+                  <a:lumMod val="75000"/>
+                </a:schemeClr>
+              </a:solidFill>
+            </a:endParaRPr>
+          </a:p>
+        </p:txBody>
+      </p:sp>
+      <p:sp>
+        <p:nvSpPr>
+          <p:cNvPr id="19" name="사각형: 둥근 모서리 114">
+            <a:extLst>
+              <a:ext uri="{FF2B5EF4-FFF2-40B4-BE49-F238E27FC236}">
+                <a16:creationId xmlns:a16="http://schemas.microsoft.com/office/drawing/2014/main" id="{16CFA239-2511-9D27-E71A-172A3FA07324}"/>
+              </a:ext>
+            </a:extLst>
+          </p:cNvPr>
+          <p:cNvSpPr/>
+          <p:nvPr/>
+        </p:nvSpPr>
+        <p:spPr>
+          <a:xfrm>
+            <a:off x="4617695" y="1985356"/>
+            <a:ext cx="1321799" cy="396044"/>
+          </a:xfrm>
+          <a:prstGeom prst="roundRect">
+            <a:avLst>
+              <a:gd name="adj" fmla="val 7242"/>
+            </a:avLst>
+          </a:prstGeom>
+          <a:ln w="12700"/>
+        </p:spPr>
+        <p:style>
+          <a:lnRef idx="2">
+            <a:schemeClr val="dk1"/>
+          </a:lnRef>
+          <a:fillRef idx="1">
+            <a:schemeClr val="lt1"/>
+          </a:fillRef>
+          <a:effectRef idx="0">
+            <a:schemeClr val="dk1"/>
+          </a:effectRef>
+          <a:fontRef idx="minor">
+            <a:schemeClr val="dk1"/>
+          </a:fontRef>
+        </p:style>
+        <p:txBody>
+          <a:bodyPr rtlCol="0" anchor="ctr"/>
+          <a:lstStyle/>
+          <a:p>
+            <a:pPr algn="ctr"/>
+            <a:r>
+              <a:rPr lang="en-US" altLang="ko-KR" sz="1000"/>
+              <a:t>/dev/nvdia3</a:t>
+            </a:r>
+            <a:endParaRPr lang="en-US" altLang="ko-KR" sz="1000" dirty="0"/>
+          </a:p>
+        </p:txBody>
+      </p:sp>
+      <p:sp>
+        <p:nvSpPr>
+          <p:cNvPr id="20" name="사각형: 둥근 모서리 114">
+            <a:extLst>
+              <a:ext uri="{FF2B5EF4-FFF2-40B4-BE49-F238E27FC236}">
+                <a16:creationId xmlns:a16="http://schemas.microsoft.com/office/drawing/2014/main" id="{D5E1B1C4-5B6E-85F7-FDAB-04642D4057A6}"/>
+              </a:ext>
+            </a:extLst>
+          </p:cNvPr>
+          <p:cNvSpPr/>
+          <p:nvPr/>
+        </p:nvSpPr>
+        <p:spPr>
+          <a:xfrm>
+            <a:off x="4617695" y="1499302"/>
+            <a:ext cx="1321798" cy="396044"/>
+          </a:xfrm>
+          <a:prstGeom prst="roundRect">
+            <a:avLst>
+              <a:gd name="adj" fmla="val 7242"/>
+            </a:avLst>
+          </a:prstGeom>
+          <a:ln w="12700"/>
+        </p:spPr>
+        <p:style>
+          <a:lnRef idx="2">
+            <a:schemeClr val="dk1"/>
+          </a:lnRef>
+          <a:fillRef idx="1">
+            <a:schemeClr val="lt1"/>
+          </a:fillRef>
+          <a:effectRef idx="0">
+            <a:schemeClr val="dk1"/>
+          </a:effectRef>
+          <a:fontRef idx="minor">
+            <a:schemeClr val="dk1"/>
+          </a:fontRef>
+        </p:style>
+        <p:txBody>
+          <a:bodyPr rtlCol="0" anchor="ctr"/>
+          <a:lstStyle/>
+          <a:p>
+            <a:pPr algn="ctr"/>
+            <a:r>
+              <a:rPr lang="en-US" altLang="ko-KR" sz="1000"/>
+              <a:t>NVIDIA CUDA Lib/Toolkit</a:t>
+            </a:r>
+            <a:endParaRPr lang="en-US" altLang="ko-KR" sz="1000" dirty="0"/>
+          </a:p>
+        </p:txBody>
+      </p:sp>
+      <p:cxnSp>
+        <p:nvCxnSpPr>
+          <p:cNvPr id="21" name="직선 연결선 17">
+            <a:extLst>
+              <a:ext uri="{FF2B5EF4-FFF2-40B4-BE49-F238E27FC236}">
+                <a16:creationId xmlns:a16="http://schemas.microsoft.com/office/drawing/2014/main" id="{BBE57953-324C-8070-7D38-3BAD3665DB8C}"/>
+              </a:ext>
+            </a:extLst>
+          </p:cNvPr>
+          <p:cNvCxnSpPr>
+            <a:cxnSpLocks/>
+            <a:stCxn id="9" idx="2"/>
+            <a:endCxn id="4" idx="0"/>
+          </p:cNvCxnSpPr>
+          <p:nvPr/>
+        </p:nvCxnSpPr>
+        <p:spPr>
+          <a:xfrm>
+            <a:off x="824029" y="2387063"/>
+            <a:ext cx="386822" cy="1232960"/>
+          </a:xfrm>
+          <a:prstGeom prst="line">
+            <a:avLst/>
+          </a:prstGeom>
+          <a:ln w="12700">
+            <a:solidFill>
+              <a:schemeClr val="tx1"/>
+            </a:solidFill>
+          </a:ln>
+        </p:spPr>
+        <p:style>
+          <a:lnRef idx="1">
+            <a:schemeClr val="accent1"/>
+          </a:lnRef>
+          <a:fillRef idx="0">
+            <a:schemeClr val="accent1"/>
+          </a:fillRef>
+          <a:effectRef idx="0">
+            <a:schemeClr val="accent1"/>
+          </a:effectRef>
+          <a:fontRef idx="minor">
+            <a:schemeClr val="tx1"/>
+          </a:fontRef>
+        </p:style>
+      </p:cxnSp>
+      <p:cxnSp>
+        <p:nvCxnSpPr>
+          <p:cNvPr id="22" name="직선 연결선 20">
+            <a:extLst>
+              <a:ext uri="{FF2B5EF4-FFF2-40B4-BE49-F238E27FC236}">
+                <a16:creationId xmlns:a16="http://schemas.microsoft.com/office/drawing/2014/main" id="{22C12797-54A8-2874-270D-D393650E397D}"/>
+              </a:ext>
+            </a:extLst>
+          </p:cNvPr>
+          <p:cNvCxnSpPr>
+            <a:cxnSpLocks/>
+            <a:stCxn id="14" idx="2"/>
+            <a:endCxn id="5" idx="0"/>
+          </p:cNvCxnSpPr>
+          <p:nvPr/>
+        </p:nvCxnSpPr>
+        <p:spPr>
+          <a:xfrm>
+            <a:off x="2236106" y="2381400"/>
+            <a:ext cx="234724" cy="1238623"/>
+          </a:xfrm>
+          <a:prstGeom prst="line">
+            <a:avLst/>
+          </a:prstGeom>
+          <a:ln w="12700">
+            <a:solidFill>
+              <a:schemeClr val="tx1"/>
+            </a:solidFill>
+          </a:ln>
+        </p:spPr>
+        <p:style>
+          <a:lnRef idx="1">
+            <a:schemeClr val="accent1"/>
+          </a:lnRef>
+          <a:fillRef idx="0">
+            <a:schemeClr val="accent1"/>
+          </a:fillRef>
+          <a:effectRef idx="0">
+            <a:schemeClr val="accent1"/>
+          </a:effectRef>
+          <a:fontRef idx="minor">
+            <a:schemeClr val="tx1"/>
+          </a:fontRef>
+        </p:style>
+      </p:cxnSp>
+      <p:cxnSp>
+        <p:nvCxnSpPr>
+          <p:cNvPr id="24" name="직선 연결선 17">
+            <a:extLst>
+              <a:ext uri="{FF2B5EF4-FFF2-40B4-BE49-F238E27FC236}">
+                <a16:creationId xmlns:a16="http://schemas.microsoft.com/office/drawing/2014/main" id="{2945351D-D086-4FB4-4382-C9127B2ED274}"/>
+              </a:ext>
+            </a:extLst>
+          </p:cNvPr>
+          <p:cNvCxnSpPr>
+            <a:cxnSpLocks/>
+            <a:stCxn id="15" idx="2"/>
+            <a:endCxn id="6" idx="0"/>
+          </p:cNvCxnSpPr>
+          <p:nvPr/>
+        </p:nvCxnSpPr>
+        <p:spPr>
+          <a:xfrm>
+            <a:off x="3437640" y="2381400"/>
+            <a:ext cx="293168" cy="1238623"/>
+          </a:xfrm>
+          <a:prstGeom prst="line">
+            <a:avLst/>
+          </a:prstGeom>
+          <a:ln w="12700">
+            <a:solidFill>
+              <a:schemeClr val="tx1"/>
+            </a:solidFill>
+          </a:ln>
+        </p:spPr>
+        <p:style>
+          <a:lnRef idx="1">
+            <a:schemeClr val="accent1"/>
+          </a:lnRef>
+          <a:fillRef idx="0">
+            <a:schemeClr val="accent1"/>
+          </a:fillRef>
+          <a:effectRef idx="0">
+            <a:schemeClr val="accent1"/>
+          </a:effectRef>
+          <a:fontRef idx="minor">
+            <a:schemeClr val="tx1"/>
+          </a:fontRef>
+        </p:style>
+      </p:cxnSp>
+      <p:cxnSp>
+        <p:nvCxnSpPr>
+          <p:cNvPr id="26" name="직선 연결선 26">
+            <a:extLst>
+              <a:ext uri="{FF2B5EF4-FFF2-40B4-BE49-F238E27FC236}">
+                <a16:creationId xmlns:a16="http://schemas.microsoft.com/office/drawing/2014/main" id="{A6841772-5FAC-52D2-D93A-BF3E1BF471DF}"/>
+              </a:ext>
+            </a:extLst>
+          </p:cNvPr>
+          <p:cNvCxnSpPr>
+            <a:cxnSpLocks/>
+            <a:stCxn id="19" idx="2"/>
+            <a:endCxn id="7" idx="0"/>
+          </p:cNvCxnSpPr>
+          <p:nvPr/>
+        </p:nvCxnSpPr>
+        <p:spPr>
+          <a:xfrm flipH="1">
+            <a:off x="4990787" y="2381400"/>
+            <a:ext cx="287808" cy="1238623"/>
+          </a:xfrm>
+          <a:prstGeom prst="line">
+            <a:avLst/>
+          </a:prstGeom>
+          <a:ln w="12700">
+            <a:solidFill>
+              <a:schemeClr val="tx1"/>
+            </a:solidFill>
+          </a:ln>
+        </p:spPr>
+        <p:style>
+          <a:lnRef idx="1">
+            <a:schemeClr val="accent1"/>
+          </a:lnRef>
+          <a:fillRef idx="0">
+            <a:schemeClr val="accent1"/>
+          </a:fillRef>
+          <a:effectRef idx="0">
+            <a:schemeClr val="accent1"/>
+          </a:effectRef>
+          <a:fontRef idx="minor">
+            <a:schemeClr val="tx1"/>
+          </a:fontRef>
+        </p:style>
+      </p:cxnSp>
+      <p:sp>
+        <p:nvSpPr>
+          <p:cNvPr id="27" name="사각형: 둥근 모서리 114">
+            <a:extLst>
+              <a:ext uri="{FF2B5EF4-FFF2-40B4-BE49-F238E27FC236}">
+                <a16:creationId xmlns:a16="http://schemas.microsoft.com/office/drawing/2014/main" id="{87AAA4FF-5355-0B8E-2C4A-7B3DEB8558AB}"/>
+              </a:ext>
+            </a:extLst>
+          </p:cNvPr>
+          <p:cNvSpPr/>
+          <p:nvPr/>
+        </p:nvSpPr>
+        <p:spPr>
+          <a:xfrm>
+            <a:off x="218562" y="2791931"/>
+            <a:ext cx="5759996" cy="396044"/>
+          </a:xfrm>
+          <a:prstGeom prst="roundRect">
+            <a:avLst>
+              <a:gd name="adj" fmla="val 7242"/>
+            </a:avLst>
+          </a:prstGeom>
+          <a:ln w="12700"/>
+        </p:spPr>
+        <p:style>
+          <a:lnRef idx="2">
+            <a:schemeClr val="dk1"/>
+          </a:lnRef>
+          <a:fillRef idx="1">
+            <a:schemeClr val="lt1"/>
+          </a:fillRef>
+          <a:effectRef idx="0">
+            <a:schemeClr val="dk1"/>
+          </a:effectRef>
+          <a:fontRef idx="minor">
+            <a:schemeClr val="dk1"/>
+          </a:fontRef>
+        </p:style>
+        <p:txBody>
+          <a:bodyPr rtlCol="0" anchor="ctr"/>
+          <a:lstStyle/>
+          <a:p>
+            <a:pPr algn="ctr"/>
+            <a:r>
+              <a:rPr lang="en-US" altLang="ko-KR" sz="1000"/>
+              <a:t>NVIDIA GPU Device Driver</a:t>
+            </a:r>
+            <a:endParaRPr lang="en-US" altLang="ko-KR" sz="1000" dirty="0"/>
+          </a:p>
+        </p:txBody>
+      </p:sp>
+      <p:sp>
+        <p:nvSpPr>
+          <p:cNvPr id="10" name="TextBox 9">
+            <a:extLst>
+              <a:ext uri="{FF2B5EF4-FFF2-40B4-BE49-F238E27FC236}">
+                <a16:creationId xmlns:a16="http://schemas.microsoft.com/office/drawing/2014/main" id="{787DAA5F-A54B-025A-21E9-FA0AC9BF51AF}"/>
+              </a:ext>
+            </a:extLst>
+          </p:cNvPr>
+          <p:cNvSpPr txBox="1"/>
+          <p:nvPr/>
+        </p:nvSpPr>
+        <p:spPr>
+          <a:xfrm>
+            <a:off x="7965348" y="483518"/>
+            <a:ext cx="1665155" cy="1769715"/>
+          </a:xfrm>
+          <a:prstGeom prst="rect">
+            <a:avLst/>
+          </a:prstGeom>
+          <a:solidFill>
+            <a:schemeClr val="bg1">
+              <a:lumMod val="85000"/>
+              <a:lumOff val="15000"/>
+            </a:schemeClr>
+          </a:solidFill>
+          <a:ln w="12700">
+            <a:solidFill>
+              <a:schemeClr val="tx1"/>
+            </a:solidFill>
+          </a:ln>
+        </p:spPr>
+        <p:txBody>
+          <a:bodyPr wrap="square" lIns="0" rIns="0" rtlCol="0">
+            <a:spAutoFit/>
+          </a:bodyPr>
+          <a:lstStyle/>
+          <a:p>
+            <a:pPr algn="l"/>
+            <a:r>
+              <a:rPr lang="en-US" sz="1000" kern="0" dirty="0" err="1">
+                <a:cs typeface="Al Bayan Plain" pitchFamily="2" charset="-78"/>
+              </a:rPr>
+              <a:t> </a:t>
+            </a:r>
+            <a:r>
+              <a:rPr lang="en-US" sz="900" kern="0" dirty="0" err="1">
+                <a:cs typeface="Al Bayan Plain" pitchFamily="2" charset="-78"/>
+              </a:rPr>
+              <a:t>apiVersion</a:t>
+            </a:r>
+            <a:r>
+              <a:rPr lang="en-US" sz="900" kern="0" dirty="0">
+                <a:cs typeface="Al Bayan Plain" pitchFamily="2" charset="-78"/>
+              </a:rPr>
+              <a:t>: v1</a:t>
+            </a:r>
+          </a:p>
+          <a:p>
+            <a:pPr algn="l"/>
+            <a:r>
+              <a:rPr lang="en-US" sz="900" kern="0" dirty="0">
+                <a:cs typeface="Al Bayan Plain" pitchFamily="2" charset="-78"/>
+              </a:rPr>
+              <a:t> kind: PodB</a:t>
+            </a:r>
+          </a:p>
+          <a:p>
+            <a:pPr algn="l"/>
+            <a:r>
+              <a:rPr lang="en-US" sz="900" kern="0" dirty="0">
+                <a:cs typeface="Al Bayan Plain" pitchFamily="2" charset="-78"/>
+              </a:rPr>
+              <a:t> metadata:</a:t>
+            </a:r>
+          </a:p>
+          <a:p>
+            <a:pPr algn="l"/>
+            <a:r>
+              <a:rPr lang="en-US" sz="900" kern="0" dirty="0">
+                <a:cs typeface="Al Bayan Plain" pitchFamily="2" charset="-78"/>
+              </a:rPr>
+              <a:t>   name: pod</a:t>
+            </a:r>
+          </a:p>
+          <a:p>
+            <a:pPr algn="l"/>
+            <a:r>
+              <a:rPr lang="en-US" sz="900" kern="0" dirty="0">
+                <a:cs typeface="Al Bayan Plain" pitchFamily="2" charset="-78"/>
+              </a:rPr>
+              <a:t> spec:</a:t>
+            </a:r>
+          </a:p>
+          <a:p>
+            <a:pPr algn="l"/>
+            <a:r>
+              <a:rPr lang="en-US" sz="900" kern="0" dirty="0">
+                <a:cs typeface="Al Bayan Plain" pitchFamily="2" charset="-78"/>
+              </a:rPr>
+              <a:t>   containers:</a:t>
+            </a:r>
+          </a:p>
+          <a:p>
+            <a:pPr algn="l"/>
+            <a:r>
+              <a:rPr lang="en-US" sz="900" kern="0" dirty="0">
+                <a:cs typeface="Al Bayan Plain" pitchFamily="2" charset="-78"/>
+              </a:rPr>
+              <a:t>     - name: ContainerA</a:t>
+            </a:r>
+          </a:p>
+          <a:p>
+            <a:pPr algn="l"/>
+            <a:r>
+              <a:rPr lang="en-US" sz="900" kern="0" dirty="0">
+                <a:cs typeface="Al Bayan Plain" pitchFamily="2" charset="-78"/>
+              </a:rPr>
+              <a:t>       resources:</a:t>
+            </a:r>
+          </a:p>
+          <a:p>
+            <a:pPr algn="l"/>
+            <a:r>
+              <a:rPr lang="en-US" sz="900" kern="0" dirty="0">
+                <a:solidFill>
+                  <a:srgbClr val="C00000"/>
+                </a:solidFill>
+                <a:cs typeface="Al Bayan Plain" pitchFamily="2" charset="-78"/>
+              </a:rPr>
+              <a:t>         requests:</a:t>
+            </a:r>
+          </a:p>
+          <a:p>
+            <a:pPr algn="l"/>
+            <a:r>
+              <a:rPr lang="en-US" sz="900" kern="0" dirty="0">
+                <a:solidFill>
+                  <a:srgbClr val="C00000"/>
+                </a:solidFill>
+                <a:cs typeface="Al Bayan Plain" pitchFamily="2" charset="-78"/>
+              </a:rPr>
+              <a:t>           </a:t>
+            </a:r>
+            <a:r>
+              <a:rPr lang="en-US" sz="900" kern="0" dirty="0" err="1">
+                <a:solidFill>
+                  <a:srgbClr val="C00000"/>
+                </a:solidFill>
+                <a:cs typeface="Al Bayan Plain" pitchFamily="2" charset="-78"/>
+              </a:rPr>
+              <a:t>nvidia.com</a:t>
+            </a:r>
+            <a:r>
+              <a:rPr lang="en-US" sz="900" kern="0" dirty="0">
+                <a:solidFill>
+                  <a:srgbClr val="C00000"/>
+                </a:solidFill>
+                <a:cs typeface="Al Bayan Plain" pitchFamily="2" charset="-78"/>
+              </a:rPr>
+              <a:t>/</a:t>
+            </a:r>
+            <a:r>
+              <a:rPr lang="en-US" sz="900" kern="0" dirty="0" err="1">
+                <a:solidFill>
+                  <a:srgbClr val="C00000"/>
+                </a:solidFill>
+                <a:cs typeface="Al Bayan Plain" pitchFamily="2" charset="-78"/>
+              </a:rPr>
+              <a:t>gpu</a:t>
+            </a:r>
+            <a:r>
+              <a:rPr lang="en-US" sz="900" kern="0" dirty="0">
+                <a:solidFill>
+                  <a:srgbClr val="C00000"/>
+                </a:solidFill>
+                <a:cs typeface="Al Bayan Plain" pitchFamily="2" charset="-78"/>
+              </a:rPr>
+              <a:t>: 1</a:t>
+            </a:r>
+          </a:p>
+          <a:p>
+            <a:r>
+              <a:rPr lang="en-US" altLang="ko-KR" sz="900" kern="0" dirty="0">
+                <a:solidFill>
+                  <a:srgbClr val="C00000"/>
+                </a:solidFill>
+                <a:cs typeface="Al Bayan Plain" pitchFamily="2" charset="-78"/>
+              </a:rPr>
+              <a:t>         limits:</a:t>
+            </a:r>
+          </a:p>
+          <a:p>
+            <a:r>
+              <a:rPr lang="en-US" altLang="ko-KR" sz="900" kern="0" dirty="0">
+                <a:solidFill>
+                  <a:srgbClr val="C00000"/>
+                </a:solidFill>
+                <a:cs typeface="Al Bayan Plain" pitchFamily="2" charset="-78"/>
+              </a:rPr>
+              <a:t>           </a:t>
+            </a:r>
+            <a:r>
+              <a:rPr lang="en-US" altLang="ko-KR" sz="900" kern="0" dirty="0" err="1">
+                <a:solidFill>
+                  <a:srgbClr val="C00000"/>
+                </a:solidFill>
+                <a:cs typeface="Al Bayan Plain" pitchFamily="2" charset="-78"/>
+              </a:rPr>
+              <a:t>nvidia.com</a:t>
+            </a:r>
+            <a:r>
+              <a:rPr lang="en-US" altLang="ko-KR" sz="900" kern="0" dirty="0">
+                <a:solidFill>
+                  <a:srgbClr val="C00000"/>
+                </a:solidFill>
+                <a:cs typeface="Al Bayan Plain" pitchFamily="2" charset="-78"/>
+              </a:rPr>
+              <a:t>/</a:t>
+            </a:r>
+            <a:r>
+              <a:rPr lang="en-US" altLang="ko-KR" sz="900" kern="0" dirty="0" err="1">
+                <a:solidFill>
+                  <a:srgbClr val="C00000"/>
+                </a:solidFill>
+                <a:cs typeface="Al Bayan Plain" pitchFamily="2" charset="-78"/>
+              </a:rPr>
+              <a:t>gpu</a:t>
+            </a:r>
+            <a:r>
+              <a:rPr lang="en-US" altLang="ko-KR" sz="900" kern="0" dirty="0">
+                <a:solidFill>
+                  <a:srgbClr val="C00000"/>
+                </a:solidFill>
+                <a:cs typeface="Al Bayan Plain" pitchFamily="2" charset="-78"/>
+              </a:rPr>
+              <a:t>: 1</a:t>
+            </a:r>
+          </a:p>
+        </p:txBody>
+      </p:sp>
+      <p:sp>
+        <p:nvSpPr>
+          <p:cNvPr id="17" name="TextBox 16">
+            <a:extLst>
+              <a:ext uri="{FF2B5EF4-FFF2-40B4-BE49-F238E27FC236}">
+                <a16:creationId xmlns:a16="http://schemas.microsoft.com/office/drawing/2014/main" id="{2070C16E-B348-642F-E3BF-7E2C0BD51AB8}"/>
+              </a:ext>
+            </a:extLst>
+          </p:cNvPr>
+          <p:cNvSpPr txBox="1"/>
+          <p:nvPr/>
+        </p:nvSpPr>
+        <p:spPr>
+          <a:xfrm>
+            <a:off x="6300058" y="483518"/>
+            <a:ext cx="1665290" cy="2600712"/>
+          </a:xfrm>
+          <a:prstGeom prst="rect">
+            <a:avLst/>
+          </a:prstGeom>
+          <a:solidFill>
+            <a:schemeClr val="bg1">
+              <a:lumMod val="85000"/>
+              <a:lumOff val="15000"/>
+            </a:schemeClr>
+          </a:solidFill>
+          <a:ln w="12700">
+            <a:solidFill>
+              <a:schemeClr val="tx1"/>
+            </a:solidFill>
+          </a:ln>
+        </p:spPr>
+        <p:txBody>
+          <a:bodyPr wrap="square" lIns="0" rIns="0" rtlCol="0">
+            <a:spAutoFit/>
+          </a:bodyPr>
+          <a:lstStyle/>
+          <a:p>
+            <a:pPr algn="l"/>
+            <a:r>
+              <a:rPr lang="en-US" sz="1000" kern="0" dirty="0" err="1">
+                <a:cs typeface="Al Bayan Plain" pitchFamily="2" charset="-78"/>
+              </a:rPr>
+              <a:t> </a:t>
+            </a:r>
+            <a:r>
+              <a:rPr lang="en-US" sz="900" kern="0" dirty="0" err="1">
+                <a:cs typeface="Al Bayan Plain" pitchFamily="2" charset="-78"/>
+              </a:rPr>
+              <a:t>apiVersion</a:t>
+            </a:r>
+            <a:r>
+              <a:rPr lang="en-US" sz="900" kern="0" dirty="0">
+                <a:cs typeface="Al Bayan Plain" pitchFamily="2" charset="-78"/>
+              </a:rPr>
+              <a:t>: v1</a:t>
+            </a:r>
+          </a:p>
+          <a:p>
+            <a:pPr algn="l"/>
+            <a:r>
+              <a:rPr lang="en-US" sz="900" kern="0" dirty="0">
+                <a:cs typeface="Al Bayan Plain" pitchFamily="2" charset="-78"/>
+              </a:rPr>
+              <a:t> kind: PodA</a:t>
+            </a:r>
+          </a:p>
+          <a:p>
+            <a:pPr algn="l"/>
+            <a:r>
+              <a:rPr lang="en-US" sz="900" kern="0" dirty="0">
+                <a:cs typeface="Al Bayan Plain" pitchFamily="2" charset="-78"/>
+              </a:rPr>
+              <a:t> metadata:</a:t>
+            </a:r>
+          </a:p>
+          <a:p>
+            <a:pPr algn="l"/>
+            <a:r>
+              <a:rPr lang="en-US" sz="900" kern="0" dirty="0">
+                <a:cs typeface="Al Bayan Plain" pitchFamily="2" charset="-78"/>
+              </a:rPr>
+              <a:t>   name: pod</a:t>
+            </a:r>
+          </a:p>
+          <a:p>
+            <a:pPr algn="l"/>
+            <a:r>
+              <a:rPr lang="en-US" sz="900" kern="0" dirty="0">
+                <a:cs typeface="Al Bayan Plain" pitchFamily="2" charset="-78"/>
+              </a:rPr>
+              <a:t> spec:</a:t>
+            </a:r>
+          </a:p>
+          <a:p>
+            <a:pPr algn="l"/>
+            <a:r>
+              <a:rPr lang="en-US" sz="900" kern="0" dirty="0">
+                <a:cs typeface="Al Bayan Plain" pitchFamily="2" charset="-78"/>
+              </a:rPr>
+              <a:t>   containers:</a:t>
+            </a:r>
+          </a:p>
+          <a:p>
+            <a:pPr algn="l"/>
+            <a:r>
+              <a:rPr lang="en-US" sz="900" kern="0" dirty="0">
+                <a:cs typeface="Al Bayan Plain" pitchFamily="2" charset="-78"/>
+              </a:rPr>
+              <a:t>     - name: ContainerA</a:t>
+            </a:r>
+          </a:p>
+          <a:p>
+            <a:pPr algn="l"/>
+            <a:r>
+              <a:rPr lang="en-US" sz="900" kern="0" dirty="0">
+                <a:cs typeface="Al Bayan Plain" pitchFamily="2" charset="-78"/>
+              </a:rPr>
+              <a:t>       resources:</a:t>
+            </a:r>
+          </a:p>
+          <a:p>
+            <a:pPr algn="l"/>
+            <a:r>
+              <a:rPr lang="en-US" sz="900" kern="0" dirty="0">
+                <a:solidFill>
+                  <a:srgbClr val="C00000"/>
+                </a:solidFill>
+                <a:cs typeface="Al Bayan Plain" pitchFamily="2" charset="-78"/>
+              </a:rPr>
+              <a:t>         requests:</a:t>
+            </a:r>
+          </a:p>
+          <a:p>
+            <a:pPr algn="l"/>
+            <a:r>
+              <a:rPr lang="en-US" sz="900" kern="0" dirty="0">
+                <a:solidFill>
+                  <a:srgbClr val="C00000"/>
+                </a:solidFill>
+                <a:cs typeface="Al Bayan Plain" pitchFamily="2" charset="-78"/>
+              </a:rPr>
+              <a:t>           </a:t>
+            </a:r>
+            <a:r>
+              <a:rPr lang="en-US" sz="900" kern="0" dirty="0" err="1">
+                <a:solidFill>
+                  <a:srgbClr val="C00000"/>
+                </a:solidFill>
+                <a:cs typeface="Al Bayan Plain" pitchFamily="2" charset="-78"/>
+              </a:rPr>
+              <a:t>nvidia.com</a:t>
+            </a:r>
+            <a:r>
+              <a:rPr lang="en-US" sz="900" kern="0" dirty="0">
+                <a:solidFill>
+                  <a:srgbClr val="C00000"/>
+                </a:solidFill>
+                <a:cs typeface="Al Bayan Plain" pitchFamily="2" charset="-78"/>
+              </a:rPr>
+              <a:t>/</a:t>
+            </a:r>
+            <a:r>
+              <a:rPr lang="en-US" sz="900" kern="0" dirty="0" err="1">
+                <a:solidFill>
+                  <a:srgbClr val="C00000"/>
+                </a:solidFill>
+                <a:cs typeface="Al Bayan Plain" pitchFamily="2" charset="-78"/>
+              </a:rPr>
+              <a:t>gpu</a:t>
+            </a:r>
+            <a:r>
+              <a:rPr lang="en-US" sz="900" kern="0" dirty="0">
+                <a:solidFill>
+                  <a:srgbClr val="C00000"/>
+                </a:solidFill>
+                <a:cs typeface="Al Bayan Plain" pitchFamily="2" charset="-78"/>
+              </a:rPr>
+              <a:t>: 1</a:t>
+            </a:r>
+          </a:p>
+          <a:p>
+            <a:r>
+              <a:rPr lang="en-US" altLang="ko-KR" sz="900" kern="0" dirty="0">
+                <a:solidFill>
+                  <a:srgbClr val="C00000"/>
+                </a:solidFill>
+                <a:cs typeface="Al Bayan Plain" pitchFamily="2" charset="-78"/>
+              </a:rPr>
+              <a:t>         limits:</a:t>
+            </a:r>
+          </a:p>
+          <a:p>
+            <a:r>
+              <a:rPr lang="en-US" altLang="ko-KR" sz="900" kern="0" dirty="0">
+                <a:solidFill>
+                  <a:srgbClr val="C00000"/>
+                </a:solidFill>
+                <a:cs typeface="Al Bayan Plain" pitchFamily="2" charset="-78"/>
+              </a:rPr>
+              <a:t>           </a:t>
+            </a:r>
+            <a:r>
+              <a:rPr lang="en-US" altLang="ko-KR" sz="900" kern="0" dirty="0" err="1">
+                <a:solidFill>
+                  <a:srgbClr val="C00000"/>
+                </a:solidFill>
+                <a:cs typeface="Al Bayan Plain" pitchFamily="2" charset="-78"/>
+              </a:rPr>
+              <a:t>nvidia.com</a:t>
+            </a:r>
+            <a:r>
+              <a:rPr lang="en-US" altLang="ko-KR" sz="900" kern="0" dirty="0">
+                <a:solidFill>
+                  <a:srgbClr val="C00000"/>
+                </a:solidFill>
+                <a:cs typeface="Al Bayan Plain" pitchFamily="2" charset="-78"/>
+              </a:rPr>
+              <a:t>/</a:t>
+            </a:r>
+            <a:r>
+              <a:rPr lang="en-US" altLang="ko-KR" sz="900" kern="0" dirty="0" err="1">
+                <a:solidFill>
+                  <a:srgbClr val="C00000"/>
+                </a:solidFill>
+                <a:cs typeface="Al Bayan Plain" pitchFamily="2" charset="-78"/>
+              </a:rPr>
+              <a:t>gpu</a:t>
+            </a:r>
+            <a:r>
+              <a:rPr lang="en-US" altLang="ko-KR" sz="900" kern="0" dirty="0">
+                <a:solidFill>
+                  <a:srgbClr val="C00000"/>
+                </a:solidFill>
+                <a:cs typeface="Al Bayan Plain" pitchFamily="2" charset="-78"/>
+              </a:rPr>
+              <a:t>: 1</a:t>
+            </a:r>
+          </a:p>
+          <a:p>
+            <a:r>
+              <a:rPr lang="en-US" altLang="ko-KR" sz="900" kern="0" dirty="0">
+                <a:cs typeface="Al Bayan Plain" pitchFamily="2" charset="-78"/>
+              </a:rPr>
+              <a:t>     - name: ContainerB</a:t>
+            </a:r>
+          </a:p>
+          <a:p>
+            <a:r>
+              <a:rPr lang="en-US" altLang="ko-KR" sz="900" kern="0" dirty="0">
+                <a:cs typeface="Al Bayan Plain" pitchFamily="2" charset="-78"/>
+              </a:rPr>
+              <a:t>       resources:</a:t>
+            </a:r>
+          </a:p>
+          <a:p>
+            <a:r>
+              <a:rPr lang="en-US" altLang="ko-KR" sz="900" kern="0" dirty="0">
+                <a:solidFill>
+                  <a:srgbClr val="C00000"/>
+                </a:solidFill>
+                <a:cs typeface="Al Bayan Plain" pitchFamily="2" charset="-78"/>
+              </a:rPr>
+              <a:t>         requests:</a:t>
+            </a:r>
+          </a:p>
+          <a:p>
+            <a:r>
+              <a:rPr lang="en-US" altLang="ko-KR" sz="900" kern="0" dirty="0">
+                <a:solidFill>
+                  <a:srgbClr val="C00000"/>
+                </a:solidFill>
+                <a:cs typeface="Al Bayan Plain" pitchFamily="2" charset="-78"/>
+              </a:rPr>
+              <a:t>           </a:t>
+            </a:r>
+            <a:r>
+              <a:rPr lang="en-US" altLang="ko-KR" sz="900" kern="0" dirty="0" err="1">
+                <a:solidFill>
+                  <a:srgbClr val="C00000"/>
+                </a:solidFill>
+                <a:cs typeface="Al Bayan Plain" pitchFamily="2" charset="-78"/>
+              </a:rPr>
+              <a:t>nvidia.com</a:t>
+            </a:r>
+            <a:r>
+              <a:rPr lang="en-US" altLang="ko-KR" sz="900" kern="0" dirty="0">
+                <a:solidFill>
+                  <a:srgbClr val="C00000"/>
+                </a:solidFill>
+                <a:cs typeface="Al Bayan Plain" pitchFamily="2" charset="-78"/>
+              </a:rPr>
+              <a:t>/</a:t>
+            </a:r>
+            <a:r>
+              <a:rPr lang="en-US" altLang="ko-KR" sz="900" kern="0" dirty="0" err="1">
+                <a:solidFill>
+                  <a:srgbClr val="C00000"/>
+                </a:solidFill>
+                <a:cs typeface="Al Bayan Plain" pitchFamily="2" charset="-78"/>
+              </a:rPr>
+              <a:t>gpu</a:t>
+            </a:r>
+            <a:r>
+              <a:rPr lang="en-US" altLang="ko-KR" sz="900" kern="0" dirty="0">
+                <a:solidFill>
+                  <a:srgbClr val="C00000"/>
+                </a:solidFill>
+                <a:cs typeface="Al Bayan Plain" pitchFamily="2" charset="-78"/>
+              </a:rPr>
+              <a:t>: 2</a:t>
+            </a:r>
+          </a:p>
+          <a:p>
+            <a:r>
+              <a:rPr lang="en-US" altLang="ko-KR" sz="900" kern="0" dirty="0">
+                <a:solidFill>
+                  <a:srgbClr val="C00000"/>
+                </a:solidFill>
+                <a:cs typeface="Al Bayan Plain" pitchFamily="2" charset="-78"/>
+              </a:rPr>
+              <a:t>         limits:</a:t>
+            </a:r>
+          </a:p>
+          <a:p>
+            <a:r>
+              <a:rPr lang="en-US" altLang="ko-KR" sz="900" kern="0" dirty="0">
+                <a:solidFill>
+                  <a:srgbClr val="C00000"/>
+                </a:solidFill>
+                <a:cs typeface="Al Bayan Plain" pitchFamily="2" charset="-78"/>
+              </a:rPr>
+              <a:t>           </a:t>
+            </a:r>
+            <a:r>
+              <a:rPr lang="en-US" altLang="ko-KR" sz="900" kern="0" dirty="0" err="1">
+                <a:solidFill>
+                  <a:srgbClr val="C00000"/>
+                </a:solidFill>
+                <a:cs typeface="Al Bayan Plain" pitchFamily="2" charset="-78"/>
+              </a:rPr>
+              <a:t>nvidia.com</a:t>
+            </a:r>
+            <a:r>
+              <a:rPr lang="en-US" altLang="ko-KR" sz="900" kern="0" dirty="0">
+                <a:solidFill>
+                  <a:srgbClr val="C00000"/>
+                </a:solidFill>
+                <a:cs typeface="Al Bayan Plain" pitchFamily="2" charset="-78"/>
+              </a:rPr>
+              <a:t>/</a:t>
+            </a:r>
+            <a:r>
+              <a:rPr lang="en-US" altLang="ko-KR" sz="900" kern="0" dirty="0" err="1">
+                <a:solidFill>
+                  <a:srgbClr val="C00000"/>
+                </a:solidFill>
+                <a:cs typeface="Al Bayan Plain" pitchFamily="2" charset="-78"/>
+              </a:rPr>
+              <a:t>gpu</a:t>
+            </a:r>
+            <a:r>
+              <a:rPr lang="en-US" altLang="ko-KR" sz="900" kern="0" dirty="0">
+                <a:solidFill>
+                  <a:srgbClr val="C00000"/>
+                </a:solidFill>
+                <a:cs typeface="Al Bayan Plain" pitchFamily="2" charset="-78"/>
+              </a:rPr>
+              <a:t>: 2</a:t>
+            </a:r>
+          </a:p>
+        </p:txBody>
+      </p:sp>
+    </p:spTree>
+    <p:extLst>
+      <p:ext uri="{BB962C8B-B14F-4D97-AF65-F5344CB8AC3E}">
+        <p14:creationId xmlns:p14="http://schemas.microsoft.com/office/powerpoint/2010/main" val="2011655415"/>
+      </p:ext>
+    </p:extLst>
+  </p:cSld>
+  <p:clrMapOvr>
+    <a:masterClrMapping/>
+  </p:clrMapOvr>
+</p:sld>
+</file>
+
+<file path=ppt/slides/slide11.xml><?xml version="1.0" encoding="utf-8"?>
 <p:sld xmlns:a="http://schemas.openxmlformats.org/drawingml/2006/main" xmlns:r="http://schemas.openxmlformats.org/officeDocument/2006/relationships" xmlns:p="http://schemas.openxmlformats.org/presentationml/2006/main">
   <p:cSld>
     <p:spTree>
@@ -11327,6 +13113,1665 @@
         <p:cNvPr id="1" name="">
           <a:extLst>
             <a:ext uri="{FF2B5EF4-FFF2-40B4-BE49-F238E27FC236}">
+              <a16:creationId xmlns:a16="http://schemas.microsoft.com/office/drawing/2014/main" id="{F1738134-E406-A567-E674-2848399F7CB7}"/>
+            </a:ext>
+          </a:extLst>
+        </p:cNvPr>
+        <p:cNvGrpSpPr/>
+        <p:nvPr/>
+      </p:nvGrpSpPr>
+      <p:grpSpPr>
+        <a:xfrm>
+          <a:off x="0" y="0"/>
+          <a:ext cx="0" cy="0"/>
+          <a:chOff x="0" y="0"/>
+          <a:chExt cx="0" cy="0"/>
+        </a:xfrm>
+      </p:grpSpPr>
+      <p:sp>
+        <p:nvSpPr>
+          <p:cNvPr id="38" name="사각형: 둥근 모서리 114">
+            <a:extLst>
+              <a:ext uri="{FF2B5EF4-FFF2-40B4-BE49-F238E27FC236}">
+                <a16:creationId xmlns:a16="http://schemas.microsoft.com/office/drawing/2014/main" id="{FCD3294B-B4D1-2DA3-B369-A4761CE5C6C9}"/>
+              </a:ext>
+            </a:extLst>
+          </p:cNvPr>
+          <p:cNvSpPr/>
+          <p:nvPr/>
+        </p:nvSpPr>
+        <p:spPr>
+          <a:xfrm>
+            <a:off x="2314776" y="206729"/>
+            <a:ext cx="2600124" cy="1990371"/>
+          </a:xfrm>
+          <a:prstGeom prst="roundRect">
+            <a:avLst>
+              <a:gd name="adj" fmla="val 4159"/>
+            </a:avLst>
+          </a:prstGeom>
+          <a:ln w="12700"/>
+        </p:spPr>
+        <p:style>
+          <a:lnRef idx="2">
+            <a:schemeClr val="dk1"/>
+          </a:lnRef>
+          <a:fillRef idx="1">
+            <a:schemeClr val="lt1"/>
+          </a:fillRef>
+          <a:effectRef idx="0">
+            <a:schemeClr val="dk1"/>
+          </a:effectRef>
+          <a:fontRef idx="minor">
+            <a:schemeClr val="dk1"/>
+          </a:fontRef>
+        </p:style>
+        <p:txBody>
+          <a:bodyPr rtlCol="0" anchor="t"/>
+          <a:lstStyle/>
+          <a:p>
+            <a:pPr algn="ctr"/>
+            <a:r>
+              <a:rPr lang="en-US" altLang="ko-KR" sz="1000" b="1"/>
+              <a:t>Pod A</a:t>
+            </a:r>
+            <a:endParaRPr lang="ko-KR" altLang="en-US" sz="1000" b="1" dirty="0">
+              <a:solidFill>
+                <a:schemeClr val="accent2">
+                  <a:lumMod val="75000"/>
+                </a:schemeClr>
+              </a:solidFill>
+            </a:endParaRPr>
+          </a:p>
+        </p:txBody>
+      </p:sp>
+      <p:sp>
+        <p:nvSpPr>
+          <p:cNvPr id="37" name="사각형: 둥근 모서리 114">
+            <a:extLst>
+              <a:ext uri="{FF2B5EF4-FFF2-40B4-BE49-F238E27FC236}">
+                <a16:creationId xmlns:a16="http://schemas.microsoft.com/office/drawing/2014/main" id="{DCE85A01-6E17-2A24-F774-1229D3C9AF4C}"/>
+              </a:ext>
+            </a:extLst>
+          </p:cNvPr>
+          <p:cNvSpPr/>
+          <p:nvPr/>
+        </p:nvSpPr>
+        <p:spPr>
+          <a:xfrm>
+            <a:off x="899592" y="206729"/>
+            <a:ext cx="1373708" cy="1990371"/>
+          </a:xfrm>
+          <a:prstGeom prst="roundRect">
+            <a:avLst>
+              <a:gd name="adj" fmla="val 4159"/>
+            </a:avLst>
+          </a:prstGeom>
+          <a:ln w="12700"/>
+        </p:spPr>
+        <p:style>
+          <a:lnRef idx="2">
+            <a:schemeClr val="dk1"/>
+          </a:lnRef>
+          <a:fillRef idx="1">
+            <a:schemeClr val="lt1"/>
+          </a:fillRef>
+          <a:effectRef idx="0">
+            <a:schemeClr val="dk1"/>
+          </a:effectRef>
+          <a:fontRef idx="minor">
+            <a:schemeClr val="dk1"/>
+          </a:fontRef>
+        </p:style>
+        <p:txBody>
+          <a:bodyPr rtlCol="0" anchor="t"/>
+          <a:lstStyle/>
+          <a:p>
+            <a:pPr algn="ctr"/>
+            <a:r>
+              <a:rPr lang="en-US" altLang="ko-KR" sz="1000" b="1"/>
+              <a:t>Pod A</a:t>
+            </a:r>
+            <a:endParaRPr lang="ko-KR" altLang="en-US" sz="1000" b="1" dirty="0">
+              <a:solidFill>
+                <a:schemeClr val="accent2">
+                  <a:lumMod val="75000"/>
+                </a:schemeClr>
+              </a:solidFill>
+            </a:endParaRPr>
+          </a:p>
+        </p:txBody>
+      </p:sp>
+      <p:sp>
+        <p:nvSpPr>
+          <p:cNvPr id="2" name="제목 1">
+            <a:extLst>
+              <a:ext uri="{FF2B5EF4-FFF2-40B4-BE49-F238E27FC236}">
+                <a16:creationId xmlns:a16="http://schemas.microsoft.com/office/drawing/2014/main" id="{CD70E56F-2DEA-8218-4191-8ECBBFA8B65C}"/>
+              </a:ext>
+            </a:extLst>
+          </p:cNvPr>
+          <p:cNvSpPr>
+            <a:spLocks noGrp="1"/>
+          </p:cNvSpPr>
+          <p:nvPr>
+            <p:ph type="title"/>
+          </p:nvPr>
+        </p:nvSpPr>
+        <p:spPr>
+          <a:xfrm>
+            <a:off x="0" y="-773419"/>
+            <a:ext cx="9144000" cy="857250"/>
+          </a:xfrm>
+        </p:spPr>
+        <p:txBody>
+          <a:bodyPr>
+            <a:normAutofit/>
+          </a:bodyPr>
+          <a:lstStyle/>
+          <a:p>
+            <a:r>
+              <a:rPr lang="en-US" altLang="ko-KR"/>
+              <a:t>CUDA Container Stack</a:t>
+            </a:r>
+            <a:endParaRPr lang="ko-KR" altLang="en-US" dirty="0"/>
+          </a:p>
+        </p:txBody>
+      </p:sp>
+      <p:sp>
+        <p:nvSpPr>
+          <p:cNvPr id="9" name="사각형: 둥근 모서리 114">
+            <a:extLst>
+              <a:ext uri="{FF2B5EF4-FFF2-40B4-BE49-F238E27FC236}">
+                <a16:creationId xmlns:a16="http://schemas.microsoft.com/office/drawing/2014/main" id="{9CDB4F25-27DC-3AAC-48CC-4CA16DABBE09}"/>
+              </a:ext>
+            </a:extLst>
+          </p:cNvPr>
+          <p:cNvSpPr/>
+          <p:nvPr/>
+        </p:nvSpPr>
+        <p:spPr>
+          <a:xfrm>
+            <a:off x="1110454" y="2249109"/>
+            <a:ext cx="5045722" cy="1187198"/>
+          </a:xfrm>
+          <a:prstGeom prst="roundRect">
+            <a:avLst>
+              <a:gd name="adj" fmla="val 5938"/>
+            </a:avLst>
+          </a:prstGeom>
+          <a:ln w="12700"/>
+        </p:spPr>
+        <p:style>
+          <a:lnRef idx="2">
+            <a:schemeClr val="dk1"/>
+          </a:lnRef>
+          <a:fillRef idx="1">
+            <a:schemeClr val="lt1"/>
+          </a:fillRef>
+          <a:effectRef idx="0">
+            <a:schemeClr val="dk1"/>
+          </a:effectRef>
+          <a:fontRef idx="minor">
+            <a:schemeClr val="dk1"/>
+          </a:fontRef>
+        </p:style>
+        <p:txBody>
+          <a:bodyPr rtlCol="0" anchor="b"/>
+          <a:lstStyle/>
+          <a:p>
+            <a:pPr algn="ctr"/>
+            <a:r>
+              <a:rPr lang="en-US" altLang="ko-KR" sz="1000" b="1"/>
+              <a:t>Host Filesystem</a:t>
+            </a:r>
+            <a:endParaRPr lang="en-US" altLang="ko-KR" sz="1000" b="1" dirty="0"/>
+          </a:p>
+        </p:txBody>
+      </p:sp>
+      <p:sp>
+        <p:nvSpPr>
+          <p:cNvPr id="10" name="사각형: 둥근 모서리 114">
+            <a:extLst>
+              <a:ext uri="{FF2B5EF4-FFF2-40B4-BE49-F238E27FC236}">
+                <a16:creationId xmlns:a16="http://schemas.microsoft.com/office/drawing/2014/main" id="{D9F5E8A7-939C-C03F-3B86-2FE635088F14}"/>
+              </a:ext>
+            </a:extLst>
+          </p:cNvPr>
+          <p:cNvSpPr/>
+          <p:nvPr/>
+        </p:nvSpPr>
+        <p:spPr>
+          <a:xfrm>
+            <a:off x="1119926" y="4171338"/>
+            <a:ext cx="5037102" cy="787990"/>
+          </a:xfrm>
+          <a:prstGeom prst="roundRect">
+            <a:avLst>
+              <a:gd name="adj" fmla="val 7160"/>
+            </a:avLst>
+          </a:prstGeom>
+          <a:ln w="12700"/>
+        </p:spPr>
+        <p:style>
+          <a:lnRef idx="2">
+            <a:schemeClr val="dk1"/>
+          </a:lnRef>
+          <a:fillRef idx="1">
+            <a:schemeClr val="lt1"/>
+          </a:fillRef>
+          <a:effectRef idx="0">
+            <a:schemeClr val="dk1"/>
+          </a:effectRef>
+          <a:fontRef idx="minor">
+            <a:schemeClr val="dk1"/>
+          </a:fontRef>
+        </p:style>
+        <p:txBody>
+          <a:bodyPr rtlCol="0" anchor="b"/>
+          <a:lstStyle/>
+          <a:p>
+            <a:pPr algn="ctr"/>
+            <a:r>
+              <a:rPr lang="en-US" altLang="ko-KR" sz="1000" b="1"/>
+              <a:t>Host Hardware</a:t>
+            </a:r>
+            <a:endParaRPr lang="en-US" altLang="ko-KR" sz="1000" b="1" dirty="0"/>
+          </a:p>
+        </p:txBody>
+      </p:sp>
+      <p:sp>
+        <p:nvSpPr>
+          <p:cNvPr id="11" name="사각형: 둥근 모서리 114">
+            <a:extLst>
+              <a:ext uri="{FF2B5EF4-FFF2-40B4-BE49-F238E27FC236}">
+                <a16:creationId xmlns:a16="http://schemas.microsoft.com/office/drawing/2014/main" id="{649506A0-FA43-F32C-271E-EF9F4C614DBE}"/>
+              </a:ext>
+            </a:extLst>
+          </p:cNvPr>
+          <p:cNvSpPr/>
+          <p:nvPr/>
+        </p:nvSpPr>
+        <p:spPr>
+          <a:xfrm>
+            <a:off x="1115616" y="3436307"/>
+            <a:ext cx="5045722" cy="739656"/>
+          </a:xfrm>
+          <a:prstGeom prst="roundRect">
+            <a:avLst>
+              <a:gd name="adj" fmla="val 7201"/>
+            </a:avLst>
+          </a:prstGeom>
+          <a:ln w="12700"/>
+        </p:spPr>
+        <p:style>
+          <a:lnRef idx="2">
+            <a:schemeClr val="dk1"/>
+          </a:lnRef>
+          <a:fillRef idx="1">
+            <a:schemeClr val="lt1"/>
+          </a:fillRef>
+          <a:effectRef idx="0">
+            <a:schemeClr val="dk1"/>
+          </a:effectRef>
+          <a:fontRef idx="minor">
+            <a:schemeClr val="dk1"/>
+          </a:fontRef>
+        </p:style>
+        <p:txBody>
+          <a:bodyPr rtlCol="0" anchor="b"/>
+          <a:lstStyle/>
+          <a:p>
+            <a:pPr algn="ctr"/>
+            <a:r>
+              <a:rPr lang="en-US" altLang="ko-KR" sz="1000" b="1"/>
+              <a:t>Host Kernel</a:t>
+            </a:r>
+            <a:endParaRPr lang="en-US" altLang="ko-KR" sz="1000" b="1" dirty="0"/>
+          </a:p>
+        </p:txBody>
+      </p:sp>
+      <p:sp>
+        <p:nvSpPr>
+          <p:cNvPr id="12" name="사각형: 둥근 모서리 114">
+            <a:extLst>
+              <a:ext uri="{FF2B5EF4-FFF2-40B4-BE49-F238E27FC236}">
+                <a16:creationId xmlns:a16="http://schemas.microsoft.com/office/drawing/2014/main" id="{3172757A-7321-06BB-B559-A8877D3D630D}"/>
+              </a:ext>
+            </a:extLst>
+          </p:cNvPr>
+          <p:cNvSpPr/>
+          <p:nvPr/>
+        </p:nvSpPr>
+        <p:spPr>
+          <a:xfrm>
+            <a:off x="1209844" y="4287525"/>
+            <a:ext cx="1077331" cy="383228"/>
+          </a:xfrm>
+          <a:prstGeom prst="roundRect">
+            <a:avLst>
+              <a:gd name="adj" fmla="val 14292"/>
+            </a:avLst>
+          </a:prstGeom>
+          <a:solidFill>
+            <a:schemeClr val="bg1">
+              <a:lumMod val="95000"/>
+            </a:schemeClr>
+          </a:solidFill>
+          <a:ln w="12700"/>
+        </p:spPr>
+        <p:style>
+          <a:lnRef idx="2">
+            <a:schemeClr val="dk1"/>
+          </a:lnRef>
+          <a:fillRef idx="1">
+            <a:schemeClr val="lt1"/>
+          </a:fillRef>
+          <a:effectRef idx="0">
+            <a:schemeClr val="dk1"/>
+          </a:effectRef>
+          <a:fontRef idx="minor">
+            <a:schemeClr val="dk1"/>
+          </a:fontRef>
+        </p:style>
+        <p:txBody>
+          <a:bodyPr rtlCol="0" anchor="ctr"/>
+          <a:lstStyle/>
+          <a:p>
+            <a:pPr algn="ctr"/>
+            <a:r>
+              <a:rPr lang="en-US" altLang="ko-KR" sz="1000"/>
+              <a:t>NVIDIA</a:t>
+            </a:r>
+          </a:p>
+          <a:p>
+            <a:pPr algn="ctr"/>
+            <a:r>
+              <a:rPr lang="en-US" altLang="ko-KR" sz="1000"/>
+              <a:t>GPU 0</a:t>
+            </a:r>
+            <a:endParaRPr lang="en-US" altLang="ko-KR" sz="1000" dirty="0"/>
+          </a:p>
+        </p:txBody>
+      </p:sp>
+      <p:sp>
+        <p:nvSpPr>
+          <p:cNvPr id="13" name="사각형: 둥근 모서리 114">
+            <a:extLst>
+              <a:ext uri="{FF2B5EF4-FFF2-40B4-BE49-F238E27FC236}">
+                <a16:creationId xmlns:a16="http://schemas.microsoft.com/office/drawing/2014/main" id="{8ADC0D43-9543-65B5-E44E-B41CCF17F0EB}"/>
+              </a:ext>
+            </a:extLst>
+          </p:cNvPr>
+          <p:cNvSpPr/>
+          <p:nvPr/>
+        </p:nvSpPr>
+        <p:spPr>
+          <a:xfrm>
+            <a:off x="2469823" y="4287525"/>
+            <a:ext cx="1077331" cy="383228"/>
+          </a:xfrm>
+          <a:prstGeom prst="roundRect">
+            <a:avLst>
+              <a:gd name="adj" fmla="val 14292"/>
+            </a:avLst>
+          </a:prstGeom>
+          <a:solidFill>
+            <a:schemeClr val="bg1">
+              <a:lumMod val="95000"/>
+            </a:schemeClr>
+          </a:solidFill>
+          <a:ln w="12700"/>
+        </p:spPr>
+        <p:style>
+          <a:lnRef idx="2">
+            <a:schemeClr val="dk1"/>
+          </a:lnRef>
+          <a:fillRef idx="1">
+            <a:schemeClr val="lt1"/>
+          </a:fillRef>
+          <a:effectRef idx="0">
+            <a:schemeClr val="dk1"/>
+          </a:effectRef>
+          <a:fontRef idx="minor">
+            <a:schemeClr val="dk1"/>
+          </a:fontRef>
+        </p:style>
+        <p:txBody>
+          <a:bodyPr rtlCol="0" anchor="ctr"/>
+          <a:lstStyle/>
+          <a:p>
+            <a:pPr algn="ctr"/>
+            <a:r>
+              <a:rPr lang="en-US" altLang="ko-KR" sz="1000"/>
+              <a:t>NVIDIA</a:t>
+            </a:r>
+          </a:p>
+          <a:p>
+            <a:pPr algn="ctr"/>
+            <a:r>
+              <a:rPr lang="en-US" altLang="ko-KR" sz="1000"/>
+              <a:t>GPU 1</a:t>
+            </a:r>
+            <a:endParaRPr lang="en-US" altLang="ko-KR" sz="1000" dirty="0"/>
+          </a:p>
+        </p:txBody>
+      </p:sp>
+      <p:sp>
+        <p:nvSpPr>
+          <p:cNvPr id="18" name="사각형: 둥근 모서리 114">
+            <a:extLst>
+              <a:ext uri="{FF2B5EF4-FFF2-40B4-BE49-F238E27FC236}">
+                <a16:creationId xmlns:a16="http://schemas.microsoft.com/office/drawing/2014/main" id="{A3F8ABC0-16B3-220F-0214-42B33C51E581}"/>
+              </a:ext>
+            </a:extLst>
+          </p:cNvPr>
+          <p:cNvSpPr/>
+          <p:nvPr/>
+        </p:nvSpPr>
+        <p:spPr>
+          <a:xfrm>
+            <a:off x="3729801" y="4287525"/>
+            <a:ext cx="1077331" cy="383228"/>
+          </a:xfrm>
+          <a:prstGeom prst="roundRect">
+            <a:avLst>
+              <a:gd name="adj" fmla="val 12529"/>
+            </a:avLst>
+          </a:prstGeom>
+          <a:solidFill>
+            <a:schemeClr val="bg1">
+              <a:lumMod val="95000"/>
+            </a:schemeClr>
+          </a:solidFill>
+          <a:ln w="12700"/>
+        </p:spPr>
+        <p:style>
+          <a:lnRef idx="2">
+            <a:schemeClr val="dk1"/>
+          </a:lnRef>
+          <a:fillRef idx="1">
+            <a:schemeClr val="lt1"/>
+          </a:fillRef>
+          <a:effectRef idx="0">
+            <a:schemeClr val="dk1"/>
+          </a:effectRef>
+          <a:fontRef idx="minor">
+            <a:schemeClr val="dk1"/>
+          </a:fontRef>
+        </p:style>
+        <p:txBody>
+          <a:bodyPr rtlCol="0" anchor="ctr"/>
+          <a:lstStyle/>
+          <a:p>
+            <a:pPr algn="ctr"/>
+            <a:r>
+              <a:rPr lang="en-US" altLang="ko-KR" sz="1000"/>
+              <a:t>NVIDIA</a:t>
+            </a:r>
+          </a:p>
+          <a:p>
+            <a:pPr algn="ctr"/>
+            <a:r>
+              <a:rPr lang="en-US" altLang="ko-KR" sz="1000"/>
+              <a:t>GPU 2</a:t>
+            </a:r>
+            <a:endParaRPr lang="en-US" altLang="ko-KR" sz="1000" dirty="0"/>
+          </a:p>
+        </p:txBody>
+      </p:sp>
+      <p:sp>
+        <p:nvSpPr>
+          <p:cNvPr id="19" name="사각형: 둥근 모서리 114">
+            <a:extLst>
+              <a:ext uri="{FF2B5EF4-FFF2-40B4-BE49-F238E27FC236}">
+                <a16:creationId xmlns:a16="http://schemas.microsoft.com/office/drawing/2014/main" id="{961B9215-77FF-E4FB-F572-F6F018574A8B}"/>
+              </a:ext>
+            </a:extLst>
+          </p:cNvPr>
+          <p:cNvSpPr/>
+          <p:nvPr/>
+        </p:nvSpPr>
+        <p:spPr>
+          <a:xfrm>
+            <a:off x="4989780" y="4287525"/>
+            <a:ext cx="1077331" cy="383228"/>
+          </a:xfrm>
+          <a:prstGeom prst="roundRect">
+            <a:avLst>
+              <a:gd name="adj" fmla="val 16055"/>
+            </a:avLst>
+          </a:prstGeom>
+          <a:solidFill>
+            <a:schemeClr val="bg1">
+              <a:lumMod val="95000"/>
+            </a:schemeClr>
+          </a:solidFill>
+          <a:ln w="12700"/>
+        </p:spPr>
+        <p:style>
+          <a:lnRef idx="2">
+            <a:schemeClr val="dk1"/>
+          </a:lnRef>
+          <a:fillRef idx="1">
+            <a:schemeClr val="lt1"/>
+          </a:fillRef>
+          <a:effectRef idx="0">
+            <a:schemeClr val="dk1"/>
+          </a:effectRef>
+          <a:fontRef idx="minor">
+            <a:schemeClr val="dk1"/>
+          </a:fontRef>
+        </p:style>
+        <p:txBody>
+          <a:bodyPr rtlCol="0" anchor="ctr"/>
+          <a:lstStyle/>
+          <a:p>
+            <a:pPr algn="ctr"/>
+            <a:r>
+              <a:rPr lang="en-US" altLang="ko-KR" sz="1000"/>
+              <a:t>NVIDIA</a:t>
+            </a:r>
+          </a:p>
+          <a:p>
+            <a:pPr algn="ctr"/>
+            <a:r>
+              <a:rPr lang="en-US" altLang="ko-KR" sz="1000"/>
+              <a:t>GPU 3</a:t>
+            </a:r>
+            <a:endParaRPr lang="en-US" altLang="ko-KR" sz="1000" dirty="0"/>
+          </a:p>
+        </p:txBody>
+      </p:sp>
+      <p:sp>
+        <p:nvSpPr>
+          <p:cNvPr id="20" name="사각형: 둥근 모서리 114">
+            <a:extLst>
+              <a:ext uri="{FF2B5EF4-FFF2-40B4-BE49-F238E27FC236}">
+                <a16:creationId xmlns:a16="http://schemas.microsoft.com/office/drawing/2014/main" id="{F55FA972-9B19-12CD-1F10-66668B78E52B}"/>
+              </a:ext>
+            </a:extLst>
+          </p:cNvPr>
+          <p:cNvSpPr/>
+          <p:nvPr/>
+        </p:nvSpPr>
+        <p:spPr>
+          <a:xfrm>
+            <a:off x="1205027" y="3564926"/>
+            <a:ext cx="4862083" cy="383228"/>
+          </a:xfrm>
+          <a:prstGeom prst="roundRect">
+            <a:avLst>
+              <a:gd name="adj" fmla="val 12530"/>
+            </a:avLst>
+          </a:prstGeom>
+          <a:ln w="12700"/>
+        </p:spPr>
+        <p:style>
+          <a:lnRef idx="2">
+            <a:schemeClr val="dk1"/>
+          </a:lnRef>
+          <a:fillRef idx="1">
+            <a:schemeClr val="lt1"/>
+          </a:fillRef>
+          <a:effectRef idx="0">
+            <a:schemeClr val="dk1"/>
+          </a:effectRef>
+          <a:fontRef idx="minor">
+            <a:schemeClr val="dk1"/>
+          </a:fontRef>
+        </p:style>
+        <p:txBody>
+          <a:bodyPr rtlCol="0" anchor="ctr"/>
+          <a:lstStyle/>
+          <a:p>
+            <a:pPr algn="ctr"/>
+            <a:r>
+              <a:rPr lang="en-US" altLang="ko-KR" sz="1000"/>
+              <a:t>NVIDIA GPU Device Driver</a:t>
+            </a:r>
+            <a:endParaRPr lang="en-US" altLang="ko-KR" sz="1000" dirty="0"/>
+          </a:p>
+        </p:txBody>
+      </p:sp>
+      <p:sp>
+        <p:nvSpPr>
+          <p:cNvPr id="21" name="사각형: 둥근 모서리 114">
+            <a:extLst>
+              <a:ext uri="{FF2B5EF4-FFF2-40B4-BE49-F238E27FC236}">
+                <a16:creationId xmlns:a16="http://schemas.microsoft.com/office/drawing/2014/main" id="{FAD67F53-C83E-7900-42B3-34DE69B56C0B}"/>
+              </a:ext>
+            </a:extLst>
+          </p:cNvPr>
+          <p:cNvSpPr/>
+          <p:nvPr/>
+        </p:nvSpPr>
+        <p:spPr>
+          <a:xfrm>
+            <a:off x="1205028" y="2796064"/>
+            <a:ext cx="1082148" cy="383228"/>
+          </a:xfrm>
+          <a:prstGeom prst="roundRect">
+            <a:avLst>
+              <a:gd name="adj" fmla="val 13792"/>
+            </a:avLst>
+          </a:prstGeom>
+          <a:solidFill>
+            <a:schemeClr val="bg1">
+              <a:lumMod val="95000"/>
+            </a:schemeClr>
+          </a:solidFill>
+          <a:ln w="12700"/>
+        </p:spPr>
+        <p:style>
+          <a:lnRef idx="2">
+            <a:schemeClr val="dk1"/>
+          </a:lnRef>
+          <a:fillRef idx="1">
+            <a:schemeClr val="lt1"/>
+          </a:fillRef>
+          <a:effectRef idx="0">
+            <a:schemeClr val="dk1"/>
+          </a:effectRef>
+          <a:fontRef idx="minor">
+            <a:schemeClr val="dk1"/>
+          </a:fontRef>
+        </p:style>
+        <p:txBody>
+          <a:bodyPr rtlCol="0" anchor="ctr"/>
+          <a:lstStyle/>
+          <a:p>
+            <a:pPr algn="ctr"/>
+            <a:r>
+              <a:rPr lang="en-US" altLang="ko-KR" sz="1000"/>
+              <a:t>/dev/nvidia0</a:t>
+            </a:r>
+            <a:endParaRPr lang="en-US" altLang="ko-KR" sz="1000" dirty="0"/>
+          </a:p>
+        </p:txBody>
+      </p:sp>
+      <p:sp>
+        <p:nvSpPr>
+          <p:cNvPr id="22" name="사각형: 둥근 모서리 114">
+            <a:extLst>
+              <a:ext uri="{FF2B5EF4-FFF2-40B4-BE49-F238E27FC236}">
+                <a16:creationId xmlns:a16="http://schemas.microsoft.com/office/drawing/2014/main" id="{5A56A658-8383-8704-FB8F-2720F060F077}"/>
+              </a:ext>
+            </a:extLst>
+          </p:cNvPr>
+          <p:cNvSpPr/>
+          <p:nvPr/>
+        </p:nvSpPr>
+        <p:spPr>
+          <a:xfrm>
+            <a:off x="2469823" y="2796064"/>
+            <a:ext cx="1082148" cy="383228"/>
+          </a:xfrm>
+          <a:prstGeom prst="roundRect">
+            <a:avLst>
+              <a:gd name="adj" fmla="val 13792"/>
+            </a:avLst>
+          </a:prstGeom>
+          <a:solidFill>
+            <a:schemeClr val="bg1">
+              <a:lumMod val="95000"/>
+            </a:schemeClr>
+          </a:solidFill>
+          <a:ln w="12700"/>
+        </p:spPr>
+        <p:style>
+          <a:lnRef idx="2">
+            <a:schemeClr val="dk1"/>
+          </a:lnRef>
+          <a:fillRef idx="1">
+            <a:schemeClr val="lt1"/>
+          </a:fillRef>
+          <a:effectRef idx="0">
+            <a:schemeClr val="dk1"/>
+          </a:effectRef>
+          <a:fontRef idx="minor">
+            <a:schemeClr val="dk1"/>
+          </a:fontRef>
+        </p:style>
+        <p:txBody>
+          <a:bodyPr rtlCol="0" anchor="ctr"/>
+          <a:lstStyle/>
+          <a:p>
+            <a:pPr algn="ctr"/>
+            <a:r>
+              <a:rPr lang="en-US" altLang="ko-KR" sz="1000"/>
+              <a:t>/dev/nvidia1</a:t>
+            </a:r>
+            <a:endParaRPr lang="en-US" altLang="ko-KR" sz="1000" dirty="0"/>
+          </a:p>
+        </p:txBody>
+      </p:sp>
+      <p:sp>
+        <p:nvSpPr>
+          <p:cNvPr id="23" name="사각형: 둥근 모서리 114">
+            <a:extLst>
+              <a:ext uri="{FF2B5EF4-FFF2-40B4-BE49-F238E27FC236}">
+                <a16:creationId xmlns:a16="http://schemas.microsoft.com/office/drawing/2014/main" id="{E1FBDA49-D8C7-0E1A-6A5C-7FE26628ED51}"/>
+              </a:ext>
+            </a:extLst>
+          </p:cNvPr>
+          <p:cNvSpPr/>
+          <p:nvPr/>
+        </p:nvSpPr>
+        <p:spPr>
+          <a:xfrm>
+            <a:off x="3729801" y="2796064"/>
+            <a:ext cx="1082148" cy="383228"/>
+          </a:xfrm>
+          <a:prstGeom prst="roundRect">
+            <a:avLst>
+              <a:gd name="adj" fmla="val 13792"/>
+            </a:avLst>
+          </a:prstGeom>
+          <a:solidFill>
+            <a:schemeClr val="bg1">
+              <a:lumMod val="95000"/>
+            </a:schemeClr>
+          </a:solidFill>
+          <a:ln w="12700"/>
+        </p:spPr>
+        <p:style>
+          <a:lnRef idx="2">
+            <a:schemeClr val="dk1"/>
+          </a:lnRef>
+          <a:fillRef idx="1">
+            <a:schemeClr val="lt1"/>
+          </a:fillRef>
+          <a:effectRef idx="0">
+            <a:schemeClr val="dk1"/>
+          </a:effectRef>
+          <a:fontRef idx="minor">
+            <a:schemeClr val="dk1"/>
+          </a:fontRef>
+        </p:style>
+        <p:txBody>
+          <a:bodyPr rtlCol="0" anchor="ctr"/>
+          <a:lstStyle/>
+          <a:p>
+            <a:pPr algn="ctr"/>
+            <a:r>
+              <a:rPr lang="en-US" altLang="ko-KR" sz="1000"/>
+              <a:t>/dev/nvidia2</a:t>
+            </a:r>
+            <a:endParaRPr lang="en-US" altLang="ko-KR" sz="1000" dirty="0"/>
+          </a:p>
+        </p:txBody>
+      </p:sp>
+      <p:sp>
+        <p:nvSpPr>
+          <p:cNvPr id="24" name="사각형: 둥근 모서리 114">
+            <a:extLst>
+              <a:ext uri="{FF2B5EF4-FFF2-40B4-BE49-F238E27FC236}">
+                <a16:creationId xmlns:a16="http://schemas.microsoft.com/office/drawing/2014/main" id="{4BC69A82-2B00-F482-6058-DE47F241D059}"/>
+              </a:ext>
+            </a:extLst>
+          </p:cNvPr>
+          <p:cNvSpPr/>
+          <p:nvPr/>
+        </p:nvSpPr>
+        <p:spPr>
+          <a:xfrm>
+            <a:off x="4984271" y="2796064"/>
+            <a:ext cx="1082148" cy="383228"/>
+          </a:xfrm>
+          <a:prstGeom prst="roundRect">
+            <a:avLst>
+              <a:gd name="adj" fmla="val 13792"/>
+            </a:avLst>
+          </a:prstGeom>
+          <a:solidFill>
+            <a:schemeClr val="bg1">
+              <a:lumMod val="95000"/>
+            </a:schemeClr>
+          </a:solidFill>
+          <a:ln w="12700"/>
+        </p:spPr>
+        <p:style>
+          <a:lnRef idx="2">
+            <a:schemeClr val="dk1"/>
+          </a:lnRef>
+          <a:fillRef idx="1">
+            <a:schemeClr val="lt1"/>
+          </a:fillRef>
+          <a:effectRef idx="0">
+            <a:schemeClr val="dk1"/>
+          </a:effectRef>
+          <a:fontRef idx="minor">
+            <a:schemeClr val="dk1"/>
+          </a:fontRef>
+        </p:style>
+        <p:txBody>
+          <a:bodyPr rtlCol="0" anchor="ctr"/>
+          <a:lstStyle/>
+          <a:p>
+            <a:pPr algn="ctr"/>
+            <a:r>
+              <a:rPr lang="en-US" altLang="ko-KR" sz="1000"/>
+              <a:t>/dev/nvidia3</a:t>
+            </a:r>
+            <a:endParaRPr lang="en-US" altLang="ko-KR" sz="1000" dirty="0"/>
+          </a:p>
+        </p:txBody>
+      </p:sp>
+      <p:cxnSp>
+        <p:nvCxnSpPr>
+          <p:cNvPr id="25" name="직선 연결선 20">
+            <a:extLst>
+              <a:ext uri="{FF2B5EF4-FFF2-40B4-BE49-F238E27FC236}">
+                <a16:creationId xmlns:a16="http://schemas.microsoft.com/office/drawing/2014/main" id="{A1262E5A-0FFD-5596-2F87-D597FC366CD6}"/>
+              </a:ext>
+            </a:extLst>
+          </p:cNvPr>
+          <p:cNvCxnSpPr>
+            <a:cxnSpLocks/>
+            <a:stCxn id="22" idx="2"/>
+            <a:endCxn id="13" idx="0"/>
+          </p:cNvCxnSpPr>
+          <p:nvPr/>
+        </p:nvCxnSpPr>
+        <p:spPr>
+          <a:xfrm flipH="1">
+            <a:off x="3008489" y="3179293"/>
+            <a:ext cx="2408" cy="1108233"/>
+          </a:xfrm>
+          <a:prstGeom prst="line">
+            <a:avLst/>
+          </a:prstGeom>
+          <a:ln w="12700">
+            <a:solidFill>
+              <a:schemeClr val="tx1"/>
+            </a:solidFill>
+            <a:prstDash val="dash"/>
+          </a:ln>
+        </p:spPr>
+        <p:style>
+          <a:lnRef idx="1">
+            <a:schemeClr val="accent1"/>
+          </a:lnRef>
+          <a:fillRef idx="0">
+            <a:schemeClr val="accent1"/>
+          </a:fillRef>
+          <a:effectRef idx="0">
+            <a:schemeClr val="accent1"/>
+          </a:effectRef>
+          <a:fontRef idx="minor">
+            <a:schemeClr val="tx1"/>
+          </a:fontRef>
+        </p:style>
+      </p:cxnSp>
+      <p:sp>
+        <p:nvSpPr>
+          <p:cNvPr id="26" name="사각형: 둥근 모서리 114">
+            <a:extLst>
+              <a:ext uri="{FF2B5EF4-FFF2-40B4-BE49-F238E27FC236}">
+                <a16:creationId xmlns:a16="http://schemas.microsoft.com/office/drawing/2014/main" id="{B8C7CCC1-B001-4838-88CD-BA1DFA57B91D}"/>
+              </a:ext>
+            </a:extLst>
+          </p:cNvPr>
+          <p:cNvSpPr/>
+          <p:nvPr/>
+        </p:nvSpPr>
+        <p:spPr>
+          <a:xfrm>
+            <a:off x="1205028" y="2324202"/>
+            <a:ext cx="4862083" cy="383228"/>
+          </a:xfrm>
+          <a:prstGeom prst="roundRect">
+            <a:avLst>
+              <a:gd name="adj" fmla="val 17067"/>
+            </a:avLst>
+          </a:prstGeom>
+          <a:solidFill>
+            <a:schemeClr val="bg2">
+              <a:lumMod val="90000"/>
+            </a:schemeClr>
+          </a:solidFill>
+          <a:ln w="12700"/>
+        </p:spPr>
+        <p:style>
+          <a:lnRef idx="2">
+            <a:schemeClr val="dk1"/>
+          </a:lnRef>
+          <a:fillRef idx="1">
+            <a:schemeClr val="lt1"/>
+          </a:fillRef>
+          <a:effectRef idx="0">
+            <a:schemeClr val="dk1"/>
+          </a:effectRef>
+          <a:fontRef idx="minor">
+            <a:schemeClr val="dk1"/>
+          </a:fontRef>
+        </p:style>
+        <p:txBody>
+          <a:bodyPr rtlCol="0" anchor="ctr"/>
+          <a:lstStyle/>
+          <a:p>
+            <a:pPr algn="ctr"/>
+            <a:r>
+              <a:rPr lang="en-US" altLang="ko-KR" sz="1000"/>
+              <a:t>NVIDIA CUDA Lib/Toolkit</a:t>
+            </a:r>
+            <a:endParaRPr lang="en-US" altLang="ko-KR" sz="1000" dirty="0"/>
+          </a:p>
+        </p:txBody>
+      </p:sp>
+      <p:cxnSp>
+        <p:nvCxnSpPr>
+          <p:cNvPr id="27" name="직선 연결선 17">
+            <a:extLst>
+              <a:ext uri="{FF2B5EF4-FFF2-40B4-BE49-F238E27FC236}">
+                <a16:creationId xmlns:a16="http://schemas.microsoft.com/office/drawing/2014/main" id="{891637D7-B438-4DE3-1B01-D1A1D122E557}"/>
+              </a:ext>
+            </a:extLst>
+          </p:cNvPr>
+          <p:cNvCxnSpPr>
+            <a:cxnSpLocks/>
+            <a:stCxn id="21" idx="2"/>
+            <a:endCxn id="12" idx="0"/>
+          </p:cNvCxnSpPr>
+          <p:nvPr/>
+        </p:nvCxnSpPr>
+        <p:spPr>
+          <a:xfrm>
+            <a:off x="1746102" y="3179293"/>
+            <a:ext cx="2408" cy="1108233"/>
+          </a:xfrm>
+          <a:prstGeom prst="line">
+            <a:avLst/>
+          </a:prstGeom>
+          <a:ln w="12700">
+            <a:solidFill>
+              <a:schemeClr val="tx1"/>
+            </a:solidFill>
+            <a:prstDash val="dash"/>
+          </a:ln>
+        </p:spPr>
+        <p:style>
+          <a:lnRef idx="1">
+            <a:schemeClr val="accent1"/>
+          </a:lnRef>
+          <a:fillRef idx="0">
+            <a:schemeClr val="accent1"/>
+          </a:fillRef>
+          <a:effectRef idx="0">
+            <a:schemeClr val="accent1"/>
+          </a:effectRef>
+          <a:fontRef idx="minor">
+            <a:schemeClr val="tx1"/>
+          </a:fontRef>
+        </p:style>
+      </p:cxnSp>
+      <p:cxnSp>
+        <p:nvCxnSpPr>
+          <p:cNvPr id="28" name="직선 연결선 17">
+            <a:extLst>
+              <a:ext uri="{FF2B5EF4-FFF2-40B4-BE49-F238E27FC236}">
+                <a16:creationId xmlns:a16="http://schemas.microsoft.com/office/drawing/2014/main" id="{1EA55093-FC5D-3D03-B143-A9ABBEA2FCF5}"/>
+              </a:ext>
+            </a:extLst>
+          </p:cNvPr>
+          <p:cNvCxnSpPr>
+            <a:cxnSpLocks/>
+            <a:stCxn id="23" idx="2"/>
+            <a:endCxn id="18" idx="0"/>
+          </p:cNvCxnSpPr>
+          <p:nvPr/>
+        </p:nvCxnSpPr>
+        <p:spPr>
+          <a:xfrm flipH="1">
+            <a:off x="4268467" y="3179293"/>
+            <a:ext cx="2408" cy="1108233"/>
+          </a:xfrm>
+          <a:prstGeom prst="line">
+            <a:avLst/>
+          </a:prstGeom>
+          <a:ln w="12700">
+            <a:solidFill>
+              <a:schemeClr val="tx1"/>
+            </a:solidFill>
+            <a:prstDash val="dash"/>
+          </a:ln>
+        </p:spPr>
+        <p:style>
+          <a:lnRef idx="1">
+            <a:schemeClr val="accent1"/>
+          </a:lnRef>
+          <a:fillRef idx="0">
+            <a:schemeClr val="accent1"/>
+          </a:fillRef>
+          <a:effectRef idx="0">
+            <a:schemeClr val="accent1"/>
+          </a:effectRef>
+          <a:fontRef idx="minor">
+            <a:schemeClr val="tx1"/>
+          </a:fontRef>
+        </p:style>
+      </p:cxnSp>
+      <p:cxnSp>
+        <p:nvCxnSpPr>
+          <p:cNvPr id="29" name="직선 연결선 26">
+            <a:extLst>
+              <a:ext uri="{FF2B5EF4-FFF2-40B4-BE49-F238E27FC236}">
+                <a16:creationId xmlns:a16="http://schemas.microsoft.com/office/drawing/2014/main" id="{46E42535-FDA5-050D-242B-CFCBF66CDE54}"/>
+              </a:ext>
+            </a:extLst>
+          </p:cNvPr>
+          <p:cNvCxnSpPr>
+            <a:cxnSpLocks/>
+            <a:stCxn id="24" idx="2"/>
+            <a:endCxn id="19" idx="0"/>
+          </p:cNvCxnSpPr>
+          <p:nvPr/>
+        </p:nvCxnSpPr>
+        <p:spPr>
+          <a:xfrm>
+            <a:off x="5525345" y="3179292"/>
+            <a:ext cx="3101" cy="1108233"/>
+          </a:xfrm>
+          <a:prstGeom prst="line">
+            <a:avLst/>
+          </a:prstGeom>
+          <a:ln w="12700">
+            <a:solidFill>
+              <a:schemeClr val="tx1"/>
+            </a:solidFill>
+            <a:prstDash val="dash"/>
+          </a:ln>
+        </p:spPr>
+        <p:style>
+          <a:lnRef idx="1">
+            <a:schemeClr val="accent1"/>
+          </a:lnRef>
+          <a:fillRef idx="0">
+            <a:schemeClr val="accent1"/>
+          </a:fillRef>
+          <a:effectRef idx="0">
+            <a:schemeClr val="accent1"/>
+          </a:effectRef>
+          <a:fontRef idx="minor">
+            <a:schemeClr val="tx1"/>
+          </a:fontRef>
+        </p:style>
+      </p:cxnSp>
+      <p:sp>
+        <p:nvSpPr>
+          <p:cNvPr id="179" name="TextBox 178">
+            <a:extLst>
+              <a:ext uri="{FF2B5EF4-FFF2-40B4-BE49-F238E27FC236}">
+                <a16:creationId xmlns:a16="http://schemas.microsoft.com/office/drawing/2014/main" id="{32EB5E65-6403-0C6E-65FA-31898B8CE69E}"/>
+              </a:ext>
+            </a:extLst>
+          </p:cNvPr>
+          <p:cNvSpPr txBox="1"/>
+          <p:nvPr/>
+        </p:nvSpPr>
+        <p:spPr>
+          <a:xfrm>
+            <a:off x="784256" y="2157133"/>
+            <a:ext cx="915635" cy="238253"/>
+          </a:xfrm>
+          <a:prstGeom prst="rect">
+            <a:avLst/>
+          </a:prstGeom>
+          <a:noFill/>
+        </p:spPr>
+        <p:txBody>
+          <a:bodyPr wrap="none" rtlCol="0">
+            <a:spAutoFit/>
+          </a:bodyPr>
+          <a:lstStyle/>
+          <a:p>
+            <a:r>
+              <a:rPr kumimoji="1" lang="en-US" altLang="ko-KR" sz="1000" b="1" i="1"/>
+              <a:t>Bind Mount</a:t>
+            </a:r>
+            <a:endParaRPr kumimoji="1" lang="ko-KR" altLang="en-US" sz="1000" b="1" i="1"/>
+          </a:p>
+        </p:txBody>
+      </p:sp>
+      <p:sp>
+        <p:nvSpPr>
+          <p:cNvPr id="15" name="사각형: 둥근 모서리 114">
+            <a:extLst>
+              <a:ext uri="{FF2B5EF4-FFF2-40B4-BE49-F238E27FC236}">
+                <a16:creationId xmlns:a16="http://schemas.microsoft.com/office/drawing/2014/main" id="{D42DB8FC-46FF-8EA4-05D4-E94882804DD0}"/>
+              </a:ext>
+            </a:extLst>
+          </p:cNvPr>
+          <p:cNvSpPr/>
+          <p:nvPr/>
+        </p:nvSpPr>
+        <p:spPr>
+          <a:xfrm>
+            <a:off x="2369518" y="488998"/>
+            <a:ext cx="2486761" cy="1662236"/>
+          </a:xfrm>
+          <a:prstGeom prst="roundRect">
+            <a:avLst>
+              <a:gd name="adj" fmla="val 4028"/>
+            </a:avLst>
+          </a:prstGeom>
+          <a:ln w="12700"/>
+        </p:spPr>
+        <p:style>
+          <a:lnRef idx="2">
+            <a:schemeClr val="dk1"/>
+          </a:lnRef>
+          <a:fillRef idx="1">
+            <a:schemeClr val="lt1"/>
+          </a:fillRef>
+          <a:effectRef idx="0">
+            <a:schemeClr val="dk1"/>
+          </a:effectRef>
+          <a:fontRef idx="minor">
+            <a:schemeClr val="dk1"/>
+          </a:fontRef>
+        </p:style>
+        <p:txBody>
+          <a:bodyPr rtlCol="0" anchor="t"/>
+          <a:lstStyle/>
+          <a:p>
+            <a:pPr algn="ctr"/>
+            <a:r>
+              <a:rPr lang="en-US" altLang="ko-KR" sz="1000" b="1"/>
+              <a:t>Container B</a:t>
+            </a:r>
+            <a:endParaRPr lang="ko-KR" altLang="en-US" sz="1000" b="1" dirty="0">
+              <a:solidFill>
+                <a:schemeClr val="accent2">
+                  <a:lumMod val="75000"/>
+                </a:schemeClr>
+              </a:solidFill>
+            </a:endParaRPr>
+          </a:p>
+        </p:txBody>
+      </p:sp>
+      <p:sp>
+        <p:nvSpPr>
+          <p:cNvPr id="16" name="사각형: 둥근 모서리 114">
+            <a:extLst>
+              <a:ext uri="{FF2B5EF4-FFF2-40B4-BE49-F238E27FC236}">
+                <a16:creationId xmlns:a16="http://schemas.microsoft.com/office/drawing/2014/main" id="{7E7AAEF7-594E-6DBC-EE7E-C6582608F364}"/>
+              </a:ext>
+            </a:extLst>
+          </p:cNvPr>
+          <p:cNvSpPr/>
+          <p:nvPr/>
+        </p:nvSpPr>
+        <p:spPr>
+          <a:xfrm>
+            <a:off x="2457252" y="1683025"/>
+            <a:ext cx="1099999" cy="383228"/>
+          </a:xfrm>
+          <a:prstGeom prst="roundRect">
+            <a:avLst>
+              <a:gd name="adj" fmla="val 7242"/>
+            </a:avLst>
+          </a:prstGeom>
+          <a:solidFill>
+            <a:schemeClr val="bg1">
+              <a:lumMod val="95000"/>
+            </a:schemeClr>
+          </a:solidFill>
+          <a:ln w="12700"/>
+        </p:spPr>
+        <p:style>
+          <a:lnRef idx="2">
+            <a:schemeClr val="dk1"/>
+          </a:lnRef>
+          <a:fillRef idx="1">
+            <a:schemeClr val="lt1"/>
+          </a:fillRef>
+          <a:effectRef idx="0">
+            <a:schemeClr val="dk1"/>
+          </a:effectRef>
+          <a:fontRef idx="minor">
+            <a:schemeClr val="dk1"/>
+          </a:fontRef>
+        </p:style>
+        <p:txBody>
+          <a:bodyPr rtlCol="0" anchor="ctr"/>
+          <a:lstStyle/>
+          <a:p>
+            <a:pPr algn="ctr"/>
+            <a:r>
+              <a:rPr lang="en-US" altLang="ko-KR" sz="1000"/>
+              <a:t>/dev/nvidia1</a:t>
+            </a:r>
+            <a:endParaRPr lang="en-US" altLang="ko-KR" sz="1000" dirty="0"/>
+          </a:p>
+        </p:txBody>
+      </p:sp>
+      <p:sp>
+        <p:nvSpPr>
+          <p:cNvPr id="17" name="사각형: 둥근 모서리 114">
+            <a:extLst>
+              <a:ext uri="{FF2B5EF4-FFF2-40B4-BE49-F238E27FC236}">
+                <a16:creationId xmlns:a16="http://schemas.microsoft.com/office/drawing/2014/main" id="{3E9D1CF0-B755-70B7-FD3F-080C3E9A91BE}"/>
+              </a:ext>
+            </a:extLst>
+          </p:cNvPr>
+          <p:cNvSpPr/>
+          <p:nvPr/>
+        </p:nvSpPr>
+        <p:spPr>
+          <a:xfrm>
+            <a:off x="3658852" y="1683025"/>
+            <a:ext cx="1099868" cy="383228"/>
+          </a:xfrm>
+          <a:prstGeom prst="roundRect">
+            <a:avLst>
+              <a:gd name="adj" fmla="val 7242"/>
+            </a:avLst>
+          </a:prstGeom>
+          <a:solidFill>
+            <a:schemeClr val="bg1">
+              <a:lumMod val="95000"/>
+            </a:schemeClr>
+          </a:solidFill>
+          <a:ln w="12700"/>
+        </p:spPr>
+        <p:style>
+          <a:lnRef idx="2">
+            <a:schemeClr val="dk1"/>
+          </a:lnRef>
+          <a:fillRef idx="1">
+            <a:schemeClr val="lt1"/>
+          </a:fillRef>
+          <a:effectRef idx="0">
+            <a:schemeClr val="dk1"/>
+          </a:effectRef>
+          <a:fontRef idx="minor">
+            <a:schemeClr val="dk1"/>
+          </a:fontRef>
+        </p:style>
+        <p:txBody>
+          <a:bodyPr rtlCol="0" anchor="ctr"/>
+          <a:lstStyle/>
+          <a:p>
+            <a:pPr algn="ctr"/>
+            <a:r>
+              <a:rPr lang="en-US" altLang="ko-KR" sz="1000"/>
+              <a:t>/dev/nvidia2</a:t>
+            </a:r>
+            <a:endParaRPr lang="en-US" altLang="ko-KR" sz="1000" dirty="0"/>
+          </a:p>
+        </p:txBody>
+      </p:sp>
+      <p:sp>
+        <p:nvSpPr>
+          <p:cNvPr id="30" name="사각형: 둥근 모서리 114">
+            <a:extLst>
+              <a:ext uri="{FF2B5EF4-FFF2-40B4-BE49-F238E27FC236}">
+                <a16:creationId xmlns:a16="http://schemas.microsoft.com/office/drawing/2014/main" id="{0B4A498C-1798-041C-1394-712AEB512AC4}"/>
+              </a:ext>
+            </a:extLst>
+          </p:cNvPr>
+          <p:cNvSpPr/>
+          <p:nvPr/>
+        </p:nvSpPr>
+        <p:spPr>
+          <a:xfrm>
+            <a:off x="2457252" y="1212700"/>
+            <a:ext cx="2301467" cy="383228"/>
+          </a:xfrm>
+          <a:prstGeom prst="roundRect">
+            <a:avLst>
+              <a:gd name="adj" fmla="val 7242"/>
+            </a:avLst>
+          </a:prstGeom>
+          <a:solidFill>
+            <a:schemeClr val="bg2">
+              <a:lumMod val="90000"/>
+            </a:schemeClr>
+          </a:solidFill>
+          <a:ln w="12700"/>
+        </p:spPr>
+        <p:style>
+          <a:lnRef idx="2">
+            <a:schemeClr val="dk1"/>
+          </a:lnRef>
+          <a:fillRef idx="1">
+            <a:schemeClr val="lt1"/>
+          </a:fillRef>
+          <a:effectRef idx="0">
+            <a:schemeClr val="dk1"/>
+          </a:effectRef>
+          <a:fontRef idx="minor">
+            <a:schemeClr val="dk1"/>
+          </a:fontRef>
+        </p:style>
+        <p:txBody>
+          <a:bodyPr rtlCol="0" anchor="ctr"/>
+          <a:lstStyle/>
+          <a:p>
+            <a:pPr algn="ctr"/>
+            <a:r>
+              <a:rPr lang="en-US" altLang="ko-KR" sz="900"/>
+              <a:t>NVIDIA CUDA Lib/Toolkit</a:t>
+            </a:r>
+            <a:endParaRPr lang="en-US" altLang="ko-KR" sz="900" dirty="0"/>
+          </a:p>
+        </p:txBody>
+      </p:sp>
+      <p:sp>
+        <p:nvSpPr>
+          <p:cNvPr id="31" name="사각형: 둥근 모서리 114">
+            <a:extLst>
+              <a:ext uri="{FF2B5EF4-FFF2-40B4-BE49-F238E27FC236}">
+                <a16:creationId xmlns:a16="http://schemas.microsoft.com/office/drawing/2014/main" id="{EFB47FA2-2D73-823C-A562-231238381D47}"/>
+              </a:ext>
+            </a:extLst>
+          </p:cNvPr>
+          <p:cNvSpPr/>
+          <p:nvPr/>
+        </p:nvSpPr>
+        <p:spPr>
+          <a:xfrm>
+            <a:off x="2457252" y="761549"/>
+            <a:ext cx="2301467" cy="383228"/>
+          </a:xfrm>
+          <a:prstGeom prst="roundRect">
+            <a:avLst>
+              <a:gd name="adj" fmla="val 7242"/>
+            </a:avLst>
+          </a:prstGeom>
+          <a:ln w="12700"/>
+        </p:spPr>
+        <p:style>
+          <a:lnRef idx="2">
+            <a:schemeClr val="dk1"/>
+          </a:lnRef>
+          <a:fillRef idx="1">
+            <a:schemeClr val="lt1"/>
+          </a:fillRef>
+          <a:effectRef idx="0">
+            <a:schemeClr val="dk1"/>
+          </a:effectRef>
+          <a:fontRef idx="minor">
+            <a:schemeClr val="dk1"/>
+          </a:fontRef>
+        </p:style>
+        <p:txBody>
+          <a:bodyPr rtlCol="0" anchor="ctr"/>
+          <a:lstStyle/>
+          <a:p>
+            <a:pPr algn="ctr"/>
+            <a:r>
+              <a:rPr lang="en-US" altLang="ko-KR" sz="900"/>
+              <a:t>App with </a:t>
+            </a:r>
+          </a:p>
+          <a:p>
+            <a:pPr algn="ctr"/>
+            <a:r>
+              <a:rPr lang="en-US" altLang="ko-KR" sz="900"/>
+              <a:t>NVIDIA_VISIBLE_DEVICES Env  </a:t>
+            </a:r>
+            <a:endParaRPr lang="en-US" altLang="ko-KR" sz="900" dirty="0"/>
+          </a:p>
+        </p:txBody>
+      </p:sp>
+      <p:sp>
+        <p:nvSpPr>
+          <p:cNvPr id="32" name="사각형: 둥근 모서리 114">
+            <a:extLst>
+              <a:ext uri="{FF2B5EF4-FFF2-40B4-BE49-F238E27FC236}">
+                <a16:creationId xmlns:a16="http://schemas.microsoft.com/office/drawing/2014/main" id="{76CFCD15-24EF-7548-B404-9A53ED66F270}"/>
+              </a:ext>
+            </a:extLst>
+          </p:cNvPr>
+          <p:cNvSpPr/>
+          <p:nvPr/>
+        </p:nvSpPr>
+        <p:spPr>
+          <a:xfrm>
+            <a:off x="949353" y="483518"/>
+            <a:ext cx="1274717" cy="1662236"/>
+          </a:xfrm>
+          <a:prstGeom prst="roundRect">
+            <a:avLst>
+              <a:gd name="adj" fmla="val 4159"/>
+            </a:avLst>
+          </a:prstGeom>
+          <a:ln w="12700"/>
+        </p:spPr>
+        <p:style>
+          <a:lnRef idx="2">
+            <a:schemeClr val="dk1"/>
+          </a:lnRef>
+          <a:fillRef idx="1">
+            <a:schemeClr val="lt1"/>
+          </a:fillRef>
+          <a:effectRef idx="0">
+            <a:schemeClr val="dk1"/>
+          </a:effectRef>
+          <a:fontRef idx="minor">
+            <a:schemeClr val="dk1"/>
+          </a:fontRef>
+        </p:style>
+        <p:txBody>
+          <a:bodyPr rtlCol="0" anchor="t"/>
+          <a:lstStyle/>
+          <a:p>
+            <a:pPr algn="ctr"/>
+            <a:r>
+              <a:rPr lang="en-US" altLang="ko-KR" sz="1000" b="1"/>
+              <a:t>Container A</a:t>
+            </a:r>
+            <a:endParaRPr lang="ko-KR" altLang="en-US" sz="1000" b="1" dirty="0">
+              <a:solidFill>
+                <a:schemeClr val="accent2">
+                  <a:lumMod val="75000"/>
+                </a:schemeClr>
+              </a:solidFill>
+            </a:endParaRPr>
+          </a:p>
+        </p:txBody>
+      </p:sp>
+      <p:sp>
+        <p:nvSpPr>
+          <p:cNvPr id="33" name="사각형: 둥근 모서리 114">
+            <a:extLst>
+              <a:ext uri="{FF2B5EF4-FFF2-40B4-BE49-F238E27FC236}">
+                <a16:creationId xmlns:a16="http://schemas.microsoft.com/office/drawing/2014/main" id="{BC3FE4D3-C72A-1000-8301-C7B8FB3E3A5E}"/>
+              </a:ext>
+            </a:extLst>
+          </p:cNvPr>
+          <p:cNvSpPr/>
+          <p:nvPr/>
+        </p:nvSpPr>
+        <p:spPr>
+          <a:xfrm>
+            <a:off x="1035199" y="1673181"/>
+            <a:ext cx="1098712" cy="383228"/>
+          </a:xfrm>
+          <a:prstGeom prst="roundRect">
+            <a:avLst>
+              <a:gd name="adj" fmla="val 7242"/>
+            </a:avLst>
+          </a:prstGeom>
+          <a:solidFill>
+            <a:schemeClr val="bg1">
+              <a:lumMod val="95000"/>
+            </a:schemeClr>
+          </a:solidFill>
+          <a:ln w="12700"/>
+        </p:spPr>
+        <p:style>
+          <a:lnRef idx="2">
+            <a:schemeClr val="dk1"/>
+          </a:lnRef>
+          <a:fillRef idx="1">
+            <a:schemeClr val="lt1"/>
+          </a:fillRef>
+          <a:effectRef idx="0">
+            <a:schemeClr val="dk1"/>
+          </a:effectRef>
+          <a:fontRef idx="minor">
+            <a:schemeClr val="dk1"/>
+          </a:fontRef>
+        </p:style>
+        <p:txBody>
+          <a:bodyPr rtlCol="0" anchor="ctr"/>
+          <a:lstStyle/>
+          <a:p>
+            <a:pPr algn="ctr"/>
+            <a:r>
+              <a:rPr lang="en-US" altLang="ko-KR" sz="1000"/>
+              <a:t>/dev/nvidia0</a:t>
+            </a:r>
+            <a:endParaRPr lang="en-US" altLang="ko-KR" sz="1000" dirty="0"/>
+          </a:p>
+        </p:txBody>
+      </p:sp>
+      <p:sp>
+        <p:nvSpPr>
+          <p:cNvPr id="34" name="사각형: 둥근 모서리 114">
+            <a:extLst>
+              <a:ext uri="{FF2B5EF4-FFF2-40B4-BE49-F238E27FC236}">
+                <a16:creationId xmlns:a16="http://schemas.microsoft.com/office/drawing/2014/main" id="{E000AD8B-F5C1-BF88-3A91-63FCBF934725}"/>
+              </a:ext>
+            </a:extLst>
+          </p:cNvPr>
+          <p:cNvSpPr/>
+          <p:nvPr/>
+        </p:nvSpPr>
+        <p:spPr>
+          <a:xfrm>
+            <a:off x="1035198" y="1202855"/>
+            <a:ext cx="1098711" cy="383228"/>
+          </a:xfrm>
+          <a:prstGeom prst="roundRect">
+            <a:avLst>
+              <a:gd name="adj" fmla="val 7242"/>
+            </a:avLst>
+          </a:prstGeom>
+          <a:solidFill>
+            <a:schemeClr val="bg2">
+              <a:lumMod val="90000"/>
+            </a:schemeClr>
+          </a:solidFill>
+          <a:ln w="12700"/>
+        </p:spPr>
+        <p:style>
+          <a:lnRef idx="2">
+            <a:schemeClr val="dk1"/>
+          </a:lnRef>
+          <a:fillRef idx="1">
+            <a:schemeClr val="lt1"/>
+          </a:fillRef>
+          <a:effectRef idx="0">
+            <a:schemeClr val="dk1"/>
+          </a:effectRef>
+          <a:fontRef idx="minor">
+            <a:schemeClr val="dk1"/>
+          </a:fontRef>
+        </p:style>
+        <p:txBody>
+          <a:bodyPr rtlCol="0" anchor="ctr"/>
+          <a:lstStyle/>
+          <a:p>
+            <a:pPr algn="ctr"/>
+            <a:r>
+              <a:rPr lang="en-US" altLang="ko-KR" sz="900"/>
+              <a:t>NVIDIA CUDA Lib/Toolkit</a:t>
+            </a:r>
+            <a:endParaRPr lang="en-US" altLang="ko-KR" sz="900" dirty="0"/>
+          </a:p>
+        </p:txBody>
+      </p:sp>
+      <p:sp>
+        <p:nvSpPr>
+          <p:cNvPr id="35" name="사각형: 둥근 모서리 114">
+            <a:extLst>
+              <a:ext uri="{FF2B5EF4-FFF2-40B4-BE49-F238E27FC236}">
+                <a16:creationId xmlns:a16="http://schemas.microsoft.com/office/drawing/2014/main" id="{627AE33A-F183-41B4-E88E-CCDA13D826AC}"/>
+              </a:ext>
+            </a:extLst>
+          </p:cNvPr>
+          <p:cNvSpPr/>
+          <p:nvPr/>
+        </p:nvSpPr>
+        <p:spPr>
+          <a:xfrm>
+            <a:off x="1035198" y="757184"/>
+            <a:ext cx="1098712" cy="383228"/>
+          </a:xfrm>
+          <a:prstGeom prst="roundRect">
+            <a:avLst>
+              <a:gd name="adj" fmla="val 7242"/>
+            </a:avLst>
+          </a:prstGeom>
+          <a:ln w="12700"/>
+        </p:spPr>
+        <p:style>
+          <a:lnRef idx="2">
+            <a:schemeClr val="dk1"/>
+          </a:lnRef>
+          <a:fillRef idx="1">
+            <a:schemeClr val="lt1"/>
+          </a:fillRef>
+          <a:effectRef idx="0">
+            <a:schemeClr val="dk1"/>
+          </a:effectRef>
+          <a:fontRef idx="minor">
+            <a:schemeClr val="dk1"/>
+          </a:fontRef>
+        </p:style>
+        <p:txBody>
+          <a:bodyPr rtlCol="0" anchor="ctr"/>
+          <a:lstStyle/>
+          <a:p>
+            <a:pPr algn="ctr"/>
+            <a:r>
+              <a:rPr lang="en-US" altLang="ko-KR" sz="900"/>
+              <a:t>App with </a:t>
+            </a:r>
+          </a:p>
+          <a:p>
+            <a:pPr algn="ctr"/>
+            <a:r>
+              <a:rPr lang="en-US" altLang="ko-KR" sz="900"/>
+              <a:t>NVIDIA_VISIBLE_</a:t>
+            </a:r>
+            <a:br>
+              <a:rPr lang="en-US" altLang="ko-KR" sz="900"/>
+            </a:br>
+            <a:r>
+              <a:rPr lang="en-US" altLang="ko-KR" sz="900"/>
+              <a:t>DEVICES Env  </a:t>
+            </a:r>
+            <a:endParaRPr lang="en-US" altLang="ko-KR" sz="900" dirty="0"/>
+          </a:p>
+        </p:txBody>
+      </p:sp>
+    </p:spTree>
+    <p:extLst>
+      <p:ext uri="{BB962C8B-B14F-4D97-AF65-F5344CB8AC3E}">
+        <p14:creationId xmlns:p14="http://schemas.microsoft.com/office/powerpoint/2010/main" val="1378119387"/>
+      </p:ext>
+    </p:extLst>
+  </p:cSld>
+  <p:clrMapOvr>
+    <a:masterClrMapping/>
+  </p:clrMapOvr>
+</p:sld>
+</file>
+
+<file path=ppt/slides/slide5.xml><?xml version="1.0" encoding="utf-8"?>
+<p:sld xmlns:a="http://schemas.openxmlformats.org/drawingml/2006/main" xmlns:r="http://schemas.openxmlformats.org/officeDocument/2006/relationships" xmlns:p="http://schemas.openxmlformats.org/presentationml/2006/main">
+  <p:cSld>
+    <p:spTree>
+      <p:nvGrpSpPr>
+        <p:cNvPr id="1" name="">
+          <a:extLst>
+            <a:ext uri="{FF2B5EF4-FFF2-40B4-BE49-F238E27FC236}">
               <a16:creationId xmlns:a16="http://schemas.microsoft.com/office/drawing/2014/main" id="{DE729654-FCDE-BE44-D146-40F0538EAF67}"/>
             </a:ext>
           </a:extLst>
@@ -11355,7 +14800,7 @@
 </p:sld>
 </file>
 
-<file path=ppt/slides/slide5.xml><?xml version="1.0" encoding="utf-8"?>
+<file path=ppt/slides/slide6.xml><?xml version="1.0" encoding="utf-8"?>
 <p:sld xmlns:a="http://schemas.openxmlformats.org/drawingml/2006/main" xmlns:r="http://schemas.openxmlformats.org/officeDocument/2006/relationships" xmlns:p="http://schemas.openxmlformats.org/presentationml/2006/main">
   <p:cSld>
     <p:spTree>
@@ -13644,7 +17089,7 @@
 </p:sld>
 </file>
 
-<file path=ppt/slides/slide6.xml><?xml version="1.0" encoding="utf-8"?>
+<file path=ppt/slides/slide7.xml><?xml version="1.0" encoding="utf-8"?>
 <p:sld xmlns:a="http://schemas.openxmlformats.org/drawingml/2006/main" xmlns:r="http://schemas.openxmlformats.org/officeDocument/2006/relationships" xmlns:p="http://schemas.openxmlformats.org/presentationml/2006/main">
   <p:cSld>
     <p:spTree>
@@ -15933,7 +19378,7 @@
 </p:sld>
 </file>
 
-<file path=ppt/slides/slide7.xml><?xml version="1.0" encoding="utf-8"?>
+<file path=ppt/slides/slide8.xml><?xml version="1.0" encoding="utf-8"?>
 <p:sld xmlns:a="http://schemas.openxmlformats.org/drawingml/2006/main" xmlns:r="http://schemas.openxmlformats.org/officeDocument/2006/relationships" xmlns:p="http://schemas.openxmlformats.org/presentationml/2006/main">
   <p:cSld>
     <p:spTree>
@@ -18195,7 +21640,7 @@
 </p:sld>
 </file>
 
-<file path=ppt/slides/slide8.xml><?xml version="1.0" encoding="utf-8"?>
+<file path=ppt/slides/slide9.xml><?xml version="1.0" encoding="utf-8"?>
 <p:sld xmlns:a="http://schemas.openxmlformats.org/drawingml/2006/main" xmlns:r="http://schemas.openxmlformats.org/officeDocument/2006/relationships" xmlns:p="http://schemas.openxmlformats.org/presentationml/2006/main">
   <p:cSld>
     <p:spTree>
@@ -19923,1863 +23368,6 @@
     <p:extLst>
       <p:ext uri="{BB962C8B-B14F-4D97-AF65-F5344CB8AC3E}">
         <p14:creationId xmlns:p14="http://schemas.microsoft.com/office/powerpoint/2010/main" val="4128312749"/>
-      </p:ext>
-    </p:extLst>
-  </p:cSld>
-  <p:clrMapOvr>
-    <a:masterClrMapping/>
-  </p:clrMapOvr>
-</p:sld>
-</file>
-
-<file path=ppt/slides/slide9.xml><?xml version="1.0" encoding="utf-8"?>
-<p:sld xmlns:a="http://schemas.openxmlformats.org/drawingml/2006/main" xmlns:r="http://schemas.openxmlformats.org/officeDocument/2006/relationships" xmlns:p="http://schemas.openxmlformats.org/presentationml/2006/main">
-  <p:cSld>
-    <p:spTree>
-      <p:nvGrpSpPr>
-        <p:cNvPr id="1" name="">
-          <a:extLst>
-            <a:ext uri="{FF2B5EF4-FFF2-40B4-BE49-F238E27FC236}">
-              <a16:creationId xmlns:a16="http://schemas.microsoft.com/office/drawing/2014/main" id="{12A0DA45-FFE6-20D2-57EF-B9DC71216731}"/>
-            </a:ext>
-          </a:extLst>
-        </p:cNvPr>
-        <p:cNvGrpSpPr/>
-        <p:nvPr/>
-      </p:nvGrpSpPr>
-      <p:grpSpPr>
-        <a:xfrm>
-          <a:off x="0" y="0"/>
-          <a:ext cx="0" cy="0"/>
-          <a:chOff x="0" y="0"/>
-          <a:chExt cx="0" cy="0"/>
-        </a:xfrm>
-      </p:grpSpPr>
-      <p:sp>
-        <p:nvSpPr>
-          <p:cNvPr id="33" name="사각형: 둥근 모서리 114">
-            <a:extLst>
-              <a:ext uri="{FF2B5EF4-FFF2-40B4-BE49-F238E27FC236}">
-                <a16:creationId xmlns:a16="http://schemas.microsoft.com/office/drawing/2014/main" id="{EFE877C4-66CF-A466-BBDA-C110A5F992AE}"/>
-              </a:ext>
-            </a:extLst>
-          </p:cNvPr>
-          <p:cNvSpPr/>
-          <p:nvPr/>
-        </p:nvSpPr>
-        <p:spPr>
-          <a:xfrm>
-            <a:off x="4452121" y="843557"/>
-            <a:ext cx="1665290" cy="1709575"/>
-          </a:xfrm>
-          <a:prstGeom prst="roundRect">
-            <a:avLst>
-              <a:gd name="adj" fmla="val 3914"/>
-            </a:avLst>
-          </a:prstGeom>
-          <a:ln w="12700"/>
-        </p:spPr>
-        <p:style>
-          <a:lnRef idx="2">
-            <a:schemeClr val="dk1"/>
-          </a:lnRef>
-          <a:fillRef idx="1">
-            <a:schemeClr val="lt1"/>
-          </a:fillRef>
-          <a:effectRef idx="0">
-            <a:schemeClr val="dk1"/>
-          </a:effectRef>
-          <a:fontRef idx="minor">
-            <a:schemeClr val="dk1"/>
-          </a:fontRef>
-        </p:style>
-        <p:txBody>
-          <a:bodyPr rtlCol="0" anchor="t"/>
-          <a:lstStyle/>
-          <a:p>
-            <a:pPr algn="ctr"/>
-            <a:r>
-              <a:rPr lang="en-US" altLang="ko-KR" sz="1000" b="1"/>
-              <a:t>Pod B</a:t>
-            </a:r>
-            <a:endParaRPr lang="ko-KR" altLang="en-US" sz="1000" b="1" dirty="0">
-              <a:solidFill>
-                <a:schemeClr val="accent2">
-                  <a:lumMod val="75000"/>
-                </a:schemeClr>
-              </a:solidFill>
-            </a:endParaRPr>
-          </a:p>
-        </p:txBody>
-      </p:sp>
-      <p:sp>
-        <p:nvSpPr>
-          <p:cNvPr id="28" name="사각형: 둥근 모서리 114">
-            <a:extLst>
-              <a:ext uri="{FF2B5EF4-FFF2-40B4-BE49-F238E27FC236}">
-                <a16:creationId xmlns:a16="http://schemas.microsoft.com/office/drawing/2014/main" id="{990BBAE9-CBD1-9942-AE8D-DC8358E04673}"/>
-              </a:ext>
-            </a:extLst>
-          </p:cNvPr>
-          <p:cNvSpPr/>
-          <p:nvPr/>
-        </p:nvSpPr>
-        <p:spPr>
-          <a:xfrm>
-            <a:off x="79063" y="843557"/>
-            <a:ext cx="4092354" cy="1709575"/>
-          </a:xfrm>
-          <a:prstGeom prst="roundRect">
-            <a:avLst>
-              <a:gd name="adj" fmla="val 4284"/>
-            </a:avLst>
-          </a:prstGeom>
-          <a:ln w="12700"/>
-        </p:spPr>
-        <p:style>
-          <a:lnRef idx="2">
-            <a:schemeClr val="dk1"/>
-          </a:lnRef>
-          <a:fillRef idx="1">
-            <a:schemeClr val="lt1"/>
-          </a:fillRef>
-          <a:effectRef idx="0">
-            <a:schemeClr val="dk1"/>
-          </a:effectRef>
-          <a:fontRef idx="minor">
-            <a:schemeClr val="dk1"/>
-          </a:fontRef>
-        </p:style>
-        <p:txBody>
-          <a:bodyPr rtlCol="0" anchor="t"/>
-          <a:lstStyle/>
-          <a:p>
-            <a:pPr algn="ctr"/>
-            <a:r>
-              <a:rPr lang="en-US" altLang="ko-KR" sz="1000" b="1"/>
-              <a:t>Pod A</a:t>
-            </a:r>
-            <a:endParaRPr lang="ko-KR" altLang="en-US" sz="1000" b="1" dirty="0">
-              <a:solidFill>
-                <a:schemeClr val="accent2">
-                  <a:lumMod val="75000"/>
-                </a:schemeClr>
-              </a:solidFill>
-            </a:endParaRPr>
-          </a:p>
-        </p:txBody>
-      </p:sp>
-      <p:sp>
-        <p:nvSpPr>
-          <p:cNvPr id="2" name="사각형: 둥근 모서리 114">
-            <a:extLst>
-              <a:ext uri="{FF2B5EF4-FFF2-40B4-BE49-F238E27FC236}">
-                <a16:creationId xmlns:a16="http://schemas.microsoft.com/office/drawing/2014/main" id="{B0160E73-56A0-D29E-F984-848864432BD9}"/>
-              </a:ext>
-            </a:extLst>
-          </p:cNvPr>
-          <p:cNvSpPr/>
-          <p:nvPr/>
-        </p:nvSpPr>
-        <p:spPr>
-          <a:xfrm>
-            <a:off x="84225" y="3507854"/>
-            <a:ext cx="6033186" cy="976265"/>
-          </a:xfrm>
-          <a:prstGeom prst="roundRect">
-            <a:avLst>
-              <a:gd name="adj" fmla="val 6397"/>
-            </a:avLst>
-          </a:prstGeom>
-          <a:ln w="12700"/>
-        </p:spPr>
-        <p:style>
-          <a:lnRef idx="2">
-            <a:schemeClr val="dk1"/>
-          </a:lnRef>
-          <a:fillRef idx="1">
-            <a:schemeClr val="lt1"/>
-          </a:fillRef>
-          <a:effectRef idx="0">
-            <a:schemeClr val="dk1"/>
-          </a:effectRef>
-          <a:fontRef idx="minor">
-            <a:schemeClr val="dk1"/>
-          </a:fontRef>
-        </p:style>
-        <p:txBody>
-          <a:bodyPr rtlCol="0" anchor="b"/>
-          <a:lstStyle/>
-          <a:p>
-            <a:pPr algn="ctr"/>
-            <a:r>
-              <a:rPr lang="en-US" altLang="ko-KR" sz="1000" b="1"/>
-              <a:t>Host Hardware</a:t>
-            </a:r>
-            <a:endParaRPr lang="en-US" altLang="ko-KR" sz="1000" b="1" dirty="0"/>
-          </a:p>
-        </p:txBody>
-      </p:sp>
-      <p:sp>
-        <p:nvSpPr>
-          <p:cNvPr id="3" name="사각형: 둥근 모서리 114">
-            <a:extLst>
-              <a:ext uri="{FF2B5EF4-FFF2-40B4-BE49-F238E27FC236}">
-                <a16:creationId xmlns:a16="http://schemas.microsoft.com/office/drawing/2014/main" id="{19B8C55D-9759-1216-90A7-4060BD798FB4}"/>
-              </a:ext>
-            </a:extLst>
-          </p:cNvPr>
-          <p:cNvSpPr/>
-          <p:nvPr/>
-        </p:nvSpPr>
-        <p:spPr>
-          <a:xfrm>
-            <a:off x="79063" y="2659010"/>
-            <a:ext cx="6043510" cy="855136"/>
-          </a:xfrm>
-          <a:prstGeom prst="roundRect">
-            <a:avLst>
-              <a:gd name="adj" fmla="val 4167"/>
-            </a:avLst>
-          </a:prstGeom>
-          <a:ln w="12700"/>
-        </p:spPr>
-        <p:style>
-          <a:lnRef idx="2">
-            <a:schemeClr val="dk1"/>
-          </a:lnRef>
-          <a:fillRef idx="1">
-            <a:schemeClr val="lt1"/>
-          </a:fillRef>
-          <a:effectRef idx="0">
-            <a:schemeClr val="dk1"/>
-          </a:effectRef>
-          <a:fontRef idx="minor">
-            <a:schemeClr val="dk1"/>
-          </a:fontRef>
-        </p:style>
-        <p:txBody>
-          <a:bodyPr rtlCol="0" anchor="b"/>
-          <a:lstStyle/>
-          <a:p>
-            <a:pPr algn="ctr"/>
-            <a:r>
-              <a:rPr lang="en-US" altLang="ko-KR" sz="1000" b="1"/>
-              <a:t>Host Kernel</a:t>
-            </a:r>
-            <a:endParaRPr lang="en-US" altLang="ko-KR" sz="1000" b="1" dirty="0"/>
-          </a:p>
-        </p:txBody>
-      </p:sp>
-      <p:sp>
-        <p:nvSpPr>
-          <p:cNvPr id="4" name="사각형: 둥근 모서리 114">
-            <a:extLst>
-              <a:ext uri="{FF2B5EF4-FFF2-40B4-BE49-F238E27FC236}">
-                <a16:creationId xmlns:a16="http://schemas.microsoft.com/office/drawing/2014/main" id="{7428988E-C06C-5498-D7AC-C92B54858738}"/>
-              </a:ext>
-            </a:extLst>
-          </p:cNvPr>
-          <p:cNvSpPr/>
-          <p:nvPr/>
-        </p:nvSpPr>
-        <p:spPr>
-          <a:xfrm>
-            <a:off x="672185" y="3620023"/>
-            <a:ext cx="1077331" cy="576064"/>
-          </a:xfrm>
-          <a:prstGeom prst="roundRect">
-            <a:avLst>
-              <a:gd name="adj" fmla="val 7242"/>
-            </a:avLst>
-          </a:prstGeom>
-          <a:ln w="12700"/>
-        </p:spPr>
-        <p:style>
-          <a:lnRef idx="2">
-            <a:schemeClr val="dk1"/>
-          </a:lnRef>
-          <a:fillRef idx="1">
-            <a:schemeClr val="lt1"/>
-          </a:fillRef>
-          <a:effectRef idx="0">
-            <a:schemeClr val="dk1"/>
-          </a:effectRef>
-          <a:fontRef idx="minor">
-            <a:schemeClr val="dk1"/>
-          </a:fontRef>
-        </p:style>
-        <p:txBody>
-          <a:bodyPr rtlCol="0" anchor="ctr"/>
-          <a:lstStyle/>
-          <a:p>
-            <a:pPr algn="ctr"/>
-            <a:r>
-              <a:rPr lang="en-US" altLang="ko-KR" sz="1000"/>
-              <a:t>NVIDIA</a:t>
-            </a:r>
-          </a:p>
-          <a:p>
-            <a:pPr algn="ctr"/>
-            <a:r>
-              <a:rPr lang="en-US" altLang="ko-KR" sz="1000"/>
-              <a:t>GPU 0</a:t>
-            </a:r>
-            <a:endParaRPr lang="en-US" altLang="ko-KR" sz="1000" dirty="0"/>
-          </a:p>
-        </p:txBody>
-      </p:sp>
-      <p:sp>
-        <p:nvSpPr>
-          <p:cNvPr id="5" name="사각형: 둥근 모서리 114">
-            <a:extLst>
-              <a:ext uri="{FF2B5EF4-FFF2-40B4-BE49-F238E27FC236}">
-                <a16:creationId xmlns:a16="http://schemas.microsoft.com/office/drawing/2014/main" id="{28A41BF5-6288-F66D-6B18-A1C27C57BCD2}"/>
-              </a:ext>
-            </a:extLst>
-          </p:cNvPr>
-          <p:cNvSpPr/>
-          <p:nvPr/>
-        </p:nvSpPr>
-        <p:spPr>
-          <a:xfrm>
-            <a:off x="1932164" y="3620023"/>
-            <a:ext cx="1077331" cy="576064"/>
-          </a:xfrm>
-          <a:prstGeom prst="roundRect">
-            <a:avLst>
-              <a:gd name="adj" fmla="val 7242"/>
-            </a:avLst>
-          </a:prstGeom>
-          <a:ln w="12700"/>
-        </p:spPr>
-        <p:style>
-          <a:lnRef idx="2">
-            <a:schemeClr val="dk1"/>
-          </a:lnRef>
-          <a:fillRef idx="1">
-            <a:schemeClr val="lt1"/>
-          </a:fillRef>
-          <a:effectRef idx="0">
-            <a:schemeClr val="dk1"/>
-          </a:effectRef>
-          <a:fontRef idx="minor">
-            <a:schemeClr val="dk1"/>
-          </a:fontRef>
-        </p:style>
-        <p:txBody>
-          <a:bodyPr rtlCol="0" anchor="ctr"/>
-          <a:lstStyle/>
-          <a:p>
-            <a:pPr algn="ctr"/>
-            <a:r>
-              <a:rPr lang="en-US" altLang="ko-KR" sz="1000"/>
-              <a:t>NVIDIA</a:t>
-            </a:r>
-          </a:p>
-          <a:p>
-            <a:pPr algn="ctr"/>
-            <a:r>
-              <a:rPr lang="en-US" altLang="ko-KR" sz="1000"/>
-              <a:t>GPU 1</a:t>
-            </a:r>
-            <a:endParaRPr lang="en-US" altLang="ko-KR" sz="1000" dirty="0"/>
-          </a:p>
-        </p:txBody>
-      </p:sp>
-      <p:sp>
-        <p:nvSpPr>
-          <p:cNvPr id="6" name="사각형: 둥근 모서리 114">
-            <a:extLst>
-              <a:ext uri="{FF2B5EF4-FFF2-40B4-BE49-F238E27FC236}">
-                <a16:creationId xmlns:a16="http://schemas.microsoft.com/office/drawing/2014/main" id="{AB117318-4CD7-BD97-5351-1F6F61156CD5}"/>
-              </a:ext>
-            </a:extLst>
-          </p:cNvPr>
-          <p:cNvSpPr/>
-          <p:nvPr/>
-        </p:nvSpPr>
-        <p:spPr>
-          <a:xfrm>
-            <a:off x="3192142" y="3620023"/>
-            <a:ext cx="1077331" cy="576064"/>
-          </a:xfrm>
-          <a:prstGeom prst="roundRect">
-            <a:avLst>
-              <a:gd name="adj" fmla="val 7242"/>
-            </a:avLst>
-          </a:prstGeom>
-          <a:ln w="12700"/>
-        </p:spPr>
-        <p:style>
-          <a:lnRef idx="2">
-            <a:schemeClr val="dk1"/>
-          </a:lnRef>
-          <a:fillRef idx="1">
-            <a:schemeClr val="lt1"/>
-          </a:fillRef>
-          <a:effectRef idx="0">
-            <a:schemeClr val="dk1"/>
-          </a:effectRef>
-          <a:fontRef idx="minor">
-            <a:schemeClr val="dk1"/>
-          </a:fontRef>
-        </p:style>
-        <p:txBody>
-          <a:bodyPr rtlCol="0" anchor="ctr"/>
-          <a:lstStyle/>
-          <a:p>
-            <a:pPr algn="ctr"/>
-            <a:r>
-              <a:rPr lang="en-US" altLang="ko-KR" sz="1000"/>
-              <a:t>NVIDIA</a:t>
-            </a:r>
-          </a:p>
-          <a:p>
-            <a:pPr algn="ctr"/>
-            <a:r>
-              <a:rPr lang="en-US" altLang="ko-KR" sz="1000"/>
-              <a:t>GPU 2</a:t>
-            </a:r>
-            <a:endParaRPr lang="en-US" altLang="ko-KR" sz="1000" dirty="0"/>
-          </a:p>
-        </p:txBody>
-      </p:sp>
-      <p:sp>
-        <p:nvSpPr>
-          <p:cNvPr id="7" name="사각형: 둥근 모서리 114">
-            <a:extLst>
-              <a:ext uri="{FF2B5EF4-FFF2-40B4-BE49-F238E27FC236}">
-                <a16:creationId xmlns:a16="http://schemas.microsoft.com/office/drawing/2014/main" id="{C21EA64B-D360-1D11-4ECB-24E796346C00}"/>
-              </a:ext>
-            </a:extLst>
-          </p:cNvPr>
-          <p:cNvSpPr/>
-          <p:nvPr/>
-        </p:nvSpPr>
-        <p:spPr>
-          <a:xfrm>
-            <a:off x="4452121" y="3620023"/>
-            <a:ext cx="1077331" cy="576064"/>
-          </a:xfrm>
-          <a:prstGeom prst="roundRect">
-            <a:avLst>
-              <a:gd name="adj" fmla="val 7242"/>
-            </a:avLst>
-          </a:prstGeom>
-          <a:ln w="12700"/>
-        </p:spPr>
-        <p:style>
-          <a:lnRef idx="2">
-            <a:schemeClr val="dk1"/>
-          </a:lnRef>
-          <a:fillRef idx="1">
-            <a:schemeClr val="lt1"/>
-          </a:fillRef>
-          <a:effectRef idx="0">
-            <a:schemeClr val="dk1"/>
-          </a:effectRef>
-          <a:fontRef idx="minor">
-            <a:schemeClr val="dk1"/>
-          </a:fontRef>
-        </p:style>
-        <p:txBody>
-          <a:bodyPr rtlCol="0" anchor="ctr"/>
-          <a:lstStyle/>
-          <a:p>
-            <a:pPr algn="ctr"/>
-            <a:r>
-              <a:rPr lang="en-US" altLang="ko-KR" sz="1000"/>
-              <a:t>NVIDIA</a:t>
-            </a:r>
-          </a:p>
-          <a:p>
-            <a:pPr algn="ctr"/>
-            <a:r>
-              <a:rPr lang="en-US" altLang="ko-KR" sz="1000"/>
-              <a:t>GPU 3</a:t>
-            </a:r>
-            <a:endParaRPr lang="en-US" altLang="ko-KR" sz="1000" dirty="0"/>
-          </a:p>
-        </p:txBody>
-      </p:sp>
-      <p:sp>
-        <p:nvSpPr>
-          <p:cNvPr id="8" name="사각형: 둥근 모서리 114">
-            <a:extLst>
-              <a:ext uri="{FF2B5EF4-FFF2-40B4-BE49-F238E27FC236}">
-                <a16:creationId xmlns:a16="http://schemas.microsoft.com/office/drawing/2014/main" id="{065A5E74-B440-BA3F-5A07-8CDCDFF2E427}"/>
-              </a:ext>
-            </a:extLst>
-          </p:cNvPr>
-          <p:cNvSpPr/>
-          <p:nvPr/>
-        </p:nvSpPr>
-        <p:spPr>
-          <a:xfrm>
-            <a:off x="186295" y="1209261"/>
-            <a:ext cx="1276737" cy="1265622"/>
-          </a:xfrm>
-          <a:prstGeom prst="roundRect">
-            <a:avLst>
-              <a:gd name="adj" fmla="val 6774"/>
-            </a:avLst>
-          </a:prstGeom>
-          <a:ln w="12700"/>
-        </p:spPr>
-        <p:style>
-          <a:lnRef idx="2">
-            <a:schemeClr val="dk1"/>
-          </a:lnRef>
-          <a:fillRef idx="1">
-            <a:schemeClr val="lt1"/>
-          </a:fillRef>
-          <a:effectRef idx="0">
-            <a:schemeClr val="dk1"/>
-          </a:effectRef>
-          <a:fontRef idx="minor">
-            <a:schemeClr val="dk1"/>
-          </a:fontRef>
-        </p:style>
-        <p:txBody>
-          <a:bodyPr rtlCol="0" anchor="t"/>
-          <a:lstStyle/>
-          <a:p>
-            <a:pPr algn="ctr"/>
-            <a:r>
-              <a:rPr lang="en-US" altLang="ko-KR" sz="1000" b="1"/>
-              <a:t>Container A</a:t>
-            </a:r>
-            <a:endParaRPr lang="ko-KR" altLang="en-US" sz="1000" b="1" dirty="0">
-              <a:solidFill>
-                <a:schemeClr val="accent2">
-                  <a:lumMod val="75000"/>
-                </a:schemeClr>
-              </a:solidFill>
-            </a:endParaRPr>
-          </a:p>
-        </p:txBody>
-      </p:sp>
-      <p:sp>
-        <p:nvSpPr>
-          <p:cNvPr id="9" name="사각형: 둥근 모서리 114">
-            <a:extLst>
-              <a:ext uri="{FF2B5EF4-FFF2-40B4-BE49-F238E27FC236}">
-                <a16:creationId xmlns:a16="http://schemas.microsoft.com/office/drawing/2014/main" id="{769415EB-0A2D-50D7-44F6-1F81A018E10C}"/>
-              </a:ext>
-            </a:extLst>
-          </p:cNvPr>
-          <p:cNvSpPr/>
-          <p:nvPr/>
-        </p:nvSpPr>
-        <p:spPr>
-          <a:xfrm>
-            <a:off x="274029" y="1991019"/>
-            <a:ext cx="1099999" cy="396044"/>
-          </a:xfrm>
-          <a:prstGeom prst="roundRect">
-            <a:avLst>
-              <a:gd name="adj" fmla="val 7242"/>
-            </a:avLst>
-          </a:prstGeom>
-          <a:ln w="12700"/>
-        </p:spPr>
-        <p:style>
-          <a:lnRef idx="2">
-            <a:schemeClr val="dk1"/>
-          </a:lnRef>
-          <a:fillRef idx="1">
-            <a:schemeClr val="lt1"/>
-          </a:fillRef>
-          <a:effectRef idx="0">
-            <a:schemeClr val="dk1"/>
-          </a:effectRef>
-          <a:fontRef idx="minor">
-            <a:schemeClr val="dk1"/>
-          </a:fontRef>
-        </p:style>
-        <p:txBody>
-          <a:bodyPr rtlCol="0" anchor="ctr"/>
-          <a:lstStyle/>
-          <a:p>
-            <a:pPr algn="ctr"/>
-            <a:r>
-              <a:rPr lang="en-US" altLang="ko-KR" sz="1000"/>
-              <a:t>/dev/nvidia0</a:t>
-            </a:r>
-            <a:endParaRPr lang="en-US" altLang="ko-KR" sz="1000" dirty="0"/>
-          </a:p>
-        </p:txBody>
-      </p:sp>
-      <p:sp>
-        <p:nvSpPr>
-          <p:cNvPr id="11" name="사각형: 둥근 모서리 114">
-            <a:extLst>
-              <a:ext uri="{FF2B5EF4-FFF2-40B4-BE49-F238E27FC236}">
-                <a16:creationId xmlns:a16="http://schemas.microsoft.com/office/drawing/2014/main" id="{A5B1B74D-0B82-73B1-5F00-44CC5F744F4A}"/>
-              </a:ext>
-            </a:extLst>
-          </p:cNvPr>
-          <p:cNvSpPr/>
-          <p:nvPr/>
-        </p:nvSpPr>
-        <p:spPr>
-          <a:xfrm>
-            <a:off x="274029" y="1504965"/>
-            <a:ext cx="1099999" cy="396044"/>
-          </a:xfrm>
-          <a:prstGeom prst="roundRect">
-            <a:avLst>
-              <a:gd name="adj" fmla="val 7242"/>
-            </a:avLst>
-          </a:prstGeom>
-          <a:ln w="12700"/>
-        </p:spPr>
-        <p:style>
-          <a:lnRef idx="2">
-            <a:schemeClr val="dk1"/>
-          </a:lnRef>
-          <a:fillRef idx="1">
-            <a:schemeClr val="lt1"/>
-          </a:fillRef>
-          <a:effectRef idx="0">
-            <a:schemeClr val="dk1"/>
-          </a:effectRef>
-          <a:fontRef idx="minor">
-            <a:schemeClr val="dk1"/>
-          </a:fontRef>
-        </p:style>
-        <p:txBody>
-          <a:bodyPr rtlCol="0" anchor="ctr"/>
-          <a:lstStyle/>
-          <a:p>
-            <a:pPr algn="ctr"/>
-            <a:r>
-              <a:rPr lang="en-US" altLang="ko-KR" sz="1000"/>
-              <a:t>NVIDIA CUDA Lib/Toolkit</a:t>
-            </a:r>
-            <a:endParaRPr lang="en-US" altLang="ko-KR" sz="1000" dirty="0"/>
-          </a:p>
-        </p:txBody>
-      </p:sp>
-      <p:sp>
-        <p:nvSpPr>
-          <p:cNvPr id="13" name="사각형: 둥근 모서리 114">
-            <a:extLst>
-              <a:ext uri="{FF2B5EF4-FFF2-40B4-BE49-F238E27FC236}">
-                <a16:creationId xmlns:a16="http://schemas.microsoft.com/office/drawing/2014/main" id="{F1F3EEC6-6CC4-CE00-13AC-F53EED26A83F}"/>
-              </a:ext>
-            </a:extLst>
-          </p:cNvPr>
-          <p:cNvSpPr/>
-          <p:nvPr/>
-        </p:nvSpPr>
-        <p:spPr>
-          <a:xfrm>
-            <a:off x="1598372" y="1203598"/>
-            <a:ext cx="2474164" cy="1265622"/>
-          </a:xfrm>
-          <a:prstGeom prst="roundRect">
-            <a:avLst>
-              <a:gd name="adj" fmla="val 6774"/>
-            </a:avLst>
-          </a:prstGeom>
-          <a:ln w="12700"/>
-        </p:spPr>
-        <p:style>
-          <a:lnRef idx="2">
-            <a:schemeClr val="dk1"/>
-          </a:lnRef>
-          <a:fillRef idx="1">
-            <a:schemeClr val="lt1"/>
-          </a:fillRef>
-          <a:effectRef idx="0">
-            <a:schemeClr val="dk1"/>
-          </a:effectRef>
-          <a:fontRef idx="minor">
-            <a:schemeClr val="dk1"/>
-          </a:fontRef>
-        </p:style>
-        <p:txBody>
-          <a:bodyPr rtlCol="0" anchor="t"/>
-          <a:lstStyle/>
-          <a:p>
-            <a:pPr algn="ctr"/>
-            <a:r>
-              <a:rPr lang="en-US" altLang="ko-KR" sz="1000" b="1"/>
-              <a:t>Container B</a:t>
-            </a:r>
-            <a:endParaRPr lang="ko-KR" altLang="en-US" sz="1000" b="1" dirty="0">
-              <a:solidFill>
-                <a:schemeClr val="accent2">
-                  <a:lumMod val="75000"/>
-                </a:schemeClr>
-              </a:solidFill>
-            </a:endParaRPr>
-          </a:p>
-        </p:txBody>
-      </p:sp>
-      <p:sp>
-        <p:nvSpPr>
-          <p:cNvPr id="14" name="사각형: 둥근 모서리 114">
-            <a:extLst>
-              <a:ext uri="{FF2B5EF4-FFF2-40B4-BE49-F238E27FC236}">
-                <a16:creationId xmlns:a16="http://schemas.microsoft.com/office/drawing/2014/main" id="{1EAB6A47-5F20-094B-0D4A-E766A80A2A60}"/>
-              </a:ext>
-            </a:extLst>
-          </p:cNvPr>
-          <p:cNvSpPr/>
-          <p:nvPr/>
-        </p:nvSpPr>
-        <p:spPr>
-          <a:xfrm>
-            <a:off x="1686106" y="1985356"/>
-            <a:ext cx="1099999" cy="396044"/>
-          </a:xfrm>
-          <a:prstGeom prst="roundRect">
-            <a:avLst>
-              <a:gd name="adj" fmla="val 7242"/>
-            </a:avLst>
-          </a:prstGeom>
-          <a:ln w="12700"/>
-        </p:spPr>
-        <p:style>
-          <a:lnRef idx="2">
-            <a:schemeClr val="dk1"/>
-          </a:lnRef>
-          <a:fillRef idx="1">
-            <a:schemeClr val="lt1"/>
-          </a:fillRef>
-          <a:effectRef idx="0">
-            <a:schemeClr val="dk1"/>
-          </a:effectRef>
-          <a:fontRef idx="minor">
-            <a:schemeClr val="dk1"/>
-          </a:fontRef>
-        </p:style>
-        <p:txBody>
-          <a:bodyPr rtlCol="0" anchor="ctr"/>
-          <a:lstStyle/>
-          <a:p>
-            <a:pPr algn="ctr"/>
-            <a:r>
-              <a:rPr lang="en-US" altLang="ko-KR" sz="1000"/>
-              <a:t>/dev/nvdia0</a:t>
-            </a:r>
-            <a:endParaRPr lang="en-US" altLang="ko-KR" sz="1000" dirty="0"/>
-          </a:p>
-        </p:txBody>
-      </p:sp>
-      <p:sp>
-        <p:nvSpPr>
-          <p:cNvPr id="15" name="사각형: 둥근 모서리 114">
-            <a:extLst>
-              <a:ext uri="{FF2B5EF4-FFF2-40B4-BE49-F238E27FC236}">
-                <a16:creationId xmlns:a16="http://schemas.microsoft.com/office/drawing/2014/main" id="{7201475F-A4A4-46B2-84B6-A45CE1664B47}"/>
-              </a:ext>
-            </a:extLst>
-          </p:cNvPr>
-          <p:cNvSpPr/>
-          <p:nvPr/>
-        </p:nvSpPr>
-        <p:spPr>
-          <a:xfrm>
-            <a:off x="2887706" y="1985356"/>
-            <a:ext cx="1099868" cy="396044"/>
-          </a:xfrm>
-          <a:prstGeom prst="roundRect">
-            <a:avLst>
-              <a:gd name="adj" fmla="val 7242"/>
-            </a:avLst>
-          </a:prstGeom>
-          <a:ln w="12700"/>
-        </p:spPr>
-        <p:style>
-          <a:lnRef idx="2">
-            <a:schemeClr val="dk1"/>
-          </a:lnRef>
-          <a:fillRef idx="1">
-            <a:schemeClr val="lt1"/>
-          </a:fillRef>
-          <a:effectRef idx="0">
-            <a:schemeClr val="dk1"/>
-          </a:effectRef>
-          <a:fontRef idx="minor">
-            <a:schemeClr val="dk1"/>
-          </a:fontRef>
-        </p:style>
-        <p:txBody>
-          <a:bodyPr rtlCol="0" anchor="ctr"/>
-          <a:lstStyle/>
-          <a:p>
-            <a:pPr algn="ctr"/>
-            <a:r>
-              <a:rPr lang="en-US" altLang="ko-KR" sz="1000"/>
-              <a:t>/dev/nvdia2</a:t>
-            </a:r>
-            <a:endParaRPr lang="en-US" altLang="ko-KR" sz="1000" dirty="0"/>
-          </a:p>
-        </p:txBody>
-      </p:sp>
-      <p:sp>
-        <p:nvSpPr>
-          <p:cNvPr id="16" name="사각형: 둥근 모서리 114">
-            <a:extLst>
-              <a:ext uri="{FF2B5EF4-FFF2-40B4-BE49-F238E27FC236}">
-                <a16:creationId xmlns:a16="http://schemas.microsoft.com/office/drawing/2014/main" id="{1B3E5041-0778-66C8-1F90-7570D9731483}"/>
-              </a:ext>
-            </a:extLst>
-          </p:cNvPr>
-          <p:cNvSpPr/>
-          <p:nvPr/>
-        </p:nvSpPr>
-        <p:spPr>
-          <a:xfrm>
-            <a:off x="1686107" y="1499302"/>
-            <a:ext cx="2301468" cy="396044"/>
-          </a:xfrm>
-          <a:prstGeom prst="roundRect">
-            <a:avLst>
-              <a:gd name="adj" fmla="val 7242"/>
-            </a:avLst>
-          </a:prstGeom>
-          <a:ln w="12700"/>
-        </p:spPr>
-        <p:style>
-          <a:lnRef idx="2">
-            <a:schemeClr val="dk1"/>
-          </a:lnRef>
-          <a:fillRef idx="1">
-            <a:schemeClr val="lt1"/>
-          </a:fillRef>
-          <a:effectRef idx="0">
-            <a:schemeClr val="dk1"/>
-          </a:effectRef>
-          <a:fontRef idx="minor">
-            <a:schemeClr val="dk1"/>
-          </a:fontRef>
-        </p:style>
-        <p:txBody>
-          <a:bodyPr rtlCol="0" anchor="ctr"/>
-          <a:lstStyle/>
-          <a:p>
-            <a:pPr algn="ctr"/>
-            <a:r>
-              <a:rPr lang="en-US" altLang="ko-KR" sz="1000"/>
-              <a:t>NVIDIA CUDA Lib/Toolkit</a:t>
-            </a:r>
-            <a:endParaRPr lang="en-US" altLang="ko-KR" sz="1000" dirty="0"/>
-          </a:p>
-        </p:txBody>
-      </p:sp>
-      <p:sp>
-        <p:nvSpPr>
-          <p:cNvPr id="18" name="사각형: 둥근 모서리 114">
-            <a:extLst>
-              <a:ext uri="{FF2B5EF4-FFF2-40B4-BE49-F238E27FC236}">
-                <a16:creationId xmlns:a16="http://schemas.microsoft.com/office/drawing/2014/main" id="{28995F5A-7DC0-2507-432E-914678470451}"/>
-              </a:ext>
-            </a:extLst>
-          </p:cNvPr>
-          <p:cNvSpPr/>
-          <p:nvPr/>
-        </p:nvSpPr>
-        <p:spPr>
-          <a:xfrm>
-            <a:off x="4537508" y="1203598"/>
-            <a:ext cx="1487816" cy="1265622"/>
-          </a:xfrm>
-          <a:prstGeom prst="roundRect">
-            <a:avLst>
-              <a:gd name="adj" fmla="val 6774"/>
-            </a:avLst>
-          </a:prstGeom>
-          <a:ln w="12700"/>
-        </p:spPr>
-        <p:style>
-          <a:lnRef idx="2">
-            <a:schemeClr val="dk1"/>
-          </a:lnRef>
-          <a:fillRef idx="1">
-            <a:schemeClr val="lt1"/>
-          </a:fillRef>
-          <a:effectRef idx="0">
-            <a:schemeClr val="dk1"/>
-          </a:effectRef>
-          <a:fontRef idx="minor">
-            <a:schemeClr val="dk1"/>
-          </a:fontRef>
-        </p:style>
-        <p:txBody>
-          <a:bodyPr rtlCol="0" anchor="t"/>
-          <a:lstStyle/>
-          <a:p>
-            <a:pPr algn="ctr"/>
-            <a:r>
-              <a:rPr lang="en-US" altLang="ko-KR" sz="1000" b="1"/>
-              <a:t>Container C</a:t>
-            </a:r>
-            <a:endParaRPr lang="ko-KR" altLang="en-US" sz="1000" b="1" dirty="0">
-              <a:solidFill>
-                <a:schemeClr val="accent2">
-                  <a:lumMod val="75000"/>
-                </a:schemeClr>
-              </a:solidFill>
-            </a:endParaRPr>
-          </a:p>
-        </p:txBody>
-      </p:sp>
-      <p:sp>
-        <p:nvSpPr>
-          <p:cNvPr id="19" name="사각형: 둥근 모서리 114">
-            <a:extLst>
-              <a:ext uri="{FF2B5EF4-FFF2-40B4-BE49-F238E27FC236}">
-                <a16:creationId xmlns:a16="http://schemas.microsoft.com/office/drawing/2014/main" id="{16CFA239-2511-9D27-E71A-172A3FA07324}"/>
-              </a:ext>
-            </a:extLst>
-          </p:cNvPr>
-          <p:cNvSpPr/>
-          <p:nvPr/>
-        </p:nvSpPr>
-        <p:spPr>
-          <a:xfrm>
-            <a:off x="4617695" y="1985356"/>
-            <a:ext cx="1321799" cy="396044"/>
-          </a:xfrm>
-          <a:prstGeom prst="roundRect">
-            <a:avLst>
-              <a:gd name="adj" fmla="val 7242"/>
-            </a:avLst>
-          </a:prstGeom>
-          <a:ln w="12700"/>
-        </p:spPr>
-        <p:style>
-          <a:lnRef idx="2">
-            <a:schemeClr val="dk1"/>
-          </a:lnRef>
-          <a:fillRef idx="1">
-            <a:schemeClr val="lt1"/>
-          </a:fillRef>
-          <a:effectRef idx="0">
-            <a:schemeClr val="dk1"/>
-          </a:effectRef>
-          <a:fontRef idx="minor">
-            <a:schemeClr val="dk1"/>
-          </a:fontRef>
-        </p:style>
-        <p:txBody>
-          <a:bodyPr rtlCol="0" anchor="ctr"/>
-          <a:lstStyle/>
-          <a:p>
-            <a:pPr algn="ctr"/>
-            <a:r>
-              <a:rPr lang="en-US" altLang="ko-KR" sz="1000"/>
-              <a:t>/dev/nvdia3</a:t>
-            </a:r>
-            <a:endParaRPr lang="en-US" altLang="ko-KR" sz="1000" dirty="0"/>
-          </a:p>
-        </p:txBody>
-      </p:sp>
-      <p:sp>
-        <p:nvSpPr>
-          <p:cNvPr id="20" name="사각형: 둥근 모서리 114">
-            <a:extLst>
-              <a:ext uri="{FF2B5EF4-FFF2-40B4-BE49-F238E27FC236}">
-                <a16:creationId xmlns:a16="http://schemas.microsoft.com/office/drawing/2014/main" id="{D5E1B1C4-5B6E-85F7-FDAB-04642D4057A6}"/>
-              </a:ext>
-            </a:extLst>
-          </p:cNvPr>
-          <p:cNvSpPr/>
-          <p:nvPr/>
-        </p:nvSpPr>
-        <p:spPr>
-          <a:xfrm>
-            <a:off x="4617695" y="1499302"/>
-            <a:ext cx="1321798" cy="396044"/>
-          </a:xfrm>
-          <a:prstGeom prst="roundRect">
-            <a:avLst>
-              <a:gd name="adj" fmla="val 7242"/>
-            </a:avLst>
-          </a:prstGeom>
-          <a:ln w="12700"/>
-        </p:spPr>
-        <p:style>
-          <a:lnRef idx="2">
-            <a:schemeClr val="dk1"/>
-          </a:lnRef>
-          <a:fillRef idx="1">
-            <a:schemeClr val="lt1"/>
-          </a:fillRef>
-          <a:effectRef idx="0">
-            <a:schemeClr val="dk1"/>
-          </a:effectRef>
-          <a:fontRef idx="minor">
-            <a:schemeClr val="dk1"/>
-          </a:fontRef>
-        </p:style>
-        <p:txBody>
-          <a:bodyPr rtlCol="0" anchor="ctr"/>
-          <a:lstStyle/>
-          <a:p>
-            <a:pPr algn="ctr"/>
-            <a:r>
-              <a:rPr lang="en-US" altLang="ko-KR" sz="1000"/>
-              <a:t>NVIDIA CUDA Lib/Toolkit</a:t>
-            </a:r>
-            <a:endParaRPr lang="en-US" altLang="ko-KR" sz="1000" dirty="0"/>
-          </a:p>
-        </p:txBody>
-      </p:sp>
-      <p:cxnSp>
-        <p:nvCxnSpPr>
-          <p:cNvPr id="21" name="직선 연결선 17">
-            <a:extLst>
-              <a:ext uri="{FF2B5EF4-FFF2-40B4-BE49-F238E27FC236}">
-                <a16:creationId xmlns:a16="http://schemas.microsoft.com/office/drawing/2014/main" id="{BBE57953-324C-8070-7D38-3BAD3665DB8C}"/>
-              </a:ext>
-            </a:extLst>
-          </p:cNvPr>
-          <p:cNvCxnSpPr>
-            <a:cxnSpLocks/>
-            <a:stCxn id="9" idx="2"/>
-            <a:endCxn id="4" idx="0"/>
-          </p:cNvCxnSpPr>
-          <p:nvPr/>
-        </p:nvCxnSpPr>
-        <p:spPr>
-          <a:xfrm>
-            <a:off x="824029" y="2387063"/>
-            <a:ext cx="386822" cy="1232960"/>
-          </a:xfrm>
-          <a:prstGeom prst="line">
-            <a:avLst/>
-          </a:prstGeom>
-          <a:ln w="12700">
-            <a:solidFill>
-              <a:schemeClr val="tx1"/>
-            </a:solidFill>
-          </a:ln>
-        </p:spPr>
-        <p:style>
-          <a:lnRef idx="1">
-            <a:schemeClr val="accent1"/>
-          </a:lnRef>
-          <a:fillRef idx="0">
-            <a:schemeClr val="accent1"/>
-          </a:fillRef>
-          <a:effectRef idx="0">
-            <a:schemeClr val="accent1"/>
-          </a:effectRef>
-          <a:fontRef idx="minor">
-            <a:schemeClr val="tx1"/>
-          </a:fontRef>
-        </p:style>
-      </p:cxnSp>
-      <p:cxnSp>
-        <p:nvCxnSpPr>
-          <p:cNvPr id="22" name="직선 연결선 20">
-            <a:extLst>
-              <a:ext uri="{FF2B5EF4-FFF2-40B4-BE49-F238E27FC236}">
-                <a16:creationId xmlns:a16="http://schemas.microsoft.com/office/drawing/2014/main" id="{22C12797-54A8-2874-270D-D393650E397D}"/>
-              </a:ext>
-            </a:extLst>
-          </p:cNvPr>
-          <p:cNvCxnSpPr>
-            <a:cxnSpLocks/>
-            <a:stCxn id="14" idx="2"/>
-            <a:endCxn id="5" idx="0"/>
-          </p:cNvCxnSpPr>
-          <p:nvPr/>
-        </p:nvCxnSpPr>
-        <p:spPr>
-          <a:xfrm>
-            <a:off x="2236106" y="2381400"/>
-            <a:ext cx="234724" cy="1238623"/>
-          </a:xfrm>
-          <a:prstGeom prst="line">
-            <a:avLst/>
-          </a:prstGeom>
-          <a:ln w="12700">
-            <a:solidFill>
-              <a:schemeClr val="tx1"/>
-            </a:solidFill>
-          </a:ln>
-        </p:spPr>
-        <p:style>
-          <a:lnRef idx="1">
-            <a:schemeClr val="accent1"/>
-          </a:lnRef>
-          <a:fillRef idx="0">
-            <a:schemeClr val="accent1"/>
-          </a:fillRef>
-          <a:effectRef idx="0">
-            <a:schemeClr val="accent1"/>
-          </a:effectRef>
-          <a:fontRef idx="minor">
-            <a:schemeClr val="tx1"/>
-          </a:fontRef>
-        </p:style>
-      </p:cxnSp>
-      <p:cxnSp>
-        <p:nvCxnSpPr>
-          <p:cNvPr id="24" name="직선 연결선 17">
-            <a:extLst>
-              <a:ext uri="{FF2B5EF4-FFF2-40B4-BE49-F238E27FC236}">
-                <a16:creationId xmlns:a16="http://schemas.microsoft.com/office/drawing/2014/main" id="{2945351D-D086-4FB4-4382-C9127B2ED274}"/>
-              </a:ext>
-            </a:extLst>
-          </p:cNvPr>
-          <p:cNvCxnSpPr>
-            <a:cxnSpLocks/>
-            <a:stCxn id="15" idx="2"/>
-            <a:endCxn id="6" idx="0"/>
-          </p:cNvCxnSpPr>
-          <p:nvPr/>
-        </p:nvCxnSpPr>
-        <p:spPr>
-          <a:xfrm>
-            <a:off x="3437640" y="2381400"/>
-            <a:ext cx="293168" cy="1238623"/>
-          </a:xfrm>
-          <a:prstGeom prst="line">
-            <a:avLst/>
-          </a:prstGeom>
-          <a:ln w="12700">
-            <a:solidFill>
-              <a:schemeClr val="tx1"/>
-            </a:solidFill>
-          </a:ln>
-        </p:spPr>
-        <p:style>
-          <a:lnRef idx="1">
-            <a:schemeClr val="accent1"/>
-          </a:lnRef>
-          <a:fillRef idx="0">
-            <a:schemeClr val="accent1"/>
-          </a:fillRef>
-          <a:effectRef idx="0">
-            <a:schemeClr val="accent1"/>
-          </a:effectRef>
-          <a:fontRef idx="minor">
-            <a:schemeClr val="tx1"/>
-          </a:fontRef>
-        </p:style>
-      </p:cxnSp>
-      <p:cxnSp>
-        <p:nvCxnSpPr>
-          <p:cNvPr id="26" name="직선 연결선 26">
-            <a:extLst>
-              <a:ext uri="{FF2B5EF4-FFF2-40B4-BE49-F238E27FC236}">
-                <a16:creationId xmlns:a16="http://schemas.microsoft.com/office/drawing/2014/main" id="{A6841772-5FAC-52D2-D93A-BF3E1BF471DF}"/>
-              </a:ext>
-            </a:extLst>
-          </p:cNvPr>
-          <p:cNvCxnSpPr>
-            <a:cxnSpLocks/>
-            <a:stCxn id="19" idx="2"/>
-            <a:endCxn id="7" idx="0"/>
-          </p:cNvCxnSpPr>
-          <p:nvPr/>
-        </p:nvCxnSpPr>
-        <p:spPr>
-          <a:xfrm flipH="1">
-            <a:off x="4990787" y="2381400"/>
-            <a:ext cx="287808" cy="1238623"/>
-          </a:xfrm>
-          <a:prstGeom prst="line">
-            <a:avLst/>
-          </a:prstGeom>
-          <a:ln w="12700">
-            <a:solidFill>
-              <a:schemeClr val="tx1"/>
-            </a:solidFill>
-          </a:ln>
-        </p:spPr>
-        <p:style>
-          <a:lnRef idx="1">
-            <a:schemeClr val="accent1"/>
-          </a:lnRef>
-          <a:fillRef idx="0">
-            <a:schemeClr val="accent1"/>
-          </a:fillRef>
-          <a:effectRef idx="0">
-            <a:schemeClr val="accent1"/>
-          </a:effectRef>
-          <a:fontRef idx="minor">
-            <a:schemeClr val="tx1"/>
-          </a:fontRef>
-        </p:style>
-      </p:cxnSp>
-      <p:sp>
-        <p:nvSpPr>
-          <p:cNvPr id="27" name="사각형: 둥근 모서리 114">
-            <a:extLst>
-              <a:ext uri="{FF2B5EF4-FFF2-40B4-BE49-F238E27FC236}">
-                <a16:creationId xmlns:a16="http://schemas.microsoft.com/office/drawing/2014/main" id="{87AAA4FF-5355-0B8E-2C4A-7B3DEB8558AB}"/>
-              </a:ext>
-            </a:extLst>
-          </p:cNvPr>
-          <p:cNvSpPr/>
-          <p:nvPr/>
-        </p:nvSpPr>
-        <p:spPr>
-          <a:xfrm>
-            <a:off x="218562" y="2791931"/>
-            <a:ext cx="5759996" cy="396044"/>
-          </a:xfrm>
-          <a:prstGeom prst="roundRect">
-            <a:avLst>
-              <a:gd name="adj" fmla="val 7242"/>
-            </a:avLst>
-          </a:prstGeom>
-          <a:ln w="12700"/>
-        </p:spPr>
-        <p:style>
-          <a:lnRef idx="2">
-            <a:schemeClr val="dk1"/>
-          </a:lnRef>
-          <a:fillRef idx="1">
-            <a:schemeClr val="lt1"/>
-          </a:fillRef>
-          <a:effectRef idx="0">
-            <a:schemeClr val="dk1"/>
-          </a:effectRef>
-          <a:fontRef idx="minor">
-            <a:schemeClr val="dk1"/>
-          </a:fontRef>
-        </p:style>
-        <p:txBody>
-          <a:bodyPr rtlCol="0" anchor="ctr"/>
-          <a:lstStyle/>
-          <a:p>
-            <a:pPr algn="ctr"/>
-            <a:r>
-              <a:rPr lang="en-US" altLang="ko-KR" sz="1000"/>
-              <a:t>NVIDIA GPU Device Driver</a:t>
-            </a:r>
-            <a:endParaRPr lang="en-US" altLang="ko-KR" sz="1000" dirty="0"/>
-          </a:p>
-        </p:txBody>
-      </p:sp>
-      <p:sp>
-        <p:nvSpPr>
-          <p:cNvPr id="10" name="TextBox 9">
-            <a:extLst>
-              <a:ext uri="{FF2B5EF4-FFF2-40B4-BE49-F238E27FC236}">
-                <a16:creationId xmlns:a16="http://schemas.microsoft.com/office/drawing/2014/main" id="{787DAA5F-A54B-025A-21E9-FA0AC9BF51AF}"/>
-              </a:ext>
-            </a:extLst>
-          </p:cNvPr>
-          <p:cNvSpPr txBox="1"/>
-          <p:nvPr/>
-        </p:nvSpPr>
-        <p:spPr>
-          <a:xfrm>
-            <a:off x="7965348" y="483518"/>
-            <a:ext cx="1665155" cy="1769715"/>
-          </a:xfrm>
-          <a:prstGeom prst="rect">
-            <a:avLst/>
-          </a:prstGeom>
-          <a:solidFill>
-            <a:schemeClr val="bg1">
-              <a:lumMod val="85000"/>
-              <a:lumOff val="15000"/>
-            </a:schemeClr>
-          </a:solidFill>
-          <a:ln w="12700">
-            <a:solidFill>
-              <a:schemeClr val="tx1"/>
-            </a:solidFill>
-          </a:ln>
-        </p:spPr>
-        <p:txBody>
-          <a:bodyPr wrap="square" lIns="0" rIns="0" rtlCol="0">
-            <a:spAutoFit/>
-          </a:bodyPr>
-          <a:lstStyle/>
-          <a:p>
-            <a:pPr algn="l"/>
-            <a:r>
-              <a:rPr lang="en-US" sz="1000" kern="0" dirty="0" err="1">
-                <a:cs typeface="Al Bayan Plain" pitchFamily="2" charset="-78"/>
-              </a:rPr>
-              <a:t> </a:t>
-            </a:r>
-            <a:r>
-              <a:rPr lang="en-US" sz="900" kern="0" dirty="0" err="1">
-                <a:cs typeface="Al Bayan Plain" pitchFamily="2" charset="-78"/>
-              </a:rPr>
-              <a:t>apiVersion</a:t>
-            </a:r>
-            <a:r>
-              <a:rPr lang="en-US" sz="900" kern="0" dirty="0">
-                <a:cs typeface="Al Bayan Plain" pitchFamily="2" charset="-78"/>
-              </a:rPr>
-              <a:t>: v1</a:t>
-            </a:r>
-          </a:p>
-          <a:p>
-            <a:pPr algn="l"/>
-            <a:r>
-              <a:rPr lang="en-US" sz="900" kern="0" dirty="0">
-                <a:cs typeface="Al Bayan Plain" pitchFamily="2" charset="-78"/>
-              </a:rPr>
-              <a:t> kind: PodB</a:t>
-            </a:r>
-          </a:p>
-          <a:p>
-            <a:pPr algn="l"/>
-            <a:r>
-              <a:rPr lang="en-US" sz="900" kern="0" dirty="0">
-                <a:cs typeface="Al Bayan Plain" pitchFamily="2" charset="-78"/>
-              </a:rPr>
-              <a:t> metadata:</a:t>
-            </a:r>
-          </a:p>
-          <a:p>
-            <a:pPr algn="l"/>
-            <a:r>
-              <a:rPr lang="en-US" sz="900" kern="0" dirty="0">
-                <a:cs typeface="Al Bayan Plain" pitchFamily="2" charset="-78"/>
-              </a:rPr>
-              <a:t>   name: pod</a:t>
-            </a:r>
-          </a:p>
-          <a:p>
-            <a:pPr algn="l"/>
-            <a:r>
-              <a:rPr lang="en-US" sz="900" kern="0" dirty="0">
-                <a:cs typeface="Al Bayan Plain" pitchFamily="2" charset="-78"/>
-              </a:rPr>
-              <a:t> spec:</a:t>
-            </a:r>
-          </a:p>
-          <a:p>
-            <a:pPr algn="l"/>
-            <a:r>
-              <a:rPr lang="en-US" sz="900" kern="0" dirty="0">
-                <a:cs typeface="Al Bayan Plain" pitchFamily="2" charset="-78"/>
-              </a:rPr>
-              <a:t>   containers:</a:t>
-            </a:r>
-          </a:p>
-          <a:p>
-            <a:pPr algn="l"/>
-            <a:r>
-              <a:rPr lang="en-US" sz="900" kern="0" dirty="0">
-                <a:cs typeface="Al Bayan Plain" pitchFamily="2" charset="-78"/>
-              </a:rPr>
-              <a:t>     - name: ContainerA</a:t>
-            </a:r>
-          </a:p>
-          <a:p>
-            <a:pPr algn="l"/>
-            <a:r>
-              <a:rPr lang="en-US" sz="900" kern="0" dirty="0">
-                <a:cs typeface="Al Bayan Plain" pitchFamily="2" charset="-78"/>
-              </a:rPr>
-              <a:t>       resources:</a:t>
-            </a:r>
-          </a:p>
-          <a:p>
-            <a:pPr algn="l"/>
-            <a:r>
-              <a:rPr lang="en-US" sz="900" kern="0" dirty="0">
-                <a:solidFill>
-                  <a:srgbClr val="C00000"/>
-                </a:solidFill>
-                <a:cs typeface="Al Bayan Plain" pitchFamily="2" charset="-78"/>
-              </a:rPr>
-              <a:t>         requests:</a:t>
-            </a:r>
-          </a:p>
-          <a:p>
-            <a:pPr algn="l"/>
-            <a:r>
-              <a:rPr lang="en-US" sz="900" kern="0" dirty="0">
-                <a:solidFill>
-                  <a:srgbClr val="C00000"/>
-                </a:solidFill>
-                <a:cs typeface="Al Bayan Plain" pitchFamily="2" charset="-78"/>
-              </a:rPr>
-              <a:t>           </a:t>
-            </a:r>
-            <a:r>
-              <a:rPr lang="en-US" sz="900" kern="0" dirty="0" err="1">
-                <a:solidFill>
-                  <a:srgbClr val="C00000"/>
-                </a:solidFill>
-                <a:cs typeface="Al Bayan Plain" pitchFamily="2" charset="-78"/>
-              </a:rPr>
-              <a:t>nvidia.com</a:t>
-            </a:r>
-            <a:r>
-              <a:rPr lang="en-US" sz="900" kern="0" dirty="0">
-                <a:solidFill>
-                  <a:srgbClr val="C00000"/>
-                </a:solidFill>
-                <a:cs typeface="Al Bayan Plain" pitchFamily="2" charset="-78"/>
-              </a:rPr>
-              <a:t>/</a:t>
-            </a:r>
-            <a:r>
-              <a:rPr lang="en-US" sz="900" kern="0" dirty="0" err="1">
-                <a:solidFill>
-                  <a:srgbClr val="C00000"/>
-                </a:solidFill>
-                <a:cs typeface="Al Bayan Plain" pitchFamily="2" charset="-78"/>
-              </a:rPr>
-              <a:t>gpu</a:t>
-            </a:r>
-            <a:r>
-              <a:rPr lang="en-US" sz="900" kern="0" dirty="0">
-                <a:solidFill>
-                  <a:srgbClr val="C00000"/>
-                </a:solidFill>
-                <a:cs typeface="Al Bayan Plain" pitchFamily="2" charset="-78"/>
-              </a:rPr>
-              <a:t>: 1</a:t>
-            </a:r>
-          </a:p>
-          <a:p>
-            <a:r>
-              <a:rPr lang="en-US" altLang="ko-KR" sz="900" kern="0" dirty="0">
-                <a:solidFill>
-                  <a:srgbClr val="C00000"/>
-                </a:solidFill>
-                <a:cs typeface="Al Bayan Plain" pitchFamily="2" charset="-78"/>
-              </a:rPr>
-              <a:t>         limits:</a:t>
-            </a:r>
-          </a:p>
-          <a:p>
-            <a:r>
-              <a:rPr lang="en-US" altLang="ko-KR" sz="900" kern="0" dirty="0">
-                <a:solidFill>
-                  <a:srgbClr val="C00000"/>
-                </a:solidFill>
-                <a:cs typeface="Al Bayan Plain" pitchFamily="2" charset="-78"/>
-              </a:rPr>
-              <a:t>           </a:t>
-            </a:r>
-            <a:r>
-              <a:rPr lang="en-US" altLang="ko-KR" sz="900" kern="0" dirty="0" err="1">
-                <a:solidFill>
-                  <a:srgbClr val="C00000"/>
-                </a:solidFill>
-                <a:cs typeface="Al Bayan Plain" pitchFamily="2" charset="-78"/>
-              </a:rPr>
-              <a:t>nvidia.com</a:t>
-            </a:r>
-            <a:r>
-              <a:rPr lang="en-US" altLang="ko-KR" sz="900" kern="0" dirty="0">
-                <a:solidFill>
-                  <a:srgbClr val="C00000"/>
-                </a:solidFill>
-                <a:cs typeface="Al Bayan Plain" pitchFamily="2" charset="-78"/>
-              </a:rPr>
-              <a:t>/</a:t>
-            </a:r>
-            <a:r>
-              <a:rPr lang="en-US" altLang="ko-KR" sz="900" kern="0" dirty="0" err="1">
-                <a:solidFill>
-                  <a:srgbClr val="C00000"/>
-                </a:solidFill>
-                <a:cs typeface="Al Bayan Plain" pitchFamily="2" charset="-78"/>
-              </a:rPr>
-              <a:t>gpu</a:t>
-            </a:r>
-            <a:r>
-              <a:rPr lang="en-US" altLang="ko-KR" sz="900" kern="0" dirty="0">
-                <a:solidFill>
-                  <a:srgbClr val="C00000"/>
-                </a:solidFill>
-                <a:cs typeface="Al Bayan Plain" pitchFamily="2" charset="-78"/>
-              </a:rPr>
-              <a:t>: 1</a:t>
-            </a:r>
-          </a:p>
-        </p:txBody>
-      </p:sp>
-      <p:sp>
-        <p:nvSpPr>
-          <p:cNvPr id="17" name="TextBox 16">
-            <a:extLst>
-              <a:ext uri="{FF2B5EF4-FFF2-40B4-BE49-F238E27FC236}">
-                <a16:creationId xmlns:a16="http://schemas.microsoft.com/office/drawing/2014/main" id="{2070C16E-B348-642F-E3BF-7E2C0BD51AB8}"/>
-              </a:ext>
-            </a:extLst>
-          </p:cNvPr>
-          <p:cNvSpPr txBox="1"/>
-          <p:nvPr/>
-        </p:nvSpPr>
-        <p:spPr>
-          <a:xfrm>
-            <a:off x="6300058" y="483518"/>
-            <a:ext cx="1665290" cy="2600712"/>
-          </a:xfrm>
-          <a:prstGeom prst="rect">
-            <a:avLst/>
-          </a:prstGeom>
-          <a:solidFill>
-            <a:schemeClr val="bg1">
-              <a:lumMod val="85000"/>
-              <a:lumOff val="15000"/>
-            </a:schemeClr>
-          </a:solidFill>
-          <a:ln w="12700">
-            <a:solidFill>
-              <a:schemeClr val="tx1"/>
-            </a:solidFill>
-          </a:ln>
-        </p:spPr>
-        <p:txBody>
-          <a:bodyPr wrap="square" lIns="0" rIns="0" rtlCol="0">
-            <a:spAutoFit/>
-          </a:bodyPr>
-          <a:lstStyle/>
-          <a:p>
-            <a:pPr algn="l"/>
-            <a:r>
-              <a:rPr lang="en-US" sz="1000" kern="0" dirty="0" err="1">
-                <a:cs typeface="Al Bayan Plain" pitchFamily="2" charset="-78"/>
-              </a:rPr>
-              <a:t> </a:t>
-            </a:r>
-            <a:r>
-              <a:rPr lang="en-US" sz="900" kern="0" dirty="0" err="1">
-                <a:cs typeface="Al Bayan Plain" pitchFamily="2" charset="-78"/>
-              </a:rPr>
-              <a:t>apiVersion</a:t>
-            </a:r>
-            <a:r>
-              <a:rPr lang="en-US" sz="900" kern="0" dirty="0">
-                <a:cs typeface="Al Bayan Plain" pitchFamily="2" charset="-78"/>
-              </a:rPr>
-              <a:t>: v1</a:t>
-            </a:r>
-          </a:p>
-          <a:p>
-            <a:pPr algn="l"/>
-            <a:r>
-              <a:rPr lang="en-US" sz="900" kern="0" dirty="0">
-                <a:cs typeface="Al Bayan Plain" pitchFamily="2" charset="-78"/>
-              </a:rPr>
-              <a:t> kind: PodA</a:t>
-            </a:r>
-          </a:p>
-          <a:p>
-            <a:pPr algn="l"/>
-            <a:r>
-              <a:rPr lang="en-US" sz="900" kern="0" dirty="0">
-                <a:cs typeface="Al Bayan Plain" pitchFamily="2" charset="-78"/>
-              </a:rPr>
-              <a:t> metadata:</a:t>
-            </a:r>
-          </a:p>
-          <a:p>
-            <a:pPr algn="l"/>
-            <a:r>
-              <a:rPr lang="en-US" sz="900" kern="0" dirty="0">
-                <a:cs typeface="Al Bayan Plain" pitchFamily="2" charset="-78"/>
-              </a:rPr>
-              <a:t>   name: pod</a:t>
-            </a:r>
-          </a:p>
-          <a:p>
-            <a:pPr algn="l"/>
-            <a:r>
-              <a:rPr lang="en-US" sz="900" kern="0" dirty="0">
-                <a:cs typeface="Al Bayan Plain" pitchFamily="2" charset="-78"/>
-              </a:rPr>
-              <a:t> spec:</a:t>
-            </a:r>
-          </a:p>
-          <a:p>
-            <a:pPr algn="l"/>
-            <a:r>
-              <a:rPr lang="en-US" sz="900" kern="0" dirty="0">
-                <a:cs typeface="Al Bayan Plain" pitchFamily="2" charset="-78"/>
-              </a:rPr>
-              <a:t>   containers:</a:t>
-            </a:r>
-          </a:p>
-          <a:p>
-            <a:pPr algn="l"/>
-            <a:r>
-              <a:rPr lang="en-US" sz="900" kern="0" dirty="0">
-                <a:cs typeface="Al Bayan Plain" pitchFamily="2" charset="-78"/>
-              </a:rPr>
-              <a:t>     - name: ContainerA</a:t>
-            </a:r>
-          </a:p>
-          <a:p>
-            <a:pPr algn="l"/>
-            <a:r>
-              <a:rPr lang="en-US" sz="900" kern="0" dirty="0">
-                <a:cs typeface="Al Bayan Plain" pitchFamily="2" charset="-78"/>
-              </a:rPr>
-              <a:t>       resources:</a:t>
-            </a:r>
-          </a:p>
-          <a:p>
-            <a:pPr algn="l"/>
-            <a:r>
-              <a:rPr lang="en-US" sz="900" kern="0" dirty="0">
-                <a:solidFill>
-                  <a:srgbClr val="C00000"/>
-                </a:solidFill>
-                <a:cs typeface="Al Bayan Plain" pitchFamily="2" charset="-78"/>
-              </a:rPr>
-              <a:t>         requests:</a:t>
-            </a:r>
-          </a:p>
-          <a:p>
-            <a:pPr algn="l"/>
-            <a:r>
-              <a:rPr lang="en-US" sz="900" kern="0" dirty="0">
-                <a:solidFill>
-                  <a:srgbClr val="C00000"/>
-                </a:solidFill>
-                <a:cs typeface="Al Bayan Plain" pitchFamily="2" charset="-78"/>
-              </a:rPr>
-              <a:t>           </a:t>
-            </a:r>
-            <a:r>
-              <a:rPr lang="en-US" sz="900" kern="0" dirty="0" err="1">
-                <a:solidFill>
-                  <a:srgbClr val="C00000"/>
-                </a:solidFill>
-                <a:cs typeface="Al Bayan Plain" pitchFamily="2" charset="-78"/>
-              </a:rPr>
-              <a:t>nvidia.com</a:t>
-            </a:r>
-            <a:r>
-              <a:rPr lang="en-US" sz="900" kern="0" dirty="0">
-                <a:solidFill>
-                  <a:srgbClr val="C00000"/>
-                </a:solidFill>
-                <a:cs typeface="Al Bayan Plain" pitchFamily="2" charset="-78"/>
-              </a:rPr>
-              <a:t>/</a:t>
-            </a:r>
-            <a:r>
-              <a:rPr lang="en-US" sz="900" kern="0" dirty="0" err="1">
-                <a:solidFill>
-                  <a:srgbClr val="C00000"/>
-                </a:solidFill>
-                <a:cs typeface="Al Bayan Plain" pitchFamily="2" charset="-78"/>
-              </a:rPr>
-              <a:t>gpu</a:t>
-            </a:r>
-            <a:r>
-              <a:rPr lang="en-US" sz="900" kern="0" dirty="0">
-                <a:solidFill>
-                  <a:srgbClr val="C00000"/>
-                </a:solidFill>
-                <a:cs typeface="Al Bayan Plain" pitchFamily="2" charset="-78"/>
-              </a:rPr>
-              <a:t>: 1</a:t>
-            </a:r>
-          </a:p>
-          <a:p>
-            <a:r>
-              <a:rPr lang="en-US" altLang="ko-KR" sz="900" kern="0" dirty="0">
-                <a:solidFill>
-                  <a:srgbClr val="C00000"/>
-                </a:solidFill>
-                <a:cs typeface="Al Bayan Plain" pitchFamily="2" charset="-78"/>
-              </a:rPr>
-              <a:t>         limits:</a:t>
-            </a:r>
-          </a:p>
-          <a:p>
-            <a:r>
-              <a:rPr lang="en-US" altLang="ko-KR" sz="900" kern="0" dirty="0">
-                <a:solidFill>
-                  <a:srgbClr val="C00000"/>
-                </a:solidFill>
-                <a:cs typeface="Al Bayan Plain" pitchFamily="2" charset="-78"/>
-              </a:rPr>
-              <a:t>           </a:t>
-            </a:r>
-            <a:r>
-              <a:rPr lang="en-US" altLang="ko-KR" sz="900" kern="0" dirty="0" err="1">
-                <a:solidFill>
-                  <a:srgbClr val="C00000"/>
-                </a:solidFill>
-                <a:cs typeface="Al Bayan Plain" pitchFamily="2" charset="-78"/>
-              </a:rPr>
-              <a:t>nvidia.com</a:t>
-            </a:r>
-            <a:r>
-              <a:rPr lang="en-US" altLang="ko-KR" sz="900" kern="0" dirty="0">
-                <a:solidFill>
-                  <a:srgbClr val="C00000"/>
-                </a:solidFill>
-                <a:cs typeface="Al Bayan Plain" pitchFamily="2" charset="-78"/>
-              </a:rPr>
-              <a:t>/</a:t>
-            </a:r>
-            <a:r>
-              <a:rPr lang="en-US" altLang="ko-KR" sz="900" kern="0" dirty="0" err="1">
-                <a:solidFill>
-                  <a:srgbClr val="C00000"/>
-                </a:solidFill>
-                <a:cs typeface="Al Bayan Plain" pitchFamily="2" charset="-78"/>
-              </a:rPr>
-              <a:t>gpu</a:t>
-            </a:r>
-            <a:r>
-              <a:rPr lang="en-US" altLang="ko-KR" sz="900" kern="0" dirty="0">
-                <a:solidFill>
-                  <a:srgbClr val="C00000"/>
-                </a:solidFill>
-                <a:cs typeface="Al Bayan Plain" pitchFamily="2" charset="-78"/>
-              </a:rPr>
-              <a:t>: 1</a:t>
-            </a:r>
-          </a:p>
-          <a:p>
-            <a:r>
-              <a:rPr lang="en-US" altLang="ko-KR" sz="900" kern="0" dirty="0">
-                <a:cs typeface="Al Bayan Plain" pitchFamily="2" charset="-78"/>
-              </a:rPr>
-              <a:t>     - name: ContainerB</a:t>
-            </a:r>
-          </a:p>
-          <a:p>
-            <a:r>
-              <a:rPr lang="en-US" altLang="ko-KR" sz="900" kern="0" dirty="0">
-                <a:cs typeface="Al Bayan Plain" pitchFamily="2" charset="-78"/>
-              </a:rPr>
-              <a:t>       resources:</a:t>
-            </a:r>
-          </a:p>
-          <a:p>
-            <a:r>
-              <a:rPr lang="en-US" altLang="ko-KR" sz="900" kern="0" dirty="0">
-                <a:solidFill>
-                  <a:srgbClr val="C00000"/>
-                </a:solidFill>
-                <a:cs typeface="Al Bayan Plain" pitchFamily="2" charset="-78"/>
-              </a:rPr>
-              <a:t>         requests:</a:t>
-            </a:r>
-          </a:p>
-          <a:p>
-            <a:r>
-              <a:rPr lang="en-US" altLang="ko-KR" sz="900" kern="0" dirty="0">
-                <a:solidFill>
-                  <a:srgbClr val="C00000"/>
-                </a:solidFill>
-                <a:cs typeface="Al Bayan Plain" pitchFamily="2" charset="-78"/>
-              </a:rPr>
-              <a:t>           </a:t>
-            </a:r>
-            <a:r>
-              <a:rPr lang="en-US" altLang="ko-KR" sz="900" kern="0" dirty="0" err="1">
-                <a:solidFill>
-                  <a:srgbClr val="C00000"/>
-                </a:solidFill>
-                <a:cs typeface="Al Bayan Plain" pitchFamily="2" charset="-78"/>
-              </a:rPr>
-              <a:t>nvidia.com</a:t>
-            </a:r>
-            <a:r>
-              <a:rPr lang="en-US" altLang="ko-KR" sz="900" kern="0" dirty="0">
-                <a:solidFill>
-                  <a:srgbClr val="C00000"/>
-                </a:solidFill>
-                <a:cs typeface="Al Bayan Plain" pitchFamily="2" charset="-78"/>
-              </a:rPr>
-              <a:t>/</a:t>
-            </a:r>
-            <a:r>
-              <a:rPr lang="en-US" altLang="ko-KR" sz="900" kern="0" dirty="0" err="1">
-                <a:solidFill>
-                  <a:srgbClr val="C00000"/>
-                </a:solidFill>
-                <a:cs typeface="Al Bayan Plain" pitchFamily="2" charset="-78"/>
-              </a:rPr>
-              <a:t>gpu</a:t>
-            </a:r>
-            <a:r>
-              <a:rPr lang="en-US" altLang="ko-KR" sz="900" kern="0" dirty="0">
-                <a:solidFill>
-                  <a:srgbClr val="C00000"/>
-                </a:solidFill>
-                <a:cs typeface="Al Bayan Plain" pitchFamily="2" charset="-78"/>
-              </a:rPr>
-              <a:t>: 2</a:t>
-            </a:r>
-          </a:p>
-          <a:p>
-            <a:r>
-              <a:rPr lang="en-US" altLang="ko-KR" sz="900" kern="0" dirty="0">
-                <a:solidFill>
-                  <a:srgbClr val="C00000"/>
-                </a:solidFill>
-                <a:cs typeface="Al Bayan Plain" pitchFamily="2" charset="-78"/>
-              </a:rPr>
-              <a:t>         limits:</a:t>
-            </a:r>
-          </a:p>
-          <a:p>
-            <a:r>
-              <a:rPr lang="en-US" altLang="ko-KR" sz="900" kern="0" dirty="0">
-                <a:solidFill>
-                  <a:srgbClr val="C00000"/>
-                </a:solidFill>
-                <a:cs typeface="Al Bayan Plain" pitchFamily="2" charset="-78"/>
-              </a:rPr>
-              <a:t>           </a:t>
-            </a:r>
-            <a:r>
-              <a:rPr lang="en-US" altLang="ko-KR" sz="900" kern="0" dirty="0" err="1">
-                <a:solidFill>
-                  <a:srgbClr val="C00000"/>
-                </a:solidFill>
-                <a:cs typeface="Al Bayan Plain" pitchFamily="2" charset="-78"/>
-              </a:rPr>
-              <a:t>nvidia.com</a:t>
-            </a:r>
-            <a:r>
-              <a:rPr lang="en-US" altLang="ko-KR" sz="900" kern="0" dirty="0">
-                <a:solidFill>
-                  <a:srgbClr val="C00000"/>
-                </a:solidFill>
-                <a:cs typeface="Al Bayan Plain" pitchFamily="2" charset="-78"/>
-              </a:rPr>
-              <a:t>/</a:t>
-            </a:r>
-            <a:r>
-              <a:rPr lang="en-US" altLang="ko-KR" sz="900" kern="0" dirty="0" err="1">
-                <a:solidFill>
-                  <a:srgbClr val="C00000"/>
-                </a:solidFill>
-                <a:cs typeface="Al Bayan Plain" pitchFamily="2" charset="-78"/>
-              </a:rPr>
-              <a:t>gpu</a:t>
-            </a:r>
-            <a:r>
-              <a:rPr lang="en-US" altLang="ko-KR" sz="900" kern="0" dirty="0">
-                <a:solidFill>
-                  <a:srgbClr val="C00000"/>
-                </a:solidFill>
-                <a:cs typeface="Al Bayan Plain" pitchFamily="2" charset="-78"/>
-              </a:rPr>
-              <a:t>: 2</a:t>
-            </a:r>
-          </a:p>
-        </p:txBody>
-      </p:sp>
-    </p:spTree>
-    <p:extLst>
-      <p:ext uri="{BB962C8B-B14F-4D97-AF65-F5344CB8AC3E}">
-        <p14:creationId xmlns:p14="http://schemas.microsoft.com/office/powerpoint/2010/main" val="2011655415"/>
       </p:ext>
     </p:extLst>
   </p:cSld>

--- a/content/docs/theory-analysis/kubernetes-nvidia-device-plugin/images/images.pptx
+++ b/content/docs/theory-analysis/kubernetes-nvidia-device-plugin/images/images.pptx
@@ -41956,10 +41956,10 @@
       </p:grpSpPr>
       <p:sp>
         <p:nvSpPr>
-          <p:cNvPr id="10" name="사각형: 둥근 모서리 114">
-            <a:extLst>
-              <a:ext uri="{FF2B5EF4-FFF2-40B4-BE49-F238E27FC236}">
-                <a16:creationId xmlns:a16="http://schemas.microsoft.com/office/drawing/2014/main" id="{7BDC43B8-DE4B-0524-E185-EF1FCA75E0DC}"/>
+          <p:cNvPr id="3" name="사각형: 둥근 모서리 114">
+            <a:extLst>
+              <a:ext uri="{FF2B5EF4-FFF2-40B4-BE49-F238E27FC236}">
+                <a16:creationId xmlns:a16="http://schemas.microsoft.com/office/drawing/2014/main" id="{65F7A1F3-8A1A-3FF7-26B1-5136613AF6CF}"/>
               </a:ext>
             </a:extLst>
           </p:cNvPr>
@@ -41968,8 +41968,8 @@
         </p:nvSpPr>
         <p:spPr>
           <a:xfrm>
-            <a:off x="1782967" y="128188"/>
-            <a:ext cx="2577504" cy="1990371"/>
+            <a:off x="43906" y="60026"/>
+            <a:ext cx="2732424" cy="2464513"/>
           </a:xfrm>
           <a:prstGeom prst="roundRect">
             <a:avLst>
@@ -41999,7 +41999,7 @@
             <a:pPr algn="ctr"/>
             <a:r>
               <a:rPr lang="en-US" altLang="ko-KR" sz="1000" b="1"/>
-              <a:t>Pod B</a:t>
+              <a:t>Pod A</a:t>
             </a:r>
             <a:endParaRPr lang="ko-KR" altLang="en-US" sz="1000" b="1" dirty="0">
               <a:solidFill>
@@ -42013,10 +42013,46 @@
       </p:sp>
       <p:sp>
         <p:nvSpPr>
-          <p:cNvPr id="8" name="사각형: 둥근 모서리 114">
-            <a:extLst>
-              <a:ext uri="{FF2B5EF4-FFF2-40B4-BE49-F238E27FC236}">
-                <a16:creationId xmlns:a16="http://schemas.microsoft.com/office/drawing/2014/main" id="{4F0D3DEE-965A-3CA3-241A-6F54F089EDA6}"/>
+          <p:cNvPr id="2" name="제목 1">
+            <a:extLst>
+              <a:ext uri="{FF2B5EF4-FFF2-40B4-BE49-F238E27FC236}">
+                <a16:creationId xmlns:a16="http://schemas.microsoft.com/office/drawing/2014/main" id="{011160C2-C3EB-FC47-1EED-1DAB0E84047F}"/>
+              </a:ext>
+            </a:extLst>
+          </p:cNvPr>
+          <p:cNvSpPr>
+            <a:spLocks noGrp="1"/>
+          </p:cNvSpPr>
+          <p:nvPr>
+            <p:ph type="title"/>
+          </p:nvPr>
+        </p:nvSpPr>
+        <p:spPr>
+          <a:xfrm>
+            <a:off x="0" y="-773419"/>
+            <a:ext cx="9144000" cy="857250"/>
+          </a:xfrm>
+        </p:spPr>
+        <p:txBody>
+          <a:bodyPr>
+            <a:normAutofit/>
+          </a:bodyPr>
+          <a:lstStyle/>
+          <a:p>
+            <a:r>
+              <a:rPr lang="en-US" altLang="ko-KR"/>
+              <a:t>CUDA Container Stack</a:t>
+            </a:r>
+            <a:endParaRPr lang="ko-KR" altLang="en-US" dirty="0"/>
+          </a:p>
+        </p:txBody>
+      </p:sp>
+      <p:sp>
+        <p:nvSpPr>
+          <p:cNvPr id="72" name="사각형: 둥근 모서리 114">
+            <a:extLst>
+              <a:ext uri="{FF2B5EF4-FFF2-40B4-BE49-F238E27FC236}">
+                <a16:creationId xmlns:a16="http://schemas.microsoft.com/office/drawing/2014/main" id="{30D7E37D-8EA3-EAAE-6CB7-3495FE2FDBEA}"/>
               </a:ext>
             </a:extLst>
           </p:cNvPr>
@@ -42025,8 +42061,8 @@
         </p:nvSpPr>
         <p:spPr>
           <a:xfrm>
-            <a:off x="4403178" y="124416"/>
-            <a:ext cx="1385789" cy="1990371"/>
+            <a:off x="93667" y="336814"/>
+            <a:ext cx="2629655" cy="2141343"/>
           </a:xfrm>
           <a:prstGeom prst="roundRect">
             <a:avLst>
@@ -42056,7 +42092,7 @@
             <a:pPr algn="ctr"/>
             <a:r>
               <a:rPr lang="en-US" altLang="ko-KR" sz="1000" b="1"/>
-              <a:t>Pod C</a:t>
+              <a:t>Container A</a:t>
             </a:r>
             <a:endParaRPr lang="ko-KR" altLang="en-US" sz="1000" b="1" dirty="0">
               <a:solidFill>
@@ -42070,10 +42106,10 @@
       </p:sp>
       <p:sp>
         <p:nvSpPr>
-          <p:cNvPr id="3" name="사각형: 둥근 모서리 114">
-            <a:extLst>
-              <a:ext uri="{FF2B5EF4-FFF2-40B4-BE49-F238E27FC236}">
-                <a16:creationId xmlns:a16="http://schemas.microsoft.com/office/drawing/2014/main" id="{65F7A1F3-8A1A-3FF7-26B1-5136613AF6CF}"/>
+          <p:cNvPr id="74" name="사각형: 둥근 모서리 114">
+            <a:extLst>
+              <a:ext uri="{FF2B5EF4-FFF2-40B4-BE49-F238E27FC236}">
+                <a16:creationId xmlns:a16="http://schemas.microsoft.com/office/drawing/2014/main" id="{FF05ED97-60E2-36FB-FCE4-D902705F8492}"/>
               </a:ext>
             </a:extLst>
           </p:cNvPr>
@@ -42082,158 +42118,8 @@
         </p:nvSpPr>
         <p:spPr>
           <a:xfrm>
-            <a:off x="360495" y="128188"/>
-            <a:ext cx="1379765" cy="1990371"/>
-          </a:xfrm>
-          <a:prstGeom prst="roundRect">
-            <a:avLst>
-              <a:gd name="adj" fmla="val 4159"/>
-            </a:avLst>
-          </a:prstGeom>
-          <a:ln w="12700"/>
-        </p:spPr>
-        <p:style>
-          <a:lnRef idx="2">
-            <a:schemeClr val="dk1"/>
-          </a:lnRef>
-          <a:fillRef idx="1">
-            <a:schemeClr val="lt1"/>
-          </a:fillRef>
-          <a:effectRef idx="0">
-            <a:schemeClr val="dk1"/>
-          </a:effectRef>
-          <a:fontRef idx="minor">
-            <a:schemeClr val="dk1"/>
-          </a:fontRef>
-        </p:style>
-        <p:txBody>
-          <a:bodyPr rtlCol="0" anchor="t"/>
-          <a:lstStyle/>
-          <a:p>
-            <a:pPr algn="ctr"/>
-            <a:r>
-              <a:rPr lang="en-US" altLang="ko-KR" sz="1000" b="1"/>
-              <a:t>Pod A</a:t>
-            </a:r>
-            <a:endParaRPr lang="ko-KR" altLang="en-US" sz="1000" b="1" dirty="0">
-              <a:solidFill>
-                <a:schemeClr val="accent2">
-                  <a:lumMod val="75000"/>
-                </a:schemeClr>
-              </a:solidFill>
-            </a:endParaRPr>
-          </a:p>
-        </p:txBody>
-      </p:sp>
-      <p:sp>
-        <p:nvSpPr>
-          <p:cNvPr id="2" name="제목 1">
-            <a:extLst>
-              <a:ext uri="{FF2B5EF4-FFF2-40B4-BE49-F238E27FC236}">
-                <a16:creationId xmlns:a16="http://schemas.microsoft.com/office/drawing/2014/main" id="{011160C2-C3EB-FC47-1EED-1DAB0E84047F}"/>
-              </a:ext>
-            </a:extLst>
-          </p:cNvPr>
-          <p:cNvSpPr>
-            <a:spLocks noGrp="1"/>
-          </p:cNvSpPr>
-          <p:nvPr>
-            <p:ph type="title"/>
-          </p:nvPr>
-        </p:nvSpPr>
-        <p:spPr>
-          <a:xfrm>
-            <a:off x="0" y="-773419"/>
-            <a:ext cx="9144000" cy="857250"/>
-          </a:xfrm>
-        </p:spPr>
-        <p:txBody>
-          <a:bodyPr>
-            <a:normAutofit/>
-          </a:bodyPr>
-          <a:lstStyle/>
-          <a:p>
-            <a:r>
-              <a:rPr lang="en-US" altLang="ko-KR"/>
-              <a:t>CUDA Container Stack</a:t>
-            </a:r>
-            <a:endParaRPr lang="ko-KR" altLang="en-US" dirty="0"/>
-          </a:p>
-        </p:txBody>
-      </p:sp>
-      <p:sp>
-        <p:nvSpPr>
-          <p:cNvPr id="36" name="사각형: 둥근 모서리 114">
-            <a:extLst>
-              <a:ext uri="{FF2B5EF4-FFF2-40B4-BE49-F238E27FC236}">
-                <a16:creationId xmlns:a16="http://schemas.microsoft.com/office/drawing/2014/main" id="{FFA82746-B43D-10A6-8D66-10EE9F3D262B}"/>
-              </a:ext>
-            </a:extLst>
-          </p:cNvPr>
-          <p:cNvSpPr/>
-          <p:nvPr/>
-        </p:nvSpPr>
-        <p:spPr>
-          <a:xfrm>
-            <a:off x="1830421" y="410457"/>
-            <a:ext cx="2486761" cy="1662236"/>
-          </a:xfrm>
-          <a:prstGeom prst="roundRect">
-            <a:avLst>
-              <a:gd name="adj" fmla="val 4028"/>
-            </a:avLst>
-          </a:prstGeom>
-          <a:ln w="12700"/>
-        </p:spPr>
-        <p:style>
-          <a:lnRef idx="2">
-            <a:schemeClr val="dk1"/>
-          </a:lnRef>
-          <a:fillRef idx="1">
-            <a:schemeClr val="lt1"/>
-          </a:fillRef>
-          <a:effectRef idx="0">
-            <a:schemeClr val="dk1"/>
-          </a:effectRef>
-          <a:fontRef idx="minor">
-            <a:schemeClr val="dk1"/>
-          </a:fontRef>
-        </p:style>
-        <p:txBody>
-          <a:bodyPr rtlCol="0" anchor="t"/>
-          <a:lstStyle/>
-          <a:p>
-            <a:pPr algn="ctr"/>
-            <a:r>
-              <a:rPr lang="en-US" altLang="ko-KR" sz="1000" b="1"/>
-              <a:t>Container B</a:t>
-            </a:r>
-            <a:endParaRPr lang="ko-KR" altLang="en-US" sz="1000" b="1" dirty="0">
-              <a:solidFill>
-                <a:schemeClr val="accent2">
-                  <a:lumMod val="75000"/>
-                </a:schemeClr>
-              </a:solidFill>
-            </a:endParaRPr>
-          </a:p>
-        </p:txBody>
-      </p:sp>
-      <p:sp>
-        <p:nvSpPr>
-          <p:cNvPr id="48" name="사각형: 둥근 모서리 114">
-            <a:extLst>
-              <a:ext uri="{FF2B5EF4-FFF2-40B4-BE49-F238E27FC236}">
-                <a16:creationId xmlns:a16="http://schemas.microsoft.com/office/drawing/2014/main" id="{29B7AEDD-50CB-202E-4BF7-21D27C0A8620}"/>
-              </a:ext>
-            </a:extLst>
-          </p:cNvPr>
-          <p:cNvSpPr/>
-          <p:nvPr/>
-        </p:nvSpPr>
-        <p:spPr>
-          <a:xfrm>
-            <a:off x="1918155" y="1604484"/>
-            <a:ext cx="1099999" cy="383228"/>
+            <a:off x="179514" y="1526478"/>
+            <a:ext cx="1195578" cy="383228"/>
           </a:xfrm>
           <a:prstGeom prst="roundRect">
             <a:avLst>
@@ -42268,7 +42154,14 @@
             <a:pPr algn="ctr"/>
             <a:r>
               <a:rPr lang="en-US" altLang="ko-KR" sz="1000"/>
-              <a:t>/dev/nvidia0</a:t>
+              <a:t>/dev/nvidia-caps</a:t>
+            </a:r>
+            <a:br>
+              <a:rPr lang="en-US" altLang="ko-KR" sz="1000"/>
+            </a:br>
+            <a:r>
+              <a:rPr lang="en-US" altLang="ko-KR" sz="1000"/>
+              <a:t>/nvidia-caps21</a:t>
             </a:r>
             <a:endParaRPr lang="en-US" altLang="ko-KR" sz="1000" dirty="0"/>
           </a:p>
@@ -42276,10 +42169,10 @@
       </p:sp>
       <p:sp>
         <p:nvSpPr>
-          <p:cNvPr id="49" name="사각형: 둥근 모서리 114">
-            <a:extLst>
-              <a:ext uri="{FF2B5EF4-FFF2-40B4-BE49-F238E27FC236}">
-                <a16:creationId xmlns:a16="http://schemas.microsoft.com/office/drawing/2014/main" id="{AD2A0871-EC8B-66BF-0DFB-86929B163FD3}"/>
+          <p:cNvPr id="75" name="사각형: 둥근 모서리 114">
+            <a:extLst>
+              <a:ext uri="{FF2B5EF4-FFF2-40B4-BE49-F238E27FC236}">
+                <a16:creationId xmlns:a16="http://schemas.microsoft.com/office/drawing/2014/main" id="{43874343-60E0-E89C-D932-118D558CCA10}"/>
               </a:ext>
             </a:extLst>
           </p:cNvPr>
@@ -42288,12 +42181,170 @@
         </p:nvSpPr>
         <p:spPr>
           <a:xfrm>
-            <a:off x="3119755" y="1604484"/>
-            <a:ext cx="1099868" cy="383228"/>
+            <a:off x="179512" y="1056152"/>
+            <a:ext cx="2451551" cy="383228"/>
           </a:xfrm>
           <a:prstGeom prst="roundRect">
             <a:avLst>
               <a:gd name="adj" fmla="val 7242"/>
+            </a:avLst>
+          </a:prstGeom>
+          <a:solidFill>
+            <a:schemeClr val="bg2">
+              <a:lumMod val="90000"/>
+            </a:schemeClr>
+          </a:solidFill>
+          <a:ln w="12700"/>
+        </p:spPr>
+        <p:style>
+          <a:lnRef idx="2">
+            <a:schemeClr val="dk1"/>
+          </a:lnRef>
+          <a:fillRef idx="1">
+            <a:schemeClr val="lt1"/>
+          </a:fillRef>
+          <a:effectRef idx="0">
+            <a:schemeClr val="dk1"/>
+          </a:effectRef>
+          <a:fontRef idx="minor">
+            <a:schemeClr val="dk1"/>
+          </a:fontRef>
+        </p:style>
+        <p:txBody>
+          <a:bodyPr rtlCol="0" anchor="ctr"/>
+          <a:lstStyle/>
+          <a:p>
+            <a:pPr algn="ctr"/>
+            <a:r>
+              <a:rPr lang="en-US" altLang="ko-KR" sz="900"/>
+              <a:t>NVIDIA CUDA Lib/Toolkit</a:t>
+            </a:r>
+            <a:endParaRPr lang="en-US" altLang="ko-KR" sz="900" dirty="0"/>
+          </a:p>
+        </p:txBody>
+      </p:sp>
+      <p:sp>
+        <p:nvSpPr>
+          <p:cNvPr id="148" name="사각형: 둥근 모서리 114">
+            <a:extLst>
+              <a:ext uri="{FF2B5EF4-FFF2-40B4-BE49-F238E27FC236}">
+                <a16:creationId xmlns:a16="http://schemas.microsoft.com/office/drawing/2014/main" id="{9E55AE19-5E07-FC35-F880-DA6C16EFF422}"/>
+              </a:ext>
+            </a:extLst>
+          </p:cNvPr>
+          <p:cNvSpPr/>
+          <p:nvPr/>
+        </p:nvSpPr>
+        <p:spPr>
+          <a:xfrm>
+            <a:off x="179512" y="610481"/>
+            <a:ext cx="2451550" cy="383228"/>
+          </a:xfrm>
+          <a:prstGeom prst="roundRect">
+            <a:avLst>
+              <a:gd name="adj" fmla="val 7242"/>
+            </a:avLst>
+          </a:prstGeom>
+          <a:ln w="12700"/>
+        </p:spPr>
+        <p:style>
+          <a:lnRef idx="2">
+            <a:schemeClr val="dk1"/>
+          </a:lnRef>
+          <a:fillRef idx="1">
+            <a:schemeClr val="lt1"/>
+          </a:fillRef>
+          <a:effectRef idx="0">
+            <a:schemeClr val="dk1"/>
+          </a:effectRef>
+          <a:fontRef idx="minor">
+            <a:schemeClr val="dk1"/>
+          </a:fontRef>
+        </p:style>
+        <p:txBody>
+          <a:bodyPr rtlCol="0" anchor="ctr"/>
+          <a:lstStyle/>
+          <a:p>
+            <a:pPr algn="ctr"/>
+            <a:r>
+              <a:rPr lang="en-US" altLang="ko-KR" sz="900"/>
+              <a:t>App with NVIDIA_VISIBLE_DEVICES Env  </a:t>
+            </a:r>
+            <a:endParaRPr lang="en-US" altLang="ko-KR" sz="900" dirty="0"/>
+          </a:p>
+        </p:txBody>
+      </p:sp>
+      <p:sp>
+        <p:nvSpPr>
+          <p:cNvPr id="9" name="사각형: 둥근 모서리 114">
+            <a:extLst>
+              <a:ext uri="{FF2B5EF4-FFF2-40B4-BE49-F238E27FC236}">
+                <a16:creationId xmlns:a16="http://schemas.microsoft.com/office/drawing/2014/main" id="{BFA1BDBB-A396-A062-6C9F-0F76A9AB1ABB}"/>
+              </a:ext>
+            </a:extLst>
+          </p:cNvPr>
+          <p:cNvSpPr/>
+          <p:nvPr/>
+        </p:nvSpPr>
+        <p:spPr>
+          <a:xfrm>
+            <a:off x="43907" y="2709472"/>
+            <a:ext cx="5773798" cy="2264369"/>
+          </a:xfrm>
+          <a:prstGeom prst="roundRect">
+            <a:avLst>
+              <a:gd name="adj" fmla="val 2252"/>
+            </a:avLst>
+          </a:prstGeom>
+          <a:ln w="12700"/>
+        </p:spPr>
+        <p:style>
+          <a:lnRef idx="2">
+            <a:schemeClr val="dk1"/>
+          </a:lnRef>
+          <a:fillRef idx="1">
+            <a:schemeClr val="lt1"/>
+          </a:fillRef>
+          <a:effectRef idx="0">
+            <a:schemeClr val="dk1"/>
+          </a:effectRef>
+          <a:fontRef idx="minor">
+            <a:schemeClr val="dk1"/>
+          </a:fontRef>
+        </p:style>
+        <p:txBody>
+          <a:bodyPr rtlCol="0" anchor="b"/>
+          <a:lstStyle/>
+          <a:p>
+            <a:pPr algn="ctr"/>
+            <a:r>
+              <a:rPr lang="en-US" altLang="ko-KR" sz="1000" b="1"/>
+              <a:t>Host</a:t>
+            </a:r>
+            <a:endParaRPr lang="en-US" altLang="ko-KR" sz="1000" b="1" dirty="0"/>
+          </a:p>
+        </p:txBody>
+      </p:sp>
+      <p:sp>
+        <p:nvSpPr>
+          <p:cNvPr id="12" name="사각형: 둥근 모서리 114">
+            <a:extLst>
+              <a:ext uri="{FF2B5EF4-FFF2-40B4-BE49-F238E27FC236}">
+                <a16:creationId xmlns:a16="http://schemas.microsoft.com/office/drawing/2014/main" id="{C7E8C59F-D6F9-F850-854C-565A25E87889}"/>
+              </a:ext>
+            </a:extLst>
+          </p:cNvPr>
+          <p:cNvSpPr/>
+          <p:nvPr/>
+        </p:nvSpPr>
+        <p:spPr>
+          <a:xfrm>
+            <a:off x="182636" y="4343733"/>
+            <a:ext cx="4105365" cy="383228"/>
+          </a:xfrm>
+          <a:prstGeom prst="roundRect">
+            <a:avLst>
+              <a:gd name="adj" fmla="val 14292"/>
             </a:avLst>
           </a:prstGeom>
           <a:solidFill>
@@ -42324,7 +42375,14 @@
             <a:pPr algn="ctr"/>
             <a:r>
               <a:rPr lang="en-US" altLang="ko-KR" sz="1000"/>
-              <a:t>/dev/nvidia1</a:t>
+              <a:t>NVIDIA</a:t>
+            </a:r>
+          </a:p>
+          <a:p>
+            <a:pPr algn="ctr"/>
+            <a:r>
+              <a:rPr lang="en-US" altLang="ko-KR" sz="1000"/>
+              <a:t>GPU 0</a:t>
             </a:r>
             <a:endParaRPr lang="en-US" altLang="ko-KR" sz="1000" dirty="0"/>
           </a:p>
@@ -42332,10 +42390,10 @@
       </p:sp>
       <p:sp>
         <p:nvSpPr>
-          <p:cNvPr id="53" name="사각형: 둥근 모서리 114">
-            <a:extLst>
-              <a:ext uri="{FF2B5EF4-FFF2-40B4-BE49-F238E27FC236}">
-                <a16:creationId xmlns:a16="http://schemas.microsoft.com/office/drawing/2014/main" id="{6443428F-0DB1-DDD0-51B4-07CE6C2080C1}"/>
+          <p:cNvPr id="13" name="사각형: 둥근 모서리 114">
+            <a:extLst>
+              <a:ext uri="{FF2B5EF4-FFF2-40B4-BE49-F238E27FC236}">
+                <a16:creationId xmlns:a16="http://schemas.microsoft.com/office/drawing/2014/main" id="{FBA5DA3A-3C17-ED7E-3CB4-1626401FA50D}"/>
               </a:ext>
             </a:extLst>
           </p:cNvPr>
@@ -42344,12 +42402,68 @@
         </p:nvSpPr>
         <p:spPr>
           <a:xfrm>
-            <a:off x="1918155" y="1134159"/>
-            <a:ext cx="2301467" cy="383228"/>
+            <a:off x="190202" y="3306888"/>
+            <a:ext cx="1276177" cy="383228"/>
           </a:xfrm>
           <a:prstGeom prst="roundRect">
             <a:avLst>
-              <a:gd name="adj" fmla="val 7242"/>
+              <a:gd name="adj" fmla="val 14292"/>
+            </a:avLst>
+          </a:prstGeom>
+          <a:solidFill>
+            <a:schemeClr val="bg1">
+              <a:lumMod val="95000"/>
+            </a:schemeClr>
+          </a:solidFill>
+          <a:ln w="12700"/>
+        </p:spPr>
+        <p:style>
+          <a:lnRef idx="2">
+            <a:schemeClr val="dk1"/>
+          </a:lnRef>
+          <a:fillRef idx="1">
+            <a:schemeClr val="lt1"/>
+          </a:fillRef>
+          <a:effectRef idx="0">
+            <a:schemeClr val="dk1"/>
+          </a:effectRef>
+          <a:fontRef idx="minor">
+            <a:schemeClr val="dk1"/>
+          </a:fontRef>
+        </p:style>
+        <p:txBody>
+          <a:bodyPr rtlCol="0" anchor="ctr"/>
+          <a:lstStyle/>
+          <a:p>
+            <a:pPr algn="ctr"/>
+            <a:r>
+              <a:rPr lang="en-US" altLang="ko-KR" sz="1000"/>
+              <a:t>Compute Instance</a:t>
+            </a:r>
+            <a:endParaRPr lang="en-US" altLang="ko-KR" sz="1000" dirty="0"/>
+          </a:p>
+        </p:txBody>
+      </p:sp>
+      <p:sp>
+        <p:nvSpPr>
+          <p:cNvPr id="26" name="사각형: 둥근 모서리 114">
+            <a:extLst>
+              <a:ext uri="{FF2B5EF4-FFF2-40B4-BE49-F238E27FC236}">
+                <a16:creationId xmlns:a16="http://schemas.microsoft.com/office/drawing/2014/main" id="{FCE85E77-3D27-710D-A18E-7CC2CF02A4F4}"/>
+              </a:ext>
+            </a:extLst>
+          </p:cNvPr>
+          <p:cNvSpPr/>
+          <p:nvPr/>
+        </p:nvSpPr>
+        <p:spPr>
+          <a:xfrm>
+            <a:off x="177821" y="2784565"/>
+            <a:ext cx="5492498" cy="383228"/>
+          </a:xfrm>
+          <a:prstGeom prst="roundRect">
+            <a:avLst>
+              <a:gd name="adj" fmla="val 17067"/>
             </a:avLst>
           </a:prstGeom>
           <a:solidFill>
@@ -42379,923 +42493,6 @@
           <a:p>
             <a:pPr algn="ctr"/>
             <a:r>
-              <a:rPr lang="en-US" altLang="ko-KR" sz="900"/>
-              <a:t>NVIDIA CUDA Lib/Toolkit</a:t>
-            </a:r>
-            <a:endParaRPr lang="en-US" altLang="ko-KR" sz="900" dirty="0"/>
-          </a:p>
-        </p:txBody>
-      </p:sp>
-      <p:sp>
-        <p:nvSpPr>
-          <p:cNvPr id="72" name="사각형: 둥근 모서리 114">
-            <a:extLst>
-              <a:ext uri="{FF2B5EF4-FFF2-40B4-BE49-F238E27FC236}">
-                <a16:creationId xmlns:a16="http://schemas.microsoft.com/office/drawing/2014/main" id="{30D7E37D-8EA3-EAAE-6CB7-3495FE2FDBEA}"/>
-              </a:ext>
-            </a:extLst>
-          </p:cNvPr>
-          <p:cNvSpPr/>
-          <p:nvPr/>
-        </p:nvSpPr>
-        <p:spPr>
-          <a:xfrm>
-            <a:off x="410256" y="404977"/>
-            <a:ext cx="1274717" cy="1662236"/>
-          </a:xfrm>
-          <a:prstGeom prst="roundRect">
-            <a:avLst>
-              <a:gd name="adj" fmla="val 4159"/>
-            </a:avLst>
-          </a:prstGeom>
-          <a:ln w="12700"/>
-        </p:spPr>
-        <p:style>
-          <a:lnRef idx="2">
-            <a:schemeClr val="dk1"/>
-          </a:lnRef>
-          <a:fillRef idx="1">
-            <a:schemeClr val="lt1"/>
-          </a:fillRef>
-          <a:effectRef idx="0">
-            <a:schemeClr val="dk1"/>
-          </a:effectRef>
-          <a:fontRef idx="minor">
-            <a:schemeClr val="dk1"/>
-          </a:fontRef>
-        </p:style>
-        <p:txBody>
-          <a:bodyPr rtlCol="0" anchor="t"/>
-          <a:lstStyle/>
-          <a:p>
-            <a:pPr algn="ctr"/>
-            <a:r>
-              <a:rPr lang="en-US" altLang="ko-KR" sz="1000" b="1"/>
-              <a:t>Container A</a:t>
-            </a:r>
-            <a:endParaRPr lang="ko-KR" altLang="en-US" sz="1000" b="1" dirty="0">
-              <a:solidFill>
-                <a:schemeClr val="accent2">
-                  <a:lumMod val="75000"/>
-                </a:schemeClr>
-              </a:solidFill>
-            </a:endParaRPr>
-          </a:p>
-        </p:txBody>
-      </p:sp>
-      <p:sp>
-        <p:nvSpPr>
-          <p:cNvPr id="74" name="사각형: 둥근 모서리 114">
-            <a:extLst>
-              <a:ext uri="{FF2B5EF4-FFF2-40B4-BE49-F238E27FC236}">
-                <a16:creationId xmlns:a16="http://schemas.microsoft.com/office/drawing/2014/main" id="{FF05ED97-60E2-36FB-FCE4-D902705F8492}"/>
-              </a:ext>
-            </a:extLst>
-          </p:cNvPr>
-          <p:cNvSpPr/>
-          <p:nvPr/>
-        </p:nvSpPr>
-        <p:spPr>
-          <a:xfrm>
-            <a:off x="496102" y="1594640"/>
-            <a:ext cx="1098712" cy="383228"/>
-          </a:xfrm>
-          <a:prstGeom prst="roundRect">
-            <a:avLst>
-              <a:gd name="adj" fmla="val 7242"/>
-            </a:avLst>
-          </a:prstGeom>
-          <a:solidFill>
-            <a:schemeClr val="bg1">
-              <a:lumMod val="95000"/>
-            </a:schemeClr>
-          </a:solidFill>
-          <a:ln w="12700"/>
-        </p:spPr>
-        <p:style>
-          <a:lnRef idx="2">
-            <a:schemeClr val="dk1"/>
-          </a:lnRef>
-          <a:fillRef idx="1">
-            <a:schemeClr val="lt1"/>
-          </a:fillRef>
-          <a:effectRef idx="0">
-            <a:schemeClr val="dk1"/>
-          </a:effectRef>
-          <a:fontRef idx="minor">
-            <a:schemeClr val="dk1"/>
-          </a:fontRef>
-        </p:style>
-        <p:txBody>
-          <a:bodyPr rtlCol="0" anchor="ctr"/>
-          <a:lstStyle/>
-          <a:p>
-            <a:pPr algn="ctr"/>
-            <a:r>
-              <a:rPr lang="en-US" altLang="ko-KR" sz="1000"/>
-              <a:t>/dev/nvidia0</a:t>
-            </a:r>
-            <a:endParaRPr lang="en-US" altLang="ko-KR" sz="1000" dirty="0"/>
-          </a:p>
-        </p:txBody>
-      </p:sp>
-      <p:sp>
-        <p:nvSpPr>
-          <p:cNvPr id="75" name="사각형: 둥근 모서리 114">
-            <a:extLst>
-              <a:ext uri="{FF2B5EF4-FFF2-40B4-BE49-F238E27FC236}">
-                <a16:creationId xmlns:a16="http://schemas.microsoft.com/office/drawing/2014/main" id="{43874343-60E0-E89C-D932-118D558CCA10}"/>
-              </a:ext>
-            </a:extLst>
-          </p:cNvPr>
-          <p:cNvSpPr/>
-          <p:nvPr/>
-        </p:nvSpPr>
-        <p:spPr>
-          <a:xfrm>
-            <a:off x="496101" y="1124314"/>
-            <a:ext cx="1098711" cy="383228"/>
-          </a:xfrm>
-          <a:prstGeom prst="roundRect">
-            <a:avLst>
-              <a:gd name="adj" fmla="val 7242"/>
-            </a:avLst>
-          </a:prstGeom>
-          <a:solidFill>
-            <a:schemeClr val="bg2">
-              <a:lumMod val="90000"/>
-            </a:schemeClr>
-          </a:solidFill>
-          <a:ln w="12700"/>
-        </p:spPr>
-        <p:style>
-          <a:lnRef idx="2">
-            <a:schemeClr val="dk1"/>
-          </a:lnRef>
-          <a:fillRef idx="1">
-            <a:schemeClr val="lt1"/>
-          </a:fillRef>
-          <a:effectRef idx="0">
-            <a:schemeClr val="dk1"/>
-          </a:effectRef>
-          <a:fontRef idx="minor">
-            <a:schemeClr val="dk1"/>
-          </a:fontRef>
-        </p:style>
-        <p:txBody>
-          <a:bodyPr rtlCol="0" anchor="ctr"/>
-          <a:lstStyle/>
-          <a:p>
-            <a:pPr algn="ctr"/>
-            <a:r>
-              <a:rPr lang="en-US" altLang="ko-KR" sz="900"/>
-              <a:t>NVIDIA CUDA Lib/Toolkit</a:t>
-            </a:r>
-            <a:endParaRPr lang="en-US" altLang="ko-KR" sz="900" dirty="0"/>
-          </a:p>
-        </p:txBody>
-      </p:sp>
-      <p:sp>
-        <p:nvSpPr>
-          <p:cNvPr id="146" name="사각형: 둥근 모서리 114">
-            <a:extLst>
-              <a:ext uri="{FF2B5EF4-FFF2-40B4-BE49-F238E27FC236}">
-                <a16:creationId xmlns:a16="http://schemas.microsoft.com/office/drawing/2014/main" id="{F54B0980-F329-1C59-2DA8-A825C81A32BC}"/>
-              </a:ext>
-            </a:extLst>
-          </p:cNvPr>
-          <p:cNvSpPr/>
-          <p:nvPr/>
-        </p:nvSpPr>
-        <p:spPr>
-          <a:xfrm>
-            <a:off x="1918155" y="683008"/>
-            <a:ext cx="2301467" cy="383228"/>
-          </a:xfrm>
-          <a:prstGeom prst="roundRect">
-            <a:avLst>
-              <a:gd name="adj" fmla="val 7242"/>
-            </a:avLst>
-          </a:prstGeom>
-          <a:ln w="12700"/>
-        </p:spPr>
-        <p:style>
-          <a:lnRef idx="2">
-            <a:schemeClr val="dk1"/>
-          </a:lnRef>
-          <a:fillRef idx="1">
-            <a:schemeClr val="lt1"/>
-          </a:fillRef>
-          <a:effectRef idx="0">
-            <a:schemeClr val="dk1"/>
-          </a:effectRef>
-          <a:fontRef idx="minor">
-            <a:schemeClr val="dk1"/>
-          </a:fontRef>
-        </p:style>
-        <p:txBody>
-          <a:bodyPr rtlCol="0" anchor="ctr"/>
-          <a:lstStyle/>
-          <a:p>
-            <a:pPr algn="ctr"/>
-            <a:r>
-              <a:rPr lang="en-US" altLang="ko-KR" sz="900"/>
-              <a:t>App with </a:t>
-            </a:r>
-          </a:p>
-          <a:p>
-            <a:pPr algn="ctr"/>
-            <a:r>
-              <a:rPr lang="en-US" altLang="ko-KR" sz="900"/>
-              <a:t>NVIDIA_VISIBLE_DEVICES Env  </a:t>
-            </a:r>
-            <a:endParaRPr lang="en-US" altLang="ko-KR" sz="900" dirty="0"/>
-          </a:p>
-        </p:txBody>
-      </p:sp>
-      <p:sp>
-        <p:nvSpPr>
-          <p:cNvPr id="148" name="사각형: 둥근 모서리 114">
-            <a:extLst>
-              <a:ext uri="{FF2B5EF4-FFF2-40B4-BE49-F238E27FC236}">
-                <a16:creationId xmlns:a16="http://schemas.microsoft.com/office/drawing/2014/main" id="{9E55AE19-5E07-FC35-F880-DA6C16EFF422}"/>
-              </a:ext>
-            </a:extLst>
-          </p:cNvPr>
-          <p:cNvSpPr/>
-          <p:nvPr/>
-        </p:nvSpPr>
-        <p:spPr>
-          <a:xfrm>
-            <a:off x="496101" y="678643"/>
-            <a:ext cx="1098712" cy="383228"/>
-          </a:xfrm>
-          <a:prstGeom prst="roundRect">
-            <a:avLst>
-              <a:gd name="adj" fmla="val 7242"/>
-            </a:avLst>
-          </a:prstGeom>
-          <a:ln w="12700"/>
-        </p:spPr>
-        <p:style>
-          <a:lnRef idx="2">
-            <a:schemeClr val="dk1"/>
-          </a:lnRef>
-          <a:fillRef idx="1">
-            <a:schemeClr val="lt1"/>
-          </a:fillRef>
-          <a:effectRef idx="0">
-            <a:schemeClr val="dk1"/>
-          </a:effectRef>
-          <a:fontRef idx="minor">
-            <a:schemeClr val="dk1"/>
-          </a:fontRef>
-        </p:style>
-        <p:txBody>
-          <a:bodyPr rtlCol="0" anchor="ctr"/>
-          <a:lstStyle/>
-          <a:p>
-            <a:pPr algn="ctr"/>
-            <a:r>
-              <a:rPr lang="en-US" altLang="ko-KR" sz="900"/>
-              <a:t>App with </a:t>
-            </a:r>
-          </a:p>
-          <a:p>
-            <a:pPr algn="ctr"/>
-            <a:r>
-              <a:rPr lang="en-US" altLang="ko-KR" sz="900"/>
-              <a:t>NVIDIA_VISIBLE_</a:t>
-            </a:r>
-            <a:br>
-              <a:rPr lang="en-US" altLang="ko-KR" sz="900"/>
-            </a:br>
-            <a:r>
-              <a:rPr lang="en-US" altLang="ko-KR" sz="900"/>
-              <a:t>DEVICES Env  </a:t>
-            </a:r>
-            <a:endParaRPr lang="en-US" altLang="ko-KR" sz="900" dirty="0"/>
-          </a:p>
-        </p:txBody>
-      </p:sp>
-      <p:sp>
-        <p:nvSpPr>
-          <p:cNvPr id="4" name="사각형: 둥근 모서리 114">
-            <a:extLst>
-              <a:ext uri="{FF2B5EF4-FFF2-40B4-BE49-F238E27FC236}">
-                <a16:creationId xmlns:a16="http://schemas.microsoft.com/office/drawing/2014/main" id="{C59107C5-6B6E-E569-F765-58FF421AEA5D}"/>
-              </a:ext>
-            </a:extLst>
-          </p:cNvPr>
-          <p:cNvSpPr/>
-          <p:nvPr/>
-        </p:nvSpPr>
-        <p:spPr>
-          <a:xfrm>
-            <a:off x="4451870" y="404977"/>
-            <a:ext cx="1274717" cy="1662236"/>
-          </a:xfrm>
-          <a:prstGeom prst="roundRect">
-            <a:avLst>
-              <a:gd name="adj" fmla="val 4159"/>
-            </a:avLst>
-          </a:prstGeom>
-          <a:ln w="12700"/>
-        </p:spPr>
-        <p:style>
-          <a:lnRef idx="2">
-            <a:schemeClr val="dk1"/>
-          </a:lnRef>
-          <a:fillRef idx="1">
-            <a:schemeClr val="lt1"/>
-          </a:fillRef>
-          <a:effectRef idx="0">
-            <a:schemeClr val="dk1"/>
-          </a:effectRef>
-          <a:fontRef idx="minor">
-            <a:schemeClr val="dk1"/>
-          </a:fontRef>
-        </p:style>
-        <p:txBody>
-          <a:bodyPr rtlCol="0" anchor="t"/>
-          <a:lstStyle/>
-          <a:p>
-            <a:pPr algn="ctr"/>
-            <a:r>
-              <a:rPr lang="en-US" altLang="ko-KR" sz="1000" b="1"/>
-              <a:t>Container C</a:t>
-            </a:r>
-            <a:endParaRPr lang="ko-KR" altLang="en-US" sz="1000" b="1" dirty="0">
-              <a:solidFill>
-                <a:schemeClr val="accent2">
-                  <a:lumMod val="75000"/>
-                </a:schemeClr>
-              </a:solidFill>
-            </a:endParaRPr>
-          </a:p>
-        </p:txBody>
-      </p:sp>
-      <p:sp>
-        <p:nvSpPr>
-          <p:cNvPr id="5" name="사각형: 둥근 모서리 114">
-            <a:extLst>
-              <a:ext uri="{FF2B5EF4-FFF2-40B4-BE49-F238E27FC236}">
-                <a16:creationId xmlns:a16="http://schemas.microsoft.com/office/drawing/2014/main" id="{C5F8079D-043E-B1AC-AF3C-C8C78C7C52D5}"/>
-              </a:ext>
-            </a:extLst>
-          </p:cNvPr>
-          <p:cNvSpPr/>
-          <p:nvPr/>
-        </p:nvSpPr>
-        <p:spPr>
-          <a:xfrm>
-            <a:off x="4537716" y="1594640"/>
-            <a:ext cx="1098712" cy="383228"/>
-          </a:xfrm>
-          <a:prstGeom prst="roundRect">
-            <a:avLst>
-              <a:gd name="adj" fmla="val 7242"/>
-            </a:avLst>
-          </a:prstGeom>
-          <a:solidFill>
-            <a:schemeClr val="bg1">
-              <a:lumMod val="95000"/>
-            </a:schemeClr>
-          </a:solidFill>
-          <a:ln w="12700"/>
-        </p:spPr>
-        <p:style>
-          <a:lnRef idx="2">
-            <a:schemeClr val="dk1"/>
-          </a:lnRef>
-          <a:fillRef idx="1">
-            <a:schemeClr val="lt1"/>
-          </a:fillRef>
-          <a:effectRef idx="0">
-            <a:schemeClr val="dk1"/>
-          </a:effectRef>
-          <a:fontRef idx="minor">
-            <a:schemeClr val="dk1"/>
-          </a:fontRef>
-        </p:style>
-        <p:txBody>
-          <a:bodyPr rtlCol="0" anchor="ctr"/>
-          <a:lstStyle/>
-          <a:p>
-            <a:pPr algn="ctr"/>
-            <a:r>
-              <a:rPr lang="en-US" altLang="ko-KR" sz="1000"/>
-              <a:t>/dev/nvidia1</a:t>
-            </a:r>
-            <a:endParaRPr lang="en-US" altLang="ko-KR" sz="1000" dirty="0"/>
-          </a:p>
-        </p:txBody>
-      </p:sp>
-      <p:sp>
-        <p:nvSpPr>
-          <p:cNvPr id="6" name="사각형: 둥근 모서리 114">
-            <a:extLst>
-              <a:ext uri="{FF2B5EF4-FFF2-40B4-BE49-F238E27FC236}">
-                <a16:creationId xmlns:a16="http://schemas.microsoft.com/office/drawing/2014/main" id="{DE3F79AB-D750-5BD7-59EF-0F3BA4E55EC4}"/>
-              </a:ext>
-            </a:extLst>
-          </p:cNvPr>
-          <p:cNvSpPr/>
-          <p:nvPr/>
-        </p:nvSpPr>
-        <p:spPr>
-          <a:xfrm>
-            <a:off x="4537715" y="1124314"/>
-            <a:ext cx="1098711" cy="383228"/>
-          </a:xfrm>
-          <a:prstGeom prst="roundRect">
-            <a:avLst>
-              <a:gd name="adj" fmla="val 7242"/>
-            </a:avLst>
-          </a:prstGeom>
-          <a:solidFill>
-            <a:schemeClr val="bg2">
-              <a:lumMod val="90000"/>
-            </a:schemeClr>
-          </a:solidFill>
-          <a:ln w="12700"/>
-        </p:spPr>
-        <p:style>
-          <a:lnRef idx="2">
-            <a:schemeClr val="dk1"/>
-          </a:lnRef>
-          <a:fillRef idx="1">
-            <a:schemeClr val="lt1"/>
-          </a:fillRef>
-          <a:effectRef idx="0">
-            <a:schemeClr val="dk1"/>
-          </a:effectRef>
-          <a:fontRef idx="minor">
-            <a:schemeClr val="dk1"/>
-          </a:fontRef>
-        </p:style>
-        <p:txBody>
-          <a:bodyPr rtlCol="0" anchor="ctr"/>
-          <a:lstStyle/>
-          <a:p>
-            <a:pPr algn="ctr"/>
-            <a:r>
-              <a:rPr lang="en-US" altLang="ko-KR" sz="900"/>
-              <a:t>NVIDIA CUDA Lib/Toolkit</a:t>
-            </a:r>
-            <a:endParaRPr lang="en-US" altLang="ko-KR" sz="900" dirty="0"/>
-          </a:p>
-        </p:txBody>
-      </p:sp>
-      <p:sp>
-        <p:nvSpPr>
-          <p:cNvPr id="7" name="사각형: 둥근 모서리 114">
-            <a:extLst>
-              <a:ext uri="{FF2B5EF4-FFF2-40B4-BE49-F238E27FC236}">
-                <a16:creationId xmlns:a16="http://schemas.microsoft.com/office/drawing/2014/main" id="{567E3503-020D-C7E3-F8A8-3393A794227F}"/>
-              </a:ext>
-            </a:extLst>
-          </p:cNvPr>
-          <p:cNvSpPr/>
-          <p:nvPr/>
-        </p:nvSpPr>
-        <p:spPr>
-          <a:xfrm>
-            <a:off x="4537715" y="678643"/>
-            <a:ext cx="1098712" cy="383228"/>
-          </a:xfrm>
-          <a:prstGeom prst="roundRect">
-            <a:avLst>
-              <a:gd name="adj" fmla="val 7242"/>
-            </a:avLst>
-          </a:prstGeom>
-          <a:ln w="12700"/>
-        </p:spPr>
-        <p:style>
-          <a:lnRef idx="2">
-            <a:schemeClr val="dk1"/>
-          </a:lnRef>
-          <a:fillRef idx="1">
-            <a:schemeClr val="lt1"/>
-          </a:fillRef>
-          <a:effectRef idx="0">
-            <a:schemeClr val="dk1"/>
-          </a:effectRef>
-          <a:fontRef idx="minor">
-            <a:schemeClr val="dk1"/>
-          </a:fontRef>
-        </p:style>
-        <p:txBody>
-          <a:bodyPr rtlCol="0" anchor="ctr"/>
-          <a:lstStyle/>
-          <a:p>
-            <a:pPr algn="ctr"/>
-            <a:r>
-              <a:rPr lang="en-US" altLang="ko-KR" sz="900"/>
-              <a:t>App with </a:t>
-            </a:r>
-          </a:p>
-          <a:p>
-            <a:pPr algn="ctr"/>
-            <a:r>
-              <a:rPr lang="en-US" altLang="ko-KR" sz="900"/>
-              <a:t>NVIDIA_VISIBLE_</a:t>
-            </a:r>
-            <a:br>
-              <a:rPr lang="en-US" altLang="ko-KR" sz="900"/>
-            </a:br>
-            <a:r>
-              <a:rPr lang="en-US" altLang="ko-KR" sz="900"/>
-              <a:t>DEVICES Env  </a:t>
-            </a:r>
-            <a:endParaRPr lang="en-US" altLang="ko-KR" sz="900" dirty="0"/>
-          </a:p>
-        </p:txBody>
-      </p:sp>
-      <p:sp>
-        <p:nvSpPr>
-          <p:cNvPr id="9" name="사각형: 둥근 모서리 114">
-            <a:extLst>
-              <a:ext uri="{FF2B5EF4-FFF2-40B4-BE49-F238E27FC236}">
-                <a16:creationId xmlns:a16="http://schemas.microsoft.com/office/drawing/2014/main" id="{BFA1BDBB-A396-A062-6C9F-0F76A9AB1ABB}"/>
-              </a:ext>
-            </a:extLst>
-          </p:cNvPr>
-          <p:cNvSpPr/>
-          <p:nvPr/>
-        </p:nvSpPr>
-        <p:spPr>
-          <a:xfrm>
-            <a:off x="360495" y="2329189"/>
-            <a:ext cx="5428472" cy="2474809"/>
-          </a:xfrm>
-          <a:prstGeom prst="roundRect">
-            <a:avLst>
-              <a:gd name="adj" fmla="val 4649"/>
-            </a:avLst>
-          </a:prstGeom>
-          <a:ln w="12700"/>
-        </p:spPr>
-        <p:style>
-          <a:lnRef idx="2">
-            <a:schemeClr val="dk1"/>
-          </a:lnRef>
-          <a:fillRef idx="1">
-            <a:schemeClr val="lt1"/>
-          </a:fillRef>
-          <a:effectRef idx="0">
-            <a:schemeClr val="dk1"/>
-          </a:effectRef>
-          <a:fontRef idx="minor">
-            <a:schemeClr val="dk1"/>
-          </a:fontRef>
-        </p:style>
-        <p:txBody>
-          <a:bodyPr rtlCol="0" anchor="b"/>
-          <a:lstStyle/>
-          <a:p>
-            <a:pPr algn="ctr"/>
-            <a:r>
-              <a:rPr lang="en-US" altLang="ko-KR" sz="1000" b="1"/>
-              <a:t>Host</a:t>
-            </a:r>
-            <a:endParaRPr lang="en-US" altLang="ko-KR" sz="1000" b="1" dirty="0"/>
-          </a:p>
-        </p:txBody>
-      </p:sp>
-      <p:sp>
-        <p:nvSpPr>
-          <p:cNvPr id="12" name="사각형: 둥근 모서리 114">
-            <a:extLst>
-              <a:ext uri="{FF2B5EF4-FFF2-40B4-BE49-F238E27FC236}">
-                <a16:creationId xmlns:a16="http://schemas.microsoft.com/office/drawing/2014/main" id="{C7E8C59F-D6F9-F850-854C-565A25E87889}"/>
-              </a:ext>
-            </a:extLst>
-          </p:cNvPr>
-          <p:cNvSpPr/>
-          <p:nvPr/>
-        </p:nvSpPr>
-        <p:spPr>
-          <a:xfrm>
-            <a:off x="499225" y="3346470"/>
-            <a:ext cx="1095586" cy="383228"/>
-          </a:xfrm>
-          <a:prstGeom prst="roundRect">
-            <a:avLst>
-              <a:gd name="adj" fmla="val 14292"/>
-            </a:avLst>
-          </a:prstGeom>
-          <a:solidFill>
-            <a:schemeClr val="bg1">
-              <a:lumMod val="95000"/>
-            </a:schemeClr>
-          </a:solidFill>
-          <a:ln w="12700"/>
-        </p:spPr>
-        <p:style>
-          <a:lnRef idx="2">
-            <a:schemeClr val="dk1"/>
-          </a:lnRef>
-          <a:fillRef idx="1">
-            <a:schemeClr val="lt1"/>
-          </a:fillRef>
-          <a:effectRef idx="0">
-            <a:schemeClr val="dk1"/>
-          </a:effectRef>
-          <a:fontRef idx="minor">
-            <a:schemeClr val="dk1"/>
-          </a:fontRef>
-        </p:style>
-        <p:txBody>
-          <a:bodyPr rtlCol="0" anchor="ctr"/>
-          <a:lstStyle/>
-          <a:p>
-            <a:pPr algn="ctr"/>
-            <a:r>
-              <a:rPr lang="en-US" altLang="ko-KR" sz="1000"/>
-              <a:t>NVIDIA</a:t>
-            </a:r>
-          </a:p>
-          <a:p>
-            <a:pPr algn="ctr"/>
-            <a:r>
-              <a:rPr lang="en-US" altLang="ko-KR" sz="1000"/>
-              <a:t>GPU 0</a:t>
-            </a:r>
-            <a:endParaRPr lang="en-US" altLang="ko-KR" sz="1000" dirty="0"/>
-          </a:p>
-        </p:txBody>
-      </p:sp>
-      <p:sp>
-        <p:nvSpPr>
-          <p:cNvPr id="13" name="사각형: 둥근 모서리 114">
-            <a:extLst>
-              <a:ext uri="{FF2B5EF4-FFF2-40B4-BE49-F238E27FC236}">
-                <a16:creationId xmlns:a16="http://schemas.microsoft.com/office/drawing/2014/main" id="{FBA5DA3A-3C17-ED7E-3CB4-1626401FA50D}"/>
-              </a:ext>
-            </a:extLst>
-          </p:cNvPr>
-          <p:cNvSpPr/>
-          <p:nvPr/>
-        </p:nvSpPr>
-        <p:spPr>
-          <a:xfrm>
-            <a:off x="1714916" y="3346470"/>
-            <a:ext cx="1077331" cy="383228"/>
-          </a:xfrm>
-          <a:prstGeom prst="roundRect">
-            <a:avLst>
-              <a:gd name="adj" fmla="val 14292"/>
-            </a:avLst>
-          </a:prstGeom>
-          <a:solidFill>
-            <a:schemeClr val="bg1">
-              <a:lumMod val="95000"/>
-            </a:schemeClr>
-          </a:solidFill>
-          <a:ln w="12700"/>
-        </p:spPr>
-        <p:style>
-          <a:lnRef idx="2">
-            <a:schemeClr val="dk1"/>
-          </a:lnRef>
-          <a:fillRef idx="1">
-            <a:schemeClr val="lt1"/>
-          </a:fillRef>
-          <a:effectRef idx="0">
-            <a:schemeClr val="dk1"/>
-          </a:effectRef>
-          <a:fontRef idx="minor">
-            <a:schemeClr val="dk1"/>
-          </a:fontRef>
-        </p:style>
-        <p:txBody>
-          <a:bodyPr rtlCol="0" anchor="ctr"/>
-          <a:lstStyle/>
-          <a:p>
-            <a:pPr algn="ctr"/>
-            <a:r>
-              <a:rPr lang="en-US" altLang="ko-KR" sz="1000"/>
-              <a:t>NVIDIA</a:t>
-            </a:r>
-          </a:p>
-          <a:p>
-            <a:pPr algn="ctr"/>
-            <a:r>
-              <a:rPr lang="en-US" altLang="ko-KR" sz="1000"/>
-              <a:t>GPU 1</a:t>
-            </a:r>
-            <a:endParaRPr lang="en-US" altLang="ko-KR" sz="1000" dirty="0"/>
-          </a:p>
-        </p:txBody>
-      </p:sp>
-      <p:sp>
-        <p:nvSpPr>
-          <p:cNvPr id="21" name="사각형: 둥근 모서리 114">
-            <a:extLst>
-              <a:ext uri="{FF2B5EF4-FFF2-40B4-BE49-F238E27FC236}">
-                <a16:creationId xmlns:a16="http://schemas.microsoft.com/office/drawing/2014/main" id="{E47F2655-8E1A-F55D-3194-487EF0CFC260}"/>
-              </a:ext>
-            </a:extLst>
-          </p:cNvPr>
-          <p:cNvSpPr/>
-          <p:nvPr/>
-        </p:nvSpPr>
-        <p:spPr>
-          <a:xfrm>
-            <a:off x="494408" y="2876145"/>
-            <a:ext cx="1100403" cy="383228"/>
-          </a:xfrm>
-          <a:prstGeom prst="roundRect">
-            <a:avLst>
-              <a:gd name="adj" fmla="val 13792"/>
-            </a:avLst>
-          </a:prstGeom>
-          <a:solidFill>
-            <a:schemeClr val="bg1">
-              <a:lumMod val="95000"/>
-            </a:schemeClr>
-          </a:solidFill>
-          <a:ln w="12700"/>
-        </p:spPr>
-        <p:style>
-          <a:lnRef idx="2">
-            <a:schemeClr val="dk1"/>
-          </a:lnRef>
-          <a:fillRef idx="1">
-            <a:schemeClr val="lt1"/>
-          </a:fillRef>
-          <a:effectRef idx="0">
-            <a:schemeClr val="dk1"/>
-          </a:effectRef>
-          <a:fontRef idx="minor">
-            <a:schemeClr val="dk1"/>
-          </a:fontRef>
-        </p:style>
-        <p:txBody>
-          <a:bodyPr rtlCol="0" anchor="ctr"/>
-          <a:lstStyle/>
-          <a:p>
-            <a:pPr algn="ctr"/>
-            <a:r>
-              <a:rPr lang="en-US" altLang="ko-KR" sz="1000"/>
-              <a:t>/dev/nvidia0</a:t>
-            </a:r>
-            <a:endParaRPr lang="en-US" altLang="ko-KR" sz="1000" dirty="0"/>
-          </a:p>
-        </p:txBody>
-      </p:sp>
-      <p:sp>
-        <p:nvSpPr>
-          <p:cNvPr id="22" name="사각형: 둥근 모서리 114">
-            <a:extLst>
-              <a:ext uri="{FF2B5EF4-FFF2-40B4-BE49-F238E27FC236}">
-                <a16:creationId xmlns:a16="http://schemas.microsoft.com/office/drawing/2014/main" id="{5F1FEA3D-76FF-BC41-C7B3-166B7F0DF094}"/>
-              </a:ext>
-            </a:extLst>
-          </p:cNvPr>
-          <p:cNvSpPr/>
-          <p:nvPr/>
-        </p:nvSpPr>
-        <p:spPr>
-          <a:xfrm>
-            <a:off x="1710099" y="2876145"/>
-            <a:ext cx="1082148" cy="383228"/>
-          </a:xfrm>
-          <a:prstGeom prst="roundRect">
-            <a:avLst>
-              <a:gd name="adj" fmla="val 13792"/>
-            </a:avLst>
-          </a:prstGeom>
-          <a:solidFill>
-            <a:schemeClr val="bg1">
-              <a:lumMod val="95000"/>
-            </a:schemeClr>
-          </a:solidFill>
-          <a:ln w="12700"/>
-        </p:spPr>
-        <p:style>
-          <a:lnRef idx="2">
-            <a:schemeClr val="dk1"/>
-          </a:lnRef>
-          <a:fillRef idx="1">
-            <a:schemeClr val="lt1"/>
-          </a:fillRef>
-          <a:effectRef idx="0">
-            <a:schemeClr val="dk1"/>
-          </a:effectRef>
-          <a:fontRef idx="minor">
-            <a:schemeClr val="dk1"/>
-          </a:fontRef>
-        </p:style>
-        <p:txBody>
-          <a:bodyPr rtlCol="0" anchor="ctr"/>
-          <a:lstStyle/>
-          <a:p>
-            <a:pPr algn="ctr"/>
-            <a:r>
-              <a:rPr lang="en-US" altLang="ko-KR" sz="1000"/>
-              <a:t>/dev/nvidia1</a:t>
-            </a:r>
-            <a:endParaRPr lang="en-US" altLang="ko-KR" sz="1000" dirty="0"/>
-          </a:p>
-        </p:txBody>
-      </p:sp>
-      <p:cxnSp>
-        <p:nvCxnSpPr>
-          <p:cNvPr id="25" name="직선 연결선 20">
-            <a:extLst>
-              <a:ext uri="{FF2B5EF4-FFF2-40B4-BE49-F238E27FC236}">
-                <a16:creationId xmlns:a16="http://schemas.microsoft.com/office/drawing/2014/main" id="{BDF52236-4116-F189-AFDB-A878685EAAA9}"/>
-              </a:ext>
-            </a:extLst>
-          </p:cNvPr>
-          <p:cNvCxnSpPr>
-            <a:cxnSpLocks/>
-            <a:stCxn id="22" idx="2"/>
-            <a:endCxn id="13" idx="0"/>
-          </p:cNvCxnSpPr>
-          <p:nvPr/>
-        </p:nvCxnSpPr>
-        <p:spPr>
-          <a:xfrm>
-            <a:off x="2251173" y="3259373"/>
-            <a:ext cx="2409" cy="87097"/>
-          </a:xfrm>
-          <a:prstGeom prst="line">
-            <a:avLst/>
-          </a:prstGeom>
-          <a:ln w="12700">
-            <a:solidFill>
-              <a:schemeClr val="tx1"/>
-            </a:solidFill>
-            <a:prstDash val="dash"/>
-          </a:ln>
-        </p:spPr>
-        <p:style>
-          <a:lnRef idx="1">
-            <a:schemeClr val="accent1"/>
-          </a:lnRef>
-          <a:fillRef idx="0">
-            <a:schemeClr val="accent1"/>
-          </a:fillRef>
-          <a:effectRef idx="0">
-            <a:schemeClr val="accent1"/>
-          </a:effectRef>
-          <a:fontRef idx="minor">
-            <a:schemeClr val="tx1"/>
-          </a:fontRef>
-        </p:style>
-      </p:cxnSp>
-      <p:sp>
-        <p:nvSpPr>
-          <p:cNvPr id="26" name="사각형: 둥근 모서리 114">
-            <a:extLst>
-              <a:ext uri="{FF2B5EF4-FFF2-40B4-BE49-F238E27FC236}">
-                <a16:creationId xmlns:a16="http://schemas.microsoft.com/office/drawing/2014/main" id="{FCE85E77-3D27-710D-A18E-7CC2CF02A4F4}"/>
-              </a:ext>
-            </a:extLst>
-          </p:cNvPr>
-          <p:cNvSpPr/>
-          <p:nvPr/>
-        </p:nvSpPr>
-        <p:spPr>
-          <a:xfrm>
-            <a:off x="494409" y="2404283"/>
-            <a:ext cx="2302741" cy="383228"/>
-          </a:xfrm>
-          <a:prstGeom prst="roundRect">
-            <a:avLst>
-              <a:gd name="adj" fmla="val 17067"/>
-            </a:avLst>
-          </a:prstGeom>
-          <a:solidFill>
-            <a:schemeClr val="bg2">
-              <a:lumMod val="90000"/>
-            </a:schemeClr>
-          </a:solidFill>
-          <a:ln w="12700"/>
-        </p:spPr>
-        <p:style>
-          <a:lnRef idx="2">
-            <a:schemeClr val="dk1"/>
-          </a:lnRef>
-          <a:fillRef idx="1">
-            <a:schemeClr val="lt1"/>
-          </a:fillRef>
-          <a:effectRef idx="0">
-            <a:schemeClr val="dk1"/>
-          </a:effectRef>
-          <a:fontRef idx="minor">
-            <a:schemeClr val="dk1"/>
-          </a:fontRef>
-        </p:style>
-        <p:txBody>
-          <a:bodyPr rtlCol="0" anchor="ctr"/>
-          <a:lstStyle/>
-          <a:p>
-            <a:pPr algn="ctr"/>
-            <a:r>
               <a:rPr lang="en-US" altLang="ko-KR" sz="1000"/>
               <a:t>NVIDIA CUDA Lib/Toolkit</a:t>
             </a:r>
@@ -43303,52 +42500,6 @@
           </a:p>
         </p:txBody>
       </p:sp>
-      <p:cxnSp>
-        <p:nvCxnSpPr>
-          <p:cNvPr id="27" name="직선 연결선 17">
-            <a:extLst>
-              <a:ext uri="{FF2B5EF4-FFF2-40B4-BE49-F238E27FC236}">
-                <a16:creationId xmlns:a16="http://schemas.microsoft.com/office/drawing/2014/main" id="{DB0A1807-4320-739F-1F6F-B581464B420F}"/>
-              </a:ext>
-            </a:extLst>
-          </p:cNvPr>
-          <p:cNvCxnSpPr>
-            <a:cxnSpLocks/>
-            <a:stCxn id="21" idx="2"/>
-            <a:endCxn id="12" idx="0"/>
-          </p:cNvCxnSpPr>
-          <p:nvPr/>
-        </p:nvCxnSpPr>
-        <p:spPr>
-          <a:xfrm>
-            <a:off x="1044610" y="3259373"/>
-            <a:ext cx="2408" cy="87097"/>
-          </a:xfrm>
-          <a:prstGeom prst="line">
-            <a:avLst/>
-          </a:prstGeom>
-          <a:ln w="12700">
-            <a:solidFill>
-              <a:schemeClr val="tx1"/>
-            </a:solidFill>
-            <a:prstDash val="dash"/>
-          </a:ln>
-        </p:spPr>
-        <p:style>
-          <a:lnRef idx="1">
-            <a:schemeClr val="accent1"/>
-          </a:lnRef>
-          <a:fillRef idx="0">
-            <a:schemeClr val="accent1"/>
-          </a:fillRef>
-          <a:effectRef idx="0">
-            <a:schemeClr val="accent1"/>
-          </a:effectRef>
-          <a:fontRef idx="minor">
-            <a:schemeClr val="tx1"/>
-          </a:fontRef>
-        </p:style>
-      </p:cxnSp>
       <p:sp>
         <p:nvSpPr>
           <p:cNvPr id="179" name="TextBox 178">
@@ -43363,7 +42514,7 @@
         </p:nvSpPr>
         <p:spPr>
           <a:xfrm>
-            <a:off x="1187961" y="2355699"/>
+            <a:off x="2466252" y="2735981"/>
             <a:ext cx="915635" cy="238253"/>
           </a:xfrm>
           <a:prstGeom prst="rect">
@@ -43509,9 +42660,8 @@
             </a:r>
           </a:p>
           <a:p>
-            <a:pPr algn="l"/>
-            <a:r>
-              <a:rPr lang="en-US" sz="800" kern="0" dirty="0">
+            <a:r>
+              <a:rPr lang="en-US" altLang="ko-KR" sz="800" kern="0" dirty="0">
                 <a:solidFill>
                   <a:srgbClr val="C00000"/>
                 </a:solidFill>
@@ -43521,9 +42671,8 @@
             </a:r>
           </a:p>
           <a:p>
-            <a:pPr algn="l"/>
-            <a:r>
-              <a:rPr lang="en-US" sz="800" kern="0" dirty="0">
+            <a:r>
+              <a:rPr lang="en-US" altLang="ko-KR" sz="800" kern="0" dirty="0">
                 <a:solidFill>
                   <a:srgbClr val="C00000"/>
                 </a:solidFill>
@@ -43532,16 +42681,16 @@
               <a:t>           </a:t>
             </a:r>
             <a:r>
-              <a:rPr lang="en-US" sz="800" kern="0" dirty="0" err="1">
+              <a:rPr lang="en-US" altLang="ko-KR" sz="800" kern="0" dirty="0" err="1">
                 <a:solidFill>
                   <a:srgbClr val="C00000"/>
                 </a:solidFill>
                 <a:cs typeface="Al Bayan Plain" pitchFamily="2" charset="-78"/>
               </a:rPr>
-              <a:t>nvidia.com/gpu.shared</a:t>
-            </a:r>
-            <a:r>
-              <a:rPr lang="en-US" sz="800" kern="0" dirty="0">
+              <a:t>nvidia.com/mig-2g.10b</a:t>
+            </a:r>
+            <a:r>
+              <a:rPr lang="en-US" altLang="ko-KR" sz="800" kern="0" dirty="0">
                 <a:solidFill>
                   <a:srgbClr val="C00000"/>
                 </a:solidFill>
@@ -43578,25 +42727,7 @@
                 </a:solidFill>
                 <a:cs typeface="Al Bayan Plain" pitchFamily="2" charset="-78"/>
               </a:rPr>
-              <a:t>nvidia.com</a:t>
-            </a:r>
-            <a:r>
-              <a:rPr lang="en-US" altLang="ko-KR" sz="800" kern="0" dirty="0">
-                <a:solidFill>
-                  <a:srgbClr val="C00000"/>
-                </a:solidFill>
-                <a:cs typeface="Al Bayan Plain" pitchFamily="2" charset="-78"/>
-              </a:rPr>
-              <a:t>/</a:t>
-            </a:r>
-            <a:r>
-              <a:rPr lang="en-US" altLang="ko-KR" sz="800" kern="0" dirty="0" err="1">
-                <a:solidFill>
-                  <a:srgbClr val="C00000"/>
-                </a:solidFill>
-                <a:cs typeface="Al Bayan Plain" pitchFamily="2" charset="-78"/>
-              </a:rPr>
-              <a:t>gpu.shared</a:t>
+              <a:t>nvidia.com/mig-2g.10b</a:t>
             </a:r>
             <a:r>
               <a:rPr lang="en-US" altLang="ko-KR" sz="800" kern="0" dirty="0">
@@ -43746,7 +42877,6 @@
             </a:r>
           </a:p>
           <a:p>
-            <a:pPr algn="l"/>
             <a:r>
               <a:rPr lang="en-US" sz="800" kern="0" dirty="0">
                 <a:solidFill>
@@ -43763,15 +42893,24 @@
                 </a:solidFill>
                 <a:cs typeface="Al Bayan Plain" pitchFamily="2" charset="-78"/>
               </a:rPr>
-              <a:t>nvidia.com/gpu.shared</a:t>
-            </a:r>
-            <a:r>
-              <a:rPr lang="en-US" sz="800" kern="0" dirty="0">
+              <a:t>nvidia.com/</a:t>
+            </a:r>
+            <a:r>
+              <a:rPr lang="en-US" altLang="ko-KR" sz="800" kern="0" dirty="0" err="1">
                 <a:solidFill>
                   <a:srgbClr val="C00000"/>
                 </a:solidFill>
                 <a:cs typeface="Al Bayan Plain" pitchFamily="2" charset="-78"/>
               </a:rPr>
+              <a:t>mig-1g.5b</a:t>
+            </a:r>
+            <a:r>
+              <a:rPr lang="en-US" altLang="ko-KR" sz="800" kern="0" dirty="0">
+                <a:solidFill>
+                  <a:srgbClr val="C00000"/>
+                </a:solidFill>
+                <a:cs typeface="Al Bayan Plain" pitchFamily="2" charset="-78"/>
+              </a:rPr>
               <a:t>: 1</a:t>
             </a:r>
           </a:p>
@@ -43821,7 +42960,7 @@
                 </a:solidFill>
                 <a:cs typeface="Al Bayan Plain" pitchFamily="2" charset="-78"/>
               </a:rPr>
-              <a:t>gpu.shared</a:t>
+              <a:t>mig-1g.5b</a:t>
             </a:r>
             <a:r>
               <a:rPr lang="en-US" altLang="ko-KR" sz="800" kern="0" dirty="0">
@@ -43837,10 +42976,994 @@
       </p:sp>
       <p:sp>
         <p:nvSpPr>
-          <p:cNvPr id="79" name="TextBox 78">
-            <a:extLst>
-              <a:ext uri="{FF2B5EF4-FFF2-40B4-BE49-F238E27FC236}">
-                <a16:creationId xmlns:a16="http://schemas.microsoft.com/office/drawing/2014/main" id="{9E644448-473D-9124-83C2-5958DEAB6240}"/>
+          <p:cNvPr id="11" name="사각형: 둥근 모서리 114">
+            <a:extLst>
+              <a:ext uri="{FF2B5EF4-FFF2-40B4-BE49-F238E27FC236}">
+                <a16:creationId xmlns:a16="http://schemas.microsoft.com/office/drawing/2014/main" id="{C08EBDD6-8711-6942-ED3A-863DC37E2462}"/>
+              </a:ext>
+            </a:extLst>
+          </p:cNvPr>
+          <p:cNvSpPr/>
+          <p:nvPr/>
+        </p:nvSpPr>
+        <p:spPr>
+          <a:xfrm>
+            <a:off x="192920" y="3826997"/>
+            <a:ext cx="1276177" cy="383228"/>
+          </a:xfrm>
+          <a:prstGeom prst="roundRect">
+            <a:avLst>
+              <a:gd name="adj" fmla="val 14292"/>
+            </a:avLst>
+          </a:prstGeom>
+          <a:solidFill>
+            <a:schemeClr val="bg1">
+              <a:lumMod val="95000"/>
+            </a:schemeClr>
+          </a:solidFill>
+          <a:ln w="12700"/>
+        </p:spPr>
+        <p:style>
+          <a:lnRef idx="2">
+            <a:schemeClr val="dk1"/>
+          </a:lnRef>
+          <a:fillRef idx="1">
+            <a:schemeClr val="lt1"/>
+          </a:fillRef>
+          <a:effectRef idx="0">
+            <a:schemeClr val="dk1"/>
+          </a:effectRef>
+          <a:fontRef idx="minor">
+            <a:schemeClr val="dk1"/>
+          </a:fontRef>
+        </p:style>
+        <p:txBody>
+          <a:bodyPr rtlCol="0" anchor="ctr"/>
+          <a:lstStyle/>
+          <a:p>
+            <a:pPr algn="ctr"/>
+            <a:r>
+              <a:rPr lang="en-US" altLang="ko-KR" sz="1000"/>
+              <a:t>GPU Instance </a:t>
+            </a:r>
+            <a:endParaRPr lang="en-US" altLang="ko-KR" sz="1000" dirty="0"/>
+          </a:p>
+        </p:txBody>
+      </p:sp>
+      <p:sp>
+        <p:nvSpPr>
+          <p:cNvPr id="14" name="사각형: 둥근 모서리 114">
+            <a:extLst>
+              <a:ext uri="{FF2B5EF4-FFF2-40B4-BE49-F238E27FC236}">
+                <a16:creationId xmlns:a16="http://schemas.microsoft.com/office/drawing/2014/main" id="{4B715DC8-2F0F-21FD-099A-FD1DA2C9B2C4}"/>
+              </a:ext>
+            </a:extLst>
+          </p:cNvPr>
+          <p:cNvSpPr/>
+          <p:nvPr/>
+        </p:nvSpPr>
+        <p:spPr>
+          <a:xfrm>
+            <a:off x="1599492" y="3306888"/>
+            <a:ext cx="1276177" cy="383228"/>
+          </a:xfrm>
+          <a:prstGeom prst="roundRect">
+            <a:avLst>
+              <a:gd name="adj" fmla="val 14292"/>
+            </a:avLst>
+          </a:prstGeom>
+          <a:solidFill>
+            <a:schemeClr val="bg1">
+              <a:lumMod val="95000"/>
+            </a:schemeClr>
+          </a:solidFill>
+          <a:ln w="12700"/>
+        </p:spPr>
+        <p:style>
+          <a:lnRef idx="2">
+            <a:schemeClr val="dk1"/>
+          </a:lnRef>
+          <a:fillRef idx="1">
+            <a:schemeClr val="lt1"/>
+          </a:fillRef>
+          <a:effectRef idx="0">
+            <a:schemeClr val="dk1"/>
+          </a:effectRef>
+          <a:fontRef idx="minor">
+            <a:schemeClr val="dk1"/>
+          </a:fontRef>
+        </p:style>
+        <p:txBody>
+          <a:bodyPr rtlCol="0" anchor="ctr"/>
+          <a:lstStyle/>
+          <a:p>
+            <a:pPr algn="ctr"/>
+            <a:r>
+              <a:rPr lang="en-US" altLang="ko-KR" sz="1000"/>
+              <a:t>Compute Instance</a:t>
+            </a:r>
+            <a:endParaRPr lang="en-US" altLang="ko-KR" sz="1000" dirty="0"/>
+          </a:p>
+        </p:txBody>
+      </p:sp>
+      <p:sp>
+        <p:nvSpPr>
+          <p:cNvPr id="15" name="사각형: 둥근 모서리 114">
+            <a:extLst>
+              <a:ext uri="{FF2B5EF4-FFF2-40B4-BE49-F238E27FC236}">
+                <a16:creationId xmlns:a16="http://schemas.microsoft.com/office/drawing/2014/main" id="{A76A45D7-7E45-A23C-B5CF-548FC9D504C8}"/>
+              </a:ext>
+            </a:extLst>
+          </p:cNvPr>
+          <p:cNvSpPr/>
+          <p:nvPr/>
+        </p:nvSpPr>
+        <p:spPr>
+          <a:xfrm>
+            <a:off x="3011824" y="3306888"/>
+            <a:ext cx="1276177" cy="383228"/>
+          </a:xfrm>
+          <a:prstGeom prst="roundRect">
+            <a:avLst>
+              <a:gd name="adj" fmla="val 14292"/>
+            </a:avLst>
+          </a:prstGeom>
+          <a:solidFill>
+            <a:schemeClr val="bg1">
+              <a:lumMod val="95000"/>
+            </a:schemeClr>
+          </a:solidFill>
+          <a:ln w="12700"/>
+        </p:spPr>
+        <p:style>
+          <a:lnRef idx="2">
+            <a:schemeClr val="dk1"/>
+          </a:lnRef>
+          <a:fillRef idx="1">
+            <a:schemeClr val="lt1"/>
+          </a:fillRef>
+          <a:effectRef idx="0">
+            <a:schemeClr val="dk1"/>
+          </a:effectRef>
+          <a:fontRef idx="minor">
+            <a:schemeClr val="dk1"/>
+          </a:fontRef>
+        </p:style>
+        <p:txBody>
+          <a:bodyPr rtlCol="0" anchor="ctr"/>
+          <a:lstStyle/>
+          <a:p>
+            <a:pPr algn="ctr"/>
+            <a:r>
+              <a:rPr lang="en-US" altLang="ko-KR" sz="1000"/>
+              <a:t>Compute Instance</a:t>
+            </a:r>
+            <a:endParaRPr lang="en-US" altLang="ko-KR" sz="1000" dirty="0"/>
+          </a:p>
+        </p:txBody>
+      </p:sp>
+      <p:sp>
+        <p:nvSpPr>
+          <p:cNvPr id="16" name="사각형: 둥근 모서리 114">
+            <a:extLst>
+              <a:ext uri="{FF2B5EF4-FFF2-40B4-BE49-F238E27FC236}">
+                <a16:creationId xmlns:a16="http://schemas.microsoft.com/office/drawing/2014/main" id="{A4E47099-5EDB-2940-8054-4F2DB48ED524}"/>
+              </a:ext>
+            </a:extLst>
+          </p:cNvPr>
+          <p:cNvSpPr/>
+          <p:nvPr/>
+        </p:nvSpPr>
+        <p:spPr>
+          <a:xfrm>
+            <a:off x="1599492" y="3826997"/>
+            <a:ext cx="2688509" cy="383228"/>
+          </a:xfrm>
+          <a:prstGeom prst="roundRect">
+            <a:avLst>
+              <a:gd name="adj" fmla="val 14292"/>
+            </a:avLst>
+          </a:prstGeom>
+          <a:solidFill>
+            <a:schemeClr val="bg1">
+              <a:lumMod val="95000"/>
+            </a:schemeClr>
+          </a:solidFill>
+          <a:ln w="12700"/>
+        </p:spPr>
+        <p:style>
+          <a:lnRef idx="2">
+            <a:schemeClr val="dk1"/>
+          </a:lnRef>
+          <a:fillRef idx="1">
+            <a:schemeClr val="lt1"/>
+          </a:fillRef>
+          <a:effectRef idx="0">
+            <a:schemeClr val="dk1"/>
+          </a:effectRef>
+          <a:fontRef idx="minor">
+            <a:schemeClr val="dk1"/>
+          </a:fontRef>
+        </p:style>
+        <p:txBody>
+          <a:bodyPr rtlCol="0" anchor="ctr"/>
+          <a:lstStyle/>
+          <a:p>
+            <a:pPr algn="ctr"/>
+            <a:r>
+              <a:rPr lang="en-US" altLang="ko-KR" sz="1000"/>
+              <a:t>GPU Instance </a:t>
+            </a:r>
+            <a:endParaRPr lang="en-US" altLang="ko-KR" sz="1000" dirty="0"/>
+          </a:p>
+        </p:txBody>
+      </p:sp>
+      <p:sp>
+        <p:nvSpPr>
+          <p:cNvPr id="18" name="사각형: 둥근 모서리 114">
+            <a:extLst>
+              <a:ext uri="{FF2B5EF4-FFF2-40B4-BE49-F238E27FC236}">
+                <a16:creationId xmlns:a16="http://schemas.microsoft.com/office/drawing/2014/main" id="{619218D3-3A62-C12B-104C-85BBA248A538}"/>
+              </a:ext>
+            </a:extLst>
+          </p:cNvPr>
+          <p:cNvSpPr/>
+          <p:nvPr/>
+        </p:nvSpPr>
+        <p:spPr>
+          <a:xfrm>
+            <a:off x="4394143" y="4343733"/>
+            <a:ext cx="1276177" cy="383228"/>
+          </a:xfrm>
+          <a:prstGeom prst="roundRect">
+            <a:avLst>
+              <a:gd name="adj" fmla="val 14292"/>
+            </a:avLst>
+          </a:prstGeom>
+          <a:solidFill>
+            <a:schemeClr val="bg1">
+              <a:lumMod val="95000"/>
+            </a:schemeClr>
+          </a:solidFill>
+          <a:ln w="12700"/>
+        </p:spPr>
+        <p:style>
+          <a:lnRef idx="2">
+            <a:schemeClr val="dk1"/>
+          </a:lnRef>
+          <a:fillRef idx="1">
+            <a:schemeClr val="lt1"/>
+          </a:fillRef>
+          <a:effectRef idx="0">
+            <a:schemeClr val="dk1"/>
+          </a:effectRef>
+          <a:fontRef idx="minor">
+            <a:schemeClr val="dk1"/>
+          </a:fontRef>
+        </p:style>
+        <p:txBody>
+          <a:bodyPr rtlCol="0" anchor="ctr"/>
+          <a:lstStyle/>
+          <a:p>
+            <a:pPr algn="ctr"/>
+            <a:r>
+              <a:rPr lang="en-US" altLang="ko-KR" sz="1000"/>
+              <a:t>NVIDIA</a:t>
+            </a:r>
+          </a:p>
+          <a:p>
+            <a:pPr algn="ctr"/>
+            <a:r>
+              <a:rPr lang="en-US" altLang="ko-KR" sz="1000"/>
+              <a:t>GPU 1</a:t>
+            </a:r>
+            <a:endParaRPr lang="en-US" altLang="ko-KR" sz="1000" dirty="0"/>
+          </a:p>
+        </p:txBody>
+      </p:sp>
+      <p:sp>
+        <p:nvSpPr>
+          <p:cNvPr id="19" name="사각형: 둥근 모서리 114">
+            <a:extLst>
+              <a:ext uri="{FF2B5EF4-FFF2-40B4-BE49-F238E27FC236}">
+                <a16:creationId xmlns:a16="http://schemas.microsoft.com/office/drawing/2014/main" id="{D04840AA-8BCE-C2C8-153F-9874E47AEB61}"/>
+              </a:ext>
+            </a:extLst>
+          </p:cNvPr>
+          <p:cNvSpPr/>
+          <p:nvPr/>
+        </p:nvSpPr>
+        <p:spPr>
+          <a:xfrm>
+            <a:off x="4394143" y="3306888"/>
+            <a:ext cx="1276177" cy="383228"/>
+          </a:xfrm>
+          <a:prstGeom prst="roundRect">
+            <a:avLst>
+              <a:gd name="adj" fmla="val 14292"/>
+            </a:avLst>
+          </a:prstGeom>
+          <a:solidFill>
+            <a:schemeClr val="bg1">
+              <a:lumMod val="95000"/>
+            </a:schemeClr>
+          </a:solidFill>
+          <a:ln w="12700"/>
+        </p:spPr>
+        <p:style>
+          <a:lnRef idx="2">
+            <a:schemeClr val="dk1"/>
+          </a:lnRef>
+          <a:fillRef idx="1">
+            <a:schemeClr val="lt1"/>
+          </a:fillRef>
+          <a:effectRef idx="0">
+            <a:schemeClr val="dk1"/>
+          </a:effectRef>
+          <a:fontRef idx="minor">
+            <a:schemeClr val="dk1"/>
+          </a:fontRef>
+        </p:style>
+        <p:txBody>
+          <a:bodyPr rtlCol="0" anchor="ctr"/>
+          <a:lstStyle/>
+          <a:p>
+            <a:pPr algn="ctr"/>
+            <a:r>
+              <a:rPr lang="en-US" altLang="ko-KR" sz="1000"/>
+              <a:t>Compute Instance</a:t>
+            </a:r>
+            <a:endParaRPr lang="en-US" altLang="ko-KR" sz="1000" dirty="0"/>
+          </a:p>
+        </p:txBody>
+      </p:sp>
+      <p:sp>
+        <p:nvSpPr>
+          <p:cNvPr id="20" name="사각형: 둥근 모서리 114">
+            <a:extLst>
+              <a:ext uri="{FF2B5EF4-FFF2-40B4-BE49-F238E27FC236}">
+                <a16:creationId xmlns:a16="http://schemas.microsoft.com/office/drawing/2014/main" id="{C1E2AD8F-7E2E-9EA8-408C-34DEFDC48E20}"/>
+              </a:ext>
+            </a:extLst>
+          </p:cNvPr>
+          <p:cNvSpPr/>
+          <p:nvPr/>
+        </p:nvSpPr>
+        <p:spPr>
+          <a:xfrm>
+            <a:off x="4394142" y="3826997"/>
+            <a:ext cx="1276177" cy="383228"/>
+          </a:xfrm>
+          <a:prstGeom prst="roundRect">
+            <a:avLst>
+              <a:gd name="adj" fmla="val 14292"/>
+            </a:avLst>
+          </a:prstGeom>
+          <a:solidFill>
+            <a:schemeClr val="bg1">
+              <a:lumMod val="95000"/>
+            </a:schemeClr>
+          </a:solidFill>
+          <a:ln w="12700"/>
+        </p:spPr>
+        <p:style>
+          <a:lnRef idx="2">
+            <a:schemeClr val="dk1"/>
+          </a:lnRef>
+          <a:fillRef idx="1">
+            <a:schemeClr val="lt1"/>
+          </a:fillRef>
+          <a:effectRef idx="0">
+            <a:schemeClr val="dk1"/>
+          </a:effectRef>
+          <a:fontRef idx="minor">
+            <a:schemeClr val="dk1"/>
+          </a:fontRef>
+        </p:style>
+        <p:txBody>
+          <a:bodyPr rtlCol="0" anchor="ctr"/>
+          <a:lstStyle/>
+          <a:p>
+            <a:pPr algn="ctr"/>
+            <a:r>
+              <a:rPr lang="en-US" altLang="ko-KR" sz="1000"/>
+              <a:t>GPU Instance </a:t>
+            </a:r>
+            <a:endParaRPr lang="en-US" altLang="ko-KR" sz="1000" dirty="0"/>
+          </a:p>
+        </p:txBody>
+      </p:sp>
+      <p:sp>
+        <p:nvSpPr>
+          <p:cNvPr id="24" name="사각형: 둥근 모서리 114">
+            <a:extLst>
+              <a:ext uri="{FF2B5EF4-FFF2-40B4-BE49-F238E27FC236}">
+                <a16:creationId xmlns:a16="http://schemas.microsoft.com/office/drawing/2014/main" id="{B8CF3FC4-65BE-42AC-DB7F-8FA587E0C213}"/>
+              </a:ext>
+            </a:extLst>
+          </p:cNvPr>
+          <p:cNvSpPr/>
+          <p:nvPr/>
+        </p:nvSpPr>
+        <p:spPr>
+          <a:xfrm>
+            <a:off x="179513" y="1996804"/>
+            <a:ext cx="2451551" cy="383228"/>
+          </a:xfrm>
+          <a:prstGeom prst="roundRect">
+            <a:avLst>
+              <a:gd name="adj" fmla="val 12429"/>
+            </a:avLst>
+          </a:prstGeom>
+          <a:solidFill>
+            <a:schemeClr val="bg1">
+              <a:lumMod val="95000"/>
+            </a:schemeClr>
+          </a:solidFill>
+          <a:ln w="12700"/>
+        </p:spPr>
+        <p:style>
+          <a:lnRef idx="2">
+            <a:schemeClr val="dk1"/>
+          </a:lnRef>
+          <a:fillRef idx="1">
+            <a:schemeClr val="lt1"/>
+          </a:fillRef>
+          <a:effectRef idx="0">
+            <a:schemeClr val="dk1"/>
+          </a:effectRef>
+          <a:fontRef idx="minor">
+            <a:schemeClr val="dk1"/>
+          </a:fontRef>
+        </p:style>
+        <p:txBody>
+          <a:bodyPr rtlCol="0" anchor="ctr"/>
+          <a:lstStyle/>
+          <a:p>
+            <a:pPr algn="ctr"/>
+            <a:r>
+              <a:rPr lang="en-US" altLang="ko-KR" sz="1000"/>
+              <a:t>/dev/nvidia0</a:t>
+            </a:r>
+            <a:endParaRPr lang="en-US" altLang="ko-KR" sz="1000" dirty="0"/>
+          </a:p>
+        </p:txBody>
+      </p:sp>
+      <p:sp>
+        <p:nvSpPr>
+          <p:cNvPr id="33" name="사각형: 둥근 모서리 114">
+            <a:extLst>
+              <a:ext uri="{FF2B5EF4-FFF2-40B4-BE49-F238E27FC236}">
+                <a16:creationId xmlns:a16="http://schemas.microsoft.com/office/drawing/2014/main" id="{9E5FB8CF-6186-A03C-C926-F30AA711695B}"/>
+              </a:ext>
+            </a:extLst>
+          </p:cNvPr>
+          <p:cNvSpPr/>
+          <p:nvPr/>
+        </p:nvSpPr>
+        <p:spPr>
+          <a:xfrm>
+            <a:off x="1435486" y="1526478"/>
+            <a:ext cx="1195578" cy="383228"/>
+          </a:xfrm>
+          <a:prstGeom prst="roundRect">
+            <a:avLst>
+              <a:gd name="adj" fmla="val 7242"/>
+            </a:avLst>
+          </a:prstGeom>
+          <a:solidFill>
+            <a:schemeClr val="bg1">
+              <a:lumMod val="95000"/>
+            </a:schemeClr>
+          </a:solidFill>
+          <a:ln w="12700"/>
+        </p:spPr>
+        <p:style>
+          <a:lnRef idx="2">
+            <a:schemeClr val="dk1"/>
+          </a:lnRef>
+          <a:fillRef idx="1">
+            <a:schemeClr val="lt1"/>
+          </a:fillRef>
+          <a:effectRef idx="0">
+            <a:schemeClr val="dk1"/>
+          </a:effectRef>
+          <a:fontRef idx="minor">
+            <a:schemeClr val="dk1"/>
+          </a:fontRef>
+        </p:style>
+        <p:txBody>
+          <a:bodyPr rtlCol="0" anchor="ctr"/>
+          <a:lstStyle/>
+          <a:p>
+            <a:pPr algn="ctr"/>
+            <a:r>
+              <a:rPr lang="en-US" altLang="ko-KR" sz="1000"/>
+              <a:t>/dev/nvidia-caps</a:t>
+            </a:r>
+            <a:br>
+              <a:rPr lang="en-US" altLang="ko-KR" sz="1000"/>
+            </a:br>
+            <a:r>
+              <a:rPr lang="en-US" altLang="ko-KR" sz="1000"/>
+              <a:t>/nvidia-caps21</a:t>
+            </a:r>
+            <a:endParaRPr lang="en-US" altLang="ko-KR" sz="1000" dirty="0"/>
+          </a:p>
+        </p:txBody>
+      </p:sp>
+      <p:sp>
+        <p:nvSpPr>
+          <p:cNvPr id="35" name="사각형: 둥근 모서리 114">
+            <a:extLst>
+              <a:ext uri="{FF2B5EF4-FFF2-40B4-BE49-F238E27FC236}">
+                <a16:creationId xmlns:a16="http://schemas.microsoft.com/office/drawing/2014/main" id="{03D0486A-CFBE-1B8F-2277-0E2BE95BFAE8}"/>
+              </a:ext>
+            </a:extLst>
+          </p:cNvPr>
+          <p:cNvSpPr/>
+          <p:nvPr/>
+        </p:nvSpPr>
+        <p:spPr>
+          <a:xfrm>
+            <a:off x="2874388" y="60026"/>
+            <a:ext cx="3976986" cy="2464513"/>
+          </a:xfrm>
+          <a:prstGeom prst="roundRect">
+            <a:avLst>
+              <a:gd name="adj" fmla="val 4159"/>
+            </a:avLst>
+          </a:prstGeom>
+          <a:ln w="12700"/>
+        </p:spPr>
+        <p:style>
+          <a:lnRef idx="2">
+            <a:schemeClr val="dk1"/>
+          </a:lnRef>
+          <a:fillRef idx="1">
+            <a:schemeClr val="lt1"/>
+          </a:fillRef>
+          <a:effectRef idx="0">
+            <a:schemeClr val="dk1"/>
+          </a:effectRef>
+          <a:fontRef idx="minor">
+            <a:schemeClr val="dk1"/>
+          </a:fontRef>
+        </p:style>
+        <p:txBody>
+          <a:bodyPr rtlCol="0" anchor="t"/>
+          <a:lstStyle/>
+          <a:p>
+            <a:pPr algn="ctr"/>
+            <a:r>
+              <a:rPr lang="en-US" altLang="ko-KR" sz="1000" b="1"/>
+              <a:t>Pod B</a:t>
+            </a:r>
+            <a:endParaRPr lang="ko-KR" altLang="en-US" sz="1000" b="1" dirty="0">
+              <a:solidFill>
+                <a:schemeClr val="accent2">
+                  <a:lumMod val="75000"/>
+                </a:schemeClr>
+              </a:solidFill>
+            </a:endParaRPr>
+          </a:p>
+        </p:txBody>
+      </p:sp>
+      <p:sp>
+        <p:nvSpPr>
+          <p:cNvPr id="37" name="사각형: 둥근 모서리 114">
+            <a:extLst>
+              <a:ext uri="{FF2B5EF4-FFF2-40B4-BE49-F238E27FC236}">
+                <a16:creationId xmlns:a16="http://schemas.microsoft.com/office/drawing/2014/main" id="{93903880-EA57-8D38-2847-4EF9A8399083}"/>
+              </a:ext>
+            </a:extLst>
+          </p:cNvPr>
+          <p:cNvSpPr/>
+          <p:nvPr/>
+        </p:nvSpPr>
+        <p:spPr>
+          <a:xfrm>
+            <a:off x="2924149" y="336814"/>
+            <a:ext cx="3880842" cy="2141343"/>
+          </a:xfrm>
+          <a:prstGeom prst="roundRect">
+            <a:avLst>
+              <a:gd name="adj" fmla="val 4159"/>
+            </a:avLst>
+          </a:prstGeom>
+          <a:ln w="12700"/>
+        </p:spPr>
+        <p:style>
+          <a:lnRef idx="2">
+            <a:schemeClr val="dk1"/>
+          </a:lnRef>
+          <a:fillRef idx="1">
+            <a:schemeClr val="lt1"/>
+          </a:fillRef>
+          <a:effectRef idx="0">
+            <a:schemeClr val="dk1"/>
+          </a:effectRef>
+          <a:fontRef idx="minor">
+            <a:schemeClr val="dk1"/>
+          </a:fontRef>
+        </p:style>
+        <p:txBody>
+          <a:bodyPr rtlCol="0" anchor="t"/>
+          <a:lstStyle/>
+          <a:p>
+            <a:pPr algn="ctr"/>
+            <a:r>
+              <a:rPr lang="en-US" altLang="ko-KR" sz="1000" b="1"/>
+              <a:t>Container B</a:t>
+            </a:r>
+            <a:endParaRPr lang="ko-KR" altLang="en-US" sz="1000" b="1" dirty="0">
+              <a:solidFill>
+                <a:schemeClr val="accent2">
+                  <a:lumMod val="75000"/>
+                </a:schemeClr>
+              </a:solidFill>
+            </a:endParaRPr>
+          </a:p>
+        </p:txBody>
+      </p:sp>
+      <p:sp>
+        <p:nvSpPr>
+          <p:cNvPr id="39" name="사각형: 둥근 모서리 114">
+            <a:extLst>
+              <a:ext uri="{FF2B5EF4-FFF2-40B4-BE49-F238E27FC236}">
+                <a16:creationId xmlns:a16="http://schemas.microsoft.com/office/drawing/2014/main" id="{6E34BF00-A8B7-76B0-E8C6-35C6A67EE23C}"/>
+              </a:ext>
+            </a:extLst>
+          </p:cNvPr>
+          <p:cNvSpPr/>
+          <p:nvPr/>
+        </p:nvSpPr>
+        <p:spPr>
+          <a:xfrm>
+            <a:off x="3009996" y="1526478"/>
+            <a:ext cx="1195578" cy="383228"/>
+          </a:xfrm>
+          <a:prstGeom prst="roundRect">
+            <a:avLst>
+              <a:gd name="adj" fmla="val 7242"/>
+            </a:avLst>
+          </a:prstGeom>
+          <a:solidFill>
+            <a:schemeClr val="bg1">
+              <a:lumMod val="95000"/>
+            </a:schemeClr>
+          </a:solidFill>
+          <a:ln w="12700"/>
+        </p:spPr>
+        <p:style>
+          <a:lnRef idx="2">
+            <a:schemeClr val="dk1"/>
+          </a:lnRef>
+          <a:fillRef idx="1">
+            <a:schemeClr val="lt1"/>
+          </a:fillRef>
+          <a:effectRef idx="0">
+            <a:schemeClr val="dk1"/>
+          </a:effectRef>
+          <a:fontRef idx="minor">
+            <a:schemeClr val="dk1"/>
+          </a:fontRef>
+        </p:style>
+        <p:txBody>
+          <a:bodyPr rtlCol="0" anchor="ctr"/>
+          <a:lstStyle/>
+          <a:p>
+            <a:pPr algn="ctr"/>
+            <a:r>
+              <a:rPr lang="en-US" altLang="ko-KR" sz="1000"/>
+              <a:t>/dev/nvidia-caps</a:t>
+            </a:r>
+            <a:br>
+              <a:rPr lang="en-US" altLang="ko-KR" sz="1000"/>
+            </a:br>
+            <a:r>
+              <a:rPr lang="en-US" altLang="ko-KR" sz="1000"/>
+              <a:t>/nvidia-caps30</a:t>
+            </a:r>
+            <a:endParaRPr lang="en-US" altLang="ko-KR" sz="1000" dirty="0"/>
+          </a:p>
+        </p:txBody>
+      </p:sp>
+      <p:sp>
+        <p:nvSpPr>
+          <p:cNvPr id="40" name="사각형: 둥근 모서리 114">
+            <a:extLst>
+              <a:ext uri="{FF2B5EF4-FFF2-40B4-BE49-F238E27FC236}">
+                <a16:creationId xmlns:a16="http://schemas.microsoft.com/office/drawing/2014/main" id="{53B805E3-C8F5-5F6B-F293-18C9DEDA198C}"/>
+              </a:ext>
+            </a:extLst>
+          </p:cNvPr>
+          <p:cNvSpPr/>
+          <p:nvPr/>
+        </p:nvSpPr>
+        <p:spPr>
+          <a:xfrm>
+            <a:off x="3009994" y="1056152"/>
+            <a:ext cx="3707524" cy="383228"/>
+          </a:xfrm>
+          <a:prstGeom prst="roundRect">
+            <a:avLst>
+              <a:gd name="adj" fmla="val 7242"/>
+            </a:avLst>
+          </a:prstGeom>
+          <a:solidFill>
+            <a:schemeClr val="bg2">
+              <a:lumMod val="90000"/>
+            </a:schemeClr>
+          </a:solidFill>
+          <a:ln w="12700"/>
+        </p:spPr>
+        <p:style>
+          <a:lnRef idx="2">
+            <a:schemeClr val="dk1"/>
+          </a:lnRef>
+          <a:fillRef idx="1">
+            <a:schemeClr val="lt1"/>
+          </a:fillRef>
+          <a:effectRef idx="0">
+            <a:schemeClr val="dk1"/>
+          </a:effectRef>
+          <a:fontRef idx="minor">
+            <a:schemeClr val="dk1"/>
+          </a:fontRef>
+        </p:style>
+        <p:txBody>
+          <a:bodyPr rtlCol="0" anchor="ctr"/>
+          <a:lstStyle/>
+          <a:p>
+            <a:pPr algn="ctr"/>
+            <a:r>
+              <a:rPr lang="en-US" altLang="ko-KR" sz="900"/>
+              <a:t>NVIDIA CUDA Lib/Toolkit</a:t>
+            </a:r>
+            <a:endParaRPr lang="en-US" altLang="ko-KR" sz="900" dirty="0"/>
+          </a:p>
+        </p:txBody>
+      </p:sp>
+      <p:sp>
+        <p:nvSpPr>
+          <p:cNvPr id="41" name="사각형: 둥근 모서리 114">
+            <a:extLst>
+              <a:ext uri="{FF2B5EF4-FFF2-40B4-BE49-F238E27FC236}">
+                <a16:creationId xmlns:a16="http://schemas.microsoft.com/office/drawing/2014/main" id="{2E144784-2DC1-0CC5-AE67-82CB64FD4DF7}"/>
+              </a:ext>
+            </a:extLst>
+          </p:cNvPr>
+          <p:cNvSpPr/>
+          <p:nvPr/>
+        </p:nvSpPr>
+        <p:spPr>
+          <a:xfrm>
+            <a:off x="3009994" y="610481"/>
+            <a:ext cx="3707524" cy="383228"/>
+          </a:xfrm>
+          <a:prstGeom prst="roundRect">
+            <a:avLst>
+              <a:gd name="adj" fmla="val 7242"/>
+            </a:avLst>
+          </a:prstGeom>
+          <a:ln w="12700"/>
+        </p:spPr>
+        <p:style>
+          <a:lnRef idx="2">
+            <a:schemeClr val="dk1"/>
+          </a:lnRef>
+          <a:fillRef idx="1">
+            <a:schemeClr val="lt1"/>
+          </a:fillRef>
+          <a:effectRef idx="0">
+            <a:schemeClr val="dk1"/>
+          </a:effectRef>
+          <a:fontRef idx="minor">
+            <a:schemeClr val="dk1"/>
+          </a:fontRef>
+        </p:style>
+        <p:txBody>
+          <a:bodyPr rtlCol="0" anchor="ctr"/>
+          <a:lstStyle/>
+          <a:p>
+            <a:pPr algn="ctr"/>
+            <a:r>
+              <a:rPr lang="en-US" altLang="ko-KR" sz="900"/>
+              <a:t>App with NVIDIA_VISIBLE_DEVICES Env  </a:t>
+            </a:r>
+            <a:endParaRPr lang="en-US" altLang="ko-KR" sz="900" dirty="0"/>
+          </a:p>
+        </p:txBody>
+      </p:sp>
+      <p:sp>
+        <p:nvSpPr>
+          <p:cNvPr id="42" name="사각형: 둥근 모서리 114">
+            <a:extLst>
+              <a:ext uri="{FF2B5EF4-FFF2-40B4-BE49-F238E27FC236}">
+                <a16:creationId xmlns:a16="http://schemas.microsoft.com/office/drawing/2014/main" id="{86CDFBC8-FF87-A17B-26A0-A6E739193F68}"/>
+              </a:ext>
+            </a:extLst>
+          </p:cNvPr>
+          <p:cNvSpPr/>
+          <p:nvPr/>
+        </p:nvSpPr>
+        <p:spPr>
+          <a:xfrm>
+            <a:off x="3009995" y="1996804"/>
+            <a:ext cx="3707523" cy="383228"/>
+          </a:xfrm>
+          <a:prstGeom prst="roundRect">
+            <a:avLst>
+              <a:gd name="adj" fmla="val 12429"/>
+            </a:avLst>
+          </a:prstGeom>
+          <a:solidFill>
+            <a:schemeClr val="bg1">
+              <a:lumMod val="95000"/>
+            </a:schemeClr>
+          </a:solidFill>
+          <a:ln w="12700"/>
+        </p:spPr>
+        <p:style>
+          <a:lnRef idx="2">
+            <a:schemeClr val="dk1"/>
+          </a:lnRef>
+          <a:fillRef idx="1">
+            <a:schemeClr val="lt1"/>
+          </a:fillRef>
+          <a:effectRef idx="0">
+            <a:schemeClr val="dk1"/>
+          </a:effectRef>
+          <a:fontRef idx="minor">
+            <a:schemeClr val="dk1"/>
+          </a:fontRef>
+        </p:style>
+        <p:txBody>
+          <a:bodyPr rtlCol="0" anchor="ctr"/>
+          <a:lstStyle/>
+          <a:p>
+            <a:pPr algn="ctr"/>
+            <a:r>
+              <a:rPr lang="en-US" altLang="ko-KR" sz="1000"/>
+              <a:t>/dev/nvidia0</a:t>
+            </a:r>
+            <a:endParaRPr lang="en-US" altLang="ko-KR" sz="1000" dirty="0"/>
+          </a:p>
+        </p:txBody>
+      </p:sp>
+      <p:sp>
+        <p:nvSpPr>
+          <p:cNvPr id="43" name="사각형: 둥근 모서리 114">
+            <a:extLst>
+              <a:ext uri="{FF2B5EF4-FFF2-40B4-BE49-F238E27FC236}">
+                <a16:creationId xmlns:a16="http://schemas.microsoft.com/office/drawing/2014/main" id="{F5F466C6-795B-4A78-3DDD-7B26CAC1DD75}"/>
+              </a:ext>
+            </a:extLst>
+          </p:cNvPr>
+          <p:cNvSpPr/>
+          <p:nvPr/>
+        </p:nvSpPr>
+        <p:spPr>
+          <a:xfrm>
+            <a:off x="4265968" y="1526478"/>
+            <a:ext cx="1195578" cy="383228"/>
+          </a:xfrm>
+          <a:prstGeom prst="roundRect">
+            <a:avLst>
+              <a:gd name="adj" fmla="val 7242"/>
+            </a:avLst>
+          </a:prstGeom>
+          <a:solidFill>
+            <a:schemeClr val="bg1">
+              <a:lumMod val="95000"/>
+            </a:schemeClr>
+          </a:solidFill>
+          <a:ln w="12700"/>
+        </p:spPr>
+        <p:style>
+          <a:lnRef idx="2">
+            <a:schemeClr val="dk1"/>
+          </a:lnRef>
+          <a:fillRef idx="1">
+            <a:schemeClr val="lt1"/>
+          </a:fillRef>
+          <a:effectRef idx="0">
+            <a:schemeClr val="dk1"/>
+          </a:effectRef>
+          <a:fontRef idx="minor">
+            <a:schemeClr val="dk1"/>
+          </a:fontRef>
+        </p:style>
+        <p:txBody>
+          <a:bodyPr rtlCol="0" anchor="ctr"/>
+          <a:lstStyle/>
+          <a:p>
+            <a:pPr algn="ctr"/>
+            <a:r>
+              <a:rPr lang="en-US" altLang="ko-KR" sz="1000"/>
+              <a:t>/dev/nvidia-caps</a:t>
+            </a:r>
+            <a:br>
+              <a:rPr lang="en-US" altLang="ko-KR" sz="1000"/>
+            </a:br>
+            <a:r>
+              <a:rPr lang="en-US" altLang="ko-KR" sz="1000"/>
+              <a:t>/nvidia-caps31</a:t>
+            </a:r>
+            <a:endParaRPr lang="en-US" altLang="ko-KR" sz="1000" dirty="0"/>
+          </a:p>
+        </p:txBody>
+      </p:sp>
+      <p:sp>
+        <p:nvSpPr>
+          <p:cNvPr id="44" name="사각형: 둥근 모서리 114">
+            <a:extLst>
+              <a:ext uri="{FF2B5EF4-FFF2-40B4-BE49-F238E27FC236}">
+                <a16:creationId xmlns:a16="http://schemas.microsoft.com/office/drawing/2014/main" id="{270FE9AE-BB98-C842-FB54-9F53F173CD04}"/>
+              </a:ext>
+            </a:extLst>
+          </p:cNvPr>
+          <p:cNvSpPr/>
+          <p:nvPr/>
+        </p:nvSpPr>
+        <p:spPr>
+          <a:xfrm>
+            <a:off x="5521940" y="1526478"/>
+            <a:ext cx="1195578" cy="383228"/>
+          </a:xfrm>
+          <a:prstGeom prst="roundRect">
+            <a:avLst>
+              <a:gd name="adj" fmla="val 7242"/>
+            </a:avLst>
+          </a:prstGeom>
+          <a:solidFill>
+            <a:schemeClr val="bg1">
+              <a:lumMod val="95000"/>
+            </a:schemeClr>
+          </a:solidFill>
+          <a:ln w="12700"/>
+        </p:spPr>
+        <p:style>
+          <a:lnRef idx="2">
+            <a:schemeClr val="dk1"/>
+          </a:lnRef>
+          <a:fillRef idx="1">
+            <a:schemeClr val="lt1"/>
+          </a:fillRef>
+          <a:effectRef idx="0">
+            <a:schemeClr val="dk1"/>
+          </a:effectRef>
+          <a:fontRef idx="minor">
+            <a:schemeClr val="dk1"/>
+          </a:fontRef>
+        </p:style>
+        <p:txBody>
+          <a:bodyPr rtlCol="0" anchor="ctr"/>
+          <a:lstStyle/>
+          <a:p>
+            <a:pPr algn="ctr"/>
+            <a:r>
+              <a:rPr lang="en-US" altLang="ko-KR" sz="1000"/>
+              <a:t>/dev/nvidia-caps</a:t>
+            </a:r>
+            <a:br>
+              <a:rPr lang="en-US" altLang="ko-KR" sz="1000"/>
+            </a:br>
+            <a:r>
+              <a:rPr lang="en-US" altLang="ko-KR" sz="1000"/>
+              <a:t>/nvidia-caps32</a:t>
+            </a:r>
+            <a:endParaRPr lang="en-US" altLang="ko-KR" sz="1000" dirty="0"/>
+          </a:p>
+        </p:txBody>
+      </p:sp>
+      <p:sp>
+        <p:nvSpPr>
+          <p:cNvPr id="45" name="TextBox 44">
+            <a:extLst>
+              <a:ext uri="{FF2B5EF4-FFF2-40B4-BE49-F238E27FC236}">
+                <a16:creationId xmlns:a16="http://schemas.microsoft.com/office/drawing/2014/main" id="{5323C595-5DF2-55DA-9D1B-02C0FAA6AE54}"/>
               </a:ext>
             </a:extLst>
           </p:cNvPr>
@@ -43849,7 +43972,7 @@
         </p:nvSpPr>
         <p:spPr>
           <a:xfrm>
-            <a:off x="7225845" y="267494"/>
+            <a:off x="7225845" y="266178"/>
             <a:ext cx="1798090" cy="1569660"/>
           </a:xfrm>
           <a:prstGeom prst="rect">
@@ -43980,7 +44103,7 @@
                 </a:solidFill>
                 <a:cs typeface="Al Bayan Plain" pitchFamily="2" charset="-78"/>
               </a:rPr>
-              <a:t>nvidia.com/gpu.shared</a:t>
+              <a:t>nvidia.com/mig-4g.20b</a:t>
             </a:r>
             <a:r>
               <a:rPr lang="en-US" sz="800" kern="0" dirty="0">
@@ -44020,7 +44143,7 @@
                 </a:solidFill>
                 <a:cs typeface="Al Bayan Plain" pitchFamily="2" charset="-78"/>
               </a:rPr>
-              <a:t>nvidia.com</a:t>
+              <a:t>nvidia.com/mig-4g.20b</a:t>
             </a:r>
             <a:r>
               <a:rPr lang="en-US" altLang="ko-KR" sz="800" kern="0" dirty="0">
@@ -44029,29 +44152,333 @@
                 </a:solidFill>
                 <a:cs typeface="Al Bayan Plain" pitchFamily="2" charset="-78"/>
               </a:rPr>
-              <a:t>/</a:t>
-            </a:r>
-            <a:r>
-              <a:rPr lang="en-US" altLang="ko-KR" sz="800" kern="0" dirty="0" err="1">
-                <a:solidFill>
-                  <a:srgbClr val="C00000"/>
-                </a:solidFill>
-                <a:cs typeface="Al Bayan Plain" pitchFamily="2" charset="-78"/>
-              </a:rPr>
-              <a:t>gpu.shared</a:t>
-            </a:r>
-            <a:r>
-              <a:rPr lang="en-US" altLang="ko-KR" sz="800" kern="0" dirty="0">
-                <a:solidFill>
-                  <a:srgbClr val="C00000"/>
-                </a:solidFill>
-                <a:cs typeface="Al Bayan Plain" pitchFamily="2" charset="-78"/>
-              </a:rPr>
               <a:t>: 1</a:t>
             </a:r>
           </a:p>
         </p:txBody>
       </p:sp>
+      <p:cxnSp>
+        <p:nvCxnSpPr>
+          <p:cNvPr id="56" name="직선 연결선 17">
+            <a:extLst>
+              <a:ext uri="{FF2B5EF4-FFF2-40B4-BE49-F238E27FC236}">
+                <a16:creationId xmlns:a16="http://schemas.microsoft.com/office/drawing/2014/main" id="{9E39FF66-72F8-131E-384F-0BF689CC5C03}"/>
+              </a:ext>
+            </a:extLst>
+          </p:cNvPr>
+          <p:cNvCxnSpPr>
+            <a:cxnSpLocks/>
+            <a:stCxn id="11" idx="2"/>
+            <a:endCxn id="12" idx="0"/>
+          </p:cNvCxnSpPr>
+          <p:nvPr/>
+        </p:nvCxnSpPr>
+        <p:spPr>
+          <a:xfrm>
+            <a:off x="831009" y="4210225"/>
+            <a:ext cx="1404310" cy="133508"/>
+          </a:xfrm>
+          <a:prstGeom prst="line">
+            <a:avLst/>
+          </a:prstGeom>
+          <a:ln w="12700">
+            <a:solidFill>
+              <a:schemeClr val="tx1"/>
+            </a:solidFill>
+            <a:prstDash val="dash"/>
+          </a:ln>
+        </p:spPr>
+        <p:style>
+          <a:lnRef idx="1">
+            <a:schemeClr val="accent1"/>
+          </a:lnRef>
+          <a:fillRef idx="0">
+            <a:schemeClr val="accent1"/>
+          </a:fillRef>
+          <a:effectRef idx="0">
+            <a:schemeClr val="accent1"/>
+          </a:effectRef>
+          <a:fontRef idx="minor">
+            <a:schemeClr val="tx1"/>
+          </a:fontRef>
+        </p:style>
+      </p:cxnSp>
+      <p:cxnSp>
+        <p:nvCxnSpPr>
+          <p:cNvPr id="60" name="직선 연결선 17">
+            <a:extLst>
+              <a:ext uri="{FF2B5EF4-FFF2-40B4-BE49-F238E27FC236}">
+                <a16:creationId xmlns:a16="http://schemas.microsoft.com/office/drawing/2014/main" id="{9A169D25-509E-6318-293D-851ECF92057B}"/>
+              </a:ext>
+            </a:extLst>
+          </p:cNvPr>
+          <p:cNvCxnSpPr>
+            <a:cxnSpLocks/>
+            <a:stCxn id="16" idx="2"/>
+            <a:endCxn id="12" idx="0"/>
+          </p:cNvCxnSpPr>
+          <p:nvPr/>
+        </p:nvCxnSpPr>
+        <p:spPr>
+          <a:xfrm flipH="1">
+            <a:off x="2235319" y="4210225"/>
+            <a:ext cx="708428" cy="133508"/>
+          </a:xfrm>
+          <a:prstGeom prst="line">
+            <a:avLst/>
+          </a:prstGeom>
+          <a:ln w="12700">
+            <a:solidFill>
+              <a:schemeClr val="tx1"/>
+            </a:solidFill>
+            <a:prstDash val="dash"/>
+          </a:ln>
+        </p:spPr>
+        <p:style>
+          <a:lnRef idx="1">
+            <a:schemeClr val="accent1"/>
+          </a:lnRef>
+          <a:fillRef idx="0">
+            <a:schemeClr val="accent1"/>
+          </a:fillRef>
+          <a:effectRef idx="0">
+            <a:schemeClr val="accent1"/>
+          </a:effectRef>
+          <a:fontRef idx="minor">
+            <a:schemeClr val="tx1"/>
+          </a:fontRef>
+        </p:style>
+      </p:cxnSp>
+      <p:cxnSp>
+        <p:nvCxnSpPr>
+          <p:cNvPr id="64" name="직선 연결선 17">
+            <a:extLst>
+              <a:ext uri="{FF2B5EF4-FFF2-40B4-BE49-F238E27FC236}">
+                <a16:creationId xmlns:a16="http://schemas.microsoft.com/office/drawing/2014/main" id="{0C13C9F1-3B17-AE6A-5E39-D369347AE3CB}"/>
+              </a:ext>
+            </a:extLst>
+          </p:cNvPr>
+          <p:cNvCxnSpPr>
+            <a:cxnSpLocks/>
+            <a:stCxn id="13" idx="2"/>
+            <a:endCxn id="11" idx="0"/>
+          </p:cNvCxnSpPr>
+          <p:nvPr/>
+        </p:nvCxnSpPr>
+        <p:spPr>
+          <a:xfrm>
+            <a:off x="828291" y="3690116"/>
+            <a:ext cx="2718" cy="136881"/>
+          </a:xfrm>
+          <a:prstGeom prst="line">
+            <a:avLst/>
+          </a:prstGeom>
+          <a:ln w="12700">
+            <a:solidFill>
+              <a:schemeClr val="tx1"/>
+            </a:solidFill>
+            <a:prstDash val="dash"/>
+          </a:ln>
+        </p:spPr>
+        <p:style>
+          <a:lnRef idx="1">
+            <a:schemeClr val="accent1"/>
+          </a:lnRef>
+          <a:fillRef idx="0">
+            <a:schemeClr val="accent1"/>
+          </a:fillRef>
+          <a:effectRef idx="0">
+            <a:schemeClr val="accent1"/>
+          </a:effectRef>
+          <a:fontRef idx="minor">
+            <a:schemeClr val="tx1"/>
+          </a:fontRef>
+        </p:style>
+      </p:cxnSp>
+      <p:cxnSp>
+        <p:nvCxnSpPr>
+          <p:cNvPr id="71" name="직선 연결선 17">
+            <a:extLst>
+              <a:ext uri="{FF2B5EF4-FFF2-40B4-BE49-F238E27FC236}">
+                <a16:creationId xmlns:a16="http://schemas.microsoft.com/office/drawing/2014/main" id="{4898AD93-491D-7696-D834-C84884EE62D8}"/>
+              </a:ext>
+            </a:extLst>
+          </p:cNvPr>
+          <p:cNvCxnSpPr>
+            <a:cxnSpLocks/>
+            <a:stCxn id="14" idx="2"/>
+            <a:endCxn id="16" idx="0"/>
+          </p:cNvCxnSpPr>
+          <p:nvPr/>
+        </p:nvCxnSpPr>
+        <p:spPr>
+          <a:xfrm>
+            <a:off x="2237581" y="3690116"/>
+            <a:ext cx="706166" cy="136881"/>
+          </a:xfrm>
+          <a:prstGeom prst="line">
+            <a:avLst/>
+          </a:prstGeom>
+          <a:ln w="12700">
+            <a:solidFill>
+              <a:schemeClr val="tx1"/>
+            </a:solidFill>
+            <a:prstDash val="dash"/>
+          </a:ln>
+        </p:spPr>
+        <p:style>
+          <a:lnRef idx="1">
+            <a:schemeClr val="accent1"/>
+          </a:lnRef>
+          <a:fillRef idx="0">
+            <a:schemeClr val="accent1"/>
+          </a:fillRef>
+          <a:effectRef idx="0">
+            <a:schemeClr val="accent1"/>
+          </a:effectRef>
+          <a:fontRef idx="minor">
+            <a:schemeClr val="tx1"/>
+          </a:fontRef>
+        </p:style>
+      </p:cxnSp>
+      <p:cxnSp>
+        <p:nvCxnSpPr>
+          <p:cNvPr id="77" name="직선 연결선 17">
+            <a:extLst>
+              <a:ext uri="{FF2B5EF4-FFF2-40B4-BE49-F238E27FC236}">
+                <a16:creationId xmlns:a16="http://schemas.microsoft.com/office/drawing/2014/main" id="{0B67D6B1-CD7E-7193-912E-2B02EF1CD103}"/>
+              </a:ext>
+            </a:extLst>
+          </p:cNvPr>
+          <p:cNvCxnSpPr>
+            <a:cxnSpLocks/>
+            <a:stCxn id="15" idx="2"/>
+            <a:endCxn id="16" idx="0"/>
+          </p:cNvCxnSpPr>
+          <p:nvPr/>
+        </p:nvCxnSpPr>
+        <p:spPr>
+          <a:xfrm flipH="1">
+            <a:off x="2943747" y="3690116"/>
+            <a:ext cx="706166" cy="136881"/>
+          </a:xfrm>
+          <a:prstGeom prst="line">
+            <a:avLst/>
+          </a:prstGeom>
+          <a:ln w="12700">
+            <a:solidFill>
+              <a:schemeClr val="tx1"/>
+            </a:solidFill>
+            <a:prstDash val="dash"/>
+          </a:ln>
+        </p:spPr>
+        <p:style>
+          <a:lnRef idx="1">
+            <a:schemeClr val="accent1"/>
+          </a:lnRef>
+          <a:fillRef idx="0">
+            <a:schemeClr val="accent1"/>
+          </a:fillRef>
+          <a:effectRef idx="0">
+            <a:schemeClr val="accent1"/>
+          </a:effectRef>
+          <a:fontRef idx="minor">
+            <a:schemeClr val="tx1"/>
+          </a:fontRef>
+        </p:style>
+      </p:cxnSp>
+      <p:cxnSp>
+        <p:nvCxnSpPr>
+          <p:cNvPr id="82" name="직선 연결선 17">
+            <a:extLst>
+              <a:ext uri="{FF2B5EF4-FFF2-40B4-BE49-F238E27FC236}">
+                <a16:creationId xmlns:a16="http://schemas.microsoft.com/office/drawing/2014/main" id="{E78ED4A4-5423-B21D-B216-A01DBF46384E}"/>
+              </a:ext>
+            </a:extLst>
+          </p:cNvPr>
+          <p:cNvCxnSpPr>
+            <a:cxnSpLocks/>
+            <a:stCxn id="19" idx="2"/>
+            <a:endCxn id="20" idx="0"/>
+          </p:cNvCxnSpPr>
+          <p:nvPr/>
+        </p:nvCxnSpPr>
+        <p:spPr>
+          <a:xfrm flipH="1">
+            <a:off x="5032231" y="3690116"/>
+            <a:ext cx="1" cy="136881"/>
+          </a:xfrm>
+          <a:prstGeom prst="line">
+            <a:avLst/>
+          </a:prstGeom>
+          <a:ln w="12700">
+            <a:solidFill>
+              <a:schemeClr val="tx1"/>
+            </a:solidFill>
+            <a:prstDash val="dash"/>
+          </a:ln>
+        </p:spPr>
+        <p:style>
+          <a:lnRef idx="1">
+            <a:schemeClr val="accent1"/>
+          </a:lnRef>
+          <a:fillRef idx="0">
+            <a:schemeClr val="accent1"/>
+          </a:fillRef>
+          <a:effectRef idx="0">
+            <a:schemeClr val="accent1"/>
+          </a:effectRef>
+          <a:fontRef idx="minor">
+            <a:schemeClr val="tx1"/>
+          </a:fontRef>
+        </p:style>
+      </p:cxnSp>
+      <p:cxnSp>
+        <p:nvCxnSpPr>
+          <p:cNvPr id="85" name="직선 연결선 17">
+            <a:extLst>
+              <a:ext uri="{FF2B5EF4-FFF2-40B4-BE49-F238E27FC236}">
+                <a16:creationId xmlns:a16="http://schemas.microsoft.com/office/drawing/2014/main" id="{5CA1D19C-FEF5-11C4-78E2-4E73E38C8101}"/>
+              </a:ext>
+            </a:extLst>
+          </p:cNvPr>
+          <p:cNvCxnSpPr>
+            <a:cxnSpLocks/>
+            <a:stCxn id="20" idx="2"/>
+            <a:endCxn id="18" idx="0"/>
+          </p:cNvCxnSpPr>
+          <p:nvPr/>
+        </p:nvCxnSpPr>
+        <p:spPr>
+          <a:xfrm>
+            <a:off x="5032231" y="4210225"/>
+            <a:ext cx="1" cy="133508"/>
+          </a:xfrm>
+          <a:prstGeom prst="line">
+            <a:avLst/>
+          </a:prstGeom>
+          <a:ln w="12700">
+            <a:solidFill>
+              <a:schemeClr val="tx1"/>
+            </a:solidFill>
+            <a:prstDash val="dash"/>
+          </a:ln>
+        </p:spPr>
+        <p:style>
+          <a:lnRef idx="1">
+            <a:schemeClr val="accent1"/>
+          </a:lnRef>
+          <a:fillRef idx="0">
+            <a:schemeClr val="accent1"/>
+          </a:fillRef>
+          <a:effectRef idx="0">
+            <a:schemeClr val="accent1"/>
+          </a:effectRef>
+          <a:fontRef idx="minor">
+            <a:schemeClr val="tx1"/>
+          </a:fontRef>
+        </p:style>
+      </p:cxnSp>
     </p:spTree>
     <p:extLst>
       <p:ext uri="{BB962C8B-B14F-4D97-AF65-F5344CB8AC3E}">

--- a/content/docs/theory-analysis/kubernetes-nvidia-device-plugin/images/images.pptx
+++ b/content/docs/theory-analysis/kubernetes-nvidia-device-plugin/images/images.pptx
@@ -5050,10 +5050,10 @@
           <a:p>
             <a:pPr algn="ctr"/>
             <a:r>
-              <a:rPr lang="en-US" altLang="ko-KR" sz="1000"/>
+              <a:rPr lang="en-US" altLang="ko-KR" sz="900"/>
               <a:t>/dev/nvidia1</a:t>
             </a:r>
-            <a:endParaRPr lang="en-US" altLang="ko-KR" sz="1000" dirty="0"/>
+            <a:endParaRPr lang="en-US" altLang="ko-KR" sz="900" dirty="0"/>
           </a:p>
         </p:txBody>
       </p:sp>
@@ -5106,10 +5106,10 @@
           <a:p>
             <a:pPr algn="ctr"/>
             <a:r>
-              <a:rPr lang="en-US" altLang="ko-KR" sz="1000"/>
+              <a:rPr lang="en-US" altLang="ko-KR" sz="900"/>
               <a:t>/dev/nvidia2</a:t>
             </a:r>
-            <a:endParaRPr lang="en-US" altLang="ko-KR" sz="1000" dirty="0"/>
+            <a:endParaRPr lang="en-US" altLang="ko-KR" sz="900" dirty="0"/>
           </a:p>
         </p:txBody>
       </p:sp>
@@ -5275,10 +5275,10 @@
           <a:p>
             <a:pPr algn="ctr"/>
             <a:r>
-              <a:rPr lang="en-US" altLang="ko-KR" sz="1000"/>
+              <a:rPr lang="en-US" altLang="ko-KR" sz="900"/>
               <a:t>/dev/nvidia0</a:t>
             </a:r>
-            <a:endParaRPr lang="en-US" altLang="ko-KR" sz="1000" dirty="0"/>
+            <a:endParaRPr lang="en-US" altLang="ko-KR" sz="900" dirty="0"/>
           </a:p>
         </p:txBody>
       </p:sp>
@@ -5567,10 +5567,10 @@
           <a:p>
             <a:pPr algn="ctr"/>
             <a:r>
-              <a:rPr lang="en-US" altLang="ko-KR" sz="1000"/>
+              <a:rPr lang="en-US" altLang="ko-KR" sz="900"/>
               <a:t>/dev/nvidia3</a:t>
             </a:r>
-            <a:endParaRPr lang="en-US" altLang="ko-KR" sz="1000" dirty="0"/>
+            <a:endParaRPr lang="en-US" altLang="ko-KR" sz="900" dirty="0"/>
           </a:p>
         </p:txBody>
       </p:sp>
@@ -5795,17 +5795,17 @@
           <a:p>
             <a:pPr algn="ctr"/>
             <a:r>
-              <a:rPr lang="en-US" altLang="ko-KR" sz="1000"/>
+              <a:rPr lang="en-US" altLang="ko-KR" sz="900"/>
               <a:t>NVIDIA</a:t>
             </a:r>
           </a:p>
           <a:p>
             <a:pPr algn="ctr"/>
             <a:r>
-              <a:rPr lang="en-US" altLang="ko-KR" sz="1000"/>
+              <a:rPr lang="en-US" altLang="ko-KR" sz="900"/>
               <a:t>GPU 0</a:t>
             </a:r>
-            <a:endParaRPr lang="en-US" altLang="ko-KR" sz="1000" dirty="0"/>
+            <a:endParaRPr lang="en-US" altLang="ko-KR" sz="900" dirty="0"/>
           </a:p>
         </p:txBody>
       </p:sp>
@@ -5858,17 +5858,17 @@
           <a:p>
             <a:pPr algn="ctr"/>
             <a:r>
-              <a:rPr lang="en-US" altLang="ko-KR" sz="1000"/>
+              <a:rPr lang="en-US" altLang="ko-KR" sz="900"/>
               <a:t>NVIDIA</a:t>
             </a:r>
           </a:p>
           <a:p>
             <a:pPr algn="ctr"/>
             <a:r>
-              <a:rPr lang="en-US" altLang="ko-KR" sz="1000"/>
+              <a:rPr lang="en-US" altLang="ko-KR" sz="900"/>
               <a:t>GPU 1</a:t>
             </a:r>
-            <a:endParaRPr lang="en-US" altLang="ko-KR" sz="1000" dirty="0"/>
+            <a:endParaRPr lang="en-US" altLang="ko-KR" sz="900" dirty="0"/>
           </a:p>
         </p:txBody>
       </p:sp>
@@ -5921,17 +5921,17 @@
           <a:p>
             <a:pPr algn="ctr"/>
             <a:r>
-              <a:rPr lang="en-US" altLang="ko-KR" sz="1000"/>
+              <a:rPr lang="en-US" altLang="ko-KR" sz="900"/>
               <a:t>NVIDIA</a:t>
             </a:r>
           </a:p>
           <a:p>
             <a:pPr algn="ctr"/>
             <a:r>
-              <a:rPr lang="en-US" altLang="ko-KR" sz="1000"/>
+              <a:rPr lang="en-US" altLang="ko-KR" sz="900"/>
               <a:t>GPU 2</a:t>
             </a:r>
-            <a:endParaRPr lang="en-US" altLang="ko-KR" sz="1000" dirty="0"/>
+            <a:endParaRPr lang="en-US" altLang="ko-KR" sz="900" dirty="0"/>
           </a:p>
         </p:txBody>
       </p:sp>
@@ -5984,17 +5984,17 @@
           <a:p>
             <a:pPr algn="ctr"/>
             <a:r>
-              <a:rPr lang="en-US" altLang="ko-KR" sz="1000"/>
+              <a:rPr lang="en-US" altLang="ko-KR" sz="900"/>
               <a:t>NVIDIA</a:t>
             </a:r>
           </a:p>
           <a:p>
             <a:pPr algn="ctr"/>
             <a:r>
-              <a:rPr lang="en-US" altLang="ko-KR" sz="1000"/>
+              <a:rPr lang="en-US" altLang="ko-KR" sz="900"/>
               <a:t>GPU 3</a:t>
             </a:r>
-            <a:endParaRPr lang="en-US" altLang="ko-KR" sz="1000" dirty="0"/>
+            <a:endParaRPr lang="en-US" altLang="ko-KR" sz="900" dirty="0"/>
           </a:p>
         </p:txBody>
       </p:sp>
@@ -6047,10 +6047,10 @@
           <a:p>
             <a:pPr algn="ctr"/>
             <a:r>
-              <a:rPr lang="en-US" altLang="ko-KR" sz="1000"/>
+              <a:rPr lang="en-US" altLang="ko-KR" sz="900"/>
               <a:t>NVIDIA CUDA Lib/Toolkit</a:t>
             </a:r>
-            <a:endParaRPr lang="en-US" altLang="ko-KR" sz="1000" dirty="0"/>
+            <a:endParaRPr lang="en-US" altLang="ko-KR" sz="900" dirty="0"/>
           </a:p>
         </p:txBody>
       </p:sp>
@@ -6861,7 +6861,7 @@
             <a:solidFill>
               <a:schemeClr val="tx1"/>
             </a:solidFill>
-            <a:prstDash val="dash"/>
+            <a:prstDash val="solid"/>
           </a:ln>
         </p:spPr>
         <p:style>
@@ -6890,14 +6890,15 @@
           </p:cNvPr>
           <p:cNvCxnSpPr>
             <a:cxnSpLocks/>
+            <a:stCxn id="48" idx="2"/>
             <a:endCxn id="13" idx="0"/>
           </p:cNvCxnSpPr>
           <p:nvPr/>
         </p:nvCxnSpPr>
         <p:spPr>
           <a:xfrm>
-            <a:off x="3004844" y="2191821"/>
-            <a:ext cx="3645" cy="1352321"/>
+            <a:off x="3007252" y="2660254"/>
+            <a:ext cx="1237" cy="883888"/>
           </a:xfrm>
           <a:prstGeom prst="line">
             <a:avLst/>
@@ -6906,7 +6907,7 @@
             <a:solidFill>
               <a:schemeClr val="tx1"/>
             </a:solidFill>
-            <a:prstDash val="dash"/>
+            <a:prstDash val="solid"/>
           </a:ln>
         </p:spPr>
         <p:style>
@@ -6952,7 +6953,7 @@
             <a:solidFill>
               <a:schemeClr val="tx1"/>
             </a:solidFill>
-            <a:prstDash val="dash"/>
+            <a:prstDash val="solid"/>
           </a:ln>
         </p:spPr>
         <p:style>
@@ -6997,7 +6998,7 @@
             <a:solidFill>
               <a:schemeClr val="tx1"/>
             </a:solidFill>
-            <a:prstDash val="dash"/>
+            <a:prstDash val="solid"/>
           </a:ln>
         </p:spPr>
         <p:style>
@@ -36949,10 +36950,10 @@
           <a:p>
             <a:pPr algn="ctr"/>
             <a:r>
-              <a:rPr lang="en-US" altLang="ko-KR" sz="1000"/>
+              <a:rPr lang="en-US" altLang="ko-KR" sz="900"/>
               <a:t>/dev/nvidia0</a:t>
             </a:r>
-            <a:endParaRPr lang="en-US" altLang="ko-KR" sz="1000" dirty="0"/>
+            <a:endParaRPr lang="en-US" altLang="ko-KR" sz="900" dirty="0"/>
           </a:p>
         </p:txBody>
       </p:sp>
@@ -37005,10 +37006,10 @@
           <a:p>
             <a:pPr algn="ctr"/>
             <a:r>
-              <a:rPr lang="en-US" altLang="ko-KR" sz="1000"/>
+              <a:rPr lang="en-US" altLang="ko-KR" sz="900"/>
               <a:t>/dev/nvidia1</a:t>
             </a:r>
-            <a:endParaRPr lang="en-US" altLang="ko-KR" sz="1000" dirty="0"/>
+            <a:endParaRPr lang="en-US" altLang="ko-KR" sz="900" dirty="0"/>
           </a:p>
         </p:txBody>
       </p:sp>
@@ -37174,10 +37175,10 @@
           <a:p>
             <a:pPr algn="ctr"/>
             <a:r>
-              <a:rPr lang="en-US" altLang="ko-KR" sz="1000"/>
+              <a:rPr lang="en-US" altLang="ko-KR" sz="900"/>
               <a:t>/dev/nvidia0</a:t>
             </a:r>
-            <a:endParaRPr lang="en-US" altLang="ko-KR" sz="1000" dirty="0"/>
+            <a:endParaRPr lang="en-US" altLang="ko-KR" sz="900" dirty="0"/>
           </a:p>
         </p:txBody>
       </p:sp>
@@ -37466,10 +37467,10 @@
           <a:p>
             <a:pPr algn="ctr"/>
             <a:r>
-              <a:rPr lang="en-US" altLang="ko-KR" sz="1000"/>
+              <a:rPr lang="en-US" altLang="ko-KR" sz="900"/>
               <a:t>/dev/nvidia1</a:t>
             </a:r>
-            <a:endParaRPr lang="en-US" altLang="ko-KR" sz="1000" dirty="0"/>
+            <a:endParaRPr lang="en-US" altLang="ko-KR" sz="900" dirty="0"/>
           </a:p>
         </p:txBody>
       </p:sp>
@@ -37694,17 +37695,17 @@
           <a:p>
             <a:pPr algn="ctr"/>
             <a:r>
-              <a:rPr lang="en-US" altLang="ko-KR" sz="1000"/>
+              <a:rPr lang="en-US" altLang="ko-KR" sz="900"/>
               <a:t>NVIDIA</a:t>
             </a:r>
           </a:p>
           <a:p>
             <a:pPr algn="ctr"/>
             <a:r>
-              <a:rPr lang="en-US" altLang="ko-KR" sz="1000"/>
+              <a:rPr lang="en-US" altLang="ko-KR" sz="900"/>
               <a:t>GPU 0</a:t>
             </a:r>
-            <a:endParaRPr lang="en-US" altLang="ko-KR" sz="1000" dirty="0"/>
+            <a:endParaRPr lang="en-US" altLang="ko-KR" sz="900" dirty="0"/>
           </a:p>
         </p:txBody>
       </p:sp>
@@ -37757,17 +37758,17 @@
           <a:p>
             <a:pPr algn="ctr"/>
             <a:r>
-              <a:rPr lang="en-US" altLang="ko-KR" sz="1000"/>
+              <a:rPr lang="en-US" altLang="ko-KR" sz="900"/>
               <a:t>NVIDIA</a:t>
             </a:r>
           </a:p>
           <a:p>
             <a:pPr algn="ctr"/>
             <a:r>
-              <a:rPr lang="en-US" altLang="ko-KR" sz="1000"/>
+              <a:rPr lang="en-US" altLang="ko-KR" sz="900"/>
               <a:t>GPU 1</a:t>
             </a:r>
-            <a:endParaRPr lang="en-US" altLang="ko-KR" sz="1000" dirty="0"/>
+            <a:endParaRPr lang="en-US" altLang="ko-KR" sz="900" dirty="0"/>
           </a:p>
         </p:txBody>
       </p:sp>
@@ -37820,10 +37821,10 @@
           <a:p>
             <a:pPr algn="ctr"/>
             <a:r>
-              <a:rPr lang="en-US" altLang="ko-KR" sz="1000"/>
+              <a:rPr lang="en-US" altLang="ko-KR" sz="900"/>
               <a:t>NVIDIA CUDA Lib/Toolkit</a:t>
             </a:r>
-            <a:endParaRPr lang="en-US" altLang="ko-KR" sz="1000" dirty="0"/>
+            <a:endParaRPr lang="en-US" altLang="ko-KR" sz="900" dirty="0"/>
           </a:p>
         </p:txBody>
       </p:sp>
@@ -38257,7 +38258,7 @@
             <a:solidFill>
               <a:schemeClr val="tx1"/>
             </a:solidFill>
-            <a:prstDash val="dash"/>
+            <a:prstDash val="solid"/>
           </a:ln>
         </p:spPr>
         <p:style>
@@ -38303,7 +38304,7 @@
             <a:solidFill>
               <a:schemeClr val="tx1"/>
             </a:solidFill>
-            <a:prstDash val="dash"/>
+            <a:prstDash val="solid"/>
           </a:ln>
         </p:spPr>
         <p:style>
@@ -38349,7 +38350,7 @@
             <a:solidFill>
               <a:schemeClr val="tx1"/>
             </a:solidFill>
-            <a:prstDash val="dash"/>
+            <a:prstDash val="solid"/>
           </a:ln>
         </p:spPr>
         <p:style>
@@ -38395,7 +38396,7 @@
             <a:solidFill>
               <a:schemeClr val="tx1"/>
             </a:solidFill>
-            <a:prstDash val="dash"/>
+            <a:prstDash val="solid"/>
           </a:ln>
         </p:spPr>
         <p:style>
@@ -38905,7 +38906,7 @@
         </p:nvSpPr>
         <p:spPr>
           <a:xfrm>
-            <a:off x="131107" y="2533894"/>
+            <a:off x="79917" y="2533894"/>
             <a:ext cx="3734722" cy="1176719"/>
           </a:xfrm>
           <a:prstGeom prst="roundRect">
@@ -38956,7 +38957,7 @@
         </p:nvSpPr>
         <p:spPr>
           <a:xfrm>
-            <a:off x="265020" y="3080850"/>
+            <a:off x="213830" y="3080850"/>
             <a:ext cx="1100403" cy="383228"/>
           </a:xfrm>
           <a:prstGeom prst="roundRect">
@@ -38991,17 +38992,17 @@
           <a:p>
             <a:pPr algn="ctr"/>
             <a:r>
-              <a:rPr lang="en-US" altLang="ko-KR" sz="1000"/>
+              <a:rPr lang="en-US" altLang="ko-KR" sz="900"/>
               <a:t>NVIDIA</a:t>
             </a:r>
           </a:p>
           <a:p>
             <a:pPr algn="ctr"/>
             <a:r>
-              <a:rPr lang="en-US" altLang="ko-KR" sz="1000"/>
+              <a:rPr lang="en-US" altLang="ko-KR" sz="900"/>
               <a:t>GPU 0</a:t>
             </a:r>
-            <a:endParaRPr lang="en-US" altLang="ko-KR" sz="1000" dirty="0"/>
+            <a:endParaRPr lang="en-US" altLang="ko-KR" sz="900" dirty="0"/>
           </a:p>
         </p:txBody>
       </p:sp>
@@ -39019,7 +39020,7 @@
         </p:nvSpPr>
         <p:spPr>
           <a:xfrm>
-            <a:off x="1480711" y="3080850"/>
+            <a:off x="1429521" y="3080850"/>
             <a:ext cx="1082148" cy="383228"/>
           </a:xfrm>
           <a:prstGeom prst="roundRect">
@@ -39054,17 +39055,17 @@
           <a:p>
             <a:pPr algn="ctr"/>
             <a:r>
-              <a:rPr lang="en-US" altLang="ko-KR" sz="1000"/>
+              <a:rPr lang="en-US" altLang="ko-KR" sz="900"/>
               <a:t>NVIDIA</a:t>
             </a:r>
           </a:p>
           <a:p>
             <a:pPr algn="ctr"/>
             <a:r>
-              <a:rPr lang="en-US" altLang="ko-KR" sz="1000"/>
+              <a:rPr lang="en-US" altLang="ko-KR" sz="900"/>
               <a:t>GPU 1</a:t>
             </a:r>
-            <a:endParaRPr lang="en-US" altLang="ko-KR" sz="1000" dirty="0"/>
+            <a:endParaRPr lang="en-US" altLang="ko-KR" sz="900" dirty="0"/>
           </a:p>
         </p:txBody>
       </p:sp>
@@ -39082,7 +39083,7 @@
         </p:nvSpPr>
         <p:spPr>
           <a:xfrm>
-            <a:off x="265021" y="2608988"/>
+            <a:off x="213831" y="2608988"/>
             <a:ext cx="2302741" cy="383228"/>
           </a:xfrm>
           <a:prstGeom prst="roundRect">
@@ -39117,10 +39118,10 @@
           <a:p>
             <a:pPr algn="ctr"/>
             <a:r>
-              <a:rPr lang="en-US" altLang="ko-KR" sz="1000"/>
+              <a:rPr lang="en-US" altLang="ko-KR" sz="900"/>
               <a:t>NVIDIA CUDA Lib/Toolkit</a:t>
             </a:r>
-            <a:endParaRPr lang="en-US" altLang="ko-KR" sz="1000" dirty="0"/>
+            <a:endParaRPr lang="en-US" altLang="ko-KR" sz="900" dirty="0"/>
           </a:p>
         </p:txBody>
       </p:sp>
@@ -39138,7 +39139,7 @@
         </p:nvSpPr>
         <p:spPr>
           <a:xfrm>
-            <a:off x="955537" y="2560404"/>
+            <a:off x="903503" y="2560404"/>
             <a:ext cx="915635" cy="238253"/>
           </a:xfrm>
           <a:prstGeom prst="rect">
@@ -39174,8 +39175,8 @@
         </p:nvSpPr>
         <p:spPr>
           <a:xfrm>
-            <a:off x="131107" y="332893"/>
-            <a:ext cx="2567744" cy="1990371"/>
+            <a:off x="79917" y="332893"/>
+            <a:ext cx="2411859" cy="1990371"/>
           </a:xfrm>
           <a:prstGeom prst="roundRect">
             <a:avLst>
@@ -39267,8 +39268,8 @@
         </p:nvSpPr>
         <p:spPr>
           <a:xfrm>
-            <a:off x="180868" y="610622"/>
-            <a:ext cx="2464974" cy="1661296"/>
+            <a:off x="129678" y="610622"/>
+            <a:ext cx="2308660" cy="1661296"/>
           </a:xfrm>
           <a:prstGeom prst="roundRect">
             <a:avLst>
@@ -39324,7 +39325,7 @@
         </p:nvSpPr>
         <p:spPr>
           <a:xfrm>
-            <a:off x="266714" y="1799345"/>
+            <a:off x="215524" y="1799345"/>
             <a:ext cx="923364" cy="383228"/>
           </a:xfrm>
           <a:prstGeom prst="roundRect">
@@ -39359,10 +39360,10 @@
           <a:p>
             <a:pPr algn="ctr"/>
             <a:r>
-              <a:rPr lang="en-US" altLang="ko-KR" sz="1000"/>
+              <a:rPr lang="en-US" altLang="ko-KR" sz="900"/>
               <a:t>/dev/nvidia0</a:t>
             </a:r>
-            <a:endParaRPr lang="en-US" altLang="ko-KR" sz="1000" dirty="0"/>
+            <a:endParaRPr lang="en-US" altLang="ko-KR" sz="900" dirty="0"/>
           </a:p>
         </p:txBody>
       </p:sp>
@@ -39380,8 +39381,8 @@
         </p:nvSpPr>
         <p:spPr>
           <a:xfrm>
-            <a:off x="266712" y="1329019"/>
-            <a:ext cx="2296145" cy="383228"/>
+            <a:off x="215523" y="1329019"/>
+            <a:ext cx="2129930" cy="383228"/>
           </a:xfrm>
           <a:prstGeom prst="roundRect">
             <a:avLst>
@@ -39436,8 +39437,8 @@
         </p:nvSpPr>
         <p:spPr>
           <a:xfrm>
-            <a:off x="266713" y="882313"/>
-            <a:ext cx="2296144" cy="384262"/>
+            <a:off x="215523" y="882313"/>
+            <a:ext cx="2129929" cy="384262"/>
           </a:xfrm>
           <a:prstGeom prst="roundRect">
             <a:avLst>
@@ -39494,7 +39495,7 @@
         </p:nvSpPr>
         <p:spPr>
           <a:xfrm>
-            <a:off x="4108684" y="2540715"/>
+            <a:off x="4057494" y="2540715"/>
             <a:ext cx="2666781" cy="2212073"/>
           </a:xfrm>
           <a:prstGeom prst="roundRect">
@@ -39525,7 +39526,7 @@
             <a:pPr algn="ctr"/>
             <a:r>
               <a:rPr lang="en-US" altLang="ko-KR" sz="1000" b="1"/>
-              <a:t>MPS Control Daemon Pod</a:t>
+              <a:t>MPS Control Daemon Pod (DaemonSet)</a:t>
             </a:r>
             <a:endParaRPr lang="ko-KR" altLang="en-US" sz="1000" b="1" dirty="0">
               <a:solidFill>
@@ -39551,7 +39552,7 @@
         </p:nvSpPr>
         <p:spPr>
           <a:xfrm>
-            <a:off x="4185035" y="2830537"/>
+            <a:off x="4133845" y="2830537"/>
             <a:ext cx="2517544" cy="1849295"/>
           </a:xfrm>
           <a:prstGeom prst="roundRect">
@@ -39608,8 +39609,8 @@
         </p:nvSpPr>
         <p:spPr>
           <a:xfrm>
-            <a:off x="1295879" y="1799345"/>
-            <a:ext cx="1266979" cy="383228"/>
+            <a:off x="1244690" y="1799345"/>
+            <a:ext cx="1100762" cy="383228"/>
           </a:xfrm>
           <a:prstGeom prst="roundRect">
             <a:avLst>
@@ -39644,10 +39645,17 @@
           <a:p>
             <a:pPr algn="ctr"/>
             <a:r>
-              <a:rPr lang="en-US" altLang="ko-KR" sz="1000"/>
-              <a:t>/mps/nvidia.com/gpu.shared</a:t>
-            </a:r>
-            <a:endParaRPr lang="en-US" altLang="ko-KR" sz="1000" dirty="0"/>
+              <a:rPr lang="en-US" altLang="ko-KR" sz="900"/>
+              <a:t>/mps/nvidia.com</a:t>
+            </a:r>
+            <a:br>
+              <a:rPr lang="en-US" altLang="ko-KR" sz="900"/>
+            </a:br>
+            <a:r>
+              <a:rPr lang="en-US" altLang="ko-KR" sz="900"/>
+              <a:t>/gpu.shared</a:t>
+            </a:r>
+            <a:endParaRPr lang="en-US" altLang="ko-KR" sz="900" dirty="0"/>
           </a:p>
         </p:txBody>
       </p:sp>
@@ -39665,7 +39673,7 @@
         </p:nvSpPr>
         <p:spPr>
           <a:xfrm>
-            <a:off x="2680455" y="2607043"/>
+            <a:off x="2629265" y="2607043"/>
             <a:ext cx="1077331" cy="383228"/>
           </a:xfrm>
           <a:prstGeom prst="roundRect">
@@ -39701,26 +39709,26 @@
           <a:p>
             <a:pPr algn="ctr"/>
             <a:r>
-              <a:rPr lang="en-US" altLang="ko-KR" sz="1000"/>
+              <a:rPr lang="en-US" altLang="ko-KR" sz="900"/>
               <a:t>/run/nvidia</a:t>
             </a:r>
             <a:br>
-              <a:rPr lang="en-US" altLang="ko-KR" sz="1000"/>
+              <a:rPr lang="en-US" altLang="ko-KR" sz="900"/>
             </a:br>
             <a:r>
-              <a:rPr lang="en-US" altLang="ko-KR" sz="1000"/>
+              <a:rPr lang="en-US" altLang="ko-KR" sz="900"/>
               <a:t>/mps</a:t>
             </a:r>
-            <a:endParaRPr lang="en-US" altLang="ko-KR" sz="1000" dirty="0"/>
-          </a:p>
-        </p:txBody>
-      </p:sp>
-      <p:sp>
-        <p:nvSpPr>
-          <p:cNvPr id="84" name="사각형: 둥근 모서리 114">
-            <a:extLst>
-              <a:ext uri="{FF2B5EF4-FFF2-40B4-BE49-F238E27FC236}">
-                <a16:creationId xmlns:a16="http://schemas.microsoft.com/office/drawing/2014/main" id="{BEE675EB-67E9-044E-7DC0-CAEEC05B86D2}"/>
+            <a:endParaRPr lang="en-US" altLang="ko-KR" sz="900" dirty="0"/>
+          </a:p>
+        </p:txBody>
+      </p:sp>
+      <p:sp>
+        <p:nvSpPr>
+          <p:cNvPr id="98" name="사각형: 둥근 모서리 114">
+            <a:extLst>
+              <a:ext uri="{FF2B5EF4-FFF2-40B4-BE49-F238E27FC236}">
+                <a16:creationId xmlns:a16="http://schemas.microsoft.com/office/drawing/2014/main" id="{676F65D6-3341-6283-D857-8557B2750927}"/>
               </a:ext>
             </a:extLst>
           </p:cNvPr>
@@ -39729,8 +39737,642 @@
         </p:nvSpPr>
         <p:spPr>
           <a:xfrm>
-            <a:off x="2815605" y="332893"/>
-            <a:ext cx="2567744" cy="1990371"/>
+            <a:off x="4368671" y="4221573"/>
+            <a:ext cx="2025175" cy="383228"/>
+          </a:xfrm>
+          <a:prstGeom prst="roundRect">
+            <a:avLst>
+              <a:gd name="adj" fmla="val 12429"/>
+            </a:avLst>
+          </a:prstGeom>
+          <a:solidFill>
+            <a:schemeClr val="accent1">
+              <a:lumMod val="20000"/>
+              <a:lumOff val="80000"/>
+            </a:schemeClr>
+          </a:solidFill>
+          <a:ln w="12700"/>
+        </p:spPr>
+        <p:style>
+          <a:lnRef idx="2">
+            <a:schemeClr val="dk1"/>
+          </a:lnRef>
+          <a:fillRef idx="1">
+            <a:schemeClr val="lt1"/>
+          </a:fillRef>
+          <a:effectRef idx="0">
+            <a:schemeClr val="dk1"/>
+          </a:effectRef>
+          <a:fontRef idx="minor">
+            <a:schemeClr val="dk1"/>
+          </a:fontRef>
+        </p:style>
+        <p:txBody>
+          <a:bodyPr rtlCol="0" anchor="ctr"/>
+          <a:lstStyle/>
+          <a:p>
+            <a:pPr algn="ctr"/>
+            <a:r>
+              <a:rPr lang="en-US" altLang="ko-KR" sz="900"/>
+              <a:t>/mps/nvidia.com/gpu.shared</a:t>
+            </a:r>
+            <a:endParaRPr lang="en-US" altLang="ko-KR" sz="900" dirty="0"/>
+          </a:p>
+        </p:txBody>
+      </p:sp>
+      <p:sp>
+        <p:nvSpPr>
+          <p:cNvPr id="100" name="사각형: 둥근 모서리 114">
+            <a:extLst>
+              <a:ext uri="{FF2B5EF4-FFF2-40B4-BE49-F238E27FC236}">
+                <a16:creationId xmlns:a16="http://schemas.microsoft.com/office/drawing/2014/main" id="{6EEA76CC-7822-C470-32C8-226EA9D2DC49}"/>
+              </a:ext>
+            </a:extLst>
+          </p:cNvPr>
+          <p:cNvSpPr/>
+          <p:nvPr/>
+        </p:nvSpPr>
+        <p:spPr>
+          <a:xfrm>
+            <a:off x="4212915" y="3080850"/>
+            <a:ext cx="1109675" cy="383228"/>
+          </a:xfrm>
+          <a:prstGeom prst="roundRect">
+            <a:avLst>
+              <a:gd name="adj" fmla="val 13792"/>
+            </a:avLst>
+          </a:prstGeom>
+          <a:noFill/>
+          <a:ln w="12700"/>
+        </p:spPr>
+        <p:style>
+          <a:lnRef idx="2">
+            <a:schemeClr val="dk1"/>
+          </a:lnRef>
+          <a:fillRef idx="1">
+            <a:schemeClr val="lt1"/>
+          </a:fillRef>
+          <a:effectRef idx="0">
+            <a:schemeClr val="dk1"/>
+          </a:effectRef>
+          <a:fontRef idx="minor">
+            <a:schemeClr val="dk1"/>
+          </a:fontRef>
+        </p:style>
+        <p:txBody>
+          <a:bodyPr rtlCol="0" anchor="ctr"/>
+          <a:lstStyle/>
+          <a:p>
+            <a:pPr algn="ctr"/>
+            <a:r>
+              <a:rPr lang="en-US" altLang="ko-KR" sz="900"/>
+              <a:t>mps-control-daemon</a:t>
+            </a:r>
+            <a:endParaRPr lang="en-US" altLang="ko-KR" sz="900" dirty="0"/>
+          </a:p>
+        </p:txBody>
+      </p:sp>
+      <p:sp>
+        <p:nvSpPr>
+          <p:cNvPr id="101" name="사각형: 둥근 모서리 114">
+            <a:extLst>
+              <a:ext uri="{FF2B5EF4-FFF2-40B4-BE49-F238E27FC236}">
+                <a16:creationId xmlns:a16="http://schemas.microsoft.com/office/drawing/2014/main" id="{DDD93E1F-A691-B747-71C9-0AD17F3D1834}"/>
+              </a:ext>
+            </a:extLst>
+          </p:cNvPr>
+          <p:cNvSpPr/>
+          <p:nvPr/>
+        </p:nvSpPr>
+        <p:spPr>
+          <a:xfrm>
+            <a:off x="4368671" y="3651211"/>
+            <a:ext cx="2025175" cy="383228"/>
+          </a:xfrm>
+          <a:prstGeom prst="roundRect">
+            <a:avLst>
+              <a:gd name="adj" fmla="val 13792"/>
+            </a:avLst>
+          </a:prstGeom>
+          <a:noFill/>
+          <a:ln w="12700"/>
+        </p:spPr>
+        <p:style>
+          <a:lnRef idx="2">
+            <a:schemeClr val="dk1"/>
+          </a:lnRef>
+          <a:fillRef idx="1">
+            <a:schemeClr val="lt1"/>
+          </a:fillRef>
+          <a:effectRef idx="0">
+            <a:schemeClr val="dk1"/>
+          </a:effectRef>
+          <a:fontRef idx="minor">
+            <a:schemeClr val="dk1"/>
+          </a:fontRef>
+        </p:style>
+        <p:txBody>
+          <a:bodyPr rtlCol="0" anchor="ctr"/>
+          <a:lstStyle/>
+          <a:p>
+            <a:pPr algn="ctr"/>
+            <a:r>
+              <a:rPr lang="en-US" altLang="ko-KR" sz="900"/>
+              <a:t>nvidia-cuda-mps-control -d</a:t>
+            </a:r>
+            <a:endParaRPr lang="en-US" altLang="ko-KR" sz="900" dirty="0"/>
+          </a:p>
+        </p:txBody>
+      </p:sp>
+      <p:sp>
+        <p:nvSpPr>
+          <p:cNvPr id="103" name="사각형: 둥근 모서리 114">
+            <a:extLst>
+              <a:ext uri="{FF2B5EF4-FFF2-40B4-BE49-F238E27FC236}">
+                <a16:creationId xmlns:a16="http://schemas.microsoft.com/office/drawing/2014/main" id="{A363A214-04F7-52EA-C015-82D106ADFB78}"/>
+              </a:ext>
+            </a:extLst>
+          </p:cNvPr>
+          <p:cNvSpPr/>
+          <p:nvPr/>
+        </p:nvSpPr>
+        <p:spPr>
+          <a:xfrm>
+            <a:off x="5428704" y="3076223"/>
+            <a:ext cx="1146283" cy="383228"/>
+          </a:xfrm>
+          <a:prstGeom prst="roundRect">
+            <a:avLst>
+              <a:gd name="adj" fmla="val 13792"/>
+            </a:avLst>
+          </a:prstGeom>
+          <a:noFill/>
+          <a:ln w="12700"/>
+        </p:spPr>
+        <p:style>
+          <a:lnRef idx="2">
+            <a:schemeClr val="dk1"/>
+          </a:lnRef>
+          <a:fillRef idx="1">
+            <a:schemeClr val="lt1"/>
+          </a:fillRef>
+          <a:effectRef idx="0">
+            <a:schemeClr val="dk1"/>
+          </a:effectRef>
+          <a:fontRef idx="minor">
+            <a:schemeClr val="dk1"/>
+          </a:fontRef>
+        </p:style>
+        <p:txBody>
+          <a:bodyPr rtlCol="0" anchor="ctr"/>
+          <a:lstStyle/>
+          <a:p>
+            <a:pPr algn="ctr"/>
+            <a:r>
+              <a:rPr lang="en-US" altLang="ko-KR" sz="900"/>
+              <a:t>nvidia-cuda-mps-server</a:t>
+            </a:r>
+            <a:endParaRPr lang="en-US" altLang="ko-KR" sz="900" dirty="0"/>
+          </a:p>
+        </p:txBody>
+      </p:sp>
+      <p:cxnSp>
+        <p:nvCxnSpPr>
+          <p:cNvPr id="104" name="직선 연결선 17">
+            <a:extLst>
+              <a:ext uri="{FF2B5EF4-FFF2-40B4-BE49-F238E27FC236}">
+                <a16:creationId xmlns:a16="http://schemas.microsoft.com/office/drawing/2014/main" id="{D999C206-C6C8-24CC-4D74-F0A6355E11C4}"/>
+              </a:ext>
+            </a:extLst>
+          </p:cNvPr>
+          <p:cNvCxnSpPr>
+            <a:cxnSpLocks/>
+            <a:stCxn id="75" idx="2"/>
+            <a:endCxn id="28" idx="0"/>
+          </p:cNvCxnSpPr>
+          <p:nvPr/>
+        </p:nvCxnSpPr>
+        <p:spPr>
+          <a:xfrm>
+            <a:off x="1280488" y="1712247"/>
+            <a:ext cx="84714" cy="896741"/>
+          </a:xfrm>
+          <a:prstGeom prst="line">
+            <a:avLst/>
+          </a:prstGeom>
+          <a:ln w="12700">
+            <a:solidFill>
+              <a:schemeClr val="bg2">
+                <a:lumMod val="50000"/>
+              </a:schemeClr>
+            </a:solidFill>
+          </a:ln>
+        </p:spPr>
+        <p:style>
+          <a:lnRef idx="1">
+            <a:schemeClr val="accent1"/>
+          </a:lnRef>
+          <a:fillRef idx="0">
+            <a:schemeClr val="accent1"/>
+          </a:fillRef>
+          <a:effectRef idx="0">
+            <a:schemeClr val="accent1"/>
+          </a:effectRef>
+          <a:fontRef idx="minor">
+            <a:schemeClr val="tx1"/>
+          </a:fontRef>
+        </p:style>
+      </p:cxnSp>
+      <p:cxnSp>
+        <p:nvCxnSpPr>
+          <p:cNvPr id="111" name="직선 연결선 17">
+            <a:extLst>
+              <a:ext uri="{FF2B5EF4-FFF2-40B4-BE49-F238E27FC236}">
+                <a16:creationId xmlns:a16="http://schemas.microsoft.com/office/drawing/2014/main" id="{B5EC87A7-0798-F2A2-8B12-B00E3466041B}"/>
+              </a:ext>
+            </a:extLst>
+          </p:cNvPr>
+          <p:cNvCxnSpPr>
+            <a:cxnSpLocks/>
+            <a:endCxn id="28" idx="0"/>
+          </p:cNvCxnSpPr>
+          <p:nvPr/>
+        </p:nvCxnSpPr>
+        <p:spPr>
+          <a:xfrm flipH="1">
+            <a:off x="1365202" y="1712247"/>
+            <a:ext cx="5367389" cy="896741"/>
+          </a:xfrm>
+          <a:prstGeom prst="line">
+            <a:avLst/>
+          </a:prstGeom>
+          <a:ln w="12700">
+            <a:solidFill>
+              <a:schemeClr val="bg2">
+                <a:lumMod val="50000"/>
+              </a:schemeClr>
+            </a:solidFill>
+          </a:ln>
+        </p:spPr>
+        <p:style>
+          <a:lnRef idx="1">
+            <a:schemeClr val="accent1"/>
+          </a:lnRef>
+          <a:fillRef idx="0">
+            <a:schemeClr val="accent1"/>
+          </a:fillRef>
+          <a:effectRef idx="0">
+            <a:schemeClr val="accent1"/>
+          </a:effectRef>
+          <a:fontRef idx="minor">
+            <a:schemeClr val="tx1"/>
+          </a:fontRef>
+        </p:style>
+      </p:cxnSp>
+      <p:cxnSp>
+        <p:nvCxnSpPr>
+          <p:cNvPr id="114" name="직선 연결선 17">
+            <a:extLst>
+              <a:ext uri="{FF2B5EF4-FFF2-40B4-BE49-F238E27FC236}">
+                <a16:creationId xmlns:a16="http://schemas.microsoft.com/office/drawing/2014/main" id="{E98C4E99-8FFE-F0C9-461A-CED618C72B20}"/>
+              </a:ext>
+            </a:extLst>
+          </p:cNvPr>
+          <p:cNvCxnSpPr>
+            <a:cxnSpLocks/>
+            <a:stCxn id="39" idx="2"/>
+            <a:endCxn id="67" idx="0"/>
+          </p:cNvCxnSpPr>
+          <p:nvPr/>
+        </p:nvCxnSpPr>
+        <p:spPr>
+          <a:xfrm>
+            <a:off x="1795071" y="2182573"/>
+            <a:ext cx="1372860" cy="424470"/>
+          </a:xfrm>
+          <a:prstGeom prst="line">
+            <a:avLst/>
+          </a:prstGeom>
+          <a:ln w="12700">
+            <a:solidFill>
+              <a:schemeClr val="accent1">
+                <a:lumMod val="60000"/>
+                <a:lumOff val="40000"/>
+              </a:schemeClr>
+            </a:solidFill>
+          </a:ln>
+        </p:spPr>
+        <p:style>
+          <a:lnRef idx="1">
+            <a:schemeClr val="accent1"/>
+          </a:lnRef>
+          <a:fillRef idx="0">
+            <a:schemeClr val="accent1"/>
+          </a:fillRef>
+          <a:effectRef idx="0">
+            <a:schemeClr val="accent1"/>
+          </a:effectRef>
+          <a:fontRef idx="minor">
+            <a:schemeClr val="tx1"/>
+          </a:fontRef>
+        </p:style>
+      </p:cxnSp>
+      <p:cxnSp>
+        <p:nvCxnSpPr>
+          <p:cNvPr id="123" name="직선 연결선 17">
+            <a:extLst>
+              <a:ext uri="{FF2B5EF4-FFF2-40B4-BE49-F238E27FC236}">
+                <a16:creationId xmlns:a16="http://schemas.microsoft.com/office/drawing/2014/main" id="{CE6D9B08-46D7-9E97-5860-F16091FDF475}"/>
+              </a:ext>
+            </a:extLst>
+          </p:cNvPr>
+          <p:cNvCxnSpPr>
+            <a:cxnSpLocks/>
+            <a:stCxn id="98" idx="1"/>
+            <a:endCxn id="67" idx="2"/>
+          </p:cNvCxnSpPr>
+          <p:nvPr/>
+        </p:nvCxnSpPr>
+        <p:spPr>
+          <a:xfrm flipH="1" flipV="1">
+            <a:off x="3167931" y="2990271"/>
+            <a:ext cx="1200740" cy="1422916"/>
+          </a:xfrm>
+          <a:prstGeom prst="line">
+            <a:avLst/>
+          </a:prstGeom>
+          <a:ln w="12700">
+            <a:solidFill>
+              <a:schemeClr val="accent1">
+                <a:lumMod val="60000"/>
+                <a:lumOff val="40000"/>
+              </a:schemeClr>
+            </a:solidFill>
+          </a:ln>
+        </p:spPr>
+        <p:style>
+          <a:lnRef idx="1">
+            <a:schemeClr val="accent1"/>
+          </a:lnRef>
+          <a:fillRef idx="0">
+            <a:schemeClr val="accent1"/>
+          </a:fillRef>
+          <a:effectRef idx="0">
+            <a:schemeClr val="accent1"/>
+          </a:effectRef>
+          <a:fontRef idx="minor">
+            <a:schemeClr val="tx1"/>
+          </a:fontRef>
+        </p:style>
+      </p:cxnSp>
+      <p:sp>
+        <p:nvSpPr>
+          <p:cNvPr id="134" name="TextBox 133">
+            <a:extLst>
+              <a:ext uri="{FF2B5EF4-FFF2-40B4-BE49-F238E27FC236}">
+                <a16:creationId xmlns:a16="http://schemas.microsoft.com/office/drawing/2014/main" id="{0C6EF735-7684-2915-622A-673B65C2E37F}"/>
+              </a:ext>
+            </a:extLst>
+          </p:cNvPr>
+          <p:cNvSpPr txBox="1"/>
+          <p:nvPr/>
+        </p:nvSpPr>
+        <p:spPr>
+          <a:xfrm>
+            <a:off x="2627405" y="2978233"/>
+            <a:ext cx="1008609" cy="400110"/>
+          </a:xfrm>
+          <a:prstGeom prst="rect">
+            <a:avLst/>
+          </a:prstGeom>
+          <a:noFill/>
+        </p:spPr>
+        <p:txBody>
+          <a:bodyPr wrap="none" rtlCol="0">
+            <a:spAutoFit/>
+          </a:bodyPr>
+          <a:lstStyle/>
+          <a:p>
+            <a:r>
+              <a:rPr kumimoji="1" lang="en-US" altLang="ko-KR" sz="1000" b="1" i="1"/>
+              <a:t>HostPath</a:t>
+            </a:r>
+          </a:p>
+          <a:p>
+            <a:r>
+              <a:rPr kumimoji="1" lang="en-US" altLang="ko-KR" sz="1000" b="1" i="1"/>
+              <a:t>(Bind Mount)</a:t>
+            </a:r>
+            <a:endParaRPr kumimoji="1" lang="ko-KR" altLang="en-US" sz="1000" b="1" i="1"/>
+          </a:p>
+        </p:txBody>
+      </p:sp>
+      <p:cxnSp>
+        <p:nvCxnSpPr>
+          <p:cNvPr id="135" name="직선 연결선 17">
+            <a:extLst>
+              <a:ext uri="{FF2B5EF4-FFF2-40B4-BE49-F238E27FC236}">
+                <a16:creationId xmlns:a16="http://schemas.microsoft.com/office/drawing/2014/main" id="{F5BB82B7-25ED-14D2-85EF-AE72233292E2}"/>
+              </a:ext>
+            </a:extLst>
+          </p:cNvPr>
+          <p:cNvCxnSpPr>
+            <a:cxnSpLocks/>
+            <a:stCxn id="74" idx="2"/>
+            <a:endCxn id="20" idx="0"/>
+          </p:cNvCxnSpPr>
+          <p:nvPr/>
+        </p:nvCxnSpPr>
+        <p:spPr>
+          <a:xfrm>
+            <a:off x="677206" y="2182573"/>
+            <a:ext cx="86826" cy="898277"/>
+          </a:xfrm>
+          <a:prstGeom prst="line">
+            <a:avLst/>
+          </a:prstGeom>
+          <a:ln w="12700">
+            <a:solidFill>
+              <a:schemeClr val="tx1"/>
+            </a:solidFill>
+            <a:prstDash val="solid"/>
+          </a:ln>
+        </p:spPr>
+        <p:style>
+          <a:lnRef idx="1">
+            <a:schemeClr val="accent1"/>
+          </a:lnRef>
+          <a:fillRef idx="0">
+            <a:schemeClr val="accent1"/>
+          </a:fillRef>
+          <a:effectRef idx="0">
+            <a:schemeClr val="accent1"/>
+          </a:effectRef>
+          <a:fontRef idx="minor">
+            <a:schemeClr val="tx1"/>
+          </a:fontRef>
+        </p:style>
+      </p:cxnSp>
+      <p:cxnSp>
+        <p:nvCxnSpPr>
+          <p:cNvPr id="147" name="직선 연결선 17">
+            <a:extLst>
+              <a:ext uri="{FF2B5EF4-FFF2-40B4-BE49-F238E27FC236}">
+                <a16:creationId xmlns:a16="http://schemas.microsoft.com/office/drawing/2014/main" id="{B625D5A1-C6BE-411F-297F-053225C0CDE7}"/>
+              </a:ext>
+            </a:extLst>
+          </p:cNvPr>
+          <p:cNvCxnSpPr>
+            <a:cxnSpLocks/>
+            <a:stCxn id="100" idx="2"/>
+            <a:endCxn id="101" idx="0"/>
+          </p:cNvCxnSpPr>
+          <p:nvPr/>
+        </p:nvCxnSpPr>
+        <p:spPr>
+          <a:xfrm>
+            <a:off x="4767753" y="3464078"/>
+            <a:ext cx="613506" cy="187133"/>
+          </a:xfrm>
+          <a:prstGeom prst="line">
+            <a:avLst/>
+          </a:prstGeom>
+          <a:ln w="12700">
+            <a:solidFill>
+              <a:schemeClr val="tx1"/>
+            </a:solidFill>
+            <a:prstDash val="solid"/>
+            <a:headEnd type="none" w="med" len="med"/>
+            <a:tailEnd type="triangle" w="med" len="med"/>
+          </a:ln>
+        </p:spPr>
+        <p:style>
+          <a:lnRef idx="1">
+            <a:schemeClr val="accent1"/>
+          </a:lnRef>
+          <a:fillRef idx="0">
+            <a:schemeClr val="accent1"/>
+          </a:fillRef>
+          <a:effectRef idx="0">
+            <a:schemeClr val="accent1"/>
+          </a:effectRef>
+          <a:fontRef idx="minor">
+            <a:schemeClr val="tx1"/>
+          </a:fontRef>
+        </p:style>
+      </p:cxnSp>
+      <p:cxnSp>
+        <p:nvCxnSpPr>
+          <p:cNvPr id="154" name="직선 연결선 17">
+            <a:extLst>
+              <a:ext uri="{FF2B5EF4-FFF2-40B4-BE49-F238E27FC236}">
+                <a16:creationId xmlns:a16="http://schemas.microsoft.com/office/drawing/2014/main" id="{70182AC1-A01B-13BE-DCAC-21E58D3E5A10}"/>
+              </a:ext>
+            </a:extLst>
+          </p:cNvPr>
+          <p:cNvCxnSpPr>
+            <a:cxnSpLocks/>
+            <a:stCxn id="101" idx="0"/>
+            <a:endCxn id="103" idx="2"/>
+          </p:cNvCxnSpPr>
+          <p:nvPr/>
+        </p:nvCxnSpPr>
+        <p:spPr>
+          <a:xfrm flipV="1">
+            <a:off x="5381259" y="3459451"/>
+            <a:ext cx="620587" cy="191760"/>
+          </a:xfrm>
+          <a:prstGeom prst="line">
+            <a:avLst/>
+          </a:prstGeom>
+          <a:ln w="12700">
+            <a:solidFill>
+              <a:schemeClr val="tx1"/>
+            </a:solidFill>
+            <a:prstDash val="solid"/>
+            <a:headEnd type="none" w="med" len="med"/>
+            <a:tailEnd type="triangle" w="med" len="med"/>
+          </a:ln>
+        </p:spPr>
+        <p:style>
+          <a:lnRef idx="1">
+            <a:schemeClr val="accent1"/>
+          </a:lnRef>
+          <a:fillRef idx="0">
+            <a:schemeClr val="accent1"/>
+          </a:fillRef>
+          <a:effectRef idx="0">
+            <a:schemeClr val="accent1"/>
+          </a:effectRef>
+          <a:fontRef idx="minor">
+            <a:schemeClr val="tx1"/>
+          </a:fontRef>
+        </p:style>
+      </p:cxnSp>
+      <p:cxnSp>
+        <p:nvCxnSpPr>
+          <p:cNvPr id="157" name="직선 연결선 17">
+            <a:extLst>
+              <a:ext uri="{FF2B5EF4-FFF2-40B4-BE49-F238E27FC236}">
+                <a16:creationId xmlns:a16="http://schemas.microsoft.com/office/drawing/2014/main" id="{C4359D9B-A6C1-404E-7E47-26F45D779FCB}"/>
+              </a:ext>
+            </a:extLst>
+          </p:cNvPr>
+          <p:cNvCxnSpPr>
+            <a:cxnSpLocks/>
+            <a:stCxn id="101" idx="2"/>
+            <a:endCxn id="98" idx="0"/>
+          </p:cNvCxnSpPr>
+          <p:nvPr/>
+        </p:nvCxnSpPr>
+        <p:spPr>
+          <a:xfrm>
+            <a:off x="5381259" y="4034439"/>
+            <a:ext cx="0" cy="187134"/>
+          </a:xfrm>
+          <a:prstGeom prst="line">
+            <a:avLst/>
+          </a:prstGeom>
+          <a:ln w="12700">
+            <a:solidFill>
+              <a:schemeClr val="tx1"/>
+            </a:solidFill>
+            <a:prstDash val="solid"/>
+            <a:headEnd type="none" w="med" len="med"/>
+            <a:tailEnd type="triangle" w="med" len="med"/>
+          </a:ln>
+        </p:spPr>
+        <p:style>
+          <a:lnRef idx="1">
+            <a:schemeClr val="accent1"/>
+          </a:lnRef>
+          <a:fillRef idx="0">
+            <a:schemeClr val="accent1"/>
+          </a:fillRef>
+          <a:effectRef idx="0">
+            <a:schemeClr val="accent1"/>
+          </a:effectRef>
+          <a:fontRef idx="minor">
+            <a:schemeClr val="tx1"/>
+          </a:fontRef>
+        </p:style>
+      </p:cxnSp>
+      <p:sp>
+        <p:nvSpPr>
+          <p:cNvPr id="188" name="사각형: 둥근 모서리 114">
+            <a:extLst>
+              <a:ext uri="{FF2B5EF4-FFF2-40B4-BE49-F238E27FC236}">
+                <a16:creationId xmlns:a16="http://schemas.microsoft.com/office/drawing/2014/main" id="{AF43CD39-0E55-586B-7667-80C24BE3A447}"/>
+              </a:ext>
+            </a:extLst>
+          </p:cNvPr>
+          <p:cNvSpPr/>
+          <p:nvPr/>
+        </p:nvSpPr>
+        <p:spPr>
+          <a:xfrm>
+            <a:off x="2577644" y="332893"/>
+            <a:ext cx="2411859" cy="1990371"/>
           </a:xfrm>
           <a:prstGeom prst="roundRect">
             <a:avLst>
@@ -39774,10 +40416,10 @@
       </p:sp>
       <p:sp>
         <p:nvSpPr>
-          <p:cNvPr id="85" name="사각형: 둥근 모서리 114">
-            <a:extLst>
-              <a:ext uri="{FF2B5EF4-FFF2-40B4-BE49-F238E27FC236}">
-                <a16:creationId xmlns:a16="http://schemas.microsoft.com/office/drawing/2014/main" id="{3FA9DA5E-D58D-7385-D7D6-E74326C1913F}"/>
+          <p:cNvPr id="189" name="사각형: 둥근 모서리 114">
+            <a:extLst>
+              <a:ext uri="{FF2B5EF4-FFF2-40B4-BE49-F238E27FC236}">
+                <a16:creationId xmlns:a16="http://schemas.microsoft.com/office/drawing/2014/main" id="{2C11317C-862D-4D9C-A010-C4F8A4BED8CD}"/>
               </a:ext>
             </a:extLst>
           </p:cNvPr>
@@ -39786,8 +40428,8 @@
         </p:nvSpPr>
         <p:spPr>
           <a:xfrm>
-            <a:off x="2865366" y="610622"/>
-            <a:ext cx="2464974" cy="1661296"/>
+            <a:off x="2627405" y="610622"/>
+            <a:ext cx="2308660" cy="1661296"/>
           </a:xfrm>
           <a:prstGeom prst="roundRect">
             <a:avLst>
@@ -39831,10 +40473,10 @@
       </p:sp>
       <p:sp>
         <p:nvSpPr>
-          <p:cNvPr id="86" name="사각형: 둥근 모서리 114">
-            <a:extLst>
-              <a:ext uri="{FF2B5EF4-FFF2-40B4-BE49-F238E27FC236}">
-                <a16:creationId xmlns:a16="http://schemas.microsoft.com/office/drawing/2014/main" id="{9419FA2E-275D-324F-0178-7C872EE33087}"/>
+          <p:cNvPr id="190" name="사각형: 둥근 모서리 114">
+            <a:extLst>
+              <a:ext uri="{FF2B5EF4-FFF2-40B4-BE49-F238E27FC236}">
+                <a16:creationId xmlns:a16="http://schemas.microsoft.com/office/drawing/2014/main" id="{2A5AB734-DBA3-DFAA-533A-34F9CC5850AC}"/>
               </a:ext>
             </a:extLst>
           </p:cNvPr>
@@ -39843,7 +40485,7 @@
         </p:nvSpPr>
         <p:spPr>
           <a:xfrm>
-            <a:off x="2951212" y="1799345"/>
+            <a:off x="2713251" y="1799345"/>
             <a:ext cx="923364" cy="383228"/>
           </a:xfrm>
           <a:prstGeom prst="roundRect">
@@ -39878,19 +40520,19 @@
           <a:p>
             <a:pPr algn="ctr"/>
             <a:r>
-              <a:rPr lang="en-US" altLang="ko-KR" sz="1000"/>
+              <a:rPr lang="en-US" altLang="ko-KR" sz="900"/>
               <a:t>/dev/nvidia0</a:t>
             </a:r>
-            <a:endParaRPr lang="en-US" altLang="ko-KR" sz="1000" dirty="0"/>
-          </a:p>
-        </p:txBody>
-      </p:sp>
-      <p:sp>
-        <p:nvSpPr>
-          <p:cNvPr id="87" name="사각형: 둥근 모서리 114">
-            <a:extLst>
-              <a:ext uri="{FF2B5EF4-FFF2-40B4-BE49-F238E27FC236}">
-                <a16:creationId xmlns:a16="http://schemas.microsoft.com/office/drawing/2014/main" id="{A6CC5500-E3F8-E87C-8CE2-83DEB258C4CD}"/>
+            <a:endParaRPr lang="en-US" altLang="ko-KR" sz="900" dirty="0"/>
+          </a:p>
+        </p:txBody>
+      </p:sp>
+      <p:sp>
+        <p:nvSpPr>
+          <p:cNvPr id="191" name="사각형: 둥근 모서리 114">
+            <a:extLst>
+              <a:ext uri="{FF2B5EF4-FFF2-40B4-BE49-F238E27FC236}">
+                <a16:creationId xmlns:a16="http://schemas.microsoft.com/office/drawing/2014/main" id="{F97D9350-C577-C570-6723-9BB54ABBAB13}"/>
               </a:ext>
             </a:extLst>
           </p:cNvPr>
@@ -39899,8 +40541,8 @@
         </p:nvSpPr>
         <p:spPr>
           <a:xfrm>
-            <a:off x="2951210" y="1329019"/>
-            <a:ext cx="2296145" cy="383228"/>
+            <a:off x="2713250" y="1329019"/>
+            <a:ext cx="2129930" cy="383228"/>
           </a:xfrm>
           <a:prstGeom prst="roundRect">
             <a:avLst>
@@ -39943,10 +40585,10 @@
       </p:sp>
       <p:sp>
         <p:nvSpPr>
-          <p:cNvPr id="88" name="사각형: 둥근 모서리 114">
-            <a:extLst>
-              <a:ext uri="{FF2B5EF4-FFF2-40B4-BE49-F238E27FC236}">
-                <a16:creationId xmlns:a16="http://schemas.microsoft.com/office/drawing/2014/main" id="{B20ECEAA-9168-4A46-982D-049DBDD31617}"/>
+          <p:cNvPr id="192" name="사각형: 둥근 모서리 114">
+            <a:extLst>
+              <a:ext uri="{FF2B5EF4-FFF2-40B4-BE49-F238E27FC236}">
+                <a16:creationId xmlns:a16="http://schemas.microsoft.com/office/drawing/2014/main" id="{A207F854-372F-0C30-937D-CDD27E622A7E}"/>
               </a:ext>
             </a:extLst>
           </p:cNvPr>
@@ -39955,8 +40597,8 @@
         </p:nvSpPr>
         <p:spPr>
           <a:xfrm>
-            <a:off x="2951211" y="882313"/>
-            <a:ext cx="2296144" cy="384262"/>
+            <a:off x="2713250" y="882313"/>
+            <a:ext cx="2129929" cy="384262"/>
           </a:xfrm>
           <a:prstGeom prst="roundRect">
             <a:avLst>
@@ -40001,10 +40643,10 @@
       </p:sp>
       <p:sp>
         <p:nvSpPr>
-          <p:cNvPr id="89" name="사각형: 둥근 모서리 114">
-            <a:extLst>
-              <a:ext uri="{FF2B5EF4-FFF2-40B4-BE49-F238E27FC236}">
-                <a16:creationId xmlns:a16="http://schemas.microsoft.com/office/drawing/2014/main" id="{A032590E-31EE-4A29-C35A-D5F77E115F51}"/>
+          <p:cNvPr id="193" name="사각형: 둥근 모서리 114">
+            <a:extLst>
+              <a:ext uri="{FF2B5EF4-FFF2-40B4-BE49-F238E27FC236}">
+                <a16:creationId xmlns:a16="http://schemas.microsoft.com/office/drawing/2014/main" id="{70CEEA75-A6F0-9296-1774-FD90F1BED56C}"/>
               </a:ext>
             </a:extLst>
           </p:cNvPr>
@@ -40013,8 +40655,8 @@
         </p:nvSpPr>
         <p:spPr>
           <a:xfrm>
-            <a:off x="3980377" y="1799345"/>
-            <a:ext cx="1266979" cy="383228"/>
+            <a:off x="3742417" y="1799345"/>
+            <a:ext cx="1100762" cy="383228"/>
           </a:xfrm>
           <a:prstGeom prst="roundRect">
             <a:avLst>
@@ -40049,19 +40691,26 @@
           <a:p>
             <a:pPr algn="ctr"/>
             <a:r>
-              <a:rPr lang="en-US" altLang="ko-KR" sz="1000"/>
-              <a:t>/mps/nvidia.com/gpu.shared</a:t>
-            </a:r>
-            <a:endParaRPr lang="en-US" altLang="ko-KR" sz="1000" dirty="0"/>
-          </a:p>
-        </p:txBody>
-      </p:sp>
-      <p:sp>
-        <p:nvSpPr>
-          <p:cNvPr id="90" name="사각형: 둥근 모서리 114">
-            <a:extLst>
-              <a:ext uri="{FF2B5EF4-FFF2-40B4-BE49-F238E27FC236}">
-                <a16:creationId xmlns:a16="http://schemas.microsoft.com/office/drawing/2014/main" id="{F163C051-C0F1-6C02-F14B-D6CA59B439FF}"/>
+              <a:rPr lang="en-US" altLang="ko-KR" sz="900"/>
+              <a:t>/mps/nvidia.com</a:t>
+            </a:r>
+            <a:br>
+              <a:rPr lang="en-US" altLang="ko-KR" sz="900"/>
+            </a:br>
+            <a:r>
+              <a:rPr lang="en-US" altLang="ko-KR" sz="900"/>
+              <a:t>/gpu.shared</a:t>
+            </a:r>
+            <a:endParaRPr lang="en-US" altLang="ko-KR" sz="900" dirty="0"/>
+          </a:p>
+        </p:txBody>
+      </p:sp>
+      <p:sp>
+        <p:nvSpPr>
+          <p:cNvPr id="194" name="사각형: 둥근 모서리 114">
+            <a:extLst>
+              <a:ext uri="{FF2B5EF4-FFF2-40B4-BE49-F238E27FC236}">
+                <a16:creationId xmlns:a16="http://schemas.microsoft.com/office/drawing/2014/main" id="{3891D269-820B-A52D-1F55-D2B2D12544A2}"/>
               </a:ext>
             </a:extLst>
           </p:cNvPr>
@@ -40070,8 +40719,8 @@
         </p:nvSpPr>
         <p:spPr>
           <a:xfrm>
-            <a:off x="5500103" y="332893"/>
-            <a:ext cx="2567744" cy="1990371"/>
+            <a:off x="5076056" y="332893"/>
+            <a:ext cx="2411859" cy="1990371"/>
           </a:xfrm>
           <a:prstGeom prst="roundRect">
             <a:avLst>
@@ -40115,10 +40764,10 @@
       </p:sp>
       <p:sp>
         <p:nvSpPr>
-          <p:cNvPr id="91" name="사각형: 둥근 모서리 114">
-            <a:extLst>
-              <a:ext uri="{FF2B5EF4-FFF2-40B4-BE49-F238E27FC236}">
-                <a16:creationId xmlns:a16="http://schemas.microsoft.com/office/drawing/2014/main" id="{58208B52-B7E2-B3F3-B3B5-BA7088BA8123}"/>
+          <p:cNvPr id="195" name="사각형: 둥근 모서리 114">
+            <a:extLst>
+              <a:ext uri="{FF2B5EF4-FFF2-40B4-BE49-F238E27FC236}">
+                <a16:creationId xmlns:a16="http://schemas.microsoft.com/office/drawing/2014/main" id="{E55EF9DE-BE8E-4FC9-FD1D-2C77736BDAB1}"/>
               </a:ext>
             </a:extLst>
           </p:cNvPr>
@@ -40127,8 +40776,8 @@
         </p:nvSpPr>
         <p:spPr>
           <a:xfrm>
-            <a:off x="5549864" y="610622"/>
-            <a:ext cx="2464974" cy="1661296"/>
+            <a:off x="5125817" y="610622"/>
+            <a:ext cx="2308660" cy="1661296"/>
           </a:xfrm>
           <a:prstGeom prst="roundRect">
             <a:avLst>
@@ -40172,10 +40821,10 @@
       </p:sp>
       <p:sp>
         <p:nvSpPr>
-          <p:cNvPr id="92" name="사각형: 둥근 모서리 114">
-            <a:extLst>
-              <a:ext uri="{FF2B5EF4-FFF2-40B4-BE49-F238E27FC236}">
-                <a16:creationId xmlns:a16="http://schemas.microsoft.com/office/drawing/2014/main" id="{FC2BA276-C385-C03F-9E0E-0D46A309C637}"/>
+          <p:cNvPr id="196" name="사각형: 둥근 모서리 114">
+            <a:extLst>
+              <a:ext uri="{FF2B5EF4-FFF2-40B4-BE49-F238E27FC236}">
+                <a16:creationId xmlns:a16="http://schemas.microsoft.com/office/drawing/2014/main" id="{4611A614-6569-29D8-0A34-8F4F120BD670}"/>
               </a:ext>
             </a:extLst>
           </p:cNvPr>
@@ -40184,7 +40833,7 @@
         </p:nvSpPr>
         <p:spPr>
           <a:xfrm>
-            <a:off x="5635710" y="1799345"/>
+            <a:off x="5211663" y="1799345"/>
             <a:ext cx="923364" cy="383228"/>
           </a:xfrm>
           <a:prstGeom prst="roundRect">
@@ -40219,19 +40868,19 @@
           <a:p>
             <a:pPr algn="ctr"/>
             <a:r>
-              <a:rPr lang="en-US" altLang="ko-KR" sz="1000"/>
-              <a:t>/dev/nvidia1</a:t>
-            </a:r>
-            <a:endParaRPr lang="en-US" altLang="ko-KR" sz="1000" dirty="0"/>
-          </a:p>
-        </p:txBody>
-      </p:sp>
-      <p:sp>
-        <p:nvSpPr>
-          <p:cNvPr id="93" name="사각형: 둥근 모서리 114">
-            <a:extLst>
-              <a:ext uri="{FF2B5EF4-FFF2-40B4-BE49-F238E27FC236}">
-                <a16:creationId xmlns:a16="http://schemas.microsoft.com/office/drawing/2014/main" id="{48416D0C-D373-1103-9439-9EA217293447}"/>
+              <a:rPr lang="en-US" altLang="ko-KR" sz="900"/>
+              <a:t>/dev/nvidia0</a:t>
+            </a:r>
+            <a:endParaRPr lang="en-US" altLang="ko-KR" sz="900" dirty="0"/>
+          </a:p>
+        </p:txBody>
+      </p:sp>
+      <p:sp>
+        <p:nvSpPr>
+          <p:cNvPr id="197" name="사각형: 둥근 모서리 114">
+            <a:extLst>
+              <a:ext uri="{FF2B5EF4-FFF2-40B4-BE49-F238E27FC236}">
+                <a16:creationId xmlns:a16="http://schemas.microsoft.com/office/drawing/2014/main" id="{F5DAE0EE-EB9F-D2A3-93D6-22BAEE7A8D27}"/>
               </a:ext>
             </a:extLst>
           </p:cNvPr>
@@ -40240,8 +40889,8 @@
         </p:nvSpPr>
         <p:spPr>
           <a:xfrm>
-            <a:off x="5635708" y="1329019"/>
-            <a:ext cx="2296145" cy="383228"/>
+            <a:off x="5211662" y="1329019"/>
+            <a:ext cx="2129930" cy="383228"/>
           </a:xfrm>
           <a:prstGeom prst="roundRect">
             <a:avLst>
@@ -40284,10 +40933,10 @@
       </p:sp>
       <p:sp>
         <p:nvSpPr>
-          <p:cNvPr id="94" name="사각형: 둥근 모서리 114">
-            <a:extLst>
-              <a:ext uri="{FF2B5EF4-FFF2-40B4-BE49-F238E27FC236}">
-                <a16:creationId xmlns:a16="http://schemas.microsoft.com/office/drawing/2014/main" id="{89B965D3-9E99-F402-3978-D746D787DFCD}"/>
+          <p:cNvPr id="198" name="사각형: 둥근 모서리 114">
+            <a:extLst>
+              <a:ext uri="{FF2B5EF4-FFF2-40B4-BE49-F238E27FC236}">
+                <a16:creationId xmlns:a16="http://schemas.microsoft.com/office/drawing/2014/main" id="{39BA9158-B82C-5320-B10C-DF4548B5D442}"/>
               </a:ext>
             </a:extLst>
           </p:cNvPr>
@@ -40296,8 +40945,8 @@
         </p:nvSpPr>
         <p:spPr>
           <a:xfrm>
-            <a:off x="5635709" y="882313"/>
-            <a:ext cx="2296144" cy="384262"/>
+            <a:off x="5211662" y="882313"/>
+            <a:ext cx="2129929" cy="384262"/>
           </a:xfrm>
           <a:prstGeom prst="roundRect">
             <a:avLst>
@@ -40342,10 +40991,10 @@
       </p:sp>
       <p:sp>
         <p:nvSpPr>
-          <p:cNvPr id="95" name="사각형: 둥근 모서리 114">
-            <a:extLst>
-              <a:ext uri="{FF2B5EF4-FFF2-40B4-BE49-F238E27FC236}">
-                <a16:creationId xmlns:a16="http://schemas.microsoft.com/office/drawing/2014/main" id="{821FBEDE-34E2-940E-48FF-72BAB15221B6}"/>
+          <p:cNvPr id="199" name="사각형: 둥근 모서리 114">
+            <a:extLst>
+              <a:ext uri="{FF2B5EF4-FFF2-40B4-BE49-F238E27FC236}">
+                <a16:creationId xmlns:a16="http://schemas.microsoft.com/office/drawing/2014/main" id="{A665D701-0908-5C9E-2F48-A045066D0D8B}"/>
               </a:ext>
             </a:extLst>
           </p:cNvPr>
@@ -40354,8 +41003,8 @@
         </p:nvSpPr>
         <p:spPr>
           <a:xfrm>
-            <a:off x="6664875" y="1799345"/>
-            <a:ext cx="1266979" cy="383228"/>
+            <a:off x="6240829" y="1799345"/>
+            <a:ext cx="1100762" cy="383228"/>
           </a:xfrm>
           <a:prstGeom prst="roundRect">
             <a:avLst>
@@ -40390,19 +41039,257 @@
           <a:p>
             <a:pPr algn="ctr"/>
             <a:r>
-              <a:rPr lang="en-US" altLang="ko-KR" sz="1000"/>
-              <a:t>/mps/nvidia.com/gpu.shared</a:t>
-            </a:r>
-            <a:endParaRPr lang="en-US" altLang="ko-KR" sz="1000" dirty="0"/>
-          </a:p>
-        </p:txBody>
-      </p:sp>
-      <p:sp>
-        <p:nvSpPr>
-          <p:cNvPr id="68" name="TextBox 67">
-            <a:extLst>
-              <a:ext uri="{FF2B5EF4-FFF2-40B4-BE49-F238E27FC236}">
-                <a16:creationId xmlns:a16="http://schemas.microsoft.com/office/drawing/2014/main" id="{0E83DACF-BD5D-4D1A-273B-AE7B4D77BC33}"/>
+              <a:rPr lang="en-US" altLang="ko-KR" sz="900"/>
+              <a:t>/mps/nvidia.com</a:t>
+            </a:r>
+            <a:br>
+              <a:rPr lang="en-US" altLang="ko-KR" sz="900"/>
+            </a:br>
+            <a:r>
+              <a:rPr lang="en-US" altLang="ko-KR" sz="900"/>
+              <a:t>/gpu.shared</a:t>
+            </a:r>
+            <a:endParaRPr lang="en-US" altLang="ko-KR" sz="900" dirty="0"/>
+          </a:p>
+        </p:txBody>
+      </p:sp>
+      <p:cxnSp>
+        <p:nvCxnSpPr>
+          <p:cNvPr id="200" name="직선 연결선 17">
+            <a:extLst>
+              <a:ext uri="{FF2B5EF4-FFF2-40B4-BE49-F238E27FC236}">
+                <a16:creationId xmlns:a16="http://schemas.microsoft.com/office/drawing/2014/main" id="{82FC1480-5555-D475-56BD-106F899EE9A3}"/>
+              </a:ext>
+            </a:extLst>
+          </p:cNvPr>
+          <p:cNvCxnSpPr>
+            <a:cxnSpLocks/>
+            <a:stCxn id="191" idx="2"/>
+            <a:endCxn id="28" idx="0"/>
+          </p:cNvCxnSpPr>
+          <p:nvPr/>
+        </p:nvCxnSpPr>
+        <p:spPr>
+          <a:xfrm flipH="1">
+            <a:off x="1365202" y="1712247"/>
+            <a:ext cx="2413013" cy="896741"/>
+          </a:xfrm>
+          <a:prstGeom prst="line">
+            <a:avLst/>
+          </a:prstGeom>
+          <a:ln w="12700">
+            <a:solidFill>
+              <a:schemeClr val="bg2">
+                <a:lumMod val="50000"/>
+              </a:schemeClr>
+            </a:solidFill>
+          </a:ln>
+        </p:spPr>
+        <p:style>
+          <a:lnRef idx="1">
+            <a:schemeClr val="accent1"/>
+          </a:lnRef>
+          <a:fillRef idx="0">
+            <a:schemeClr val="accent1"/>
+          </a:fillRef>
+          <a:effectRef idx="0">
+            <a:schemeClr val="accent1"/>
+          </a:effectRef>
+          <a:fontRef idx="minor">
+            <a:schemeClr val="tx1"/>
+          </a:fontRef>
+        </p:style>
+      </p:cxnSp>
+      <p:cxnSp>
+        <p:nvCxnSpPr>
+          <p:cNvPr id="207" name="직선 연결선 17">
+            <a:extLst>
+              <a:ext uri="{FF2B5EF4-FFF2-40B4-BE49-F238E27FC236}">
+                <a16:creationId xmlns:a16="http://schemas.microsoft.com/office/drawing/2014/main" id="{5EC3D497-1951-C61E-F397-9ACCF47C4394}"/>
+              </a:ext>
+            </a:extLst>
+          </p:cNvPr>
+          <p:cNvCxnSpPr>
+            <a:cxnSpLocks/>
+            <a:stCxn id="193" idx="2"/>
+            <a:endCxn id="67" idx="0"/>
+          </p:cNvCxnSpPr>
+          <p:nvPr/>
+        </p:nvCxnSpPr>
+        <p:spPr>
+          <a:xfrm flipH="1">
+            <a:off x="3167931" y="2182573"/>
+            <a:ext cx="1124867" cy="424470"/>
+          </a:xfrm>
+          <a:prstGeom prst="line">
+            <a:avLst/>
+          </a:prstGeom>
+          <a:ln w="12700">
+            <a:solidFill>
+              <a:schemeClr val="accent1">
+                <a:lumMod val="60000"/>
+                <a:lumOff val="40000"/>
+              </a:schemeClr>
+            </a:solidFill>
+          </a:ln>
+        </p:spPr>
+        <p:style>
+          <a:lnRef idx="1">
+            <a:schemeClr val="accent1"/>
+          </a:lnRef>
+          <a:fillRef idx="0">
+            <a:schemeClr val="accent1"/>
+          </a:fillRef>
+          <a:effectRef idx="0">
+            <a:schemeClr val="accent1"/>
+          </a:effectRef>
+          <a:fontRef idx="minor">
+            <a:schemeClr val="tx1"/>
+          </a:fontRef>
+        </p:style>
+      </p:cxnSp>
+      <p:cxnSp>
+        <p:nvCxnSpPr>
+          <p:cNvPr id="210" name="직선 연결선 17">
+            <a:extLst>
+              <a:ext uri="{FF2B5EF4-FFF2-40B4-BE49-F238E27FC236}">
+                <a16:creationId xmlns:a16="http://schemas.microsoft.com/office/drawing/2014/main" id="{B830C021-788F-3A7B-E685-CFE66874920F}"/>
+              </a:ext>
+            </a:extLst>
+          </p:cNvPr>
+          <p:cNvCxnSpPr>
+            <a:cxnSpLocks/>
+            <a:stCxn id="199" idx="2"/>
+          </p:cNvCxnSpPr>
+          <p:nvPr/>
+        </p:nvCxnSpPr>
+        <p:spPr>
+          <a:xfrm flipH="1">
+            <a:off x="3167931" y="2182573"/>
+            <a:ext cx="3623279" cy="424470"/>
+          </a:xfrm>
+          <a:prstGeom prst="line">
+            <a:avLst/>
+          </a:prstGeom>
+          <a:ln w="12700">
+            <a:solidFill>
+              <a:schemeClr val="accent1">
+                <a:lumMod val="60000"/>
+                <a:lumOff val="40000"/>
+              </a:schemeClr>
+            </a:solidFill>
+          </a:ln>
+        </p:spPr>
+        <p:style>
+          <a:lnRef idx="1">
+            <a:schemeClr val="accent1"/>
+          </a:lnRef>
+          <a:fillRef idx="0">
+            <a:schemeClr val="accent1"/>
+          </a:fillRef>
+          <a:effectRef idx="0">
+            <a:schemeClr val="accent1"/>
+          </a:effectRef>
+          <a:fontRef idx="minor">
+            <a:schemeClr val="tx1"/>
+          </a:fontRef>
+        </p:style>
+      </p:cxnSp>
+      <p:cxnSp>
+        <p:nvCxnSpPr>
+          <p:cNvPr id="212" name="직선 연결선 17">
+            <a:extLst>
+              <a:ext uri="{FF2B5EF4-FFF2-40B4-BE49-F238E27FC236}">
+                <a16:creationId xmlns:a16="http://schemas.microsoft.com/office/drawing/2014/main" id="{0E2156C4-3328-D408-4844-F672270F4850}"/>
+              </a:ext>
+            </a:extLst>
+          </p:cNvPr>
+          <p:cNvCxnSpPr>
+            <a:cxnSpLocks/>
+            <a:endCxn id="20" idx="0"/>
+          </p:cNvCxnSpPr>
+          <p:nvPr/>
+        </p:nvCxnSpPr>
+        <p:spPr>
+          <a:xfrm flipH="1">
+            <a:off x="764032" y="2182573"/>
+            <a:ext cx="2410901" cy="898277"/>
+          </a:xfrm>
+          <a:prstGeom prst="line">
+            <a:avLst/>
+          </a:prstGeom>
+          <a:ln w="12700">
+            <a:solidFill>
+              <a:schemeClr val="tx1"/>
+            </a:solidFill>
+            <a:prstDash val="solid"/>
+          </a:ln>
+        </p:spPr>
+        <p:style>
+          <a:lnRef idx="1">
+            <a:schemeClr val="accent1"/>
+          </a:lnRef>
+          <a:fillRef idx="0">
+            <a:schemeClr val="accent1"/>
+          </a:fillRef>
+          <a:effectRef idx="0">
+            <a:schemeClr val="accent1"/>
+          </a:effectRef>
+          <a:fontRef idx="minor">
+            <a:schemeClr val="tx1"/>
+          </a:fontRef>
+        </p:style>
+      </p:cxnSp>
+      <p:cxnSp>
+        <p:nvCxnSpPr>
+          <p:cNvPr id="216" name="직선 연결선 17">
+            <a:extLst>
+              <a:ext uri="{FF2B5EF4-FFF2-40B4-BE49-F238E27FC236}">
+                <a16:creationId xmlns:a16="http://schemas.microsoft.com/office/drawing/2014/main" id="{E7A5008F-BFFA-6AD6-A149-3A203D48CA81}"/>
+              </a:ext>
+            </a:extLst>
+          </p:cNvPr>
+          <p:cNvCxnSpPr>
+            <a:cxnSpLocks/>
+          </p:cNvCxnSpPr>
+          <p:nvPr/>
+        </p:nvCxnSpPr>
+        <p:spPr>
+          <a:xfrm flipH="1">
+            <a:off x="1970595" y="2182573"/>
+            <a:ext cx="3702750" cy="898277"/>
+          </a:xfrm>
+          <a:prstGeom prst="line">
+            <a:avLst/>
+          </a:prstGeom>
+          <a:ln w="12700">
+            <a:solidFill>
+              <a:schemeClr val="tx1"/>
+            </a:solidFill>
+            <a:prstDash val="solid"/>
+          </a:ln>
+        </p:spPr>
+        <p:style>
+          <a:lnRef idx="1">
+            <a:schemeClr val="accent1"/>
+          </a:lnRef>
+          <a:fillRef idx="0">
+            <a:schemeClr val="accent1"/>
+          </a:fillRef>
+          <a:effectRef idx="0">
+            <a:schemeClr val="accent1"/>
+          </a:effectRef>
+          <a:fontRef idx="minor">
+            <a:schemeClr val="tx1"/>
+          </a:fontRef>
+        </p:style>
+      </p:cxnSp>
+      <p:sp>
+        <p:nvSpPr>
+          <p:cNvPr id="217" name="TextBox 216">
+            <a:extLst>
+              <a:ext uri="{FF2B5EF4-FFF2-40B4-BE49-F238E27FC236}">
+                <a16:creationId xmlns:a16="http://schemas.microsoft.com/office/drawing/2014/main" id="{A3DD0418-7D98-0CFA-1D52-45F50AC54F00}"/>
               </a:ext>
             </a:extLst>
           </p:cNvPr>
@@ -40411,7 +41298,7 @@
         </p:nvSpPr>
         <p:spPr>
           <a:xfrm>
-            <a:off x="7245915" y="3356782"/>
+            <a:off x="7272691" y="3356782"/>
             <a:ext cx="1798090" cy="1569660"/>
           </a:xfrm>
           <a:prstGeom prst="rect">
@@ -40616,10 +41503,10 @@
       </p:sp>
       <p:sp>
         <p:nvSpPr>
-          <p:cNvPr id="64" name="TextBox 63">
-            <a:extLst>
-              <a:ext uri="{FF2B5EF4-FFF2-40B4-BE49-F238E27FC236}">
-                <a16:creationId xmlns:a16="http://schemas.microsoft.com/office/drawing/2014/main" id="{C466E7BE-7EA8-CA9D-8D9A-D32DB236AA13}"/>
+          <p:cNvPr id="218" name="TextBox 217">
+            <a:extLst>
+              <a:ext uri="{FF2B5EF4-FFF2-40B4-BE49-F238E27FC236}">
+                <a16:creationId xmlns:a16="http://schemas.microsoft.com/office/drawing/2014/main" id="{4183C2B5-D51E-14F6-72E8-79C71E0B1C44}"/>
               </a:ext>
             </a:extLst>
           </p:cNvPr>
@@ -40628,7 +41515,7 @@
         </p:nvSpPr>
         <p:spPr>
           <a:xfrm>
-            <a:off x="7245915" y="1787122"/>
+            <a:off x="7272691" y="1787122"/>
             <a:ext cx="1798090" cy="1569660"/>
           </a:xfrm>
           <a:prstGeom prst="rect">
@@ -40833,10 +41720,10 @@
       </p:sp>
       <p:sp>
         <p:nvSpPr>
-          <p:cNvPr id="66" name="TextBox 65">
-            <a:extLst>
-              <a:ext uri="{FF2B5EF4-FFF2-40B4-BE49-F238E27FC236}">
-                <a16:creationId xmlns:a16="http://schemas.microsoft.com/office/drawing/2014/main" id="{E0941364-490C-49CC-8AB9-82CF9221F6A2}"/>
+          <p:cNvPr id="219" name="TextBox 218">
+            <a:extLst>
+              <a:ext uri="{FF2B5EF4-FFF2-40B4-BE49-F238E27FC236}">
+                <a16:creationId xmlns:a16="http://schemas.microsoft.com/office/drawing/2014/main" id="{A8C3724B-C6B3-2D61-ECC0-EA85D99AFDEA}"/>
               </a:ext>
             </a:extLst>
           </p:cNvPr>
@@ -40845,7 +41732,7 @@
         </p:nvSpPr>
         <p:spPr>
           <a:xfrm>
-            <a:off x="7245915" y="229685"/>
+            <a:off x="7272691" y="229685"/>
             <a:ext cx="1798090" cy="1569660"/>
           </a:xfrm>
           <a:prstGeom prst="rect">
@@ -41048,876 +41935,6 @@
           </a:p>
         </p:txBody>
       </p:sp>
-      <p:sp>
-        <p:nvSpPr>
-          <p:cNvPr id="98" name="사각형: 둥근 모서리 114">
-            <a:extLst>
-              <a:ext uri="{FF2B5EF4-FFF2-40B4-BE49-F238E27FC236}">
-                <a16:creationId xmlns:a16="http://schemas.microsoft.com/office/drawing/2014/main" id="{676F65D6-3341-6283-D857-8557B2750927}"/>
-              </a:ext>
-            </a:extLst>
-          </p:cNvPr>
-          <p:cNvSpPr/>
-          <p:nvPr/>
-        </p:nvSpPr>
-        <p:spPr>
-          <a:xfrm>
-            <a:off x="4419861" y="4221573"/>
-            <a:ext cx="2025175" cy="383228"/>
-          </a:xfrm>
-          <a:prstGeom prst="roundRect">
-            <a:avLst>
-              <a:gd name="adj" fmla="val 12429"/>
-            </a:avLst>
-          </a:prstGeom>
-          <a:solidFill>
-            <a:schemeClr val="accent1">
-              <a:lumMod val="20000"/>
-              <a:lumOff val="80000"/>
-            </a:schemeClr>
-          </a:solidFill>
-          <a:ln w="12700"/>
-        </p:spPr>
-        <p:style>
-          <a:lnRef idx="2">
-            <a:schemeClr val="dk1"/>
-          </a:lnRef>
-          <a:fillRef idx="1">
-            <a:schemeClr val="lt1"/>
-          </a:fillRef>
-          <a:effectRef idx="0">
-            <a:schemeClr val="dk1"/>
-          </a:effectRef>
-          <a:fontRef idx="minor">
-            <a:schemeClr val="dk1"/>
-          </a:fontRef>
-        </p:style>
-        <p:txBody>
-          <a:bodyPr rtlCol="0" anchor="ctr"/>
-          <a:lstStyle/>
-          <a:p>
-            <a:pPr algn="ctr"/>
-            <a:r>
-              <a:rPr lang="en-US" altLang="ko-KR" sz="1000"/>
-              <a:t>/mps/nvidia.com/gpu.shared</a:t>
-            </a:r>
-            <a:endParaRPr lang="en-US" altLang="ko-KR" sz="1000" dirty="0"/>
-          </a:p>
-        </p:txBody>
-      </p:sp>
-      <p:sp>
-        <p:nvSpPr>
-          <p:cNvPr id="100" name="사각형: 둥근 모서리 114">
-            <a:extLst>
-              <a:ext uri="{FF2B5EF4-FFF2-40B4-BE49-F238E27FC236}">
-                <a16:creationId xmlns:a16="http://schemas.microsoft.com/office/drawing/2014/main" id="{6EEA76CC-7822-C470-32C8-226EA9D2DC49}"/>
-              </a:ext>
-            </a:extLst>
-          </p:cNvPr>
-          <p:cNvSpPr/>
-          <p:nvPr/>
-        </p:nvSpPr>
-        <p:spPr>
-          <a:xfrm>
-            <a:off x="4264105" y="3080850"/>
-            <a:ext cx="1109675" cy="383228"/>
-          </a:xfrm>
-          <a:prstGeom prst="roundRect">
-            <a:avLst>
-              <a:gd name="adj" fmla="val 13792"/>
-            </a:avLst>
-          </a:prstGeom>
-          <a:noFill/>
-          <a:ln w="12700"/>
-        </p:spPr>
-        <p:style>
-          <a:lnRef idx="2">
-            <a:schemeClr val="dk1"/>
-          </a:lnRef>
-          <a:fillRef idx="1">
-            <a:schemeClr val="lt1"/>
-          </a:fillRef>
-          <a:effectRef idx="0">
-            <a:schemeClr val="dk1"/>
-          </a:effectRef>
-          <a:fontRef idx="minor">
-            <a:schemeClr val="dk1"/>
-          </a:fontRef>
-        </p:style>
-        <p:txBody>
-          <a:bodyPr rtlCol="0" anchor="ctr"/>
-          <a:lstStyle/>
-          <a:p>
-            <a:pPr algn="ctr"/>
-            <a:r>
-              <a:rPr lang="en-US" altLang="ko-KR" sz="1000"/>
-              <a:t>mps-control-daemon</a:t>
-            </a:r>
-            <a:endParaRPr lang="en-US" altLang="ko-KR" sz="1000" dirty="0"/>
-          </a:p>
-        </p:txBody>
-      </p:sp>
-      <p:sp>
-        <p:nvSpPr>
-          <p:cNvPr id="101" name="사각형: 둥근 모서리 114">
-            <a:extLst>
-              <a:ext uri="{FF2B5EF4-FFF2-40B4-BE49-F238E27FC236}">
-                <a16:creationId xmlns:a16="http://schemas.microsoft.com/office/drawing/2014/main" id="{DDD93E1F-A691-B747-71C9-0AD17F3D1834}"/>
-              </a:ext>
-            </a:extLst>
-          </p:cNvPr>
-          <p:cNvSpPr/>
-          <p:nvPr/>
-        </p:nvSpPr>
-        <p:spPr>
-          <a:xfrm>
-            <a:off x="4419861" y="3651211"/>
-            <a:ext cx="2025175" cy="383228"/>
-          </a:xfrm>
-          <a:prstGeom prst="roundRect">
-            <a:avLst>
-              <a:gd name="adj" fmla="val 13792"/>
-            </a:avLst>
-          </a:prstGeom>
-          <a:noFill/>
-          <a:ln w="12700"/>
-        </p:spPr>
-        <p:style>
-          <a:lnRef idx="2">
-            <a:schemeClr val="dk1"/>
-          </a:lnRef>
-          <a:fillRef idx="1">
-            <a:schemeClr val="lt1"/>
-          </a:fillRef>
-          <a:effectRef idx="0">
-            <a:schemeClr val="dk1"/>
-          </a:effectRef>
-          <a:fontRef idx="minor">
-            <a:schemeClr val="dk1"/>
-          </a:fontRef>
-        </p:style>
-        <p:txBody>
-          <a:bodyPr rtlCol="0" anchor="ctr"/>
-          <a:lstStyle/>
-          <a:p>
-            <a:pPr algn="ctr"/>
-            <a:r>
-              <a:rPr lang="en-US" altLang="ko-KR" sz="1000"/>
-              <a:t>nvidia-cuda-mps-control -d</a:t>
-            </a:r>
-            <a:endParaRPr lang="en-US" altLang="ko-KR" sz="1000" dirty="0"/>
-          </a:p>
-        </p:txBody>
-      </p:sp>
-      <p:sp>
-        <p:nvSpPr>
-          <p:cNvPr id="103" name="사각형: 둥근 모서리 114">
-            <a:extLst>
-              <a:ext uri="{FF2B5EF4-FFF2-40B4-BE49-F238E27FC236}">
-                <a16:creationId xmlns:a16="http://schemas.microsoft.com/office/drawing/2014/main" id="{A363A214-04F7-52EA-C015-82D106ADFB78}"/>
-              </a:ext>
-            </a:extLst>
-          </p:cNvPr>
-          <p:cNvSpPr/>
-          <p:nvPr/>
-        </p:nvSpPr>
-        <p:spPr>
-          <a:xfrm>
-            <a:off x="5479894" y="3076223"/>
-            <a:ext cx="1146283" cy="383228"/>
-          </a:xfrm>
-          <a:prstGeom prst="roundRect">
-            <a:avLst>
-              <a:gd name="adj" fmla="val 13792"/>
-            </a:avLst>
-          </a:prstGeom>
-          <a:noFill/>
-          <a:ln w="12700"/>
-        </p:spPr>
-        <p:style>
-          <a:lnRef idx="2">
-            <a:schemeClr val="dk1"/>
-          </a:lnRef>
-          <a:fillRef idx="1">
-            <a:schemeClr val="lt1"/>
-          </a:fillRef>
-          <a:effectRef idx="0">
-            <a:schemeClr val="dk1"/>
-          </a:effectRef>
-          <a:fontRef idx="minor">
-            <a:schemeClr val="dk1"/>
-          </a:fontRef>
-        </p:style>
-        <p:txBody>
-          <a:bodyPr rtlCol="0" anchor="ctr"/>
-          <a:lstStyle/>
-          <a:p>
-            <a:pPr algn="ctr"/>
-            <a:r>
-              <a:rPr lang="en-US" altLang="ko-KR" sz="1000"/>
-              <a:t>nvidia-cuda-mps-server</a:t>
-            </a:r>
-            <a:endParaRPr lang="en-US" altLang="ko-KR" sz="1000" dirty="0"/>
-          </a:p>
-        </p:txBody>
-      </p:sp>
-      <p:cxnSp>
-        <p:nvCxnSpPr>
-          <p:cNvPr id="104" name="직선 연결선 17">
-            <a:extLst>
-              <a:ext uri="{FF2B5EF4-FFF2-40B4-BE49-F238E27FC236}">
-                <a16:creationId xmlns:a16="http://schemas.microsoft.com/office/drawing/2014/main" id="{D999C206-C6C8-24CC-4D74-F0A6355E11C4}"/>
-              </a:ext>
-            </a:extLst>
-          </p:cNvPr>
-          <p:cNvCxnSpPr>
-            <a:cxnSpLocks/>
-            <a:stCxn id="75" idx="2"/>
-            <a:endCxn id="28" idx="0"/>
-          </p:cNvCxnSpPr>
-          <p:nvPr/>
-        </p:nvCxnSpPr>
-        <p:spPr>
-          <a:xfrm>
-            <a:off x="1414785" y="1712247"/>
-            <a:ext cx="1607" cy="896741"/>
-          </a:xfrm>
-          <a:prstGeom prst="line">
-            <a:avLst/>
-          </a:prstGeom>
-          <a:ln w="12700">
-            <a:solidFill>
-              <a:schemeClr val="bg2">
-                <a:lumMod val="50000"/>
-              </a:schemeClr>
-            </a:solidFill>
-          </a:ln>
-        </p:spPr>
-        <p:style>
-          <a:lnRef idx="1">
-            <a:schemeClr val="accent1"/>
-          </a:lnRef>
-          <a:fillRef idx="0">
-            <a:schemeClr val="accent1"/>
-          </a:fillRef>
-          <a:effectRef idx="0">
-            <a:schemeClr val="accent1"/>
-          </a:effectRef>
-          <a:fontRef idx="minor">
-            <a:schemeClr val="tx1"/>
-          </a:fontRef>
-        </p:style>
-      </p:cxnSp>
-      <p:cxnSp>
-        <p:nvCxnSpPr>
-          <p:cNvPr id="108" name="직선 연결선 17">
-            <a:extLst>
-              <a:ext uri="{FF2B5EF4-FFF2-40B4-BE49-F238E27FC236}">
-                <a16:creationId xmlns:a16="http://schemas.microsoft.com/office/drawing/2014/main" id="{36D124E6-2B60-1A4F-E511-FD979D8A3FF4}"/>
-              </a:ext>
-            </a:extLst>
-          </p:cNvPr>
-          <p:cNvCxnSpPr>
-            <a:cxnSpLocks/>
-            <a:stCxn id="87" idx="2"/>
-            <a:endCxn id="28" idx="0"/>
-          </p:cNvCxnSpPr>
-          <p:nvPr/>
-        </p:nvCxnSpPr>
-        <p:spPr>
-          <a:xfrm flipH="1">
-            <a:off x="1416392" y="1712247"/>
-            <a:ext cx="2682891" cy="896741"/>
-          </a:xfrm>
-          <a:prstGeom prst="line">
-            <a:avLst/>
-          </a:prstGeom>
-          <a:ln w="12700">
-            <a:solidFill>
-              <a:schemeClr val="bg2">
-                <a:lumMod val="50000"/>
-              </a:schemeClr>
-            </a:solidFill>
-          </a:ln>
-        </p:spPr>
-        <p:style>
-          <a:lnRef idx="1">
-            <a:schemeClr val="accent1"/>
-          </a:lnRef>
-          <a:fillRef idx="0">
-            <a:schemeClr val="accent1"/>
-          </a:fillRef>
-          <a:effectRef idx="0">
-            <a:schemeClr val="accent1"/>
-          </a:effectRef>
-          <a:fontRef idx="minor">
-            <a:schemeClr val="tx1"/>
-          </a:fontRef>
-        </p:style>
-      </p:cxnSp>
-      <p:cxnSp>
-        <p:nvCxnSpPr>
-          <p:cNvPr id="111" name="직선 연결선 17">
-            <a:extLst>
-              <a:ext uri="{FF2B5EF4-FFF2-40B4-BE49-F238E27FC236}">
-                <a16:creationId xmlns:a16="http://schemas.microsoft.com/office/drawing/2014/main" id="{B5EC87A7-0798-F2A2-8B12-B00E3466041B}"/>
-              </a:ext>
-            </a:extLst>
-          </p:cNvPr>
-          <p:cNvCxnSpPr>
-            <a:cxnSpLocks/>
-            <a:stCxn id="93" idx="2"/>
-            <a:endCxn id="28" idx="0"/>
-          </p:cNvCxnSpPr>
-          <p:nvPr/>
-        </p:nvCxnSpPr>
-        <p:spPr>
-          <a:xfrm flipH="1">
-            <a:off x="1416392" y="1712247"/>
-            <a:ext cx="5367389" cy="896741"/>
-          </a:xfrm>
-          <a:prstGeom prst="line">
-            <a:avLst/>
-          </a:prstGeom>
-          <a:ln w="12700">
-            <a:solidFill>
-              <a:schemeClr val="bg2">
-                <a:lumMod val="50000"/>
-              </a:schemeClr>
-            </a:solidFill>
-          </a:ln>
-        </p:spPr>
-        <p:style>
-          <a:lnRef idx="1">
-            <a:schemeClr val="accent1"/>
-          </a:lnRef>
-          <a:fillRef idx="0">
-            <a:schemeClr val="accent1"/>
-          </a:fillRef>
-          <a:effectRef idx="0">
-            <a:schemeClr val="accent1"/>
-          </a:effectRef>
-          <a:fontRef idx="minor">
-            <a:schemeClr val="tx1"/>
-          </a:fontRef>
-        </p:style>
-      </p:cxnSp>
-      <p:cxnSp>
-        <p:nvCxnSpPr>
-          <p:cNvPr id="114" name="직선 연결선 17">
-            <a:extLst>
-              <a:ext uri="{FF2B5EF4-FFF2-40B4-BE49-F238E27FC236}">
-                <a16:creationId xmlns:a16="http://schemas.microsoft.com/office/drawing/2014/main" id="{E98C4E99-8FFE-F0C9-461A-CED618C72B20}"/>
-              </a:ext>
-            </a:extLst>
-          </p:cNvPr>
-          <p:cNvCxnSpPr>
-            <a:cxnSpLocks/>
-            <a:stCxn id="39" idx="2"/>
-            <a:endCxn id="67" idx="0"/>
-          </p:cNvCxnSpPr>
-          <p:nvPr/>
-        </p:nvCxnSpPr>
-        <p:spPr>
-          <a:xfrm>
-            <a:off x="1929369" y="2182573"/>
-            <a:ext cx="1289752" cy="424470"/>
-          </a:xfrm>
-          <a:prstGeom prst="line">
-            <a:avLst/>
-          </a:prstGeom>
-          <a:ln w="12700">
-            <a:solidFill>
-              <a:schemeClr val="accent1">
-                <a:lumMod val="60000"/>
-                <a:lumOff val="40000"/>
-              </a:schemeClr>
-            </a:solidFill>
-          </a:ln>
-        </p:spPr>
-        <p:style>
-          <a:lnRef idx="1">
-            <a:schemeClr val="accent1"/>
-          </a:lnRef>
-          <a:fillRef idx="0">
-            <a:schemeClr val="accent1"/>
-          </a:fillRef>
-          <a:effectRef idx="0">
-            <a:schemeClr val="accent1"/>
-          </a:effectRef>
-          <a:fontRef idx="minor">
-            <a:schemeClr val="tx1"/>
-          </a:fontRef>
-        </p:style>
-      </p:cxnSp>
-      <p:cxnSp>
-        <p:nvCxnSpPr>
-          <p:cNvPr id="117" name="직선 연결선 17">
-            <a:extLst>
-              <a:ext uri="{FF2B5EF4-FFF2-40B4-BE49-F238E27FC236}">
-                <a16:creationId xmlns:a16="http://schemas.microsoft.com/office/drawing/2014/main" id="{83C56EF2-3CBA-CD62-431E-EFED9DE79E62}"/>
-              </a:ext>
-            </a:extLst>
-          </p:cNvPr>
-          <p:cNvCxnSpPr>
-            <a:cxnSpLocks/>
-            <a:stCxn id="89" idx="2"/>
-            <a:endCxn id="67" idx="0"/>
-          </p:cNvCxnSpPr>
-          <p:nvPr/>
-        </p:nvCxnSpPr>
-        <p:spPr>
-          <a:xfrm flipH="1">
-            <a:off x="3219121" y="2182573"/>
-            <a:ext cx="1394746" cy="424470"/>
-          </a:xfrm>
-          <a:prstGeom prst="line">
-            <a:avLst/>
-          </a:prstGeom>
-          <a:ln w="12700">
-            <a:solidFill>
-              <a:schemeClr val="accent1">
-                <a:lumMod val="60000"/>
-                <a:lumOff val="40000"/>
-              </a:schemeClr>
-            </a:solidFill>
-          </a:ln>
-        </p:spPr>
-        <p:style>
-          <a:lnRef idx="1">
-            <a:schemeClr val="accent1"/>
-          </a:lnRef>
-          <a:fillRef idx="0">
-            <a:schemeClr val="accent1"/>
-          </a:fillRef>
-          <a:effectRef idx="0">
-            <a:schemeClr val="accent1"/>
-          </a:effectRef>
-          <a:fontRef idx="minor">
-            <a:schemeClr val="tx1"/>
-          </a:fontRef>
-        </p:style>
-      </p:cxnSp>
-      <p:cxnSp>
-        <p:nvCxnSpPr>
-          <p:cNvPr id="120" name="직선 연결선 17">
-            <a:extLst>
-              <a:ext uri="{FF2B5EF4-FFF2-40B4-BE49-F238E27FC236}">
-                <a16:creationId xmlns:a16="http://schemas.microsoft.com/office/drawing/2014/main" id="{79CEE2ED-964A-C96D-4A5D-57C527C584B9}"/>
-              </a:ext>
-            </a:extLst>
-          </p:cNvPr>
-          <p:cNvCxnSpPr>
-            <a:cxnSpLocks/>
-            <a:stCxn id="95" idx="2"/>
-            <a:endCxn id="67" idx="0"/>
-          </p:cNvCxnSpPr>
-          <p:nvPr/>
-        </p:nvCxnSpPr>
-        <p:spPr>
-          <a:xfrm flipH="1">
-            <a:off x="3219121" y="2182573"/>
-            <a:ext cx="4079244" cy="424470"/>
-          </a:xfrm>
-          <a:prstGeom prst="line">
-            <a:avLst/>
-          </a:prstGeom>
-          <a:ln w="12700">
-            <a:solidFill>
-              <a:schemeClr val="accent1">
-                <a:lumMod val="60000"/>
-                <a:lumOff val="40000"/>
-              </a:schemeClr>
-            </a:solidFill>
-          </a:ln>
-        </p:spPr>
-        <p:style>
-          <a:lnRef idx="1">
-            <a:schemeClr val="accent1"/>
-          </a:lnRef>
-          <a:fillRef idx="0">
-            <a:schemeClr val="accent1"/>
-          </a:fillRef>
-          <a:effectRef idx="0">
-            <a:schemeClr val="accent1"/>
-          </a:effectRef>
-          <a:fontRef idx="minor">
-            <a:schemeClr val="tx1"/>
-          </a:fontRef>
-        </p:style>
-      </p:cxnSp>
-      <p:cxnSp>
-        <p:nvCxnSpPr>
-          <p:cNvPr id="123" name="직선 연결선 17">
-            <a:extLst>
-              <a:ext uri="{FF2B5EF4-FFF2-40B4-BE49-F238E27FC236}">
-                <a16:creationId xmlns:a16="http://schemas.microsoft.com/office/drawing/2014/main" id="{CE6D9B08-46D7-9E97-5860-F16091FDF475}"/>
-              </a:ext>
-            </a:extLst>
-          </p:cNvPr>
-          <p:cNvCxnSpPr>
-            <a:cxnSpLocks/>
-            <a:stCxn id="98" idx="1"/>
-            <a:endCxn id="67" idx="2"/>
-          </p:cNvCxnSpPr>
-          <p:nvPr/>
-        </p:nvCxnSpPr>
-        <p:spPr>
-          <a:xfrm flipH="1" flipV="1">
-            <a:off x="3219121" y="2990271"/>
-            <a:ext cx="1200740" cy="1422916"/>
-          </a:xfrm>
-          <a:prstGeom prst="line">
-            <a:avLst/>
-          </a:prstGeom>
-          <a:ln w="12700">
-            <a:solidFill>
-              <a:schemeClr val="accent1">
-                <a:lumMod val="60000"/>
-                <a:lumOff val="40000"/>
-              </a:schemeClr>
-            </a:solidFill>
-          </a:ln>
-        </p:spPr>
-        <p:style>
-          <a:lnRef idx="1">
-            <a:schemeClr val="accent1"/>
-          </a:lnRef>
-          <a:fillRef idx="0">
-            <a:schemeClr val="accent1"/>
-          </a:fillRef>
-          <a:effectRef idx="0">
-            <a:schemeClr val="accent1"/>
-          </a:effectRef>
-          <a:fontRef idx="minor">
-            <a:schemeClr val="tx1"/>
-          </a:fontRef>
-        </p:style>
-      </p:cxnSp>
-      <p:sp>
-        <p:nvSpPr>
-          <p:cNvPr id="134" name="TextBox 133">
-            <a:extLst>
-              <a:ext uri="{FF2B5EF4-FFF2-40B4-BE49-F238E27FC236}">
-                <a16:creationId xmlns:a16="http://schemas.microsoft.com/office/drawing/2014/main" id="{0C6EF735-7684-2915-622A-673B65C2E37F}"/>
-              </a:ext>
-            </a:extLst>
-          </p:cNvPr>
-          <p:cNvSpPr txBox="1"/>
-          <p:nvPr/>
-        </p:nvSpPr>
-        <p:spPr>
-          <a:xfrm>
-            <a:off x="2678595" y="2978233"/>
-            <a:ext cx="1008609" cy="400110"/>
-          </a:xfrm>
-          <a:prstGeom prst="rect">
-            <a:avLst/>
-          </a:prstGeom>
-          <a:noFill/>
-        </p:spPr>
-        <p:txBody>
-          <a:bodyPr wrap="none" rtlCol="0">
-            <a:spAutoFit/>
-          </a:bodyPr>
-          <a:lstStyle/>
-          <a:p>
-            <a:r>
-              <a:rPr kumimoji="1" lang="en-US" altLang="ko-KR" sz="1000" b="1" i="1"/>
-              <a:t>HostPath</a:t>
-            </a:r>
-          </a:p>
-          <a:p>
-            <a:r>
-              <a:rPr kumimoji="1" lang="en-US" altLang="ko-KR" sz="1000" b="1" i="1"/>
-              <a:t>(Bind Mount)</a:t>
-            </a:r>
-            <a:endParaRPr kumimoji="1" lang="ko-KR" altLang="en-US" sz="1000" b="1" i="1"/>
-          </a:p>
-        </p:txBody>
-      </p:sp>
-      <p:cxnSp>
-        <p:nvCxnSpPr>
-          <p:cNvPr id="135" name="직선 연결선 17">
-            <a:extLst>
-              <a:ext uri="{FF2B5EF4-FFF2-40B4-BE49-F238E27FC236}">
-                <a16:creationId xmlns:a16="http://schemas.microsoft.com/office/drawing/2014/main" id="{F5BB82B7-25ED-14D2-85EF-AE72233292E2}"/>
-              </a:ext>
-            </a:extLst>
-          </p:cNvPr>
-          <p:cNvCxnSpPr>
-            <a:cxnSpLocks/>
-            <a:stCxn id="74" idx="2"/>
-            <a:endCxn id="20" idx="0"/>
-          </p:cNvCxnSpPr>
-          <p:nvPr/>
-        </p:nvCxnSpPr>
-        <p:spPr>
-          <a:xfrm>
-            <a:off x="728396" y="2182573"/>
-            <a:ext cx="86826" cy="898277"/>
-          </a:xfrm>
-          <a:prstGeom prst="line">
-            <a:avLst/>
-          </a:prstGeom>
-          <a:ln w="12700">
-            <a:solidFill>
-              <a:schemeClr val="tx1"/>
-            </a:solidFill>
-            <a:prstDash val="dash"/>
-          </a:ln>
-        </p:spPr>
-        <p:style>
-          <a:lnRef idx="1">
-            <a:schemeClr val="accent1"/>
-          </a:lnRef>
-          <a:fillRef idx="0">
-            <a:schemeClr val="accent1"/>
-          </a:fillRef>
-          <a:effectRef idx="0">
-            <a:schemeClr val="accent1"/>
-          </a:effectRef>
-          <a:fontRef idx="minor">
-            <a:schemeClr val="tx1"/>
-          </a:fontRef>
-        </p:style>
-      </p:cxnSp>
-      <p:cxnSp>
-        <p:nvCxnSpPr>
-          <p:cNvPr id="138" name="직선 연결선 17">
-            <a:extLst>
-              <a:ext uri="{FF2B5EF4-FFF2-40B4-BE49-F238E27FC236}">
-                <a16:creationId xmlns:a16="http://schemas.microsoft.com/office/drawing/2014/main" id="{3B59B0BA-1B8B-34B2-36A0-B3911DC7CC0F}"/>
-              </a:ext>
-            </a:extLst>
-          </p:cNvPr>
-          <p:cNvCxnSpPr>
-            <a:cxnSpLocks/>
-            <a:stCxn id="86" idx="2"/>
-            <a:endCxn id="20" idx="0"/>
-          </p:cNvCxnSpPr>
-          <p:nvPr/>
-        </p:nvCxnSpPr>
-        <p:spPr>
-          <a:xfrm flipH="1">
-            <a:off x="815222" y="2182573"/>
-            <a:ext cx="2597672" cy="898277"/>
-          </a:xfrm>
-          <a:prstGeom prst="line">
-            <a:avLst/>
-          </a:prstGeom>
-          <a:ln w="12700">
-            <a:solidFill>
-              <a:schemeClr val="tx1"/>
-            </a:solidFill>
-            <a:prstDash val="dash"/>
-          </a:ln>
-        </p:spPr>
-        <p:style>
-          <a:lnRef idx="1">
-            <a:schemeClr val="accent1"/>
-          </a:lnRef>
-          <a:fillRef idx="0">
-            <a:schemeClr val="accent1"/>
-          </a:fillRef>
-          <a:effectRef idx="0">
-            <a:schemeClr val="accent1"/>
-          </a:effectRef>
-          <a:fontRef idx="minor">
-            <a:schemeClr val="tx1"/>
-          </a:fontRef>
-        </p:style>
-      </p:cxnSp>
-      <p:cxnSp>
-        <p:nvCxnSpPr>
-          <p:cNvPr id="141" name="직선 연결선 17">
-            <a:extLst>
-              <a:ext uri="{FF2B5EF4-FFF2-40B4-BE49-F238E27FC236}">
-                <a16:creationId xmlns:a16="http://schemas.microsoft.com/office/drawing/2014/main" id="{68A473A2-ABD5-BD48-68F4-5ED2384CE568}"/>
-              </a:ext>
-            </a:extLst>
-          </p:cNvPr>
-          <p:cNvCxnSpPr>
-            <a:cxnSpLocks/>
-            <a:stCxn id="92" idx="2"/>
-            <a:endCxn id="23" idx="0"/>
-          </p:cNvCxnSpPr>
-          <p:nvPr/>
-        </p:nvCxnSpPr>
-        <p:spPr>
-          <a:xfrm flipH="1">
-            <a:off x="2021785" y="2182573"/>
-            <a:ext cx="4075607" cy="898277"/>
-          </a:xfrm>
-          <a:prstGeom prst="line">
-            <a:avLst/>
-          </a:prstGeom>
-          <a:ln w="12700">
-            <a:solidFill>
-              <a:schemeClr val="tx1"/>
-            </a:solidFill>
-            <a:prstDash val="dash"/>
-          </a:ln>
-        </p:spPr>
-        <p:style>
-          <a:lnRef idx="1">
-            <a:schemeClr val="accent1"/>
-          </a:lnRef>
-          <a:fillRef idx="0">
-            <a:schemeClr val="accent1"/>
-          </a:fillRef>
-          <a:effectRef idx="0">
-            <a:schemeClr val="accent1"/>
-          </a:effectRef>
-          <a:fontRef idx="minor">
-            <a:schemeClr val="tx1"/>
-          </a:fontRef>
-        </p:style>
-      </p:cxnSp>
-      <p:cxnSp>
-        <p:nvCxnSpPr>
-          <p:cNvPr id="147" name="직선 연결선 17">
-            <a:extLst>
-              <a:ext uri="{FF2B5EF4-FFF2-40B4-BE49-F238E27FC236}">
-                <a16:creationId xmlns:a16="http://schemas.microsoft.com/office/drawing/2014/main" id="{B625D5A1-C6BE-411F-297F-053225C0CDE7}"/>
-              </a:ext>
-            </a:extLst>
-          </p:cNvPr>
-          <p:cNvCxnSpPr>
-            <a:cxnSpLocks/>
-            <a:stCxn id="100" idx="2"/>
-            <a:endCxn id="101" idx="0"/>
-          </p:cNvCxnSpPr>
-          <p:nvPr/>
-        </p:nvCxnSpPr>
-        <p:spPr>
-          <a:xfrm>
-            <a:off x="4818943" y="3464078"/>
-            <a:ext cx="613506" cy="187133"/>
-          </a:xfrm>
-          <a:prstGeom prst="line">
-            <a:avLst/>
-          </a:prstGeom>
-          <a:ln w="12700">
-            <a:solidFill>
-              <a:schemeClr val="tx1"/>
-            </a:solidFill>
-            <a:prstDash val="dash"/>
-            <a:headEnd type="none" w="med" len="med"/>
-            <a:tailEnd type="triangle" w="med" len="med"/>
-          </a:ln>
-        </p:spPr>
-        <p:style>
-          <a:lnRef idx="1">
-            <a:schemeClr val="accent1"/>
-          </a:lnRef>
-          <a:fillRef idx="0">
-            <a:schemeClr val="accent1"/>
-          </a:fillRef>
-          <a:effectRef idx="0">
-            <a:schemeClr val="accent1"/>
-          </a:effectRef>
-          <a:fontRef idx="minor">
-            <a:schemeClr val="tx1"/>
-          </a:fontRef>
-        </p:style>
-      </p:cxnSp>
-      <p:cxnSp>
-        <p:nvCxnSpPr>
-          <p:cNvPr id="154" name="직선 연결선 17">
-            <a:extLst>
-              <a:ext uri="{FF2B5EF4-FFF2-40B4-BE49-F238E27FC236}">
-                <a16:creationId xmlns:a16="http://schemas.microsoft.com/office/drawing/2014/main" id="{70182AC1-A01B-13BE-DCAC-21E58D3E5A10}"/>
-              </a:ext>
-            </a:extLst>
-          </p:cNvPr>
-          <p:cNvCxnSpPr>
-            <a:cxnSpLocks/>
-            <a:stCxn id="101" idx="0"/>
-            <a:endCxn id="103" idx="2"/>
-          </p:cNvCxnSpPr>
-          <p:nvPr/>
-        </p:nvCxnSpPr>
-        <p:spPr>
-          <a:xfrm flipV="1">
-            <a:off x="5432449" y="3459451"/>
-            <a:ext cx="620587" cy="191760"/>
-          </a:xfrm>
-          <a:prstGeom prst="line">
-            <a:avLst/>
-          </a:prstGeom>
-          <a:ln w="12700">
-            <a:solidFill>
-              <a:schemeClr val="tx1"/>
-            </a:solidFill>
-            <a:prstDash val="dash"/>
-            <a:headEnd type="none" w="med" len="med"/>
-            <a:tailEnd type="triangle" w="med" len="med"/>
-          </a:ln>
-        </p:spPr>
-        <p:style>
-          <a:lnRef idx="1">
-            <a:schemeClr val="accent1"/>
-          </a:lnRef>
-          <a:fillRef idx="0">
-            <a:schemeClr val="accent1"/>
-          </a:fillRef>
-          <a:effectRef idx="0">
-            <a:schemeClr val="accent1"/>
-          </a:effectRef>
-          <a:fontRef idx="minor">
-            <a:schemeClr val="tx1"/>
-          </a:fontRef>
-        </p:style>
-      </p:cxnSp>
-      <p:cxnSp>
-        <p:nvCxnSpPr>
-          <p:cNvPr id="157" name="직선 연결선 17">
-            <a:extLst>
-              <a:ext uri="{FF2B5EF4-FFF2-40B4-BE49-F238E27FC236}">
-                <a16:creationId xmlns:a16="http://schemas.microsoft.com/office/drawing/2014/main" id="{C4359D9B-A6C1-404E-7E47-26F45D779FCB}"/>
-              </a:ext>
-            </a:extLst>
-          </p:cNvPr>
-          <p:cNvCxnSpPr>
-            <a:cxnSpLocks/>
-            <a:stCxn id="101" idx="2"/>
-            <a:endCxn id="98" idx="0"/>
-          </p:cNvCxnSpPr>
-          <p:nvPr/>
-        </p:nvCxnSpPr>
-        <p:spPr>
-          <a:xfrm>
-            <a:off x="5432449" y="4034439"/>
-            <a:ext cx="0" cy="187134"/>
-          </a:xfrm>
-          <a:prstGeom prst="line">
-            <a:avLst/>
-          </a:prstGeom>
-          <a:ln w="12700">
-            <a:solidFill>
-              <a:schemeClr val="tx1"/>
-            </a:solidFill>
-            <a:prstDash val="dash"/>
-            <a:headEnd type="none" w="med" len="med"/>
-            <a:tailEnd type="triangle" w="med" len="med"/>
-          </a:ln>
-        </p:spPr>
-        <p:style>
-          <a:lnRef idx="1">
-            <a:schemeClr val="accent1"/>
-          </a:lnRef>
-          <a:fillRef idx="0">
-            <a:schemeClr val="accent1"/>
-          </a:fillRef>
-          <a:effectRef idx="0">
-            <a:schemeClr val="accent1"/>
-          </a:effectRef>
-          <a:fontRef idx="minor">
-            <a:schemeClr val="tx1"/>
-          </a:fontRef>
-        </p:style>
-      </p:cxnSp>
     </p:spTree>
     <p:extLst>
       <p:ext uri="{BB962C8B-B14F-4D97-AF65-F5344CB8AC3E}">
@@ -41969,7 +41986,7 @@
         <p:spPr>
           <a:xfrm>
             <a:off x="43906" y="60026"/>
-            <a:ext cx="2732424" cy="2464513"/>
+            <a:ext cx="2492125" cy="2464513"/>
           </a:xfrm>
           <a:prstGeom prst="roundRect">
             <a:avLst>
@@ -42061,8 +42078,8 @@
         </p:nvSpPr>
         <p:spPr>
           <a:xfrm>
-            <a:off x="93667" y="336814"/>
-            <a:ext cx="2629655" cy="2141343"/>
+            <a:off x="93668" y="336814"/>
+            <a:ext cx="2385214" cy="2141343"/>
           </a:xfrm>
           <a:prstGeom prst="roundRect">
             <a:avLst>
@@ -42119,7 +42136,7 @@
         <p:spPr>
           <a:xfrm>
             <a:off x="179514" y="1526478"/>
-            <a:ext cx="1195578" cy="383228"/>
+            <a:ext cx="1066284" cy="383228"/>
           </a:xfrm>
           <a:prstGeom prst="roundRect">
             <a:avLst>
@@ -42127,8 +42144,9 @@
             </a:avLst>
           </a:prstGeom>
           <a:solidFill>
-            <a:schemeClr val="bg1">
-              <a:lumMod val="95000"/>
+            <a:schemeClr val="accent1">
+              <a:lumMod val="20000"/>
+              <a:lumOff val="80000"/>
             </a:schemeClr>
           </a:solidFill>
           <a:ln w="12700"/>
@@ -42153,17 +42171,17 @@
           <a:p>
             <a:pPr algn="ctr"/>
             <a:r>
-              <a:rPr lang="en-US" altLang="ko-KR" sz="1000"/>
+              <a:rPr lang="en-US" altLang="ko-KR" sz="900"/>
               <a:t>/dev/nvidia-caps</a:t>
             </a:r>
             <a:br>
-              <a:rPr lang="en-US" altLang="ko-KR" sz="1000"/>
+              <a:rPr lang="en-US" altLang="ko-KR" sz="900"/>
             </a:br>
             <a:r>
-              <a:rPr lang="en-US" altLang="ko-KR" sz="1000"/>
+              <a:rPr lang="en-US" altLang="ko-KR" sz="900"/>
               <a:t>/nvidia-caps21</a:t>
             </a:r>
-            <a:endParaRPr lang="en-US" altLang="ko-KR" sz="1000" dirty="0"/>
+            <a:endParaRPr lang="en-US" altLang="ko-KR" sz="900" dirty="0"/>
           </a:p>
         </p:txBody>
       </p:sp>
@@ -42181,8 +42199,8 @@
         </p:nvSpPr>
         <p:spPr>
           <a:xfrm>
-            <a:off x="179512" y="1056152"/>
-            <a:ext cx="2451551" cy="383228"/>
+            <a:off x="179513" y="1056152"/>
+            <a:ext cx="2174756" cy="383228"/>
           </a:xfrm>
           <a:prstGeom prst="roundRect">
             <a:avLst>
@@ -42238,7 +42256,7 @@
         <p:spPr>
           <a:xfrm>
             <a:off x="179512" y="610481"/>
-            <a:ext cx="2451550" cy="383228"/>
+            <a:ext cx="2174756" cy="383228"/>
           </a:xfrm>
           <a:prstGeom prst="roundRect">
             <a:avLst>
@@ -42268,7 +42286,14 @@
             <a:pPr algn="ctr"/>
             <a:r>
               <a:rPr lang="en-US" altLang="ko-KR" sz="900"/>
-              <a:t>App with NVIDIA_VISIBLE_DEVICES Env  </a:t>
+              <a:t>App with </a:t>
+            </a:r>
+            <a:br>
+              <a:rPr lang="en-US" altLang="ko-KR" sz="900"/>
+            </a:br>
+            <a:r>
+              <a:rPr lang="en-US" altLang="ko-KR" sz="900"/>
+              <a:t>NVIDIA_VISIBLE_DEVICES Env  </a:t>
             </a:r>
             <a:endParaRPr lang="en-US" altLang="ko-KR" sz="900" dirty="0"/>
           </a:p>
@@ -42276,236 +42301,10 @@
       </p:sp>
       <p:sp>
         <p:nvSpPr>
-          <p:cNvPr id="9" name="사각형: 둥근 모서리 114">
-            <a:extLst>
-              <a:ext uri="{FF2B5EF4-FFF2-40B4-BE49-F238E27FC236}">
-                <a16:creationId xmlns:a16="http://schemas.microsoft.com/office/drawing/2014/main" id="{BFA1BDBB-A396-A062-6C9F-0F76A9AB1ABB}"/>
-              </a:ext>
-            </a:extLst>
-          </p:cNvPr>
-          <p:cNvSpPr/>
-          <p:nvPr/>
-        </p:nvSpPr>
-        <p:spPr>
-          <a:xfrm>
-            <a:off x="43907" y="2709472"/>
-            <a:ext cx="5773798" cy="2264369"/>
-          </a:xfrm>
-          <a:prstGeom prst="roundRect">
-            <a:avLst>
-              <a:gd name="adj" fmla="val 2252"/>
-            </a:avLst>
-          </a:prstGeom>
-          <a:ln w="12700"/>
-        </p:spPr>
-        <p:style>
-          <a:lnRef idx="2">
-            <a:schemeClr val="dk1"/>
-          </a:lnRef>
-          <a:fillRef idx="1">
-            <a:schemeClr val="lt1"/>
-          </a:fillRef>
-          <a:effectRef idx="0">
-            <a:schemeClr val="dk1"/>
-          </a:effectRef>
-          <a:fontRef idx="minor">
-            <a:schemeClr val="dk1"/>
-          </a:fontRef>
-        </p:style>
-        <p:txBody>
-          <a:bodyPr rtlCol="0" anchor="b"/>
-          <a:lstStyle/>
-          <a:p>
-            <a:pPr algn="ctr"/>
-            <a:r>
-              <a:rPr lang="en-US" altLang="ko-KR" sz="1000" b="1"/>
-              <a:t>Host</a:t>
-            </a:r>
-            <a:endParaRPr lang="en-US" altLang="ko-KR" sz="1000" b="1" dirty="0"/>
-          </a:p>
-        </p:txBody>
-      </p:sp>
-      <p:sp>
-        <p:nvSpPr>
-          <p:cNvPr id="12" name="사각형: 둥근 모서리 114">
-            <a:extLst>
-              <a:ext uri="{FF2B5EF4-FFF2-40B4-BE49-F238E27FC236}">
-                <a16:creationId xmlns:a16="http://schemas.microsoft.com/office/drawing/2014/main" id="{C7E8C59F-D6F9-F850-854C-565A25E87889}"/>
-              </a:ext>
-            </a:extLst>
-          </p:cNvPr>
-          <p:cNvSpPr/>
-          <p:nvPr/>
-        </p:nvSpPr>
-        <p:spPr>
-          <a:xfrm>
-            <a:off x="182636" y="4343733"/>
-            <a:ext cx="4105365" cy="383228"/>
-          </a:xfrm>
-          <a:prstGeom prst="roundRect">
-            <a:avLst>
-              <a:gd name="adj" fmla="val 14292"/>
-            </a:avLst>
-          </a:prstGeom>
-          <a:solidFill>
-            <a:schemeClr val="bg1">
-              <a:lumMod val="95000"/>
-            </a:schemeClr>
-          </a:solidFill>
-          <a:ln w="12700"/>
-        </p:spPr>
-        <p:style>
-          <a:lnRef idx="2">
-            <a:schemeClr val="dk1"/>
-          </a:lnRef>
-          <a:fillRef idx="1">
-            <a:schemeClr val="lt1"/>
-          </a:fillRef>
-          <a:effectRef idx="0">
-            <a:schemeClr val="dk1"/>
-          </a:effectRef>
-          <a:fontRef idx="minor">
-            <a:schemeClr val="dk1"/>
-          </a:fontRef>
-        </p:style>
-        <p:txBody>
-          <a:bodyPr rtlCol="0" anchor="ctr"/>
-          <a:lstStyle/>
-          <a:p>
-            <a:pPr algn="ctr"/>
-            <a:r>
-              <a:rPr lang="en-US" altLang="ko-KR" sz="1000"/>
-              <a:t>NVIDIA</a:t>
-            </a:r>
-          </a:p>
-          <a:p>
-            <a:pPr algn="ctr"/>
-            <a:r>
-              <a:rPr lang="en-US" altLang="ko-KR" sz="1000"/>
-              <a:t>GPU 0</a:t>
-            </a:r>
-            <a:endParaRPr lang="en-US" altLang="ko-KR" sz="1000" dirty="0"/>
-          </a:p>
-        </p:txBody>
-      </p:sp>
-      <p:sp>
-        <p:nvSpPr>
-          <p:cNvPr id="13" name="사각형: 둥근 모서리 114">
-            <a:extLst>
-              <a:ext uri="{FF2B5EF4-FFF2-40B4-BE49-F238E27FC236}">
-                <a16:creationId xmlns:a16="http://schemas.microsoft.com/office/drawing/2014/main" id="{FBA5DA3A-3C17-ED7E-3CB4-1626401FA50D}"/>
-              </a:ext>
-            </a:extLst>
-          </p:cNvPr>
-          <p:cNvSpPr/>
-          <p:nvPr/>
-        </p:nvSpPr>
-        <p:spPr>
-          <a:xfrm>
-            <a:off x="190202" y="3306888"/>
-            <a:ext cx="1276177" cy="383228"/>
-          </a:xfrm>
-          <a:prstGeom prst="roundRect">
-            <a:avLst>
-              <a:gd name="adj" fmla="val 14292"/>
-            </a:avLst>
-          </a:prstGeom>
-          <a:solidFill>
-            <a:schemeClr val="bg1">
-              <a:lumMod val="95000"/>
-            </a:schemeClr>
-          </a:solidFill>
-          <a:ln w="12700"/>
-        </p:spPr>
-        <p:style>
-          <a:lnRef idx="2">
-            <a:schemeClr val="dk1"/>
-          </a:lnRef>
-          <a:fillRef idx="1">
-            <a:schemeClr val="lt1"/>
-          </a:fillRef>
-          <a:effectRef idx="0">
-            <a:schemeClr val="dk1"/>
-          </a:effectRef>
-          <a:fontRef idx="minor">
-            <a:schemeClr val="dk1"/>
-          </a:fontRef>
-        </p:style>
-        <p:txBody>
-          <a:bodyPr rtlCol="0" anchor="ctr"/>
-          <a:lstStyle/>
-          <a:p>
-            <a:pPr algn="ctr"/>
-            <a:r>
-              <a:rPr lang="en-US" altLang="ko-KR" sz="1000"/>
-              <a:t>Compute Instance</a:t>
-            </a:r>
-            <a:endParaRPr lang="en-US" altLang="ko-KR" sz="1000" dirty="0"/>
-          </a:p>
-        </p:txBody>
-      </p:sp>
-      <p:sp>
-        <p:nvSpPr>
-          <p:cNvPr id="26" name="사각형: 둥근 모서리 114">
-            <a:extLst>
-              <a:ext uri="{FF2B5EF4-FFF2-40B4-BE49-F238E27FC236}">
-                <a16:creationId xmlns:a16="http://schemas.microsoft.com/office/drawing/2014/main" id="{FCE85E77-3D27-710D-A18E-7CC2CF02A4F4}"/>
-              </a:ext>
-            </a:extLst>
-          </p:cNvPr>
-          <p:cNvSpPr/>
-          <p:nvPr/>
-        </p:nvSpPr>
-        <p:spPr>
-          <a:xfrm>
-            <a:off x="177821" y="2784565"/>
-            <a:ext cx="5492498" cy="383228"/>
-          </a:xfrm>
-          <a:prstGeom prst="roundRect">
-            <a:avLst>
-              <a:gd name="adj" fmla="val 17067"/>
-            </a:avLst>
-          </a:prstGeom>
-          <a:solidFill>
-            <a:schemeClr val="bg2">
-              <a:lumMod val="90000"/>
-            </a:schemeClr>
-          </a:solidFill>
-          <a:ln w="12700"/>
-        </p:spPr>
-        <p:style>
-          <a:lnRef idx="2">
-            <a:schemeClr val="dk1"/>
-          </a:lnRef>
-          <a:fillRef idx="1">
-            <a:schemeClr val="lt1"/>
-          </a:fillRef>
-          <a:effectRef idx="0">
-            <a:schemeClr val="dk1"/>
-          </a:effectRef>
-          <a:fontRef idx="minor">
-            <a:schemeClr val="dk1"/>
-          </a:fontRef>
-        </p:style>
-        <p:txBody>
-          <a:bodyPr rtlCol="0" anchor="ctr"/>
-          <a:lstStyle/>
-          <a:p>
-            <a:pPr algn="ctr"/>
-            <a:r>
-              <a:rPr lang="en-US" altLang="ko-KR" sz="1000"/>
-              <a:t>NVIDIA CUDA Lib/Toolkit</a:t>
-            </a:r>
-            <a:endParaRPr lang="en-US" altLang="ko-KR" sz="1000" dirty="0"/>
-          </a:p>
-        </p:txBody>
-      </p:sp>
-      <p:sp>
-        <p:nvSpPr>
-          <p:cNvPr id="179" name="TextBox 178">
-            <a:extLst>
-              <a:ext uri="{FF2B5EF4-FFF2-40B4-BE49-F238E27FC236}">
-                <a16:creationId xmlns:a16="http://schemas.microsoft.com/office/drawing/2014/main" id="{44A17903-EB26-06D6-8717-3660632235CF}"/>
+          <p:cNvPr id="78" name="TextBox 77">
+            <a:extLst>
+              <a:ext uri="{FF2B5EF4-FFF2-40B4-BE49-F238E27FC236}">
+                <a16:creationId xmlns:a16="http://schemas.microsoft.com/office/drawing/2014/main" id="{BDD799BD-81DB-F04D-0B51-8E5598EE9006}"/>
               </a:ext>
             </a:extLst>
           </p:cNvPr>
@@ -42514,44 +42313,8 @@
         </p:nvSpPr>
         <p:spPr>
           <a:xfrm>
-            <a:off x="2466252" y="2735981"/>
-            <a:ext cx="915635" cy="238253"/>
-          </a:xfrm>
-          <a:prstGeom prst="rect">
-            <a:avLst/>
-          </a:prstGeom>
-          <a:noFill/>
-        </p:spPr>
-        <p:txBody>
-          <a:bodyPr wrap="none" rtlCol="0">
-            <a:spAutoFit/>
-          </a:bodyPr>
-          <a:lstStyle/>
-          <a:p>
-            <a:r>
-              <a:rPr kumimoji="1" lang="en-US" altLang="ko-KR" sz="1000" b="1" i="1"/>
-              <a:t>Bind Mount</a:t>
-            </a:r>
-            <a:endParaRPr kumimoji="1" lang="ko-KR" altLang="en-US" sz="1000" b="1" i="1"/>
-          </a:p>
-        </p:txBody>
-      </p:sp>
-      <p:sp>
-        <p:nvSpPr>
-          <p:cNvPr id="68" name="TextBox 67">
-            <a:extLst>
-              <a:ext uri="{FF2B5EF4-FFF2-40B4-BE49-F238E27FC236}">
-                <a16:creationId xmlns:a16="http://schemas.microsoft.com/office/drawing/2014/main" id="{A42ADD56-39F3-7F6E-EB4E-D41B1BA460D6}"/>
-              </a:ext>
-            </a:extLst>
-          </p:cNvPr>
-          <p:cNvSpPr txBox="1"/>
-          <p:nvPr/>
-        </p:nvSpPr>
-        <p:spPr>
-          <a:xfrm>
-            <a:off x="7225845" y="1837154"/>
-            <a:ext cx="1798090" cy="1569660"/>
+            <a:off x="7185137" y="3389521"/>
+            <a:ext cx="1618118" cy="1569660"/>
           </a:xfrm>
           <a:prstGeom prst="rect">
             <a:avLst/>
@@ -42612,7 +42375,7 @@
               <a:rPr lang="en-US" sz="800" kern="0" dirty="0">
                 <a:cs typeface="Al Bayan Plain" pitchFamily="2" charset="-78"/>
               </a:rPr>
-              <a:t>   name: podb</a:t>
+              <a:t>   name: podc</a:t>
             </a:r>
           </a:p>
           <a:p>
@@ -42644,7 +42407,7 @@
               <a:rPr lang="en-US" altLang="ko-KR" sz="800" kern="0" dirty="0">
                 <a:cs typeface="Al Bayan Plain" pitchFamily="2" charset="-78"/>
               </a:rPr>
-              <a:t>containerb</a:t>
+              <a:t>containerc</a:t>
             </a:r>
             <a:endParaRPr lang="en-US" sz="800" kern="0" dirty="0">
               <a:cs typeface="Al Bayan Plain" pitchFamily="2" charset="-78"/>
@@ -42660,6 +42423,45 @@
             </a:r>
           </a:p>
           <a:p>
+            <a:pPr algn="l"/>
+            <a:r>
+              <a:rPr lang="en-US" sz="800" kern="0" dirty="0">
+                <a:solidFill>
+                  <a:srgbClr val="C00000"/>
+                </a:solidFill>
+                <a:cs typeface="Al Bayan Plain" pitchFamily="2" charset="-78"/>
+              </a:rPr>
+              <a:t>         requests:</a:t>
+            </a:r>
+          </a:p>
+          <a:p>
+            <a:r>
+              <a:rPr lang="en-US" sz="800" kern="0" dirty="0">
+                <a:solidFill>
+                  <a:srgbClr val="C00000"/>
+                </a:solidFill>
+                <a:cs typeface="Al Bayan Plain" pitchFamily="2" charset="-78"/>
+              </a:rPr>
+              <a:t>           </a:t>
+            </a:r>
+            <a:r>
+              <a:rPr lang="en-US" sz="800" kern="0" dirty="0" err="1">
+                <a:solidFill>
+                  <a:srgbClr val="C00000"/>
+                </a:solidFill>
+                <a:cs typeface="Al Bayan Plain" pitchFamily="2" charset="-78"/>
+              </a:rPr>
+              <a:t>nvidia.com/</a:t>
+            </a:r>
+            <a:r>
+              <a:rPr lang="en-US" altLang="ko-KR" sz="800" kern="0" dirty="0" err="1">
+                <a:solidFill>
+                  <a:srgbClr val="C00000"/>
+                </a:solidFill>
+                <a:cs typeface="Al Bayan Plain" pitchFamily="2" charset="-78"/>
+              </a:rPr>
+              <a:t>mig-1g.5b</a:t>
+            </a:r>
             <a:r>
               <a:rPr lang="en-US" altLang="ko-KR" sz="800" kern="0" dirty="0">
                 <a:solidFill>
@@ -42667,7 +42469,7 @@
                 </a:solidFill>
                 <a:cs typeface="Al Bayan Plain" pitchFamily="2" charset="-78"/>
               </a:rPr>
-              <a:t>         requests:</a:t>
+              <a:t>: 1</a:t>
             </a:r>
           </a:p>
           <a:p>
@@ -42678,6 +42480,17 @@
                 </a:solidFill>
                 <a:cs typeface="Al Bayan Plain" pitchFamily="2" charset="-78"/>
               </a:rPr>
+              <a:t>         limits:</a:t>
+            </a:r>
+          </a:p>
+          <a:p>
+            <a:r>
+              <a:rPr lang="en-US" altLang="ko-KR" sz="800" kern="0" dirty="0">
+                <a:solidFill>
+                  <a:srgbClr val="C00000"/>
+                </a:solidFill>
+                <a:cs typeface="Al Bayan Plain" pitchFamily="2" charset="-78"/>
+              </a:rPr>
               <a:t>           </a:t>
             </a:r>
             <a:r>
@@ -42687,7 +42500,7 @@
                 </a:solidFill>
                 <a:cs typeface="Al Bayan Plain" pitchFamily="2" charset="-78"/>
               </a:rPr>
-              <a:t>nvidia.com/mig-2g.10b</a:t>
+              <a:t>nvidia.com</a:t>
             </a:r>
             <a:r>
               <a:rPr lang="en-US" altLang="ko-KR" sz="800" kern="0" dirty="0">
@@ -42696,10 +42509,17 @@
                 </a:solidFill>
                 <a:cs typeface="Al Bayan Plain" pitchFamily="2" charset="-78"/>
               </a:rPr>
-              <a:t>: 2</a:t>
-            </a:r>
-          </a:p>
-          <a:p>
+              <a:t>/</a:t>
+            </a:r>
+            <a:r>
+              <a:rPr lang="en-US" altLang="ko-KR" sz="800" kern="0" dirty="0" err="1">
+                <a:solidFill>
+                  <a:srgbClr val="C00000"/>
+                </a:solidFill>
+                <a:cs typeface="Al Bayan Plain" pitchFamily="2" charset="-78"/>
+              </a:rPr>
+              <a:t>mig-1g.5b</a:t>
+            </a:r>
             <a:r>
               <a:rPr lang="en-US" altLang="ko-KR" sz="800" kern="0" dirty="0">
                 <a:solidFill>
@@ -42707,46 +42527,606 @@
                 </a:solidFill>
                 <a:cs typeface="Al Bayan Plain" pitchFamily="2" charset="-78"/>
               </a:rPr>
-              <a:t>         limits:</a:t>
-            </a:r>
-          </a:p>
-          <a:p>
-            <a:r>
-              <a:rPr lang="en-US" altLang="ko-KR" sz="800" kern="0" dirty="0">
-                <a:solidFill>
-                  <a:srgbClr val="C00000"/>
-                </a:solidFill>
-                <a:cs typeface="Al Bayan Plain" pitchFamily="2" charset="-78"/>
-              </a:rPr>
-              <a:t>           </a:t>
-            </a:r>
-            <a:r>
-              <a:rPr lang="en-US" altLang="ko-KR" sz="800" kern="0" dirty="0" err="1">
-                <a:solidFill>
-                  <a:srgbClr val="C00000"/>
-                </a:solidFill>
-                <a:cs typeface="Al Bayan Plain" pitchFamily="2" charset="-78"/>
-              </a:rPr>
-              <a:t>nvidia.com/mig-2g.10b</a:t>
-            </a:r>
-            <a:r>
-              <a:rPr lang="en-US" altLang="ko-KR" sz="800" kern="0" dirty="0">
-                <a:solidFill>
-                  <a:srgbClr val="C00000"/>
-                </a:solidFill>
-                <a:cs typeface="Al Bayan Plain" pitchFamily="2" charset="-78"/>
-              </a:rPr>
-              <a:t>: 2</a:t>
-            </a:r>
-          </a:p>
-        </p:txBody>
-      </p:sp>
-      <p:sp>
-        <p:nvSpPr>
-          <p:cNvPr id="78" name="TextBox 77">
-            <a:extLst>
-              <a:ext uri="{FF2B5EF4-FFF2-40B4-BE49-F238E27FC236}">
-                <a16:creationId xmlns:a16="http://schemas.microsoft.com/office/drawing/2014/main" id="{BDD799BD-81DB-F04D-0B51-8E5598EE9006}"/>
+              <a:t>: 1</a:t>
+            </a:r>
+          </a:p>
+        </p:txBody>
+      </p:sp>
+      <p:sp>
+        <p:nvSpPr>
+          <p:cNvPr id="24" name="사각형: 둥근 모서리 114">
+            <a:extLst>
+              <a:ext uri="{FF2B5EF4-FFF2-40B4-BE49-F238E27FC236}">
+                <a16:creationId xmlns:a16="http://schemas.microsoft.com/office/drawing/2014/main" id="{B8CF3FC4-65BE-42AC-DB7F-8FA587E0C213}"/>
+              </a:ext>
+            </a:extLst>
+          </p:cNvPr>
+          <p:cNvSpPr/>
+          <p:nvPr/>
+        </p:nvSpPr>
+        <p:spPr>
+          <a:xfrm>
+            <a:off x="179514" y="1996804"/>
+            <a:ext cx="2186432" cy="383228"/>
+          </a:xfrm>
+          <a:prstGeom prst="roundRect">
+            <a:avLst>
+              <a:gd name="adj" fmla="val 12429"/>
+            </a:avLst>
+          </a:prstGeom>
+          <a:solidFill>
+            <a:schemeClr val="bg1">
+              <a:lumMod val="95000"/>
+            </a:schemeClr>
+          </a:solidFill>
+          <a:ln w="12700"/>
+        </p:spPr>
+        <p:style>
+          <a:lnRef idx="2">
+            <a:schemeClr val="dk1"/>
+          </a:lnRef>
+          <a:fillRef idx="1">
+            <a:schemeClr val="lt1"/>
+          </a:fillRef>
+          <a:effectRef idx="0">
+            <a:schemeClr val="dk1"/>
+          </a:effectRef>
+          <a:fontRef idx="minor">
+            <a:schemeClr val="dk1"/>
+          </a:fontRef>
+        </p:style>
+        <p:txBody>
+          <a:bodyPr rtlCol="0" anchor="ctr"/>
+          <a:lstStyle/>
+          <a:p>
+            <a:pPr algn="ctr"/>
+            <a:r>
+              <a:rPr lang="en-US" altLang="ko-KR" sz="900"/>
+              <a:t>/dev/nvidia0</a:t>
+            </a:r>
+            <a:endParaRPr lang="en-US" altLang="ko-KR" sz="900" dirty="0"/>
+          </a:p>
+        </p:txBody>
+      </p:sp>
+      <p:sp>
+        <p:nvSpPr>
+          <p:cNvPr id="33" name="사각형: 둥근 모서리 114">
+            <a:extLst>
+              <a:ext uri="{FF2B5EF4-FFF2-40B4-BE49-F238E27FC236}">
+                <a16:creationId xmlns:a16="http://schemas.microsoft.com/office/drawing/2014/main" id="{9E5FB8CF-6186-A03C-C926-F30AA711695B}"/>
+              </a:ext>
+            </a:extLst>
+          </p:cNvPr>
+          <p:cNvSpPr/>
+          <p:nvPr/>
+        </p:nvSpPr>
+        <p:spPr>
+          <a:xfrm>
+            <a:off x="1289704" y="1526478"/>
+            <a:ext cx="1066284" cy="383228"/>
+          </a:xfrm>
+          <a:prstGeom prst="roundRect">
+            <a:avLst>
+              <a:gd name="adj" fmla="val 7242"/>
+            </a:avLst>
+          </a:prstGeom>
+          <a:solidFill>
+            <a:schemeClr val="accent2">
+              <a:lumMod val="20000"/>
+              <a:lumOff val="80000"/>
+            </a:schemeClr>
+          </a:solidFill>
+          <a:ln w="12700"/>
+        </p:spPr>
+        <p:style>
+          <a:lnRef idx="2">
+            <a:schemeClr val="dk1"/>
+          </a:lnRef>
+          <a:fillRef idx="1">
+            <a:schemeClr val="lt1"/>
+          </a:fillRef>
+          <a:effectRef idx="0">
+            <a:schemeClr val="dk1"/>
+          </a:effectRef>
+          <a:fontRef idx="minor">
+            <a:schemeClr val="dk1"/>
+          </a:fontRef>
+        </p:style>
+        <p:txBody>
+          <a:bodyPr rtlCol="0" anchor="ctr"/>
+          <a:lstStyle/>
+          <a:p>
+            <a:pPr algn="ctr"/>
+            <a:r>
+              <a:rPr lang="en-US" altLang="ko-KR" sz="900"/>
+              <a:t>/dev/nvidia-caps</a:t>
+            </a:r>
+            <a:br>
+              <a:rPr lang="en-US" altLang="ko-KR" sz="900"/>
+            </a:br>
+            <a:r>
+              <a:rPr lang="en-US" altLang="ko-KR" sz="900"/>
+              <a:t>/nvidia-caps22</a:t>
+            </a:r>
+            <a:endParaRPr lang="en-US" altLang="ko-KR" sz="900" dirty="0"/>
+          </a:p>
+        </p:txBody>
+      </p:sp>
+      <p:sp>
+        <p:nvSpPr>
+          <p:cNvPr id="35" name="사각형: 둥근 모서리 114">
+            <a:extLst>
+              <a:ext uri="{FF2B5EF4-FFF2-40B4-BE49-F238E27FC236}">
+                <a16:creationId xmlns:a16="http://schemas.microsoft.com/office/drawing/2014/main" id="{03D0486A-CFBE-1B8F-2277-0E2BE95BFAE8}"/>
+              </a:ext>
+            </a:extLst>
+          </p:cNvPr>
+          <p:cNvSpPr/>
+          <p:nvPr/>
+        </p:nvSpPr>
+        <p:spPr>
+          <a:xfrm>
+            <a:off x="2624752" y="60026"/>
+            <a:ext cx="3590706" cy="2464513"/>
+          </a:xfrm>
+          <a:prstGeom prst="roundRect">
+            <a:avLst>
+              <a:gd name="adj" fmla="val 4159"/>
+            </a:avLst>
+          </a:prstGeom>
+          <a:ln w="12700"/>
+        </p:spPr>
+        <p:style>
+          <a:lnRef idx="2">
+            <a:schemeClr val="dk1"/>
+          </a:lnRef>
+          <a:fillRef idx="1">
+            <a:schemeClr val="lt1"/>
+          </a:fillRef>
+          <a:effectRef idx="0">
+            <a:schemeClr val="dk1"/>
+          </a:effectRef>
+          <a:fontRef idx="minor">
+            <a:schemeClr val="dk1"/>
+          </a:fontRef>
+        </p:style>
+        <p:txBody>
+          <a:bodyPr rtlCol="0" anchor="t"/>
+          <a:lstStyle/>
+          <a:p>
+            <a:pPr algn="ctr"/>
+            <a:r>
+              <a:rPr lang="en-US" altLang="ko-KR" sz="1000" b="1"/>
+              <a:t>Pod B</a:t>
+            </a:r>
+            <a:endParaRPr lang="ko-KR" altLang="en-US" sz="1000" b="1" dirty="0">
+              <a:solidFill>
+                <a:schemeClr val="accent2">
+                  <a:lumMod val="75000"/>
+                </a:schemeClr>
+              </a:solidFill>
+            </a:endParaRPr>
+          </a:p>
+        </p:txBody>
+      </p:sp>
+      <p:sp>
+        <p:nvSpPr>
+          <p:cNvPr id="37" name="사각형: 둥근 모서리 114">
+            <a:extLst>
+              <a:ext uri="{FF2B5EF4-FFF2-40B4-BE49-F238E27FC236}">
+                <a16:creationId xmlns:a16="http://schemas.microsoft.com/office/drawing/2014/main" id="{93903880-EA57-8D38-2847-4EF9A8399083}"/>
+              </a:ext>
+            </a:extLst>
+          </p:cNvPr>
+          <p:cNvSpPr/>
+          <p:nvPr/>
+        </p:nvSpPr>
+        <p:spPr>
+          <a:xfrm>
+            <a:off x="2674513" y="336814"/>
+            <a:ext cx="3490939" cy="2141343"/>
+          </a:xfrm>
+          <a:prstGeom prst="roundRect">
+            <a:avLst>
+              <a:gd name="adj" fmla="val 4159"/>
+            </a:avLst>
+          </a:prstGeom>
+          <a:ln w="12700"/>
+        </p:spPr>
+        <p:style>
+          <a:lnRef idx="2">
+            <a:schemeClr val="dk1"/>
+          </a:lnRef>
+          <a:fillRef idx="1">
+            <a:schemeClr val="lt1"/>
+          </a:fillRef>
+          <a:effectRef idx="0">
+            <a:schemeClr val="dk1"/>
+          </a:effectRef>
+          <a:fontRef idx="minor">
+            <a:schemeClr val="dk1"/>
+          </a:fontRef>
+        </p:style>
+        <p:txBody>
+          <a:bodyPr rtlCol="0" anchor="t"/>
+          <a:lstStyle/>
+          <a:p>
+            <a:pPr algn="ctr"/>
+            <a:r>
+              <a:rPr lang="en-US" altLang="ko-KR" sz="1000" b="1"/>
+              <a:t>Container B</a:t>
+            </a:r>
+            <a:endParaRPr lang="ko-KR" altLang="en-US" sz="1000" b="1" dirty="0">
+              <a:solidFill>
+                <a:schemeClr val="accent2">
+                  <a:lumMod val="75000"/>
+                </a:schemeClr>
+              </a:solidFill>
+            </a:endParaRPr>
+          </a:p>
+        </p:txBody>
+      </p:sp>
+      <p:sp>
+        <p:nvSpPr>
+          <p:cNvPr id="39" name="사각형: 둥근 모서리 114">
+            <a:extLst>
+              <a:ext uri="{FF2B5EF4-FFF2-40B4-BE49-F238E27FC236}">
+                <a16:creationId xmlns:a16="http://schemas.microsoft.com/office/drawing/2014/main" id="{6E34BF00-A8B7-76B0-E8C6-35C6A67EE23C}"/>
+              </a:ext>
+            </a:extLst>
+          </p:cNvPr>
+          <p:cNvSpPr/>
+          <p:nvPr/>
+        </p:nvSpPr>
+        <p:spPr>
+          <a:xfrm>
+            <a:off x="2760360" y="1526478"/>
+            <a:ext cx="1066284" cy="383228"/>
+          </a:xfrm>
+          <a:prstGeom prst="roundRect">
+            <a:avLst>
+              <a:gd name="adj" fmla="val 7242"/>
+            </a:avLst>
+          </a:prstGeom>
+          <a:solidFill>
+            <a:schemeClr val="accent1">
+              <a:lumMod val="20000"/>
+              <a:lumOff val="80000"/>
+            </a:schemeClr>
+          </a:solidFill>
+          <a:ln w="12700"/>
+        </p:spPr>
+        <p:style>
+          <a:lnRef idx="2">
+            <a:schemeClr val="dk1"/>
+          </a:lnRef>
+          <a:fillRef idx="1">
+            <a:schemeClr val="lt1"/>
+          </a:fillRef>
+          <a:effectRef idx="0">
+            <a:schemeClr val="dk1"/>
+          </a:effectRef>
+          <a:fontRef idx="minor">
+            <a:schemeClr val="dk1"/>
+          </a:fontRef>
+        </p:style>
+        <p:txBody>
+          <a:bodyPr rtlCol="0" anchor="ctr"/>
+          <a:lstStyle/>
+          <a:p>
+            <a:pPr algn="ctr"/>
+            <a:r>
+              <a:rPr lang="en-US" altLang="ko-KR" sz="900"/>
+              <a:t>/dev/nvidia-caps</a:t>
+            </a:r>
+            <a:br>
+              <a:rPr lang="en-US" altLang="ko-KR" sz="900"/>
+            </a:br>
+            <a:r>
+              <a:rPr lang="en-US" altLang="ko-KR" sz="900"/>
+              <a:t>/nvidia-caps30</a:t>
+            </a:r>
+            <a:endParaRPr lang="en-US" altLang="ko-KR" sz="900" dirty="0"/>
+          </a:p>
+        </p:txBody>
+      </p:sp>
+      <p:sp>
+        <p:nvSpPr>
+          <p:cNvPr id="40" name="사각형: 둥근 모서리 114">
+            <a:extLst>
+              <a:ext uri="{FF2B5EF4-FFF2-40B4-BE49-F238E27FC236}">
+                <a16:creationId xmlns:a16="http://schemas.microsoft.com/office/drawing/2014/main" id="{53B805E3-C8F5-5F6B-F293-18C9DEDA198C}"/>
+              </a:ext>
+            </a:extLst>
+          </p:cNvPr>
+          <p:cNvSpPr/>
+          <p:nvPr/>
+        </p:nvSpPr>
+        <p:spPr>
+          <a:xfrm>
+            <a:off x="2760358" y="1056152"/>
+            <a:ext cx="3302478" cy="383228"/>
+          </a:xfrm>
+          <a:prstGeom prst="roundRect">
+            <a:avLst>
+              <a:gd name="adj" fmla="val 7242"/>
+            </a:avLst>
+          </a:prstGeom>
+          <a:solidFill>
+            <a:schemeClr val="bg2">
+              <a:lumMod val="90000"/>
+            </a:schemeClr>
+          </a:solidFill>
+          <a:ln w="12700"/>
+        </p:spPr>
+        <p:style>
+          <a:lnRef idx="2">
+            <a:schemeClr val="dk1"/>
+          </a:lnRef>
+          <a:fillRef idx="1">
+            <a:schemeClr val="lt1"/>
+          </a:fillRef>
+          <a:effectRef idx="0">
+            <a:schemeClr val="dk1"/>
+          </a:effectRef>
+          <a:fontRef idx="minor">
+            <a:schemeClr val="dk1"/>
+          </a:fontRef>
+        </p:style>
+        <p:txBody>
+          <a:bodyPr rtlCol="0" anchor="ctr"/>
+          <a:lstStyle/>
+          <a:p>
+            <a:pPr algn="ctr"/>
+            <a:r>
+              <a:rPr lang="en-US" altLang="ko-KR" sz="900"/>
+              <a:t>NVIDIA CUDA Lib/Toolkit</a:t>
+            </a:r>
+            <a:endParaRPr lang="en-US" altLang="ko-KR" sz="900" dirty="0"/>
+          </a:p>
+        </p:txBody>
+      </p:sp>
+      <p:sp>
+        <p:nvSpPr>
+          <p:cNvPr id="41" name="사각형: 둥근 모서리 114">
+            <a:extLst>
+              <a:ext uri="{FF2B5EF4-FFF2-40B4-BE49-F238E27FC236}">
+                <a16:creationId xmlns:a16="http://schemas.microsoft.com/office/drawing/2014/main" id="{2E144784-2DC1-0CC5-AE67-82CB64FD4DF7}"/>
+              </a:ext>
+            </a:extLst>
+          </p:cNvPr>
+          <p:cNvSpPr/>
+          <p:nvPr/>
+        </p:nvSpPr>
+        <p:spPr>
+          <a:xfrm>
+            <a:off x="2760358" y="610481"/>
+            <a:ext cx="3302478" cy="383228"/>
+          </a:xfrm>
+          <a:prstGeom prst="roundRect">
+            <a:avLst>
+              <a:gd name="adj" fmla="val 7242"/>
+            </a:avLst>
+          </a:prstGeom>
+          <a:ln w="12700"/>
+        </p:spPr>
+        <p:style>
+          <a:lnRef idx="2">
+            <a:schemeClr val="dk1"/>
+          </a:lnRef>
+          <a:fillRef idx="1">
+            <a:schemeClr val="lt1"/>
+          </a:fillRef>
+          <a:effectRef idx="0">
+            <a:schemeClr val="dk1"/>
+          </a:effectRef>
+          <a:fontRef idx="minor">
+            <a:schemeClr val="dk1"/>
+          </a:fontRef>
+        </p:style>
+        <p:txBody>
+          <a:bodyPr rtlCol="0" anchor="ctr"/>
+          <a:lstStyle/>
+          <a:p>
+            <a:pPr algn="ctr"/>
+            <a:r>
+              <a:rPr lang="en-US" altLang="ko-KR" sz="900"/>
+              <a:t>App with NVIDIA_VISIBLE_DEVICES Env  </a:t>
+            </a:r>
+            <a:endParaRPr lang="en-US" altLang="ko-KR" sz="900" dirty="0"/>
+          </a:p>
+        </p:txBody>
+      </p:sp>
+      <p:sp>
+        <p:nvSpPr>
+          <p:cNvPr id="42" name="사각형: 둥근 모서리 114">
+            <a:extLst>
+              <a:ext uri="{FF2B5EF4-FFF2-40B4-BE49-F238E27FC236}">
+                <a16:creationId xmlns:a16="http://schemas.microsoft.com/office/drawing/2014/main" id="{86CDFBC8-FF87-A17B-26A0-A6E739193F68}"/>
+              </a:ext>
+            </a:extLst>
+          </p:cNvPr>
+          <p:cNvSpPr/>
+          <p:nvPr/>
+        </p:nvSpPr>
+        <p:spPr>
+          <a:xfrm>
+            <a:off x="2760360" y="1996804"/>
+            <a:ext cx="3306578" cy="383228"/>
+          </a:xfrm>
+          <a:prstGeom prst="roundRect">
+            <a:avLst>
+              <a:gd name="adj" fmla="val 12429"/>
+            </a:avLst>
+          </a:prstGeom>
+          <a:solidFill>
+            <a:schemeClr val="bg1">
+              <a:lumMod val="95000"/>
+            </a:schemeClr>
+          </a:solidFill>
+          <a:ln w="12700"/>
+        </p:spPr>
+        <p:style>
+          <a:lnRef idx="2">
+            <a:schemeClr val="dk1"/>
+          </a:lnRef>
+          <a:fillRef idx="1">
+            <a:schemeClr val="lt1"/>
+          </a:fillRef>
+          <a:effectRef idx="0">
+            <a:schemeClr val="dk1"/>
+          </a:effectRef>
+          <a:fontRef idx="minor">
+            <a:schemeClr val="dk1"/>
+          </a:fontRef>
+        </p:style>
+        <p:txBody>
+          <a:bodyPr rtlCol="0" anchor="ctr"/>
+          <a:lstStyle/>
+          <a:p>
+            <a:pPr algn="ctr"/>
+            <a:r>
+              <a:rPr lang="en-US" altLang="ko-KR" sz="900"/>
+              <a:t>/dev/nvidia0</a:t>
+            </a:r>
+            <a:endParaRPr lang="en-US" altLang="ko-KR" sz="900" dirty="0"/>
+          </a:p>
+        </p:txBody>
+      </p:sp>
+      <p:sp>
+        <p:nvSpPr>
+          <p:cNvPr id="43" name="사각형: 둥근 모서리 114">
+            <a:extLst>
+              <a:ext uri="{FF2B5EF4-FFF2-40B4-BE49-F238E27FC236}">
+                <a16:creationId xmlns:a16="http://schemas.microsoft.com/office/drawing/2014/main" id="{F5F466C6-795B-4A78-3DDD-7B26CAC1DD75}"/>
+              </a:ext>
+            </a:extLst>
+          </p:cNvPr>
+          <p:cNvSpPr/>
+          <p:nvPr/>
+        </p:nvSpPr>
+        <p:spPr>
+          <a:xfrm>
+            <a:off x="3880507" y="1526478"/>
+            <a:ext cx="1066284" cy="383228"/>
+          </a:xfrm>
+          <a:prstGeom prst="roundRect">
+            <a:avLst>
+              <a:gd name="adj" fmla="val 7242"/>
+            </a:avLst>
+          </a:prstGeom>
+          <a:solidFill>
+            <a:schemeClr val="accent2">
+              <a:lumMod val="20000"/>
+              <a:lumOff val="80000"/>
+            </a:schemeClr>
+          </a:solidFill>
+          <a:ln w="12700"/>
+        </p:spPr>
+        <p:style>
+          <a:lnRef idx="2">
+            <a:schemeClr val="dk1"/>
+          </a:lnRef>
+          <a:fillRef idx="1">
+            <a:schemeClr val="lt1"/>
+          </a:fillRef>
+          <a:effectRef idx="0">
+            <a:schemeClr val="dk1"/>
+          </a:effectRef>
+          <a:fontRef idx="minor">
+            <a:schemeClr val="dk1"/>
+          </a:fontRef>
+        </p:style>
+        <p:txBody>
+          <a:bodyPr rtlCol="0" anchor="ctr"/>
+          <a:lstStyle/>
+          <a:p>
+            <a:pPr algn="ctr"/>
+            <a:r>
+              <a:rPr lang="en-US" altLang="ko-KR" sz="900"/>
+              <a:t>/dev/nvidia-caps</a:t>
+            </a:r>
+            <a:br>
+              <a:rPr lang="en-US" altLang="ko-KR" sz="900"/>
+            </a:br>
+            <a:r>
+              <a:rPr lang="en-US" altLang="ko-KR" sz="900"/>
+              <a:t>/nvidia-caps31</a:t>
+            </a:r>
+            <a:endParaRPr lang="en-US" altLang="ko-KR" sz="900" dirty="0"/>
+          </a:p>
+        </p:txBody>
+      </p:sp>
+      <p:sp>
+        <p:nvSpPr>
+          <p:cNvPr id="44" name="사각형: 둥근 모서리 114">
+            <a:extLst>
+              <a:ext uri="{FF2B5EF4-FFF2-40B4-BE49-F238E27FC236}">
+                <a16:creationId xmlns:a16="http://schemas.microsoft.com/office/drawing/2014/main" id="{270FE9AE-BB98-C842-FB54-9F53F173CD04}"/>
+              </a:ext>
+            </a:extLst>
+          </p:cNvPr>
+          <p:cNvSpPr/>
+          <p:nvPr/>
+        </p:nvSpPr>
+        <p:spPr>
+          <a:xfrm>
+            <a:off x="4996552" y="1526478"/>
+            <a:ext cx="1066284" cy="383228"/>
+          </a:xfrm>
+          <a:prstGeom prst="roundRect">
+            <a:avLst>
+              <a:gd name="adj" fmla="val 7242"/>
+            </a:avLst>
+          </a:prstGeom>
+          <a:solidFill>
+            <a:schemeClr val="accent2">
+              <a:lumMod val="20000"/>
+              <a:lumOff val="80000"/>
+            </a:schemeClr>
+          </a:solidFill>
+          <a:ln w="12700"/>
+        </p:spPr>
+        <p:style>
+          <a:lnRef idx="2">
+            <a:schemeClr val="dk1"/>
+          </a:lnRef>
+          <a:fillRef idx="1">
+            <a:schemeClr val="lt1"/>
+          </a:fillRef>
+          <a:effectRef idx="0">
+            <a:schemeClr val="dk1"/>
+          </a:effectRef>
+          <a:fontRef idx="minor">
+            <a:schemeClr val="dk1"/>
+          </a:fontRef>
+        </p:style>
+        <p:txBody>
+          <a:bodyPr rtlCol="0" anchor="ctr"/>
+          <a:lstStyle/>
+          <a:p>
+            <a:pPr algn="ctr"/>
+            <a:r>
+              <a:rPr lang="en-US" altLang="ko-KR" sz="900"/>
+              <a:t>/dev/nvidia-caps</a:t>
+            </a:r>
+            <a:br>
+              <a:rPr lang="en-US" altLang="ko-KR" sz="900"/>
+            </a:br>
+            <a:r>
+              <a:rPr lang="en-US" altLang="ko-KR" sz="900"/>
+              <a:t>/nvidia-caps32</a:t>
+            </a:r>
+            <a:endParaRPr lang="en-US" altLang="ko-KR" sz="900" dirty="0"/>
+          </a:p>
+        </p:txBody>
+      </p:sp>
+      <p:sp>
+        <p:nvSpPr>
+          <p:cNvPr id="45" name="TextBox 44">
+            <a:extLst>
+              <a:ext uri="{FF2B5EF4-FFF2-40B4-BE49-F238E27FC236}">
+                <a16:creationId xmlns:a16="http://schemas.microsoft.com/office/drawing/2014/main" id="{5323C595-5DF2-55DA-9D1B-02C0FAA6AE54}"/>
               </a:ext>
             </a:extLst>
           </p:cNvPr>
@@ -42755,8 +43135,8 @@
         </p:nvSpPr>
         <p:spPr>
           <a:xfrm>
-            <a:off x="7225845" y="3404181"/>
-            <a:ext cx="1798090" cy="1569660"/>
+            <a:off x="3951687" y="3389521"/>
+            <a:ext cx="1618118" cy="1569660"/>
           </a:xfrm>
           <a:prstGeom prst="rect">
             <a:avLst/>
@@ -42817,7 +43197,7 @@
               <a:rPr lang="en-US" sz="800" kern="0" dirty="0">
                 <a:cs typeface="Al Bayan Plain" pitchFamily="2" charset="-78"/>
               </a:rPr>
-              <a:t>   name: podc</a:t>
+              <a:t>   name: poda</a:t>
             </a:r>
           </a:p>
           <a:p>
@@ -42839,46 +43219,79 @@
             </a:r>
           </a:p>
           <a:p>
+            <a:pPr algn="l"/>
             <a:r>
               <a:rPr lang="en-US" sz="800" kern="0" dirty="0">
                 <a:cs typeface="Al Bayan Plain" pitchFamily="2" charset="-78"/>
               </a:rPr>
-              <a:t>     - name: </a:t>
-            </a:r>
+              <a:t>     - name: containera</a:t>
+            </a:r>
+          </a:p>
+          <a:p>
+            <a:pPr algn="l"/>
+            <a:r>
+              <a:rPr lang="en-US" sz="800" kern="0" dirty="0">
+                <a:cs typeface="Al Bayan Plain" pitchFamily="2" charset="-78"/>
+              </a:rPr>
+              <a:t>       resources:</a:t>
+            </a:r>
+          </a:p>
+          <a:p>
+            <a:pPr algn="l"/>
+            <a:r>
+              <a:rPr lang="en-US" sz="800" kern="0" dirty="0">
+                <a:solidFill>
+                  <a:srgbClr val="C00000"/>
+                </a:solidFill>
+                <a:cs typeface="Al Bayan Plain" pitchFamily="2" charset="-78"/>
+              </a:rPr>
+              <a:t>         requests:</a:t>
+            </a:r>
+          </a:p>
+          <a:p>
+            <a:pPr algn="l"/>
+            <a:r>
+              <a:rPr lang="en-US" sz="800" kern="0" dirty="0">
+                <a:solidFill>
+                  <a:srgbClr val="C00000"/>
+                </a:solidFill>
+                <a:cs typeface="Al Bayan Plain" pitchFamily="2" charset="-78"/>
+              </a:rPr>
+              <a:t>           </a:t>
+            </a:r>
+            <a:r>
+              <a:rPr lang="en-US" sz="800" kern="0" dirty="0" err="1">
+                <a:solidFill>
+                  <a:srgbClr val="C00000"/>
+                </a:solidFill>
+                <a:cs typeface="Al Bayan Plain" pitchFamily="2" charset="-78"/>
+              </a:rPr>
+              <a:t>nvidia.com/mig-4g.20b</a:t>
+            </a:r>
+            <a:r>
+              <a:rPr lang="en-US" sz="800" kern="0" dirty="0">
+                <a:solidFill>
+                  <a:srgbClr val="C00000"/>
+                </a:solidFill>
+                <a:cs typeface="Al Bayan Plain" pitchFamily="2" charset="-78"/>
+              </a:rPr>
+              <a:t>: 1</a:t>
+            </a:r>
+          </a:p>
+          <a:p>
             <a:r>
               <a:rPr lang="en-US" altLang="ko-KR" sz="800" kern="0" dirty="0">
-                <a:cs typeface="Al Bayan Plain" pitchFamily="2" charset="-78"/>
-              </a:rPr>
-              <a:t>containerc</a:t>
-            </a:r>
-            <a:endParaRPr lang="en-US" sz="800" kern="0" dirty="0">
-              <a:cs typeface="Al Bayan Plain" pitchFamily="2" charset="-78"/>
-            </a:endParaRPr>
-          </a:p>
-          <a:p>
-            <a:pPr algn="l"/>
-            <a:r>
-              <a:rPr lang="en-US" sz="800" kern="0" dirty="0">
-                <a:cs typeface="Al Bayan Plain" pitchFamily="2" charset="-78"/>
-              </a:rPr>
-              <a:t>       resources:</a:t>
-            </a:r>
-          </a:p>
-          <a:p>
-            <a:pPr algn="l"/>
-            <a:r>
-              <a:rPr lang="en-US" sz="800" kern="0" dirty="0">
                 <a:solidFill>
                   <a:srgbClr val="C00000"/>
                 </a:solidFill>
                 <a:cs typeface="Al Bayan Plain" pitchFamily="2" charset="-78"/>
               </a:rPr>
-              <a:t>         requests:</a:t>
-            </a:r>
-          </a:p>
-          <a:p>
-            <a:r>
-              <a:rPr lang="en-US" sz="800" kern="0" dirty="0">
+              <a:t>         limits:</a:t>
+            </a:r>
+          </a:p>
+          <a:p>
+            <a:r>
+              <a:rPr lang="en-US" altLang="ko-KR" sz="800" kern="0" dirty="0">
                 <a:solidFill>
                   <a:srgbClr val="C00000"/>
                 </a:solidFill>
@@ -42887,99 +43300,32 @@
               <a:t>           </a:t>
             </a:r>
             <a:r>
-              <a:rPr lang="en-US" sz="800" kern="0" dirty="0" err="1">
+              <a:rPr lang="en-US" altLang="ko-KR" sz="800" kern="0" dirty="0" err="1">
                 <a:solidFill>
                   <a:srgbClr val="C00000"/>
                 </a:solidFill>
                 <a:cs typeface="Al Bayan Plain" pitchFamily="2" charset="-78"/>
               </a:rPr>
-              <a:t>nvidia.com/</a:t>
-            </a:r>
-            <a:r>
-              <a:rPr lang="en-US" altLang="ko-KR" sz="800" kern="0" dirty="0" err="1">
+              <a:t>nvidia.com/mig-4g.20b</a:t>
+            </a:r>
+            <a:r>
+              <a:rPr lang="en-US" altLang="ko-KR" sz="800" kern="0" dirty="0">
                 <a:solidFill>
                   <a:srgbClr val="C00000"/>
                 </a:solidFill>
                 <a:cs typeface="Al Bayan Plain" pitchFamily="2" charset="-78"/>
               </a:rPr>
-              <a:t>mig-1g.5b</a:t>
-            </a:r>
-            <a:r>
-              <a:rPr lang="en-US" altLang="ko-KR" sz="800" kern="0" dirty="0">
-                <a:solidFill>
-                  <a:srgbClr val="C00000"/>
-                </a:solidFill>
-                <a:cs typeface="Al Bayan Plain" pitchFamily="2" charset="-78"/>
-              </a:rPr>
               <a:t>: 1</a:t>
             </a:r>
           </a:p>
-          <a:p>
-            <a:r>
-              <a:rPr lang="en-US" altLang="ko-KR" sz="800" kern="0" dirty="0">
-                <a:solidFill>
-                  <a:srgbClr val="C00000"/>
-                </a:solidFill>
-                <a:cs typeface="Al Bayan Plain" pitchFamily="2" charset="-78"/>
-              </a:rPr>
-              <a:t>         limits:</a:t>
-            </a:r>
-          </a:p>
-          <a:p>
-            <a:r>
-              <a:rPr lang="en-US" altLang="ko-KR" sz="800" kern="0" dirty="0">
-                <a:solidFill>
-                  <a:srgbClr val="C00000"/>
-                </a:solidFill>
-                <a:cs typeface="Al Bayan Plain" pitchFamily="2" charset="-78"/>
-              </a:rPr>
-              <a:t>           </a:t>
-            </a:r>
-            <a:r>
-              <a:rPr lang="en-US" altLang="ko-KR" sz="800" kern="0" dirty="0" err="1">
-                <a:solidFill>
-                  <a:srgbClr val="C00000"/>
-                </a:solidFill>
-                <a:cs typeface="Al Bayan Plain" pitchFamily="2" charset="-78"/>
-              </a:rPr>
-              <a:t>nvidia.com</a:t>
-            </a:r>
-            <a:r>
-              <a:rPr lang="en-US" altLang="ko-KR" sz="800" kern="0" dirty="0">
-                <a:solidFill>
-                  <a:srgbClr val="C00000"/>
-                </a:solidFill>
-                <a:cs typeface="Al Bayan Plain" pitchFamily="2" charset="-78"/>
-              </a:rPr>
-              <a:t>/</a:t>
-            </a:r>
-            <a:r>
-              <a:rPr lang="en-US" altLang="ko-KR" sz="800" kern="0" dirty="0" err="1">
-                <a:solidFill>
-                  <a:srgbClr val="C00000"/>
-                </a:solidFill>
-                <a:cs typeface="Al Bayan Plain" pitchFamily="2" charset="-78"/>
-              </a:rPr>
-              <a:t>mig-1g.5b</a:t>
-            </a:r>
-            <a:r>
-              <a:rPr lang="en-US" altLang="ko-KR" sz="800" kern="0" dirty="0">
-                <a:solidFill>
-                  <a:srgbClr val="C00000"/>
-                </a:solidFill>
-                <a:cs typeface="Al Bayan Plain" pitchFamily="2" charset="-78"/>
-              </a:rPr>
-              <a:t>: 1</a:t>
-            </a:r>
-          </a:p>
-        </p:txBody>
-      </p:sp>
-      <p:sp>
-        <p:nvSpPr>
-          <p:cNvPr id="11" name="사각형: 둥근 모서리 114">
-            <a:extLst>
-              <a:ext uri="{FF2B5EF4-FFF2-40B4-BE49-F238E27FC236}">
-                <a16:creationId xmlns:a16="http://schemas.microsoft.com/office/drawing/2014/main" id="{C08EBDD6-8711-6942-ED3A-863DC37E2462}"/>
+        </p:txBody>
+      </p:sp>
+      <p:sp>
+        <p:nvSpPr>
+          <p:cNvPr id="9" name="사각형: 둥근 모서리 114">
+            <a:extLst>
+              <a:ext uri="{FF2B5EF4-FFF2-40B4-BE49-F238E27FC236}">
+                <a16:creationId xmlns:a16="http://schemas.microsoft.com/office/drawing/2014/main" id="{BFA1BDBB-A396-A062-6C9F-0F76A9AB1ABB}"/>
               </a:ext>
             </a:extLst>
           </p:cNvPr>
@@ -42988,8 +43334,59 @@
         </p:nvSpPr>
         <p:spPr>
           <a:xfrm>
-            <a:off x="192920" y="3826997"/>
-            <a:ext cx="1276177" cy="383228"/>
+            <a:off x="20290" y="2694812"/>
+            <a:ext cx="3860217" cy="2264369"/>
+          </a:xfrm>
+          <a:prstGeom prst="roundRect">
+            <a:avLst>
+              <a:gd name="adj" fmla="val 2252"/>
+            </a:avLst>
+          </a:prstGeom>
+          <a:ln w="12700"/>
+        </p:spPr>
+        <p:style>
+          <a:lnRef idx="2">
+            <a:schemeClr val="dk1"/>
+          </a:lnRef>
+          <a:fillRef idx="1">
+            <a:schemeClr val="lt1"/>
+          </a:fillRef>
+          <a:effectRef idx="0">
+            <a:schemeClr val="dk1"/>
+          </a:effectRef>
+          <a:fontRef idx="minor">
+            <a:schemeClr val="dk1"/>
+          </a:fontRef>
+        </p:style>
+        <p:txBody>
+          <a:bodyPr rtlCol="0" anchor="b"/>
+          <a:lstStyle/>
+          <a:p>
+            <a:pPr algn="ctr"/>
+            <a:r>
+              <a:rPr lang="en-US" altLang="ko-KR" sz="1000" b="1"/>
+              <a:t>Host</a:t>
+            </a:r>
+            <a:endParaRPr lang="en-US" altLang="ko-KR" sz="1000" b="1" dirty="0"/>
+          </a:p>
+        </p:txBody>
+      </p:sp>
+      <p:sp>
+        <p:nvSpPr>
+          <p:cNvPr id="12" name="사각형: 둥근 모서리 114">
+            <a:extLst>
+              <a:ext uri="{FF2B5EF4-FFF2-40B4-BE49-F238E27FC236}">
+                <a16:creationId xmlns:a16="http://schemas.microsoft.com/office/drawing/2014/main" id="{C7E8C59F-D6F9-F850-854C-565A25E87889}"/>
+              </a:ext>
+            </a:extLst>
+          </p:cNvPr>
+          <p:cNvSpPr/>
+          <p:nvPr/>
+        </p:nvSpPr>
+        <p:spPr>
+          <a:xfrm>
+            <a:off x="132859" y="4343733"/>
+            <a:ext cx="2744745" cy="383228"/>
           </a:xfrm>
           <a:prstGeom prst="roundRect">
             <a:avLst>
@@ -43023,10 +43420,233 @@
           <a:p>
             <a:pPr algn="ctr"/>
             <a:r>
-              <a:rPr lang="en-US" altLang="ko-KR" sz="1000"/>
-              <a:t>GPU Instance </a:t>
-            </a:r>
-            <a:endParaRPr lang="en-US" altLang="ko-KR" sz="1000" dirty="0"/>
+              <a:rPr lang="en-US" altLang="ko-KR" sz="900"/>
+              <a:t>NVIDIA GPU 0</a:t>
+            </a:r>
+            <a:endParaRPr lang="en-US" altLang="ko-KR" sz="900" dirty="0"/>
+          </a:p>
+        </p:txBody>
+      </p:sp>
+      <p:sp>
+        <p:nvSpPr>
+          <p:cNvPr id="13" name="사각형: 둥근 모서리 114">
+            <a:extLst>
+              <a:ext uri="{FF2B5EF4-FFF2-40B4-BE49-F238E27FC236}">
+                <a16:creationId xmlns:a16="http://schemas.microsoft.com/office/drawing/2014/main" id="{FBA5DA3A-3C17-ED7E-3CB4-1626401FA50D}"/>
+              </a:ext>
+            </a:extLst>
+          </p:cNvPr>
+          <p:cNvSpPr/>
+          <p:nvPr/>
+        </p:nvSpPr>
+        <p:spPr>
+          <a:xfrm>
+            <a:off x="137917" y="3306888"/>
+            <a:ext cx="853220" cy="383228"/>
+          </a:xfrm>
+          <a:prstGeom prst="roundRect">
+            <a:avLst>
+              <a:gd name="adj" fmla="val 14292"/>
+            </a:avLst>
+          </a:prstGeom>
+          <a:solidFill>
+            <a:schemeClr val="accent2">
+              <a:lumMod val="20000"/>
+              <a:lumOff val="80000"/>
+            </a:schemeClr>
+          </a:solidFill>
+          <a:ln w="12700"/>
+        </p:spPr>
+        <p:style>
+          <a:lnRef idx="2">
+            <a:schemeClr val="dk1"/>
+          </a:lnRef>
+          <a:fillRef idx="1">
+            <a:schemeClr val="lt1"/>
+          </a:fillRef>
+          <a:effectRef idx="0">
+            <a:schemeClr val="dk1"/>
+          </a:effectRef>
+          <a:fontRef idx="minor">
+            <a:schemeClr val="dk1"/>
+          </a:fontRef>
+        </p:style>
+        <p:txBody>
+          <a:bodyPr rtlCol="0" anchor="ctr"/>
+          <a:lstStyle/>
+          <a:p>
+            <a:pPr algn="ctr"/>
+            <a:r>
+              <a:rPr lang="en-US" altLang="ko-KR" sz="900"/>
+              <a:t>Compute Instance</a:t>
+            </a:r>
+          </a:p>
+          <a:p>
+            <a:pPr algn="ctr"/>
+            <a:r>
+              <a:rPr lang="en-US" altLang="ko-KR" sz="900"/>
+              <a:t>4g.20gb  </a:t>
+            </a:r>
+          </a:p>
+          <a:p>
+            <a:pPr algn="ctr"/>
+            <a:endParaRPr lang="en-US" altLang="ko-KR" sz="900"/>
+          </a:p>
+        </p:txBody>
+      </p:sp>
+      <p:sp>
+        <p:nvSpPr>
+          <p:cNvPr id="26" name="사각형: 둥근 모서리 114">
+            <a:extLst>
+              <a:ext uri="{FF2B5EF4-FFF2-40B4-BE49-F238E27FC236}">
+                <a16:creationId xmlns:a16="http://schemas.microsoft.com/office/drawing/2014/main" id="{FCE85E77-3D27-710D-A18E-7CC2CF02A4F4}"/>
+              </a:ext>
+            </a:extLst>
+          </p:cNvPr>
+          <p:cNvSpPr/>
+          <p:nvPr/>
+        </p:nvSpPr>
+        <p:spPr>
+          <a:xfrm>
+            <a:off x="129640" y="2784565"/>
+            <a:ext cx="3672147" cy="383228"/>
+          </a:xfrm>
+          <a:prstGeom prst="roundRect">
+            <a:avLst>
+              <a:gd name="adj" fmla="val 17067"/>
+            </a:avLst>
+          </a:prstGeom>
+          <a:solidFill>
+            <a:schemeClr val="bg2">
+              <a:lumMod val="90000"/>
+            </a:schemeClr>
+          </a:solidFill>
+          <a:ln w="12700"/>
+        </p:spPr>
+        <p:style>
+          <a:lnRef idx="2">
+            <a:schemeClr val="dk1"/>
+          </a:lnRef>
+          <a:fillRef idx="1">
+            <a:schemeClr val="lt1"/>
+          </a:fillRef>
+          <a:effectRef idx="0">
+            <a:schemeClr val="dk1"/>
+          </a:effectRef>
+          <a:fontRef idx="minor">
+            <a:schemeClr val="dk1"/>
+          </a:fontRef>
+        </p:style>
+        <p:txBody>
+          <a:bodyPr rtlCol="0" anchor="ctr"/>
+          <a:lstStyle/>
+          <a:p>
+            <a:pPr algn="ctr"/>
+            <a:r>
+              <a:rPr lang="en-US" altLang="ko-KR" sz="900"/>
+              <a:t>NVIDIA CUDA Lib/Toolkit</a:t>
+            </a:r>
+            <a:endParaRPr lang="en-US" altLang="ko-KR" sz="900" dirty="0"/>
+          </a:p>
+        </p:txBody>
+      </p:sp>
+      <p:sp>
+        <p:nvSpPr>
+          <p:cNvPr id="179" name="TextBox 178">
+            <a:extLst>
+              <a:ext uri="{FF2B5EF4-FFF2-40B4-BE49-F238E27FC236}">
+                <a16:creationId xmlns:a16="http://schemas.microsoft.com/office/drawing/2014/main" id="{44A17903-EB26-06D6-8717-3660632235CF}"/>
+              </a:ext>
+            </a:extLst>
+          </p:cNvPr>
+          <p:cNvSpPr txBox="1"/>
+          <p:nvPr/>
+        </p:nvSpPr>
+        <p:spPr>
+          <a:xfrm>
+            <a:off x="1671035" y="2715766"/>
+            <a:ext cx="612171" cy="238253"/>
+          </a:xfrm>
+          <a:prstGeom prst="rect">
+            <a:avLst/>
+          </a:prstGeom>
+          <a:noFill/>
+        </p:spPr>
+        <p:txBody>
+          <a:bodyPr wrap="none" rtlCol="0">
+            <a:spAutoFit/>
+          </a:bodyPr>
+          <a:lstStyle/>
+          <a:p>
+            <a:r>
+              <a:rPr kumimoji="1" lang="en-US" altLang="ko-KR" sz="1000" b="1" i="1"/>
+              <a:t>Bind Mount</a:t>
+            </a:r>
+            <a:endParaRPr kumimoji="1" lang="ko-KR" altLang="en-US" sz="1000" b="1" i="1"/>
+          </a:p>
+        </p:txBody>
+      </p:sp>
+      <p:sp>
+        <p:nvSpPr>
+          <p:cNvPr id="11" name="사각형: 둥근 모서리 114">
+            <a:extLst>
+              <a:ext uri="{FF2B5EF4-FFF2-40B4-BE49-F238E27FC236}">
+                <a16:creationId xmlns:a16="http://schemas.microsoft.com/office/drawing/2014/main" id="{C08EBDD6-8711-6942-ED3A-863DC37E2462}"/>
+              </a:ext>
+            </a:extLst>
+          </p:cNvPr>
+          <p:cNvSpPr/>
+          <p:nvPr/>
+        </p:nvSpPr>
+        <p:spPr>
+          <a:xfrm>
+            <a:off x="139735" y="3826997"/>
+            <a:ext cx="853220" cy="383228"/>
+          </a:xfrm>
+          <a:prstGeom prst="roundRect">
+            <a:avLst>
+              <a:gd name="adj" fmla="val 14292"/>
+            </a:avLst>
+          </a:prstGeom>
+          <a:solidFill>
+            <a:schemeClr val="accent1">
+              <a:lumMod val="20000"/>
+              <a:lumOff val="80000"/>
+            </a:schemeClr>
+          </a:solidFill>
+          <a:ln w="12700"/>
+        </p:spPr>
+        <p:style>
+          <a:lnRef idx="2">
+            <a:schemeClr val="dk1"/>
+          </a:lnRef>
+          <a:fillRef idx="1">
+            <a:schemeClr val="lt1"/>
+          </a:fillRef>
+          <a:effectRef idx="0">
+            <a:schemeClr val="dk1"/>
+          </a:effectRef>
+          <a:fontRef idx="minor">
+            <a:schemeClr val="dk1"/>
+          </a:fontRef>
+        </p:style>
+        <p:txBody>
+          <a:bodyPr rtlCol="0" anchor="ctr"/>
+          <a:lstStyle/>
+          <a:p>
+            <a:pPr algn="ctr"/>
+            <a:r>
+              <a:rPr lang="en-US" altLang="ko-KR" sz="900"/>
+              <a:t>GPU Instance</a:t>
+            </a:r>
+          </a:p>
+          <a:p>
+            <a:pPr algn="ctr"/>
+            <a:r>
+              <a:rPr lang="en-US" altLang="ko-KR" sz="900"/>
+              <a:t>4g.20gb  </a:t>
+            </a:r>
+            <a:endParaRPr lang="en-US" altLang="ko-KR" sz="900" dirty="0"/>
           </a:p>
         </p:txBody>
       </p:sp>
@@ -43044,8 +43664,198 @@
         </p:nvSpPr>
         <p:spPr>
           <a:xfrm>
-            <a:off x="1599492" y="3306888"/>
-            <a:ext cx="1276177" cy="383228"/>
+            <a:off x="1080134" y="3306888"/>
+            <a:ext cx="853220" cy="383228"/>
+          </a:xfrm>
+          <a:prstGeom prst="roundRect">
+            <a:avLst>
+              <a:gd name="adj" fmla="val 14292"/>
+            </a:avLst>
+          </a:prstGeom>
+          <a:solidFill>
+            <a:schemeClr val="accent2">
+              <a:lumMod val="20000"/>
+              <a:lumOff val="80000"/>
+            </a:schemeClr>
+          </a:solidFill>
+          <a:ln w="12700"/>
+        </p:spPr>
+        <p:style>
+          <a:lnRef idx="2">
+            <a:schemeClr val="dk1"/>
+          </a:lnRef>
+          <a:fillRef idx="1">
+            <a:schemeClr val="lt1"/>
+          </a:fillRef>
+          <a:effectRef idx="0">
+            <a:schemeClr val="dk1"/>
+          </a:effectRef>
+          <a:fontRef idx="minor">
+            <a:schemeClr val="dk1"/>
+          </a:fontRef>
+        </p:style>
+        <p:txBody>
+          <a:bodyPr rtlCol="0" anchor="ctr"/>
+          <a:lstStyle/>
+          <a:p>
+            <a:pPr algn="ctr"/>
+            <a:r>
+              <a:rPr lang="en-US" altLang="ko-KR" sz="900"/>
+              <a:t>Compute Instance</a:t>
+            </a:r>
+          </a:p>
+          <a:p>
+            <a:pPr algn="ctr"/>
+            <a:r>
+              <a:rPr lang="en-US" altLang="ko-KR" sz="900" dirty="0"/>
+              <a:t>1c.2g.10gb</a:t>
+            </a:r>
+          </a:p>
+        </p:txBody>
+      </p:sp>
+      <p:sp>
+        <p:nvSpPr>
+          <p:cNvPr id="15" name="사각형: 둥근 모서리 114">
+            <a:extLst>
+              <a:ext uri="{FF2B5EF4-FFF2-40B4-BE49-F238E27FC236}">
+                <a16:creationId xmlns:a16="http://schemas.microsoft.com/office/drawing/2014/main" id="{A76A45D7-7E45-A23C-B5CF-548FC9D504C8}"/>
+              </a:ext>
+            </a:extLst>
+          </p:cNvPr>
+          <p:cNvSpPr/>
+          <p:nvPr/>
+        </p:nvSpPr>
+        <p:spPr>
+          <a:xfrm>
+            <a:off x="2024383" y="3306888"/>
+            <a:ext cx="853220" cy="383228"/>
+          </a:xfrm>
+          <a:prstGeom prst="roundRect">
+            <a:avLst>
+              <a:gd name="adj" fmla="val 14292"/>
+            </a:avLst>
+          </a:prstGeom>
+          <a:solidFill>
+            <a:schemeClr val="accent2">
+              <a:lumMod val="20000"/>
+              <a:lumOff val="80000"/>
+            </a:schemeClr>
+          </a:solidFill>
+          <a:ln w="12700"/>
+        </p:spPr>
+        <p:style>
+          <a:lnRef idx="2">
+            <a:schemeClr val="dk1"/>
+          </a:lnRef>
+          <a:fillRef idx="1">
+            <a:schemeClr val="lt1"/>
+          </a:fillRef>
+          <a:effectRef idx="0">
+            <a:schemeClr val="dk1"/>
+          </a:effectRef>
+          <a:fontRef idx="minor">
+            <a:schemeClr val="dk1"/>
+          </a:fontRef>
+        </p:style>
+        <p:txBody>
+          <a:bodyPr rtlCol="0" anchor="ctr"/>
+          <a:lstStyle/>
+          <a:p>
+            <a:pPr algn="ctr"/>
+            <a:r>
+              <a:rPr lang="en-US" altLang="ko-KR" sz="900"/>
+              <a:t>Compute Instance</a:t>
+            </a:r>
+            <a:br>
+              <a:rPr lang="en-US" altLang="ko-KR" sz="900"/>
+            </a:br>
+            <a:r>
+              <a:rPr lang="en-US" altLang="ko-KR" sz="900"/>
+              <a:t>1c.2g.10gb</a:t>
+            </a:r>
+          </a:p>
+        </p:txBody>
+      </p:sp>
+      <p:sp>
+        <p:nvSpPr>
+          <p:cNvPr id="16" name="사각형: 둥근 모서리 114">
+            <a:extLst>
+              <a:ext uri="{FF2B5EF4-FFF2-40B4-BE49-F238E27FC236}">
+                <a16:creationId xmlns:a16="http://schemas.microsoft.com/office/drawing/2014/main" id="{A4E47099-5EDB-2940-8054-4F2DB48ED524}"/>
+              </a:ext>
+            </a:extLst>
+          </p:cNvPr>
+          <p:cNvSpPr/>
+          <p:nvPr/>
+        </p:nvSpPr>
+        <p:spPr>
+          <a:xfrm>
+            <a:off x="1080134" y="3826997"/>
+            <a:ext cx="1797470" cy="383228"/>
+          </a:xfrm>
+          <a:prstGeom prst="roundRect">
+            <a:avLst>
+              <a:gd name="adj" fmla="val 14292"/>
+            </a:avLst>
+          </a:prstGeom>
+          <a:solidFill>
+            <a:schemeClr val="accent1">
+              <a:lumMod val="20000"/>
+              <a:lumOff val="80000"/>
+            </a:schemeClr>
+          </a:solidFill>
+          <a:ln w="12700"/>
+        </p:spPr>
+        <p:style>
+          <a:lnRef idx="2">
+            <a:schemeClr val="dk1"/>
+          </a:lnRef>
+          <a:fillRef idx="1">
+            <a:schemeClr val="lt1"/>
+          </a:fillRef>
+          <a:effectRef idx="0">
+            <a:schemeClr val="dk1"/>
+          </a:effectRef>
+          <a:fontRef idx="minor">
+            <a:schemeClr val="dk1"/>
+          </a:fontRef>
+        </p:style>
+        <p:txBody>
+          <a:bodyPr rtlCol="0" anchor="ctr"/>
+          <a:lstStyle/>
+          <a:p>
+            <a:pPr algn="ctr"/>
+            <a:r>
+              <a:rPr lang="en-US" altLang="ko-KR" sz="900"/>
+              <a:t>GPU Instance</a:t>
+            </a:r>
+          </a:p>
+          <a:p>
+            <a:pPr algn="ctr"/>
+            <a:r>
+              <a:rPr lang="en-US" altLang="ko-KR" sz="900"/>
+              <a:t>2g.10gb  </a:t>
+            </a:r>
+            <a:endParaRPr lang="en-US" altLang="ko-KR" sz="900" dirty="0"/>
+          </a:p>
+        </p:txBody>
+      </p:sp>
+      <p:sp>
+        <p:nvSpPr>
+          <p:cNvPr id="18" name="사각형: 둥근 모서리 114">
+            <a:extLst>
+              <a:ext uri="{FF2B5EF4-FFF2-40B4-BE49-F238E27FC236}">
+                <a16:creationId xmlns:a16="http://schemas.microsoft.com/office/drawing/2014/main" id="{619218D3-3A62-C12B-104C-85BBA248A538}"/>
+              </a:ext>
+            </a:extLst>
+          </p:cNvPr>
+          <p:cNvSpPr/>
+          <p:nvPr/>
+        </p:nvSpPr>
+        <p:spPr>
+          <a:xfrm>
+            <a:off x="2948568" y="4343733"/>
+            <a:ext cx="853220" cy="383228"/>
           </a:xfrm>
           <a:prstGeom prst="roundRect">
             <a:avLst>
@@ -43079,19 +43889,26 @@
           <a:p>
             <a:pPr algn="ctr"/>
             <a:r>
-              <a:rPr lang="en-US" altLang="ko-KR" sz="1000"/>
-              <a:t>Compute Instance</a:t>
-            </a:r>
-            <a:endParaRPr lang="en-US" altLang="ko-KR" sz="1000" dirty="0"/>
-          </a:p>
-        </p:txBody>
-      </p:sp>
-      <p:sp>
-        <p:nvSpPr>
-          <p:cNvPr id="15" name="사각형: 둥근 모서리 114">
-            <a:extLst>
-              <a:ext uri="{FF2B5EF4-FFF2-40B4-BE49-F238E27FC236}">
-                <a16:creationId xmlns:a16="http://schemas.microsoft.com/office/drawing/2014/main" id="{A76A45D7-7E45-A23C-B5CF-548FC9D504C8}"/>
+              <a:rPr lang="en-US" altLang="ko-KR" sz="900"/>
+              <a:t>NVIDIA</a:t>
+            </a:r>
+          </a:p>
+          <a:p>
+            <a:pPr algn="ctr"/>
+            <a:r>
+              <a:rPr lang="en-US" altLang="ko-KR" sz="900"/>
+              <a:t>GPU 1</a:t>
+            </a:r>
+            <a:endParaRPr lang="en-US" altLang="ko-KR" sz="900" dirty="0"/>
+          </a:p>
+        </p:txBody>
+      </p:sp>
+      <p:sp>
+        <p:nvSpPr>
+          <p:cNvPr id="19" name="사각형: 둥근 모서리 114">
+            <a:extLst>
+              <a:ext uri="{FF2B5EF4-FFF2-40B4-BE49-F238E27FC236}">
+                <a16:creationId xmlns:a16="http://schemas.microsoft.com/office/drawing/2014/main" id="{D04840AA-8BCE-C2C8-153F-9874E47AEB61}"/>
               </a:ext>
             </a:extLst>
           </p:cNvPr>
@@ -43100,8 +43917,8 @@
         </p:nvSpPr>
         <p:spPr>
           <a:xfrm>
-            <a:off x="3011824" y="3306888"/>
-            <a:ext cx="1276177" cy="383228"/>
+            <a:off x="2948568" y="3306888"/>
+            <a:ext cx="853220" cy="383228"/>
           </a:xfrm>
           <a:prstGeom prst="roundRect">
             <a:avLst>
@@ -43109,8 +43926,9 @@
             </a:avLst>
           </a:prstGeom>
           <a:solidFill>
-            <a:schemeClr val="bg1">
-              <a:lumMod val="95000"/>
+            <a:schemeClr val="accent2">
+              <a:lumMod val="20000"/>
+              <a:lumOff val="80000"/>
             </a:schemeClr>
           </a:solidFill>
           <a:ln w="12700"/>
@@ -43135,19 +43953,26 @@
           <a:p>
             <a:pPr algn="ctr"/>
             <a:r>
-              <a:rPr lang="en-US" altLang="ko-KR" sz="1000"/>
+              <a:rPr lang="en-US" altLang="ko-KR" sz="900"/>
               <a:t>Compute Instance</a:t>
             </a:r>
-            <a:endParaRPr lang="en-US" altLang="ko-KR" sz="1000" dirty="0"/>
-          </a:p>
-        </p:txBody>
-      </p:sp>
-      <p:sp>
-        <p:nvSpPr>
-          <p:cNvPr id="16" name="사각형: 둥근 모서리 114">
-            <a:extLst>
-              <a:ext uri="{FF2B5EF4-FFF2-40B4-BE49-F238E27FC236}">
-                <a16:creationId xmlns:a16="http://schemas.microsoft.com/office/drawing/2014/main" id="{A4E47099-5EDB-2940-8054-4F2DB48ED524}"/>
+            <a:br>
+              <a:rPr lang="en-US" altLang="ko-KR" sz="900"/>
+            </a:br>
+            <a:r>
+              <a:rPr lang="en-US" altLang="ko-KR" sz="900"/>
+              <a:t>1g.5gb </a:t>
+            </a:r>
+            <a:endParaRPr lang="en-US" altLang="ko-KR" sz="900" dirty="0"/>
+          </a:p>
+        </p:txBody>
+      </p:sp>
+      <p:sp>
+        <p:nvSpPr>
+          <p:cNvPr id="20" name="사각형: 둥근 모서리 114">
+            <a:extLst>
+              <a:ext uri="{FF2B5EF4-FFF2-40B4-BE49-F238E27FC236}">
+                <a16:creationId xmlns:a16="http://schemas.microsoft.com/office/drawing/2014/main" id="{C1E2AD8F-7E2E-9EA8-408C-34DEFDC48E20}"/>
               </a:ext>
             </a:extLst>
           </p:cNvPr>
@@ -43156,8 +43981,8 @@
         </p:nvSpPr>
         <p:spPr>
           <a:xfrm>
-            <a:off x="1599492" y="3826997"/>
-            <a:ext cx="2688509" cy="383228"/>
+            <a:off x="2948567" y="3826997"/>
+            <a:ext cx="853220" cy="383228"/>
           </a:xfrm>
           <a:prstGeom prst="roundRect">
             <a:avLst>
@@ -43165,8 +43990,9 @@
             </a:avLst>
           </a:prstGeom>
           <a:solidFill>
-            <a:schemeClr val="bg1">
-              <a:lumMod val="95000"/>
+            <a:schemeClr val="accent1">
+              <a:lumMod val="20000"/>
+              <a:lumOff val="80000"/>
             </a:schemeClr>
           </a:solidFill>
           <a:ln w="12700"/>
@@ -43191,19 +44017,362 @@
           <a:p>
             <a:pPr algn="ctr"/>
             <a:r>
-              <a:rPr lang="en-US" altLang="ko-KR" sz="1000"/>
-              <a:t>GPU Instance </a:t>
-            </a:r>
-            <a:endParaRPr lang="en-US" altLang="ko-KR" sz="1000" dirty="0"/>
-          </a:p>
-        </p:txBody>
-      </p:sp>
-      <p:sp>
-        <p:nvSpPr>
-          <p:cNvPr id="18" name="사각형: 둥근 모서리 114">
-            <a:extLst>
-              <a:ext uri="{FF2B5EF4-FFF2-40B4-BE49-F238E27FC236}">
-                <a16:creationId xmlns:a16="http://schemas.microsoft.com/office/drawing/2014/main" id="{619218D3-3A62-C12B-104C-85BBA248A538}"/>
+              <a:rPr lang="en-US" altLang="ko-KR" sz="900"/>
+              <a:t>GPU Instance</a:t>
+            </a:r>
+          </a:p>
+          <a:p>
+            <a:pPr algn="ctr"/>
+            <a:r>
+              <a:rPr lang="en-US" altLang="ko-KR" sz="900"/>
+              <a:t>1g.5gb  </a:t>
+            </a:r>
+            <a:endParaRPr lang="en-US" altLang="ko-KR" sz="900" dirty="0"/>
+          </a:p>
+        </p:txBody>
+      </p:sp>
+      <p:cxnSp>
+        <p:nvCxnSpPr>
+          <p:cNvPr id="56" name="직선 연결선 17">
+            <a:extLst>
+              <a:ext uri="{FF2B5EF4-FFF2-40B4-BE49-F238E27FC236}">
+                <a16:creationId xmlns:a16="http://schemas.microsoft.com/office/drawing/2014/main" id="{9E39FF66-72F8-131E-384F-0BF689CC5C03}"/>
+              </a:ext>
+            </a:extLst>
+          </p:cNvPr>
+          <p:cNvCxnSpPr>
+            <a:cxnSpLocks/>
+            <a:stCxn id="11" idx="2"/>
+            <a:endCxn id="12" idx="0"/>
+          </p:cNvCxnSpPr>
+          <p:nvPr/>
+        </p:nvCxnSpPr>
+        <p:spPr>
+          <a:xfrm>
+            <a:off x="566345" y="4210225"/>
+            <a:ext cx="938887" cy="133508"/>
+          </a:xfrm>
+          <a:prstGeom prst="line">
+            <a:avLst/>
+          </a:prstGeom>
+          <a:ln w="12700">
+            <a:solidFill>
+              <a:schemeClr val="tx1"/>
+            </a:solidFill>
+            <a:prstDash val="solid"/>
+            <a:headEnd type="triangle" w="med" len="med"/>
+            <a:tailEnd type="none" w="med" len="med"/>
+          </a:ln>
+        </p:spPr>
+        <p:style>
+          <a:lnRef idx="1">
+            <a:schemeClr val="accent1"/>
+          </a:lnRef>
+          <a:fillRef idx="0">
+            <a:schemeClr val="accent1"/>
+          </a:fillRef>
+          <a:effectRef idx="0">
+            <a:schemeClr val="accent1"/>
+          </a:effectRef>
+          <a:fontRef idx="minor">
+            <a:schemeClr val="tx1"/>
+          </a:fontRef>
+        </p:style>
+      </p:cxnSp>
+      <p:cxnSp>
+        <p:nvCxnSpPr>
+          <p:cNvPr id="60" name="직선 연결선 17">
+            <a:extLst>
+              <a:ext uri="{FF2B5EF4-FFF2-40B4-BE49-F238E27FC236}">
+                <a16:creationId xmlns:a16="http://schemas.microsoft.com/office/drawing/2014/main" id="{9A169D25-509E-6318-293D-851ECF92057B}"/>
+              </a:ext>
+            </a:extLst>
+          </p:cNvPr>
+          <p:cNvCxnSpPr>
+            <a:cxnSpLocks/>
+            <a:stCxn id="16" idx="2"/>
+            <a:endCxn id="12" idx="0"/>
+          </p:cNvCxnSpPr>
+          <p:nvPr/>
+        </p:nvCxnSpPr>
+        <p:spPr>
+          <a:xfrm flipH="1">
+            <a:off x="1505232" y="4210225"/>
+            <a:ext cx="473637" cy="133508"/>
+          </a:xfrm>
+          <a:prstGeom prst="line">
+            <a:avLst/>
+          </a:prstGeom>
+          <a:ln w="12700">
+            <a:solidFill>
+              <a:schemeClr val="tx1"/>
+            </a:solidFill>
+            <a:prstDash val="solid"/>
+            <a:headEnd type="triangle" w="med" len="med"/>
+            <a:tailEnd type="none" w="med" len="med"/>
+          </a:ln>
+        </p:spPr>
+        <p:style>
+          <a:lnRef idx="1">
+            <a:schemeClr val="accent1"/>
+          </a:lnRef>
+          <a:fillRef idx="0">
+            <a:schemeClr val="accent1"/>
+          </a:fillRef>
+          <a:effectRef idx="0">
+            <a:schemeClr val="accent1"/>
+          </a:effectRef>
+          <a:fontRef idx="minor">
+            <a:schemeClr val="tx1"/>
+          </a:fontRef>
+        </p:style>
+      </p:cxnSp>
+      <p:cxnSp>
+        <p:nvCxnSpPr>
+          <p:cNvPr id="64" name="직선 연결선 17">
+            <a:extLst>
+              <a:ext uri="{FF2B5EF4-FFF2-40B4-BE49-F238E27FC236}">
+                <a16:creationId xmlns:a16="http://schemas.microsoft.com/office/drawing/2014/main" id="{0C13C9F1-3B17-AE6A-5E39-D369347AE3CB}"/>
+              </a:ext>
+            </a:extLst>
+          </p:cNvPr>
+          <p:cNvCxnSpPr>
+            <a:cxnSpLocks/>
+            <a:stCxn id="13" idx="2"/>
+            <a:endCxn id="11" idx="0"/>
+          </p:cNvCxnSpPr>
+          <p:nvPr/>
+        </p:nvCxnSpPr>
+        <p:spPr>
+          <a:xfrm>
+            <a:off x="564528" y="3690116"/>
+            <a:ext cx="1817" cy="136881"/>
+          </a:xfrm>
+          <a:prstGeom prst="line">
+            <a:avLst/>
+          </a:prstGeom>
+          <a:ln w="12700">
+            <a:solidFill>
+              <a:schemeClr val="tx1"/>
+            </a:solidFill>
+            <a:prstDash val="solid"/>
+            <a:headEnd type="triangle" w="med" len="med"/>
+            <a:tailEnd type="none" w="med" len="med"/>
+          </a:ln>
+        </p:spPr>
+        <p:style>
+          <a:lnRef idx="1">
+            <a:schemeClr val="accent1"/>
+          </a:lnRef>
+          <a:fillRef idx="0">
+            <a:schemeClr val="accent1"/>
+          </a:fillRef>
+          <a:effectRef idx="0">
+            <a:schemeClr val="accent1"/>
+          </a:effectRef>
+          <a:fontRef idx="minor">
+            <a:schemeClr val="tx1"/>
+          </a:fontRef>
+        </p:style>
+      </p:cxnSp>
+      <p:cxnSp>
+        <p:nvCxnSpPr>
+          <p:cNvPr id="71" name="직선 연결선 17">
+            <a:extLst>
+              <a:ext uri="{FF2B5EF4-FFF2-40B4-BE49-F238E27FC236}">
+                <a16:creationId xmlns:a16="http://schemas.microsoft.com/office/drawing/2014/main" id="{4898AD93-491D-7696-D834-C84884EE62D8}"/>
+              </a:ext>
+            </a:extLst>
+          </p:cNvPr>
+          <p:cNvCxnSpPr>
+            <a:cxnSpLocks/>
+            <a:stCxn id="14" idx="2"/>
+            <a:endCxn id="16" idx="0"/>
+          </p:cNvCxnSpPr>
+          <p:nvPr/>
+        </p:nvCxnSpPr>
+        <p:spPr>
+          <a:xfrm>
+            <a:off x="1506744" y="3690116"/>
+            <a:ext cx="472125" cy="136881"/>
+          </a:xfrm>
+          <a:prstGeom prst="line">
+            <a:avLst/>
+          </a:prstGeom>
+          <a:ln w="12700">
+            <a:solidFill>
+              <a:schemeClr val="tx1"/>
+            </a:solidFill>
+            <a:prstDash val="solid"/>
+            <a:headEnd type="triangle" w="med" len="med"/>
+            <a:tailEnd type="none" w="med" len="med"/>
+          </a:ln>
+        </p:spPr>
+        <p:style>
+          <a:lnRef idx="1">
+            <a:schemeClr val="accent1"/>
+          </a:lnRef>
+          <a:fillRef idx="0">
+            <a:schemeClr val="accent1"/>
+          </a:fillRef>
+          <a:effectRef idx="0">
+            <a:schemeClr val="accent1"/>
+          </a:effectRef>
+          <a:fontRef idx="minor">
+            <a:schemeClr val="tx1"/>
+          </a:fontRef>
+        </p:style>
+      </p:cxnSp>
+      <p:cxnSp>
+        <p:nvCxnSpPr>
+          <p:cNvPr id="77" name="직선 연결선 17">
+            <a:extLst>
+              <a:ext uri="{FF2B5EF4-FFF2-40B4-BE49-F238E27FC236}">
+                <a16:creationId xmlns:a16="http://schemas.microsoft.com/office/drawing/2014/main" id="{0B67D6B1-CD7E-7193-912E-2B02EF1CD103}"/>
+              </a:ext>
+            </a:extLst>
+          </p:cNvPr>
+          <p:cNvCxnSpPr>
+            <a:cxnSpLocks/>
+            <a:stCxn id="15" idx="2"/>
+            <a:endCxn id="16" idx="0"/>
+          </p:cNvCxnSpPr>
+          <p:nvPr/>
+        </p:nvCxnSpPr>
+        <p:spPr>
+          <a:xfrm flipH="1">
+            <a:off x="1978869" y="3690116"/>
+            <a:ext cx="472125" cy="136881"/>
+          </a:xfrm>
+          <a:prstGeom prst="line">
+            <a:avLst/>
+          </a:prstGeom>
+          <a:ln w="12700">
+            <a:solidFill>
+              <a:schemeClr val="tx1"/>
+            </a:solidFill>
+            <a:prstDash val="solid"/>
+            <a:headEnd type="triangle" w="med" len="med"/>
+            <a:tailEnd type="none" w="med" len="med"/>
+          </a:ln>
+        </p:spPr>
+        <p:style>
+          <a:lnRef idx="1">
+            <a:schemeClr val="accent1"/>
+          </a:lnRef>
+          <a:fillRef idx="0">
+            <a:schemeClr val="accent1"/>
+          </a:fillRef>
+          <a:effectRef idx="0">
+            <a:schemeClr val="accent1"/>
+          </a:effectRef>
+          <a:fontRef idx="minor">
+            <a:schemeClr val="tx1"/>
+          </a:fontRef>
+        </p:style>
+      </p:cxnSp>
+      <p:cxnSp>
+        <p:nvCxnSpPr>
+          <p:cNvPr id="82" name="직선 연결선 17">
+            <a:extLst>
+              <a:ext uri="{FF2B5EF4-FFF2-40B4-BE49-F238E27FC236}">
+                <a16:creationId xmlns:a16="http://schemas.microsoft.com/office/drawing/2014/main" id="{E78ED4A4-5423-B21D-B216-A01DBF46384E}"/>
+              </a:ext>
+            </a:extLst>
+          </p:cNvPr>
+          <p:cNvCxnSpPr>
+            <a:cxnSpLocks/>
+            <a:stCxn id="19" idx="2"/>
+            <a:endCxn id="20" idx="0"/>
+          </p:cNvCxnSpPr>
+          <p:nvPr/>
+        </p:nvCxnSpPr>
+        <p:spPr>
+          <a:xfrm flipH="1">
+            <a:off x="3375177" y="3690116"/>
+            <a:ext cx="1" cy="136881"/>
+          </a:xfrm>
+          <a:prstGeom prst="line">
+            <a:avLst/>
+          </a:prstGeom>
+          <a:ln w="12700">
+            <a:solidFill>
+              <a:schemeClr val="tx1"/>
+            </a:solidFill>
+            <a:prstDash val="solid"/>
+            <a:headEnd type="triangle" w="med" len="med"/>
+            <a:tailEnd type="none" w="med" len="med"/>
+          </a:ln>
+        </p:spPr>
+        <p:style>
+          <a:lnRef idx="1">
+            <a:schemeClr val="accent1"/>
+          </a:lnRef>
+          <a:fillRef idx="0">
+            <a:schemeClr val="accent1"/>
+          </a:fillRef>
+          <a:effectRef idx="0">
+            <a:schemeClr val="accent1"/>
+          </a:effectRef>
+          <a:fontRef idx="minor">
+            <a:schemeClr val="tx1"/>
+          </a:fontRef>
+        </p:style>
+      </p:cxnSp>
+      <p:cxnSp>
+        <p:nvCxnSpPr>
+          <p:cNvPr id="85" name="직선 연결선 17">
+            <a:extLst>
+              <a:ext uri="{FF2B5EF4-FFF2-40B4-BE49-F238E27FC236}">
+                <a16:creationId xmlns:a16="http://schemas.microsoft.com/office/drawing/2014/main" id="{5CA1D19C-FEF5-11C4-78E2-4E73E38C8101}"/>
+              </a:ext>
+            </a:extLst>
+          </p:cNvPr>
+          <p:cNvCxnSpPr>
+            <a:cxnSpLocks/>
+            <a:stCxn id="20" idx="2"/>
+            <a:endCxn id="18" idx="0"/>
+          </p:cNvCxnSpPr>
+          <p:nvPr/>
+        </p:nvCxnSpPr>
+        <p:spPr>
+          <a:xfrm>
+            <a:off x="3375177" y="4210225"/>
+            <a:ext cx="1" cy="133508"/>
+          </a:xfrm>
+          <a:prstGeom prst="line">
+            <a:avLst/>
+          </a:prstGeom>
+          <a:ln w="12700">
+            <a:solidFill>
+              <a:schemeClr val="tx1"/>
+            </a:solidFill>
+            <a:prstDash val="solid"/>
+            <a:headEnd type="triangle" w="med" len="med"/>
+            <a:tailEnd type="none" w="med" len="med"/>
+          </a:ln>
+        </p:spPr>
+        <p:style>
+          <a:lnRef idx="1">
+            <a:schemeClr val="accent1"/>
+          </a:lnRef>
+          <a:fillRef idx="0">
+            <a:schemeClr val="accent1"/>
+          </a:fillRef>
+          <a:effectRef idx="0">
+            <a:schemeClr val="accent1"/>
+          </a:effectRef>
+          <a:fontRef idx="minor">
+            <a:schemeClr val="tx1"/>
+          </a:fontRef>
+        </p:style>
+      </p:cxnSp>
+      <p:sp>
+        <p:nvSpPr>
+          <p:cNvPr id="96" name="사각형: 둥근 모서리 114">
+            <a:extLst>
+              <a:ext uri="{FF2B5EF4-FFF2-40B4-BE49-F238E27FC236}">
+                <a16:creationId xmlns:a16="http://schemas.microsoft.com/office/drawing/2014/main" id="{CAF42AFE-6D81-11B2-1326-4BAAD5D26040}"/>
               </a:ext>
             </a:extLst>
           </p:cNvPr>
@@ -43212,302 +44381,8 @@
         </p:nvSpPr>
         <p:spPr>
           <a:xfrm>
-            <a:off x="4394143" y="4343733"/>
-            <a:ext cx="1276177" cy="383228"/>
-          </a:xfrm>
-          <a:prstGeom prst="roundRect">
-            <a:avLst>
-              <a:gd name="adj" fmla="val 14292"/>
-            </a:avLst>
-          </a:prstGeom>
-          <a:solidFill>
-            <a:schemeClr val="bg1">
-              <a:lumMod val="95000"/>
-            </a:schemeClr>
-          </a:solidFill>
-          <a:ln w="12700"/>
-        </p:spPr>
-        <p:style>
-          <a:lnRef idx="2">
-            <a:schemeClr val="dk1"/>
-          </a:lnRef>
-          <a:fillRef idx="1">
-            <a:schemeClr val="lt1"/>
-          </a:fillRef>
-          <a:effectRef idx="0">
-            <a:schemeClr val="dk1"/>
-          </a:effectRef>
-          <a:fontRef idx="minor">
-            <a:schemeClr val="dk1"/>
-          </a:fontRef>
-        </p:style>
-        <p:txBody>
-          <a:bodyPr rtlCol="0" anchor="ctr"/>
-          <a:lstStyle/>
-          <a:p>
-            <a:pPr algn="ctr"/>
-            <a:r>
-              <a:rPr lang="en-US" altLang="ko-KR" sz="1000"/>
-              <a:t>NVIDIA</a:t>
-            </a:r>
-          </a:p>
-          <a:p>
-            <a:pPr algn="ctr"/>
-            <a:r>
-              <a:rPr lang="en-US" altLang="ko-KR" sz="1000"/>
-              <a:t>GPU 1</a:t>
-            </a:r>
-            <a:endParaRPr lang="en-US" altLang="ko-KR" sz="1000" dirty="0"/>
-          </a:p>
-        </p:txBody>
-      </p:sp>
-      <p:sp>
-        <p:nvSpPr>
-          <p:cNvPr id="19" name="사각형: 둥근 모서리 114">
-            <a:extLst>
-              <a:ext uri="{FF2B5EF4-FFF2-40B4-BE49-F238E27FC236}">
-                <a16:creationId xmlns:a16="http://schemas.microsoft.com/office/drawing/2014/main" id="{D04840AA-8BCE-C2C8-153F-9874E47AEB61}"/>
-              </a:ext>
-            </a:extLst>
-          </p:cNvPr>
-          <p:cNvSpPr/>
-          <p:nvPr/>
-        </p:nvSpPr>
-        <p:spPr>
-          <a:xfrm>
-            <a:off x="4394143" y="3306888"/>
-            <a:ext cx="1276177" cy="383228"/>
-          </a:xfrm>
-          <a:prstGeom prst="roundRect">
-            <a:avLst>
-              <a:gd name="adj" fmla="val 14292"/>
-            </a:avLst>
-          </a:prstGeom>
-          <a:solidFill>
-            <a:schemeClr val="bg1">
-              <a:lumMod val="95000"/>
-            </a:schemeClr>
-          </a:solidFill>
-          <a:ln w="12700"/>
-        </p:spPr>
-        <p:style>
-          <a:lnRef idx="2">
-            <a:schemeClr val="dk1"/>
-          </a:lnRef>
-          <a:fillRef idx="1">
-            <a:schemeClr val="lt1"/>
-          </a:fillRef>
-          <a:effectRef idx="0">
-            <a:schemeClr val="dk1"/>
-          </a:effectRef>
-          <a:fontRef idx="minor">
-            <a:schemeClr val="dk1"/>
-          </a:fontRef>
-        </p:style>
-        <p:txBody>
-          <a:bodyPr rtlCol="0" anchor="ctr"/>
-          <a:lstStyle/>
-          <a:p>
-            <a:pPr algn="ctr"/>
-            <a:r>
-              <a:rPr lang="en-US" altLang="ko-KR" sz="1000"/>
-              <a:t>Compute Instance</a:t>
-            </a:r>
-            <a:endParaRPr lang="en-US" altLang="ko-KR" sz="1000" dirty="0"/>
-          </a:p>
-        </p:txBody>
-      </p:sp>
-      <p:sp>
-        <p:nvSpPr>
-          <p:cNvPr id="20" name="사각형: 둥근 모서리 114">
-            <a:extLst>
-              <a:ext uri="{FF2B5EF4-FFF2-40B4-BE49-F238E27FC236}">
-                <a16:creationId xmlns:a16="http://schemas.microsoft.com/office/drawing/2014/main" id="{C1E2AD8F-7E2E-9EA8-408C-34DEFDC48E20}"/>
-              </a:ext>
-            </a:extLst>
-          </p:cNvPr>
-          <p:cNvSpPr/>
-          <p:nvPr/>
-        </p:nvSpPr>
-        <p:spPr>
-          <a:xfrm>
-            <a:off x="4394142" y="3826997"/>
-            <a:ext cx="1276177" cy="383228"/>
-          </a:xfrm>
-          <a:prstGeom prst="roundRect">
-            <a:avLst>
-              <a:gd name="adj" fmla="val 14292"/>
-            </a:avLst>
-          </a:prstGeom>
-          <a:solidFill>
-            <a:schemeClr val="bg1">
-              <a:lumMod val="95000"/>
-            </a:schemeClr>
-          </a:solidFill>
-          <a:ln w="12700"/>
-        </p:spPr>
-        <p:style>
-          <a:lnRef idx="2">
-            <a:schemeClr val="dk1"/>
-          </a:lnRef>
-          <a:fillRef idx="1">
-            <a:schemeClr val="lt1"/>
-          </a:fillRef>
-          <a:effectRef idx="0">
-            <a:schemeClr val="dk1"/>
-          </a:effectRef>
-          <a:fontRef idx="minor">
-            <a:schemeClr val="dk1"/>
-          </a:fontRef>
-        </p:style>
-        <p:txBody>
-          <a:bodyPr rtlCol="0" anchor="ctr"/>
-          <a:lstStyle/>
-          <a:p>
-            <a:pPr algn="ctr"/>
-            <a:r>
-              <a:rPr lang="en-US" altLang="ko-KR" sz="1000"/>
-              <a:t>GPU Instance </a:t>
-            </a:r>
-            <a:endParaRPr lang="en-US" altLang="ko-KR" sz="1000" dirty="0"/>
-          </a:p>
-        </p:txBody>
-      </p:sp>
-      <p:sp>
-        <p:nvSpPr>
-          <p:cNvPr id="24" name="사각형: 둥근 모서리 114">
-            <a:extLst>
-              <a:ext uri="{FF2B5EF4-FFF2-40B4-BE49-F238E27FC236}">
-                <a16:creationId xmlns:a16="http://schemas.microsoft.com/office/drawing/2014/main" id="{B8CF3FC4-65BE-42AC-DB7F-8FA587E0C213}"/>
-              </a:ext>
-            </a:extLst>
-          </p:cNvPr>
-          <p:cNvSpPr/>
-          <p:nvPr/>
-        </p:nvSpPr>
-        <p:spPr>
-          <a:xfrm>
-            <a:off x="179513" y="1996804"/>
-            <a:ext cx="2451551" cy="383228"/>
-          </a:xfrm>
-          <a:prstGeom prst="roundRect">
-            <a:avLst>
-              <a:gd name="adj" fmla="val 12429"/>
-            </a:avLst>
-          </a:prstGeom>
-          <a:solidFill>
-            <a:schemeClr val="bg1">
-              <a:lumMod val="95000"/>
-            </a:schemeClr>
-          </a:solidFill>
-          <a:ln w="12700"/>
-        </p:spPr>
-        <p:style>
-          <a:lnRef idx="2">
-            <a:schemeClr val="dk1"/>
-          </a:lnRef>
-          <a:fillRef idx="1">
-            <a:schemeClr val="lt1"/>
-          </a:fillRef>
-          <a:effectRef idx="0">
-            <a:schemeClr val="dk1"/>
-          </a:effectRef>
-          <a:fontRef idx="minor">
-            <a:schemeClr val="dk1"/>
-          </a:fontRef>
-        </p:style>
-        <p:txBody>
-          <a:bodyPr rtlCol="0" anchor="ctr"/>
-          <a:lstStyle/>
-          <a:p>
-            <a:pPr algn="ctr"/>
-            <a:r>
-              <a:rPr lang="en-US" altLang="ko-KR" sz="1000"/>
-              <a:t>/dev/nvidia0</a:t>
-            </a:r>
-            <a:endParaRPr lang="en-US" altLang="ko-KR" sz="1000" dirty="0"/>
-          </a:p>
-        </p:txBody>
-      </p:sp>
-      <p:sp>
-        <p:nvSpPr>
-          <p:cNvPr id="33" name="사각형: 둥근 모서리 114">
-            <a:extLst>
-              <a:ext uri="{FF2B5EF4-FFF2-40B4-BE49-F238E27FC236}">
-                <a16:creationId xmlns:a16="http://schemas.microsoft.com/office/drawing/2014/main" id="{9E5FB8CF-6186-A03C-C926-F30AA711695B}"/>
-              </a:ext>
-            </a:extLst>
-          </p:cNvPr>
-          <p:cNvSpPr/>
-          <p:nvPr/>
-        </p:nvSpPr>
-        <p:spPr>
-          <a:xfrm>
-            <a:off x="1435486" y="1526478"/>
-            <a:ext cx="1195578" cy="383228"/>
-          </a:xfrm>
-          <a:prstGeom prst="roundRect">
-            <a:avLst>
-              <a:gd name="adj" fmla="val 7242"/>
-            </a:avLst>
-          </a:prstGeom>
-          <a:solidFill>
-            <a:schemeClr val="bg1">
-              <a:lumMod val="95000"/>
-            </a:schemeClr>
-          </a:solidFill>
-          <a:ln w="12700"/>
-        </p:spPr>
-        <p:style>
-          <a:lnRef idx="2">
-            <a:schemeClr val="dk1"/>
-          </a:lnRef>
-          <a:fillRef idx="1">
-            <a:schemeClr val="lt1"/>
-          </a:fillRef>
-          <a:effectRef idx="0">
-            <a:schemeClr val="dk1"/>
-          </a:effectRef>
-          <a:fontRef idx="minor">
-            <a:schemeClr val="dk1"/>
-          </a:fontRef>
-        </p:style>
-        <p:txBody>
-          <a:bodyPr rtlCol="0" anchor="ctr"/>
-          <a:lstStyle/>
-          <a:p>
-            <a:pPr algn="ctr"/>
-            <a:r>
-              <a:rPr lang="en-US" altLang="ko-KR" sz="1000"/>
-              <a:t>/dev/nvidia-caps</a:t>
-            </a:r>
-            <a:br>
-              <a:rPr lang="en-US" altLang="ko-KR" sz="1000"/>
-            </a:br>
-            <a:r>
-              <a:rPr lang="en-US" altLang="ko-KR" sz="1000"/>
-              <a:t>/nvidia-caps21</a:t>
-            </a:r>
-            <a:endParaRPr lang="en-US" altLang="ko-KR" sz="1000" dirty="0"/>
-          </a:p>
-        </p:txBody>
-      </p:sp>
-      <p:sp>
-        <p:nvSpPr>
-          <p:cNvPr id="35" name="사각형: 둥근 모서리 114">
-            <a:extLst>
-              <a:ext uri="{FF2B5EF4-FFF2-40B4-BE49-F238E27FC236}">
-                <a16:creationId xmlns:a16="http://schemas.microsoft.com/office/drawing/2014/main" id="{03D0486A-CFBE-1B8F-2277-0E2BE95BFAE8}"/>
-              </a:ext>
-            </a:extLst>
-          </p:cNvPr>
-          <p:cNvSpPr/>
-          <p:nvPr/>
-        </p:nvSpPr>
-        <p:spPr>
-          <a:xfrm>
-            <a:off x="2874388" y="60026"/>
-            <a:ext cx="3976986" cy="2464513"/>
+            <a:off x="6314971" y="60026"/>
+            <a:ext cx="2492125" cy="2464513"/>
           </a:xfrm>
           <a:prstGeom prst="roundRect">
             <a:avLst>
@@ -43537,7 +44412,7 @@
             <a:pPr algn="ctr"/>
             <a:r>
               <a:rPr lang="en-US" altLang="ko-KR" sz="1000" b="1"/>
-              <a:t>Pod B</a:t>
+              <a:t>Pod A</a:t>
             </a:r>
             <a:endParaRPr lang="ko-KR" altLang="en-US" sz="1000" b="1" dirty="0">
               <a:solidFill>
@@ -43551,10 +44426,10 @@
       </p:sp>
       <p:sp>
         <p:nvSpPr>
-          <p:cNvPr id="37" name="사각형: 둥근 모서리 114">
-            <a:extLst>
-              <a:ext uri="{FF2B5EF4-FFF2-40B4-BE49-F238E27FC236}">
-                <a16:creationId xmlns:a16="http://schemas.microsoft.com/office/drawing/2014/main" id="{93903880-EA57-8D38-2847-4EF9A8399083}"/>
+          <p:cNvPr id="97" name="사각형: 둥근 모서리 114">
+            <a:extLst>
+              <a:ext uri="{FF2B5EF4-FFF2-40B4-BE49-F238E27FC236}">
+                <a16:creationId xmlns:a16="http://schemas.microsoft.com/office/drawing/2014/main" id="{8F698185-2627-2867-DF2C-717BB73F4B61}"/>
               </a:ext>
             </a:extLst>
           </p:cNvPr>
@@ -43563,8 +44438,8 @@
         </p:nvSpPr>
         <p:spPr>
           <a:xfrm>
-            <a:off x="2924149" y="336814"/>
-            <a:ext cx="3880842" cy="2141343"/>
+            <a:off x="6364733" y="336814"/>
+            <a:ext cx="2385214" cy="2141343"/>
           </a:xfrm>
           <a:prstGeom prst="roundRect">
             <a:avLst>
@@ -43594,7 +44469,7 @@
             <a:pPr algn="ctr"/>
             <a:r>
               <a:rPr lang="en-US" altLang="ko-KR" sz="1000" b="1"/>
-              <a:t>Container B</a:t>
+              <a:t>Container A</a:t>
             </a:r>
             <a:endParaRPr lang="ko-KR" altLang="en-US" sz="1000" b="1" dirty="0">
               <a:solidFill>
@@ -43608,10 +44483,10 @@
       </p:sp>
       <p:sp>
         <p:nvSpPr>
-          <p:cNvPr id="39" name="사각형: 둥근 모서리 114">
-            <a:extLst>
-              <a:ext uri="{FF2B5EF4-FFF2-40B4-BE49-F238E27FC236}">
-                <a16:creationId xmlns:a16="http://schemas.microsoft.com/office/drawing/2014/main" id="{6E34BF00-A8B7-76B0-E8C6-35C6A67EE23C}"/>
+          <p:cNvPr id="98" name="사각형: 둥근 모서리 114">
+            <a:extLst>
+              <a:ext uri="{FF2B5EF4-FFF2-40B4-BE49-F238E27FC236}">
+                <a16:creationId xmlns:a16="http://schemas.microsoft.com/office/drawing/2014/main" id="{9F65E0BD-04F1-4AC3-D943-DEF7C293E46A}"/>
               </a:ext>
             </a:extLst>
           </p:cNvPr>
@@ -43620,12 +44495,190 @@
         </p:nvSpPr>
         <p:spPr>
           <a:xfrm>
-            <a:off x="3009996" y="1526478"/>
-            <a:ext cx="1195578" cy="383228"/>
+            <a:off x="6450579" y="1526478"/>
+            <a:ext cx="1066284" cy="383228"/>
           </a:xfrm>
           <a:prstGeom prst="roundRect">
             <a:avLst>
               <a:gd name="adj" fmla="val 7242"/>
+            </a:avLst>
+          </a:prstGeom>
+          <a:solidFill>
+            <a:schemeClr val="accent1">
+              <a:lumMod val="20000"/>
+              <a:lumOff val="80000"/>
+            </a:schemeClr>
+          </a:solidFill>
+          <a:ln w="12700"/>
+        </p:spPr>
+        <p:style>
+          <a:lnRef idx="2">
+            <a:schemeClr val="dk1"/>
+          </a:lnRef>
+          <a:fillRef idx="1">
+            <a:schemeClr val="lt1"/>
+          </a:fillRef>
+          <a:effectRef idx="0">
+            <a:schemeClr val="dk1"/>
+          </a:effectRef>
+          <a:fontRef idx="minor">
+            <a:schemeClr val="dk1"/>
+          </a:fontRef>
+        </p:style>
+        <p:txBody>
+          <a:bodyPr rtlCol="0" anchor="ctr"/>
+          <a:lstStyle/>
+          <a:p>
+            <a:pPr algn="ctr"/>
+            <a:r>
+              <a:rPr lang="en-US" altLang="ko-KR" sz="900"/>
+              <a:t>/dev/nvidia-caps</a:t>
+            </a:r>
+            <a:br>
+              <a:rPr lang="en-US" altLang="ko-KR" sz="900"/>
+            </a:br>
+            <a:r>
+              <a:rPr lang="en-US" altLang="ko-KR" sz="900"/>
+              <a:t>/nvidia-caps84</a:t>
+            </a:r>
+            <a:endParaRPr lang="en-US" altLang="ko-KR" sz="900" dirty="0"/>
+          </a:p>
+        </p:txBody>
+      </p:sp>
+      <p:sp>
+        <p:nvSpPr>
+          <p:cNvPr id="99" name="사각형: 둥근 모서리 114">
+            <a:extLst>
+              <a:ext uri="{FF2B5EF4-FFF2-40B4-BE49-F238E27FC236}">
+                <a16:creationId xmlns:a16="http://schemas.microsoft.com/office/drawing/2014/main" id="{0635ADC0-7F28-5896-230A-C9A1CD04945D}"/>
+              </a:ext>
+            </a:extLst>
+          </p:cNvPr>
+          <p:cNvSpPr/>
+          <p:nvPr/>
+        </p:nvSpPr>
+        <p:spPr>
+          <a:xfrm>
+            <a:off x="6450578" y="1056152"/>
+            <a:ext cx="2174756" cy="383228"/>
+          </a:xfrm>
+          <a:prstGeom prst="roundRect">
+            <a:avLst>
+              <a:gd name="adj" fmla="val 7242"/>
+            </a:avLst>
+          </a:prstGeom>
+          <a:solidFill>
+            <a:schemeClr val="bg2">
+              <a:lumMod val="90000"/>
+            </a:schemeClr>
+          </a:solidFill>
+          <a:ln w="12700"/>
+        </p:spPr>
+        <p:style>
+          <a:lnRef idx="2">
+            <a:schemeClr val="dk1"/>
+          </a:lnRef>
+          <a:fillRef idx="1">
+            <a:schemeClr val="lt1"/>
+          </a:fillRef>
+          <a:effectRef idx="0">
+            <a:schemeClr val="dk1"/>
+          </a:effectRef>
+          <a:fontRef idx="minor">
+            <a:schemeClr val="dk1"/>
+          </a:fontRef>
+        </p:style>
+        <p:txBody>
+          <a:bodyPr rtlCol="0" anchor="ctr"/>
+          <a:lstStyle/>
+          <a:p>
+            <a:pPr algn="ctr"/>
+            <a:r>
+              <a:rPr lang="en-US" altLang="ko-KR" sz="900"/>
+              <a:t>NVIDIA CUDA Lib/Toolkit</a:t>
+            </a:r>
+            <a:endParaRPr lang="en-US" altLang="ko-KR" sz="900" dirty="0"/>
+          </a:p>
+        </p:txBody>
+      </p:sp>
+      <p:sp>
+        <p:nvSpPr>
+          <p:cNvPr id="100" name="사각형: 둥근 모서리 114">
+            <a:extLst>
+              <a:ext uri="{FF2B5EF4-FFF2-40B4-BE49-F238E27FC236}">
+                <a16:creationId xmlns:a16="http://schemas.microsoft.com/office/drawing/2014/main" id="{E3EECF0D-B8C6-83D4-9B2B-1411291BF65E}"/>
+              </a:ext>
+            </a:extLst>
+          </p:cNvPr>
+          <p:cNvSpPr/>
+          <p:nvPr/>
+        </p:nvSpPr>
+        <p:spPr>
+          <a:xfrm>
+            <a:off x="6450577" y="610481"/>
+            <a:ext cx="2174756" cy="383228"/>
+          </a:xfrm>
+          <a:prstGeom prst="roundRect">
+            <a:avLst>
+              <a:gd name="adj" fmla="val 7242"/>
+            </a:avLst>
+          </a:prstGeom>
+          <a:ln w="12700"/>
+        </p:spPr>
+        <p:style>
+          <a:lnRef idx="2">
+            <a:schemeClr val="dk1"/>
+          </a:lnRef>
+          <a:fillRef idx="1">
+            <a:schemeClr val="lt1"/>
+          </a:fillRef>
+          <a:effectRef idx="0">
+            <a:schemeClr val="dk1"/>
+          </a:effectRef>
+          <a:fontRef idx="minor">
+            <a:schemeClr val="dk1"/>
+          </a:fontRef>
+        </p:style>
+        <p:txBody>
+          <a:bodyPr rtlCol="0" anchor="ctr"/>
+          <a:lstStyle/>
+          <a:p>
+            <a:pPr algn="ctr"/>
+            <a:r>
+              <a:rPr lang="en-US" altLang="ko-KR" sz="900"/>
+              <a:t>App with </a:t>
+            </a:r>
+            <a:br>
+              <a:rPr lang="en-US" altLang="ko-KR" sz="900"/>
+            </a:br>
+            <a:r>
+              <a:rPr lang="en-US" altLang="ko-KR" sz="900"/>
+              <a:t>NVIDIA_VISIBLE_DEVICES Env  </a:t>
+            </a:r>
+            <a:endParaRPr lang="en-US" altLang="ko-KR" sz="900" dirty="0"/>
+          </a:p>
+        </p:txBody>
+      </p:sp>
+      <p:sp>
+        <p:nvSpPr>
+          <p:cNvPr id="101" name="사각형: 둥근 모서리 114">
+            <a:extLst>
+              <a:ext uri="{FF2B5EF4-FFF2-40B4-BE49-F238E27FC236}">
+                <a16:creationId xmlns:a16="http://schemas.microsoft.com/office/drawing/2014/main" id="{51B83E2A-D63D-A64E-975D-34F6AB753267}"/>
+              </a:ext>
+            </a:extLst>
+          </p:cNvPr>
+          <p:cNvSpPr/>
+          <p:nvPr/>
+        </p:nvSpPr>
+        <p:spPr>
+          <a:xfrm>
+            <a:off x="6450579" y="1996804"/>
+            <a:ext cx="2186432" cy="383228"/>
+          </a:xfrm>
+          <a:prstGeom prst="roundRect">
+            <a:avLst>
+              <a:gd name="adj" fmla="val 12429"/>
             </a:avLst>
           </a:prstGeom>
           <a:solidFill>
@@ -43655,26 +44708,19 @@
           <a:p>
             <a:pPr algn="ctr"/>
             <a:r>
-              <a:rPr lang="en-US" altLang="ko-KR" sz="1000"/>
-              <a:t>/dev/nvidia-caps</a:t>
-            </a:r>
-            <a:br>
-              <a:rPr lang="en-US" altLang="ko-KR" sz="1000"/>
-            </a:br>
-            <a:r>
-              <a:rPr lang="en-US" altLang="ko-KR" sz="1000"/>
-              <a:t>/nvidia-caps30</a:t>
-            </a:r>
-            <a:endParaRPr lang="en-US" altLang="ko-KR" sz="1000" dirty="0"/>
-          </a:p>
-        </p:txBody>
-      </p:sp>
-      <p:sp>
-        <p:nvSpPr>
-          <p:cNvPr id="40" name="사각형: 둥근 모서리 114">
-            <a:extLst>
-              <a:ext uri="{FF2B5EF4-FFF2-40B4-BE49-F238E27FC236}">
-                <a16:creationId xmlns:a16="http://schemas.microsoft.com/office/drawing/2014/main" id="{53B805E3-C8F5-5F6B-F293-18C9DEDA198C}"/>
+              <a:rPr lang="en-US" altLang="ko-KR" sz="900"/>
+              <a:t>/dev/nvidia1</a:t>
+            </a:r>
+            <a:endParaRPr lang="en-US" altLang="ko-KR" sz="900" dirty="0"/>
+          </a:p>
+        </p:txBody>
+      </p:sp>
+      <p:sp>
+        <p:nvSpPr>
+          <p:cNvPr id="102" name="사각형: 둥근 모서리 114">
+            <a:extLst>
+              <a:ext uri="{FF2B5EF4-FFF2-40B4-BE49-F238E27FC236}">
+                <a16:creationId xmlns:a16="http://schemas.microsoft.com/office/drawing/2014/main" id="{7E9F3259-0B3A-08CA-3861-3F84FAA9BBC0}"/>
               </a:ext>
             </a:extLst>
           </p:cNvPr>
@@ -43683,8 +44729,8 @@
         </p:nvSpPr>
         <p:spPr>
           <a:xfrm>
-            <a:off x="3009994" y="1056152"/>
-            <a:ext cx="3707524" cy="383228"/>
+            <a:off x="7560769" y="1526478"/>
+            <a:ext cx="1066284" cy="383228"/>
           </a:xfrm>
           <a:prstGeom prst="roundRect">
             <a:avLst>
@@ -43692,8 +44738,9 @@
             </a:avLst>
           </a:prstGeom>
           <a:solidFill>
-            <a:schemeClr val="bg2">
-              <a:lumMod val="90000"/>
+            <a:schemeClr val="accent2">
+              <a:lumMod val="20000"/>
+              <a:lumOff val="80000"/>
             </a:schemeClr>
           </a:solidFill>
           <a:ln w="12700"/>
@@ -43719,7 +44766,14 @@
             <a:pPr algn="ctr"/>
             <a:r>
               <a:rPr lang="en-US" altLang="ko-KR" sz="900"/>
-              <a:t>NVIDIA CUDA Lib/Toolkit</a:t>
+              <a:t>/dev/nvidia-caps</a:t>
+            </a:r>
+            <a:br>
+              <a:rPr lang="en-US" altLang="ko-KR" sz="900"/>
+            </a:br>
+            <a:r>
+              <a:rPr lang="en-US" altLang="ko-KR" sz="900"/>
+              <a:t>/nvidia-caps85</a:t>
             </a:r>
             <a:endParaRPr lang="en-US" altLang="ko-KR" sz="900" dirty="0"/>
           </a:p>
@@ -43727,243 +44781,10 @@
       </p:sp>
       <p:sp>
         <p:nvSpPr>
-          <p:cNvPr id="41" name="사각형: 둥근 모서리 114">
-            <a:extLst>
-              <a:ext uri="{FF2B5EF4-FFF2-40B4-BE49-F238E27FC236}">
-                <a16:creationId xmlns:a16="http://schemas.microsoft.com/office/drawing/2014/main" id="{2E144784-2DC1-0CC5-AE67-82CB64FD4DF7}"/>
-              </a:ext>
-            </a:extLst>
-          </p:cNvPr>
-          <p:cNvSpPr/>
-          <p:nvPr/>
-        </p:nvSpPr>
-        <p:spPr>
-          <a:xfrm>
-            <a:off x="3009994" y="610481"/>
-            <a:ext cx="3707524" cy="383228"/>
-          </a:xfrm>
-          <a:prstGeom prst="roundRect">
-            <a:avLst>
-              <a:gd name="adj" fmla="val 7242"/>
-            </a:avLst>
-          </a:prstGeom>
-          <a:ln w="12700"/>
-        </p:spPr>
-        <p:style>
-          <a:lnRef idx="2">
-            <a:schemeClr val="dk1"/>
-          </a:lnRef>
-          <a:fillRef idx="1">
-            <a:schemeClr val="lt1"/>
-          </a:fillRef>
-          <a:effectRef idx="0">
-            <a:schemeClr val="dk1"/>
-          </a:effectRef>
-          <a:fontRef idx="minor">
-            <a:schemeClr val="dk1"/>
-          </a:fontRef>
-        </p:style>
-        <p:txBody>
-          <a:bodyPr rtlCol="0" anchor="ctr"/>
-          <a:lstStyle/>
-          <a:p>
-            <a:pPr algn="ctr"/>
-            <a:r>
-              <a:rPr lang="en-US" altLang="ko-KR" sz="900"/>
-              <a:t>App with NVIDIA_VISIBLE_DEVICES Env  </a:t>
-            </a:r>
-            <a:endParaRPr lang="en-US" altLang="ko-KR" sz="900" dirty="0"/>
-          </a:p>
-        </p:txBody>
-      </p:sp>
-      <p:sp>
-        <p:nvSpPr>
-          <p:cNvPr id="42" name="사각형: 둥근 모서리 114">
-            <a:extLst>
-              <a:ext uri="{FF2B5EF4-FFF2-40B4-BE49-F238E27FC236}">
-                <a16:creationId xmlns:a16="http://schemas.microsoft.com/office/drawing/2014/main" id="{86CDFBC8-FF87-A17B-26A0-A6E739193F68}"/>
-              </a:ext>
-            </a:extLst>
-          </p:cNvPr>
-          <p:cNvSpPr/>
-          <p:nvPr/>
-        </p:nvSpPr>
-        <p:spPr>
-          <a:xfrm>
-            <a:off x="3009995" y="1996804"/>
-            <a:ext cx="3707523" cy="383228"/>
-          </a:xfrm>
-          <a:prstGeom prst="roundRect">
-            <a:avLst>
-              <a:gd name="adj" fmla="val 12429"/>
-            </a:avLst>
-          </a:prstGeom>
-          <a:solidFill>
-            <a:schemeClr val="bg1">
-              <a:lumMod val="95000"/>
-            </a:schemeClr>
-          </a:solidFill>
-          <a:ln w="12700"/>
-        </p:spPr>
-        <p:style>
-          <a:lnRef idx="2">
-            <a:schemeClr val="dk1"/>
-          </a:lnRef>
-          <a:fillRef idx="1">
-            <a:schemeClr val="lt1"/>
-          </a:fillRef>
-          <a:effectRef idx="0">
-            <a:schemeClr val="dk1"/>
-          </a:effectRef>
-          <a:fontRef idx="minor">
-            <a:schemeClr val="dk1"/>
-          </a:fontRef>
-        </p:style>
-        <p:txBody>
-          <a:bodyPr rtlCol="0" anchor="ctr"/>
-          <a:lstStyle/>
-          <a:p>
-            <a:pPr algn="ctr"/>
-            <a:r>
-              <a:rPr lang="en-US" altLang="ko-KR" sz="1000"/>
-              <a:t>/dev/nvidia0</a:t>
-            </a:r>
-            <a:endParaRPr lang="en-US" altLang="ko-KR" sz="1000" dirty="0"/>
-          </a:p>
-        </p:txBody>
-      </p:sp>
-      <p:sp>
-        <p:nvSpPr>
-          <p:cNvPr id="43" name="사각형: 둥근 모서리 114">
-            <a:extLst>
-              <a:ext uri="{FF2B5EF4-FFF2-40B4-BE49-F238E27FC236}">
-                <a16:creationId xmlns:a16="http://schemas.microsoft.com/office/drawing/2014/main" id="{F5F466C6-795B-4A78-3DDD-7B26CAC1DD75}"/>
-              </a:ext>
-            </a:extLst>
-          </p:cNvPr>
-          <p:cNvSpPr/>
-          <p:nvPr/>
-        </p:nvSpPr>
-        <p:spPr>
-          <a:xfrm>
-            <a:off x="4265968" y="1526478"/>
-            <a:ext cx="1195578" cy="383228"/>
-          </a:xfrm>
-          <a:prstGeom prst="roundRect">
-            <a:avLst>
-              <a:gd name="adj" fmla="val 7242"/>
-            </a:avLst>
-          </a:prstGeom>
-          <a:solidFill>
-            <a:schemeClr val="bg1">
-              <a:lumMod val="95000"/>
-            </a:schemeClr>
-          </a:solidFill>
-          <a:ln w="12700"/>
-        </p:spPr>
-        <p:style>
-          <a:lnRef idx="2">
-            <a:schemeClr val="dk1"/>
-          </a:lnRef>
-          <a:fillRef idx="1">
-            <a:schemeClr val="lt1"/>
-          </a:fillRef>
-          <a:effectRef idx="0">
-            <a:schemeClr val="dk1"/>
-          </a:effectRef>
-          <a:fontRef idx="minor">
-            <a:schemeClr val="dk1"/>
-          </a:fontRef>
-        </p:style>
-        <p:txBody>
-          <a:bodyPr rtlCol="0" anchor="ctr"/>
-          <a:lstStyle/>
-          <a:p>
-            <a:pPr algn="ctr"/>
-            <a:r>
-              <a:rPr lang="en-US" altLang="ko-KR" sz="1000"/>
-              <a:t>/dev/nvidia-caps</a:t>
-            </a:r>
-            <a:br>
-              <a:rPr lang="en-US" altLang="ko-KR" sz="1000"/>
-            </a:br>
-            <a:r>
-              <a:rPr lang="en-US" altLang="ko-KR" sz="1000"/>
-              <a:t>/nvidia-caps31</a:t>
-            </a:r>
-            <a:endParaRPr lang="en-US" altLang="ko-KR" sz="1000" dirty="0"/>
-          </a:p>
-        </p:txBody>
-      </p:sp>
-      <p:sp>
-        <p:nvSpPr>
-          <p:cNvPr id="44" name="사각형: 둥근 모서리 114">
-            <a:extLst>
-              <a:ext uri="{FF2B5EF4-FFF2-40B4-BE49-F238E27FC236}">
-                <a16:creationId xmlns:a16="http://schemas.microsoft.com/office/drawing/2014/main" id="{270FE9AE-BB98-C842-FB54-9F53F173CD04}"/>
-              </a:ext>
-            </a:extLst>
-          </p:cNvPr>
-          <p:cNvSpPr/>
-          <p:nvPr/>
-        </p:nvSpPr>
-        <p:spPr>
-          <a:xfrm>
-            <a:off x="5521940" y="1526478"/>
-            <a:ext cx="1195578" cy="383228"/>
-          </a:xfrm>
-          <a:prstGeom prst="roundRect">
-            <a:avLst>
-              <a:gd name="adj" fmla="val 7242"/>
-            </a:avLst>
-          </a:prstGeom>
-          <a:solidFill>
-            <a:schemeClr val="bg1">
-              <a:lumMod val="95000"/>
-            </a:schemeClr>
-          </a:solidFill>
-          <a:ln w="12700"/>
-        </p:spPr>
-        <p:style>
-          <a:lnRef idx="2">
-            <a:schemeClr val="dk1"/>
-          </a:lnRef>
-          <a:fillRef idx="1">
-            <a:schemeClr val="lt1"/>
-          </a:fillRef>
-          <a:effectRef idx="0">
-            <a:schemeClr val="dk1"/>
-          </a:effectRef>
-          <a:fontRef idx="minor">
-            <a:schemeClr val="dk1"/>
-          </a:fontRef>
-        </p:style>
-        <p:txBody>
-          <a:bodyPr rtlCol="0" anchor="ctr"/>
-          <a:lstStyle/>
-          <a:p>
-            <a:pPr algn="ctr"/>
-            <a:r>
-              <a:rPr lang="en-US" altLang="ko-KR" sz="1000"/>
-              <a:t>/dev/nvidia-caps</a:t>
-            </a:r>
-            <a:br>
-              <a:rPr lang="en-US" altLang="ko-KR" sz="1000"/>
-            </a:br>
-            <a:r>
-              <a:rPr lang="en-US" altLang="ko-KR" sz="1000"/>
-              <a:t>/nvidia-caps32</a:t>
-            </a:r>
-            <a:endParaRPr lang="en-US" altLang="ko-KR" sz="1000" dirty="0"/>
-          </a:p>
-        </p:txBody>
-      </p:sp>
-      <p:sp>
-        <p:nvSpPr>
-          <p:cNvPr id="45" name="TextBox 44">
-            <a:extLst>
-              <a:ext uri="{FF2B5EF4-FFF2-40B4-BE49-F238E27FC236}">
-                <a16:creationId xmlns:a16="http://schemas.microsoft.com/office/drawing/2014/main" id="{5323C595-5DF2-55DA-9D1B-02C0FAA6AE54}"/>
+          <p:cNvPr id="104" name="TextBox 103">
+            <a:extLst>
+              <a:ext uri="{FF2B5EF4-FFF2-40B4-BE49-F238E27FC236}">
+                <a16:creationId xmlns:a16="http://schemas.microsoft.com/office/drawing/2014/main" id="{6A1EAEC4-2096-6996-39AA-D0F068BB55AD}"/>
               </a:ext>
             </a:extLst>
           </p:cNvPr>
@@ -43972,8 +44793,8 @@
         </p:nvSpPr>
         <p:spPr>
           <a:xfrm>
-            <a:off x="7225845" y="266178"/>
-            <a:ext cx="1798090" cy="1569660"/>
+            <a:off x="5568412" y="3389521"/>
+            <a:ext cx="1618118" cy="1569660"/>
           </a:xfrm>
           <a:prstGeom prst="rect">
             <a:avLst/>
@@ -44034,7 +44855,7 @@
               <a:rPr lang="en-US" sz="800" kern="0" dirty="0">
                 <a:cs typeface="Al Bayan Plain" pitchFamily="2" charset="-78"/>
               </a:rPr>
-              <a:t>   name: poda</a:t>
+              <a:t>   name: podb</a:t>
             </a:r>
           </a:p>
           <a:p>
@@ -44056,27 +44877,34 @@
             </a:r>
           </a:p>
           <a:p>
+            <a:r>
+              <a:rPr lang="en-US" sz="800" kern="0" dirty="0">
+                <a:cs typeface="Al Bayan Plain" pitchFamily="2" charset="-78"/>
+              </a:rPr>
+              <a:t>     - name: </a:t>
+            </a:r>
+            <a:r>
+              <a:rPr lang="en-US" altLang="ko-KR" sz="800" kern="0" dirty="0">
+                <a:cs typeface="Al Bayan Plain" pitchFamily="2" charset="-78"/>
+              </a:rPr>
+              <a:t>containerb</a:t>
+            </a:r>
+            <a:endParaRPr lang="en-US" sz="800" kern="0" dirty="0">
+              <a:cs typeface="Al Bayan Plain" pitchFamily="2" charset="-78"/>
+            </a:endParaRPr>
+          </a:p>
+          <a:p>
             <a:pPr algn="l"/>
             <a:r>
               <a:rPr lang="en-US" sz="800" kern="0" dirty="0">
                 <a:cs typeface="Al Bayan Plain" pitchFamily="2" charset="-78"/>
               </a:rPr>
-              <a:t>     - name: containera</a:t>
-            </a:r>
-          </a:p>
-          <a:p>
-            <a:pPr algn="l"/>
-            <a:r>
-              <a:rPr lang="en-US" sz="800" kern="0" dirty="0">
-                <a:cs typeface="Al Bayan Plain" pitchFamily="2" charset="-78"/>
-              </a:rPr>
               <a:t>       resources:</a:t>
             </a:r>
           </a:p>
           <a:p>
-            <a:pPr algn="l"/>
-            <a:r>
-              <a:rPr lang="en-US" sz="800" kern="0" dirty="0">
+            <a:r>
+              <a:rPr lang="en-US" altLang="ko-KR" sz="800" kern="0" dirty="0">
                 <a:solidFill>
                   <a:srgbClr val="C00000"/>
                 </a:solidFill>
@@ -44086,9 +44914,8 @@
             </a:r>
           </a:p>
           <a:p>
-            <a:pPr algn="l"/>
-            <a:r>
-              <a:rPr lang="en-US" sz="800" kern="0" dirty="0">
+            <a:r>
+              <a:rPr lang="en-US" altLang="ko-KR" sz="800" kern="0" dirty="0">
                 <a:solidFill>
                   <a:srgbClr val="C00000"/>
                 </a:solidFill>
@@ -44097,22 +44924,22 @@
               <a:t>           </a:t>
             </a:r>
             <a:r>
-              <a:rPr lang="en-US" sz="800" kern="0" dirty="0" err="1">
+              <a:rPr lang="en-US" altLang="ko-KR" sz="800" kern="0" dirty="0" err="1">
                 <a:solidFill>
                   <a:srgbClr val="C00000"/>
                 </a:solidFill>
                 <a:cs typeface="Al Bayan Plain" pitchFamily="2" charset="-78"/>
               </a:rPr>
-              <a:t>nvidia.com/mig-4g.20b</a:t>
-            </a:r>
-            <a:r>
-              <a:rPr lang="en-US" sz="800" kern="0" dirty="0">
+              <a:t>nvidia.com/mig-2g.10b</a:t>
+            </a:r>
+            <a:r>
+              <a:rPr lang="en-US" altLang="ko-KR" sz="800" kern="0" dirty="0">
                 <a:solidFill>
                   <a:srgbClr val="C00000"/>
                 </a:solidFill>
                 <a:cs typeface="Al Bayan Plain" pitchFamily="2" charset="-78"/>
               </a:rPr>
-              <a:t>: 1</a:t>
+              <a:t>: 2</a:t>
             </a:r>
           </a:p>
           <a:p>
@@ -44143,7 +44970,7 @@
                 </a:solidFill>
                 <a:cs typeface="Al Bayan Plain" pitchFamily="2" charset="-78"/>
               </a:rPr>
-              <a:t>nvidia.com/mig-4g.20b</a:t>
+              <a:t>nvidia.com/mig-2g.10b</a:t>
             </a:r>
             <a:r>
               <a:rPr lang="en-US" altLang="ko-KR" sz="800" kern="0" dirty="0">
@@ -44152,31 +44979,175 @@
                 </a:solidFill>
                 <a:cs typeface="Al Bayan Plain" pitchFamily="2" charset="-78"/>
               </a:rPr>
-              <a:t>: 1</a:t>
+              <a:t>: 2</a:t>
             </a:r>
           </a:p>
         </p:txBody>
       </p:sp>
       <p:cxnSp>
         <p:nvCxnSpPr>
-          <p:cNvPr id="56" name="직선 연결선 17">
-            <a:extLst>
-              <a:ext uri="{FF2B5EF4-FFF2-40B4-BE49-F238E27FC236}">
-                <a16:creationId xmlns:a16="http://schemas.microsoft.com/office/drawing/2014/main" id="{9E39FF66-72F8-131E-384F-0BF689CC5C03}"/>
+          <p:cNvPr id="107" name="직선 연결선 17">
+            <a:extLst>
+              <a:ext uri="{FF2B5EF4-FFF2-40B4-BE49-F238E27FC236}">
+                <a16:creationId xmlns:a16="http://schemas.microsoft.com/office/drawing/2014/main" id="{4BEEEFC9-8ED5-45DE-4A0B-B078EF3DFA37}"/>
               </a:ext>
             </a:extLst>
           </p:cNvPr>
           <p:cNvCxnSpPr>
             <a:cxnSpLocks/>
-            <a:stCxn id="11" idx="2"/>
+            <a:stCxn id="75" idx="2"/>
+            <a:endCxn id="26" idx="0"/>
+          </p:cNvCxnSpPr>
+          <p:nvPr/>
+        </p:nvCxnSpPr>
+        <p:spPr>
+          <a:xfrm>
+            <a:off x="1266891" y="1439380"/>
+            <a:ext cx="698823" cy="1345185"/>
+          </a:xfrm>
+          <a:prstGeom prst="line">
+            <a:avLst/>
+          </a:prstGeom>
+          <a:ln w="12700">
+            <a:solidFill>
+              <a:schemeClr val="bg2">
+                <a:lumMod val="50000"/>
+              </a:schemeClr>
+            </a:solidFill>
+            <a:prstDash val="solid"/>
+          </a:ln>
+        </p:spPr>
+        <p:style>
+          <a:lnRef idx="1">
+            <a:schemeClr val="accent1"/>
+          </a:lnRef>
+          <a:fillRef idx="0">
+            <a:schemeClr val="accent1"/>
+          </a:fillRef>
+          <a:effectRef idx="0">
+            <a:schemeClr val="accent1"/>
+          </a:effectRef>
+          <a:fontRef idx="minor">
+            <a:schemeClr val="tx1"/>
+          </a:fontRef>
+        </p:style>
+      </p:cxnSp>
+      <p:cxnSp>
+        <p:nvCxnSpPr>
+          <p:cNvPr id="113" name="직선 연결선 17">
+            <a:extLst>
+              <a:ext uri="{FF2B5EF4-FFF2-40B4-BE49-F238E27FC236}">
+                <a16:creationId xmlns:a16="http://schemas.microsoft.com/office/drawing/2014/main" id="{675AA3C7-F90E-C72C-4BC5-D56FA5A5B6AD}"/>
+              </a:ext>
+            </a:extLst>
+          </p:cNvPr>
+          <p:cNvCxnSpPr>
+            <a:cxnSpLocks/>
+            <a:stCxn id="40" idx="2"/>
+            <a:endCxn id="26" idx="0"/>
+          </p:cNvCxnSpPr>
+          <p:nvPr/>
+        </p:nvCxnSpPr>
+        <p:spPr>
+          <a:xfrm flipH="1">
+            <a:off x="1965714" y="1439380"/>
+            <a:ext cx="2445883" cy="1345185"/>
+          </a:xfrm>
+          <a:prstGeom prst="line">
+            <a:avLst/>
+          </a:prstGeom>
+          <a:ln w="12700">
+            <a:solidFill>
+              <a:schemeClr val="bg2">
+                <a:lumMod val="50000"/>
+              </a:schemeClr>
+            </a:solidFill>
+            <a:prstDash val="solid"/>
+          </a:ln>
+        </p:spPr>
+        <p:style>
+          <a:lnRef idx="1">
+            <a:schemeClr val="accent1"/>
+          </a:lnRef>
+          <a:fillRef idx="0">
+            <a:schemeClr val="accent1"/>
+          </a:fillRef>
+          <a:effectRef idx="0">
+            <a:schemeClr val="accent1"/>
+          </a:effectRef>
+          <a:fontRef idx="minor">
+            <a:schemeClr val="tx1"/>
+          </a:fontRef>
+        </p:style>
+      </p:cxnSp>
+      <p:cxnSp>
+        <p:nvCxnSpPr>
+          <p:cNvPr id="116" name="직선 연결선 17">
+            <a:extLst>
+              <a:ext uri="{FF2B5EF4-FFF2-40B4-BE49-F238E27FC236}">
+                <a16:creationId xmlns:a16="http://schemas.microsoft.com/office/drawing/2014/main" id="{675421FB-B94D-C078-1151-95907404F92A}"/>
+              </a:ext>
+            </a:extLst>
+          </p:cNvPr>
+          <p:cNvCxnSpPr>
+            <a:cxnSpLocks/>
+            <a:stCxn id="99" idx="2"/>
+            <a:endCxn id="26" idx="0"/>
+          </p:cNvCxnSpPr>
+          <p:nvPr/>
+        </p:nvCxnSpPr>
+        <p:spPr>
+          <a:xfrm flipH="1">
+            <a:off x="1965714" y="1439380"/>
+            <a:ext cx="5572242" cy="1345185"/>
+          </a:xfrm>
+          <a:prstGeom prst="line">
+            <a:avLst/>
+          </a:prstGeom>
+          <a:ln w="12700">
+            <a:solidFill>
+              <a:schemeClr val="bg2">
+                <a:lumMod val="50000"/>
+              </a:schemeClr>
+            </a:solidFill>
+            <a:prstDash val="solid"/>
+          </a:ln>
+        </p:spPr>
+        <p:style>
+          <a:lnRef idx="1">
+            <a:schemeClr val="accent1"/>
+          </a:lnRef>
+          <a:fillRef idx="0">
+            <a:schemeClr val="accent1"/>
+          </a:fillRef>
+          <a:effectRef idx="0">
+            <a:schemeClr val="accent1"/>
+          </a:effectRef>
+          <a:fontRef idx="minor">
+            <a:schemeClr val="tx1"/>
+          </a:fontRef>
+        </p:style>
+      </p:cxnSp>
+      <p:cxnSp>
+        <p:nvCxnSpPr>
+          <p:cNvPr id="119" name="직선 연결선 17">
+            <a:extLst>
+              <a:ext uri="{FF2B5EF4-FFF2-40B4-BE49-F238E27FC236}">
+                <a16:creationId xmlns:a16="http://schemas.microsoft.com/office/drawing/2014/main" id="{CB7FBDE3-E718-0577-A9D0-7BE41064A37C}"/>
+              </a:ext>
+            </a:extLst>
+          </p:cNvPr>
+          <p:cNvCxnSpPr>
+            <a:cxnSpLocks/>
+            <a:stCxn id="24" idx="2"/>
             <a:endCxn id="12" idx="0"/>
           </p:cNvCxnSpPr>
           <p:nvPr/>
         </p:nvCxnSpPr>
         <p:spPr>
           <a:xfrm>
-            <a:off x="831009" y="4210225"/>
-            <a:ext cx="1404310" cy="133508"/>
+            <a:off x="1272730" y="2380032"/>
+            <a:ext cx="232502" cy="1963701"/>
           </a:xfrm>
           <a:prstGeom prst="line">
             <a:avLst/>
@@ -44185,7 +45156,7 @@
             <a:solidFill>
               <a:schemeClr val="tx1"/>
             </a:solidFill>
-            <a:prstDash val="dash"/>
+            <a:prstDash val="solid"/>
           </a:ln>
         </p:spPr>
         <p:style>
@@ -44205,24 +45176,24 @@
       </p:cxnSp>
       <p:cxnSp>
         <p:nvCxnSpPr>
-          <p:cNvPr id="60" name="직선 연결선 17">
-            <a:extLst>
-              <a:ext uri="{FF2B5EF4-FFF2-40B4-BE49-F238E27FC236}">
-                <a16:creationId xmlns:a16="http://schemas.microsoft.com/office/drawing/2014/main" id="{9A169D25-509E-6318-293D-851ECF92057B}"/>
+          <p:cNvPr id="122" name="직선 연결선 17">
+            <a:extLst>
+              <a:ext uri="{FF2B5EF4-FFF2-40B4-BE49-F238E27FC236}">
+                <a16:creationId xmlns:a16="http://schemas.microsoft.com/office/drawing/2014/main" id="{22F6FE0C-F4F8-FB2C-4BCF-72F215F83E56}"/>
               </a:ext>
             </a:extLst>
           </p:cNvPr>
           <p:cNvCxnSpPr>
             <a:cxnSpLocks/>
-            <a:stCxn id="16" idx="2"/>
+            <a:stCxn id="42" idx="2"/>
             <a:endCxn id="12" idx="0"/>
           </p:cNvCxnSpPr>
           <p:nvPr/>
         </p:nvCxnSpPr>
         <p:spPr>
           <a:xfrm flipH="1">
-            <a:off x="2235319" y="4210225"/>
-            <a:ext cx="708428" cy="133508"/>
+            <a:off x="1505232" y="2380032"/>
+            <a:ext cx="2908417" cy="1963701"/>
           </a:xfrm>
           <a:prstGeom prst="line">
             <a:avLst/>
@@ -44231,7 +45202,7 @@
             <a:solidFill>
               <a:schemeClr val="tx1"/>
             </a:solidFill>
-            <a:prstDash val="dash"/>
+            <a:prstDash val="solid"/>
           </a:ln>
         </p:spPr>
         <p:style>
@@ -44251,24 +45222,24 @@
       </p:cxnSp>
       <p:cxnSp>
         <p:nvCxnSpPr>
-          <p:cNvPr id="64" name="직선 연결선 17">
-            <a:extLst>
-              <a:ext uri="{FF2B5EF4-FFF2-40B4-BE49-F238E27FC236}">
-                <a16:creationId xmlns:a16="http://schemas.microsoft.com/office/drawing/2014/main" id="{0C13C9F1-3B17-AE6A-5E39-D369347AE3CB}"/>
+          <p:cNvPr id="125" name="직선 연결선 17">
+            <a:extLst>
+              <a:ext uri="{FF2B5EF4-FFF2-40B4-BE49-F238E27FC236}">
+                <a16:creationId xmlns:a16="http://schemas.microsoft.com/office/drawing/2014/main" id="{34B1B4B6-38CC-DF3F-12BF-8BF107BB8DCF}"/>
               </a:ext>
             </a:extLst>
           </p:cNvPr>
           <p:cNvCxnSpPr>
             <a:cxnSpLocks/>
-            <a:stCxn id="13" idx="2"/>
-            <a:endCxn id="11" idx="0"/>
+            <a:stCxn id="101" idx="2"/>
+            <a:endCxn id="18" idx="0"/>
           </p:cNvCxnSpPr>
           <p:nvPr/>
         </p:nvCxnSpPr>
         <p:spPr>
-          <a:xfrm>
-            <a:off x="828291" y="3690116"/>
-            <a:ext cx="2718" cy="136881"/>
+          <a:xfrm flipH="1">
+            <a:off x="3375178" y="2380032"/>
+            <a:ext cx="4168617" cy="1963701"/>
           </a:xfrm>
           <a:prstGeom prst="line">
             <a:avLst/>
@@ -44277,7 +45248,7 @@
             <a:solidFill>
               <a:schemeClr val="tx1"/>
             </a:solidFill>
-            <a:prstDash val="dash"/>
+            <a:prstDash val="solid"/>
           </a:ln>
         </p:spPr>
         <p:style>
@@ -44297,33 +45268,36 @@
       </p:cxnSp>
       <p:cxnSp>
         <p:nvCxnSpPr>
-          <p:cNvPr id="71" name="직선 연결선 17">
-            <a:extLst>
-              <a:ext uri="{FF2B5EF4-FFF2-40B4-BE49-F238E27FC236}">
-                <a16:creationId xmlns:a16="http://schemas.microsoft.com/office/drawing/2014/main" id="{4898AD93-491D-7696-D834-C84884EE62D8}"/>
+          <p:cNvPr id="129" name="직선 연결선 17">
+            <a:extLst>
+              <a:ext uri="{FF2B5EF4-FFF2-40B4-BE49-F238E27FC236}">
+                <a16:creationId xmlns:a16="http://schemas.microsoft.com/office/drawing/2014/main" id="{2B1F95D0-489E-D999-7680-E11B71BD8965}"/>
               </a:ext>
             </a:extLst>
           </p:cNvPr>
           <p:cNvCxnSpPr>
             <a:cxnSpLocks/>
-            <a:stCxn id="14" idx="2"/>
-            <a:endCxn id="16" idx="0"/>
+            <a:stCxn id="74" idx="2"/>
+            <a:endCxn id="11" idx="0"/>
           </p:cNvCxnSpPr>
           <p:nvPr/>
         </p:nvCxnSpPr>
         <p:spPr>
-          <a:xfrm>
-            <a:off x="2237581" y="3690116"/>
-            <a:ext cx="706166" cy="136881"/>
+          <a:xfrm flipH="1">
+            <a:off x="566345" y="1909706"/>
+            <a:ext cx="146311" cy="1917291"/>
           </a:xfrm>
           <a:prstGeom prst="line">
             <a:avLst/>
           </a:prstGeom>
           <a:ln w="12700">
             <a:solidFill>
-              <a:schemeClr val="tx1"/>
+              <a:schemeClr val="tx2">
+                <a:lumMod val="60000"/>
+                <a:lumOff val="40000"/>
+              </a:schemeClr>
             </a:solidFill>
-            <a:prstDash val="dash"/>
+            <a:prstDash val="solid"/>
           </a:ln>
         </p:spPr>
         <p:style>
@@ -44343,33 +45317,36 @@
       </p:cxnSp>
       <p:cxnSp>
         <p:nvCxnSpPr>
-          <p:cNvPr id="77" name="직선 연결선 17">
-            <a:extLst>
-              <a:ext uri="{FF2B5EF4-FFF2-40B4-BE49-F238E27FC236}">
-                <a16:creationId xmlns:a16="http://schemas.microsoft.com/office/drawing/2014/main" id="{0B67D6B1-CD7E-7193-912E-2B02EF1CD103}"/>
+          <p:cNvPr id="132" name="직선 연결선 17">
+            <a:extLst>
+              <a:ext uri="{FF2B5EF4-FFF2-40B4-BE49-F238E27FC236}">
+                <a16:creationId xmlns:a16="http://schemas.microsoft.com/office/drawing/2014/main" id="{23F7B28B-3DB5-AAF9-D16C-5744868FF662}"/>
               </a:ext>
             </a:extLst>
           </p:cNvPr>
           <p:cNvCxnSpPr>
             <a:cxnSpLocks/>
-            <a:stCxn id="15" idx="2"/>
-            <a:endCxn id="16" idx="0"/>
+            <a:stCxn id="33" idx="2"/>
+            <a:endCxn id="13" idx="0"/>
           </p:cNvCxnSpPr>
           <p:nvPr/>
         </p:nvCxnSpPr>
         <p:spPr>
           <a:xfrm flipH="1">
-            <a:off x="2943747" y="3690116"/>
-            <a:ext cx="706166" cy="136881"/>
+            <a:off x="564527" y="1909706"/>
+            <a:ext cx="1258319" cy="1397182"/>
           </a:xfrm>
           <a:prstGeom prst="line">
             <a:avLst/>
           </a:prstGeom>
           <a:ln w="12700">
             <a:solidFill>
-              <a:schemeClr val="tx1"/>
+              <a:schemeClr val="accent2">
+                <a:lumMod val="60000"/>
+                <a:lumOff val="40000"/>
+              </a:schemeClr>
             </a:solidFill>
-            <a:prstDash val="dash"/>
+            <a:prstDash val="solid"/>
           </a:ln>
         </p:spPr>
         <p:style>
@@ -44389,33 +45366,36 @@
       </p:cxnSp>
       <p:cxnSp>
         <p:nvCxnSpPr>
-          <p:cNvPr id="82" name="직선 연결선 17">
-            <a:extLst>
-              <a:ext uri="{FF2B5EF4-FFF2-40B4-BE49-F238E27FC236}">
-                <a16:creationId xmlns:a16="http://schemas.microsoft.com/office/drawing/2014/main" id="{E78ED4A4-5423-B21D-B216-A01DBF46384E}"/>
+          <p:cNvPr id="149" name="직선 연결선 17">
+            <a:extLst>
+              <a:ext uri="{FF2B5EF4-FFF2-40B4-BE49-F238E27FC236}">
+                <a16:creationId xmlns:a16="http://schemas.microsoft.com/office/drawing/2014/main" id="{4CC9B48A-3F99-0ACB-DA8B-EA6A4AB0F212}"/>
               </a:ext>
             </a:extLst>
           </p:cNvPr>
           <p:cNvCxnSpPr>
             <a:cxnSpLocks/>
-            <a:stCxn id="19" idx="2"/>
-            <a:endCxn id="20" idx="0"/>
+            <a:stCxn id="39" idx="2"/>
+            <a:endCxn id="16" idx="0"/>
           </p:cNvCxnSpPr>
           <p:nvPr/>
         </p:nvCxnSpPr>
         <p:spPr>
           <a:xfrm flipH="1">
-            <a:off x="5032231" y="3690116"/>
-            <a:ext cx="1" cy="136881"/>
+            <a:off x="1978869" y="1909706"/>
+            <a:ext cx="1314633" cy="1917291"/>
           </a:xfrm>
           <a:prstGeom prst="line">
             <a:avLst/>
           </a:prstGeom>
           <a:ln w="12700">
             <a:solidFill>
-              <a:schemeClr val="tx1"/>
+              <a:schemeClr val="tx2">
+                <a:lumMod val="60000"/>
+                <a:lumOff val="40000"/>
+              </a:schemeClr>
             </a:solidFill>
-            <a:prstDash val="dash"/>
+            <a:prstDash val="solid"/>
           </a:ln>
         </p:spPr>
         <p:style>
@@ -44435,33 +45415,182 @@
       </p:cxnSp>
       <p:cxnSp>
         <p:nvCxnSpPr>
-          <p:cNvPr id="85" name="직선 연결선 17">
-            <a:extLst>
-              <a:ext uri="{FF2B5EF4-FFF2-40B4-BE49-F238E27FC236}">
-                <a16:creationId xmlns:a16="http://schemas.microsoft.com/office/drawing/2014/main" id="{5CA1D19C-FEF5-11C4-78E2-4E73E38C8101}"/>
+          <p:cNvPr id="154" name="직선 연결선 17">
+            <a:extLst>
+              <a:ext uri="{FF2B5EF4-FFF2-40B4-BE49-F238E27FC236}">
+                <a16:creationId xmlns:a16="http://schemas.microsoft.com/office/drawing/2014/main" id="{F5E3A352-920E-8E55-580A-30EA21403AC8}"/>
               </a:ext>
             </a:extLst>
           </p:cNvPr>
           <p:cNvCxnSpPr>
             <a:cxnSpLocks/>
-            <a:stCxn id="20" idx="2"/>
-            <a:endCxn id="18" idx="0"/>
+            <a:stCxn id="98" idx="2"/>
+            <a:endCxn id="20" idx="0"/>
           </p:cNvCxnSpPr>
           <p:nvPr/>
         </p:nvCxnSpPr>
         <p:spPr>
-          <a:xfrm>
-            <a:off x="5032231" y="4210225"/>
-            <a:ext cx="1" cy="133508"/>
+          <a:xfrm flipH="1">
+            <a:off x="3375177" y="1909706"/>
+            <a:ext cx="3608544" cy="1917291"/>
           </a:xfrm>
           <a:prstGeom prst="line">
             <a:avLst/>
           </a:prstGeom>
           <a:ln w="12700">
             <a:solidFill>
-              <a:schemeClr val="tx1"/>
+              <a:schemeClr val="tx2">
+                <a:lumMod val="60000"/>
+                <a:lumOff val="40000"/>
+              </a:schemeClr>
             </a:solidFill>
-            <a:prstDash val="dash"/>
+            <a:prstDash val="solid"/>
+          </a:ln>
+        </p:spPr>
+        <p:style>
+          <a:lnRef idx="1">
+            <a:schemeClr val="accent1"/>
+          </a:lnRef>
+          <a:fillRef idx="0">
+            <a:schemeClr val="accent1"/>
+          </a:fillRef>
+          <a:effectRef idx="0">
+            <a:schemeClr val="accent1"/>
+          </a:effectRef>
+          <a:fontRef idx="minor">
+            <a:schemeClr val="tx1"/>
+          </a:fontRef>
+        </p:style>
+      </p:cxnSp>
+      <p:cxnSp>
+        <p:nvCxnSpPr>
+          <p:cNvPr id="158" name="직선 연결선 17">
+            <a:extLst>
+              <a:ext uri="{FF2B5EF4-FFF2-40B4-BE49-F238E27FC236}">
+                <a16:creationId xmlns:a16="http://schemas.microsoft.com/office/drawing/2014/main" id="{F93B3923-4E0E-5AC6-4B24-D8522EBD3BD0}"/>
+              </a:ext>
+            </a:extLst>
+          </p:cNvPr>
+          <p:cNvCxnSpPr>
+            <a:cxnSpLocks/>
+            <a:stCxn id="43" idx="2"/>
+          </p:cNvCxnSpPr>
+          <p:nvPr/>
+        </p:nvCxnSpPr>
+        <p:spPr>
+          <a:xfrm flipH="1">
+            <a:off x="1505232" y="1909706"/>
+            <a:ext cx="2908417" cy="1397182"/>
+          </a:xfrm>
+          <a:prstGeom prst="line">
+            <a:avLst/>
+          </a:prstGeom>
+          <a:ln w="12700">
+            <a:solidFill>
+              <a:schemeClr val="accent2">
+                <a:lumMod val="60000"/>
+                <a:lumOff val="40000"/>
+              </a:schemeClr>
+            </a:solidFill>
+            <a:prstDash val="solid"/>
+          </a:ln>
+        </p:spPr>
+        <p:style>
+          <a:lnRef idx="1">
+            <a:schemeClr val="accent1"/>
+          </a:lnRef>
+          <a:fillRef idx="0">
+            <a:schemeClr val="accent1"/>
+          </a:fillRef>
+          <a:effectRef idx="0">
+            <a:schemeClr val="accent1"/>
+          </a:effectRef>
+          <a:fontRef idx="minor">
+            <a:schemeClr val="tx1"/>
+          </a:fontRef>
+        </p:style>
+      </p:cxnSp>
+      <p:cxnSp>
+        <p:nvCxnSpPr>
+          <p:cNvPr id="161" name="직선 연결선 17">
+            <a:extLst>
+              <a:ext uri="{FF2B5EF4-FFF2-40B4-BE49-F238E27FC236}">
+                <a16:creationId xmlns:a16="http://schemas.microsoft.com/office/drawing/2014/main" id="{35DD2D09-A247-1B17-8C4E-72F2D1D77C1B}"/>
+              </a:ext>
+            </a:extLst>
+          </p:cNvPr>
+          <p:cNvCxnSpPr>
+            <a:cxnSpLocks/>
+            <a:stCxn id="44" idx="2"/>
+            <a:endCxn id="15" idx="0"/>
+          </p:cNvCxnSpPr>
+          <p:nvPr/>
+        </p:nvCxnSpPr>
+        <p:spPr>
+          <a:xfrm flipH="1">
+            <a:off x="2450993" y="1909706"/>
+            <a:ext cx="3078701" cy="1397182"/>
+          </a:xfrm>
+          <a:prstGeom prst="line">
+            <a:avLst/>
+          </a:prstGeom>
+          <a:ln w="12700">
+            <a:solidFill>
+              <a:schemeClr val="accent2">
+                <a:lumMod val="60000"/>
+                <a:lumOff val="40000"/>
+              </a:schemeClr>
+            </a:solidFill>
+            <a:prstDash val="solid"/>
+          </a:ln>
+        </p:spPr>
+        <p:style>
+          <a:lnRef idx="1">
+            <a:schemeClr val="accent1"/>
+          </a:lnRef>
+          <a:fillRef idx="0">
+            <a:schemeClr val="accent1"/>
+          </a:fillRef>
+          <a:effectRef idx="0">
+            <a:schemeClr val="accent1"/>
+          </a:effectRef>
+          <a:fontRef idx="minor">
+            <a:schemeClr val="tx1"/>
+          </a:fontRef>
+        </p:style>
+      </p:cxnSp>
+      <p:cxnSp>
+        <p:nvCxnSpPr>
+          <p:cNvPr id="164" name="직선 연결선 17">
+            <a:extLst>
+              <a:ext uri="{FF2B5EF4-FFF2-40B4-BE49-F238E27FC236}">
+                <a16:creationId xmlns:a16="http://schemas.microsoft.com/office/drawing/2014/main" id="{5E8578DB-D57F-F2C4-84FB-F2B8B3618613}"/>
+              </a:ext>
+            </a:extLst>
+          </p:cNvPr>
+          <p:cNvCxnSpPr>
+            <a:cxnSpLocks/>
+            <a:stCxn id="102" idx="2"/>
+            <a:endCxn id="19" idx="0"/>
+          </p:cNvCxnSpPr>
+          <p:nvPr/>
+        </p:nvCxnSpPr>
+        <p:spPr>
+          <a:xfrm flipH="1">
+            <a:off x="3375178" y="1909706"/>
+            <a:ext cx="4718733" cy="1397182"/>
+          </a:xfrm>
+          <a:prstGeom prst="line">
+            <a:avLst/>
+          </a:prstGeom>
+          <a:ln w="12700">
+            <a:solidFill>
+              <a:schemeClr val="accent2">
+                <a:lumMod val="60000"/>
+                <a:lumOff val="40000"/>
+              </a:schemeClr>
+            </a:solidFill>
+            <a:prstDash val="solid"/>
           </a:ln>
         </p:spPr>
         <p:style>

--- a/content/docs/theory-analysis/kubernetes-nvidia-device-plugin/images/images.pptx
+++ b/content/docs/theory-analysis/kubernetes-nvidia-device-plugin/images/images.pptx
@@ -50874,7 +50874,7 @@
             <a:pPr algn="ctr"/>
             <a:r>
               <a:rPr lang="en-US" altLang="ko-KR" sz="1000" b="1"/>
-              <a:t>Pod A</a:t>
+              <a:t>Pod C</a:t>
             </a:r>
             <a:endParaRPr lang="ko-KR" altLang="en-US" sz="1000" b="1" dirty="0">
               <a:solidFill>
@@ -50931,7 +50931,7 @@
             <a:pPr algn="ctr"/>
             <a:r>
               <a:rPr lang="en-US" altLang="ko-KR" sz="1000" b="1"/>
-              <a:t>Container A</a:t>
+              <a:t>Container C</a:t>
             </a:r>
             <a:endParaRPr lang="ko-KR" altLang="en-US" sz="1000" b="1" dirty="0">
               <a:solidFill>
